--- a/ground-vehicle/docs/courses/beginner-ps3/l2_motor_control.pptx
+++ b/ground-vehicle/docs/courses/beginner-ps3/l2_motor_control.pptx
@@ -28,6 +28,9 @@
     <p:sldId id="276" r:id="rId27"/>
     <p:sldId id="277" r:id="rId28"/>
     <p:sldId id="278" r:id="rId29"/>
+    <p:sldId id="279" r:id="rId30"/>
+    <p:sldId id="280" r:id="rId31"/>
+    <p:sldId id="281" r:id="rId32"/>
   </p:sldIdLst>
   <p:sldSz cx="12191695" cy="6858000" type="screen4x3"/>
   <p:notesSz cx="6858000" cy="9144000"/>
@@ -3154,267 +3157,9 @@
           </a:p>
         </p:txBody>
       </p:sp>
-      <p:sp>
-        <p:nvSpPr>
-          <p:cNvPr id="3" name="TextBox 2"/>
-          <p:cNvSpPr txBox="1"/>
-          <p:nvPr/>
-        </p:nvSpPr>
-        <p:spPr>
-          <a:xfrm>
-            <a:off x="502920" y="1051560"/>
-            <a:ext cx="6492240" cy="365760"/>
-          </a:xfrm>
-          <a:prstGeom prst="rect">
-            <a:avLst/>
-          </a:prstGeom>
-          <a:noFill/>
-        </p:spPr>
-        <p:txBody>
-          <a:bodyPr wrap="square" lIns="0" tIns="0" rIns="0" bIns="0">
-            <a:spAutoFit/>
-          </a:bodyPr>
-          <a:lstStyle/>
-          <a:p>
-            <a:pPr algn="l">
-              <a:lnSpc>
-                <a:spcPct val="100000"/>
-              </a:lnSpc>
-              <a:spcAft>
-                <a:spcPts val="0"/>
-              </a:spcAft>
-              <a:defRPr sz="1600" b="1">
-                <a:solidFill>
-                  <a:srgbClr val="0E7C86"/>
-                </a:solidFill>
-                <a:latin typeface="Calibri"/>
-              </a:defRPr>
-            </a:pPr>
-            <a:r>
-              <a:rPr sz="1600" b="1">
-                <a:solidFill>
-                  <a:srgbClr val="0E7C86"/>
-                </a:solidFill>
-                <a:latin typeface="Calibri"/>
-              </a:rPr>
-              <a:t>LESSON 2</a:t>
-            </a:r>
-          </a:p>
-        </p:txBody>
-      </p:sp>
-      <p:sp>
-        <p:nvSpPr>
-          <p:cNvPr id="4" name="TextBox 3"/>
-          <p:cNvSpPr txBox="1"/>
-          <p:nvPr/>
-        </p:nvSpPr>
-        <p:spPr>
-          <a:xfrm>
-            <a:off x="502920" y="1481328"/>
-            <a:ext cx="6492240" cy="1554480"/>
-          </a:xfrm>
-          <a:prstGeom prst="rect">
-            <a:avLst/>
-          </a:prstGeom>
-          <a:noFill/>
-        </p:spPr>
-        <p:txBody>
-          <a:bodyPr wrap="square" lIns="0" tIns="0" rIns="0" bIns="0">
-            <a:spAutoFit/>
-          </a:bodyPr>
-          <a:lstStyle/>
-          <a:p>
-            <a:pPr algn="l">
-              <a:lnSpc>
-                <a:spcPct val="95000"/>
-              </a:lnSpc>
-              <a:spcAft>
-                <a:spcPts val="0"/>
-              </a:spcAft>
-              <a:defRPr sz="4000" b="1">
-                <a:solidFill>
-                  <a:srgbClr val="1F3A5F"/>
-                </a:solidFill>
-                <a:latin typeface="Calibri"/>
-              </a:defRPr>
-            </a:pPr>
-            <a:r>
-              <a:rPr sz="4000" b="1">
-                <a:solidFill>
-                  <a:srgbClr val="1F3A5F"/>
-                </a:solidFill>
-                <a:latin typeface="Calibri"/>
-              </a:rPr>
-              <a:t>Motor Control</a:t>
-            </a:r>
-          </a:p>
-        </p:txBody>
-      </p:sp>
-      <p:sp>
-        <p:nvSpPr>
-          <p:cNvPr id="5" name="TextBox 4"/>
-          <p:cNvSpPr txBox="1"/>
-          <p:nvPr/>
-        </p:nvSpPr>
-        <p:spPr>
-          <a:xfrm>
-            <a:off x="502920" y="3154680"/>
-            <a:ext cx="6492240" cy="960120"/>
-          </a:xfrm>
-          <a:prstGeom prst="rect">
-            <a:avLst/>
-          </a:prstGeom>
-          <a:noFill/>
-        </p:spPr>
-        <p:txBody>
-          <a:bodyPr wrap="square" lIns="0" tIns="0" rIns="0" bIns="0">
-            <a:spAutoFit/>
-          </a:bodyPr>
-          <a:lstStyle/>
-          <a:p>
-            <a:pPr algn="l">
-              <a:lnSpc>
-                <a:spcPct val="100000"/>
-              </a:lnSpc>
-              <a:spcAft>
-                <a:spcPts val="0"/>
-              </a:spcAft>
-              <a:defRPr sz="1700" b="0">
-                <a:solidFill>
-                  <a:srgbClr val="222222"/>
-                </a:solidFill>
-                <a:latin typeface="Calibri"/>
-              </a:defRPr>
-            </a:pPr>
-            <a:r>
-              <a:rPr sz="1700" b="0">
-                <a:solidFill>
-                  <a:srgbClr val="222222"/>
-                </a:solidFill>
-                <a:latin typeface="Calibri"/>
-              </a:rPr>
-              <a:t>H-bridges, pulse width modulation, tank steering, and driving a square you worked out on paper.</a:t>
-            </a:r>
-          </a:p>
-        </p:txBody>
-      </p:sp>
-      <p:sp>
-        <p:nvSpPr>
-          <p:cNvPr id="6" name="TextBox 5"/>
-          <p:cNvSpPr txBox="1"/>
-          <p:nvPr/>
-        </p:nvSpPr>
-        <p:spPr>
-          <a:xfrm>
-            <a:off x="502920" y="4224528"/>
-            <a:ext cx="6492240" cy="1371600"/>
-          </a:xfrm>
-          <a:prstGeom prst="rect">
-            <a:avLst/>
-          </a:prstGeom>
-          <a:noFill/>
-        </p:spPr>
-        <p:txBody>
-          <a:bodyPr wrap="square" lIns="0" tIns="0" rIns="0" bIns="0">
-            <a:spAutoFit/>
-          </a:bodyPr>
-          <a:lstStyle/>
-          <a:p>
-            <a:pPr algn="l">
-              <a:lnSpc>
-                <a:spcPct val="100000"/>
-              </a:lnSpc>
-              <a:spcAft>
-                <a:spcPts val="200"/>
-              </a:spcAft>
-              <a:defRPr sz="1300" b="0">
-                <a:solidFill>
-                  <a:srgbClr val="666666"/>
-                </a:solidFill>
-                <a:latin typeface="Calibri"/>
-              </a:defRPr>
-            </a:pPr>
-            <a:r>
-              <a:rPr sz="1300" b="0">
-                <a:solidFill>
-                  <a:srgbClr val="666666"/>
-                </a:solidFill>
-                <a:latin typeface="Calibri"/>
-              </a:rPr>
-              <a:t>Porpoise Robotics  -  porpoiserobotics.org</a:t>
-            </a:r>
-          </a:p>
-          <a:p>
-            <a:pPr algn="l">
-              <a:lnSpc>
-                <a:spcPct val="100000"/>
-              </a:lnSpc>
-              <a:spcAft>
-                <a:spcPts val="200"/>
-              </a:spcAft>
-              <a:defRPr sz="1300" b="0">
-                <a:solidFill>
-                  <a:srgbClr val="666666"/>
-                </a:solidFill>
-                <a:latin typeface="Calibri"/>
-              </a:defRPr>
-            </a:pPr>
-            <a:r>
-              <a:rPr sz="1300" b="0">
-                <a:solidFill>
-                  <a:srgbClr val="666666"/>
-                </a:solidFill>
-                <a:latin typeface="Calibri"/>
-              </a:rPr>
-              <a:t>Kevin P. Bowen, President  -  kbowen6@icloud.com</a:t>
-            </a:r>
-          </a:p>
-          <a:p>
-            <a:pPr algn="l">
-              <a:lnSpc>
-                <a:spcPct val="100000"/>
-              </a:lnSpc>
-              <a:spcAft>
-                <a:spcPts val="200"/>
-              </a:spcAft>
-              <a:defRPr sz="1300" b="0">
-                <a:solidFill>
-                  <a:srgbClr val="666666"/>
-                </a:solidFill>
-                <a:latin typeface="Calibri"/>
-              </a:defRPr>
-            </a:pPr>
-          </a:p>
-          <a:p>
-            <a:pPr algn="l">
-              <a:lnSpc>
-                <a:spcPct val="100000"/>
-              </a:lnSpc>
-              <a:spcAft>
-                <a:spcPts val="200"/>
-              </a:spcAft>
-              <a:defRPr sz="1300" b="0">
-                <a:solidFill>
-                  <a:srgbClr val="666666"/>
-                </a:solidFill>
-                <a:latin typeface="Calibri"/>
-              </a:defRPr>
-            </a:pPr>
-            <a:r>
-              <a:rPr sz="1300" b="0">
-                <a:solidFill>
-                  <a:srgbClr val="666666"/>
-                </a:solidFill>
-                <a:latin typeface="Calibri"/>
-              </a:rPr>
-              <a:t>Three hours.  Wheels off the ground until told otherwise.</a:t>
-            </a:r>
-          </a:p>
-        </p:txBody>
-      </p:sp>
       <p:pic>
         <p:nvPicPr>
-          <p:cNvPr id="7" name="Picture 6" descr="vehicle-top-plate-esp32.jpg"/>
+          <p:cNvPr id="3" name="Picture 2" descr="porpoise-logo.png"/>
           <p:cNvPicPr>
             <a:picLocks noChangeAspect="1"/>
           </p:cNvPicPr>
@@ -3428,6 +3173,288 @@
         </p:blipFill>
         <p:spPr>
           <a:xfrm>
+            <a:off x="10922762" y="457200"/>
+            <a:ext cx="766013" cy="777240"/>
+          </a:xfrm>
+          <a:prstGeom prst="rect">
+            <a:avLst/>
+          </a:prstGeom>
+        </p:spPr>
+      </p:pic>
+      <p:sp>
+        <p:nvSpPr>
+          <p:cNvPr id="4" name="TextBox 3"/>
+          <p:cNvSpPr txBox="1"/>
+          <p:nvPr/>
+        </p:nvSpPr>
+        <p:spPr>
+          <a:xfrm>
+            <a:off x="502920" y="1051560"/>
+            <a:ext cx="6492240" cy="365760"/>
+          </a:xfrm>
+          <a:prstGeom prst="rect">
+            <a:avLst/>
+          </a:prstGeom>
+          <a:noFill/>
+        </p:spPr>
+        <p:txBody>
+          <a:bodyPr wrap="square" lIns="0" tIns="0" rIns="0" bIns="0">
+            <a:spAutoFit/>
+          </a:bodyPr>
+          <a:lstStyle/>
+          <a:p>
+            <a:pPr algn="l">
+              <a:lnSpc>
+                <a:spcPct val="100000"/>
+              </a:lnSpc>
+              <a:spcAft>
+                <a:spcPts val="0"/>
+              </a:spcAft>
+              <a:defRPr sz="1600" b="1">
+                <a:solidFill>
+                  <a:srgbClr val="0E7C86"/>
+                </a:solidFill>
+                <a:latin typeface="Calibri"/>
+              </a:defRPr>
+            </a:pPr>
+            <a:r>
+              <a:rPr sz="1600" b="1">
+                <a:solidFill>
+                  <a:srgbClr val="0E7C86"/>
+                </a:solidFill>
+                <a:latin typeface="Calibri"/>
+              </a:rPr>
+              <a:t>LESSON 2</a:t>
+            </a:r>
+          </a:p>
+        </p:txBody>
+      </p:sp>
+      <p:sp>
+        <p:nvSpPr>
+          <p:cNvPr id="5" name="TextBox 4"/>
+          <p:cNvSpPr txBox="1"/>
+          <p:nvPr/>
+        </p:nvSpPr>
+        <p:spPr>
+          <a:xfrm>
+            <a:off x="502920" y="1481328"/>
+            <a:ext cx="6492240" cy="1554480"/>
+          </a:xfrm>
+          <a:prstGeom prst="rect">
+            <a:avLst/>
+          </a:prstGeom>
+          <a:noFill/>
+        </p:spPr>
+        <p:txBody>
+          <a:bodyPr wrap="square" lIns="0" tIns="0" rIns="0" bIns="0">
+            <a:spAutoFit/>
+          </a:bodyPr>
+          <a:lstStyle/>
+          <a:p>
+            <a:pPr algn="l">
+              <a:lnSpc>
+                <a:spcPct val="95000"/>
+              </a:lnSpc>
+              <a:spcAft>
+                <a:spcPts val="0"/>
+              </a:spcAft>
+              <a:defRPr sz="4000" b="1">
+                <a:solidFill>
+                  <a:srgbClr val="1F3A5F"/>
+                </a:solidFill>
+                <a:latin typeface="Calibri"/>
+              </a:defRPr>
+            </a:pPr>
+            <a:r>
+              <a:rPr sz="4000" b="1">
+                <a:solidFill>
+                  <a:srgbClr val="1F3A5F"/>
+                </a:solidFill>
+                <a:latin typeface="Calibri"/>
+              </a:rPr>
+              <a:t>Motor Control</a:t>
+            </a:r>
+          </a:p>
+        </p:txBody>
+      </p:sp>
+      <p:sp>
+        <p:nvSpPr>
+          <p:cNvPr id="6" name="TextBox 5"/>
+          <p:cNvSpPr txBox="1"/>
+          <p:nvPr/>
+        </p:nvSpPr>
+        <p:spPr>
+          <a:xfrm>
+            <a:off x="502920" y="3154680"/>
+            <a:ext cx="6492240" cy="960120"/>
+          </a:xfrm>
+          <a:prstGeom prst="rect">
+            <a:avLst/>
+          </a:prstGeom>
+          <a:noFill/>
+        </p:spPr>
+        <p:txBody>
+          <a:bodyPr wrap="square" lIns="0" tIns="0" rIns="0" bIns="0">
+            <a:spAutoFit/>
+          </a:bodyPr>
+          <a:lstStyle/>
+          <a:p>
+            <a:pPr algn="l">
+              <a:lnSpc>
+                <a:spcPct val="100000"/>
+              </a:lnSpc>
+              <a:spcAft>
+                <a:spcPts val="0"/>
+              </a:spcAft>
+              <a:defRPr sz="1700" b="0">
+                <a:solidFill>
+                  <a:srgbClr val="222222"/>
+                </a:solidFill>
+                <a:latin typeface="Calibri"/>
+              </a:defRPr>
+            </a:pPr>
+            <a:r>
+              <a:rPr sz="1700" b="0">
+                <a:solidFill>
+                  <a:srgbClr val="222222"/>
+                </a:solidFill>
+                <a:latin typeface="Calibri"/>
+              </a:rPr>
+              <a:t>H-bridges, pulse width modulation, tank steering, and driving a square you worked out on paper.</a:t>
+            </a:r>
+          </a:p>
+        </p:txBody>
+      </p:sp>
+      <p:sp>
+        <p:nvSpPr>
+          <p:cNvPr id="7" name="TextBox 6"/>
+          <p:cNvSpPr txBox="1"/>
+          <p:nvPr/>
+        </p:nvSpPr>
+        <p:spPr>
+          <a:xfrm>
+            <a:off x="502920" y="4224528"/>
+            <a:ext cx="6492240" cy="1371600"/>
+          </a:xfrm>
+          <a:prstGeom prst="rect">
+            <a:avLst/>
+          </a:prstGeom>
+          <a:noFill/>
+        </p:spPr>
+        <p:txBody>
+          <a:bodyPr wrap="square" lIns="0" tIns="0" rIns="0" bIns="0">
+            <a:spAutoFit/>
+          </a:bodyPr>
+          <a:lstStyle/>
+          <a:p>
+            <a:pPr algn="l">
+              <a:lnSpc>
+                <a:spcPct val="100000"/>
+              </a:lnSpc>
+              <a:spcAft>
+                <a:spcPts val="200"/>
+              </a:spcAft>
+              <a:defRPr sz="1300" b="0">
+                <a:solidFill>
+                  <a:srgbClr val="666666"/>
+                </a:solidFill>
+                <a:latin typeface="Calibri"/>
+              </a:defRPr>
+            </a:pPr>
+            <a:r>
+              <a:rPr sz="1300" b="0">
+                <a:solidFill>
+                  <a:srgbClr val="666666"/>
+                </a:solidFill>
+                <a:latin typeface="Calibri"/>
+              </a:rPr>
+              <a:t>Porpoise Robotics  -  porpoiserobotics.org</a:t>
+            </a:r>
+          </a:p>
+          <a:p>
+            <a:pPr algn="l">
+              <a:lnSpc>
+                <a:spcPct val="100000"/>
+              </a:lnSpc>
+              <a:spcAft>
+                <a:spcPts val="200"/>
+              </a:spcAft>
+              <a:defRPr sz="1300" b="0">
+                <a:solidFill>
+                  <a:srgbClr val="666666"/>
+                </a:solidFill>
+                <a:latin typeface="Calibri"/>
+              </a:defRPr>
+            </a:pPr>
+            <a:r>
+              <a:rPr sz="1300" b="0">
+                <a:solidFill>
+                  <a:srgbClr val="666666"/>
+                </a:solidFill>
+                <a:latin typeface="Calibri"/>
+              </a:rPr>
+              <a:t>Kevin P. Bowen, President  -  kbowen6@icloud.com</a:t>
+            </a:r>
+          </a:p>
+          <a:p>
+            <a:pPr algn="l">
+              <a:lnSpc>
+                <a:spcPct val="100000"/>
+              </a:lnSpc>
+              <a:spcAft>
+                <a:spcPts val="200"/>
+              </a:spcAft>
+              <a:defRPr sz="1300" b="0">
+                <a:solidFill>
+                  <a:srgbClr val="666666"/>
+                </a:solidFill>
+                <a:latin typeface="Calibri"/>
+              </a:defRPr>
+            </a:pPr>
+          </a:p>
+          <a:p>
+            <a:pPr algn="l">
+              <a:lnSpc>
+                <a:spcPct val="100000"/>
+              </a:lnSpc>
+              <a:spcAft>
+                <a:spcPts val="200"/>
+              </a:spcAft>
+              <a:defRPr sz="1300" b="0">
+                <a:solidFill>
+                  <a:srgbClr val="666666"/>
+                </a:solidFill>
+                <a:latin typeface="Calibri"/>
+              </a:defRPr>
+            </a:pPr>
+            <a:r>
+              <a:rPr sz="1300" b="0">
+                <a:solidFill>
+                  <a:srgbClr val="666666"/>
+                </a:solidFill>
+                <a:latin typeface="Calibri"/>
+              </a:rPr>
+              <a:t>Three hours.  Wheels off the ground until told otherwise.</a:t>
+            </a:r>
+          </a:p>
+        </p:txBody>
+      </p:sp>
+      <p:pic>
+        <p:nvPicPr>
+          <p:cNvPr id="8" name="Picture 7" descr="vehicle-top-plate-esp32.jpg"/>
+          <p:cNvPicPr>
+            <a:picLocks noChangeAspect="1"/>
+          </p:cNvPicPr>
+          <p:nvPr/>
+        </p:nvPicPr>
+        <p:blipFill>
+          <a:blip r:embed="rId3"/>
+          <a:stretch>
+            <a:fillRect/>
+          </a:stretch>
+        </p:blipFill>
+        <p:spPr>
+          <a:xfrm>
             <a:off x="7223760" y="1371600"/>
             <a:ext cx="4480560" cy="3718637"/>
           </a:xfrm>
@@ -3438,7 +3465,7 @@
       </p:pic>
       <p:sp>
         <p:nvSpPr>
-          <p:cNvPr id="8" name="TextBox 7"/>
+          <p:cNvPr id="9" name="TextBox 8"/>
           <p:cNvSpPr txBox="1"/>
           <p:nvPr/>
         </p:nvSpPr>
@@ -6314,31 +6341,6 @@
               <a:t>About 60 minutes</a:t>
             </a:r>
           </a:p>
-          <a:p>
-            <a:pPr algn="l">
-              <a:lnSpc>
-                <a:spcPct val="100000"/>
-              </a:lnSpc>
-              <a:spcAft>
-                <a:spcPts val="400"/>
-              </a:spcAft>
-              <a:defRPr sz="1600" b="0">
-                <a:solidFill>
-                  <a:srgbClr val="666666"/>
-                </a:solidFill>
-                <a:latin typeface="Calibri"/>
-              </a:defRPr>
-            </a:pPr>
-            <a:r>
-              <a:rPr sz="1600" b="0">
-                <a:solidFill>
-                  <a:srgbClr val="666666"/>
-                </a:solidFill>
-                <a:latin typeface="Calibri"/>
-              </a:rPr>
-              <a:t>About 60 minutes</a:t>
-            </a:r>
-          </a:p>
         </p:txBody>
       </p:sp>
     </p:spTree>
@@ -10235,7 +10237,7 @@
                 </a:solidFill>
                 <a:latin typeface="Calibri"/>
               </a:rPr>
-              <a:t>l2c_maneuver_square  -  the loop</a:t>
+              <a:t>The three kinds of loop in C</a:t>
             </a:r>
           </a:p>
         </p:txBody>
@@ -10389,7 +10391,7 @@
         <p:spPr>
           <a:xfrm>
             <a:off x="502920" y="1188720"/>
-            <a:ext cx="7047088" cy="274320"/>
+            <a:ext cx="11185855" cy="457200"/>
           </a:xfrm>
           <a:prstGeom prst="rect">
             <a:avLst/>
@@ -10409,35 +10411,334 @@
               <a:spcAft>
                 <a:spcPts val="300"/>
               </a:spcAft>
-              <a:defRPr sz="900" b="1">
-                <a:solidFill>
-                  <a:srgbClr val="0E7C86"/>
-                </a:solidFill>
-                <a:latin typeface="Consolas"/>
-              </a:defRPr>
-            </a:pPr>
-            <a:r>
-              <a:rPr sz="900" b="1">
-                <a:solidFill>
-                  <a:srgbClr val="0E7C86"/>
-                </a:solidFill>
-                <a:latin typeface="Consolas"/>
-              </a:rPr>
-              <a:t>l2c_maneuver_square.ino</a:t>
-            </a:r>
-          </a:p>
-        </p:txBody>
-      </p:sp>
-      <p:sp>
-        <p:nvSpPr>
-          <p:cNvPr id="7" name="Rounded Rectangle 6"/>
+              <a:defRPr sz="1300" b="0">
+                <a:solidFill>
+                  <a:srgbClr val="222222"/>
+                </a:solidFill>
+                <a:latin typeface="Calibri"/>
+              </a:defRPr>
+            </a:pPr>
+            <a:r>
+              <a:rPr sz="1300" b="0">
+                <a:solidFill>
+                  <a:srgbClr val="222222"/>
+                </a:solidFill>
+                <a:latin typeface="Calibri"/>
+              </a:rPr>
+              <a:t>You have been using for loops all lesson. There are two more, and between them they turn up in almost every program you will ever read.</a:t>
+            </a:r>
+          </a:p>
+        </p:txBody>
+      </p:sp>
+      <p:graphicFrame>
+        <p:nvGraphicFramePr>
+          <p:cNvPr id="7" name="Table 6"/>
+          <p:cNvGraphicFramePr>
+            <a:graphicFrameLocks noGrp="1"/>
+          </p:cNvGraphicFramePr>
+          <p:nvPr/>
+        </p:nvGraphicFramePr>
+        <p:xfrm>
+          <a:off x="502920" y="1691640"/>
+          <a:ext cx="11185854" cy="1638300"/>
+        </p:xfrm>
+        <a:graphic>
+          <a:graphicData uri="http://schemas.openxmlformats.org/drawingml/2006/table">
+            <a:tbl>
+              <a:tblPr firstRow="1" bandRow="1">
+                <a:tableStyleId>{5C22544A-7EE6-4342-B048-85BDC9FD1C3A}</a:tableStyleId>
+              </a:tblPr>
+              <a:tblGrid>
+                <a:gridCol w="1423654"/>
+                <a:gridCol w="2643929"/>
+                <a:gridCol w="7118271"/>
+              </a:tblGrid>
+              <a:tr h="409575">
+                <a:tc>
+                  <a:txBody>
+                    <a:bodyPr/>
+                    <a:lstStyle/>
+                    <a:p>
+                      <a:r>
+                        <a:rPr sz="1400" b="1">
+                          <a:solidFill>
+                            <a:srgbClr val="FFFFFF"/>
+                          </a:solidFill>
+                          <a:latin typeface="Calibri"/>
+                        </a:rPr>
+                        <a:t>Loop</a:t>
+                      </a:r>
+                    </a:p>
+                  </a:txBody>
+                  <a:tcPr marL="73152" marT="18288" marB="18288">
+                    <a:solidFill>
+                      <a:srgbClr val="1F3A5F"/>
+                    </a:solidFill>
+                  </a:tcPr>
+                </a:tc>
+                <a:tc>
+                  <a:txBody>
+                    <a:bodyPr/>
+                    <a:lstStyle/>
+                    <a:p>
+                      <a:r>
+                        <a:rPr sz="1400" b="1">
+                          <a:solidFill>
+                            <a:srgbClr val="FFFFFF"/>
+                          </a:solidFill>
+                          <a:latin typeface="Calibri"/>
+                        </a:rPr>
+                        <a:t>When the test happens</a:t>
+                      </a:r>
+                    </a:p>
+                  </a:txBody>
+                  <a:tcPr marL="73152" marT="18288" marB="18288">
+                    <a:solidFill>
+                      <a:srgbClr val="1F3A5F"/>
+                    </a:solidFill>
+                  </a:tcPr>
+                </a:tc>
+                <a:tc>
+                  <a:txBody>
+                    <a:bodyPr/>
+                    <a:lstStyle/>
+                    <a:p>
+                      <a:r>
+                        <a:rPr sz="1400" b="1">
+                          <a:solidFill>
+                            <a:srgbClr val="FFFFFF"/>
+                          </a:solidFill>
+                          <a:latin typeface="Calibri"/>
+                        </a:rPr>
+                        <a:t>Use it when</a:t>
+                      </a:r>
+                    </a:p>
+                  </a:txBody>
+                  <a:tcPr marL="73152" marT="18288" marB="18288">
+                    <a:solidFill>
+                      <a:srgbClr val="1F3A5F"/>
+                    </a:solidFill>
+                  </a:tcPr>
+                </a:tc>
+              </a:tr>
+              <a:tr h="409575">
+                <a:tc>
+                  <a:txBody>
+                    <a:bodyPr/>
+                    <a:lstStyle/>
+                    <a:p>
+                      <a:r>
+                        <a:rPr sz="1400">
+                          <a:solidFill>
+                            <a:srgbClr val="222222"/>
+                          </a:solidFill>
+                          <a:latin typeface="Calibri"/>
+                        </a:rPr>
+                        <a:t>for</a:t>
+                      </a:r>
+                    </a:p>
+                  </a:txBody>
+                  <a:tcPr marL="73152" marT="18288" marB="18288">
+                    <a:solidFill>
+                      <a:srgbClr val="FFFFFF"/>
+                    </a:solidFill>
+                  </a:tcPr>
+                </a:tc>
+                <a:tc>
+                  <a:txBody>
+                    <a:bodyPr/>
+                    <a:lstStyle/>
+                    <a:p>
+                      <a:r>
+                        <a:rPr sz="1400">
+                          <a:solidFill>
+                            <a:srgbClr val="222222"/>
+                          </a:solidFill>
+                          <a:latin typeface="Calibri"/>
+                        </a:rPr>
+                        <a:t>Before each pass</a:t>
+                      </a:r>
+                    </a:p>
+                  </a:txBody>
+                  <a:tcPr marL="73152" marT="18288" marB="18288">
+                    <a:solidFill>
+                      <a:srgbClr val="FFFFFF"/>
+                    </a:solidFill>
+                  </a:tcPr>
+                </a:tc>
+                <a:tc>
+                  <a:txBody>
+                    <a:bodyPr/>
+                    <a:lstStyle/>
+                    <a:p>
+                      <a:r>
+                        <a:rPr sz="1400">
+                          <a:solidFill>
+                            <a:srgbClr val="222222"/>
+                          </a:solidFill>
+                          <a:latin typeface="Calibri"/>
+                        </a:rPr>
+                        <a:t>You know how many times. Stepping through the 32 LEDs, or four sides of a square.</a:t>
+                      </a:r>
+                    </a:p>
+                  </a:txBody>
+                  <a:tcPr marL="73152" marT="18288" marB="18288">
+                    <a:solidFill>
+                      <a:srgbClr val="FFFFFF"/>
+                    </a:solidFill>
+                  </a:tcPr>
+                </a:tc>
+              </a:tr>
+              <a:tr h="409575">
+                <a:tc>
+                  <a:txBody>
+                    <a:bodyPr/>
+                    <a:lstStyle/>
+                    <a:p>
+                      <a:r>
+                        <a:rPr sz="1400">
+                          <a:solidFill>
+                            <a:srgbClr val="222222"/>
+                          </a:solidFill>
+                          <a:latin typeface="Calibri"/>
+                        </a:rPr>
+                        <a:t>while</a:t>
+                      </a:r>
+                    </a:p>
+                  </a:txBody>
+                  <a:tcPr marL="73152" marT="18288" marB="18288">
+                    <a:solidFill>
+                      <a:srgbClr val="EEF3F8"/>
+                    </a:solidFill>
+                  </a:tcPr>
+                </a:tc>
+                <a:tc>
+                  <a:txBody>
+                    <a:bodyPr/>
+                    <a:lstStyle/>
+                    <a:p>
+                      <a:r>
+                        <a:rPr sz="1400">
+                          <a:solidFill>
+                            <a:srgbClr val="222222"/>
+                          </a:solidFill>
+                          <a:latin typeface="Calibri"/>
+                        </a:rPr>
+                        <a:t>Before each pass</a:t>
+                      </a:r>
+                    </a:p>
+                  </a:txBody>
+                  <a:tcPr marL="73152" marT="18288" marB="18288">
+                    <a:solidFill>
+                      <a:srgbClr val="EEF3F8"/>
+                    </a:solidFill>
+                  </a:tcPr>
+                </a:tc>
+                <a:tc>
+                  <a:txBody>
+                    <a:bodyPr/>
+                    <a:lstStyle/>
+                    <a:p>
+                      <a:r>
+                        <a:rPr sz="1400">
+                          <a:solidFill>
+                            <a:srgbClr val="222222"/>
+                          </a:solidFill>
+                          <a:latin typeface="Calibri"/>
+                        </a:rPr>
+                        <a:t>You do not know how many times. It depends on a condition, and it might not run at all.</a:t>
+                      </a:r>
+                    </a:p>
+                  </a:txBody>
+                  <a:tcPr marL="73152" marT="18288" marB="18288">
+                    <a:solidFill>
+                      <a:srgbClr val="EEF3F8"/>
+                    </a:solidFill>
+                  </a:tcPr>
+                </a:tc>
+              </a:tr>
+              <a:tr h="409575">
+                <a:tc>
+                  <a:txBody>
+                    <a:bodyPr/>
+                    <a:lstStyle/>
+                    <a:p>
+                      <a:r>
+                        <a:rPr sz="1400">
+                          <a:solidFill>
+                            <a:srgbClr val="222222"/>
+                          </a:solidFill>
+                          <a:latin typeface="Calibri"/>
+                        </a:rPr>
+                        <a:t>do-while</a:t>
+                      </a:r>
+                    </a:p>
+                  </a:txBody>
+                  <a:tcPr marL="73152" marT="18288" marB="18288">
+                    <a:solidFill>
+                      <a:srgbClr val="FFFFFF"/>
+                    </a:solidFill>
+                  </a:tcPr>
+                </a:tc>
+                <a:tc>
+                  <a:txBody>
+                    <a:bodyPr/>
+                    <a:lstStyle/>
+                    <a:p>
+                      <a:r>
+                        <a:rPr sz="1400">
+                          <a:solidFill>
+                            <a:srgbClr val="222222"/>
+                          </a:solidFill>
+                          <a:latin typeface="Calibri"/>
+                        </a:rPr>
+                        <a:t>After each pass</a:t>
+                      </a:r>
+                    </a:p>
+                  </a:txBody>
+                  <a:tcPr marL="73152" marT="18288" marB="18288">
+                    <a:solidFill>
+                      <a:srgbClr val="FFFFFF"/>
+                    </a:solidFill>
+                  </a:tcPr>
+                </a:tc>
+                <a:tc>
+                  <a:txBody>
+                    <a:bodyPr/>
+                    <a:lstStyle/>
+                    <a:p>
+                      <a:r>
+                        <a:rPr sz="1400">
+                          <a:solidFill>
+                            <a:srgbClr val="222222"/>
+                          </a:solidFill>
+                          <a:latin typeface="Calibri"/>
+                        </a:rPr>
+                        <a:t>The body must run at least once, whatever the condition says.</a:t>
+                      </a:r>
+                    </a:p>
+                  </a:txBody>
+                  <a:tcPr marL="73152" marT="18288" marB="18288">
+                    <a:solidFill>
+                      <a:srgbClr val="FFFFFF"/>
+                    </a:solidFill>
+                  </a:tcPr>
+                </a:tc>
+              </a:tr>
+            </a:tbl>
+          </a:graphicData>
+        </a:graphic>
+      </p:graphicFrame>
+      <p:sp>
+        <p:nvSpPr>
+          <p:cNvPr id="8" name="Rounded Rectangle 7"/>
           <p:cNvSpPr/>
           <p:nvPr/>
         </p:nvSpPr>
         <p:spPr>
           <a:xfrm>
-            <a:off x="502920" y="1517904"/>
-            <a:ext cx="7047088" cy="4745736"/>
+            <a:off x="502920" y="5303520"/>
+            <a:ext cx="11185855" cy="960120"/>
           </a:xfrm>
           <a:prstGeom prst="roundRect">
             <a:avLst>
@@ -10445,11 +10746,11 @@
             </a:avLst>
           </a:prstGeom>
           <a:solidFill>
-            <a:srgbClr val="F4F6F8"/>
+            <a:srgbClr val="EEF3F8"/>
           </a:solidFill>
           <a:ln w="12700">
             <a:solidFill>
-              <a:srgbClr val="C8D2DE"/>
+              <a:srgbClr val="0E7C86"/>
             </a:solidFill>
           </a:ln>
           <a:effectLst/>
@@ -10469,415 +10770,27 @@
           </a:fontRef>
         </p:style>
         <p:txBody>
-          <a:bodyPr rtlCol="0" anchor="t" wrap="square" lIns="146304" tIns="91440" bIns="73152"/>
-          <a:lstStyle/>
-          <a:p>
-            <a:pPr algn="l">
-              <a:lnSpc>
-                <a:spcPct val="100000"/>
-              </a:lnSpc>
-              <a:spcAft>
-                <a:spcPts val="0"/>
-              </a:spcAft>
-              <a:defRPr sz="1400">
-                <a:latin typeface="Consolas"/>
-              </a:defRPr>
-            </a:pPr>
-            <a:r>
-              <a:rPr sz="1400">
-                <a:solidFill>
-                  <a:srgbClr val="222222"/>
-                </a:solidFill>
-                <a:latin typeface="Consolas"/>
-              </a:rPr>
-              <a:t>void loop() {</a:t>
-            </a:r>
-          </a:p>
-          <a:p>
-            <a:pPr algn="l">
-              <a:lnSpc>
-                <a:spcPct val="100000"/>
-              </a:lnSpc>
-              <a:spcAft>
-                <a:spcPts val="0"/>
-              </a:spcAft>
-              <a:defRPr sz="1400">
-                <a:latin typeface="Consolas"/>
-              </a:defRPr>
-            </a:pPr>
-            <a:r>
-              <a:rPr sz="1400">
-                <a:solidFill>
-                  <a:srgbClr val="666666"/>
-                </a:solidFill>
-                <a:latin typeface="Consolas"/>
-              </a:rPr>
-              <a:t>  // Four sides and four corners makes a square.</a:t>
-            </a:r>
-          </a:p>
-          <a:p>
-            <a:pPr algn="l">
-              <a:lnSpc>
-                <a:spcPct val="100000"/>
-              </a:lnSpc>
-              <a:spcAft>
-                <a:spcPts val="0"/>
-              </a:spcAft>
-              <a:defRPr sz="1400">
-                <a:latin typeface="Consolas"/>
-              </a:defRPr>
-            </a:pPr>
-            <a:r>
-              <a:rPr sz="1400">
-                <a:solidFill>
-                  <a:srgbClr val="222222"/>
-                </a:solidFill>
-                <a:latin typeface="Consolas"/>
-              </a:rPr>
-              <a:t>  for (int corner = 0; corner &lt; 4; corner++) {</a:t>
-            </a:r>
-          </a:p>
-          <a:p>
-            <a:pPr algn="l">
-              <a:lnSpc>
-                <a:spcPct val="100000"/>
-              </a:lnSpc>
-              <a:spcAft>
-                <a:spcPts val="0"/>
-              </a:spcAft>
-              <a:defRPr sz="1400">
-                <a:latin typeface="Consolas"/>
-              </a:defRPr>
-            </a:pPr>
-            <a:r>
-              <a:rPr sz="1400">
-                <a:solidFill>
-                  <a:srgbClr val="222222"/>
-                </a:solidFill>
-                <a:latin typeface="Consolas"/>
-              </a:rPr>
-              <a:t>    goForward();</a:t>
-            </a:r>
-          </a:p>
-          <a:p>
-            <a:pPr algn="l">
-              <a:lnSpc>
-                <a:spcPct val="100000"/>
-              </a:lnSpc>
-              <a:spcAft>
-                <a:spcPts val="0"/>
-              </a:spcAft>
-              <a:defRPr sz="1400">
-                <a:latin typeface="Consolas"/>
-              </a:defRPr>
-            </a:pPr>
-            <a:r>
-              <a:rPr sz="1400" b="1">
+          <a:bodyPr rtlCol="0" anchor="ctr" wrap="square" lIns="164592" rIns="164592" tIns="73152" bIns="73152"/>
+          <a:lstStyle/>
+          <a:p>
+            <a:pPr algn="l"/>
+            <a:r>
+              <a:rPr sz="1300" b="1">
                 <a:solidFill>
                   <a:srgbClr val="0E7C86"/>
                 </a:solidFill>
-                <a:latin typeface="Consolas"/>
-              </a:rPr>
-              <a:t>    delay(FORWARD_MS);</a:t>
-            </a:r>
-          </a:p>
-          <a:p>
-            <a:pPr algn="l">
-              <a:lnSpc>
-                <a:spcPct val="100000"/>
-              </a:lnSpc>
-              <a:spcAft>
-                <a:spcPts val="0"/>
-              </a:spcAft>
-              <a:defRPr sz="1400">
-                <a:latin typeface="Consolas"/>
-              </a:defRPr>
-            </a:pPr>
-            <a:r>
-              <a:rPr sz="1400">
-                <a:solidFill>
-                  <a:srgbClr val="222222"/>
-                </a:solidFill>
-                <a:latin typeface="Consolas"/>
-              </a:rPr>
-              <a:t> </a:t>
-            </a:r>
-          </a:p>
-          <a:p>
-            <a:pPr algn="l">
-              <a:lnSpc>
-                <a:spcPct val="100000"/>
-              </a:lnSpc>
-              <a:spcAft>
-                <a:spcPts val="0"/>
-              </a:spcAft>
-              <a:defRPr sz="1400">
-                <a:latin typeface="Consolas"/>
-              </a:defRPr>
-            </a:pPr>
-            <a:r>
-              <a:rPr sz="1400">
-                <a:solidFill>
-                  <a:srgbClr val="222222"/>
-                </a:solidFill>
-                <a:latin typeface="Consolas"/>
-              </a:rPr>
-              <a:t>    spinRight();</a:t>
-            </a:r>
-          </a:p>
-          <a:p>
-            <a:pPr algn="l">
-              <a:lnSpc>
-                <a:spcPct val="100000"/>
-              </a:lnSpc>
-              <a:spcAft>
-                <a:spcPts val="0"/>
-              </a:spcAft>
-              <a:defRPr sz="1400">
-                <a:latin typeface="Consolas"/>
-              </a:defRPr>
-            </a:pPr>
-            <a:r>
-              <a:rPr sz="1400" b="1">
-                <a:solidFill>
-                  <a:srgbClr val="0E7C86"/>
-                </a:solidFill>
-                <a:latin typeface="Consolas"/>
-              </a:rPr>
-              <a:t>    delay(TURN_MS);</a:t>
-            </a:r>
-          </a:p>
-          <a:p>
-            <a:pPr algn="l">
-              <a:lnSpc>
-                <a:spcPct val="100000"/>
-              </a:lnSpc>
-              <a:spcAft>
-                <a:spcPts val="0"/>
-              </a:spcAft>
-              <a:defRPr sz="1400">
-                <a:latin typeface="Consolas"/>
-              </a:defRPr>
-            </a:pPr>
-            <a:r>
-              <a:rPr sz="1400">
-                <a:solidFill>
-                  <a:srgbClr val="222222"/>
-                </a:solidFill>
-                <a:latin typeface="Consolas"/>
-              </a:rPr>
-              <a:t>  }</a:t>
-            </a:r>
-          </a:p>
-          <a:p>
-            <a:pPr algn="l">
-              <a:lnSpc>
-                <a:spcPct val="100000"/>
-              </a:lnSpc>
-              <a:spcAft>
-                <a:spcPts val="0"/>
-              </a:spcAft>
-              <a:defRPr sz="1400">
-                <a:latin typeface="Consolas"/>
-              </a:defRPr>
-            </a:pPr>
-            <a:r>
-              <a:rPr sz="1400">
-                <a:solidFill>
-                  <a:srgbClr val="222222"/>
-                </a:solidFill>
-                <a:latin typeface="Consolas"/>
-              </a:rPr>
-              <a:t> </a:t>
-            </a:r>
-          </a:p>
-          <a:p>
-            <a:pPr algn="l">
-              <a:lnSpc>
-                <a:spcPct val="100000"/>
-              </a:lnSpc>
-              <a:spcAft>
-                <a:spcPts val="0"/>
-              </a:spcAft>
-              <a:defRPr sz="1400">
-                <a:latin typeface="Consolas"/>
-              </a:defRPr>
-            </a:pPr>
-            <a:r>
-              <a:rPr sz="1400">
-                <a:solidFill>
-                  <a:srgbClr val="222222"/>
-                </a:solidFill>
-                <a:latin typeface="Consolas"/>
-              </a:rPr>
-              <a:t>  stopMoving();</a:t>
-            </a:r>
-          </a:p>
-          <a:p>
-            <a:pPr algn="l">
-              <a:lnSpc>
-                <a:spcPct val="100000"/>
-              </a:lnSpc>
-              <a:spcAft>
-                <a:spcPts val="0"/>
-              </a:spcAft>
-              <a:defRPr sz="1400">
-                <a:latin typeface="Consolas"/>
-              </a:defRPr>
-            </a:pPr>
-            <a:r>
-              <a:rPr sz="1400">
-                <a:solidFill>
-                  <a:srgbClr val="222222"/>
-                </a:solidFill>
-                <a:latin typeface="Consolas"/>
-              </a:rPr>
-              <a:t>  delay(20000);   // pick your vehicle up</a:t>
-            </a:r>
-          </a:p>
-          <a:p>
-            <a:pPr algn="l">
-              <a:lnSpc>
-                <a:spcPct val="100000"/>
-              </a:lnSpc>
-              <a:spcAft>
-                <a:spcPts val="0"/>
-              </a:spcAft>
-              <a:defRPr sz="1400">
-                <a:latin typeface="Consolas"/>
-              </a:defRPr>
-            </a:pPr>
-            <a:r>
-              <a:rPr sz="1400">
-                <a:solidFill>
-                  <a:srgbClr val="222222"/>
-                </a:solidFill>
-                <a:latin typeface="Consolas"/>
-              </a:rPr>
-              <a:t>}</a:t>
-            </a:r>
-          </a:p>
-        </p:txBody>
-      </p:sp>
-      <p:sp>
-        <p:nvSpPr>
-          <p:cNvPr id="8" name="TextBox 7"/>
-          <p:cNvSpPr txBox="1"/>
-          <p:nvPr/>
-        </p:nvSpPr>
-        <p:spPr>
-          <a:xfrm>
-            <a:off x="7870048" y="1517904"/>
-            <a:ext cx="3818727" cy="4745736"/>
-          </a:xfrm>
-          <a:prstGeom prst="rect">
-            <a:avLst/>
-          </a:prstGeom>
-          <a:noFill/>
-        </p:spPr>
-        <p:txBody>
-          <a:bodyPr wrap="square" lIns="0" tIns="0" rIns="0" bIns="0">
-            <a:spAutoFit/>
-          </a:bodyPr>
-          <a:lstStyle/>
-          <a:p>
-            <a:pPr algn="l">
-              <a:lnSpc>
-                <a:spcPct val="100000"/>
-              </a:lnSpc>
-              <a:spcAft>
-                <a:spcPts val="1100"/>
-              </a:spcAft>
-              <a:defRPr sz="1500" b="0">
-                <a:solidFill>
-                  <a:srgbClr val="222222"/>
-                </a:solidFill>
-                <a:latin typeface="Calibri"/>
-              </a:defRPr>
-            </a:pPr>
-            <a:r>
-              <a:rPr sz="1500" b="0">
-                <a:solidFill>
-                  <a:srgbClr val="222222"/>
-                </a:solidFill>
-                <a:latin typeface="Calibri"/>
-              </a:rPr>
-              <a:t>A for loop repeats a block a fixed number of times. Four sides, four corners.</a:t>
-            </a:r>
-          </a:p>
-          <a:p>
-            <a:pPr algn="l">
-              <a:lnSpc>
-                <a:spcPct val="100000"/>
-              </a:lnSpc>
-              <a:spcAft>
-                <a:spcPts val="1100"/>
-              </a:spcAft>
-              <a:defRPr sz="1500" b="0">
-                <a:solidFill>
-                  <a:srgbClr val="222222"/>
-                </a:solidFill>
-                <a:latin typeface="Calibri"/>
-              </a:defRPr>
-            </a:pPr>
-            <a:r>
-              <a:rPr sz="1500" b="0">
-                <a:solidFill>
-                  <a:srgbClr val="222222"/>
-                </a:solidFill>
-                <a:latin typeface="Calibri"/>
-              </a:rPr>
-              <a:t>The whole shape is four numbers: DRIVE_SPEED, TURN_SPEED, FORWARD_MS and TURN_MS.</a:t>
-            </a:r>
-          </a:p>
-          <a:p>
-            <a:pPr algn="l">
-              <a:lnSpc>
-                <a:spcPct val="100000"/>
-              </a:lnSpc>
-              <a:spcAft>
-                <a:spcPts val="1100"/>
-              </a:spcAft>
-              <a:defRPr sz="1500" b="0">
-                <a:solidFill>
-                  <a:srgbClr val="222222"/>
-                </a:solidFill>
-                <a:latin typeface="Calibri"/>
-              </a:defRPr>
-            </a:pPr>
-            <a:r>
-              <a:rPr sz="1500" b="0">
-                <a:solidFill>
-                  <a:srgbClr val="222222"/>
-                </a:solidFill>
-                <a:latin typeface="Calibri"/>
-              </a:rPr>
-              <a:t>TURN_MS is the one you will spend most of your time on. It sets how far round each corner goes.</a:t>
-            </a:r>
-          </a:p>
-          <a:p>
-            <a:pPr algn="l">
-              <a:lnSpc>
-                <a:spcPct val="100000"/>
-              </a:lnSpc>
-              <a:spcAft>
-                <a:spcPts val="1100"/>
-              </a:spcAft>
-              <a:defRPr sz="1500" b="0">
-                <a:solidFill>
-                  <a:srgbClr val="222222"/>
-                </a:solidFill>
-                <a:latin typeface="Calibri"/>
-              </a:defRPr>
-            </a:pPr>
-            <a:r>
-              <a:rPr sz="1500" b="0">
-                <a:solidFill>
-                  <a:srgbClr val="222222"/>
-                </a:solidFill>
-                <a:latin typeface="Calibri"/>
-              </a:rPr>
-              <a:t>Note the twenty second stop at the end. That is so the program does not immediately start a second square while you are walking towards it.</a:t>
+                <a:latin typeface="Calibri"/>
+              </a:rPr>
+              <a:t>KEY POINT   </a:t>
+            </a:r>
+            <a:r>
+              <a:rPr sz="1500">
+                <a:solidFill>
+                  <a:srgbClr val="222222"/>
+                </a:solidFill>
+                <a:latin typeface="Calibri"/>
+              </a:rPr>
+              <a:t>Study these three properly. If you genuinely understand when to reach for each one, you are already a better programmer than the syntax alone would make you.</a:t>
             </a:r>
           </a:p>
         </p:txBody>
@@ -11375,7 +11288,7 @@
                 </a:solidFill>
                 <a:latin typeface="Calibri"/>
               </a:rPr>
-              <a:t>Do it now  -  drive a square</a:t>
+              <a:t>The same job, written three ways</a:t>
             </a:r>
           </a:p>
         </p:txBody>
@@ -11522,14 +11435,62 @@
       </p:sp>
       <p:sp>
         <p:nvSpPr>
-          <p:cNvPr id="6" name="Rounded Rectangle 5"/>
+          <p:cNvPr id="6" name="TextBox 5"/>
+          <p:cNvSpPr txBox="1"/>
+          <p:nvPr/>
+        </p:nvSpPr>
+        <p:spPr>
+          <a:xfrm>
+            <a:off x="502920" y="1188720"/>
+            <a:ext cx="7047088" cy="274320"/>
+          </a:xfrm>
+          <a:prstGeom prst="rect">
+            <a:avLst/>
+          </a:prstGeom>
+          <a:noFill/>
+        </p:spPr>
+        <p:txBody>
+          <a:bodyPr wrap="square" lIns="0" tIns="0" rIns="0" bIns="0">
+            <a:spAutoFit/>
+          </a:bodyPr>
+          <a:lstStyle/>
+          <a:p>
+            <a:pPr algn="l">
+              <a:lnSpc>
+                <a:spcPct val="100000"/>
+              </a:lnSpc>
+              <a:spcAft>
+                <a:spcPts val="300"/>
+              </a:spcAft>
+              <a:defRPr sz="900" b="1">
+                <a:solidFill>
+                  <a:srgbClr val="0E7C86"/>
+                </a:solidFill>
+                <a:latin typeface="Consolas"/>
+              </a:defRPr>
+            </a:pPr>
+            <a:r>
+              <a:rPr sz="900" b="1">
+                <a:solidFill>
+                  <a:srgbClr val="0E7C86"/>
+                </a:solidFill>
+                <a:latin typeface="Consolas"/>
+              </a:rPr>
+              <a:t>the three loop forms</a:t>
+            </a:r>
+          </a:p>
+        </p:txBody>
+      </p:sp>
+      <p:sp>
+        <p:nvSpPr>
+          <p:cNvPr id="7" name="Rounded Rectangle 6"/>
           <p:cNvSpPr/>
           <p:nvPr/>
         </p:nvSpPr>
         <p:spPr>
           <a:xfrm>
-            <a:off x="502920" y="1188720"/>
-            <a:ext cx="11185855" cy="530352"/>
+            <a:off x="502920" y="1517904"/>
+            <a:ext cx="7047088" cy="4745736"/>
           </a:xfrm>
           <a:prstGeom prst="roundRect">
             <a:avLst>
@@ -11537,10 +11498,12 @@
             </a:avLst>
           </a:prstGeom>
           <a:solidFill>
-            <a:srgbClr val="0E7C86"/>
+            <a:srgbClr val="F4F6F8"/>
           </a:solidFill>
-          <a:ln>
-            <a:noFill/>
+          <a:ln w="12700">
+            <a:solidFill>
+              <a:srgbClr val="C8D2DE"/>
+            </a:solidFill>
           </a:ln>
           <a:effectLst/>
         </p:spPr>
@@ -11559,50 +11522,328 @@
           </a:fontRef>
         </p:style>
         <p:txBody>
-          <a:bodyPr rtlCol="0" anchor="ctr" wrap="square" lIns="182880"/>
-          <a:lstStyle/>
-          <a:p>
-            <a:pPr algn="l"/>
+          <a:bodyPr rtlCol="0" anchor="t" wrap="square" lIns="146304" tIns="91440" bIns="73152"/>
+          <a:lstStyle/>
+          <a:p>
+            <a:pPr algn="l">
+              <a:lnSpc>
+                <a:spcPct val="100000"/>
+              </a:lnSpc>
+              <a:spcAft>
+                <a:spcPts val="0"/>
+              </a:spcAft>
+              <a:defRPr sz="1300">
+                <a:latin typeface="Consolas"/>
+              </a:defRPr>
+            </a:pPr>
+            <a:r>
+              <a:rPr sz="1300">
+                <a:solidFill>
+                  <a:srgbClr val="666666"/>
+                </a:solidFill>
+                <a:latin typeface="Consolas"/>
+              </a:rPr>
+              <a:t>// for  -  a known number of passes</a:t>
+            </a:r>
+          </a:p>
+          <a:p>
+            <a:pPr algn="l">
+              <a:lnSpc>
+                <a:spcPct val="100000"/>
+              </a:lnSpc>
+              <a:spcAft>
+                <a:spcPts val="0"/>
+              </a:spcAft>
+              <a:defRPr sz="1300">
+                <a:latin typeface="Consolas"/>
+              </a:defRPr>
+            </a:pPr>
             <a:r>
               <a:rPr sz="1300" b="1">
                 <a:solidFill>
-                  <a:srgbClr val="FFFFFF"/>
-                </a:solidFill>
-                <a:latin typeface="Calibri"/>
-              </a:rPr>
-              <a:t>UPLOAD AND RUN:   </a:t>
-            </a:r>
-            <a:r>
-              <a:rPr sz="1500" b="1">
-                <a:solidFill>
-                  <a:srgbClr val="FFFFFF"/>
+                  <a:srgbClr val="0E7C86"/>
                 </a:solidFill>
                 <a:latin typeface="Consolas"/>
               </a:rPr>
-              <a:t>l2c_maneuver_square</a:t>
-            </a:r>
-            <a:r>
-              <a:rPr sz="1200">
-                <a:solidFill>
-                  <a:srgbClr val="FFFFFF"/>
-                </a:solidFill>
-                <a:latin typeface="Calibri"/>
-              </a:rPr>
-              <a:t>     (30 minutes)</a:t>
-            </a:r>
-          </a:p>
-        </p:txBody>
-      </p:sp>
-      <p:sp>
-        <p:nvSpPr>
-          <p:cNvPr id="7" name="TextBox 6"/>
+              <a:t>for (int i = 0; i &lt; 32; i++) {</a:t>
+            </a:r>
+          </a:p>
+          <a:p>
+            <a:pPr algn="l">
+              <a:lnSpc>
+                <a:spcPct val="100000"/>
+              </a:lnSpc>
+              <a:spcAft>
+                <a:spcPts val="0"/>
+              </a:spcAft>
+              <a:defRPr sz="1300">
+                <a:latin typeface="Consolas"/>
+              </a:defRPr>
+            </a:pPr>
+            <a:r>
+              <a:rPr sz="1300">
+                <a:solidFill>
+                  <a:srgbClr val="222222"/>
+                </a:solidFill>
+                <a:latin typeface="Consolas"/>
+              </a:rPr>
+              <a:t>  strip.setPixelColor(i, colour);</a:t>
+            </a:r>
+          </a:p>
+          <a:p>
+            <a:pPr algn="l">
+              <a:lnSpc>
+                <a:spcPct val="100000"/>
+              </a:lnSpc>
+              <a:spcAft>
+                <a:spcPts val="0"/>
+              </a:spcAft>
+              <a:defRPr sz="1300">
+                <a:latin typeface="Consolas"/>
+              </a:defRPr>
+            </a:pPr>
+            <a:r>
+              <a:rPr sz="1300">
+                <a:solidFill>
+                  <a:srgbClr val="222222"/>
+                </a:solidFill>
+                <a:latin typeface="Consolas"/>
+              </a:rPr>
+              <a:t>}</a:t>
+            </a:r>
+          </a:p>
+          <a:p>
+            <a:pPr algn="l">
+              <a:lnSpc>
+                <a:spcPct val="100000"/>
+              </a:lnSpc>
+              <a:spcAft>
+                <a:spcPts val="0"/>
+              </a:spcAft>
+              <a:defRPr sz="1300">
+                <a:latin typeface="Consolas"/>
+              </a:defRPr>
+            </a:pPr>
+            <a:r>
+              <a:rPr sz="1300">
+                <a:solidFill>
+                  <a:srgbClr val="222222"/>
+                </a:solidFill>
+                <a:latin typeface="Consolas"/>
+              </a:rPr>
+              <a:t> </a:t>
+            </a:r>
+          </a:p>
+          <a:p>
+            <a:pPr algn="l">
+              <a:lnSpc>
+                <a:spcPct val="100000"/>
+              </a:lnSpc>
+              <a:spcAft>
+                <a:spcPts val="0"/>
+              </a:spcAft>
+              <a:defRPr sz="1300">
+                <a:latin typeface="Consolas"/>
+              </a:defRPr>
+            </a:pPr>
+            <a:r>
+              <a:rPr sz="1300">
+                <a:solidFill>
+                  <a:srgbClr val="666666"/>
+                </a:solidFill>
+                <a:latin typeface="Consolas"/>
+              </a:rPr>
+              <a:t>// while  -  keep going until something changes</a:t>
+            </a:r>
+          </a:p>
+          <a:p>
+            <a:pPr algn="l">
+              <a:lnSpc>
+                <a:spcPct val="100000"/>
+              </a:lnSpc>
+              <a:spcAft>
+                <a:spcPts val="0"/>
+              </a:spcAft>
+              <a:defRPr sz="1300">
+                <a:latin typeface="Consolas"/>
+              </a:defRPr>
+            </a:pPr>
+            <a:r>
+              <a:rPr sz="1300" b="1">
+                <a:solidFill>
+                  <a:srgbClr val="0E7C86"/>
+                </a:solidFill>
+                <a:latin typeface="Consolas"/>
+              </a:rPr>
+              <a:t>while (!Ps3.isConnected()) {</a:t>
+            </a:r>
+          </a:p>
+          <a:p>
+            <a:pPr algn="l">
+              <a:lnSpc>
+                <a:spcPct val="100000"/>
+              </a:lnSpc>
+              <a:spcAft>
+                <a:spcPts val="0"/>
+              </a:spcAft>
+              <a:defRPr sz="1300">
+                <a:latin typeface="Consolas"/>
+              </a:defRPr>
+            </a:pPr>
+            <a:r>
+              <a:rPr sz="1300">
+                <a:solidFill>
+                  <a:srgbClr val="222222"/>
+                </a:solidFill>
+                <a:latin typeface="Consolas"/>
+              </a:rPr>
+              <a:t>  showWaitingLights();        // may never run at all</a:t>
+            </a:r>
+          </a:p>
+          <a:p>
+            <a:pPr algn="l">
+              <a:lnSpc>
+                <a:spcPct val="100000"/>
+              </a:lnSpc>
+              <a:spcAft>
+                <a:spcPts val="0"/>
+              </a:spcAft>
+              <a:defRPr sz="1300">
+                <a:latin typeface="Consolas"/>
+              </a:defRPr>
+            </a:pPr>
+            <a:r>
+              <a:rPr sz="1300">
+                <a:solidFill>
+                  <a:srgbClr val="222222"/>
+                </a:solidFill>
+                <a:latin typeface="Consolas"/>
+              </a:rPr>
+              <a:t>}</a:t>
+            </a:r>
+          </a:p>
+          <a:p>
+            <a:pPr algn="l">
+              <a:lnSpc>
+                <a:spcPct val="100000"/>
+              </a:lnSpc>
+              <a:spcAft>
+                <a:spcPts val="0"/>
+              </a:spcAft>
+              <a:defRPr sz="1300">
+                <a:latin typeface="Consolas"/>
+              </a:defRPr>
+            </a:pPr>
+            <a:r>
+              <a:rPr sz="1300">
+                <a:solidFill>
+                  <a:srgbClr val="222222"/>
+                </a:solidFill>
+                <a:latin typeface="Consolas"/>
+              </a:rPr>
+              <a:t> </a:t>
+            </a:r>
+          </a:p>
+          <a:p>
+            <a:pPr algn="l">
+              <a:lnSpc>
+                <a:spcPct val="100000"/>
+              </a:lnSpc>
+              <a:spcAft>
+                <a:spcPts val="0"/>
+              </a:spcAft>
+              <a:defRPr sz="1300">
+                <a:latin typeface="Consolas"/>
+              </a:defRPr>
+            </a:pPr>
+            <a:r>
+              <a:rPr sz="1300">
+                <a:solidFill>
+                  <a:srgbClr val="666666"/>
+                </a:solidFill>
+                <a:latin typeface="Consolas"/>
+              </a:rPr>
+              <a:t>// do-while  -  always at least one pass</a:t>
+            </a:r>
+          </a:p>
+          <a:p>
+            <a:pPr algn="l">
+              <a:lnSpc>
+                <a:spcPct val="100000"/>
+              </a:lnSpc>
+              <a:spcAft>
+                <a:spcPts val="0"/>
+              </a:spcAft>
+              <a:defRPr sz="1300">
+                <a:latin typeface="Consolas"/>
+              </a:defRPr>
+            </a:pPr>
+            <a:r>
+              <a:rPr sz="1300" b="1">
+                <a:solidFill>
+                  <a:srgbClr val="0E7C86"/>
+                </a:solidFill>
+                <a:latin typeface="Consolas"/>
+              </a:rPr>
+              <a:t>do {</a:t>
+            </a:r>
+          </a:p>
+          <a:p>
+            <a:pPr algn="l">
+              <a:lnSpc>
+                <a:spcPct val="100000"/>
+              </a:lnSpc>
+              <a:spcAft>
+                <a:spcPts val="0"/>
+              </a:spcAft>
+              <a:defRPr sz="1300">
+                <a:latin typeface="Consolas"/>
+              </a:defRPr>
+            </a:pPr>
+            <a:r>
+              <a:rPr sz="1300">
+                <a:solidFill>
+                  <a:srgbClr val="222222"/>
+                </a:solidFill>
+                <a:latin typeface="Consolas"/>
+              </a:rPr>
+              <a:t>  reading = analogRead(PIN);  // take a reading FIRST,</a:t>
+            </a:r>
+          </a:p>
+          <a:p>
+            <a:pPr algn="l">
+              <a:lnSpc>
+                <a:spcPct val="100000"/>
+              </a:lnSpc>
+              <a:spcAft>
+                <a:spcPts val="0"/>
+              </a:spcAft>
+              <a:defRPr sz="1300">
+                <a:latin typeface="Consolas"/>
+              </a:defRPr>
+            </a:pPr>
+            <a:r>
+              <a:rPr sz="1300">
+                <a:solidFill>
+                  <a:srgbClr val="222222"/>
+                </a:solidFill>
+                <a:latin typeface="Consolas"/>
+              </a:rPr>
+              <a:t>} while (reading &gt; LIMIT);    // then decide whether to repeat</a:t>
+            </a:r>
+          </a:p>
+        </p:txBody>
+      </p:sp>
+      <p:sp>
+        <p:nvSpPr>
+          <p:cNvPr id="8" name="TextBox 7"/>
           <p:cNvSpPr txBox="1"/>
           <p:nvPr/>
         </p:nvSpPr>
         <p:spPr>
           <a:xfrm>
-            <a:off x="502920" y="1901952"/>
-            <a:ext cx="5387187" cy="3172968"/>
+            <a:off x="7870048" y="1517904"/>
+            <a:ext cx="3818727" cy="4745736"/>
           </a:xfrm>
           <a:prstGeom prst="rect">
             <a:avLst/>
@@ -11620,253 +11861,7 @@
                 <a:spcPct val="100000"/>
               </a:lnSpc>
               <a:spcAft>
-                <a:spcPts val="800"/>
-              </a:spcAft>
-              <a:defRPr sz="1400" b="0">
-                <a:solidFill>
-                  <a:srgbClr val="222222"/>
-                </a:solidFill>
-                <a:latin typeface="Calibri"/>
-              </a:defRPr>
-            </a:pPr>
-            <a:r>
-              <a:rPr sz="1400" b="0">
-                <a:solidFill>
-                  <a:srgbClr val="222222"/>
-                </a:solidFill>
-                <a:latin typeface="Calibri"/>
-              </a:rPr>
-              <a:t>1.  Clear a space about three metres square. Bags and feet out.</a:t>
-            </a:r>
-          </a:p>
-          <a:p>
-            <a:pPr algn="l">
-              <a:lnSpc>
-                <a:spcPct val="100000"/>
-              </a:lnSpc>
-              <a:spcAft>
-                <a:spcPts val="800"/>
-              </a:spcAft>
-              <a:defRPr sz="1400" b="0">
-                <a:solidFill>
-                  <a:srgbClr val="222222"/>
-                </a:solidFill>
-                <a:latin typeface="Calibri"/>
-              </a:defRPr>
-            </a:pPr>
-            <a:r>
-              <a:rPr sz="1400" b="0">
-                <a:solidFill>
-                  <a:srgbClr val="222222"/>
-                </a:solidFill>
-                <a:latin typeface="Calibri"/>
-              </a:rPr>
-              <a:t>2.  Mark the starting point with a piece of tape.</a:t>
-            </a:r>
-          </a:p>
-          <a:p>
-            <a:pPr algn="l">
-              <a:lnSpc>
-                <a:spcPct val="100000"/>
-              </a:lnSpc>
-              <a:spcAft>
-                <a:spcPts val="800"/>
-              </a:spcAft>
-              <a:defRPr sz="1400" b="0">
-                <a:solidFill>
-                  <a:srgbClr val="222222"/>
-                </a:solidFill>
-                <a:latin typeface="Calibri"/>
-              </a:defRPr>
-            </a:pPr>
-            <a:r>
-              <a:rPr sz="1400" b="0">
-                <a:solidFill>
-                  <a:srgbClr val="222222"/>
-                </a:solidFill>
-                <a:latin typeface="Calibri"/>
-              </a:rPr>
-              <a:t>3.  Upload. It waits five seconds, then goes.</a:t>
-            </a:r>
-          </a:p>
-          <a:p>
-            <a:pPr algn="l">
-              <a:lnSpc>
-                <a:spcPct val="100000"/>
-              </a:lnSpc>
-              <a:spcAft>
-                <a:spcPts val="800"/>
-              </a:spcAft>
-              <a:defRPr sz="1400" b="0">
-                <a:solidFill>
-                  <a:srgbClr val="222222"/>
-                </a:solidFill>
-                <a:latin typeface="Calibri"/>
-              </a:defRPr>
-            </a:pPr>
-            <a:r>
-              <a:rPr sz="1400" b="0">
-                <a:solidFill>
-                  <a:srgbClr val="222222"/>
-                </a:solidFill>
-                <a:latin typeface="Calibri"/>
-              </a:rPr>
-              <a:t>4.  MEASURE one side of the square it actually drove.</a:t>
-            </a:r>
-          </a:p>
-          <a:p>
-            <a:pPr algn="l">
-              <a:lnSpc>
-                <a:spcPct val="100000"/>
-              </a:lnSpc>
-              <a:spcAft>
-                <a:spcPts val="800"/>
-              </a:spcAft>
-              <a:defRPr sz="1400" b="0">
-                <a:solidFill>
-                  <a:srgbClr val="222222"/>
-                </a:solidFill>
-                <a:latin typeface="Calibri"/>
-              </a:defRPr>
-            </a:pPr>
-            <a:r>
-              <a:rPr sz="1400" b="0">
-                <a:solidFill>
-                  <a:srgbClr val="222222"/>
-                </a:solidFill>
-                <a:latin typeface="Calibri"/>
-              </a:rPr>
-              <a:t>5.  Work out the speed:  side length / (FORWARD_MS / 1000)</a:t>
-            </a:r>
-          </a:p>
-          <a:p>
-            <a:pPr algn="l">
-              <a:lnSpc>
-                <a:spcPct val="100000"/>
-              </a:lnSpc>
-              <a:spcAft>
-                <a:spcPts val="800"/>
-              </a:spcAft>
-              <a:defRPr sz="1400" b="0">
-                <a:solidFill>
-                  <a:srgbClr val="222222"/>
-                </a:solidFill>
-                <a:latin typeface="Calibri"/>
-              </a:defRPr>
-            </a:pPr>
-            <a:r>
-              <a:rPr sz="1400" b="0">
-                <a:solidFill>
-                  <a:srgbClr val="222222"/>
-                </a:solidFill>
-                <a:latin typeface="Calibri"/>
-              </a:rPr>
-              <a:t>6.  The corners will not be 90 degrees. Adjust TURN_MS by 25 ms at a time until the vehicle comes back to its tape.</a:t>
-            </a:r>
-          </a:p>
-          <a:p>
-            <a:pPr algn="l">
-              <a:lnSpc>
-                <a:spcPct val="100000"/>
-              </a:lnSpc>
-              <a:spcAft>
-                <a:spcPts val="800"/>
-              </a:spcAft>
-              <a:defRPr sz="1400" b="0">
-                <a:solidFill>
-                  <a:srgbClr val="222222"/>
-                </a:solidFill>
-                <a:latin typeface="Calibri"/>
-              </a:defRPr>
-            </a:pPr>
-            <a:r>
-              <a:rPr sz="1400" b="0">
-                <a:solidFill>
-                  <a:srgbClr val="222222"/>
-                </a:solidFill>
-                <a:latin typeface="Calibri"/>
-              </a:rPr>
-              <a:t>7.  Now change FORWARD_MS and PREDICT the new square before running it. How close were you?</a:t>
-            </a:r>
-          </a:p>
-        </p:txBody>
-      </p:sp>
-      <p:sp>
-        <p:nvSpPr>
-          <p:cNvPr id="8" name="TextBox 7"/>
-          <p:cNvSpPr txBox="1"/>
-          <p:nvPr/>
-        </p:nvSpPr>
-        <p:spPr>
-          <a:xfrm>
-            <a:off x="6301587" y="1901952"/>
-            <a:ext cx="5387187" cy="310896"/>
-          </a:xfrm>
-          <a:prstGeom prst="rect">
-            <a:avLst/>
-          </a:prstGeom>
-          <a:noFill/>
-        </p:spPr>
-        <p:txBody>
-          <a:bodyPr wrap="square" lIns="0" tIns="0" rIns="0" bIns="0">
-            <a:spAutoFit/>
-          </a:bodyPr>
-          <a:lstStyle/>
-          <a:p>
-            <a:pPr algn="l">
-              <a:lnSpc>
-                <a:spcPct val="100000"/>
-              </a:lnSpc>
-              <a:spcAft>
-                <a:spcPts val="300"/>
-              </a:spcAft>
-              <a:defRPr sz="1200" b="1">
-                <a:solidFill>
-                  <a:srgbClr val="0E7C86"/>
-                </a:solidFill>
-                <a:latin typeface="Calibri"/>
-              </a:defRPr>
-            </a:pPr>
-            <a:r>
-              <a:rPr sz="1200" b="1">
-                <a:solidFill>
-                  <a:srgbClr val="0E7C86"/>
-                </a:solidFill>
-                <a:latin typeface="Calibri"/>
-              </a:rPr>
-              <a:t>What you should see</a:t>
-            </a:r>
-          </a:p>
-        </p:txBody>
-      </p:sp>
-      <p:sp>
-        <p:nvSpPr>
-          <p:cNvPr id="9" name="TextBox 8"/>
-          <p:cNvSpPr txBox="1"/>
-          <p:nvPr/>
-        </p:nvSpPr>
-        <p:spPr>
-          <a:xfrm>
-            <a:off x="6301587" y="2249424"/>
-            <a:ext cx="5387187" cy="1220724"/>
-          </a:xfrm>
-          <a:prstGeom prst="rect">
-            <a:avLst/>
-          </a:prstGeom>
-          <a:noFill/>
-        </p:spPr>
-        <p:txBody>
-          <a:bodyPr wrap="square" lIns="0" tIns="0" rIns="0" bIns="0">
-            <a:spAutoFit/>
-          </a:bodyPr>
-          <a:lstStyle/>
-          <a:p>
-            <a:pPr algn="l">
-              <a:lnSpc>
-                <a:spcPct val="100000"/>
-              </a:lnSpc>
-              <a:spcAft>
-                <a:spcPts val="600"/>
+                <a:spcPts val="1100"/>
               </a:spcAft>
               <a:defRPr sz="1500" b="0">
                 <a:solidFill>
@@ -11882,16 +11877,16 @@
                 </a:solidFill>
                 <a:latin typeface="Calibri"/>
               </a:rPr>
-              <a:t>Roughly a square. Roughly.</a:t>
-            </a:r>
-          </a:p>
-          <a:p>
-            <a:pPr algn="l">
-              <a:lnSpc>
-                <a:spcPct val="100000"/>
-              </a:lnSpc>
-              <a:spcAft>
-                <a:spcPts val="600"/>
+              <a:t>The for loop is three things in one line: where to start, when to keep going, and what to change each pass.</a:t>
+            </a:r>
+          </a:p>
+          <a:p>
+            <a:pPr algn="l">
+              <a:lnSpc>
+                <a:spcPct val="100000"/>
+              </a:lnSpc>
+              <a:spcAft>
+                <a:spcPts val="1100"/>
               </a:spcAft>
               <a:defRPr sz="1500" b="0">
                 <a:solidFill>
@@ -11907,87 +11902,16 @@
                 </a:solidFill>
                 <a:latin typeface="Calibri"/>
               </a:rPr>
-              <a:t>It will not close perfectly on the first attempt. That is the point of the exercise, not a failure.</a:t>
-            </a:r>
-          </a:p>
-        </p:txBody>
-      </p:sp>
-      <p:sp>
-        <p:nvSpPr>
-          <p:cNvPr id="10" name="TextBox 9"/>
-          <p:cNvSpPr txBox="1"/>
-          <p:nvPr/>
-        </p:nvSpPr>
-        <p:spPr>
-          <a:xfrm>
-            <a:off x="6301587" y="3506724"/>
-            <a:ext cx="5387187" cy="310896"/>
-          </a:xfrm>
-          <a:prstGeom prst="rect">
-            <a:avLst/>
-          </a:prstGeom>
-          <a:noFill/>
-        </p:spPr>
-        <p:txBody>
-          <a:bodyPr wrap="square" lIns="0" tIns="0" rIns="0" bIns="0">
-            <a:spAutoFit/>
-          </a:bodyPr>
-          <a:lstStyle/>
-          <a:p>
-            <a:pPr algn="l">
-              <a:lnSpc>
-                <a:spcPct val="100000"/>
-              </a:lnSpc>
-              <a:spcAft>
-                <a:spcPts val="300"/>
-              </a:spcAft>
-              <a:defRPr sz="1200" b="1">
-                <a:solidFill>
-                  <a:srgbClr val="0E7C86"/>
-                </a:solidFill>
-                <a:latin typeface="Calibri"/>
-              </a:defRPr>
-            </a:pPr>
-            <a:r>
-              <a:rPr sz="1200" b="1">
-                <a:solidFill>
-                  <a:srgbClr val="0E7C86"/>
-                </a:solidFill>
-                <a:latin typeface="Calibri"/>
-              </a:rPr>
-              <a:t>Answer these</a:t>
-            </a:r>
-          </a:p>
-        </p:txBody>
-      </p:sp>
-      <p:sp>
-        <p:nvSpPr>
-          <p:cNvPr id="11" name="TextBox 10"/>
-          <p:cNvSpPr txBox="1"/>
-          <p:nvPr/>
-        </p:nvSpPr>
-        <p:spPr>
-          <a:xfrm>
-            <a:off x="6301587" y="3854196"/>
-            <a:ext cx="5387187" cy="1220724"/>
-          </a:xfrm>
-          <a:prstGeom prst="rect">
-            <a:avLst/>
-          </a:prstGeom>
-          <a:noFill/>
-        </p:spPr>
-        <p:txBody>
-          <a:bodyPr wrap="square" lIns="0" tIns="0" rIns="0" bIns="0">
-            <a:spAutoFit/>
-          </a:bodyPr>
-          <a:lstStyle/>
-          <a:p>
-            <a:pPr algn="l">
-              <a:lnSpc>
-                <a:spcPct val="100000"/>
-              </a:lnSpc>
-              <a:spcAft>
-                <a:spcPts val="600"/>
+              <a:t>A while loop can run zero times. That is usually what you want when you are waiting for something.</a:t>
+            </a:r>
+          </a:p>
+          <a:p>
+            <a:pPr algn="l">
+              <a:lnSpc>
+                <a:spcPct val="100000"/>
+              </a:lnSpc>
+              <a:spcAft>
+                <a:spcPts val="1100"/>
               </a:spcAft>
               <a:defRPr sz="1500" b="0">
                 <a:solidFill>
@@ -12003,16 +11927,16 @@
                 </a:solidFill>
                 <a:latin typeface="Calibri"/>
               </a:rPr>
-              <a:t>What is your vehicle's speed in feet per second?</a:t>
-            </a:r>
-          </a:p>
-          <a:p>
-            <a:pPr algn="l">
-              <a:lnSpc>
-                <a:spcPct val="100000"/>
-              </a:lnSpc>
-              <a:spcAft>
-                <a:spcPts val="600"/>
+              <a:t>A do-while always runs once before it checks. Useful when the test needs a value you have not got yet.</a:t>
+            </a:r>
+          </a:p>
+          <a:p>
+            <a:pPr algn="l">
+              <a:lnSpc>
+                <a:spcPct val="100000"/>
+              </a:lnSpc>
+              <a:spcAft>
+                <a:spcPts val="1100"/>
               </a:spcAft>
               <a:defRPr sz="1500" b="0">
                 <a:solidFill>
@@ -12021,6 +11945,22 @@
                 <a:latin typeface="Calibri"/>
               </a:defRPr>
             </a:pPr>
+          </a:p>
+          <a:p>
+            <a:pPr algn="l">
+              <a:lnSpc>
+                <a:spcPct val="100000"/>
+              </a:lnSpc>
+              <a:spcAft>
+                <a:spcPts val="1100"/>
+              </a:spcAft>
+              <a:defRPr sz="1500" b="0">
+                <a:solidFill>
+                  <a:srgbClr val="222222"/>
+                </a:solidFill>
+                <a:latin typeface="Calibri"/>
+              </a:defRPr>
+            </a:pPr>
             <a:r>
               <a:rPr sz="1500" b="0">
                 <a:solidFill>
@@ -12028,73 +11968,7 @@
                 </a:solidFill>
                 <a:latin typeface="Calibri"/>
               </a:rPr>
-              <a:t>What is its turn rate in degrees per second?</a:t>
-            </a:r>
-          </a:p>
-        </p:txBody>
-      </p:sp>
-      <p:sp>
-        <p:nvSpPr>
-          <p:cNvPr id="12" name="Rounded Rectangle 11"/>
-          <p:cNvSpPr/>
-          <p:nvPr/>
-        </p:nvSpPr>
-        <p:spPr>
-          <a:xfrm>
-            <a:off x="502920" y="5303520"/>
-            <a:ext cx="11185855" cy="960120"/>
-          </a:xfrm>
-          <a:prstGeom prst="roundRect">
-            <a:avLst>
-              <a:gd name="adj" fmla="val 4000"/>
-            </a:avLst>
-          </a:prstGeom>
-          <a:solidFill>
-            <a:srgbClr val="FBECEC"/>
-          </a:solidFill>
-          <a:ln w="12700">
-            <a:solidFill>
-              <a:srgbClr val="A32A2A"/>
-            </a:solidFill>
-          </a:ln>
-          <a:effectLst/>
-        </p:spPr>
-        <p:style>
-          <a:lnRef idx="1">
-            <a:schemeClr val="accent1"/>
-          </a:lnRef>
-          <a:fillRef idx="3">
-            <a:schemeClr val="accent1"/>
-          </a:fillRef>
-          <a:effectRef idx="2">
-            <a:schemeClr val="accent1"/>
-          </a:effectRef>
-          <a:fontRef idx="minor">
-            <a:schemeClr val="lt1"/>
-          </a:fontRef>
-        </p:style>
-        <p:txBody>
-          <a:bodyPr rtlCol="0" anchor="ctr" wrap="square" lIns="164592" rIns="164592" tIns="73152" bIns="73152"/>
-          <a:lstStyle/>
-          <a:p>
-            <a:pPr algn="l"/>
-            <a:r>
-              <a:rPr sz="1300" b="1">
-                <a:solidFill>
-                  <a:srgbClr val="A32A2A"/>
-                </a:solidFill>
-                <a:latin typeface="Calibri"/>
-              </a:rPr>
-              <a:t>SAFETY   </a:t>
-            </a:r>
-            <a:r>
-              <a:rPr sz="1500">
-                <a:solidFill>
-                  <a:srgbClr val="222222"/>
-                </a:solidFill>
-                <a:latin typeface="Calibri"/>
-              </a:rPr>
-              <a:t>This one drives on the floor. Know where your power switch is before you upload.</a:t>
+              <a:t>loop() itself is really a while(true) that the Arduino framework writes for you.</a:t>
             </a:r>
           </a:p>
         </p:txBody>
@@ -12158,7 +12032,7 @@
                 </a:solidFill>
                 <a:latin typeface="Calibri"/>
               </a:rPr>
-              <a:t>Dead reckoning, and what it cannot do</a:t>
+              <a:t>l2c_maneuver_square  -  the loop</a:t>
             </a:r>
           </a:p>
         </p:txBody>
@@ -12312,7 +12186,7 @@
         <p:spPr>
           <a:xfrm>
             <a:off x="502920" y="1188720"/>
-            <a:ext cx="11185855" cy="4023360"/>
+            <a:ext cx="7047088" cy="274320"/>
           </a:xfrm>
           <a:prstGeom prst="rect">
             <a:avLst/>
@@ -12330,230 +12204,23 @@
                 <a:spcPct val="100000"/>
               </a:lnSpc>
               <a:spcAft>
-                <a:spcPts val="600"/>
-              </a:spcAft>
-              <a:defRPr sz="1500" b="0">
-                <a:solidFill>
-                  <a:srgbClr val="222222"/>
-                </a:solidFill>
-                <a:latin typeface="Calibri"/>
-              </a:defRPr>
-            </a:pPr>
-            <a:r>
-              <a:rPr sz="1500" b="0">
-                <a:solidFill>
-                  <a:srgbClr val="222222"/>
-                </a:solidFill>
-                <a:latin typeface="Calibri"/>
-              </a:rPr>
-              <a:t>DEAD RECKONING is working out where you are from your speed, your heading and the time - with no outside reference at all.</a:t>
-            </a:r>
-          </a:p>
-          <a:p>
-            <a:pPr algn="l">
-              <a:lnSpc>
-                <a:spcPct val="100000"/>
-              </a:lnSpc>
-              <a:spcAft>
-                <a:spcPts val="600"/>
-              </a:spcAft>
-              <a:defRPr sz="1500" b="0">
-                <a:solidFill>
-                  <a:srgbClr val="222222"/>
-                </a:solidFill>
-                <a:latin typeface="Calibri"/>
-              </a:defRPr>
-            </a:pPr>
-            <a:r>
-              <a:rPr sz="1500" b="0">
-                <a:solidFill>
-                  <a:srgbClr val="222222"/>
-                </a:solidFill>
-                <a:latin typeface="Calibri"/>
-              </a:rPr>
-              <a:t>Ships and aircraft navigated this way for centuries. Submersibles still fall back on it, because GPS does not work underwater.</a:t>
-            </a:r>
-          </a:p>
-          <a:p>
-            <a:pPr algn="l">
-              <a:lnSpc>
-                <a:spcPct val="100000"/>
-              </a:lnSpc>
-              <a:spcAft>
-                <a:spcPts val="600"/>
-              </a:spcAft>
-              <a:defRPr sz="1500" b="0">
-                <a:solidFill>
-                  <a:srgbClr val="222222"/>
-                </a:solidFill>
-                <a:latin typeface="Calibri"/>
-              </a:defRPr>
-            </a:pPr>
-          </a:p>
-          <a:p>
-            <a:pPr algn="l">
-              <a:lnSpc>
-                <a:spcPct val="100000"/>
-              </a:lnSpc>
-              <a:spcAft>
-                <a:spcPts val="600"/>
-              </a:spcAft>
-              <a:defRPr sz="1500" b="0">
-                <a:solidFill>
-                  <a:srgbClr val="222222"/>
-                </a:solidFill>
-                <a:latin typeface="Calibri"/>
-              </a:defRPr>
-            </a:pPr>
-            <a:r>
-              <a:rPr sz="1500" b="0">
-                <a:solidFill>
-                  <a:srgbClr val="222222"/>
-                </a:solidFill>
-                <a:latin typeface="Calibri"/>
-              </a:rPr>
-              <a:t>It DRIFTS. Every small error accumulates, and nothing ever corrects it. Errors in your square come from:</a:t>
-            </a:r>
-          </a:p>
-          <a:p>
-            <a:pPr lvl="1" algn="l">
-              <a:lnSpc>
-                <a:spcPct val="100000"/>
-              </a:lnSpc>
-              <a:spcAft>
-                <a:spcPts val="600"/>
-              </a:spcAft>
-              <a:defRPr sz="1500" b="0">
-                <a:solidFill>
-                  <a:srgbClr val="222222"/>
-                </a:solidFill>
-                <a:latin typeface="Calibri"/>
-              </a:defRPr>
-            </a:pPr>
-            <a:r>
-              <a:rPr sz="1500" b="0">
-                <a:solidFill>
-                  <a:srgbClr val="222222"/>
-                </a:solidFill>
-                <a:latin typeface="Calibri"/>
-              </a:rPr>
-              <a:t>Battery charge - a fresher pack drives further in the same time</a:t>
-            </a:r>
-          </a:p>
-          <a:p>
-            <a:pPr lvl="1" algn="l">
-              <a:lnSpc>
-                <a:spcPct val="100000"/>
-              </a:lnSpc>
-              <a:spcAft>
-                <a:spcPts val="600"/>
-              </a:spcAft>
-              <a:defRPr sz="1500" b="0">
-                <a:solidFill>
-                  <a:srgbClr val="222222"/>
-                </a:solidFill>
-                <a:latin typeface="Calibri"/>
-              </a:defRPr>
-            </a:pPr>
-            <a:r>
-              <a:rPr sz="1500" b="0">
-                <a:solidFill>
-                  <a:srgbClr val="222222"/>
-                </a:solidFill>
-                <a:latin typeface="Calibri"/>
-              </a:rPr>
-              <a:t>Floor surface - carpet, tile and concrete all differ</a:t>
-            </a:r>
-          </a:p>
-          <a:p>
-            <a:pPr lvl="1" algn="l">
-              <a:lnSpc>
-                <a:spcPct val="100000"/>
-              </a:lnSpc>
-              <a:spcAft>
-                <a:spcPts val="600"/>
-              </a:spcAft>
-              <a:defRPr sz="1500" b="0">
-                <a:solidFill>
-                  <a:srgbClr val="222222"/>
-                </a:solidFill>
-                <a:latin typeface="Calibri"/>
-              </a:defRPr>
-            </a:pPr>
-            <a:r>
-              <a:rPr sz="1500" b="0">
-                <a:solidFill>
-                  <a:srgbClr val="222222"/>
-                </a:solidFill>
-                <a:latin typeface="Calibri"/>
-              </a:rPr>
-              <a:t>Wheel slip during the turns, which skid steering guarantees</a:t>
-            </a:r>
-          </a:p>
-          <a:p>
-            <a:pPr lvl="1" algn="l">
-              <a:lnSpc>
-                <a:spcPct val="100000"/>
-              </a:lnSpc>
-              <a:spcAft>
-                <a:spcPts val="600"/>
-              </a:spcAft>
-              <a:defRPr sz="1500" b="0">
-                <a:solidFill>
-                  <a:srgbClr val="222222"/>
-                </a:solidFill>
-                <a:latin typeface="Calibri"/>
-              </a:defRPr>
-            </a:pPr>
-            <a:r>
-              <a:rPr sz="1500" b="0">
-                <a:solidFill>
-                  <a:srgbClr val="222222"/>
-                </a:solidFill>
-                <a:latin typeface="Calibri"/>
-              </a:rPr>
-              <a:t>Motors that are not perfectly matched to each other</a:t>
-            </a:r>
-          </a:p>
-          <a:p>
-            <a:pPr algn="l">
-              <a:lnSpc>
-                <a:spcPct val="100000"/>
-              </a:lnSpc>
-              <a:spcAft>
-                <a:spcPts val="600"/>
-              </a:spcAft>
-              <a:defRPr sz="1500" b="0">
-                <a:solidFill>
-                  <a:srgbClr val="222222"/>
-                </a:solidFill>
-                <a:latin typeface="Calibri"/>
-              </a:defRPr>
-            </a:pPr>
-          </a:p>
-          <a:p>
-            <a:pPr algn="l">
-              <a:lnSpc>
-                <a:spcPct val="100000"/>
-              </a:lnSpc>
-              <a:spcAft>
-                <a:spcPts val="600"/>
-              </a:spcAft>
-              <a:defRPr sz="1500" b="0">
-                <a:solidFill>
-                  <a:srgbClr val="222222"/>
-                </a:solidFill>
-                <a:latin typeface="Calibri"/>
-              </a:defRPr>
-            </a:pPr>
-            <a:r>
-              <a:rPr sz="1500" b="0">
-                <a:solidFill>
-                  <a:srgbClr val="222222"/>
-                </a:solidFill>
-                <a:latin typeface="Calibri"/>
-              </a:rPr>
-              <a:t>The fix is a SENSOR that tells you something true about the outside world. That is where the course goes after this one.</a:t>
+                <a:spcPts val="300"/>
+              </a:spcAft>
+              <a:defRPr sz="900" b="1">
+                <a:solidFill>
+                  <a:srgbClr val="0E7C86"/>
+                </a:solidFill>
+                <a:latin typeface="Consolas"/>
+              </a:defRPr>
+            </a:pPr>
+            <a:r>
+              <a:rPr sz="900" b="1">
+                <a:solidFill>
+                  <a:srgbClr val="0E7C86"/>
+                </a:solidFill>
+                <a:latin typeface="Consolas"/>
+              </a:rPr>
+              <a:t>l2c_maneuver_square.ino</a:t>
             </a:r>
           </a:p>
         </p:txBody>
@@ -12566,8 +12233,8 @@
         </p:nvSpPr>
         <p:spPr>
           <a:xfrm>
-            <a:off x="502920" y="5303520"/>
-            <a:ext cx="11185855" cy="960120"/>
+            <a:off x="502920" y="1517904"/>
+            <a:ext cx="7047088" cy="4745736"/>
           </a:xfrm>
           <a:prstGeom prst="roundRect">
             <a:avLst>
@@ -12575,11 +12242,11 @@
             </a:avLst>
           </a:prstGeom>
           <a:solidFill>
-            <a:srgbClr val="FDF3E3"/>
+            <a:srgbClr val="F4F6F8"/>
           </a:solidFill>
           <a:ln w="12700">
             <a:solidFill>
-              <a:srgbClr val="B46A0F"/>
+              <a:srgbClr val="C8D2DE"/>
             </a:solidFill>
           </a:ln>
           <a:effectLst/>
@@ -12599,27 +12266,415 @@
           </a:fontRef>
         </p:style>
         <p:txBody>
-          <a:bodyPr rtlCol="0" anchor="ctr" wrap="square" lIns="164592" rIns="164592" tIns="73152" bIns="73152"/>
-          <a:lstStyle/>
-          <a:p>
-            <a:pPr algn="l"/>
-            <a:r>
-              <a:rPr sz="1300" b="1">
-                <a:solidFill>
-                  <a:srgbClr val="B46A0F"/>
-                </a:solidFill>
-                <a:latin typeface="Calibri"/>
-              </a:rPr>
-              <a:t>WATCH OUT   </a:t>
-            </a:r>
-            <a:r>
-              <a:rPr sz="1500">
-                <a:solidFill>
-                  <a:srgbClr val="222222"/>
-                </a:solidFill>
-                <a:latin typeface="Calibri"/>
-              </a:rPr>
-              <a:t>Recharge the battery and run the same numbers again. The square gets bigger. Nothing in the program changed.</a:t>
+          <a:bodyPr rtlCol="0" anchor="t" wrap="square" lIns="146304" tIns="91440" bIns="73152"/>
+          <a:lstStyle/>
+          <a:p>
+            <a:pPr algn="l">
+              <a:lnSpc>
+                <a:spcPct val="100000"/>
+              </a:lnSpc>
+              <a:spcAft>
+                <a:spcPts val="0"/>
+              </a:spcAft>
+              <a:defRPr sz="1400">
+                <a:latin typeface="Consolas"/>
+              </a:defRPr>
+            </a:pPr>
+            <a:r>
+              <a:rPr sz="1400">
+                <a:solidFill>
+                  <a:srgbClr val="222222"/>
+                </a:solidFill>
+                <a:latin typeface="Consolas"/>
+              </a:rPr>
+              <a:t>void loop() {</a:t>
+            </a:r>
+          </a:p>
+          <a:p>
+            <a:pPr algn="l">
+              <a:lnSpc>
+                <a:spcPct val="100000"/>
+              </a:lnSpc>
+              <a:spcAft>
+                <a:spcPts val="0"/>
+              </a:spcAft>
+              <a:defRPr sz="1400">
+                <a:latin typeface="Consolas"/>
+              </a:defRPr>
+            </a:pPr>
+            <a:r>
+              <a:rPr sz="1400">
+                <a:solidFill>
+                  <a:srgbClr val="666666"/>
+                </a:solidFill>
+                <a:latin typeface="Consolas"/>
+              </a:rPr>
+              <a:t>  // Four sides and four corners makes a square.</a:t>
+            </a:r>
+          </a:p>
+          <a:p>
+            <a:pPr algn="l">
+              <a:lnSpc>
+                <a:spcPct val="100000"/>
+              </a:lnSpc>
+              <a:spcAft>
+                <a:spcPts val="0"/>
+              </a:spcAft>
+              <a:defRPr sz="1400">
+                <a:latin typeface="Consolas"/>
+              </a:defRPr>
+            </a:pPr>
+            <a:r>
+              <a:rPr sz="1400">
+                <a:solidFill>
+                  <a:srgbClr val="222222"/>
+                </a:solidFill>
+                <a:latin typeface="Consolas"/>
+              </a:rPr>
+              <a:t>  for (int corner = 0; corner &lt; 4; corner++) {</a:t>
+            </a:r>
+          </a:p>
+          <a:p>
+            <a:pPr algn="l">
+              <a:lnSpc>
+                <a:spcPct val="100000"/>
+              </a:lnSpc>
+              <a:spcAft>
+                <a:spcPts val="0"/>
+              </a:spcAft>
+              <a:defRPr sz="1400">
+                <a:latin typeface="Consolas"/>
+              </a:defRPr>
+            </a:pPr>
+            <a:r>
+              <a:rPr sz="1400">
+                <a:solidFill>
+                  <a:srgbClr val="222222"/>
+                </a:solidFill>
+                <a:latin typeface="Consolas"/>
+              </a:rPr>
+              <a:t>    goForward();</a:t>
+            </a:r>
+          </a:p>
+          <a:p>
+            <a:pPr algn="l">
+              <a:lnSpc>
+                <a:spcPct val="100000"/>
+              </a:lnSpc>
+              <a:spcAft>
+                <a:spcPts val="0"/>
+              </a:spcAft>
+              <a:defRPr sz="1400">
+                <a:latin typeface="Consolas"/>
+              </a:defRPr>
+            </a:pPr>
+            <a:r>
+              <a:rPr sz="1400" b="1">
+                <a:solidFill>
+                  <a:srgbClr val="0E7C86"/>
+                </a:solidFill>
+                <a:latin typeface="Consolas"/>
+              </a:rPr>
+              <a:t>    delay(FORWARD_MS);</a:t>
+            </a:r>
+          </a:p>
+          <a:p>
+            <a:pPr algn="l">
+              <a:lnSpc>
+                <a:spcPct val="100000"/>
+              </a:lnSpc>
+              <a:spcAft>
+                <a:spcPts val="0"/>
+              </a:spcAft>
+              <a:defRPr sz="1400">
+                <a:latin typeface="Consolas"/>
+              </a:defRPr>
+            </a:pPr>
+            <a:r>
+              <a:rPr sz="1400">
+                <a:solidFill>
+                  <a:srgbClr val="222222"/>
+                </a:solidFill>
+                <a:latin typeface="Consolas"/>
+              </a:rPr>
+              <a:t> </a:t>
+            </a:r>
+          </a:p>
+          <a:p>
+            <a:pPr algn="l">
+              <a:lnSpc>
+                <a:spcPct val="100000"/>
+              </a:lnSpc>
+              <a:spcAft>
+                <a:spcPts val="0"/>
+              </a:spcAft>
+              <a:defRPr sz="1400">
+                <a:latin typeface="Consolas"/>
+              </a:defRPr>
+            </a:pPr>
+            <a:r>
+              <a:rPr sz="1400">
+                <a:solidFill>
+                  <a:srgbClr val="222222"/>
+                </a:solidFill>
+                <a:latin typeface="Consolas"/>
+              </a:rPr>
+              <a:t>    spinRight();</a:t>
+            </a:r>
+          </a:p>
+          <a:p>
+            <a:pPr algn="l">
+              <a:lnSpc>
+                <a:spcPct val="100000"/>
+              </a:lnSpc>
+              <a:spcAft>
+                <a:spcPts val="0"/>
+              </a:spcAft>
+              <a:defRPr sz="1400">
+                <a:latin typeface="Consolas"/>
+              </a:defRPr>
+            </a:pPr>
+            <a:r>
+              <a:rPr sz="1400" b="1">
+                <a:solidFill>
+                  <a:srgbClr val="0E7C86"/>
+                </a:solidFill>
+                <a:latin typeface="Consolas"/>
+              </a:rPr>
+              <a:t>    delay(TURN_MS);</a:t>
+            </a:r>
+          </a:p>
+          <a:p>
+            <a:pPr algn="l">
+              <a:lnSpc>
+                <a:spcPct val="100000"/>
+              </a:lnSpc>
+              <a:spcAft>
+                <a:spcPts val="0"/>
+              </a:spcAft>
+              <a:defRPr sz="1400">
+                <a:latin typeface="Consolas"/>
+              </a:defRPr>
+            </a:pPr>
+            <a:r>
+              <a:rPr sz="1400">
+                <a:solidFill>
+                  <a:srgbClr val="222222"/>
+                </a:solidFill>
+                <a:latin typeface="Consolas"/>
+              </a:rPr>
+              <a:t>  }</a:t>
+            </a:r>
+          </a:p>
+          <a:p>
+            <a:pPr algn="l">
+              <a:lnSpc>
+                <a:spcPct val="100000"/>
+              </a:lnSpc>
+              <a:spcAft>
+                <a:spcPts val="0"/>
+              </a:spcAft>
+              <a:defRPr sz="1400">
+                <a:latin typeface="Consolas"/>
+              </a:defRPr>
+            </a:pPr>
+            <a:r>
+              <a:rPr sz="1400">
+                <a:solidFill>
+                  <a:srgbClr val="222222"/>
+                </a:solidFill>
+                <a:latin typeface="Consolas"/>
+              </a:rPr>
+              <a:t> </a:t>
+            </a:r>
+          </a:p>
+          <a:p>
+            <a:pPr algn="l">
+              <a:lnSpc>
+                <a:spcPct val="100000"/>
+              </a:lnSpc>
+              <a:spcAft>
+                <a:spcPts val="0"/>
+              </a:spcAft>
+              <a:defRPr sz="1400">
+                <a:latin typeface="Consolas"/>
+              </a:defRPr>
+            </a:pPr>
+            <a:r>
+              <a:rPr sz="1400">
+                <a:solidFill>
+                  <a:srgbClr val="222222"/>
+                </a:solidFill>
+                <a:latin typeface="Consolas"/>
+              </a:rPr>
+              <a:t>  stopMoving();</a:t>
+            </a:r>
+          </a:p>
+          <a:p>
+            <a:pPr algn="l">
+              <a:lnSpc>
+                <a:spcPct val="100000"/>
+              </a:lnSpc>
+              <a:spcAft>
+                <a:spcPts val="0"/>
+              </a:spcAft>
+              <a:defRPr sz="1400">
+                <a:latin typeface="Consolas"/>
+              </a:defRPr>
+            </a:pPr>
+            <a:r>
+              <a:rPr sz="1400">
+                <a:solidFill>
+                  <a:srgbClr val="222222"/>
+                </a:solidFill>
+                <a:latin typeface="Consolas"/>
+              </a:rPr>
+              <a:t>  delay(20000);   // pick your vehicle up</a:t>
+            </a:r>
+          </a:p>
+          <a:p>
+            <a:pPr algn="l">
+              <a:lnSpc>
+                <a:spcPct val="100000"/>
+              </a:lnSpc>
+              <a:spcAft>
+                <a:spcPts val="0"/>
+              </a:spcAft>
+              <a:defRPr sz="1400">
+                <a:latin typeface="Consolas"/>
+              </a:defRPr>
+            </a:pPr>
+            <a:r>
+              <a:rPr sz="1400">
+                <a:solidFill>
+                  <a:srgbClr val="222222"/>
+                </a:solidFill>
+                <a:latin typeface="Consolas"/>
+              </a:rPr>
+              <a:t>}</a:t>
+            </a:r>
+          </a:p>
+        </p:txBody>
+      </p:sp>
+      <p:sp>
+        <p:nvSpPr>
+          <p:cNvPr id="8" name="TextBox 7"/>
+          <p:cNvSpPr txBox="1"/>
+          <p:nvPr/>
+        </p:nvSpPr>
+        <p:spPr>
+          <a:xfrm>
+            <a:off x="7870048" y="1517904"/>
+            <a:ext cx="3818727" cy="4745736"/>
+          </a:xfrm>
+          <a:prstGeom prst="rect">
+            <a:avLst/>
+          </a:prstGeom>
+          <a:noFill/>
+        </p:spPr>
+        <p:txBody>
+          <a:bodyPr wrap="square" lIns="0" tIns="0" rIns="0" bIns="0">
+            <a:spAutoFit/>
+          </a:bodyPr>
+          <a:lstStyle/>
+          <a:p>
+            <a:pPr algn="l">
+              <a:lnSpc>
+                <a:spcPct val="100000"/>
+              </a:lnSpc>
+              <a:spcAft>
+                <a:spcPts val="1100"/>
+              </a:spcAft>
+              <a:defRPr sz="1500" b="0">
+                <a:solidFill>
+                  <a:srgbClr val="222222"/>
+                </a:solidFill>
+                <a:latin typeface="Calibri"/>
+              </a:defRPr>
+            </a:pPr>
+            <a:r>
+              <a:rPr sz="1500" b="0">
+                <a:solidFill>
+                  <a:srgbClr val="222222"/>
+                </a:solidFill>
+                <a:latin typeface="Calibri"/>
+              </a:rPr>
+              <a:t>A for loop repeats a block a fixed number of times. Four sides, four corners.</a:t>
+            </a:r>
+          </a:p>
+          <a:p>
+            <a:pPr algn="l">
+              <a:lnSpc>
+                <a:spcPct val="100000"/>
+              </a:lnSpc>
+              <a:spcAft>
+                <a:spcPts val="1100"/>
+              </a:spcAft>
+              <a:defRPr sz="1500" b="0">
+                <a:solidFill>
+                  <a:srgbClr val="222222"/>
+                </a:solidFill>
+                <a:latin typeface="Calibri"/>
+              </a:defRPr>
+            </a:pPr>
+            <a:r>
+              <a:rPr sz="1500" b="0">
+                <a:solidFill>
+                  <a:srgbClr val="222222"/>
+                </a:solidFill>
+                <a:latin typeface="Calibri"/>
+              </a:rPr>
+              <a:t>The whole shape is four numbers: DRIVE_SPEED, TURN_SPEED, FORWARD_MS and TURN_MS.</a:t>
+            </a:r>
+          </a:p>
+          <a:p>
+            <a:pPr algn="l">
+              <a:lnSpc>
+                <a:spcPct val="100000"/>
+              </a:lnSpc>
+              <a:spcAft>
+                <a:spcPts val="1100"/>
+              </a:spcAft>
+              <a:defRPr sz="1500" b="0">
+                <a:solidFill>
+                  <a:srgbClr val="222222"/>
+                </a:solidFill>
+                <a:latin typeface="Calibri"/>
+              </a:defRPr>
+            </a:pPr>
+            <a:r>
+              <a:rPr sz="1500" b="0">
+                <a:solidFill>
+                  <a:srgbClr val="222222"/>
+                </a:solidFill>
+                <a:latin typeface="Calibri"/>
+              </a:rPr>
+              <a:t>TURN_MS is the one you will spend most of your time on. It sets how far round each corner goes.</a:t>
+            </a:r>
+          </a:p>
+          <a:p>
+            <a:pPr algn="l">
+              <a:lnSpc>
+                <a:spcPct val="100000"/>
+              </a:lnSpc>
+              <a:spcAft>
+                <a:spcPts val="1100"/>
+              </a:spcAft>
+              <a:defRPr sz="1500" b="0">
+                <a:solidFill>
+                  <a:srgbClr val="222222"/>
+                </a:solidFill>
+                <a:latin typeface="Calibri"/>
+              </a:defRPr>
+            </a:pPr>
+            <a:r>
+              <a:rPr sz="1500" b="0">
+                <a:solidFill>
+                  <a:srgbClr val="222222"/>
+                </a:solidFill>
+                <a:latin typeface="Calibri"/>
+              </a:rPr>
+              <a:t>Note the twenty second stop at the end. That is so the program does not immediately start a second square while you are walking towards it.</a:t>
             </a:r>
           </a:p>
         </p:txBody>
@@ -12683,7 +12738,7 @@
                 </a:solidFill>
                 <a:latin typeface="Calibri"/>
               </a:rPr>
-              <a:t>Drag race  -  next week and the week after</a:t>
+              <a:t>Do it now  -  drive a square</a:t>
             </a:r>
           </a:p>
         </p:txBody>
@@ -12830,14 +12885,87 @@
       </p:sp>
       <p:sp>
         <p:nvSpPr>
-          <p:cNvPr id="6" name="TextBox 5"/>
-          <p:cNvSpPr txBox="1"/>
+          <p:cNvPr id="6" name="Rounded Rectangle 5"/>
+          <p:cNvSpPr/>
           <p:nvPr/>
         </p:nvSpPr>
         <p:spPr>
           <a:xfrm>
             <a:off x="502920" y="1188720"/>
             <a:ext cx="11185855" cy="530352"/>
+          </a:xfrm>
+          <a:prstGeom prst="roundRect">
+            <a:avLst>
+              <a:gd name="adj" fmla="val 4000"/>
+            </a:avLst>
+          </a:prstGeom>
+          <a:solidFill>
+            <a:srgbClr val="0E7C86"/>
+          </a:solidFill>
+          <a:ln>
+            <a:noFill/>
+          </a:ln>
+          <a:effectLst/>
+        </p:spPr>
+        <p:style>
+          <a:lnRef idx="1">
+            <a:schemeClr val="accent1"/>
+          </a:lnRef>
+          <a:fillRef idx="3">
+            <a:schemeClr val="accent1"/>
+          </a:fillRef>
+          <a:effectRef idx="2">
+            <a:schemeClr val="accent1"/>
+          </a:effectRef>
+          <a:fontRef idx="minor">
+            <a:schemeClr val="lt1"/>
+          </a:fontRef>
+        </p:style>
+        <p:txBody>
+          <a:bodyPr rtlCol="0" anchor="ctr" wrap="square" lIns="182880"/>
+          <a:lstStyle/>
+          <a:p>
+            <a:pPr algn="l"/>
+            <a:r>
+              <a:rPr sz="1300" b="1">
+                <a:solidFill>
+                  <a:srgbClr val="FFFFFF"/>
+                </a:solidFill>
+                <a:latin typeface="Calibri"/>
+              </a:rPr>
+              <a:t>UPLOAD AND RUN:   </a:t>
+            </a:r>
+            <a:r>
+              <a:rPr sz="1500" b="1">
+                <a:solidFill>
+                  <a:srgbClr val="FFFFFF"/>
+                </a:solidFill>
+                <a:latin typeface="Consolas"/>
+              </a:rPr>
+              <a:t>l2c_maneuver_square</a:t>
+            </a:r>
+            <a:r>
+              <a:rPr sz="1200">
+                <a:solidFill>
+                  <a:srgbClr val="FFFFFF"/>
+                </a:solidFill>
+                <a:latin typeface="Calibri"/>
+              </a:rPr>
+              <a:t>     (30 minutes)</a:t>
+            </a:r>
+          </a:p>
+        </p:txBody>
+      </p:sp>
+      <p:sp>
+        <p:nvSpPr>
+          <p:cNvPr id="7" name="TextBox 6"/>
+          <p:cNvSpPr txBox="1"/>
+          <p:nvPr/>
+        </p:nvSpPr>
+        <p:spPr>
+          <a:xfrm>
+            <a:off x="502920" y="1901952"/>
+            <a:ext cx="5387187" cy="3172968"/>
           </a:xfrm>
           <a:prstGeom prst="rect">
             <a:avLst/>
@@ -12855,37 +12983,187 @@
                 <a:spcPct val="100000"/>
               </a:lnSpc>
               <a:spcAft>
-                <a:spcPts val="600"/>
-              </a:spcAft>
-              <a:defRPr sz="1900" b="1">
-                <a:solidFill>
-                  <a:srgbClr val="0E7C86"/>
-                </a:solidFill>
-                <a:latin typeface="Calibri"/>
-              </a:defRPr>
-            </a:pPr>
-            <a:r>
-              <a:rPr sz="1900" b="1">
-                <a:solidFill>
-                  <a:srgbClr val="0E7C86"/>
-                </a:solidFill>
-                <a:latin typeface="Calibri"/>
-              </a:rPr>
-              <a:t>Calibrate first, then race</a:t>
-            </a:r>
-          </a:p>
-        </p:txBody>
-      </p:sp>
-      <p:sp>
-        <p:nvSpPr>
-          <p:cNvPr id="7" name="TextBox 6"/>
+                <a:spcPts val="800"/>
+              </a:spcAft>
+              <a:defRPr sz="1400" b="0">
+                <a:solidFill>
+                  <a:srgbClr val="222222"/>
+                </a:solidFill>
+                <a:latin typeface="Calibri"/>
+              </a:defRPr>
+            </a:pPr>
+            <a:r>
+              <a:rPr sz="1400" b="0">
+                <a:solidFill>
+                  <a:srgbClr val="222222"/>
+                </a:solidFill>
+                <a:latin typeface="Calibri"/>
+              </a:rPr>
+              <a:t>1.  Clear a space about three metres square. Bags and feet out.</a:t>
+            </a:r>
+          </a:p>
+          <a:p>
+            <a:pPr algn="l">
+              <a:lnSpc>
+                <a:spcPct val="100000"/>
+              </a:lnSpc>
+              <a:spcAft>
+                <a:spcPts val="800"/>
+              </a:spcAft>
+              <a:defRPr sz="1400" b="0">
+                <a:solidFill>
+                  <a:srgbClr val="222222"/>
+                </a:solidFill>
+                <a:latin typeface="Calibri"/>
+              </a:defRPr>
+            </a:pPr>
+            <a:r>
+              <a:rPr sz="1400" b="0">
+                <a:solidFill>
+                  <a:srgbClr val="222222"/>
+                </a:solidFill>
+                <a:latin typeface="Calibri"/>
+              </a:rPr>
+              <a:t>2.  Mark the starting point with a piece of tape.</a:t>
+            </a:r>
+          </a:p>
+          <a:p>
+            <a:pPr algn="l">
+              <a:lnSpc>
+                <a:spcPct val="100000"/>
+              </a:lnSpc>
+              <a:spcAft>
+                <a:spcPts val="800"/>
+              </a:spcAft>
+              <a:defRPr sz="1400" b="0">
+                <a:solidFill>
+                  <a:srgbClr val="222222"/>
+                </a:solidFill>
+                <a:latin typeface="Calibri"/>
+              </a:defRPr>
+            </a:pPr>
+            <a:r>
+              <a:rPr sz="1400" b="0">
+                <a:solidFill>
+                  <a:srgbClr val="222222"/>
+                </a:solidFill>
+                <a:latin typeface="Calibri"/>
+              </a:rPr>
+              <a:t>3.  Upload. It waits five seconds, then goes.</a:t>
+            </a:r>
+          </a:p>
+          <a:p>
+            <a:pPr algn="l">
+              <a:lnSpc>
+                <a:spcPct val="100000"/>
+              </a:lnSpc>
+              <a:spcAft>
+                <a:spcPts val="800"/>
+              </a:spcAft>
+              <a:defRPr sz="1400" b="0">
+                <a:solidFill>
+                  <a:srgbClr val="222222"/>
+                </a:solidFill>
+                <a:latin typeface="Calibri"/>
+              </a:defRPr>
+            </a:pPr>
+            <a:r>
+              <a:rPr sz="1400" b="0">
+                <a:solidFill>
+                  <a:srgbClr val="222222"/>
+                </a:solidFill>
+                <a:latin typeface="Calibri"/>
+              </a:rPr>
+              <a:t>4.  MEASURE one side of the square it actually drove.</a:t>
+            </a:r>
+          </a:p>
+          <a:p>
+            <a:pPr algn="l">
+              <a:lnSpc>
+                <a:spcPct val="100000"/>
+              </a:lnSpc>
+              <a:spcAft>
+                <a:spcPts val="800"/>
+              </a:spcAft>
+              <a:defRPr sz="1400" b="0">
+                <a:solidFill>
+                  <a:srgbClr val="222222"/>
+                </a:solidFill>
+                <a:latin typeface="Calibri"/>
+              </a:defRPr>
+            </a:pPr>
+            <a:r>
+              <a:rPr sz="1400" b="0">
+                <a:solidFill>
+                  <a:srgbClr val="222222"/>
+                </a:solidFill>
+                <a:latin typeface="Calibri"/>
+              </a:rPr>
+              <a:t>5.  Work out the speed:  side length / (FORWARD_MS / 1000)</a:t>
+            </a:r>
+          </a:p>
+          <a:p>
+            <a:pPr algn="l">
+              <a:lnSpc>
+                <a:spcPct val="100000"/>
+              </a:lnSpc>
+              <a:spcAft>
+                <a:spcPts val="800"/>
+              </a:spcAft>
+              <a:defRPr sz="1400" b="0">
+                <a:solidFill>
+                  <a:srgbClr val="222222"/>
+                </a:solidFill>
+                <a:latin typeface="Calibri"/>
+              </a:defRPr>
+            </a:pPr>
+            <a:r>
+              <a:rPr sz="1400" b="0">
+                <a:solidFill>
+                  <a:srgbClr val="222222"/>
+                </a:solidFill>
+                <a:latin typeface="Calibri"/>
+              </a:rPr>
+              <a:t>6.  The corners will not be 90 degrees. Adjust TURN_MS by 25 ms at a time until the vehicle comes back to its tape.</a:t>
+            </a:r>
+          </a:p>
+          <a:p>
+            <a:pPr algn="l">
+              <a:lnSpc>
+                <a:spcPct val="100000"/>
+              </a:lnSpc>
+              <a:spcAft>
+                <a:spcPts val="800"/>
+              </a:spcAft>
+              <a:defRPr sz="1400" b="0">
+                <a:solidFill>
+                  <a:srgbClr val="222222"/>
+                </a:solidFill>
+                <a:latin typeface="Calibri"/>
+              </a:defRPr>
+            </a:pPr>
+            <a:r>
+              <a:rPr sz="1400" b="0">
+                <a:solidFill>
+                  <a:srgbClr val="222222"/>
+                </a:solidFill>
+                <a:latin typeface="Calibri"/>
+              </a:rPr>
+              <a:t>7.  Now change FORWARD_MS and PREDICT the new square before running it. How close were you?</a:t>
+            </a:r>
+          </a:p>
+        </p:txBody>
+      </p:sp>
+      <p:sp>
+        <p:nvSpPr>
+          <p:cNvPr id="8" name="TextBox 7"/>
           <p:cNvSpPr txBox="1"/>
           <p:nvPr/>
         </p:nvSpPr>
         <p:spPr>
           <a:xfrm>
-            <a:off x="502920" y="1755648"/>
-            <a:ext cx="11185855" cy="4507992"/>
+            <a:off x="6301587" y="1901952"/>
+            <a:ext cx="5387187" cy="310896"/>
           </a:xfrm>
           <a:prstGeom prst="rect">
             <a:avLst/>
@@ -12903,189 +13181,283 @@
                 <a:spcPct val="100000"/>
               </a:lnSpc>
               <a:spcAft>
-                <a:spcPts val="900"/>
-              </a:spcAft>
-              <a:defRPr sz="1800" b="0">
-                <a:solidFill>
-                  <a:srgbClr val="222222"/>
-                </a:solidFill>
-                <a:latin typeface="Calibri"/>
-              </a:defRPr>
-            </a:pPr>
-            <a:r>
-              <a:rPr sz="1800" b="0">
-                <a:solidFill>
-                  <a:srgbClr val="222222"/>
-                </a:solidFill>
-                <a:latin typeface="Calibri"/>
-              </a:rPr>
-              <a:t>Mark a start line and a finish line with tape. Measure the distance.</a:t>
-            </a:r>
-          </a:p>
-          <a:p>
-            <a:pPr algn="l">
-              <a:lnSpc>
-                <a:spcPct val="100000"/>
-              </a:lnSpc>
-              <a:spcAft>
-                <a:spcPts val="900"/>
-              </a:spcAft>
-              <a:defRPr sz="1800" b="0">
-                <a:solidFill>
-                  <a:srgbClr val="222222"/>
-                </a:solidFill>
-                <a:latin typeface="Calibri"/>
-              </a:defRPr>
-            </a:pPr>
-            <a:r>
-              <a:rPr sz="1800" b="0">
-                <a:solidFill>
-                  <a:srgbClr val="222222"/>
-                </a:solidFill>
-                <a:latin typeface="Calibri"/>
-              </a:rPr>
-              <a:t>Line up two or three vehicles. Hold the reset button until the start signal, then let go.</a:t>
-            </a:r>
-          </a:p>
-          <a:p>
-            <a:pPr algn="l">
-              <a:lnSpc>
-                <a:spcPct val="100000"/>
-              </a:lnSpc>
-              <a:spcAft>
-                <a:spcPts val="900"/>
-              </a:spcAft>
-              <a:defRPr sz="1800" b="0">
-                <a:solidFill>
-                  <a:srgbClr val="222222"/>
-                </a:solidFill>
-                <a:latin typeface="Calibri"/>
-              </a:defRPr>
-            </a:pPr>
-            <a:r>
-              <a:rPr sz="1800" b="0">
-                <a:solidFill>
-                  <a:srgbClr val="222222"/>
-                </a:solidFill>
-                <a:latin typeface="Calibri"/>
-              </a:rPr>
-              <a:t>Time from start to crossing the line. Speed = distance / time.</a:t>
-            </a:r>
-          </a:p>
-          <a:p>
-            <a:pPr algn="l">
-              <a:lnSpc>
-                <a:spcPct val="100000"/>
-              </a:lnSpc>
-              <a:spcAft>
-                <a:spcPts val="900"/>
-              </a:spcAft>
-              <a:defRPr sz="1800" b="0">
-                <a:solidFill>
-                  <a:srgbClr val="222222"/>
-                </a:solidFill>
-                <a:latin typeface="Calibri"/>
-              </a:defRPr>
-            </a:pPr>
-            <a:r>
-              <a:rPr sz="1800" b="0">
-                <a:solidFill>
-                  <a:srgbClr val="222222"/>
-                </a:solidFill>
-                <a:latin typeface="Calibri"/>
-              </a:rPr>
-              <a:t>First across the line INSIDE the lane wins. Leaving the lane does not.</a:t>
-            </a:r>
-          </a:p>
-          <a:p>
-            <a:pPr algn="l">
-              <a:lnSpc>
-                <a:spcPct val="100000"/>
-              </a:lnSpc>
-              <a:spcAft>
-                <a:spcPts val="900"/>
-              </a:spcAft>
-              <a:defRPr sz="1800" b="0">
-                <a:solidFill>
-                  <a:srgbClr val="222222"/>
-                </a:solidFill>
-                <a:latin typeface="Calibri"/>
-              </a:defRPr>
-            </a:pPr>
-          </a:p>
-          <a:p>
-            <a:pPr algn="l">
-              <a:lnSpc>
-                <a:spcPct val="100000"/>
-              </a:lnSpc>
-              <a:spcAft>
-                <a:spcPts val="900"/>
-              </a:spcAft>
-              <a:defRPr sz="1800" b="0">
-                <a:solidFill>
-                  <a:srgbClr val="222222"/>
-                </a:solidFill>
-                <a:latin typeface="Calibri"/>
-              </a:defRPr>
-            </a:pPr>
-            <a:r>
-              <a:rPr sz="1800" b="0">
-                <a:solidFill>
-                  <a:srgbClr val="222222"/>
-                </a:solidFill>
-                <a:latin typeface="Calibri"/>
-              </a:rPr>
-              <a:t>Calibrate: you now know what duty value 255 gives you in feet per second. Try 200 and 150 as well. Is it a straight line?</a:t>
-            </a:r>
-          </a:p>
-          <a:p>
-            <a:pPr algn="l">
-              <a:lnSpc>
-                <a:spcPct val="100000"/>
-              </a:lnSpc>
-              <a:spcAft>
-                <a:spcPts val="900"/>
-              </a:spcAft>
-              <a:defRPr sz="1800" b="0">
-                <a:solidFill>
-                  <a:srgbClr val="222222"/>
-                </a:solidFill>
-                <a:latin typeface="Calibri"/>
-              </a:defRPr>
-            </a:pPr>
-            <a:r>
-              <a:rPr sz="1800" b="0">
-                <a:solidFill>
-                  <a:srgbClr val="222222"/>
-                </a:solidFill>
-                <a:latin typeface="Calibri"/>
-              </a:rPr>
-              <a:t>If your vehicle pulls to one side, you can add a short turn correction into the program to straighten it.</a:t>
-            </a:r>
-          </a:p>
-          <a:p>
-            <a:pPr algn="l">
-              <a:lnSpc>
-                <a:spcPct val="100000"/>
-              </a:lnSpc>
-              <a:spcAft>
-                <a:spcPts val="900"/>
-              </a:spcAft>
-              <a:defRPr sz="1800" b="0">
-                <a:solidFill>
-                  <a:srgbClr val="222222"/>
-                </a:solidFill>
-                <a:latin typeface="Calibri"/>
-              </a:defRPr>
-            </a:pPr>
-            <a:r>
-              <a:rPr sz="1800" b="0">
-                <a:solidFill>
-                  <a:srgbClr val="222222"/>
-                </a:solidFill>
-                <a:latin typeface="Calibri"/>
-              </a:rPr>
-              <a:t>You can only brake by driving in reverse - try half speed for a short time and see how far it slides.</a:t>
+                <a:spcPts val="300"/>
+              </a:spcAft>
+              <a:defRPr sz="1200" b="1">
+                <a:solidFill>
+                  <a:srgbClr val="0E7C86"/>
+                </a:solidFill>
+                <a:latin typeface="Calibri"/>
+              </a:defRPr>
+            </a:pPr>
+            <a:r>
+              <a:rPr sz="1200" b="1">
+                <a:solidFill>
+                  <a:srgbClr val="0E7C86"/>
+                </a:solidFill>
+                <a:latin typeface="Calibri"/>
+              </a:rPr>
+              <a:t>What you should see</a:t>
+            </a:r>
+          </a:p>
+        </p:txBody>
+      </p:sp>
+      <p:sp>
+        <p:nvSpPr>
+          <p:cNvPr id="9" name="TextBox 8"/>
+          <p:cNvSpPr txBox="1"/>
+          <p:nvPr/>
+        </p:nvSpPr>
+        <p:spPr>
+          <a:xfrm>
+            <a:off x="6301587" y="2249424"/>
+            <a:ext cx="5387187" cy="1220724"/>
+          </a:xfrm>
+          <a:prstGeom prst="rect">
+            <a:avLst/>
+          </a:prstGeom>
+          <a:noFill/>
+        </p:spPr>
+        <p:txBody>
+          <a:bodyPr wrap="square" lIns="0" tIns="0" rIns="0" bIns="0">
+            <a:spAutoFit/>
+          </a:bodyPr>
+          <a:lstStyle/>
+          <a:p>
+            <a:pPr algn="l">
+              <a:lnSpc>
+                <a:spcPct val="100000"/>
+              </a:lnSpc>
+              <a:spcAft>
+                <a:spcPts val="600"/>
+              </a:spcAft>
+              <a:defRPr sz="1500" b="0">
+                <a:solidFill>
+                  <a:srgbClr val="222222"/>
+                </a:solidFill>
+                <a:latin typeface="Calibri"/>
+              </a:defRPr>
+            </a:pPr>
+            <a:r>
+              <a:rPr sz="1500" b="0">
+                <a:solidFill>
+                  <a:srgbClr val="222222"/>
+                </a:solidFill>
+                <a:latin typeface="Calibri"/>
+              </a:rPr>
+              <a:t>Roughly a square. Roughly.</a:t>
+            </a:r>
+          </a:p>
+          <a:p>
+            <a:pPr algn="l">
+              <a:lnSpc>
+                <a:spcPct val="100000"/>
+              </a:lnSpc>
+              <a:spcAft>
+                <a:spcPts val="600"/>
+              </a:spcAft>
+              <a:defRPr sz="1500" b="0">
+                <a:solidFill>
+                  <a:srgbClr val="222222"/>
+                </a:solidFill>
+                <a:latin typeface="Calibri"/>
+              </a:defRPr>
+            </a:pPr>
+            <a:r>
+              <a:rPr sz="1500" b="0">
+                <a:solidFill>
+                  <a:srgbClr val="222222"/>
+                </a:solidFill>
+                <a:latin typeface="Calibri"/>
+              </a:rPr>
+              <a:t>It will not close perfectly on the first attempt. That is the point of the exercise, not a failure.</a:t>
+            </a:r>
+          </a:p>
+        </p:txBody>
+      </p:sp>
+      <p:sp>
+        <p:nvSpPr>
+          <p:cNvPr id="10" name="TextBox 9"/>
+          <p:cNvSpPr txBox="1"/>
+          <p:nvPr/>
+        </p:nvSpPr>
+        <p:spPr>
+          <a:xfrm>
+            <a:off x="6301587" y="3506724"/>
+            <a:ext cx="5387187" cy="310896"/>
+          </a:xfrm>
+          <a:prstGeom prst="rect">
+            <a:avLst/>
+          </a:prstGeom>
+          <a:noFill/>
+        </p:spPr>
+        <p:txBody>
+          <a:bodyPr wrap="square" lIns="0" tIns="0" rIns="0" bIns="0">
+            <a:spAutoFit/>
+          </a:bodyPr>
+          <a:lstStyle/>
+          <a:p>
+            <a:pPr algn="l">
+              <a:lnSpc>
+                <a:spcPct val="100000"/>
+              </a:lnSpc>
+              <a:spcAft>
+                <a:spcPts val="300"/>
+              </a:spcAft>
+              <a:defRPr sz="1200" b="1">
+                <a:solidFill>
+                  <a:srgbClr val="0E7C86"/>
+                </a:solidFill>
+                <a:latin typeface="Calibri"/>
+              </a:defRPr>
+            </a:pPr>
+            <a:r>
+              <a:rPr sz="1200" b="1">
+                <a:solidFill>
+                  <a:srgbClr val="0E7C86"/>
+                </a:solidFill>
+                <a:latin typeface="Calibri"/>
+              </a:rPr>
+              <a:t>Answer these</a:t>
+            </a:r>
+          </a:p>
+        </p:txBody>
+      </p:sp>
+      <p:sp>
+        <p:nvSpPr>
+          <p:cNvPr id="11" name="TextBox 10"/>
+          <p:cNvSpPr txBox="1"/>
+          <p:nvPr/>
+        </p:nvSpPr>
+        <p:spPr>
+          <a:xfrm>
+            <a:off x="6301587" y="3854196"/>
+            <a:ext cx="5387187" cy="1220724"/>
+          </a:xfrm>
+          <a:prstGeom prst="rect">
+            <a:avLst/>
+          </a:prstGeom>
+          <a:noFill/>
+        </p:spPr>
+        <p:txBody>
+          <a:bodyPr wrap="square" lIns="0" tIns="0" rIns="0" bIns="0">
+            <a:spAutoFit/>
+          </a:bodyPr>
+          <a:lstStyle/>
+          <a:p>
+            <a:pPr algn="l">
+              <a:lnSpc>
+                <a:spcPct val="100000"/>
+              </a:lnSpc>
+              <a:spcAft>
+                <a:spcPts val="600"/>
+              </a:spcAft>
+              <a:defRPr sz="1500" b="0">
+                <a:solidFill>
+                  <a:srgbClr val="222222"/>
+                </a:solidFill>
+                <a:latin typeface="Calibri"/>
+              </a:defRPr>
+            </a:pPr>
+            <a:r>
+              <a:rPr sz="1500" b="0">
+                <a:solidFill>
+                  <a:srgbClr val="222222"/>
+                </a:solidFill>
+                <a:latin typeface="Calibri"/>
+              </a:rPr>
+              <a:t>What is your vehicle's speed in feet per second?</a:t>
+            </a:r>
+          </a:p>
+          <a:p>
+            <a:pPr algn="l">
+              <a:lnSpc>
+                <a:spcPct val="100000"/>
+              </a:lnSpc>
+              <a:spcAft>
+                <a:spcPts val="600"/>
+              </a:spcAft>
+              <a:defRPr sz="1500" b="0">
+                <a:solidFill>
+                  <a:srgbClr val="222222"/>
+                </a:solidFill>
+                <a:latin typeface="Calibri"/>
+              </a:defRPr>
+            </a:pPr>
+            <a:r>
+              <a:rPr sz="1500" b="0">
+                <a:solidFill>
+                  <a:srgbClr val="222222"/>
+                </a:solidFill>
+                <a:latin typeface="Calibri"/>
+              </a:rPr>
+              <a:t>What is its turn rate in degrees per second?</a:t>
+            </a:r>
+          </a:p>
+        </p:txBody>
+      </p:sp>
+      <p:sp>
+        <p:nvSpPr>
+          <p:cNvPr id="12" name="Rounded Rectangle 11"/>
+          <p:cNvSpPr/>
+          <p:nvPr/>
+        </p:nvSpPr>
+        <p:spPr>
+          <a:xfrm>
+            <a:off x="502920" y="5303520"/>
+            <a:ext cx="11185855" cy="960120"/>
+          </a:xfrm>
+          <a:prstGeom prst="roundRect">
+            <a:avLst>
+              <a:gd name="adj" fmla="val 4000"/>
+            </a:avLst>
+          </a:prstGeom>
+          <a:solidFill>
+            <a:srgbClr val="FBECEC"/>
+          </a:solidFill>
+          <a:ln w="12700">
+            <a:solidFill>
+              <a:srgbClr val="A32A2A"/>
+            </a:solidFill>
+          </a:ln>
+          <a:effectLst/>
+        </p:spPr>
+        <p:style>
+          <a:lnRef idx="1">
+            <a:schemeClr val="accent1"/>
+          </a:lnRef>
+          <a:fillRef idx="3">
+            <a:schemeClr val="accent1"/>
+          </a:fillRef>
+          <a:effectRef idx="2">
+            <a:schemeClr val="accent1"/>
+          </a:effectRef>
+          <a:fontRef idx="minor">
+            <a:schemeClr val="lt1"/>
+          </a:fontRef>
+        </p:style>
+        <p:txBody>
+          <a:bodyPr rtlCol="0" anchor="ctr" wrap="square" lIns="164592" rIns="164592" tIns="73152" bIns="73152"/>
+          <a:lstStyle/>
+          <a:p>
+            <a:pPr algn="l"/>
+            <a:r>
+              <a:rPr sz="1300" b="1">
+                <a:solidFill>
+                  <a:srgbClr val="A32A2A"/>
+                </a:solidFill>
+                <a:latin typeface="Calibri"/>
+              </a:rPr>
+              <a:t>SAFETY   </a:t>
+            </a:r>
+            <a:r>
+              <a:rPr sz="1500">
+                <a:solidFill>
+                  <a:srgbClr val="222222"/>
+                </a:solidFill>
+                <a:latin typeface="Calibri"/>
+              </a:rPr>
+              <a:t>This one drives on the floor. Know where your power switch is before you upload.</a:t>
             </a:r>
           </a:p>
         </p:txBody>
@@ -13149,7 +13521,7 @@
                 </a:solidFill>
                 <a:latin typeface="Calibri"/>
               </a:rPr>
-              <a:t>Check yourself</a:t>
+              <a:t>Dead reckoning, and what it cannot do</a:t>
             </a:r>
           </a:p>
         </p:txBody>
@@ -13290,6 +13662,1880 @@
                 <a:latin typeface="Calibri"/>
               </a:rPr>
               <a:t>22</a:t>
+            </a:r>
+          </a:p>
+        </p:txBody>
+      </p:sp>
+      <p:sp>
+        <p:nvSpPr>
+          <p:cNvPr id="6" name="TextBox 5"/>
+          <p:cNvSpPr txBox="1"/>
+          <p:nvPr/>
+        </p:nvSpPr>
+        <p:spPr>
+          <a:xfrm>
+            <a:off x="502920" y="1188720"/>
+            <a:ext cx="11185855" cy="4023360"/>
+          </a:xfrm>
+          <a:prstGeom prst="rect">
+            <a:avLst/>
+          </a:prstGeom>
+          <a:noFill/>
+        </p:spPr>
+        <p:txBody>
+          <a:bodyPr wrap="square" lIns="0" tIns="0" rIns="0" bIns="0">
+            <a:spAutoFit/>
+          </a:bodyPr>
+          <a:lstStyle/>
+          <a:p>
+            <a:pPr algn="l">
+              <a:lnSpc>
+                <a:spcPct val="100000"/>
+              </a:lnSpc>
+              <a:spcAft>
+                <a:spcPts val="600"/>
+              </a:spcAft>
+              <a:defRPr sz="1500" b="0">
+                <a:solidFill>
+                  <a:srgbClr val="222222"/>
+                </a:solidFill>
+                <a:latin typeface="Calibri"/>
+              </a:defRPr>
+            </a:pPr>
+            <a:r>
+              <a:rPr sz="1500" b="0">
+                <a:solidFill>
+                  <a:srgbClr val="222222"/>
+                </a:solidFill>
+                <a:latin typeface="Calibri"/>
+              </a:rPr>
+              <a:t>DEAD RECKONING is working out where you are from your speed, your heading and the time - with no outside reference at all.</a:t>
+            </a:r>
+          </a:p>
+          <a:p>
+            <a:pPr algn="l">
+              <a:lnSpc>
+                <a:spcPct val="100000"/>
+              </a:lnSpc>
+              <a:spcAft>
+                <a:spcPts val="600"/>
+              </a:spcAft>
+              <a:defRPr sz="1500" b="0">
+                <a:solidFill>
+                  <a:srgbClr val="222222"/>
+                </a:solidFill>
+                <a:latin typeface="Calibri"/>
+              </a:defRPr>
+            </a:pPr>
+            <a:r>
+              <a:rPr sz="1500" b="0">
+                <a:solidFill>
+                  <a:srgbClr val="222222"/>
+                </a:solidFill>
+                <a:latin typeface="Calibri"/>
+              </a:rPr>
+              <a:t>Ships and aircraft navigated this way for centuries. Submersibles still fall back on it, because GPS does not work underwater.</a:t>
+            </a:r>
+          </a:p>
+          <a:p>
+            <a:pPr algn="l">
+              <a:lnSpc>
+                <a:spcPct val="100000"/>
+              </a:lnSpc>
+              <a:spcAft>
+                <a:spcPts val="600"/>
+              </a:spcAft>
+              <a:defRPr sz="1500" b="0">
+                <a:solidFill>
+                  <a:srgbClr val="222222"/>
+                </a:solidFill>
+                <a:latin typeface="Calibri"/>
+              </a:defRPr>
+            </a:pPr>
+          </a:p>
+          <a:p>
+            <a:pPr algn="l">
+              <a:lnSpc>
+                <a:spcPct val="100000"/>
+              </a:lnSpc>
+              <a:spcAft>
+                <a:spcPts val="600"/>
+              </a:spcAft>
+              <a:defRPr sz="1500" b="0">
+                <a:solidFill>
+                  <a:srgbClr val="222222"/>
+                </a:solidFill>
+                <a:latin typeface="Calibri"/>
+              </a:defRPr>
+            </a:pPr>
+            <a:r>
+              <a:rPr sz="1500" b="0">
+                <a:solidFill>
+                  <a:srgbClr val="222222"/>
+                </a:solidFill>
+                <a:latin typeface="Calibri"/>
+              </a:rPr>
+              <a:t>It DRIFTS. Every small error accumulates, and nothing ever corrects it. Errors in your square come from:</a:t>
+            </a:r>
+          </a:p>
+          <a:p>
+            <a:pPr lvl="1" algn="l">
+              <a:lnSpc>
+                <a:spcPct val="100000"/>
+              </a:lnSpc>
+              <a:spcAft>
+                <a:spcPts val="600"/>
+              </a:spcAft>
+              <a:defRPr sz="1500" b="0">
+                <a:solidFill>
+                  <a:srgbClr val="222222"/>
+                </a:solidFill>
+                <a:latin typeface="Calibri"/>
+              </a:defRPr>
+            </a:pPr>
+            <a:r>
+              <a:rPr sz="1500" b="0">
+                <a:solidFill>
+                  <a:srgbClr val="222222"/>
+                </a:solidFill>
+                <a:latin typeface="Calibri"/>
+              </a:rPr>
+              <a:t>Battery charge - a fresher pack drives further in the same time</a:t>
+            </a:r>
+          </a:p>
+          <a:p>
+            <a:pPr lvl="1" algn="l">
+              <a:lnSpc>
+                <a:spcPct val="100000"/>
+              </a:lnSpc>
+              <a:spcAft>
+                <a:spcPts val="600"/>
+              </a:spcAft>
+              <a:defRPr sz="1500" b="0">
+                <a:solidFill>
+                  <a:srgbClr val="222222"/>
+                </a:solidFill>
+                <a:latin typeface="Calibri"/>
+              </a:defRPr>
+            </a:pPr>
+            <a:r>
+              <a:rPr sz="1500" b="0">
+                <a:solidFill>
+                  <a:srgbClr val="222222"/>
+                </a:solidFill>
+                <a:latin typeface="Calibri"/>
+              </a:rPr>
+              <a:t>Floor surface - carpet, tile and concrete all differ</a:t>
+            </a:r>
+          </a:p>
+          <a:p>
+            <a:pPr lvl="1" algn="l">
+              <a:lnSpc>
+                <a:spcPct val="100000"/>
+              </a:lnSpc>
+              <a:spcAft>
+                <a:spcPts val="600"/>
+              </a:spcAft>
+              <a:defRPr sz="1500" b="0">
+                <a:solidFill>
+                  <a:srgbClr val="222222"/>
+                </a:solidFill>
+                <a:latin typeface="Calibri"/>
+              </a:defRPr>
+            </a:pPr>
+            <a:r>
+              <a:rPr sz="1500" b="0">
+                <a:solidFill>
+                  <a:srgbClr val="222222"/>
+                </a:solidFill>
+                <a:latin typeface="Calibri"/>
+              </a:rPr>
+              <a:t>Wheel slip during the turns, which skid steering guarantees</a:t>
+            </a:r>
+          </a:p>
+          <a:p>
+            <a:pPr lvl="1" algn="l">
+              <a:lnSpc>
+                <a:spcPct val="100000"/>
+              </a:lnSpc>
+              <a:spcAft>
+                <a:spcPts val="600"/>
+              </a:spcAft>
+              <a:defRPr sz="1500" b="0">
+                <a:solidFill>
+                  <a:srgbClr val="222222"/>
+                </a:solidFill>
+                <a:latin typeface="Calibri"/>
+              </a:defRPr>
+            </a:pPr>
+            <a:r>
+              <a:rPr sz="1500" b="0">
+                <a:solidFill>
+                  <a:srgbClr val="222222"/>
+                </a:solidFill>
+                <a:latin typeface="Calibri"/>
+              </a:rPr>
+              <a:t>Motors that are not perfectly matched to each other</a:t>
+            </a:r>
+          </a:p>
+          <a:p>
+            <a:pPr algn="l">
+              <a:lnSpc>
+                <a:spcPct val="100000"/>
+              </a:lnSpc>
+              <a:spcAft>
+                <a:spcPts val="600"/>
+              </a:spcAft>
+              <a:defRPr sz="1500" b="0">
+                <a:solidFill>
+                  <a:srgbClr val="222222"/>
+                </a:solidFill>
+                <a:latin typeface="Calibri"/>
+              </a:defRPr>
+            </a:pPr>
+          </a:p>
+          <a:p>
+            <a:pPr algn="l">
+              <a:lnSpc>
+                <a:spcPct val="100000"/>
+              </a:lnSpc>
+              <a:spcAft>
+                <a:spcPts val="600"/>
+              </a:spcAft>
+              <a:defRPr sz="1500" b="0">
+                <a:solidFill>
+                  <a:srgbClr val="222222"/>
+                </a:solidFill>
+                <a:latin typeface="Calibri"/>
+              </a:defRPr>
+            </a:pPr>
+            <a:r>
+              <a:rPr sz="1500" b="0">
+                <a:solidFill>
+                  <a:srgbClr val="222222"/>
+                </a:solidFill>
+                <a:latin typeface="Calibri"/>
+              </a:rPr>
+              <a:t>The fix is a SENSOR that tells you something true about the outside world. That is where the course goes after this one.</a:t>
+            </a:r>
+          </a:p>
+        </p:txBody>
+      </p:sp>
+      <p:sp>
+        <p:nvSpPr>
+          <p:cNvPr id="7" name="Rounded Rectangle 6"/>
+          <p:cNvSpPr/>
+          <p:nvPr/>
+        </p:nvSpPr>
+        <p:spPr>
+          <a:xfrm>
+            <a:off x="502920" y="5303520"/>
+            <a:ext cx="11185855" cy="960120"/>
+          </a:xfrm>
+          <a:prstGeom prst="roundRect">
+            <a:avLst>
+              <a:gd name="adj" fmla="val 4000"/>
+            </a:avLst>
+          </a:prstGeom>
+          <a:solidFill>
+            <a:srgbClr val="FDF3E3"/>
+          </a:solidFill>
+          <a:ln w="12700">
+            <a:solidFill>
+              <a:srgbClr val="B46A0F"/>
+            </a:solidFill>
+          </a:ln>
+          <a:effectLst/>
+        </p:spPr>
+        <p:style>
+          <a:lnRef idx="1">
+            <a:schemeClr val="accent1"/>
+          </a:lnRef>
+          <a:fillRef idx="3">
+            <a:schemeClr val="accent1"/>
+          </a:fillRef>
+          <a:effectRef idx="2">
+            <a:schemeClr val="accent1"/>
+          </a:effectRef>
+          <a:fontRef idx="minor">
+            <a:schemeClr val="lt1"/>
+          </a:fontRef>
+        </p:style>
+        <p:txBody>
+          <a:bodyPr rtlCol="0" anchor="ctr" wrap="square" lIns="164592" rIns="164592" tIns="73152" bIns="73152"/>
+          <a:lstStyle/>
+          <a:p>
+            <a:pPr algn="l"/>
+            <a:r>
+              <a:rPr sz="1300" b="1">
+                <a:solidFill>
+                  <a:srgbClr val="B46A0F"/>
+                </a:solidFill>
+                <a:latin typeface="Calibri"/>
+              </a:rPr>
+              <a:t>WATCH OUT   </a:t>
+            </a:r>
+            <a:r>
+              <a:rPr sz="1500">
+                <a:solidFill>
+                  <a:srgbClr val="222222"/>
+                </a:solidFill>
+                <a:latin typeface="Calibri"/>
+              </a:rPr>
+              <a:t>Recharge the battery and run the same numbers again. The square gets bigger. Nothing in the program changed.</a:t>
+            </a:r>
+          </a:p>
+        </p:txBody>
+      </p:sp>
+    </p:spTree>
+  </p:cSld>
+  <p:clrMapOvr>
+    <a:masterClrMapping/>
+  </p:clrMapOvr>
+</p:sld>
+</file>
+
+<file path=ppt/slides/slide24.xml><?xml version="1.0" encoding="utf-8"?>
+<p:sld xmlns:a="http://schemas.openxmlformats.org/drawingml/2006/main" xmlns:p="http://schemas.openxmlformats.org/presentationml/2006/main" xmlns:r="http://schemas.openxmlformats.org/officeDocument/2006/relationships">
+  <p:cSld>
+    <p:spTree>
+      <p:nvGrpSpPr>
+        <p:cNvPr id="1" name=""/>
+        <p:cNvGrpSpPr/>
+        <p:nvPr/>
+      </p:nvGrpSpPr>
+      <p:grpSpPr/>
+      <p:sp>
+        <p:nvSpPr>
+          <p:cNvPr id="2" name="Title 1"/>
+          <p:cNvSpPr>
+            <a:spLocks noGrp="1"/>
+          </p:cNvSpPr>
+          <p:nvPr>
+            <p:ph type="title"/>
+          </p:nvPr>
+        </p:nvSpPr>
+        <p:spPr>
+          <a:xfrm>
+            <a:off x="502920" y="274320"/>
+            <a:ext cx="11185855" cy="777240"/>
+          </a:xfrm>
+        </p:spPr>
+        <p:txBody>
+          <a:bodyPr wrap="square" anchor="b"/>
+          <a:lstStyle/>
+          <a:p>
+            <a:pPr algn="l">
+              <a:lnSpc>
+                <a:spcPct val="100000"/>
+              </a:lnSpc>
+              <a:spcAft>
+                <a:spcPts val="0"/>
+              </a:spcAft>
+              <a:defRPr sz="2800" b="1">
+                <a:solidFill>
+                  <a:srgbClr val="1F3A5F"/>
+                </a:solidFill>
+                <a:latin typeface="Calibri"/>
+              </a:defRPr>
+            </a:pPr>
+            <a:r>
+              <a:rPr sz="2800" b="1">
+                <a:solidFill>
+                  <a:srgbClr val="1F3A5F"/>
+                </a:solidFill>
+                <a:latin typeface="Calibri"/>
+              </a:rPr>
+              <a:t>Drag race  -  next week and the week after</a:t>
+            </a:r>
+          </a:p>
+        </p:txBody>
+      </p:sp>
+      <p:sp>
+        <p:nvSpPr>
+          <p:cNvPr id="3" name="Rectangle 2"/>
+          <p:cNvSpPr/>
+          <p:nvPr/>
+        </p:nvSpPr>
+        <p:spPr>
+          <a:xfrm>
+            <a:off x="502920" y="1097280"/>
+            <a:ext cx="11185855" cy="19050"/>
+          </a:xfrm>
+          <a:prstGeom prst="rect">
+            <a:avLst/>
+          </a:prstGeom>
+          <a:solidFill>
+            <a:srgbClr val="C8D2DE"/>
+          </a:solidFill>
+          <a:ln>
+            <a:noFill/>
+          </a:ln>
+          <a:effectLst/>
+        </p:spPr>
+        <p:style>
+          <a:lnRef idx="1">
+            <a:schemeClr val="accent1"/>
+          </a:lnRef>
+          <a:fillRef idx="3">
+            <a:schemeClr val="accent1"/>
+          </a:fillRef>
+          <a:effectRef idx="2">
+            <a:schemeClr val="accent1"/>
+          </a:effectRef>
+          <a:fontRef idx="minor">
+            <a:schemeClr val="lt1"/>
+          </a:fontRef>
+        </p:style>
+        <p:txBody>
+          <a:bodyPr rtlCol="0" anchor="ctr"/>
+          <a:lstStyle/>
+          <a:p>
+            <a:pPr algn="ctr"/>
+          </a:p>
+        </p:txBody>
+      </p:sp>
+      <p:sp>
+        <p:nvSpPr>
+          <p:cNvPr id="4" name="TextBox 3"/>
+          <p:cNvSpPr txBox="1"/>
+          <p:nvPr/>
+        </p:nvSpPr>
+        <p:spPr>
+          <a:xfrm>
+            <a:off x="502920" y="6382512"/>
+            <a:ext cx="10545775" cy="274320"/>
+          </a:xfrm>
+          <a:prstGeom prst="rect">
+            <a:avLst/>
+          </a:prstGeom>
+          <a:noFill/>
+        </p:spPr>
+        <p:txBody>
+          <a:bodyPr wrap="square" lIns="0" tIns="0">
+            <a:spAutoFit/>
+          </a:bodyPr>
+          <a:lstStyle/>
+          <a:p>
+            <a:pPr algn="l">
+              <a:lnSpc>
+                <a:spcPct val="100000"/>
+              </a:lnSpc>
+              <a:spcAft>
+                <a:spcPts val="0"/>
+              </a:spcAft>
+              <a:defRPr sz="900" b="0">
+                <a:solidFill>
+                  <a:srgbClr val="666666"/>
+                </a:solidFill>
+                <a:latin typeface="Calibri"/>
+              </a:defRPr>
+            </a:pPr>
+            <a:r>
+              <a:rPr sz="900" b="0">
+                <a:solidFill>
+                  <a:srgbClr val="666666"/>
+                </a:solidFill>
+                <a:latin typeface="Calibri"/>
+              </a:rPr>
+              <a:t>Pathfinder Beginner - PS3  |  Lesson 2</a:t>
+            </a:r>
+          </a:p>
+        </p:txBody>
+      </p:sp>
+      <p:sp>
+        <p:nvSpPr>
+          <p:cNvPr id="5" name="TextBox 4"/>
+          <p:cNvSpPr txBox="1"/>
+          <p:nvPr/>
+        </p:nvSpPr>
+        <p:spPr>
+          <a:xfrm>
+            <a:off x="11231575" y="6382512"/>
+            <a:ext cx="457200" cy="274320"/>
+          </a:xfrm>
+          <a:prstGeom prst="rect">
+            <a:avLst/>
+          </a:prstGeom>
+          <a:noFill/>
+        </p:spPr>
+        <p:txBody>
+          <a:bodyPr wrap="square" lIns="0" tIns="0">
+            <a:spAutoFit/>
+          </a:bodyPr>
+          <a:lstStyle/>
+          <a:p>
+            <a:pPr algn="r">
+              <a:lnSpc>
+                <a:spcPct val="100000"/>
+              </a:lnSpc>
+              <a:spcAft>
+                <a:spcPts val="0"/>
+              </a:spcAft>
+              <a:defRPr sz="900" b="0">
+                <a:solidFill>
+                  <a:srgbClr val="666666"/>
+                </a:solidFill>
+                <a:latin typeface="Calibri"/>
+              </a:defRPr>
+            </a:pPr>
+            <a:r>
+              <a:rPr sz="900" b="0">
+                <a:solidFill>
+                  <a:srgbClr val="666666"/>
+                </a:solidFill>
+                <a:latin typeface="Calibri"/>
+              </a:rPr>
+              <a:t>23</a:t>
+            </a:r>
+          </a:p>
+        </p:txBody>
+      </p:sp>
+      <p:sp>
+        <p:nvSpPr>
+          <p:cNvPr id="6" name="TextBox 5"/>
+          <p:cNvSpPr txBox="1"/>
+          <p:nvPr/>
+        </p:nvSpPr>
+        <p:spPr>
+          <a:xfrm>
+            <a:off x="502920" y="1188720"/>
+            <a:ext cx="11185855" cy="530352"/>
+          </a:xfrm>
+          <a:prstGeom prst="rect">
+            <a:avLst/>
+          </a:prstGeom>
+          <a:noFill/>
+        </p:spPr>
+        <p:txBody>
+          <a:bodyPr wrap="square" lIns="0" tIns="0" rIns="0" bIns="0">
+            <a:spAutoFit/>
+          </a:bodyPr>
+          <a:lstStyle/>
+          <a:p>
+            <a:pPr algn="l">
+              <a:lnSpc>
+                <a:spcPct val="100000"/>
+              </a:lnSpc>
+              <a:spcAft>
+                <a:spcPts val="600"/>
+              </a:spcAft>
+              <a:defRPr sz="1900" b="1">
+                <a:solidFill>
+                  <a:srgbClr val="0E7C86"/>
+                </a:solidFill>
+                <a:latin typeface="Calibri"/>
+              </a:defRPr>
+            </a:pPr>
+            <a:r>
+              <a:rPr sz="1900" b="1">
+                <a:solidFill>
+                  <a:srgbClr val="0E7C86"/>
+                </a:solidFill>
+                <a:latin typeface="Calibri"/>
+              </a:rPr>
+              <a:t>Calibrate first, then race</a:t>
+            </a:r>
+          </a:p>
+        </p:txBody>
+      </p:sp>
+      <p:sp>
+        <p:nvSpPr>
+          <p:cNvPr id="7" name="TextBox 6"/>
+          <p:cNvSpPr txBox="1"/>
+          <p:nvPr/>
+        </p:nvSpPr>
+        <p:spPr>
+          <a:xfrm>
+            <a:off x="502920" y="1755648"/>
+            <a:ext cx="11185855" cy="4507992"/>
+          </a:xfrm>
+          <a:prstGeom prst="rect">
+            <a:avLst/>
+          </a:prstGeom>
+          <a:noFill/>
+        </p:spPr>
+        <p:txBody>
+          <a:bodyPr wrap="square" lIns="0" tIns="0" rIns="0" bIns="0">
+            <a:spAutoFit/>
+          </a:bodyPr>
+          <a:lstStyle/>
+          <a:p>
+            <a:pPr algn="l">
+              <a:lnSpc>
+                <a:spcPct val="100000"/>
+              </a:lnSpc>
+              <a:spcAft>
+                <a:spcPts val="900"/>
+              </a:spcAft>
+              <a:defRPr sz="1800" b="0">
+                <a:solidFill>
+                  <a:srgbClr val="222222"/>
+                </a:solidFill>
+                <a:latin typeface="Calibri"/>
+              </a:defRPr>
+            </a:pPr>
+            <a:r>
+              <a:rPr sz="1800" b="0">
+                <a:solidFill>
+                  <a:srgbClr val="222222"/>
+                </a:solidFill>
+                <a:latin typeface="Calibri"/>
+              </a:rPr>
+              <a:t>Mark a start line and a finish line with tape. Measure the distance.</a:t>
+            </a:r>
+          </a:p>
+          <a:p>
+            <a:pPr algn="l">
+              <a:lnSpc>
+                <a:spcPct val="100000"/>
+              </a:lnSpc>
+              <a:spcAft>
+                <a:spcPts val="900"/>
+              </a:spcAft>
+              <a:defRPr sz="1800" b="0">
+                <a:solidFill>
+                  <a:srgbClr val="222222"/>
+                </a:solidFill>
+                <a:latin typeface="Calibri"/>
+              </a:defRPr>
+            </a:pPr>
+            <a:r>
+              <a:rPr sz="1800" b="0">
+                <a:solidFill>
+                  <a:srgbClr val="222222"/>
+                </a:solidFill>
+                <a:latin typeface="Calibri"/>
+              </a:rPr>
+              <a:t>Line up two or three vehicles. Hold the reset button until the start signal, then let go.</a:t>
+            </a:r>
+          </a:p>
+          <a:p>
+            <a:pPr algn="l">
+              <a:lnSpc>
+                <a:spcPct val="100000"/>
+              </a:lnSpc>
+              <a:spcAft>
+                <a:spcPts val="900"/>
+              </a:spcAft>
+              <a:defRPr sz="1800" b="0">
+                <a:solidFill>
+                  <a:srgbClr val="222222"/>
+                </a:solidFill>
+                <a:latin typeface="Calibri"/>
+              </a:defRPr>
+            </a:pPr>
+            <a:r>
+              <a:rPr sz="1800" b="0">
+                <a:solidFill>
+                  <a:srgbClr val="222222"/>
+                </a:solidFill>
+                <a:latin typeface="Calibri"/>
+              </a:rPr>
+              <a:t>Time from start to crossing the line. Speed = distance / time.</a:t>
+            </a:r>
+          </a:p>
+          <a:p>
+            <a:pPr algn="l">
+              <a:lnSpc>
+                <a:spcPct val="100000"/>
+              </a:lnSpc>
+              <a:spcAft>
+                <a:spcPts val="900"/>
+              </a:spcAft>
+              <a:defRPr sz="1800" b="0">
+                <a:solidFill>
+                  <a:srgbClr val="222222"/>
+                </a:solidFill>
+                <a:latin typeface="Calibri"/>
+              </a:defRPr>
+            </a:pPr>
+            <a:r>
+              <a:rPr sz="1800" b="0">
+                <a:solidFill>
+                  <a:srgbClr val="222222"/>
+                </a:solidFill>
+                <a:latin typeface="Calibri"/>
+              </a:rPr>
+              <a:t>First across the line INSIDE the lane wins. Leaving the lane does not.</a:t>
+            </a:r>
+          </a:p>
+          <a:p>
+            <a:pPr algn="l">
+              <a:lnSpc>
+                <a:spcPct val="100000"/>
+              </a:lnSpc>
+              <a:spcAft>
+                <a:spcPts val="900"/>
+              </a:spcAft>
+              <a:defRPr sz="1800" b="0">
+                <a:solidFill>
+                  <a:srgbClr val="222222"/>
+                </a:solidFill>
+                <a:latin typeface="Calibri"/>
+              </a:defRPr>
+            </a:pPr>
+          </a:p>
+          <a:p>
+            <a:pPr algn="l">
+              <a:lnSpc>
+                <a:spcPct val="100000"/>
+              </a:lnSpc>
+              <a:spcAft>
+                <a:spcPts val="900"/>
+              </a:spcAft>
+              <a:defRPr sz="1800" b="0">
+                <a:solidFill>
+                  <a:srgbClr val="222222"/>
+                </a:solidFill>
+                <a:latin typeface="Calibri"/>
+              </a:defRPr>
+            </a:pPr>
+            <a:r>
+              <a:rPr sz="1800" b="0">
+                <a:solidFill>
+                  <a:srgbClr val="222222"/>
+                </a:solidFill>
+                <a:latin typeface="Calibri"/>
+              </a:rPr>
+              <a:t>Calibrate: you now know what duty value 255 gives you in feet per second. Try 200 and 150 as well. Is it a straight line?</a:t>
+            </a:r>
+          </a:p>
+          <a:p>
+            <a:pPr algn="l">
+              <a:lnSpc>
+                <a:spcPct val="100000"/>
+              </a:lnSpc>
+              <a:spcAft>
+                <a:spcPts val="900"/>
+              </a:spcAft>
+              <a:defRPr sz="1800" b="0">
+                <a:solidFill>
+                  <a:srgbClr val="222222"/>
+                </a:solidFill>
+                <a:latin typeface="Calibri"/>
+              </a:defRPr>
+            </a:pPr>
+            <a:r>
+              <a:rPr sz="1800" b="0">
+                <a:solidFill>
+                  <a:srgbClr val="222222"/>
+                </a:solidFill>
+                <a:latin typeface="Calibri"/>
+              </a:rPr>
+              <a:t>If your vehicle pulls to one side, you can add a short turn correction into the program to straighten it.</a:t>
+            </a:r>
+          </a:p>
+          <a:p>
+            <a:pPr algn="l">
+              <a:lnSpc>
+                <a:spcPct val="100000"/>
+              </a:lnSpc>
+              <a:spcAft>
+                <a:spcPts val="900"/>
+              </a:spcAft>
+              <a:defRPr sz="1800" b="0">
+                <a:solidFill>
+                  <a:srgbClr val="222222"/>
+                </a:solidFill>
+                <a:latin typeface="Calibri"/>
+              </a:defRPr>
+            </a:pPr>
+            <a:r>
+              <a:rPr sz="1800" b="0">
+                <a:solidFill>
+                  <a:srgbClr val="222222"/>
+                </a:solidFill>
+                <a:latin typeface="Calibri"/>
+              </a:rPr>
+              <a:t>You can only brake by driving in reverse - try half speed for a short time and see how far it slides.</a:t>
+            </a:r>
+          </a:p>
+        </p:txBody>
+      </p:sp>
+    </p:spTree>
+  </p:cSld>
+  <p:clrMapOvr>
+    <a:masterClrMapping/>
+  </p:clrMapOvr>
+</p:sld>
+</file>
+
+<file path=ppt/slides/slide25.xml><?xml version="1.0" encoding="utf-8"?>
+<p:sld xmlns:a="http://schemas.openxmlformats.org/drawingml/2006/main" xmlns:p="http://schemas.openxmlformats.org/presentationml/2006/main" xmlns:r="http://schemas.openxmlformats.org/officeDocument/2006/relationships">
+  <p:cSld>
+    <p:spTree>
+      <p:nvGrpSpPr>
+        <p:cNvPr id="1" name=""/>
+        <p:cNvGrpSpPr/>
+        <p:nvPr/>
+      </p:nvGrpSpPr>
+      <p:grpSpPr/>
+      <p:sp>
+        <p:nvSpPr>
+          <p:cNvPr id="2" name="Title 1"/>
+          <p:cNvSpPr>
+            <a:spLocks noGrp="1"/>
+          </p:cNvSpPr>
+          <p:nvPr>
+            <p:ph type="title"/>
+          </p:nvPr>
+        </p:nvSpPr>
+        <p:spPr>
+          <a:xfrm>
+            <a:off x="502920" y="274320"/>
+            <a:ext cx="11185855" cy="777240"/>
+          </a:xfrm>
+        </p:spPr>
+        <p:txBody>
+          <a:bodyPr wrap="square" anchor="b"/>
+          <a:lstStyle/>
+          <a:p>
+            <a:pPr algn="l">
+              <a:lnSpc>
+                <a:spcPct val="100000"/>
+              </a:lnSpc>
+              <a:spcAft>
+                <a:spcPts val="0"/>
+              </a:spcAft>
+              <a:defRPr sz="2800" b="1">
+                <a:solidFill>
+                  <a:srgbClr val="1F3A5F"/>
+                </a:solidFill>
+                <a:latin typeface="Calibri"/>
+              </a:defRPr>
+            </a:pPr>
+            <a:r>
+              <a:rPr sz="2800" b="1">
+                <a:solidFill>
+                  <a:srgbClr val="1F3A5F"/>
+                </a:solidFill>
+                <a:latin typeface="Calibri"/>
+              </a:rPr>
+              <a:t>If you want to go further this week</a:t>
+            </a:r>
+          </a:p>
+        </p:txBody>
+      </p:sp>
+      <p:sp>
+        <p:nvSpPr>
+          <p:cNvPr id="3" name="Rectangle 2"/>
+          <p:cNvSpPr/>
+          <p:nvPr/>
+        </p:nvSpPr>
+        <p:spPr>
+          <a:xfrm>
+            <a:off x="502920" y="1097280"/>
+            <a:ext cx="11185855" cy="19050"/>
+          </a:xfrm>
+          <a:prstGeom prst="rect">
+            <a:avLst/>
+          </a:prstGeom>
+          <a:solidFill>
+            <a:srgbClr val="C8D2DE"/>
+          </a:solidFill>
+          <a:ln>
+            <a:noFill/>
+          </a:ln>
+          <a:effectLst/>
+        </p:spPr>
+        <p:style>
+          <a:lnRef idx="1">
+            <a:schemeClr val="accent1"/>
+          </a:lnRef>
+          <a:fillRef idx="3">
+            <a:schemeClr val="accent1"/>
+          </a:fillRef>
+          <a:effectRef idx="2">
+            <a:schemeClr val="accent1"/>
+          </a:effectRef>
+          <a:fontRef idx="minor">
+            <a:schemeClr val="lt1"/>
+          </a:fontRef>
+        </p:style>
+        <p:txBody>
+          <a:bodyPr rtlCol="0" anchor="ctr"/>
+          <a:lstStyle/>
+          <a:p>
+            <a:pPr algn="ctr"/>
+          </a:p>
+        </p:txBody>
+      </p:sp>
+      <p:sp>
+        <p:nvSpPr>
+          <p:cNvPr id="4" name="TextBox 3"/>
+          <p:cNvSpPr txBox="1"/>
+          <p:nvPr/>
+        </p:nvSpPr>
+        <p:spPr>
+          <a:xfrm>
+            <a:off x="502920" y="6382512"/>
+            <a:ext cx="10545775" cy="274320"/>
+          </a:xfrm>
+          <a:prstGeom prst="rect">
+            <a:avLst/>
+          </a:prstGeom>
+          <a:noFill/>
+        </p:spPr>
+        <p:txBody>
+          <a:bodyPr wrap="square" lIns="0" tIns="0">
+            <a:spAutoFit/>
+          </a:bodyPr>
+          <a:lstStyle/>
+          <a:p>
+            <a:pPr algn="l">
+              <a:lnSpc>
+                <a:spcPct val="100000"/>
+              </a:lnSpc>
+              <a:spcAft>
+                <a:spcPts val="0"/>
+              </a:spcAft>
+              <a:defRPr sz="900" b="0">
+                <a:solidFill>
+                  <a:srgbClr val="666666"/>
+                </a:solidFill>
+                <a:latin typeface="Calibri"/>
+              </a:defRPr>
+            </a:pPr>
+            <a:r>
+              <a:rPr sz="900" b="0">
+                <a:solidFill>
+                  <a:srgbClr val="666666"/>
+                </a:solidFill>
+                <a:latin typeface="Calibri"/>
+              </a:rPr>
+              <a:t>Pathfinder Beginner - PS3  |  Lesson 2</a:t>
+            </a:r>
+          </a:p>
+        </p:txBody>
+      </p:sp>
+      <p:sp>
+        <p:nvSpPr>
+          <p:cNvPr id="5" name="TextBox 4"/>
+          <p:cNvSpPr txBox="1"/>
+          <p:nvPr/>
+        </p:nvSpPr>
+        <p:spPr>
+          <a:xfrm>
+            <a:off x="11231575" y="6382512"/>
+            <a:ext cx="457200" cy="274320"/>
+          </a:xfrm>
+          <a:prstGeom prst="rect">
+            <a:avLst/>
+          </a:prstGeom>
+          <a:noFill/>
+        </p:spPr>
+        <p:txBody>
+          <a:bodyPr wrap="square" lIns="0" tIns="0">
+            <a:spAutoFit/>
+          </a:bodyPr>
+          <a:lstStyle/>
+          <a:p>
+            <a:pPr algn="r">
+              <a:lnSpc>
+                <a:spcPct val="100000"/>
+              </a:lnSpc>
+              <a:spcAft>
+                <a:spcPts val="0"/>
+              </a:spcAft>
+              <a:defRPr sz="900" b="0">
+                <a:solidFill>
+                  <a:srgbClr val="666666"/>
+                </a:solidFill>
+                <a:latin typeface="Calibri"/>
+              </a:defRPr>
+            </a:pPr>
+            <a:r>
+              <a:rPr sz="900" b="0">
+                <a:solidFill>
+                  <a:srgbClr val="666666"/>
+                </a:solidFill>
+                <a:latin typeface="Calibri"/>
+              </a:rPr>
+              <a:t>24</a:t>
+            </a:r>
+          </a:p>
+        </p:txBody>
+      </p:sp>
+      <p:sp>
+        <p:nvSpPr>
+          <p:cNvPr id="6" name="TextBox 5"/>
+          <p:cNvSpPr txBox="1"/>
+          <p:nvPr/>
+        </p:nvSpPr>
+        <p:spPr>
+          <a:xfrm>
+            <a:off x="502920" y="1188720"/>
+            <a:ext cx="5364327" cy="402336"/>
+          </a:xfrm>
+          <a:prstGeom prst="rect">
+            <a:avLst/>
+          </a:prstGeom>
+          <a:noFill/>
+        </p:spPr>
+        <p:txBody>
+          <a:bodyPr wrap="square" lIns="0" tIns="0" rIns="0" bIns="0">
+            <a:spAutoFit/>
+          </a:bodyPr>
+          <a:lstStyle/>
+          <a:p>
+            <a:pPr algn="l">
+              <a:lnSpc>
+                <a:spcPct val="100000"/>
+              </a:lnSpc>
+              <a:spcAft>
+                <a:spcPts val="600"/>
+              </a:spcAft>
+              <a:defRPr sz="1600" b="1">
+                <a:solidFill>
+                  <a:srgbClr val="0E7C86"/>
+                </a:solidFill>
+                <a:latin typeface="Calibri"/>
+              </a:defRPr>
+            </a:pPr>
+            <a:r>
+              <a:rPr sz="1600" b="1">
+                <a:solidFill>
+                  <a:srgbClr val="0E7C86"/>
+                </a:solidFill>
+                <a:latin typeface="Calibri"/>
+              </a:rPr>
+              <a:t>Watch</a:t>
+            </a:r>
+          </a:p>
+        </p:txBody>
+      </p:sp>
+      <p:sp>
+        <p:nvSpPr>
+          <p:cNvPr id="7" name="TextBox 6"/>
+          <p:cNvSpPr txBox="1"/>
+          <p:nvPr/>
+        </p:nvSpPr>
+        <p:spPr>
+          <a:xfrm>
+            <a:off x="502920" y="1645920"/>
+            <a:ext cx="5364327" cy="3474720"/>
+          </a:xfrm>
+          <a:prstGeom prst="rect">
+            <a:avLst/>
+          </a:prstGeom>
+          <a:noFill/>
+        </p:spPr>
+        <p:txBody>
+          <a:bodyPr wrap="square" lIns="0" tIns="0" rIns="0" bIns="0">
+            <a:spAutoFit/>
+          </a:bodyPr>
+          <a:lstStyle/>
+          <a:p>
+            <a:pPr algn="l">
+              <a:lnSpc>
+                <a:spcPct val="100000"/>
+              </a:lnSpc>
+              <a:spcAft>
+                <a:spcPts val="800"/>
+              </a:spcAft>
+              <a:defRPr sz="1300" b="0">
+                <a:solidFill>
+                  <a:srgbClr val="222222"/>
+                </a:solidFill>
+                <a:latin typeface="Calibri"/>
+              </a:defRPr>
+            </a:pPr>
+            <a:r>
+              <a:rPr sz="1300" b="0">
+                <a:solidFill>
+                  <a:srgbClr val="222222"/>
+                </a:solidFill>
+                <a:latin typeface="Calibri"/>
+              </a:rPr>
+              <a:t>How PWM works, controlling a motor   (10:10)</a:t>
+            </a:r>
+          </a:p>
+          <a:p>
+            <a:pPr lvl="1" algn="l">
+              <a:lnSpc>
+                <a:spcPct val="100000"/>
+              </a:lnSpc>
+              <a:spcAft>
+                <a:spcPts val="800"/>
+              </a:spcAft>
+              <a:defRPr sz="1300" b="0">
+                <a:solidFill>
+                  <a:srgbClr val="222222"/>
+                </a:solidFill>
+                <a:latin typeface="Calibri"/>
+              </a:defRPr>
+            </a:pPr>
+            <a:r>
+              <a:rPr sz="1300" b="0">
+                <a:solidFill>
+                  <a:srgbClr val="222222"/>
+                </a:solidFill>
+                <a:latin typeface="Calibri"/>
+              </a:rPr>
+              <a:t>youtube.com/watch?v=5nwNKPs2gco</a:t>
+            </a:r>
+          </a:p>
+          <a:p>
+            <a:pPr algn="l">
+              <a:lnSpc>
+                <a:spcPct val="100000"/>
+              </a:lnSpc>
+              <a:spcAft>
+                <a:spcPts val="800"/>
+              </a:spcAft>
+              <a:defRPr sz="1300" b="0">
+                <a:solidFill>
+                  <a:srgbClr val="222222"/>
+                </a:solidFill>
+                <a:latin typeface="Calibri"/>
+              </a:defRPr>
+            </a:pPr>
+          </a:p>
+          <a:p>
+            <a:pPr algn="l">
+              <a:lnSpc>
+                <a:spcPct val="100000"/>
+              </a:lnSpc>
+              <a:spcAft>
+                <a:spcPts val="800"/>
+              </a:spcAft>
+              <a:defRPr sz="1300" b="0">
+                <a:solidFill>
+                  <a:srgbClr val="222222"/>
+                </a:solidFill>
+                <a:latin typeface="Calibri"/>
+              </a:defRPr>
+            </a:pPr>
+            <a:r>
+              <a:rPr sz="1300" b="0">
+                <a:solidFill>
+                  <a:srgbClr val="222222"/>
+                </a:solidFill>
+                <a:latin typeface="Calibri"/>
+              </a:rPr>
+              <a:t>Arduino DC motor control   (11:44)</a:t>
+            </a:r>
+          </a:p>
+          <a:p>
+            <a:pPr lvl="1" algn="l">
+              <a:lnSpc>
+                <a:spcPct val="100000"/>
+              </a:lnSpc>
+              <a:spcAft>
+                <a:spcPts val="800"/>
+              </a:spcAft>
+              <a:defRPr sz="1300" b="0">
+                <a:solidFill>
+                  <a:srgbClr val="222222"/>
+                </a:solidFill>
+                <a:latin typeface="Calibri"/>
+              </a:defRPr>
+            </a:pPr>
+            <a:r>
+              <a:rPr sz="1300" b="0">
+                <a:solidFill>
+                  <a:srgbClr val="222222"/>
+                </a:solidFill>
+                <a:latin typeface="Calibri"/>
+              </a:rPr>
+              <a:t>youtube.com/watch?v=HtbCL2NruUY</a:t>
+            </a:r>
+          </a:p>
+          <a:p>
+            <a:pPr algn="l">
+              <a:lnSpc>
+                <a:spcPct val="100000"/>
+              </a:lnSpc>
+              <a:spcAft>
+                <a:spcPts val="800"/>
+              </a:spcAft>
+              <a:defRPr sz="1300" b="0">
+                <a:solidFill>
+                  <a:srgbClr val="222222"/>
+                </a:solidFill>
+                <a:latin typeface="Calibri"/>
+              </a:defRPr>
+            </a:pPr>
+          </a:p>
+          <a:p>
+            <a:pPr algn="l">
+              <a:lnSpc>
+                <a:spcPct val="100000"/>
+              </a:lnSpc>
+              <a:spcAft>
+                <a:spcPts val="800"/>
+              </a:spcAft>
+              <a:defRPr sz="1300" b="0">
+                <a:solidFill>
+                  <a:srgbClr val="222222"/>
+                </a:solidFill>
+                <a:latin typeface="Calibri"/>
+              </a:defRPr>
+            </a:pPr>
+            <a:r>
+              <a:rPr sz="1300" b="0">
+                <a:solidFill>
+                  <a:srgbClr val="222222"/>
+                </a:solidFill>
+                <a:latin typeface="Calibri"/>
+              </a:rPr>
+              <a:t>Motor speed tutorial with PWM motors   (17:33)</a:t>
+            </a:r>
+          </a:p>
+          <a:p>
+            <a:pPr lvl="1" algn="l">
+              <a:lnSpc>
+                <a:spcPct val="100000"/>
+              </a:lnSpc>
+              <a:spcAft>
+                <a:spcPts val="800"/>
+              </a:spcAft>
+              <a:defRPr sz="1300" b="0">
+                <a:solidFill>
+                  <a:srgbClr val="222222"/>
+                </a:solidFill>
+                <a:latin typeface="Calibri"/>
+              </a:defRPr>
+            </a:pPr>
+            <a:r>
+              <a:rPr sz="1300" b="0">
+                <a:solidFill>
+                  <a:srgbClr val="222222"/>
+                </a:solidFill>
+                <a:latin typeface="Calibri"/>
+              </a:rPr>
+              <a:t>youtube.com/watch?v=UPTU6nYSaMo</a:t>
+            </a:r>
+          </a:p>
+          <a:p>
+            <a:pPr algn="l">
+              <a:lnSpc>
+                <a:spcPct val="100000"/>
+              </a:lnSpc>
+              <a:spcAft>
+                <a:spcPts val="800"/>
+              </a:spcAft>
+              <a:defRPr sz="1300" b="0">
+                <a:solidFill>
+                  <a:srgbClr val="222222"/>
+                </a:solidFill>
+                <a:latin typeface="Calibri"/>
+              </a:defRPr>
+            </a:pPr>
+          </a:p>
+          <a:p>
+            <a:pPr algn="l">
+              <a:lnSpc>
+                <a:spcPct val="100000"/>
+              </a:lnSpc>
+              <a:spcAft>
+                <a:spcPts val="800"/>
+              </a:spcAft>
+              <a:defRPr sz="1300" b="0">
+                <a:solidFill>
+                  <a:srgbClr val="222222"/>
+                </a:solidFill>
+                <a:latin typeface="Calibri"/>
+              </a:defRPr>
+            </a:pPr>
+            <a:r>
+              <a:rPr sz="1300" b="0">
+                <a:solidFill>
+                  <a:srgbClr val="222222"/>
+                </a:solidFill>
+                <a:latin typeface="Calibri"/>
+              </a:rPr>
+              <a:t>Loops in C   (video)</a:t>
+            </a:r>
+          </a:p>
+          <a:p>
+            <a:pPr lvl="1" algn="l">
+              <a:lnSpc>
+                <a:spcPct val="100000"/>
+              </a:lnSpc>
+              <a:spcAft>
+                <a:spcPts val="800"/>
+              </a:spcAft>
+              <a:defRPr sz="1300" b="0">
+                <a:solidFill>
+                  <a:srgbClr val="222222"/>
+                </a:solidFill>
+                <a:latin typeface="Calibri"/>
+              </a:defRPr>
+            </a:pPr>
+            <a:r>
+              <a:rPr sz="1300" b="0">
+                <a:solidFill>
+                  <a:srgbClr val="222222"/>
+                </a:solidFill>
+                <a:latin typeface="Calibri"/>
+              </a:rPr>
+              <a:t>youtube.com/watch?v=b4DPj0XAfSg</a:t>
+            </a:r>
+          </a:p>
+        </p:txBody>
+      </p:sp>
+      <p:sp>
+        <p:nvSpPr>
+          <p:cNvPr id="8" name="TextBox 7"/>
+          <p:cNvSpPr txBox="1"/>
+          <p:nvPr/>
+        </p:nvSpPr>
+        <p:spPr>
+          <a:xfrm>
+            <a:off x="6324447" y="1188720"/>
+            <a:ext cx="5364327" cy="402336"/>
+          </a:xfrm>
+          <a:prstGeom prst="rect">
+            <a:avLst/>
+          </a:prstGeom>
+          <a:noFill/>
+        </p:spPr>
+        <p:txBody>
+          <a:bodyPr wrap="square" lIns="0" tIns="0" rIns="0" bIns="0">
+            <a:spAutoFit/>
+          </a:bodyPr>
+          <a:lstStyle/>
+          <a:p>
+            <a:pPr algn="l">
+              <a:lnSpc>
+                <a:spcPct val="100000"/>
+              </a:lnSpc>
+              <a:spcAft>
+                <a:spcPts val="600"/>
+              </a:spcAft>
+              <a:defRPr sz="1600" b="1">
+                <a:solidFill>
+                  <a:srgbClr val="0E7C86"/>
+                </a:solidFill>
+                <a:latin typeface="Calibri"/>
+              </a:defRPr>
+            </a:pPr>
+            <a:r>
+              <a:rPr sz="1600" b="1">
+                <a:solidFill>
+                  <a:srgbClr val="0E7C86"/>
+                </a:solidFill>
+                <a:latin typeface="Calibri"/>
+              </a:rPr>
+              <a:t>Read</a:t>
+            </a:r>
+          </a:p>
+        </p:txBody>
+      </p:sp>
+      <p:sp>
+        <p:nvSpPr>
+          <p:cNvPr id="9" name="TextBox 8"/>
+          <p:cNvSpPr txBox="1"/>
+          <p:nvPr/>
+        </p:nvSpPr>
+        <p:spPr>
+          <a:xfrm>
+            <a:off x="6324447" y="1645920"/>
+            <a:ext cx="5364327" cy="3474720"/>
+          </a:xfrm>
+          <a:prstGeom prst="rect">
+            <a:avLst/>
+          </a:prstGeom>
+          <a:noFill/>
+        </p:spPr>
+        <p:txBody>
+          <a:bodyPr wrap="square" lIns="0" tIns="0" rIns="0" bIns="0">
+            <a:spAutoFit/>
+          </a:bodyPr>
+          <a:lstStyle/>
+          <a:p>
+            <a:pPr algn="l">
+              <a:lnSpc>
+                <a:spcPct val="100000"/>
+              </a:lnSpc>
+              <a:spcAft>
+                <a:spcPts val="800"/>
+              </a:spcAft>
+              <a:defRPr sz="1500" b="0">
+                <a:solidFill>
+                  <a:srgbClr val="222222"/>
+                </a:solidFill>
+                <a:latin typeface="Calibri"/>
+              </a:defRPr>
+            </a:pPr>
+            <a:r>
+              <a:rPr sz="1500" b="0">
+                <a:solidFill>
+                  <a:srgbClr val="222222"/>
+                </a:solidFill>
+                <a:latin typeface="Calibri"/>
+              </a:rPr>
+              <a:t>Loops in C, worked through properly</a:t>
+            </a:r>
+          </a:p>
+          <a:p>
+            <a:pPr lvl="1" algn="l">
+              <a:lnSpc>
+                <a:spcPct val="100000"/>
+              </a:lnSpc>
+              <a:spcAft>
+                <a:spcPts val="800"/>
+              </a:spcAft>
+              <a:defRPr sz="1500" b="0">
+                <a:solidFill>
+                  <a:srgbClr val="222222"/>
+                </a:solidFill>
+                <a:latin typeface="Calibri"/>
+              </a:defRPr>
+            </a:pPr>
+            <a:r>
+              <a:rPr sz="1500" b="0">
+                <a:solidFill>
+                  <a:srgbClr val="222222"/>
+                </a:solidFill>
+                <a:latin typeface="Calibri"/>
+              </a:rPr>
+              <a:t>geeksforgeeks.org/c/c-loops/</a:t>
+            </a:r>
+          </a:p>
+          <a:p>
+            <a:pPr algn="l">
+              <a:lnSpc>
+                <a:spcPct val="100000"/>
+              </a:lnSpc>
+              <a:spcAft>
+                <a:spcPts val="800"/>
+              </a:spcAft>
+              <a:defRPr sz="1500" b="0">
+                <a:solidFill>
+                  <a:srgbClr val="222222"/>
+                </a:solidFill>
+                <a:latin typeface="Calibri"/>
+              </a:defRPr>
+            </a:pPr>
+          </a:p>
+          <a:p>
+            <a:pPr algn="l">
+              <a:lnSpc>
+                <a:spcPct val="100000"/>
+              </a:lnSpc>
+              <a:spcAft>
+                <a:spcPts val="800"/>
+              </a:spcAft>
+              <a:defRPr sz="1500" b="0">
+                <a:solidFill>
+                  <a:srgbClr val="222222"/>
+                </a:solidFill>
+                <a:latin typeface="Calibri"/>
+              </a:defRPr>
+            </a:pPr>
+            <a:r>
+              <a:rPr sz="1500" b="0">
+                <a:solidFill>
+                  <a:srgbClr val="222222"/>
+                </a:solidFill>
+                <a:latin typeface="Calibri"/>
+              </a:rPr>
+              <a:t>Control structures - loops and conditionals</a:t>
+            </a:r>
+          </a:p>
+          <a:p>
+            <a:pPr lvl="1" algn="l">
+              <a:lnSpc>
+                <a:spcPct val="100000"/>
+              </a:lnSpc>
+              <a:spcAft>
+                <a:spcPts val="800"/>
+              </a:spcAft>
+              <a:defRPr sz="1500" b="0">
+                <a:solidFill>
+                  <a:srgbClr val="222222"/>
+                </a:solidFill>
+                <a:latin typeface="Calibri"/>
+              </a:defRPr>
+            </a:pPr>
+            <a:r>
+              <a:rPr sz="1500" b="0">
+                <a:solidFill>
+                  <a:srgbClr val="222222"/>
+                </a:solidFill>
+                <a:latin typeface="Calibri"/>
+              </a:rPr>
+              <a:t>cplusplus.com/doc/tutorial/control/</a:t>
+            </a:r>
+          </a:p>
+          <a:p>
+            <a:pPr algn="l">
+              <a:lnSpc>
+                <a:spcPct val="100000"/>
+              </a:lnSpc>
+              <a:spcAft>
+                <a:spcPts val="800"/>
+              </a:spcAft>
+              <a:defRPr sz="1500" b="0">
+                <a:solidFill>
+                  <a:srgbClr val="222222"/>
+                </a:solidFill>
+                <a:latin typeface="Calibri"/>
+              </a:defRPr>
+            </a:pPr>
+          </a:p>
+          <a:p>
+            <a:pPr algn="l">
+              <a:lnSpc>
+                <a:spcPct val="100000"/>
+              </a:lnSpc>
+              <a:spcAft>
+                <a:spcPts val="800"/>
+              </a:spcAft>
+              <a:defRPr sz="1500" b="0">
+                <a:solidFill>
+                  <a:srgbClr val="222222"/>
+                </a:solidFill>
+                <a:latin typeface="Calibri"/>
+              </a:defRPr>
+            </a:pPr>
+            <a:r>
+              <a:rPr sz="1500" b="0">
+                <a:solidFill>
+                  <a:srgbClr val="222222"/>
+                </a:solidFill>
+                <a:latin typeface="Calibri"/>
+              </a:rPr>
+              <a:t>Functions</a:t>
+            </a:r>
+          </a:p>
+          <a:p>
+            <a:pPr lvl="1" algn="l">
+              <a:lnSpc>
+                <a:spcPct val="100000"/>
+              </a:lnSpc>
+              <a:spcAft>
+                <a:spcPts val="800"/>
+              </a:spcAft>
+              <a:defRPr sz="1500" b="0">
+                <a:solidFill>
+                  <a:srgbClr val="222222"/>
+                </a:solidFill>
+                <a:latin typeface="Calibri"/>
+              </a:defRPr>
+            </a:pPr>
+            <a:r>
+              <a:rPr sz="1500" b="0">
+                <a:solidFill>
+                  <a:srgbClr val="222222"/>
+                </a:solidFill>
+                <a:latin typeface="Calibri"/>
+              </a:rPr>
+              <a:t>cplusplus.com/doc/tutorial/functions/</a:t>
+            </a:r>
+          </a:p>
+          <a:p>
+            <a:pPr algn="l">
+              <a:lnSpc>
+                <a:spcPct val="100000"/>
+              </a:lnSpc>
+              <a:spcAft>
+                <a:spcPts val="800"/>
+              </a:spcAft>
+              <a:defRPr sz="1500" b="0">
+                <a:solidFill>
+                  <a:srgbClr val="222222"/>
+                </a:solidFill>
+                <a:latin typeface="Calibri"/>
+              </a:defRPr>
+            </a:pPr>
+          </a:p>
+          <a:p>
+            <a:pPr algn="l">
+              <a:lnSpc>
+                <a:spcPct val="100000"/>
+              </a:lnSpc>
+              <a:spcAft>
+                <a:spcPts val="800"/>
+              </a:spcAft>
+              <a:defRPr sz="1500" b="0">
+                <a:solidFill>
+                  <a:srgbClr val="222222"/>
+                </a:solidFill>
+                <a:latin typeface="Calibri"/>
+              </a:defRPr>
+            </a:pPr>
+            <a:r>
+              <a:rPr sz="1500" b="0">
+                <a:solidFill>
+                  <a:srgbClr val="222222"/>
+                </a:solidFill>
+                <a:latin typeface="Calibri"/>
+              </a:rPr>
+              <a:t>Everything above is optional and none of it is examined.</a:t>
+            </a:r>
+          </a:p>
+        </p:txBody>
+      </p:sp>
+      <p:sp>
+        <p:nvSpPr>
+          <p:cNvPr id="10" name="Rounded Rectangle 9"/>
+          <p:cNvSpPr/>
+          <p:nvPr/>
+        </p:nvSpPr>
+        <p:spPr>
+          <a:xfrm>
+            <a:off x="502920" y="5303520"/>
+            <a:ext cx="11185855" cy="960120"/>
+          </a:xfrm>
+          <a:prstGeom prst="roundRect">
+            <a:avLst>
+              <a:gd name="adj" fmla="val 4000"/>
+            </a:avLst>
+          </a:prstGeom>
+          <a:solidFill>
+            <a:srgbClr val="EEF3F8"/>
+          </a:solidFill>
+          <a:ln w="12700">
+            <a:solidFill>
+              <a:srgbClr val="0E7C86"/>
+            </a:solidFill>
+          </a:ln>
+          <a:effectLst/>
+        </p:spPr>
+        <p:style>
+          <a:lnRef idx="1">
+            <a:schemeClr val="accent1"/>
+          </a:lnRef>
+          <a:fillRef idx="3">
+            <a:schemeClr val="accent1"/>
+          </a:fillRef>
+          <a:effectRef idx="2">
+            <a:schemeClr val="accent1"/>
+          </a:effectRef>
+          <a:fontRef idx="minor">
+            <a:schemeClr val="lt1"/>
+          </a:fontRef>
+        </p:style>
+        <p:txBody>
+          <a:bodyPr rtlCol="0" anchor="ctr" wrap="square" lIns="164592" rIns="164592" tIns="73152" bIns="73152"/>
+          <a:lstStyle/>
+          <a:p>
+            <a:pPr algn="l"/>
+            <a:r>
+              <a:rPr sz="1300" b="1">
+                <a:solidFill>
+                  <a:srgbClr val="0E7C86"/>
+                </a:solidFill>
+                <a:latin typeface="Calibri"/>
+              </a:rPr>
+              <a:t>KEY POINT   </a:t>
+            </a:r>
+            <a:r>
+              <a:rPr sz="1500">
+                <a:solidFill>
+                  <a:srgbClr val="222222"/>
+                </a:solidFill>
+                <a:latin typeface="Calibri"/>
+              </a:rPr>
+              <a:t>Watch the PWM video before Lesson 3 if today felt fast. It covers the same ground more slowly, and with an oscilloscope.</a:t>
+            </a:r>
+          </a:p>
+        </p:txBody>
+      </p:sp>
+    </p:spTree>
+  </p:cSld>
+  <p:clrMapOvr>
+    <a:masterClrMapping/>
+  </p:clrMapOvr>
+</p:sld>
+</file>
+
+<file path=ppt/slides/slide26.xml><?xml version="1.0" encoding="utf-8"?>
+<p:sld xmlns:a="http://schemas.openxmlformats.org/drawingml/2006/main" xmlns:p="http://schemas.openxmlformats.org/presentationml/2006/main" xmlns:r="http://schemas.openxmlformats.org/officeDocument/2006/relationships">
+  <p:cSld>
+    <p:spTree>
+      <p:nvGrpSpPr>
+        <p:cNvPr id="1" name=""/>
+        <p:cNvGrpSpPr/>
+        <p:nvPr/>
+      </p:nvGrpSpPr>
+      <p:grpSpPr/>
+      <p:sp>
+        <p:nvSpPr>
+          <p:cNvPr id="2" name="Title 1"/>
+          <p:cNvSpPr>
+            <a:spLocks noGrp="1"/>
+          </p:cNvSpPr>
+          <p:nvPr>
+            <p:ph type="title"/>
+          </p:nvPr>
+        </p:nvSpPr>
+        <p:spPr>
+          <a:xfrm>
+            <a:off x="502920" y="274320"/>
+            <a:ext cx="11185855" cy="777240"/>
+          </a:xfrm>
+        </p:spPr>
+        <p:txBody>
+          <a:bodyPr wrap="square" anchor="b"/>
+          <a:lstStyle/>
+          <a:p>
+            <a:pPr algn="l">
+              <a:lnSpc>
+                <a:spcPct val="100000"/>
+              </a:lnSpc>
+              <a:spcAft>
+                <a:spcPts val="0"/>
+              </a:spcAft>
+              <a:defRPr sz="2800" b="1">
+                <a:solidFill>
+                  <a:srgbClr val="1F3A5F"/>
+                </a:solidFill>
+                <a:latin typeface="Calibri"/>
+              </a:defRPr>
+            </a:pPr>
+            <a:r>
+              <a:rPr sz="2800" b="1">
+                <a:solidFill>
+                  <a:srgbClr val="1F3A5F"/>
+                </a:solidFill>
+                <a:latin typeface="Calibri"/>
+              </a:rPr>
+              <a:t>Check yourself</a:t>
+            </a:r>
+          </a:p>
+        </p:txBody>
+      </p:sp>
+      <p:sp>
+        <p:nvSpPr>
+          <p:cNvPr id="3" name="Rectangle 2"/>
+          <p:cNvSpPr/>
+          <p:nvPr/>
+        </p:nvSpPr>
+        <p:spPr>
+          <a:xfrm>
+            <a:off x="502920" y="1097280"/>
+            <a:ext cx="11185855" cy="19050"/>
+          </a:xfrm>
+          <a:prstGeom prst="rect">
+            <a:avLst/>
+          </a:prstGeom>
+          <a:solidFill>
+            <a:srgbClr val="C8D2DE"/>
+          </a:solidFill>
+          <a:ln>
+            <a:noFill/>
+          </a:ln>
+          <a:effectLst/>
+        </p:spPr>
+        <p:style>
+          <a:lnRef idx="1">
+            <a:schemeClr val="accent1"/>
+          </a:lnRef>
+          <a:fillRef idx="3">
+            <a:schemeClr val="accent1"/>
+          </a:fillRef>
+          <a:effectRef idx="2">
+            <a:schemeClr val="accent1"/>
+          </a:effectRef>
+          <a:fontRef idx="minor">
+            <a:schemeClr val="lt1"/>
+          </a:fontRef>
+        </p:style>
+        <p:txBody>
+          <a:bodyPr rtlCol="0" anchor="ctr"/>
+          <a:lstStyle/>
+          <a:p>
+            <a:pPr algn="ctr"/>
+          </a:p>
+        </p:txBody>
+      </p:sp>
+      <p:sp>
+        <p:nvSpPr>
+          <p:cNvPr id="4" name="TextBox 3"/>
+          <p:cNvSpPr txBox="1"/>
+          <p:nvPr/>
+        </p:nvSpPr>
+        <p:spPr>
+          <a:xfrm>
+            <a:off x="502920" y="6382512"/>
+            <a:ext cx="10545775" cy="274320"/>
+          </a:xfrm>
+          <a:prstGeom prst="rect">
+            <a:avLst/>
+          </a:prstGeom>
+          <a:noFill/>
+        </p:spPr>
+        <p:txBody>
+          <a:bodyPr wrap="square" lIns="0" tIns="0">
+            <a:spAutoFit/>
+          </a:bodyPr>
+          <a:lstStyle/>
+          <a:p>
+            <a:pPr algn="l">
+              <a:lnSpc>
+                <a:spcPct val="100000"/>
+              </a:lnSpc>
+              <a:spcAft>
+                <a:spcPts val="0"/>
+              </a:spcAft>
+              <a:defRPr sz="900" b="0">
+                <a:solidFill>
+                  <a:srgbClr val="666666"/>
+                </a:solidFill>
+                <a:latin typeface="Calibri"/>
+              </a:defRPr>
+            </a:pPr>
+            <a:r>
+              <a:rPr sz="900" b="0">
+                <a:solidFill>
+                  <a:srgbClr val="666666"/>
+                </a:solidFill>
+                <a:latin typeface="Calibri"/>
+              </a:rPr>
+              <a:t>Pathfinder Beginner - PS3  |  Lesson 2</a:t>
+            </a:r>
+          </a:p>
+        </p:txBody>
+      </p:sp>
+      <p:sp>
+        <p:nvSpPr>
+          <p:cNvPr id="5" name="TextBox 4"/>
+          <p:cNvSpPr txBox="1"/>
+          <p:nvPr/>
+        </p:nvSpPr>
+        <p:spPr>
+          <a:xfrm>
+            <a:off x="11231575" y="6382512"/>
+            <a:ext cx="457200" cy="274320"/>
+          </a:xfrm>
+          <a:prstGeom prst="rect">
+            <a:avLst/>
+          </a:prstGeom>
+          <a:noFill/>
+        </p:spPr>
+        <p:txBody>
+          <a:bodyPr wrap="square" lIns="0" tIns="0">
+            <a:spAutoFit/>
+          </a:bodyPr>
+          <a:lstStyle/>
+          <a:p>
+            <a:pPr algn="r">
+              <a:lnSpc>
+                <a:spcPct val="100000"/>
+              </a:lnSpc>
+              <a:spcAft>
+                <a:spcPts val="0"/>
+              </a:spcAft>
+              <a:defRPr sz="900" b="0">
+                <a:solidFill>
+                  <a:srgbClr val="666666"/>
+                </a:solidFill>
+                <a:latin typeface="Calibri"/>
+              </a:defRPr>
+            </a:pPr>
+            <a:r>
+              <a:rPr sz="900" b="0">
+                <a:solidFill>
+                  <a:srgbClr val="666666"/>
+                </a:solidFill>
+                <a:latin typeface="Calibri"/>
+              </a:rPr>
+              <a:t>25</a:t>
             </a:r>
           </a:p>
         </p:txBody>

--- a/ground-vehicle/docs/courses/beginner-ps3/l2_motor_control.pptx
+++ b/ground-vehicle/docs/courses/beginner-ps3/l2_motor_control.pptx
@@ -3765,7 +3765,7 @@
       </p:sp>
       <p:sp>
         <p:nvSpPr>
-          <p:cNvPr id="7" name="Rounded Rectangle 6"/>
+          <p:cNvPr id="7" name="CODE_PANEL"/>
           <p:cNvSpPr/>
           <p:nvPr/>
         </p:nvSpPr>
@@ -11483,7 +11483,7 @@
       </p:sp>
       <p:sp>
         <p:nvSpPr>
-          <p:cNvPr id="7" name="Rounded Rectangle 6"/>
+          <p:cNvPr id="7" name="CODE_PANEL"/>
           <p:cNvSpPr/>
           <p:nvPr/>
         </p:nvSpPr>
@@ -12227,7 +12227,7 @@
       </p:sp>
       <p:sp>
         <p:nvSpPr>
-          <p:cNvPr id="7" name="Rounded Rectangle 6"/>
+          <p:cNvPr id="7" name="CODE_PANEL"/>
           <p:cNvSpPr/>
           <p:nvPr/>
         </p:nvSpPr>

--- a/ground-vehicle/docs/courses/beginner-ps3/l2_motor_control.pptx
+++ b/ground-vehicle/docs/courses/beginner-ps3/l2_motor_control.pptx
@@ -657,7 +657,7 @@
               <a:rPr sz="1200">
                 <a:latin typeface="Calibri"/>
               </a:rPr>
-              <a:t>Duty cycle is a percentage. Say the word percentage - it connects this to maths they already have.</a:t>
+              <a:t>Duty cycle is a percentage. Say the word percentage - it connects this to math they already have.</a:t>
             </a:r>
           </a:p>
           <a:p>
@@ -762,7 +762,7 @@
               <a:rPr sz="1200">
                 <a:latin typeface="Calibri"/>
               </a:rPr>
-              <a:t>Duty cycle is a percentage, which is why the maths lesson and the motor lesson are the same lesson.</a:t>
+              <a:t>Duty cycle is a percentage, which is why the math lesson and the motor lesson are the same lesson.</a:t>
             </a:r>
           </a:p>
         </p:txBody>
@@ -1572,7 +1572,7 @@
               <a:rPr sz="1200">
                 <a:latin typeface="Calibri"/>
               </a:rPr>
-              <a:t>Two of these are maths objectives and nobody minds, because by the end they will have used the maths to predict where a vehicle stops.</a:t>
+              <a:t>Two of these are math objectives and nobody minds, because by the end they will have used the math to predict where a vehicle stops.</a:t>
             </a:r>
           </a:p>
           <a:p>
@@ -2026,7 +2026,7 @@
               <a:rPr sz="1200">
                 <a:latin typeface="Calibri"/>
               </a:rPr>
-              <a:t>Question 4 is the one worth dwelling on - it connects the maths back to the vehicle they are about to drive.</a:t>
+              <a:t>Question 4 is the one worth dwelling on - it connects the math back to the vehicle they are about to drive.</a:t>
             </a:r>
           </a:p>
         </p:txBody>
@@ -2099,7 +2099,7 @@
               <a:rPr sz="1200">
                 <a:latin typeface="Calibri"/>
               </a:rPr>
-              <a:t>Same two parts, two different wirings, completely different behaviour. That is the whole slide.</a:t>
+              <a:t>Same two parts, two different wirings, completely different behavior. That is the whole slide.</a:t>
             </a:r>
           </a:p>
           <a:p>
@@ -2545,7 +2545,7 @@
               <a:rPr sz="1200">
                 <a:latin typeface="Calibri"/>
               </a:rPr>
-              <a:t>Sixty seconds. If anybody missed Lesson 1, this plus a neighbour is enough to keep them with the class.</a:t>
+              <a:t>Sixty seconds. If anybody missed Lesson 1, this plus a neighbor is enough to keep them with the class.</a:t>
             </a:r>
           </a:p>
           <a:p>
@@ -18893,7 +18893,7 @@
                 </a:solidFill>
                 <a:latin typeface="Calibri"/>
               </a:rPr>
-              <a:t>Practise it</a:t>
+              <a:t>Practice it</a:t>
             </a:r>
           </a:p>
         </p:txBody>
@@ -24081,7 +24081,7 @@
                 </a:solidFill>
                 <a:latin typeface="Calibri"/>
               </a:rPr>
-              <a:t>stick centred</a:t>
+              <a:t>stick centerd</a:t>
             </a:r>
           </a:p>
         </p:txBody>
@@ -24482,7 +24482,7 @@
                 </a:solidFill>
                 <a:latin typeface="Calibri"/>
               </a:rPr>
-              <a:t>The maths you need to predict where it ends up</a:t>
+              <a:t>The math you need to predict where it ends up</a:t>
             </a:r>
           </a:p>
         </p:txBody>
@@ -30905,7 +30905,7 @@
                 </a:solidFill>
                 <a:latin typeface="Consolas"/>
               </a:rPr>
-              <a:t>  strip.setPixelColor(i, colour);</a:t>
+              <a:t>  strip.setPixelColor(i, color);</a:t>
             </a:r>
           </a:p>
           <a:p>
@@ -31992,7 +31992,7 @@
                 </a:solidFill>
                 <a:latin typeface="Calibri"/>
               </a:rPr>
-              <a:t>Note the twenty second stop at the end. That is so the program does not immediately start a second square while you are walking towards it.</a:t>
+              <a:t>Note the twenty second stop at the end. That is so the program does not immediately start a second square while you are walking toward it.</a:t>
             </a:r>
           </a:p>
         </p:txBody>
@@ -33372,7 +33372,7 @@
                           </a:solidFill>
                           <a:latin typeface="Calibri"/>
                         </a:rPr>
-                        <a:t>Tank drive, mixing, and the maths that predicts the square</a:t>
+                        <a:t>Tank drive, mixing, and the math that predicts the square</a:t>
                       </a:r>
                     </a:p>
                   </a:txBody>
@@ -33799,7 +33799,7 @@
                 </a:solidFill>
                 <a:latin typeface="Calibri"/>
               </a:rPr>
-              <a:t>1.  Clear a space about three metres square. Bags and feet out.</a:t>
+              <a:t>1.  Clear a space about three meters square. Bags and feet out.</a:t>
             </a:r>
           </a:p>
           <a:p>

--- a/ground-vehicle/docs/courses/beginner-ps3/l2_motor_control.pptx
+++ b/ground-vehicle/docs/courses/beginner-ps3/l2_motor_control.pptx
@@ -35518,7 +35518,7 @@
         <p:spPr>
           <a:xfrm>
             <a:off x="502920" y="1188720"/>
-            <a:ext cx="5227168" cy="3931920"/>
+            <a:ext cx="5227168" cy="3986784"/>
           </a:xfrm>
           <a:prstGeom prst="rect">
             <a:avLst/>
@@ -35536,17 +35536,17 @@
                 <a:spcPct val="100000"/>
               </a:lnSpc>
               <a:spcAft>
-                <a:spcPts val="500"/>
-              </a:spcAft>
-              <a:defRPr sz="1800" b="0">
-                <a:solidFill>
-                  <a:srgbClr val="222222"/>
-                </a:solidFill>
-                <a:latin typeface="Calibri"/>
-              </a:defRPr>
-            </a:pPr>
-            <a:r>
-              <a:rPr sz="1800" b="0">
+                <a:spcPts val="600"/>
+              </a:spcAft>
+              <a:defRPr sz="1900" b="0">
+                <a:solidFill>
+                  <a:srgbClr val="222222"/>
+                </a:solidFill>
+                <a:latin typeface="Calibri"/>
+              </a:defRPr>
+            </a:pPr>
+            <a:r>
+              <a:rPr sz="1900" b="0">
                 <a:solidFill>
                   <a:srgbClr val="222222"/>
                 </a:solidFill>
@@ -35561,9 +35561,9 @@
                 <a:spcPct val="100000"/>
               </a:lnSpc>
               <a:spcAft>
-                <a:spcPts val="500"/>
-              </a:spcAft>
-              <a:defRPr sz="1800" b="0">
+                <a:spcPts val="600"/>
+              </a:spcAft>
+              <a:defRPr sz="1900" b="0">
                 <a:solidFill>
                   <a:srgbClr val="222222"/>
                 </a:solidFill>
@@ -35577,17 +35577,17 @@
                 <a:spcPct val="100000"/>
               </a:lnSpc>
               <a:spcAft>
-                <a:spcPts val="500"/>
-              </a:spcAft>
-              <a:defRPr sz="1800" b="0">
-                <a:solidFill>
-                  <a:srgbClr val="222222"/>
-                </a:solidFill>
-                <a:latin typeface="Calibri"/>
-              </a:defRPr>
-            </a:pPr>
-            <a:r>
-              <a:rPr sz="1800" b="0">
+                <a:spcPts val="600"/>
+              </a:spcAft>
+              <a:defRPr sz="1900" b="0">
+                <a:solidFill>
+                  <a:srgbClr val="222222"/>
+                </a:solidFill>
+                <a:latin typeface="Calibri"/>
+              </a:defRPr>
+            </a:pPr>
+            <a:r>
+              <a:rPr sz="1900" b="0">
                 <a:solidFill>
                   <a:srgbClr val="222222"/>
                 </a:solidFill>
@@ -35602,17 +35602,17 @@
                 <a:spcPct val="100000"/>
               </a:lnSpc>
               <a:spcAft>
-                <a:spcPts val="500"/>
-              </a:spcAft>
-              <a:defRPr sz="1800" b="0">
-                <a:solidFill>
-                  <a:srgbClr val="222222"/>
-                </a:solidFill>
-                <a:latin typeface="Calibri"/>
-              </a:defRPr>
-            </a:pPr>
-            <a:r>
-              <a:rPr sz="1800" b="0">
+                <a:spcPts val="600"/>
+              </a:spcAft>
+              <a:defRPr sz="1900" b="0">
+                <a:solidFill>
+                  <a:srgbClr val="222222"/>
+                </a:solidFill>
+                <a:latin typeface="Calibri"/>
+              </a:defRPr>
+            </a:pPr>
+            <a:r>
+              <a:rPr sz="1900" b="0">
                 <a:solidFill>
                   <a:srgbClr val="222222"/>
                 </a:solidFill>
@@ -35627,17 +35627,17 @@
                 <a:spcPct val="100000"/>
               </a:lnSpc>
               <a:spcAft>
-                <a:spcPts val="500"/>
-              </a:spcAft>
-              <a:defRPr sz="1800" b="0">
-                <a:solidFill>
-                  <a:srgbClr val="222222"/>
-                </a:solidFill>
-                <a:latin typeface="Calibri"/>
-              </a:defRPr>
-            </a:pPr>
-            <a:r>
-              <a:rPr sz="1800" b="0">
+                <a:spcPts val="600"/>
+              </a:spcAft>
+              <a:defRPr sz="1900" b="0">
+                <a:solidFill>
+                  <a:srgbClr val="222222"/>
+                </a:solidFill>
+                <a:latin typeface="Calibri"/>
+              </a:defRPr>
+            </a:pPr>
+            <a:r>
+              <a:rPr sz="1900" b="0">
                 <a:solidFill>
                   <a:srgbClr val="222222"/>
                 </a:solidFill>
@@ -35652,17 +35652,17 @@
                 <a:spcPct val="100000"/>
               </a:lnSpc>
               <a:spcAft>
-                <a:spcPts val="500"/>
-              </a:spcAft>
-              <a:defRPr sz="1800" b="0">
-                <a:solidFill>
-                  <a:srgbClr val="222222"/>
-                </a:solidFill>
-                <a:latin typeface="Calibri"/>
-              </a:defRPr>
-            </a:pPr>
-            <a:r>
-              <a:rPr sz="1800" b="0">
+                <a:spcPts val="600"/>
+              </a:spcAft>
+              <a:defRPr sz="1900" b="0">
+                <a:solidFill>
+                  <a:srgbClr val="222222"/>
+                </a:solidFill>
+                <a:latin typeface="Calibri"/>
+              </a:defRPr>
+            </a:pPr>
+            <a:r>
+              <a:rPr sz="1900" b="0">
                 <a:solidFill>
                   <a:srgbClr val="222222"/>
                 </a:solidFill>
@@ -35677,9 +35677,9 @@
                 <a:spcPct val="100000"/>
               </a:lnSpc>
               <a:spcAft>
-                <a:spcPts val="500"/>
-              </a:spcAft>
-              <a:defRPr sz="1800" b="0">
+                <a:spcPts val="600"/>
+              </a:spcAft>
+              <a:defRPr sz="1900" b="0">
                 <a:solidFill>
                   <a:srgbClr val="222222"/>
                 </a:solidFill>
@@ -35693,17 +35693,17 @@
                 <a:spcPct val="100000"/>
               </a:lnSpc>
               <a:spcAft>
-                <a:spcPts val="500"/>
-              </a:spcAft>
-              <a:defRPr sz="1800" b="0">
-                <a:solidFill>
-                  <a:srgbClr val="222222"/>
-                </a:solidFill>
-                <a:latin typeface="Calibri"/>
-              </a:defRPr>
-            </a:pPr>
-            <a:r>
-              <a:rPr sz="1800" b="0">
+                <a:spcPts val="600"/>
+              </a:spcAft>
+              <a:defRPr sz="1900" b="0">
+                <a:solidFill>
+                  <a:srgbClr val="222222"/>
+                </a:solidFill>
+                <a:latin typeface="Calibri"/>
+              </a:defRPr>
+            </a:pPr>
+            <a:r>
+              <a:rPr sz="1900" b="0">
                 <a:solidFill>
                   <a:srgbClr val="222222"/>
                 </a:solidFill>

--- a/ground-vehicle/docs/courses/beginner-ps3/l2_motor_control.pptx
+++ b/ground-vehicle/docs/courses/beginner-ps3/l2_motor_control.pptx
@@ -7432,6 +7432,22 @@
               <a:spcAft>
                 <a:spcPts val="100"/>
               </a:spcAft>
+              <a:defRPr sz="600" b="0">
+                <a:solidFill>
+                  <a:srgbClr val="666666"/>
+                </a:solidFill>
+                <a:latin typeface="Calibri"/>
+              </a:defRPr>
+            </a:pPr>
+          </a:p>
+          <a:p>
+            <a:pPr algn="l">
+              <a:lnSpc>
+                <a:spcPct val="100000"/>
+              </a:lnSpc>
+              <a:spcAft>
+                <a:spcPts val="100"/>
+              </a:spcAft>
               <a:defRPr sz="1200" b="0">
                 <a:solidFill>
                   <a:srgbClr val="666666"/>
@@ -7439,6 +7455,15 @@
                 <a:latin typeface="Calibri"/>
               </a:defRPr>
             </a:pPr>
+            <a:r>
+              <a:rPr sz="1200" b="0">
+                <a:solidFill>
+                  <a:srgbClr val="666666"/>
+                </a:solidFill>
+                <a:latin typeface="Calibri"/>
+              </a:rPr>
+              <a:t>Kevin Bowen, President  -  kbowen6@icloud.com</a:t>
+            </a:r>
           </a:p>
           <a:p>
             <a:pPr algn="l">
@@ -7462,7 +7487,7 @@
                 </a:solidFill>
                 <a:latin typeface="Calibri"/>
               </a:rPr>
-              <a:t>Kevin Bowen, President  -  kbowen6@icloud.com</a:t>
+              <a:t>Malcom Graham, VP Education      Louis Parker, VP Technology</a:t>
             </a:r>
           </a:p>
           <a:p>
@@ -7487,7 +7512,7 @@
                 </a:solidFill>
                 <a:latin typeface="Calibri"/>
               </a:rPr>
-              <a:t>Malcom Graham, VP Education      Louis Parker, VP Technology</a:t>
+              <a:t>Valen Farre, System Engineer      Gary Howland, Animation</a:t>
             </a:r>
           </a:p>
           <a:p>
@@ -7512,7 +7537,7 @@
                 </a:solidFill>
                 <a:latin typeface="Calibri"/>
               </a:rPr>
-              <a:t>Valen Farre, System Engineer      Gary Howland, Animation</a:t>
+              <a:t>Eddie Revollo, Artificial Intelligence</a:t>
             </a:r>
           </a:p>
           <a:p>
@@ -7537,7 +7562,7 @@
                 </a:solidFill>
                 <a:latin typeface="Calibri"/>
               </a:rPr>
-              <a:t>Eddie Revollo, Artificial Intelligence</a:t>
+              <a:t>Interns: Oscar Canazales, Krishnansh Vemulapalli, Soham Gangal, Erik Olsen</a:t>
             </a:r>
           </a:p>
           <a:p>
@@ -7548,32 +7573,7 @@
               <a:spcAft>
                 <a:spcPts val="100"/>
               </a:spcAft>
-              <a:defRPr sz="1200" b="0">
-                <a:solidFill>
-                  <a:srgbClr val="666666"/>
-                </a:solidFill>
-                <a:latin typeface="Calibri"/>
-              </a:defRPr>
-            </a:pPr>
-            <a:r>
-              <a:rPr sz="1200" b="0">
-                <a:solidFill>
-                  <a:srgbClr val="666666"/>
-                </a:solidFill>
-                <a:latin typeface="Calibri"/>
-              </a:rPr>
-              <a:t>Interns: Oscar Canazales, Krishnansh Vemulapalli, Soham Gangal, Erik Olsen</a:t>
-            </a:r>
-          </a:p>
-          <a:p>
-            <a:pPr algn="l">
-              <a:lnSpc>
-                <a:spcPct val="100000"/>
-              </a:lnSpc>
-              <a:spcAft>
-                <a:spcPts val="100"/>
-              </a:spcAft>
-              <a:defRPr sz="1200" b="0">
+              <a:defRPr sz="600" b="0">
                 <a:solidFill>
                   <a:srgbClr val="666666"/>
                 </a:solidFill>
@@ -10172,6 +10172,22 @@
               <a:spcAft>
                 <a:spcPts val="800"/>
               </a:spcAft>
+              <a:defRPr sz="1050" b="0">
+                <a:solidFill>
+                  <a:srgbClr val="222222"/>
+                </a:solidFill>
+                <a:latin typeface="Calibri"/>
+              </a:defRPr>
+            </a:pPr>
+          </a:p>
+          <a:p>
+            <a:pPr algn="l">
+              <a:lnSpc>
+                <a:spcPct val="100000"/>
+              </a:lnSpc>
+              <a:spcAft>
+                <a:spcPts val="800"/>
+              </a:spcAft>
               <a:defRPr sz="2100" b="0">
                 <a:solidFill>
                   <a:srgbClr val="222222"/>
@@ -10179,6 +10195,15 @@
                 <a:latin typeface="Calibri"/>
               </a:defRPr>
             </a:pPr>
+            <a:r>
+              <a:rPr sz="2100" b="0">
+                <a:solidFill>
+                  <a:srgbClr val="222222"/>
+                </a:solidFill>
+                <a:latin typeface="Calibri"/>
+              </a:rPr>
+              <a:t>ledcWrite(pin, duty);</a:t>
+            </a:r>
           </a:p>
           <a:p>
             <a:pPr algn="l">
@@ -10188,32 +10213,7 @@
               <a:spcAft>
                 <a:spcPts val="800"/>
               </a:spcAft>
-              <a:defRPr sz="2100" b="0">
-                <a:solidFill>
-                  <a:srgbClr val="222222"/>
-                </a:solidFill>
-                <a:latin typeface="Calibri"/>
-              </a:defRPr>
-            </a:pPr>
-            <a:r>
-              <a:rPr sz="2100" b="0">
-                <a:solidFill>
-                  <a:srgbClr val="222222"/>
-                </a:solidFill>
-                <a:latin typeface="Calibri"/>
-              </a:rPr>
-              <a:t>ledcWrite(pin, duty);</a:t>
-            </a:r>
-          </a:p>
-          <a:p>
-            <a:pPr algn="l">
-              <a:lnSpc>
-                <a:spcPct val="100000"/>
-              </a:lnSpc>
-              <a:spcAft>
-                <a:spcPts val="800"/>
-              </a:spcAft>
-              <a:defRPr sz="2100" b="0">
+              <a:defRPr sz="1050" b="0">
                 <a:solidFill>
                   <a:srgbClr val="222222"/>
                 </a:solidFill>
@@ -10400,7 +10400,7 @@
               <a:spcAft>
                 <a:spcPts val="800"/>
               </a:spcAft>
-              <a:defRPr sz="2100" b="0">
+              <a:defRPr sz="1050" b="0">
                 <a:solidFill>
                   <a:srgbClr val="222222"/>
                 </a:solidFill>
@@ -14446,6 +14446,22 @@
               <a:spcAft>
                 <a:spcPts val="600"/>
               </a:spcAft>
+              <a:defRPr sz="1100" b="0">
+                <a:solidFill>
+                  <a:srgbClr val="222222"/>
+                </a:solidFill>
+                <a:latin typeface="Calibri"/>
+              </a:defRPr>
+            </a:pPr>
+          </a:p>
+          <a:p>
+            <a:pPr algn="l">
+              <a:lnSpc>
+                <a:spcPct val="100000"/>
+              </a:lnSpc>
+              <a:spcAft>
+                <a:spcPts val="600"/>
+              </a:spcAft>
               <a:defRPr sz="2200" b="0">
                 <a:solidFill>
                   <a:srgbClr val="222222"/>
@@ -14453,6 +14469,15 @@
                 <a:latin typeface="Calibri"/>
               </a:defRPr>
             </a:pPr>
+            <a:r>
+              <a:rPr sz="2200" b="0">
+                <a:solidFill>
+                  <a:srgbClr val="222222"/>
+                </a:solidFill>
+                <a:latin typeface="Calibri"/>
+              </a:rPr>
+              <a:t>VOLTAGE (V), in volts. The push. How hard the supply is trying to move charge round the circuit.</a:t>
+            </a:r>
           </a:p>
           <a:p>
             <a:pPr algn="l">
@@ -14476,7 +14501,7 @@
                 </a:solidFill>
                 <a:latin typeface="Calibri"/>
               </a:rPr>
-              <a:t>VOLTAGE (V), in volts. The push. How hard the supply is trying to move charge round the circuit.</a:t>
+              <a:t>CURRENT (I), in amps. The flow. How much charge is actually moving past a point each second.</a:t>
             </a:r>
           </a:p>
           <a:p>
@@ -14501,7 +14526,7 @@
                 </a:solidFill>
                 <a:latin typeface="Calibri"/>
               </a:rPr>
-              <a:t>CURRENT (I), in amps. The flow. How much charge is actually moving past a point each second.</a:t>
+              <a:t>RESISTANCE (R), in ohms. The opposition. How much the circuit fights the flow.</a:t>
             </a:r>
           </a:p>
           <a:p>
@@ -14512,32 +14537,7 @@
               <a:spcAft>
                 <a:spcPts val="600"/>
               </a:spcAft>
-              <a:defRPr sz="2200" b="0">
-                <a:solidFill>
-                  <a:srgbClr val="222222"/>
-                </a:solidFill>
-                <a:latin typeface="Calibri"/>
-              </a:defRPr>
-            </a:pPr>
-            <a:r>
-              <a:rPr sz="2200" b="0">
-                <a:solidFill>
-                  <a:srgbClr val="222222"/>
-                </a:solidFill>
-                <a:latin typeface="Calibri"/>
-              </a:rPr>
-              <a:t>RESISTANCE (R), in ohms. The opposition. How much the circuit fights the flow.</a:t>
-            </a:r>
-          </a:p>
-          <a:p>
-            <a:pPr algn="l">
-              <a:lnSpc>
-                <a:spcPct val="100000"/>
-              </a:lnSpc>
-              <a:spcAft>
-                <a:spcPts val="600"/>
-              </a:spcAft>
-              <a:defRPr sz="2200" b="0">
+              <a:defRPr sz="1100" b="0">
                 <a:solidFill>
                   <a:srgbClr val="222222"/>
                 </a:solidFill>
@@ -14873,7 +14873,7 @@
               <a:spcAft>
                 <a:spcPts val="200"/>
               </a:spcAft>
-              <a:defRPr sz="1800" b="0">
+              <a:defRPr sz="900" b="0">
                 <a:solidFill>
                   <a:srgbClr val="222222"/>
                 </a:solidFill>
@@ -15325,7 +15325,7 @@
               <a:spcAft>
                 <a:spcPts val="200"/>
               </a:spcAft>
-              <a:defRPr sz="1800" b="0">
+              <a:defRPr sz="900" b="0">
                 <a:solidFill>
                   <a:srgbClr val="222222"/>
                 </a:solidFill>
@@ -15779,6 +15779,22 @@
               <a:spcAft>
                 <a:spcPts val="0"/>
               </a:spcAft>
+              <a:defRPr sz="900" b="0">
+                <a:solidFill>
+                  <a:srgbClr val="222222"/>
+                </a:solidFill>
+                <a:latin typeface="Calibri"/>
+              </a:defRPr>
+            </a:pPr>
+          </a:p>
+          <a:p>
+            <a:pPr algn="ctr">
+              <a:lnSpc>
+                <a:spcPct val="100000"/>
+              </a:lnSpc>
+              <a:spcAft>
+                <a:spcPts val="0"/>
+              </a:spcAft>
               <a:defRPr sz="1800" b="0">
                 <a:solidFill>
                   <a:srgbClr val="222222"/>
@@ -15786,6 +15802,15 @@
                 <a:latin typeface="Calibri"/>
               </a:defRPr>
             </a:pPr>
+            <a:r>
+              <a:rPr sz="1800" b="0">
+                <a:solidFill>
+                  <a:srgbClr val="222222"/>
+                </a:solidFill>
+                <a:latin typeface="Calibri"/>
+              </a:rPr>
+              <a:t>3 LEDs x 20 mA</a:t>
+            </a:r>
           </a:p>
           <a:p>
             <a:pPr algn="ctr">
@@ -15809,7 +15834,7 @@
                 </a:solidFill>
                 <a:latin typeface="Calibri"/>
               </a:rPr>
-              <a:t>3 LEDs x 20 mA</a:t>
+              <a:t>= 60 mA</a:t>
             </a:r>
           </a:p>
           <a:p>
@@ -15820,6 +15845,22 @@
               <a:spcAft>
                 <a:spcPts val="0"/>
               </a:spcAft>
+              <a:defRPr sz="900" b="0">
+                <a:solidFill>
+                  <a:srgbClr val="222222"/>
+                </a:solidFill>
+                <a:latin typeface="Calibri"/>
+              </a:defRPr>
+            </a:pPr>
+          </a:p>
+          <a:p>
+            <a:pPr algn="ctr">
+              <a:lnSpc>
+                <a:spcPct val="100000"/>
+              </a:lnSpc>
+              <a:spcAft>
+                <a:spcPts val="0"/>
+              </a:spcAft>
               <a:defRPr sz="1800" b="0">
                 <a:solidFill>
                   <a:srgbClr val="222222"/>
@@ -15834,7 +15875,7 @@
                 </a:solidFill>
                 <a:latin typeface="Calibri"/>
               </a:rPr>
-              <a:t>= 60 mA</a:t>
+              <a:t>P = I x V</a:t>
             </a:r>
           </a:p>
           <a:p>
@@ -15852,6 +15893,15 @@
                 <a:latin typeface="Calibri"/>
               </a:defRPr>
             </a:pPr>
+            <a:r>
+              <a:rPr sz="1800" b="0">
+                <a:solidFill>
+                  <a:srgbClr val="222222"/>
+                </a:solidFill>
+                <a:latin typeface="Calibri"/>
+              </a:rPr>
+              <a:t>= 0.06 x 5</a:t>
+            </a:r>
           </a:p>
           <a:p>
             <a:pPr algn="ctr">
@@ -15875,7 +15925,7 @@
                 </a:solidFill>
                 <a:latin typeface="Calibri"/>
               </a:rPr>
-              <a:t>P = I x V</a:t>
+              <a:t>= 0.3 W</a:t>
             </a:r>
           </a:p>
           <a:p>
@@ -15886,57 +15936,7 @@
               <a:spcAft>
                 <a:spcPts val="0"/>
               </a:spcAft>
-              <a:defRPr sz="1800" b="0">
-                <a:solidFill>
-                  <a:srgbClr val="222222"/>
-                </a:solidFill>
-                <a:latin typeface="Calibri"/>
-              </a:defRPr>
-            </a:pPr>
-            <a:r>
-              <a:rPr sz="1800" b="0">
-                <a:solidFill>
-                  <a:srgbClr val="222222"/>
-                </a:solidFill>
-                <a:latin typeface="Calibri"/>
-              </a:rPr>
-              <a:t>= 0.06 x 5</a:t>
-            </a:r>
-          </a:p>
-          <a:p>
-            <a:pPr algn="ctr">
-              <a:lnSpc>
-                <a:spcPct val="100000"/>
-              </a:lnSpc>
-              <a:spcAft>
-                <a:spcPts val="0"/>
-              </a:spcAft>
-              <a:defRPr sz="1800" b="0">
-                <a:solidFill>
-                  <a:srgbClr val="222222"/>
-                </a:solidFill>
-                <a:latin typeface="Calibri"/>
-              </a:defRPr>
-            </a:pPr>
-            <a:r>
-              <a:rPr sz="1800" b="0">
-                <a:solidFill>
-                  <a:srgbClr val="222222"/>
-                </a:solidFill>
-                <a:latin typeface="Calibri"/>
-              </a:rPr>
-              <a:t>= 0.3 W</a:t>
-            </a:r>
-          </a:p>
-          <a:p>
-            <a:pPr algn="ctr">
-              <a:lnSpc>
-                <a:spcPct val="100000"/>
-              </a:lnSpc>
-              <a:spcAft>
-                <a:spcPts val="0"/>
-              </a:spcAft>
-              <a:defRPr sz="1800" b="0">
+              <a:defRPr sz="900" b="0">
                 <a:solidFill>
                   <a:srgbClr val="222222"/>
                 </a:solidFill>
@@ -16818,15 +16818,15 @@
               <a:spcAft>
                 <a:spcPts val="900"/>
               </a:spcAft>
-              <a:defRPr sz="2200" b="0">
-                <a:solidFill>
-                  <a:srgbClr val="222222"/>
-                </a:solidFill>
-                <a:latin typeface="Calibri"/>
-              </a:defRPr>
-            </a:pPr>
-            <a:r>
-              <a:rPr sz="2200" b="0">
+              <a:defRPr sz="2300" b="0">
+                <a:solidFill>
+                  <a:srgbClr val="222222"/>
+                </a:solidFill>
+                <a:latin typeface="Calibri"/>
+              </a:defRPr>
+            </a:pPr>
+            <a:r>
+              <a:rPr sz="2300" b="0">
                 <a:solidFill>
                   <a:srgbClr val="222222"/>
                 </a:solidFill>
@@ -16843,7 +16843,7 @@
               <a:spcAft>
                 <a:spcPts val="900"/>
               </a:spcAft>
-              <a:defRPr sz="2200" b="0">
+              <a:defRPr sz="1150" b="0">
                 <a:solidFill>
                   <a:srgbClr val="222222"/>
                 </a:solidFill>
@@ -16859,15 +16859,15 @@
               <a:spcAft>
                 <a:spcPts val="900"/>
               </a:spcAft>
-              <a:defRPr sz="2200" b="0">
-                <a:solidFill>
-                  <a:srgbClr val="222222"/>
-                </a:solidFill>
-                <a:latin typeface="Calibri"/>
-              </a:defRPr>
-            </a:pPr>
-            <a:r>
-              <a:rPr sz="2200" b="0">
+              <a:defRPr sz="2300" b="0">
+                <a:solidFill>
+                  <a:srgbClr val="222222"/>
+                </a:solidFill>
+                <a:latin typeface="Calibri"/>
+              </a:defRPr>
+            </a:pPr>
+            <a:r>
+              <a:rPr sz="2300" b="0">
                 <a:solidFill>
                   <a:srgbClr val="222222"/>
                 </a:solidFill>
@@ -16884,15 +16884,15 @@
               <a:spcAft>
                 <a:spcPts val="900"/>
               </a:spcAft>
-              <a:defRPr sz="2200" b="0">
-                <a:solidFill>
-                  <a:srgbClr val="222222"/>
-                </a:solidFill>
-                <a:latin typeface="Calibri"/>
-              </a:defRPr>
-            </a:pPr>
-            <a:r>
-              <a:rPr sz="2200" b="0">
+              <a:defRPr sz="2300" b="0">
+                <a:solidFill>
+                  <a:srgbClr val="222222"/>
+                </a:solidFill>
+                <a:latin typeface="Calibri"/>
+              </a:defRPr>
+            </a:pPr>
+            <a:r>
+              <a:rPr sz="2300" b="0">
                 <a:solidFill>
                   <a:srgbClr val="222222"/>
                 </a:solidFill>
@@ -16932,15 +16932,15 @@
               <a:spcAft>
                 <a:spcPts val="900"/>
               </a:spcAft>
-              <a:defRPr sz="2100" b="0">
-                <a:solidFill>
-                  <a:srgbClr val="222222"/>
-                </a:solidFill>
-                <a:latin typeface="Calibri"/>
-              </a:defRPr>
-            </a:pPr>
-            <a:r>
-              <a:rPr sz="2100" b="0">
+              <a:defRPr sz="2200" b="0">
+                <a:solidFill>
+                  <a:srgbClr val="222222"/>
+                </a:solidFill>
+                <a:latin typeface="Calibri"/>
+              </a:defRPr>
+            </a:pPr>
+            <a:r>
+              <a:rPr sz="2200" b="0">
                 <a:solidFill>
                   <a:srgbClr val="222222"/>
                 </a:solidFill>
@@ -16957,7 +16957,7 @@
               <a:spcAft>
                 <a:spcPts val="900"/>
               </a:spcAft>
-              <a:defRPr sz="2100" b="0">
+              <a:defRPr sz="1100" b="0">
                 <a:solidFill>
                   <a:srgbClr val="222222"/>
                 </a:solidFill>
@@ -16973,15 +16973,15 @@
               <a:spcAft>
                 <a:spcPts val="900"/>
               </a:spcAft>
-              <a:defRPr sz="2100" b="0">
-                <a:solidFill>
-                  <a:srgbClr val="222222"/>
-                </a:solidFill>
-                <a:latin typeface="Calibri"/>
-              </a:defRPr>
-            </a:pPr>
-            <a:r>
-              <a:rPr sz="2100" b="0">
+              <a:defRPr sz="2200" b="0">
+                <a:solidFill>
+                  <a:srgbClr val="222222"/>
+                </a:solidFill>
+                <a:latin typeface="Calibri"/>
+              </a:defRPr>
+            </a:pPr>
+            <a:r>
+              <a:rPr sz="2200" b="0">
                 <a:solidFill>
                   <a:srgbClr val="222222"/>
                 </a:solidFill>
@@ -16998,15 +16998,15 @@
               <a:spcAft>
                 <a:spcPts val="900"/>
               </a:spcAft>
-              <a:defRPr sz="2100" b="0">
-                <a:solidFill>
-                  <a:srgbClr val="222222"/>
-                </a:solidFill>
-                <a:latin typeface="Calibri"/>
-              </a:defRPr>
-            </a:pPr>
-            <a:r>
-              <a:rPr sz="2100" b="0">
+              <a:defRPr sz="2200" b="0">
+                <a:solidFill>
+                  <a:srgbClr val="222222"/>
+                </a:solidFill>
+                <a:latin typeface="Calibri"/>
+              </a:defRPr>
+            </a:pPr>
+            <a:r>
+              <a:rPr sz="2200" b="0">
                 <a:solidFill>
                   <a:srgbClr val="222222"/>
                 </a:solidFill>
@@ -17023,7 +17023,7 @@
               <a:spcAft>
                 <a:spcPts val="900"/>
               </a:spcAft>
-              <a:defRPr sz="2100" b="0">
+              <a:defRPr sz="1100" b="0">
                 <a:solidFill>
                   <a:srgbClr val="222222"/>
                 </a:solidFill>
@@ -17039,15 +17039,15 @@
               <a:spcAft>
                 <a:spcPts val="900"/>
               </a:spcAft>
-              <a:defRPr sz="2100" b="0">
-                <a:solidFill>
-                  <a:srgbClr val="222222"/>
-                </a:solidFill>
-                <a:latin typeface="Calibri"/>
-              </a:defRPr>
-            </a:pPr>
-            <a:r>
-              <a:rPr sz="2100" b="0">
+              <a:defRPr sz="2200" b="0">
+                <a:solidFill>
+                  <a:srgbClr val="222222"/>
+                </a:solidFill>
+                <a:latin typeface="Calibri"/>
+              </a:defRPr>
+            </a:pPr>
+            <a:r>
+              <a:rPr sz="2200" b="0">
                 <a:solidFill>
                   <a:srgbClr val="222222"/>
                 </a:solidFill>
@@ -17778,7 +17778,7 @@
               <a:spcAft>
                 <a:spcPts val="0"/>
               </a:spcAft>
-              <a:defRPr sz="1800" b="0">
+              <a:defRPr sz="900" b="0">
                 <a:solidFill>
                   <a:srgbClr val="222222"/>
                 </a:solidFill>
@@ -18348,7 +18348,7 @@
               <a:spcAft>
                 <a:spcPts val="0"/>
               </a:spcAft>
-              <a:defRPr sz="1800" b="0">
+              <a:defRPr sz="900" b="0">
                 <a:solidFill>
                   <a:srgbClr val="222222"/>
                 </a:solidFill>
@@ -19525,15 +19525,15 @@
               <a:spcAft>
                 <a:spcPts val="600"/>
               </a:spcAft>
-              <a:defRPr sz="1900" b="0">
-                <a:solidFill>
-                  <a:srgbClr val="222222"/>
-                </a:solidFill>
-                <a:latin typeface="Calibri"/>
-              </a:defRPr>
-            </a:pPr>
-            <a:r>
-              <a:rPr sz="1900" b="0">
+              <a:defRPr sz="2000" b="0">
+                <a:solidFill>
+                  <a:srgbClr val="222222"/>
+                </a:solidFill>
+                <a:latin typeface="Calibri"/>
+              </a:defRPr>
+            </a:pPr>
+            <a:r>
+              <a:rPr sz="2000" b="0">
                 <a:solidFill>
                   <a:srgbClr val="222222"/>
                 </a:solidFill>
@@ -19550,15 +19550,15 @@
               <a:spcAft>
                 <a:spcPts val="600"/>
               </a:spcAft>
-              <a:defRPr sz="1900" b="0">
-                <a:solidFill>
-                  <a:srgbClr val="222222"/>
-                </a:solidFill>
-                <a:latin typeface="Calibri"/>
-              </a:defRPr>
-            </a:pPr>
-            <a:r>
-              <a:rPr sz="1900" b="0">
+              <a:defRPr sz="2000" b="0">
+                <a:solidFill>
+                  <a:srgbClr val="222222"/>
+                </a:solidFill>
+                <a:latin typeface="Calibri"/>
+              </a:defRPr>
+            </a:pPr>
+            <a:r>
+              <a:rPr sz="2000" b="0">
                 <a:solidFill>
                   <a:srgbClr val="222222"/>
                 </a:solidFill>
@@ -19575,15 +19575,15 @@
               <a:spcAft>
                 <a:spcPts val="600"/>
               </a:spcAft>
-              <a:defRPr sz="1900" b="0">
-                <a:solidFill>
-                  <a:srgbClr val="222222"/>
-                </a:solidFill>
-                <a:latin typeface="Calibri"/>
-              </a:defRPr>
-            </a:pPr>
-            <a:r>
-              <a:rPr sz="1900" b="0">
+              <a:defRPr sz="2000" b="0">
+                <a:solidFill>
+                  <a:srgbClr val="222222"/>
+                </a:solidFill>
+                <a:latin typeface="Calibri"/>
+              </a:defRPr>
+            </a:pPr>
+            <a:r>
+              <a:rPr sz="2000" b="0">
                 <a:solidFill>
                   <a:srgbClr val="222222"/>
                 </a:solidFill>
@@ -19600,15 +19600,15 @@
               <a:spcAft>
                 <a:spcPts val="600"/>
               </a:spcAft>
-              <a:defRPr sz="1900" b="0">
-                <a:solidFill>
-                  <a:srgbClr val="222222"/>
-                </a:solidFill>
-                <a:latin typeface="Calibri"/>
-              </a:defRPr>
-            </a:pPr>
-            <a:r>
-              <a:rPr sz="1900" b="0">
+              <a:defRPr sz="2000" b="0">
+                <a:solidFill>
+                  <a:srgbClr val="222222"/>
+                </a:solidFill>
+                <a:latin typeface="Calibri"/>
+              </a:defRPr>
+            </a:pPr>
+            <a:r>
+              <a:rPr sz="2000" b="0">
                 <a:solidFill>
                   <a:srgbClr val="222222"/>
                 </a:solidFill>
@@ -19625,15 +19625,15 @@
               <a:spcAft>
                 <a:spcPts val="600"/>
               </a:spcAft>
-              <a:defRPr sz="1900" b="0">
-                <a:solidFill>
-                  <a:srgbClr val="222222"/>
-                </a:solidFill>
-                <a:latin typeface="Calibri"/>
-              </a:defRPr>
-            </a:pPr>
-            <a:r>
-              <a:rPr sz="1900" b="0">
+              <a:defRPr sz="2000" b="0">
+                <a:solidFill>
+                  <a:srgbClr val="222222"/>
+                </a:solidFill>
+                <a:latin typeface="Calibri"/>
+              </a:defRPr>
+            </a:pPr>
+            <a:r>
+              <a:rPr sz="2000" b="0">
                 <a:solidFill>
                   <a:srgbClr val="222222"/>
                 </a:solidFill>
@@ -19650,7 +19650,7 @@
               <a:spcAft>
                 <a:spcPts val="600"/>
               </a:spcAft>
-              <a:defRPr sz="1900" b="0">
+              <a:defRPr sz="1000" b="0">
                 <a:solidFill>
                   <a:srgbClr val="222222"/>
                 </a:solidFill>
@@ -19666,15 +19666,15 @@
               <a:spcAft>
                 <a:spcPts val="600"/>
               </a:spcAft>
-              <a:defRPr sz="1900" b="0">
-                <a:solidFill>
-                  <a:srgbClr val="222222"/>
-                </a:solidFill>
-                <a:latin typeface="Calibri"/>
-              </a:defRPr>
-            </a:pPr>
-            <a:r>
-              <a:rPr sz="1900" b="0">
+              <a:defRPr sz="2000" b="0">
+                <a:solidFill>
+                  <a:srgbClr val="222222"/>
+                </a:solidFill>
+                <a:latin typeface="Calibri"/>
+              </a:defRPr>
+            </a:pPr>
+            <a:r>
+              <a:rPr sz="2000" b="0">
                 <a:solidFill>
                   <a:srgbClr val="222222"/>
                 </a:solidFill>
@@ -19691,7 +19691,7 @@
               <a:spcAft>
                 <a:spcPts val="600"/>
               </a:spcAft>
-              <a:defRPr sz="1900" b="0">
+              <a:defRPr sz="1000" b="0">
                 <a:solidFill>
                   <a:srgbClr val="222222"/>
                 </a:solidFill>
@@ -19707,15 +19707,15 @@
               <a:spcAft>
                 <a:spcPts val="600"/>
               </a:spcAft>
-              <a:defRPr sz="1900" b="0">
-                <a:solidFill>
-                  <a:srgbClr val="222222"/>
-                </a:solidFill>
-                <a:latin typeface="Calibri"/>
-              </a:defRPr>
-            </a:pPr>
-            <a:r>
-              <a:rPr sz="1900" b="0">
+              <a:defRPr sz="2000" b="0">
+                <a:solidFill>
+                  <a:srgbClr val="222222"/>
+                </a:solidFill>
+                <a:latin typeface="Calibri"/>
+              </a:defRPr>
+            </a:pPr>
+            <a:r>
+              <a:rPr sz="2000" b="0">
                 <a:solidFill>
                   <a:srgbClr val="222222"/>
                 </a:solidFill>
@@ -21666,15 +21666,15 @@
               <a:spcAft>
                 <a:spcPts val="600"/>
               </a:spcAft>
-              <a:defRPr sz="2000" b="0">
-                <a:solidFill>
-                  <a:srgbClr val="222222"/>
-                </a:solidFill>
-                <a:latin typeface="Calibri"/>
-              </a:defRPr>
-            </a:pPr>
-            <a:r>
-              <a:rPr sz="2000" b="0">
+              <a:defRPr sz="2100" b="0">
+                <a:solidFill>
+                  <a:srgbClr val="222222"/>
+                </a:solidFill>
+                <a:latin typeface="Calibri"/>
+              </a:defRPr>
+            </a:pPr>
+            <a:r>
+              <a:rPr sz="2100" b="0">
                 <a:solidFill>
                   <a:srgbClr val="222222"/>
                 </a:solidFill>
@@ -21691,15 +21691,15 @@
               <a:spcAft>
                 <a:spcPts val="600"/>
               </a:spcAft>
-              <a:defRPr sz="2000" b="0">
-                <a:solidFill>
-                  <a:srgbClr val="222222"/>
-                </a:solidFill>
-                <a:latin typeface="Calibri"/>
-              </a:defRPr>
-            </a:pPr>
-            <a:r>
-              <a:rPr sz="2000" b="0">
+              <a:defRPr sz="2100" b="0">
+                <a:solidFill>
+                  <a:srgbClr val="222222"/>
+                </a:solidFill>
+                <a:latin typeface="Calibri"/>
+              </a:defRPr>
+            </a:pPr>
+            <a:r>
+              <a:rPr sz="2100" b="0">
                 <a:solidFill>
                   <a:srgbClr val="222222"/>
                 </a:solidFill>
@@ -21716,15 +21716,15 @@
               <a:spcAft>
                 <a:spcPts val="600"/>
               </a:spcAft>
-              <a:defRPr sz="2000" b="0">
-                <a:solidFill>
-                  <a:srgbClr val="222222"/>
-                </a:solidFill>
-                <a:latin typeface="Calibri"/>
-              </a:defRPr>
-            </a:pPr>
-            <a:r>
-              <a:rPr sz="2000" b="0">
+              <a:defRPr sz="2100" b="0">
+                <a:solidFill>
+                  <a:srgbClr val="222222"/>
+                </a:solidFill>
+                <a:latin typeface="Calibri"/>
+              </a:defRPr>
+            </a:pPr>
+            <a:r>
+              <a:rPr sz="2100" b="0">
                 <a:solidFill>
                   <a:srgbClr val="222222"/>
                 </a:solidFill>
@@ -21741,7 +21741,7 @@
               <a:spcAft>
                 <a:spcPts val="600"/>
               </a:spcAft>
-              <a:defRPr sz="2000" b="0">
+              <a:defRPr sz="1050" b="0">
                 <a:solidFill>
                   <a:srgbClr val="222222"/>
                 </a:solidFill>
@@ -21757,15 +21757,15 @@
               <a:spcAft>
                 <a:spcPts val="600"/>
               </a:spcAft>
-              <a:defRPr sz="2000" b="0">
-                <a:solidFill>
-                  <a:srgbClr val="222222"/>
-                </a:solidFill>
-                <a:latin typeface="Calibri"/>
-              </a:defRPr>
-            </a:pPr>
-            <a:r>
-              <a:rPr sz="2000" b="0">
+              <a:defRPr sz="2100" b="0">
+                <a:solidFill>
+                  <a:srgbClr val="222222"/>
+                </a:solidFill>
+                <a:latin typeface="Calibri"/>
+              </a:defRPr>
+            </a:pPr>
+            <a:r>
+              <a:rPr sz="2100" b="0">
                 <a:solidFill>
                   <a:srgbClr val="222222"/>
                 </a:solidFill>
@@ -21782,15 +21782,15 @@
               <a:spcAft>
                 <a:spcPts val="600"/>
               </a:spcAft>
-              <a:defRPr sz="2000" b="0">
-                <a:solidFill>
-                  <a:srgbClr val="222222"/>
-                </a:solidFill>
-                <a:latin typeface="Calibri"/>
-              </a:defRPr>
-            </a:pPr>
-            <a:r>
-              <a:rPr sz="2000" b="0">
+              <a:defRPr sz="2100" b="0">
+                <a:solidFill>
+                  <a:srgbClr val="222222"/>
+                </a:solidFill>
+                <a:latin typeface="Calibri"/>
+              </a:defRPr>
+            </a:pPr>
+            <a:r>
+              <a:rPr sz="2100" b="0">
                 <a:solidFill>
                   <a:srgbClr val="222222"/>
                 </a:solidFill>
@@ -21807,15 +21807,15 @@
               <a:spcAft>
                 <a:spcPts val="600"/>
               </a:spcAft>
-              <a:defRPr sz="2000" b="0">
-                <a:solidFill>
-                  <a:srgbClr val="222222"/>
-                </a:solidFill>
-                <a:latin typeface="Calibri"/>
-              </a:defRPr>
-            </a:pPr>
-            <a:r>
-              <a:rPr sz="2000" b="0">
+              <a:defRPr sz="2100" b="0">
+                <a:solidFill>
+                  <a:srgbClr val="222222"/>
+                </a:solidFill>
+                <a:latin typeface="Calibri"/>
+              </a:defRPr>
+            </a:pPr>
+            <a:r>
+              <a:rPr sz="2100" b="0">
                 <a:solidFill>
                   <a:srgbClr val="222222"/>
                 </a:solidFill>
@@ -21832,7 +21832,7 @@
               <a:spcAft>
                 <a:spcPts val="600"/>
               </a:spcAft>
-              <a:defRPr sz="2000" b="0">
+              <a:defRPr sz="1050" b="0">
                 <a:solidFill>
                   <a:srgbClr val="222222"/>
                 </a:solidFill>
@@ -21848,15 +21848,15 @@
               <a:spcAft>
                 <a:spcPts val="600"/>
               </a:spcAft>
-              <a:defRPr sz="2000" b="0">
-                <a:solidFill>
-                  <a:srgbClr val="222222"/>
-                </a:solidFill>
-                <a:latin typeface="Calibri"/>
-              </a:defRPr>
-            </a:pPr>
-            <a:r>
-              <a:rPr sz="2000" b="0">
+              <a:defRPr sz="2100" b="0">
+                <a:solidFill>
+                  <a:srgbClr val="222222"/>
+                </a:solidFill>
+                <a:latin typeface="Calibri"/>
+              </a:defRPr>
+            </a:pPr>
+            <a:r>
+              <a:rPr sz="2100" b="0">
                 <a:solidFill>
                   <a:srgbClr val="222222"/>
                 </a:solidFill>
@@ -22524,7 +22524,7 @@
               <a:spcAft>
                 <a:spcPts val="600"/>
               </a:spcAft>
-              <a:defRPr sz="800" b="0">
+              <a:defRPr sz="400" b="0">
                 <a:solidFill>
                   <a:srgbClr val="222222"/>
                 </a:solidFill>
@@ -22581,7 +22581,7 @@
               <a:spcAft>
                 <a:spcPts val="600"/>
               </a:spcAft>
-              <a:defRPr sz="800" b="0">
+              <a:defRPr sz="400" b="0">
                 <a:solidFill>
                   <a:srgbClr val="222222"/>
                 </a:solidFill>
@@ -22638,7 +22638,7 @@
               <a:spcAft>
                 <a:spcPts val="600"/>
               </a:spcAft>
-              <a:defRPr sz="800" b="0">
+              <a:defRPr sz="400" b="0">
                 <a:solidFill>
                   <a:srgbClr val="222222"/>
                 </a:solidFill>
@@ -22695,7 +22695,7 @@
               <a:spcAft>
                 <a:spcPts val="600"/>
               </a:spcAft>
-              <a:defRPr sz="800" b="0">
+              <a:defRPr sz="400" b="0">
                 <a:solidFill>
                   <a:srgbClr val="222222"/>
                 </a:solidFill>
@@ -22999,7 +22999,7 @@
         <p:spPr>
           <a:xfrm>
             <a:off x="6537960" y="2615184"/>
-            <a:ext cx="5120640" cy="3232912"/>
+            <a:ext cx="5120640" cy="3093466"/>
           </a:xfrm>
           <a:prstGeom prst="rect">
             <a:avLst/>
@@ -23119,7 +23119,7 @@
               <a:spcAft>
                 <a:spcPts val="0"/>
               </a:spcAft>
-              <a:defRPr sz="1800" b="0">
+              <a:defRPr sz="900" b="0">
                 <a:solidFill>
                   <a:srgbClr val="222222"/>
                 </a:solidFill>
@@ -25796,7 +25796,7 @@
               <a:spcAft>
                 <a:spcPts val="0"/>
               </a:spcAft>
-              <a:defRPr sz="1800" b="1">
+              <a:defRPr sz="900" b="1">
                 <a:solidFill>
                   <a:srgbClr val="1F3A5F"/>
                 </a:solidFill>
@@ -25855,7 +25855,7 @@
               <a:spcAft>
                 <a:spcPts val="0"/>
               </a:spcAft>
-              <a:defRPr sz="1800" b="1">
+              <a:defRPr sz="900" b="1">
                 <a:solidFill>
                   <a:srgbClr val="1F3A5F"/>
                 </a:solidFill>
@@ -26982,7 +26982,7 @@
               <a:spcAft>
                 <a:spcPts val="600"/>
               </a:spcAft>
-              <a:defRPr sz="2700" b="0">
+              <a:defRPr sz="1350" b="0">
                 <a:solidFill>
                   <a:srgbClr val="222222"/>
                 </a:solidFill>
@@ -28536,7 +28536,7 @@
               <a:spcAft>
                 <a:spcPts val="700"/>
               </a:spcAft>
-              <a:defRPr sz="1800" b="0">
+              <a:defRPr sz="900" b="0">
                 <a:solidFill>
                   <a:srgbClr val="222222"/>
                 </a:solidFill>
@@ -29897,7 +29897,7 @@
               <a:spcAft>
                 <a:spcPts val="700"/>
               </a:spcAft>
-              <a:defRPr sz="1800" b="0">
+              <a:defRPr sz="900" b="0">
                 <a:solidFill>
                   <a:srgbClr val="222222"/>
                 </a:solidFill>
@@ -32916,15 +32916,15 @@
               <a:spcAft>
                 <a:spcPts val="600"/>
               </a:spcAft>
-              <a:defRPr sz="2000" b="0">
-                <a:solidFill>
-                  <a:srgbClr val="222222"/>
-                </a:solidFill>
-                <a:latin typeface="Calibri"/>
-              </a:defRPr>
-            </a:pPr>
-            <a:r>
-              <a:rPr sz="2000" b="0">
+              <a:defRPr sz="2100" b="0">
+                <a:solidFill>
+                  <a:srgbClr val="222222"/>
+                </a:solidFill>
+                <a:latin typeface="Calibri"/>
+              </a:defRPr>
+            </a:pPr>
+            <a:r>
+              <a:rPr sz="2100" b="0">
                 <a:solidFill>
                   <a:srgbClr val="222222"/>
                 </a:solidFill>
@@ -32941,15 +32941,15 @@
               <a:spcAft>
                 <a:spcPts val="600"/>
               </a:spcAft>
-              <a:defRPr sz="2000" b="0">
-                <a:solidFill>
-                  <a:srgbClr val="222222"/>
-                </a:solidFill>
-                <a:latin typeface="Calibri"/>
-              </a:defRPr>
-            </a:pPr>
-            <a:r>
-              <a:rPr sz="2000" b="0">
+              <a:defRPr sz="2100" b="0">
+                <a:solidFill>
+                  <a:srgbClr val="222222"/>
+                </a:solidFill>
+                <a:latin typeface="Calibri"/>
+              </a:defRPr>
+            </a:pPr>
+            <a:r>
+              <a:rPr sz="2100" b="0">
                 <a:solidFill>
                   <a:srgbClr val="222222"/>
                 </a:solidFill>
@@ -32966,15 +32966,15 @@
               <a:spcAft>
                 <a:spcPts val="600"/>
               </a:spcAft>
-              <a:defRPr sz="2000" b="0">
-                <a:solidFill>
-                  <a:srgbClr val="222222"/>
-                </a:solidFill>
-                <a:latin typeface="Calibri"/>
-              </a:defRPr>
-            </a:pPr>
-            <a:r>
-              <a:rPr sz="2000" b="0">
+              <a:defRPr sz="2100" b="0">
+                <a:solidFill>
+                  <a:srgbClr val="222222"/>
+                </a:solidFill>
+                <a:latin typeface="Calibri"/>
+              </a:defRPr>
+            </a:pPr>
+            <a:r>
+              <a:rPr sz="2100" b="0">
                 <a:solidFill>
                   <a:srgbClr val="222222"/>
                 </a:solidFill>
@@ -32991,15 +32991,15 @@
               <a:spcAft>
                 <a:spcPts val="600"/>
               </a:spcAft>
-              <a:defRPr sz="2000" b="0">
-                <a:solidFill>
-                  <a:srgbClr val="222222"/>
-                </a:solidFill>
-                <a:latin typeface="Calibri"/>
-              </a:defRPr>
-            </a:pPr>
-            <a:r>
-              <a:rPr sz="2000" b="0">
+              <a:defRPr sz="2100" b="0">
+                <a:solidFill>
+                  <a:srgbClr val="222222"/>
+                </a:solidFill>
+                <a:latin typeface="Calibri"/>
+              </a:defRPr>
+            </a:pPr>
+            <a:r>
+              <a:rPr sz="2100" b="0">
                 <a:solidFill>
                   <a:srgbClr val="222222"/>
                 </a:solidFill>
@@ -33016,7 +33016,7 @@
               <a:spcAft>
                 <a:spcPts val="600"/>
               </a:spcAft>
-              <a:defRPr sz="2000" b="0">
+              <a:defRPr sz="1050" b="0">
                 <a:solidFill>
                   <a:srgbClr val="222222"/>
                 </a:solidFill>
@@ -33032,15 +33032,15 @@
               <a:spcAft>
                 <a:spcPts val="600"/>
               </a:spcAft>
-              <a:defRPr sz="2000" b="0">
-                <a:solidFill>
-                  <a:srgbClr val="222222"/>
-                </a:solidFill>
-                <a:latin typeface="Calibri"/>
-              </a:defRPr>
-            </a:pPr>
-            <a:r>
-              <a:rPr sz="2000" b="0">
+              <a:defRPr sz="2100" b="0">
+                <a:solidFill>
+                  <a:srgbClr val="222222"/>
+                </a:solidFill>
+                <a:latin typeface="Calibri"/>
+              </a:defRPr>
+            </a:pPr>
+            <a:r>
+              <a:rPr sz="2100" b="0">
                 <a:solidFill>
                   <a:srgbClr val="222222"/>
                 </a:solidFill>
@@ -33057,15 +33057,15 @@
               <a:spcAft>
                 <a:spcPts val="600"/>
               </a:spcAft>
-              <a:defRPr sz="2000" b="0">
-                <a:solidFill>
-                  <a:srgbClr val="222222"/>
-                </a:solidFill>
-                <a:latin typeface="Calibri"/>
-              </a:defRPr>
-            </a:pPr>
-            <a:r>
-              <a:rPr sz="2000" b="0">
+              <a:defRPr sz="2100" b="0">
+                <a:solidFill>
+                  <a:srgbClr val="222222"/>
+                </a:solidFill>
+                <a:latin typeface="Calibri"/>
+              </a:defRPr>
+            </a:pPr>
+            <a:r>
+              <a:rPr sz="2100" b="0">
                 <a:solidFill>
                   <a:srgbClr val="222222"/>
                 </a:solidFill>
@@ -33082,15 +33082,15 @@
               <a:spcAft>
                 <a:spcPts val="600"/>
               </a:spcAft>
-              <a:defRPr sz="2000" b="0">
-                <a:solidFill>
-                  <a:srgbClr val="222222"/>
-                </a:solidFill>
-                <a:latin typeface="Calibri"/>
-              </a:defRPr>
-            </a:pPr>
-            <a:r>
-              <a:rPr sz="2000" b="0">
+              <a:defRPr sz="2100" b="0">
+                <a:solidFill>
+                  <a:srgbClr val="222222"/>
+                </a:solidFill>
+                <a:latin typeface="Calibri"/>
+              </a:defRPr>
+            </a:pPr>
+            <a:r>
+              <a:rPr sz="2100" b="0">
                 <a:solidFill>
                   <a:srgbClr val="222222"/>
                 </a:solidFill>
@@ -38938,15 +38938,15 @@
               <a:spcAft>
                 <a:spcPts val="600"/>
               </a:spcAft>
-              <a:defRPr sz="2000" b="0">
-                <a:solidFill>
-                  <a:srgbClr val="222222"/>
-                </a:solidFill>
-                <a:latin typeface="Calibri"/>
-              </a:defRPr>
-            </a:pPr>
-            <a:r>
-              <a:rPr sz="2000" b="0">
+              <a:defRPr sz="2200" b="0">
+                <a:solidFill>
+                  <a:srgbClr val="222222"/>
+                </a:solidFill>
+                <a:latin typeface="Calibri"/>
+              </a:defRPr>
+            </a:pPr>
+            <a:r>
+              <a:rPr sz="2200" b="0">
                 <a:solidFill>
                   <a:srgbClr val="222222"/>
                 </a:solidFill>
@@ -38963,15 +38963,15 @@
               <a:spcAft>
                 <a:spcPts val="600"/>
               </a:spcAft>
-              <a:defRPr sz="2000" b="0">
-                <a:solidFill>
-                  <a:srgbClr val="222222"/>
-                </a:solidFill>
-                <a:latin typeface="Calibri"/>
-              </a:defRPr>
-            </a:pPr>
-            <a:r>
-              <a:rPr sz="2000" b="0">
+              <a:defRPr sz="2200" b="0">
+                <a:solidFill>
+                  <a:srgbClr val="222222"/>
+                </a:solidFill>
+                <a:latin typeface="Calibri"/>
+              </a:defRPr>
+            </a:pPr>
+            <a:r>
+              <a:rPr sz="2200" b="0">
                 <a:solidFill>
                   <a:srgbClr val="222222"/>
                 </a:solidFill>
@@ -38988,7 +38988,7 @@
               <a:spcAft>
                 <a:spcPts val="600"/>
               </a:spcAft>
-              <a:defRPr sz="2000" b="0">
+              <a:defRPr sz="1100" b="0">
                 <a:solidFill>
                   <a:srgbClr val="222222"/>
                 </a:solidFill>
@@ -39004,15 +39004,15 @@
               <a:spcAft>
                 <a:spcPts val="600"/>
               </a:spcAft>
-              <a:defRPr sz="2000" b="0">
-                <a:solidFill>
-                  <a:srgbClr val="222222"/>
-                </a:solidFill>
-                <a:latin typeface="Calibri"/>
-              </a:defRPr>
-            </a:pPr>
-            <a:r>
-              <a:rPr sz="2000" b="0">
+              <a:defRPr sz="2200" b="0">
+                <a:solidFill>
+                  <a:srgbClr val="222222"/>
+                </a:solidFill>
+                <a:latin typeface="Calibri"/>
+              </a:defRPr>
+            </a:pPr>
+            <a:r>
+              <a:rPr sz="2200" b="0">
                 <a:solidFill>
                   <a:srgbClr val="222222"/>
                 </a:solidFill>
@@ -39029,15 +39029,15 @@
               <a:spcAft>
                 <a:spcPts val="600"/>
               </a:spcAft>
-              <a:defRPr sz="2000" b="0">
-                <a:solidFill>
-                  <a:srgbClr val="222222"/>
-                </a:solidFill>
-                <a:latin typeface="Calibri"/>
-              </a:defRPr>
-            </a:pPr>
-            <a:r>
-              <a:rPr sz="2000" b="0">
+              <a:defRPr sz="2200" b="0">
+                <a:solidFill>
+                  <a:srgbClr val="222222"/>
+                </a:solidFill>
+                <a:latin typeface="Calibri"/>
+              </a:defRPr>
+            </a:pPr>
+            <a:r>
+              <a:rPr sz="2200" b="0">
                 <a:solidFill>
                   <a:srgbClr val="222222"/>
                 </a:solidFill>
@@ -39054,7 +39054,7 @@
               <a:spcAft>
                 <a:spcPts val="600"/>
               </a:spcAft>
-              <a:defRPr sz="2000" b="0">
+              <a:defRPr sz="1100" b="0">
                 <a:solidFill>
                   <a:srgbClr val="222222"/>
                 </a:solidFill>
@@ -39070,15 +39070,15 @@
               <a:spcAft>
                 <a:spcPts val="600"/>
               </a:spcAft>
-              <a:defRPr sz="2000" b="0">
-                <a:solidFill>
-                  <a:srgbClr val="222222"/>
-                </a:solidFill>
-                <a:latin typeface="Calibri"/>
-              </a:defRPr>
-            </a:pPr>
-            <a:r>
-              <a:rPr sz="2000" b="0">
+              <a:defRPr sz="2200" b="0">
+                <a:solidFill>
+                  <a:srgbClr val="222222"/>
+                </a:solidFill>
+                <a:latin typeface="Calibri"/>
+              </a:defRPr>
+            </a:pPr>
+            <a:r>
+              <a:rPr sz="2200" b="0">
                 <a:solidFill>
                   <a:srgbClr val="222222"/>
                 </a:solidFill>

--- a/ground-vehicle/docs/courses/beginner-ps3/l2_motor_control.pptx
+++ b/ground-vehicle/docs/courses/beginner-ps3/l2_motor_control.pptx
@@ -10079,7 +10079,7 @@
         <p:spPr>
           <a:xfrm>
             <a:off x="502920" y="1188720"/>
-            <a:ext cx="5364327" cy="457200"/>
+            <a:ext cx="3755029" cy="457200"/>
           </a:xfrm>
           <a:prstGeom prst="rect">
             <a:avLst/>
@@ -10097,9 +10097,9 @@
                 <a:spcPct val="100000"/>
               </a:lnSpc>
               <a:spcAft>
-                <a:spcPts val="600"/>
-              </a:spcAft>
-              <a:defRPr sz="1900" b="1">
+                <a:spcPts val="300"/>
+              </a:spcAft>
+              <a:defRPr sz="2200" b="1">
                 <a:solidFill>
                   <a:srgbClr val="0E7C86"/>
                 </a:solidFill>
@@ -10107,7 +10107,7 @@
               </a:defRPr>
             </a:pPr>
             <a:r>
-              <a:rPr sz="1900" b="1">
+              <a:rPr sz="2200" b="1">
                 <a:solidFill>
                   <a:srgbClr val="0E7C86"/>
                 </a:solidFill>
@@ -10127,7 +10127,7 @@
         <p:spPr>
           <a:xfrm>
             <a:off x="502920" y="1700784"/>
-            <a:ext cx="5364327" cy="4562856"/>
+            <a:ext cx="3755029" cy="4562856"/>
           </a:xfrm>
           <a:prstGeom prst="rect">
             <a:avLst/>
@@ -10147,15 +10147,15 @@
               <a:spcAft>
                 <a:spcPts val="800"/>
               </a:spcAft>
-              <a:defRPr sz="2100" b="0">
-                <a:solidFill>
-                  <a:srgbClr val="222222"/>
-                </a:solidFill>
-                <a:latin typeface="Calibri"/>
-              </a:defRPr>
-            </a:pPr>
-            <a:r>
-              <a:rPr sz="2100" b="0">
+              <a:defRPr sz="2500" b="0">
+                <a:solidFill>
+                  <a:srgbClr val="222222"/>
+                </a:solidFill>
+                <a:latin typeface="Calibri"/>
+              </a:defRPr>
+            </a:pPr>
+            <a:r>
+              <a:rPr sz="2500" b="0">
                 <a:solidFill>
                   <a:srgbClr val="222222"/>
                 </a:solidFill>
@@ -10172,7 +10172,7 @@
               <a:spcAft>
                 <a:spcPts val="800"/>
               </a:spcAft>
-              <a:defRPr sz="1050" b="0">
+              <a:defRPr sz="1250" b="0">
                 <a:solidFill>
                   <a:srgbClr val="222222"/>
                 </a:solidFill>
@@ -10188,15 +10188,15 @@
               <a:spcAft>
                 <a:spcPts val="800"/>
               </a:spcAft>
-              <a:defRPr sz="2100" b="0">
-                <a:solidFill>
-                  <a:srgbClr val="222222"/>
-                </a:solidFill>
-                <a:latin typeface="Calibri"/>
-              </a:defRPr>
-            </a:pPr>
-            <a:r>
-              <a:rPr sz="2100" b="0">
+              <a:defRPr sz="2500" b="0">
+                <a:solidFill>
+                  <a:srgbClr val="222222"/>
+                </a:solidFill>
+                <a:latin typeface="Calibri"/>
+              </a:defRPr>
+            </a:pPr>
+            <a:r>
+              <a:rPr sz="2500" b="0">
                 <a:solidFill>
                   <a:srgbClr val="222222"/>
                 </a:solidFill>
@@ -10213,7 +10213,7 @@
               <a:spcAft>
                 <a:spcPts val="800"/>
               </a:spcAft>
-              <a:defRPr sz="1050" b="0">
+              <a:defRPr sz="1250" b="0">
                 <a:solidFill>
                   <a:srgbClr val="222222"/>
                 </a:solidFill>
@@ -10229,15 +10229,15 @@
               <a:spcAft>
                 <a:spcPts val="800"/>
               </a:spcAft>
-              <a:defRPr sz="2100" b="0">
-                <a:solidFill>
-                  <a:srgbClr val="222222"/>
-                </a:solidFill>
-                <a:latin typeface="Calibri"/>
-              </a:defRPr>
-            </a:pPr>
-            <a:r>
-              <a:rPr sz="2100" b="0">
+              <a:defRPr sz="2500" b="0">
+                <a:solidFill>
+                  <a:srgbClr val="222222"/>
+                </a:solidFill>
+                <a:latin typeface="Calibri"/>
+              </a:defRPr>
+            </a:pPr>
+            <a:r>
+              <a:rPr sz="2500" b="0">
                 <a:solidFill>
                   <a:srgbClr val="222222"/>
                 </a:solidFill>
@@ -10256,8 +10256,8 @@
         </p:nvSpPr>
         <p:spPr>
           <a:xfrm>
-            <a:off x="6324447" y="1188720"/>
-            <a:ext cx="5364327" cy="457200"/>
+            <a:off x="4715149" y="1188720"/>
+            <a:ext cx="6973626" cy="457200"/>
           </a:xfrm>
           <a:prstGeom prst="rect">
             <a:avLst/>
@@ -10275,9 +10275,9 @@
                 <a:spcPct val="100000"/>
               </a:lnSpc>
               <a:spcAft>
-                <a:spcPts val="600"/>
-              </a:spcAft>
-              <a:defRPr sz="1900" b="1">
+                <a:spcPts val="300"/>
+              </a:spcAft>
+              <a:defRPr sz="2200" b="1">
                 <a:solidFill>
                   <a:srgbClr val="0E7C86"/>
                 </a:solidFill>
@@ -10285,7 +10285,7 @@
               </a:defRPr>
             </a:pPr>
             <a:r>
-              <a:rPr sz="1900" b="1">
+              <a:rPr sz="2200" b="1">
                 <a:solidFill>
                   <a:srgbClr val="0E7C86"/>
                 </a:solidFill>
@@ -10304,8 +10304,8 @@
         </p:nvSpPr>
         <p:spPr>
           <a:xfrm>
-            <a:off x="6324447" y="1700784"/>
-            <a:ext cx="5364327" cy="4562856"/>
+            <a:off x="4715149" y="1700784"/>
+            <a:ext cx="6973626" cy="4562856"/>
           </a:xfrm>
           <a:prstGeom prst="rect">
             <a:avLst/>
@@ -10325,15 +10325,15 @@
               <a:spcAft>
                 <a:spcPts val="800"/>
               </a:spcAft>
-              <a:defRPr sz="2100" b="0">
-                <a:solidFill>
-                  <a:srgbClr val="222222"/>
-                </a:solidFill>
-                <a:latin typeface="Calibri"/>
-              </a:defRPr>
-            </a:pPr>
-            <a:r>
-              <a:rPr sz="2100" b="0">
+              <a:defRPr sz="2400" b="0">
+                <a:solidFill>
+                  <a:srgbClr val="222222"/>
+                </a:solidFill>
+                <a:latin typeface="Calibri"/>
+              </a:defRPr>
+            </a:pPr>
+            <a:r>
+              <a:rPr sz="2400" b="0">
                 <a:solidFill>
                   <a:srgbClr val="222222"/>
                 </a:solidFill>
@@ -10350,15 +10350,15 @@
               <a:spcAft>
                 <a:spcPts val="800"/>
               </a:spcAft>
-              <a:defRPr sz="2100" b="0">
-                <a:solidFill>
-                  <a:srgbClr val="222222"/>
-                </a:solidFill>
-                <a:latin typeface="Calibri"/>
-              </a:defRPr>
-            </a:pPr>
-            <a:r>
-              <a:rPr sz="2100" b="0">
+              <a:defRPr sz="2400" b="0">
+                <a:solidFill>
+                  <a:srgbClr val="222222"/>
+                </a:solidFill>
+                <a:latin typeface="Calibri"/>
+              </a:defRPr>
+            </a:pPr>
+            <a:r>
+              <a:rPr sz="2400" b="0">
                 <a:solidFill>
                   <a:srgbClr val="222222"/>
                 </a:solidFill>
@@ -10375,15 +10375,15 @@
               <a:spcAft>
                 <a:spcPts val="800"/>
               </a:spcAft>
-              <a:defRPr sz="2100" b="0">
-                <a:solidFill>
-                  <a:srgbClr val="222222"/>
-                </a:solidFill>
-                <a:latin typeface="Calibri"/>
-              </a:defRPr>
-            </a:pPr>
-            <a:r>
-              <a:rPr sz="2100" b="0">
+              <a:defRPr sz="2400" b="0">
+                <a:solidFill>
+                  <a:srgbClr val="222222"/>
+                </a:solidFill>
+                <a:latin typeface="Calibri"/>
+              </a:defRPr>
+            </a:pPr>
+            <a:r>
+              <a:rPr sz="2400" b="0">
                 <a:solidFill>
                   <a:srgbClr val="222222"/>
                 </a:solidFill>
@@ -10400,7 +10400,7 @@
               <a:spcAft>
                 <a:spcPts val="800"/>
               </a:spcAft>
-              <a:defRPr sz="1050" b="0">
+              <a:defRPr sz="1200" b="0">
                 <a:solidFill>
                   <a:srgbClr val="222222"/>
                 </a:solidFill>
@@ -10416,15 +10416,15 @@
               <a:spcAft>
                 <a:spcPts val="800"/>
               </a:spcAft>
-              <a:defRPr sz="2100" b="0">
-                <a:solidFill>
-                  <a:srgbClr val="222222"/>
-                </a:solidFill>
-                <a:latin typeface="Calibri"/>
-              </a:defRPr>
-            </a:pPr>
-            <a:r>
-              <a:rPr sz="2100" b="0">
+              <a:defRPr sz="2400" b="0">
+                <a:solidFill>
+                  <a:srgbClr val="222222"/>
+                </a:solidFill>
+                <a:latin typeface="Calibri"/>
+              </a:defRPr>
+            </a:pPr>
+            <a:r>
+              <a:rPr sz="2400" b="0">
                 <a:solidFill>
                   <a:srgbClr val="222222"/>
                 </a:solidFill>
@@ -27296,7 +27296,7 @@
         <p:spPr>
           <a:xfrm>
             <a:off x="502920" y="1188720"/>
-            <a:ext cx="5364327" cy="457200"/>
+            <a:ext cx="5649338" cy="457200"/>
           </a:xfrm>
           <a:prstGeom prst="rect">
             <a:avLst/>
@@ -27344,7 +27344,7 @@
         <p:spPr>
           <a:xfrm>
             <a:off x="502920" y="1700784"/>
-            <a:ext cx="5364327" cy="3474720"/>
+            <a:ext cx="5649338" cy="3474720"/>
           </a:xfrm>
           <a:prstGeom prst="rect">
             <a:avLst/>
@@ -27364,15 +27364,15 @@
               <a:spcAft>
                 <a:spcPts val="800"/>
               </a:spcAft>
-              <a:defRPr sz="1900" b="0">
-                <a:solidFill>
-                  <a:srgbClr val="222222"/>
-                </a:solidFill>
-                <a:latin typeface="Calibri"/>
-              </a:defRPr>
-            </a:pPr>
-            <a:r>
-              <a:rPr sz="1900" b="0">
+              <a:defRPr sz="2000" b="0">
+                <a:solidFill>
+                  <a:srgbClr val="222222"/>
+                </a:solidFill>
+                <a:latin typeface="Calibri"/>
+              </a:defRPr>
+            </a:pPr>
+            <a:r>
+              <a:rPr sz="2000" b="0">
                 <a:solidFill>
                   <a:srgbClr val="222222"/>
                 </a:solidFill>
@@ -27389,15 +27389,15 @@
               <a:spcAft>
                 <a:spcPts val="800"/>
               </a:spcAft>
-              <a:defRPr sz="1900" b="0">
-                <a:solidFill>
-                  <a:srgbClr val="222222"/>
-                </a:solidFill>
-                <a:latin typeface="Calibri"/>
-              </a:defRPr>
-            </a:pPr>
-            <a:r>
-              <a:rPr sz="1900" b="0">
+              <a:defRPr sz="2000" b="0">
+                <a:solidFill>
+                  <a:srgbClr val="222222"/>
+                </a:solidFill>
+                <a:latin typeface="Calibri"/>
+              </a:defRPr>
+            </a:pPr>
+            <a:r>
+              <a:rPr sz="2000" b="0">
                 <a:solidFill>
                   <a:srgbClr val="222222"/>
                 </a:solidFill>
@@ -27414,15 +27414,15 @@
               <a:spcAft>
                 <a:spcPts val="800"/>
               </a:spcAft>
-              <a:defRPr sz="1900" b="0">
-                <a:solidFill>
-                  <a:srgbClr val="222222"/>
-                </a:solidFill>
-                <a:latin typeface="Calibri"/>
-              </a:defRPr>
-            </a:pPr>
-            <a:r>
-              <a:rPr sz="1900" b="0">
+              <a:defRPr sz="2000" b="0">
+                <a:solidFill>
+                  <a:srgbClr val="222222"/>
+                </a:solidFill>
+                <a:latin typeface="Calibri"/>
+              </a:defRPr>
+            </a:pPr>
+            <a:r>
+              <a:rPr sz="2000" b="0">
                 <a:solidFill>
                   <a:srgbClr val="222222"/>
                 </a:solidFill>
@@ -27439,15 +27439,15 @@
               <a:spcAft>
                 <a:spcPts val="800"/>
               </a:spcAft>
-              <a:defRPr sz="1900" b="0">
-                <a:solidFill>
-                  <a:srgbClr val="222222"/>
-                </a:solidFill>
-                <a:latin typeface="Calibri"/>
-              </a:defRPr>
-            </a:pPr>
-            <a:r>
-              <a:rPr sz="1900" b="0">
+              <a:defRPr sz="2000" b="0">
+                <a:solidFill>
+                  <a:srgbClr val="222222"/>
+                </a:solidFill>
+                <a:latin typeface="Calibri"/>
+              </a:defRPr>
+            </a:pPr>
+            <a:r>
+              <a:rPr sz="2000" b="0">
                 <a:solidFill>
                   <a:srgbClr val="222222"/>
                 </a:solidFill>
@@ -27466,8 +27466,8 @@
         </p:nvSpPr>
         <p:spPr>
           <a:xfrm>
-            <a:off x="6324447" y="1188720"/>
-            <a:ext cx="5364327" cy="457200"/>
+            <a:off x="6609458" y="1188720"/>
+            <a:ext cx="5079317" cy="457200"/>
           </a:xfrm>
           <a:prstGeom prst="rect">
             <a:avLst/>
@@ -27514,8 +27514,8 @@
         </p:nvSpPr>
         <p:spPr>
           <a:xfrm>
-            <a:off x="6324447" y="1700784"/>
-            <a:ext cx="5364327" cy="3474720"/>
+            <a:off x="6609458" y="1700784"/>
+            <a:ext cx="5079317" cy="3474720"/>
           </a:xfrm>
           <a:prstGeom prst="rect">
             <a:avLst/>
@@ -33314,7 +33314,7 @@
         <p:spPr>
           <a:xfrm>
             <a:off x="502920" y="1188720"/>
-            <a:ext cx="5364327" cy="457200"/>
+            <a:ext cx="5427235" cy="457200"/>
           </a:xfrm>
           <a:prstGeom prst="rect">
             <a:avLst/>
@@ -33362,7 +33362,7 @@
         <p:spPr>
           <a:xfrm>
             <a:off x="502920" y="1700784"/>
-            <a:ext cx="5364327" cy="3474720"/>
+            <a:ext cx="5427235" cy="3474720"/>
           </a:xfrm>
           <a:prstGeom prst="rect">
             <a:avLst/>
@@ -33584,8 +33584,8 @@
         </p:nvSpPr>
         <p:spPr>
           <a:xfrm>
-            <a:off x="6324447" y="1188720"/>
-            <a:ext cx="5364327" cy="457200"/>
+            <a:off x="6387355" y="1188720"/>
+            <a:ext cx="5301420" cy="457200"/>
           </a:xfrm>
           <a:prstGeom prst="rect">
             <a:avLst/>
@@ -33632,8 +33632,8 @@
         </p:nvSpPr>
         <p:spPr>
           <a:xfrm>
-            <a:off x="6324447" y="1700784"/>
-            <a:ext cx="5364327" cy="3474720"/>
+            <a:off x="6387355" y="1700784"/>
+            <a:ext cx="5301420" cy="3474720"/>
           </a:xfrm>
           <a:prstGeom prst="rect">
             <a:avLst/>
@@ -35312,7 +35312,7 @@
         <p:spPr>
           <a:xfrm>
             <a:off x="502920" y="1188720"/>
-            <a:ext cx="5364327" cy="457200"/>
+            <a:ext cx="5086049" cy="457200"/>
           </a:xfrm>
           <a:prstGeom prst="rect">
             <a:avLst/>
@@ -35330,7 +35330,7 @@
                 <a:spcPct val="100000"/>
               </a:lnSpc>
               <a:spcAft>
-                <a:spcPts val="600"/>
+                <a:spcPts val="200"/>
               </a:spcAft>
               <a:defRPr sz="1800" b="1">
                 <a:solidFill>
@@ -35360,7 +35360,7 @@
         <p:spPr>
           <a:xfrm>
             <a:off x="502920" y="1700784"/>
-            <a:ext cx="5364327" cy="3474720"/>
+            <a:ext cx="5086049" cy="3474720"/>
           </a:xfrm>
           <a:prstGeom prst="rect">
             <a:avLst/>
@@ -35380,15 +35380,15 @@
               <a:spcAft>
                 <a:spcPts val="800"/>
               </a:spcAft>
-              <a:defRPr sz="1900" b="0">
-                <a:solidFill>
-                  <a:srgbClr val="222222"/>
-                </a:solidFill>
-                <a:latin typeface="Calibri"/>
-              </a:defRPr>
-            </a:pPr>
-            <a:r>
-              <a:rPr sz="1900" b="0">
+              <a:defRPr sz="1800" b="0">
+                <a:solidFill>
+                  <a:srgbClr val="222222"/>
+                </a:solidFill>
+                <a:latin typeface="Calibri"/>
+              </a:defRPr>
+            </a:pPr>
+            <a:r>
+              <a:rPr sz="1800" b="0">
                 <a:solidFill>
                   <a:srgbClr val="222222"/>
                 </a:solidFill>
@@ -35405,15 +35405,15 @@
               <a:spcAft>
                 <a:spcPts val="800"/>
               </a:spcAft>
-              <a:defRPr sz="1900" b="0">
-                <a:solidFill>
-                  <a:srgbClr val="222222"/>
-                </a:solidFill>
-                <a:latin typeface="Calibri"/>
-              </a:defRPr>
-            </a:pPr>
-            <a:r>
-              <a:rPr sz="1900" b="0">
+              <a:defRPr sz="1800" b="0">
+                <a:solidFill>
+                  <a:srgbClr val="222222"/>
+                </a:solidFill>
+                <a:latin typeface="Calibri"/>
+              </a:defRPr>
+            </a:pPr>
+            <a:r>
+              <a:rPr sz="1800" b="0">
                 <a:solidFill>
                   <a:srgbClr val="222222"/>
                 </a:solidFill>
@@ -35430,15 +35430,15 @@
               <a:spcAft>
                 <a:spcPts val="800"/>
               </a:spcAft>
-              <a:defRPr sz="1900" b="0">
-                <a:solidFill>
-                  <a:srgbClr val="222222"/>
-                </a:solidFill>
-                <a:latin typeface="Calibri"/>
-              </a:defRPr>
-            </a:pPr>
-            <a:r>
-              <a:rPr sz="1900" b="0">
+              <a:defRPr sz="1800" b="0">
+                <a:solidFill>
+                  <a:srgbClr val="222222"/>
+                </a:solidFill>
+                <a:latin typeface="Calibri"/>
+              </a:defRPr>
+            </a:pPr>
+            <a:r>
+              <a:rPr sz="1800" b="0">
                 <a:solidFill>
                   <a:srgbClr val="222222"/>
                 </a:solidFill>
@@ -35455,15 +35455,15 @@
               <a:spcAft>
                 <a:spcPts val="800"/>
               </a:spcAft>
-              <a:defRPr sz="1900" b="0">
-                <a:solidFill>
-                  <a:srgbClr val="222222"/>
-                </a:solidFill>
-                <a:latin typeface="Calibri"/>
-              </a:defRPr>
-            </a:pPr>
-            <a:r>
-              <a:rPr sz="1900" b="0">
+              <a:defRPr sz="1800" b="0">
+                <a:solidFill>
+                  <a:srgbClr val="222222"/>
+                </a:solidFill>
+                <a:latin typeface="Calibri"/>
+              </a:defRPr>
+            </a:pPr>
+            <a:r>
+              <a:rPr sz="1800" b="0">
                 <a:solidFill>
                   <a:srgbClr val="222222"/>
                 </a:solidFill>
@@ -35480,15 +35480,15 @@
               <a:spcAft>
                 <a:spcPts val="800"/>
               </a:spcAft>
-              <a:defRPr sz="1900" b="0">
-                <a:solidFill>
-                  <a:srgbClr val="222222"/>
-                </a:solidFill>
-                <a:latin typeface="Calibri"/>
-              </a:defRPr>
-            </a:pPr>
-            <a:r>
-              <a:rPr sz="1900" b="0">
+              <a:defRPr sz="1800" b="0">
+                <a:solidFill>
+                  <a:srgbClr val="222222"/>
+                </a:solidFill>
+                <a:latin typeface="Calibri"/>
+              </a:defRPr>
+            </a:pPr>
+            <a:r>
+              <a:rPr sz="1800" b="0">
                 <a:solidFill>
                   <a:srgbClr val="222222"/>
                 </a:solidFill>
@@ -35507,8 +35507,8 @@
         </p:nvSpPr>
         <p:spPr>
           <a:xfrm>
-            <a:off x="6324447" y="1188720"/>
-            <a:ext cx="5364327" cy="457200"/>
+            <a:off x="6046169" y="1188720"/>
+            <a:ext cx="5642606" cy="457200"/>
           </a:xfrm>
           <a:prstGeom prst="rect">
             <a:avLst/>
@@ -35555,8 +35555,8 @@
         </p:nvSpPr>
         <p:spPr>
           <a:xfrm>
-            <a:off x="6324447" y="1700784"/>
-            <a:ext cx="5364327" cy="3474720"/>
+            <a:off x="6046169" y="1700784"/>
+            <a:ext cx="5642606" cy="3474720"/>
           </a:xfrm>
           <a:prstGeom prst="rect">
             <a:avLst/>
@@ -37462,7 +37462,7 @@
         <p:spPr>
           <a:xfrm>
             <a:off x="502920" y="1188720"/>
-            <a:ext cx="5364327" cy="457200"/>
+            <a:ext cx="4760728" cy="457200"/>
           </a:xfrm>
           <a:prstGeom prst="rect">
             <a:avLst/>
@@ -37510,7 +37510,7 @@
         <p:spPr>
           <a:xfrm>
             <a:off x="502920" y="1700784"/>
-            <a:ext cx="5364327" cy="3474720"/>
+            <a:ext cx="4760728" cy="3474720"/>
           </a:xfrm>
           <a:prstGeom prst="rect">
             <a:avLst/>
@@ -37530,15 +37530,15 @@
               <a:spcAft>
                 <a:spcPts val="800"/>
               </a:spcAft>
-              <a:defRPr sz="1800" b="0">
-                <a:solidFill>
-                  <a:srgbClr val="222222"/>
-                </a:solidFill>
-                <a:latin typeface="Calibri"/>
-              </a:defRPr>
-            </a:pPr>
-            <a:r>
-              <a:rPr sz="1800" b="0">
+              <a:defRPr sz="1900" b="0">
+                <a:solidFill>
+                  <a:srgbClr val="222222"/>
+                </a:solidFill>
+                <a:latin typeface="Calibri"/>
+              </a:defRPr>
+            </a:pPr>
+            <a:r>
+              <a:rPr sz="1900" b="0">
                 <a:solidFill>
                   <a:srgbClr val="222222"/>
                 </a:solidFill>
@@ -37555,15 +37555,15 @@
               <a:spcAft>
                 <a:spcPts val="800"/>
               </a:spcAft>
-              <a:defRPr sz="1800" b="0">
-                <a:solidFill>
-                  <a:srgbClr val="222222"/>
-                </a:solidFill>
-                <a:latin typeface="Calibri"/>
-              </a:defRPr>
-            </a:pPr>
-            <a:r>
-              <a:rPr sz="1800" b="0">
+              <a:defRPr sz="1900" b="0">
+                <a:solidFill>
+                  <a:srgbClr val="222222"/>
+                </a:solidFill>
+                <a:latin typeface="Calibri"/>
+              </a:defRPr>
+            </a:pPr>
+            <a:r>
+              <a:rPr sz="1900" b="0">
                 <a:solidFill>
                   <a:srgbClr val="222222"/>
                 </a:solidFill>
@@ -37580,15 +37580,15 @@
               <a:spcAft>
                 <a:spcPts val="800"/>
               </a:spcAft>
-              <a:defRPr sz="1800" b="0">
-                <a:solidFill>
-                  <a:srgbClr val="222222"/>
-                </a:solidFill>
-                <a:latin typeface="Calibri"/>
-              </a:defRPr>
-            </a:pPr>
-            <a:r>
-              <a:rPr sz="1800" b="0">
+              <a:defRPr sz="1900" b="0">
+                <a:solidFill>
+                  <a:srgbClr val="222222"/>
+                </a:solidFill>
+                <a:latin typeface="Calibri"/>
+              </a:defRPr>
+            </a:pPr>
+            <a:r>
+              <a:rPr sz="1900" b="0">
                 <a:solidFill>
                   <a:srgbClr val="222222"/>
                 </a:solidFill>
@@ -37607,8 +37607,8 @@
         </p:nvSpPr>
         <p:spPr>
           <a:xfrm>
-            <a:off x="6324447" y="1188720"/>
-            <a:ext cx="5364327" cy="457200"/>
+            <a:off x="5720848" y="1188720"/>
+            <a:ext cx="5967927" cy="457200"/>
           </a:xfrm>
           <a:prstGeom prst="rect">
             <a:avLst/>
@@ -37655,8 +37655,8 @@
         </p:nvSpPr>
         <p:spPr>
           <a:xfrm>
-            <a:off x="6324447" y="1700784"/>
-            <a:ext cx="5364327" cy="3474720"/>
+            <a:off x="5720848" y="1700784"/>
+            <a:ext cx="5967927" cy="3474720"/>
           </a:xfrm>
           <a:prstGeom prst="rect">
             <a:avLst/>
@@ -37674,17 +37674,17 @@
                 <a:spcPct val="100000"/>
               </a:lnSpc>
               <a:spcAft>
-                <a:spcPts val="400"/>
-              </a:spcAft>
-              <a:defRPr sz="1800" b="0">
-                <a:solidFill>
-                  <a:srgbClr val="222222"/>
-                </a:solidFill>
-                <a:latin typeface="Calibri"/>
-              </a:defRPr>
-            </a:pPr>
-            <a:r>
-              <a:rPr sz="1800" b="0">
+                <a:spcPts val="800"/>
+              </a:spcAft>
+              <a:defRPr sz="1900" b="0">
+                <a:solidFill>
+                  <a:srgbClr val="222222"/>
+                </a:solidFill>
+                <a:latin typeface="Calibri"/>
+              </a:defRPr>
+            </a:pPr>
+            <a:r>
+              <a:rPr sz="1900" b="0">
                 <a:solidFill>
                   <a:srgbClr val="222222"/>
                 </a:solidFill>
@@ -37699,17 +37699,17 @@
                 <a:spcPct val="100000"/>
               </a:lnSpc>
               <a:spcAft>
-                <a:spcPts val="400"/>
-              </a:spcAft>
-              <a:defRPr sz="1800" b="0">
-                <a:solidFill>
-                  <a:srgbClr val="222222"/>
-                </a:solidFill>
-                <a:latin typeface="Calibri"/>
-              </a:defRPr>
-            </a:pPr>
-            <a:r>
-              <a:rPr sz="1800" b="0">
+                <a:spcPts val="800"/>
+              </a:spcAft>
+              <a:defRPr sz="1900" b="0">
+                <a:solidFill>
+                  <a:srgbClr val="222222"/>
+                </a:solidFill>
+                <a:latin typeface="Calibri"/>
+              </a:defRPr>
+            </a:pPr>
+            <a:r>
+              <a:rPr sz="1900" b="0">
                 <a:solidFill>
                   <a:srgbClr val="222222"/>
                 </a:solidFill>
@@ -37724,17 +37724,17 @@
                 <a:spcPct val="100000"/>
               </a:lnSpc>
               <a:spcAft>
-                <a:spcPts val="400"/>
-              </a:spcAft>
-              <a:defRPr sz="1800" b="0">
-                <a:solidFill>
-                  <a:srgbClr val="222222"/>
-                </a:solidFill>
-                <a:latin typeface="Calibri"/>
-              </a:defRPr>
-            </a:pPr>
-            <a:r>
-              <a:rPr sz="1800" b="0">
+                <a:spcPts val="800"/>
+              </a:spcAft>
+              <a:defRPr sz="1900" b="0">
+                <a:solidFill>
+                  <a:srgbClr val="222222"/>
+                </a:solidFill>
+                <a:latin typeface="Calibri"/>
+              </a:defRPr>
+            </a:pPr>
+            <a:r>
+              <a:rPr sz="1900" b="0">
                 <a:solidFill>
                   <a:srgbClr val="222222"/>
                 </a:solidFill>
@@ -37749,17 +37749,17 @@
                 <a:spcPct val="100000"/>
               </a:lnSpc>
               <a:spcAft>
-                <a:spcPts val="400"/>
-              </a:spcAft>
-              <a:defRPr sz="1800" b="0">
-                <a:solidFill>
-                  <a:srgbClr val="222222"/>
-                </a:solidFill>
-                <a:latin typeface="Calibri"/>
-              </a:defRPr>
-            </a:pPr>
-            <a:r>
-              <a:rPr sz="1800" b="0">
+                <a:spcPts val="800"/>
+              </a:spcAft>
+              <a:defRPr sz="1900" b="0">
+                <a:solidFill>
+                  <a:srgbClr val="222222"/>
+                </a:solidFill>
+                <a:latin typeface="Calibri"/>
+              </a:defRPr>
+            </a:pPr>
+            <a:r>
+              <a:rPr sz="1900" b="0">
                 <a:solidFill>
                   <a:srgbClr val="222222"/>
                 </a:solidFill>
@@ -37774,17 +37774,17 @@
                 <a:spcPct val="100000"/>
               </a:lnSpc>
               <a:spcAft>
-                <a:spcPts val="400"/>
-              </a:spcAft>
-              <a:defRPr sz="1800" b="0">
-                <a:solidFill>
-                  <a:srgbClr val="222222"/>
-                </a:solidFill>
-                <a:latin typeface="Calibri"/>
-              </a:defRPr>
-            </a:pPr>
-            <a:r>
-              <a:rPr sz="1800" b="0">
+                <a:spcPts val="800"/>
+              </a:spcAft>
+              <a:defRPr sz="1900" b="0">
+                <a:solidFill>
+                  <a:srgbClr val="222222"/>
+                </a:solidFill>
+                <a:latin typeface="Calibri"/>
+              </a:defRPr>
+            </a:pPr>
+            <a:r>
+              <a:rPr sz="1900" b="0">
                 <a:solidFill>
                   <a:srgbClr val="222222"/>
                 </a:solidFill>

--- a/ground-vehicle/docs/courses/beginner-ps3/l2_motor_control.pptx
+++ b/ground-vehicle/docs/courses/beginner-ps3/l2_motor_control.pptx
@@ -44,7 +44,6 @@
     <p:sldId id="292" r:id="rId44"/>
     <p:sldId id="293" r:id="rId45"/>
     <p:sldId id="294" r:id="rId46"/>
-    <p:sldId id="295" r:id="rId47"/>
   </p:sldIdLst>
   <p:sldSz cx="12191695" cy="6858000" type="screen4x3"/>
   <p:notesSz cx="6858000" cy="9144000"/>
@@ -924,7 +923,15 @@
               <a:rPr sz="1200">
                 <a:latin typeface="Calibri"/>
               </a:rPr>
-              <a:t>Twenty seconds. First of three activities.</a:t>
+              <a:t>First of three activities. Twenty seconds on this slide.</a:t>
+            </a:r>
+          </a:p>
+          <a:p>
+            <a:r>
+              <a:rPr sz="1200">
+                <a:latin typeface="Calibri"/>
+              </a:rPr>
+              <a:t>Blocks under every vehicle before anybody uploads.</a:t>
             </a:r>
           </a:p>
         </p:txBody>
@@ -1094,7 +1101,7 @@
               <a:rPr sz="1200">
                 <a:latin typeface="Calibri"/>
               </a:rPr>
-              <a:t>Twenty seconds. Two of three.</a:t>
+              <a:t>Two of three. Wheels still off the ground - this one runs all four to full speed.</a:t>
             </a:r>
           </a:p>
         </p:txBody>
@@ -3108,7 +3115,39 @@
               <a:rPr sz="1200">
                 <a:latin typeface="Calibri"/>
               </a:rPr>
-              <a:t>Twenty seconds, then clear the floor.</a:t>
+              <a:t>Floor cleared, bags away, and one person per group watching where the vehicle goes rather than watching the laptop.</a:t>
+            </a:r>
+          </a:p>
+          <a:p>
+            <a:r>
+              <a:rPr sz="1200">
+                <a:latin typeface="Calibri"/>
+              </a:rPr>
+              <a:t>Steps 4 and 5 are the measurement. Nobody tunes anything until they have a speed written down.</a:t>
+            </a:r>
+          </a:p>
+          <a:p>
+            <a:r>
+              <a:rPr sz="1200">
+                <a:latin typeface="Calibri"/>
+              </a:rPr>
+              <a:t>Step 6 is patient work: twenty-five milliseconds at a time. Resist doing it for them.</a:t>
+            </a:r>
+          </a:p>
+          <a:p>
+            <a:r>
+              <a:rPr sz="1200">
+                <a:latin typeface="Calibri"/>
+              </a:rPr>
+              <a:t>Step 7 is the one that proves they understand it - predict first, then run. Make a note of which groups predicted well.</a:t>
+            </a:r>
+          </a:p>
+          <a:p>
+            <a:r>
+              <a:rPr sz="1200">
+                <a:latin typeface="Calibri"/>
+              </a:rPr>
+              <a:t>If a group's vehicle curves badly on the straights, one motor is weaker. That is a real finding and worth saying out loud.</a:t>
             </a:r>
           </a:p>
         </p:txBody>
@@ -3181,7 +3220,7 @@
               <a:rPr sz="1200">
                 <a:latin typeface="Calibri"/>
               </a:rPr>
-              <a:t>Floor cleared, bags away, and one person per group watching where the vehicle goes rather than watching the laptop.</a:t>
+              <a:t>This is the intellectual point of the lesson. Give it the time it needs.</a:t>
             </a:r>
           </a:p>
           <a:p>
@@ -3189,7 +3228,7 @@
               <a:rPr sz="1200">
                 <a:latin typeface="Calibri"/>
               </a:rPr>
-              <a:t>Steps 4 and 5 are the measurement. Nobody tunes anything until they have a speed written down.</a:t>
+              <a:t>Ships and aircraft navigated this way for centuries, and submersibles still do, because GPS does not work underwater. That connects the rover to the rest of what the company does.</a:t>
             </a:r>
           </a:p>
           <a:p>
@@ -3197,7 +3236,7 @@
               <a:rPr sz="1200">
                 <a:latin typeface="Calibri"/>
               </a:rPr>
-              <a:t>Step 6 is patient work: twenty-five milliseconds at a time. Resist doing it for them.</a:t>
+              <a:t>Go through the four error sources and ask which they saw today. They will have seen at least two.</a:t>
             </a:r>
           </a:p>
           <a:p>
@@ -3205,15 +3244,7 @@
               <a:rPr sz="1200">
                 <a:latin typeface="Calibri"/>
               </a:rPr>
-              <a:t>Step 7 is the one that proves they understand it - predict first, then run. Make a note of which groups predicted well.</a:t>
-            </a:r>
-          </a:p>
-          <a:p>
-            <a:r>
-              <a:rPr sz="1200">
-                <a:latin typeface="Calibri"/>
-              </a:rPr>
-              <a:t>If a group's vehicle curves badly on the straights, one motor is weaker. That is a real finding and worth saying out loud.</a:t>
+              <a:t>End on the fix: a sensor that tells you something true about the outside world. That is the next course.</a:t>
             </a:r>
           </a:p>
         </p:txBody>
@@ -3286,7 +3317,7 @@
               <a:rPr sz="1200">
                 <a:latin typeface="Calibri"/>
               </a:rPr>
-              <a:t>This is the intellectual point of the lesson. Give it the time it needs.</a:t>
+              <a:t>This is a preview, not an activity. Two minutes.</a:t>
             </a:r>
           </a:p>
           <a:p>
@@ -3294,7 +3325,7 @@
               <a:rPr sz="1200">
                 <a:latin typeface="Calibri"/>
               </a:rPr>
-              <a:t>Ships and aircraft navigated this way for centuries, and submersibles still do, because GPS does not work underwater. That connects the rover to the rest of what the company does.</a:t>
+              <a:t>The calibration point is the one to stress: they already know what duty 255 gives them in feet per second, so they can predict the race.</a:t>
             </a:r>
           </a:p>
           <a:p>
@@ -3302,15 +3333,7 @@
               <a:rPr sz="1200">
                 <a:latin typeface="Calibri"/>
               </a:rPr>
-              <a:t>Go through the four error sources and ask which they saw today. They will have seen at least two.</a:t>
-            </a:r>
-          </a:p>
-          <a:p>
-            <a:r>
-              <a:rPr sz="1200">
-                <a:latin typeface="Calibri"/>
-              </a:rPr>
-              <a:t>End on the fix: a sensor that tells you something true about the outside world. That is the next course.</a:t>
+              <a:t>Braking by driving in reverse surprises people. Let them think about why there is no other option.</a:t>
             </a:r>
           </a:p>
         </p:txBody>
@@ -3383,7 +3406,7 @@
               <a:rPr sz="1200">
                 <a:latin typeface="Calibri"/>
               </a:rPr>
-              <a:t>This is a preview, not an activity. Two minutes.</a:t>
+              <a:t>Optional and not examined. Say so, or the keen ones will treat it as homework and the rest will feel behind.</a:t>
             </a:r>
           </a:p>
           <a:p>
@@ -3391,7 +3414,7 @@
               <a:rPr sz="1200">
                 <a:latin typeface="Calibri"/>
               </a:rPr>
-              <a:t>The calibration point is the one to stress: they already know what duty 255 gives them in feet per second, so they can predict the race.</a:t>
+              <a:t>The PWM video is the one to recommend if today felt fast.</a:t>
             </a:r>
           </a:p>
           <a:p>
@@ -3399,7 +3422,7 @@
               <a:rPr sz="1200">
                 <a:latin typeface="Calibri"/>
               </a:rPr>
-              <a:t>Braking by driving in reverse surprises people. Let them think about why there is no other option.</a:t>
+              <a:t>Check the links still work before you show this slide.</a:t>
             </a:r>
           </a:p>
         </p:txBody>
@@ -3472,7 +3495,7 @@
               <a:rPr sz="1200">
                 <a:latin typeface="Calibri"/>
               </a:rPr>
-              <a:t>Optional and not examined. Say so, or the keen ones will treat it as homework and the rest will feel behind.</a:t>
+              <a:t>Conversation, not a test. Take a wrong answer first where you can.</a:t>
             </a:r>
           </a:p>
           <a:p>
@@ -3480,7 +3503,7 @@
               <a:rPr sz="1200">
                 <a:latin typeface="Calibri"/>
               </a:rPr>
-              <a:t>The PWM video is the one to recommend if today felt fast.</a:t>
+              <a:t>Answers, in order: two pins so current can be sent either way; the pin switches on and off fast and the motor feels the average; 25% of 255 is about 64; 20 kHz is above hearing and 300 Hz is not; the vehicle spins on the spot; 9.42 inches, which is 0.79 feet.</a:t>
             </a:r>
           </a:p>
           <a:p>
@@ -3488,7 +3511,23 @@
               <a:rPr sz="1200">
                 <a:latin typeface="Calibri"/>
               </a:rPr>
-              <a:t>Check the links still work before you show this slide.</a:t>
+              <a:t>For question 7, a rectangle means the two straights differ - FORWARD_MS is fine and the corners are not square, so TURN_MS is the number to change.</a:t>
+            </a:r>
+          </a:p>
+          <a:p>
+            <a:r>
+              <a:rPr sz="1200">
+                <a:latin typeface="Calibri"/>
+              </a:rPr>
+              <a:t>For question 8, any two of: battery charge, floor surface, wheel slip, motors not matched.</a:t>
+            </a:r>
+          </a:p>
+          <a:p>
+            <a:r>
+              <a:rPr sz="1200">
+                <a:latin typeface="Calibri"/>
+              </a:rPr>
+              <a:t>Tell them next lesson they drive it themselves. That is the hook.</a:t>
             </a:r>
           </a:p>
         </p:txBody>
@@ -3570,111 +3609,6 @@
                 <a:latin typeface="Calibri"/>
               </a:rPr>
               <a:t>If you are running late, shorten the Ohm's law section rather than the square. The square is the lesson.</a:t>
-            </a:r>
-          </a:p>
-        </p:txBody>
-      </p:sp>
-      <p:sp>
-        <p:nvSpPr>
-          <p:cNvPr id="4" name="Slide Number Placeholder 3"/>
-          <p:cNvSpPr>
-            <a:spLocks noGrp="1"/>
-          </p:cNvSpPr>
-          <p:nvPr>
-            <p:ph type="sldNum" idx="5" sz="quarter"/>
-          </p:nvPr>
-        </p:nvSpPr>
-        <p:spPr/>
-      </p:sp>
-    </p:spTree>
-  </p:cSld>
-  <p:clrMapOvr>
-    <a:masterClrMapping/>
-  </p:clrMapOvr>
-</p:notes>
-</file>
-
-<file path=ppt/notesSlides/notesSlide40.xml><?xml version="1.0" encoding="utf-8"?>
-<p:notes xmlns:a="http://schemas.openxmlformats.org/drawingml/2006/main" xmlns:p="http://schemas.openxmlformats.org/presentationml/2006/main" xmlns:r="http://schemas.openxmlformats.org/officeDocument/2006/relationships">
-  <p:cSld>
-    <p:spTree>
-      <p:nvGrpSpPr>
-        <p:cNvPr id="1" name=""/>
-        <p:cNvGrpSpPr/>
-        <p:nvPr/>
-      </p:nvGrpSpPr>
-      <p:grpSpPr>
-        <a:xfrm>
-          <a:off x="0" y="0"/>
-          <a:ext cx="0" cy="0"/>
-          <a:chOff x="0" y="0"/>
-          <a:chExt cx="0" cy="0"/>
-        </a:xfrm>
-      </p:grpSpPr>
-      <p:sp>
-        <p:nvSpPr>
-          <p:cNvPr id="2" name="Slide Image Placeholder 1"/>
-          <p:cNvSpPr>
-            <a:spLocks noGrp="1"/>
-          </p:cNvSpPr>
-          <p:nvPr>
-            <p:ph type="sldImg" idx="2"/>
-          </p:nvPr>
-        </p:nvSpPr>
-        <p:spPr/>
-      </p:sp>
-      <p:sp>
-        <p:nvSpPr>
-          <p:cNvPr id="3" name="Notes Placeholder 2"/>
-          <p:cNvSpPr>
-            <a:spLocks noGrp="1"/>
-          </p:cNvSpPr>
-          <p:nvPr>
-            <p:ph type="body" idx="3" sz="quarter"/>
-          </p:nvPr>
-        </p:nvSpPr>
-        <p:spPr/>
-        <p:txBody>
-          <a:bodyPr/>
-          <a:lstStyle/>
-          <a:p>
-            <a:r>
-              <a:rPr sz="1200">
-                <a:latin typeface="Calibri"/>
-              </a:rPr>
-              <a:t>Conversation, not a test. Take a wrong answer first where you can.</a:t>
-            </a:r>
-          </a:p>
-          <a:p>
-            <a:r>
-              <a:rPr sz="1200">
-                <a:latin typeface="Calibri"/>
-              </a:rPr>
-              <a:t>Answers, in order: two pins so current can be sent either way; the pin switches on and off fast and the motor feels the average; 25% of 255 is about 64; 20 kHz is above hearing and 300 Hz is not; the vehicle spins on the spot; 9.42 inches, which is 0.79 feet.</a:t>
-            </a:r>
-          </a:p>
-          <a:p>
-            <a:r>
-              <a:rPr sz="1200">
-                <a:latin typeface="Calibri"/>
-              </a:rPr>
-              <a:t>For question 7, a rectangle means the two straights differ - FORWARD_MS is fine and the corners are not square, so TURN_MS is the number to change.</a:t>
-            </a:r>
-          </a:p>
-          <a:p>
-            <a:r>
-              <a:rPr sz="1200">
-                <a:latin typeface="Calibri"/>
-              </a:rPr>
-              <a:t>For question 8, any two of: battery charge, floor surface, wheel slip, motors not matched.</a:t>
-            </a:r>
-          </a:p>
-          <a:p>
-            <a:r>
-              <a:rPr sz="1200">
-                <a:latin typeface="Calibri"/>
-              </a:rPr>
-              <a:t>Tell them next lesson they drive it themselves. That is the hook.</a:t>
             </a:r>
           </a:p>
         </p:txBody>
@@ -11117,66 +11051,116 @@
       <p:grpSpPr/>
       <p:sp>
         <p:nvSpPr>
-          <p:cNvPr id="2" name="Title 1"/>
-          <p:cNvSpPr>
-            <a:spLocks noGrp="1"/>
-          </p:cNvSpPr>
-          <p:nvPr>
-            <p:ph type="title"/>
-          </p:nvPr>
-        </p:nvSpPr>
-        <p:spPr>
-          <a:xfrm>
-            <a:off x="502920" y="274320"/>
-            <a:ext cx="11185855" cy="777240"/>
-          </a:xfrm>
-        </p:spPr>
-        <p:txBody>
-          <a:bodyPr wrap="square" anchor="b"/>
-          <a:lstStyle/>
-          <a:p>
-            <a:pPr algn="l">
-              <a:lnSpc>
-                <a:spcPct val="100000"/>
-              </a:lnSpc>
-              <a:spcAft>
-                <a:spcPts val="0"/>
-              </a:spcAft>
-              <a:defRPr sz="2800" b="1">
-                <a:solidFill>
-                  <a:srgbClr val="1F3A5F"/>
-                </a:solidFill>
-                <a:latin typeface="Calibri"/>
-              </a:defRPr>
-            </a:pPr>
-            <a:r>
-              <a:rPr sz="2800" b="1">
-                <a:solidFill>
-                  <a:srgbClr val="1F3A5F"/>
-                </a:solidFill>
-                <a:latin typeface="Calibri"/>
-              </a:rPr>
-              <a:t>Where we are</a:t>
-            </a:r>
-          </a:p>
-        </p:txBody>
-      </p:sp>
-      <p:sp>
-        <p:nvSpPr>
-          <p:cNvPr id="3" name="Rectangle 2"/>
-          <p:cNvSpPr/>
-          <p:nvPr/>
-        </p:nvSpPr>
-        <p:spPr>
-          <a:xfrm>
-            <a:off x="502920" y="1097280"/>
-            <a:ext cx="11185855" cy="19050"/>
+          <p:cNvPr id="2" name="TextBox 1"/>
+          <p:cNvSpPr txBox="1"/>
+          <p:nvPr/>
+        </p:nvSpPr>
+        <p:spPr>
+          <a:xfrm>
+            <a:off x="502920" y="6382512"/>
+            <a:ext cx="10545775" cy="274320"/>
           </a:xfrm>
           <a:prstGeom prst="rect">
             <a:avLst/>
           </a:prstGeom>
+          <a:noFill/>
+        </p:spPr>
+        <p:txBody>
+          <a:bodyPr wrap="square" lIns="0" tIns="0">
+            <a:spAutoFit/>
+          </a:bodyPr>
+          <a:lstStyle/>
+          <a:p>
+            <a:pPr algn="l">
+              <a:lnSpc>
+                <a:spcPct val="100000"/>
+              </a:lnSpc>
+              <a:spcAft>
+                <a:spcPts val="0"/>
+              </a:spcAft>
+              <a:defRPr sz="1000" b="0">
+                <a:solidFill>
+                  <a:srgbClr val="666666"/>
+                </a:solidFill>
+                <a:latin typeface="Calibri"/>
+              </a:defRPr>
+            </a:pPr>
+            <a:r>
+              <a:rPr sz="1000" b="0">
+                <a:solidFill>
+                  <a:srgbClr val="666666"/>
+                </a:solidFill>
+                <a:latin typeface="Calibri"/>
+              </a:rPr>
+              <a:t>Pathfinder Beginner - PS3  |  Lesson 2</a:t>
+            </a:r>
+          </a:p>
+        </p:txBody>
+      </p:sp>
+      <p:sp>
+        <p:nvSpPr>
+          <p:cNvPr id="3" name="TextBox 2"/>
+          <p:cNvSpPr txBox="1"/>
+          <p:nvPr/>
+        </p:nvSpPr>
+        <p:spPr>
+          <a:xfrm>
+            <a:off x="11231575" y="6382512"/>
+            <a:ext cx="457200" cy="274320"/>
+          </a:xfrm>
+          <a:prstGeom prst="rect">
+            <a:avLst/>
+          </a:prstGeom>
+          <a:noFill/>
+        </p:spPr>
+        <p:txBody>
+          <a:bodyPr wrap="square" lIns="0" tIns="0">
+            <a:spAutoFit/>
+          </a:bodyPr>
+          <a:lstStyle/>
+          <a:p>
+            <a:pPr algn="r">
+              <a:lnSpc>
+                <a:spcPct val="100000"/>
+              </a:lnSpc>
+              <a:spcAft>
+                <a:spcPts val="0"/>
+              </a:spcAft>
+              <a:defRPr sz="1000" b="0">
+                <a:solidFill>
+                  <a:srgbClr val="666666"/>
+                </a:solidFill>
+                <a:latin typeface="Calibri"/>
+              </a:defRPr>
+            </a:pPr>
+            <a:r>
+              <a:rPr sz="1000" b="0">
+                <a:solidFill>
+                  <a:srgbClr val="666666"/>
+                </a:solidFill>
+                <a:latin typeface="Calibri"/>
+              </a:rPr>
+              <a:t>12</a:t>
+            </a:r>
+          </a:p>
+        </p:txBody>
+      </p:sp>
+      <p:sp>
+        <p:nvSpPr>
+          <p:cNvPr id="4" name="Rectangle 3"/>
+          <p:cNvSpPr/>
+          <p:nvPr/>
+        </p:nvSpPr>
+        <p:spPr>
+          <a:xfrm>
+            <a:off x="0" y="1234440"/>
+            <a:ext cx="256032" cy="1554480"/>
+          </a:xfrm>
+          <a:prstGeom prst="rect">
+            <a:avLst/>
+          </a:prstGeom>
           <a:solidFill>
-            <a:srgbClr val="C8D2DE"/>
+            <a:srgbClr val="0E7C86"/>
           </a:solidFill>
           <a:ln>
             <a:noFill/>
@@ -11207,14 +11191,14 @@
       </p:sp>
       <p:sp>
         <p:nvSpPr>
-          <p:cNvPr id="4" name="TextBox 3"/>
+          <p:cNvPr id="5" name="TextBox 4"/>
           <p:cNvSpPr txBox="1"/>
           <p:nvPr/>
         </p:nvSpPr>
         <p:spPr>
           <a:xfrm>
-            <a:off x="502920" y="6382512"/>
-            <a:ext cx="10545775" cy="274320"/>
+            <a:off x="777240" y="1325880"/>
+            <a:ext cx="10515600" cy="1051560"/>
           </a:xfrm>
           <a:prstGeom prst="rect">
             <a:avLst/>
@@ -11222,7 +11206,7 @@
           <a:noFill/>
         </p:spPr>
         <p:txBody>
-          <a:bodyPr wrap="square" lIns="0" tIns="0">
+          <a:bodyPr wrap="square" lIns="0" tIns="0" rIns="0" bIns="0">
             <a:spAutoFit/>
           </a:bodyPr>
           <a:lstStyle/>
@@ -11234,35 +11218,35 @@
               <a:spcAft>
                 <a:spcPts val="0"/>
               </a:spcAft>
-              <a:defRPr sz="1000" b="0">
-                <a:solidFill>
-                  <a:srgbClr val="666666"/>
-                </a:solidFill>
-                <a:latin typeface="Calibri"/>
-              </a:defRPr>
-            </a:pPr>
-            <a:r>
-              <a:rPr sz="1000" b="0">
-                <a:solidFill>
-                  <a:srgbClr val="666666"/>
-                </a:solidFill>
-                <a:latin typeface="Calibri"/>
-              </a:rPr>
-              <a:t>Pathfinder Beginner - PS3  |  Lesson 2</a:t>
-            </a:r>
-          </a:p>
-        </p:txBody>
-      </p:sp>
-      <p:sp>
-        <p:nvSpPr>
-          <p:cNvPr id="5" name="TextBox 4"/>
+              <a:defRPr sz="3600" b="1">
+                <a:solidFill>
+                  <a:srgbClr val="1F3A5F"/>
+                </a:solidFill>
+                <a:latin typeface="Calibri"/>
+              </a:defRPr>
+            </a:pPr>
+            <a:r>
+              <a:rPr sz="3600" b="1">
+                <a:solidFill>
+                  <a:srgbClr val="1F3A5F"/>
+                </a:solidFill>
+                <a:latin typeface="Calibri"/>
+              </a:rPr>
+              <a:t>One motor</a:t>
+            </a:r>
+          </a:p>
+        </p:txBody>
+      </p:sp>
+      <p:sp>
+        <p:nvSpPr>
+          <p:cNvPr id="6" name="TextBox 5"/>
           <p:cNvSpPr txBox="1"/>
           <p:nvPr/>
         </p:nvSpPr>
         <p:spPr>
           <a:xfrm>
-            <a:off x="11231575" y="6382512"/>
-            <a:ext cx="457200" cy="274320"/>
+            <a:off x="777240" y="2423160"/>
+            <a:ext cx="10515600" cy="685800"/>
           </a:xfrm>
           <a:prstGeom prst="rect">
             <a:avLst/>
@@ -11270,19 +11254,19 @@
           <a:noFill/>
         </p:spPr>
         <p:txBody>
-          <a:bodyPr wrap="square" lIns="0" tIns="0">
+          <a:bodyPr wrap="square" lIns="0" tIns="0" rIns="0" bIns="0">
             <a:spAutoFit/>
           </a:bodyPr>
           <a:lstStyle/>
           <a:p>
-            <a:pPr algn="r">
-              <a:lnSpc>
-                <a:spcPct val="100000"/>
-              </a:lnSpc>
-              <a:spcAft>
-                <a:spcPts val="0"/>
-              </a:spcAft>
-              <a:defRPr sz="1000" b="0">
+            <a:pPr algn="l">
+              <a:lnSpc>
+                <a:spcPct val="100000"/>
+              </a:lnSpc>
+              <a:spcAft>
+                <a:spcPts val="400"/>
+              </a:spcAft>
+              <a:defRPr sz="1600" b="0">
                 <a:solidFill>
                   <a:srgbClr val="666666"/>
                 </a:solidFill>
@@ -11290,27 +11274,27 @@
               </a:defRPr>
             </a:pPr>
             <a:r>
-              <a:rPr sz="1000" b="0">
+              <a:rPr sz="1600" b="0">
                 <a:solidFill>
                   <a:srgbClr val="666666"/>
                 </a:solidFill>
                 <a:latin typeface="Calibri"/>
               </a:rPr>
-              <a:t>12</a:t>
-            </a:r>
-          </a:p>
-        </p:txBody>
-      </p:sp>
-      <p:sp>
-        <p:nvSpPr>
-          <p:cNvPr id="6" name="Rounded Rectangle 5"/>
+              <a:t>About 25 minutes</a:t>
+            </a:r>
+          </a:p>
+        </p:txBody>
+      </p:sp>
+      <p:sp>
+        <p:nvSpPr>
+          <p:cNvPr id="7" name="Rounded Rectangle 6"/>
           <p:cNvSpPr/>
           <p:nvPr/>
         </p:nvSpPr>
         <p:spPr>
           <a:xfrm>
-            <a:off x="502920" y="2240280"/>
-            <a:ext cx="2120127" cy="1737360"/>
+            <a:off x="502920" y="3886200"/>
+            <a:ext cx="2120127" cy="1325880"/>
           </a:xfrm>
           <a:prstGeom prst="roundRect">
             <a:avLst>
@@ -11373,14 +11357,14 @@
       </p:sp>
       <p:sp>
         <p:nvSpPr>
-          <p:cNvPr id="7" name="TextBox 6"/>
+          <p:cNvPr id="8" name="TextBox 7"/>
           <p:cNvSpPr txBox="1"/>
           <p:nvPr/>
         </p:nvSpPr>
         <p:spPr>
           <a:xfrm>
-            <a:off x="502920" y="1856232"/>
-            <a:ext cx="2120127" cy="347472"/>
+            <a:off x="502920" y="3520440"/>
+            <a:ext cx="2120127" cy="310896"/>
           </a:xfrm>
           <a:prstGeom prst="rect">
             <a:avLst/>
@@ -11398,9 +11382,9 @@
                 <a:spcPct val="100000"/>
               </a:lnSpc>
               <a:spcAft>
-                <a:spcPts val="600"/>
-              </a:spcAft>
-              <a:defRPr sz="1200" b="1">
+                <a:spcPts val="200"/>
+              </a:spcAft>
+              <a:defRPr sz="1100" b="1">
                 <a:solidFill>
                   <a:srgbClr val="0E7C86"/>
                 </a:solidFill>
@@ -11408,7 +11392,7 @@
               </a:defRPr>
             </a:pPr>
             <a:r>
-              <a:rPr sz="1200" b="1">
+              <a:rPr sz="1100" b="1">
                 <a:solidFill>
                   <a:srgbClr val="0E7C86"/>
                 </a:solidFill>
@@ -11421,14 +11405,14 @@
       </p:sp>
       <p:sp>
         <p:nvSpPr>
-          <p:cNvPr id="8" name="Rounded Rectangle 7"/>
+          <p:cNvPr id="9" name="Rounded Rectangle 8"/>
           <p:cNvSpPr/>
           <p:nvPr/>
         </p:nvSpPr>
         <p:spPr>
           <a:xfrm>
-            <a:off x="2769351" y="2240280"/>
-            <a:ext cx="2120127" cy="1737360"/>
+            <a:off x="2769351" y="3886200"/>
+            <a:ext cx="2120127" cy="1325880"/>
           </a:xfrm>
           <a:prstGeom prst="roundRect">
             <a:avLst>
@@ -11491,14 +11475,14 @@
       </p:sp>
       <p:sp>
         <p:nvSpPr>
-          <p:cNvPr id="9" name="TextBox 8"/>
+          <p:cNvPr id="10" name="TextBox 9"/>
           <p:cNvSpPr txBox="1"/>
           <p:nvPr/>
         </p:nvSpPr>
         <p:spPr>
           <a:xfrm>
-            <a:off x="2769351" y="1856232"/>
-            <a:ext cx="2120127" cy="347472"/>
+            <a:off x="2769351" y="3520440"/>
+            <a:ext cx="2120127" cy="310896"/>
           </a:xfrm>
           <a:prstGeom prst="rect">
             <a:avLst/>
@@ -11516,9 +11500,9 @@
                 <a:spcPct val="100000"/>
               </a:lnSpc>
               <a:spcAft>
-                <a:spcPts val="600"/>
-              </a:spcAft>
-              <a:defRPr sz="1200" b="1">
+                <a:spcPts val="200"/>
+              </a:spcAft>
+              <a:defRPr sz="1100" b="1">
                 <a:solidFill>
                   <a:srgbClr val="0E7C86"/>
                 </a:solidFill>
@@ -11526,7 +11510,7 @@
               </a:defRPr>
             </a:pPr>
             <a:r>
-              <a:rPr sz="1200" b="1">
+              <a:rPr sz="1100" b="1">
                 <a:solidFill>
                   <a:srgbClr val="0E7C86"/>
                 </a:solidFill>
@@ -11539,14 +11523,14 @@
       </p:sp>
       <p:sp>
         <p:nvSpPr>
-          <p:cNvPr id="10" name="Rounded Rectangle 9"/>
+          <p:cNvPr id="11" name="Rounded Rectangle 10"/>
           <p:cNvSpPr/>
           <p:nvPr/>
         </p:nvSpPr>
         <p:spPr>
           <a:xfrm>
-            <a:off x="5035782" y="2240280"/>
-            <a:ext cx="2120127" cy="1737360"/>
+            <a:off x="5035782" y="3886200"/>
+            <a:ext cx="2120127" cy="1325880"/>
           </a:xfrm>
           <a:prstGeom prst="roundRect">
             <a:avLst>
@@ -11609,14 +11593,14 @@
       </p:sp>
       <p:sp>
         <p:nvSpPr>
-          <p:cNvPr id="11" name="Rounded Rectangle 10"/>
+          <p:cNvPr id="12" name="Rounded Rectangle 11"/>
           <p:cNvSpPr/>
           <p:nvPr/>
         </p:nvSpPr>
         <p:spPr>
           <a:xfrm>
-            <a:off x="7302213" y="2240280"/>
-            <a:ext cx="2120127" cy="1737360"/>
+            <a:off x="7302213" y="3886200"/>
+            <a:ext cx="2120127" cy="1325880"/>
           </a:xfrm>
           <a:prstGeom prst="roundRect">
             <a:avLst>
@@ -11679,14 +11663,14 @@
       </p:sp>
       <p:sp>
         <p:nvSpPr>
-          <p:cNvPr id="12" name="Rounded Rectangle 11"/>
+          <p:cNvPr id="13" name="Rounded Rectangle 12"/>
           <p:cNvSpPr/>
           <p:nvPr/>
         </p:nvSpPr>
         <p:spPr>
           <a:xfrm>
-            <a:off x="9568644" y="2240280"/>
-            <a:ext cx="2120127" cy="1737360"/>
+            <a:off x="9568644" y="3886200"/>
+            <a:ext cx="2120127" cy="1325880"/>
           </a:xfrm>
           <a:prstGeom prst="roundRect">
             <a:avLst>
@@ -12475,66 +12459,116 @@
       <p:grpSpPr/>
       <p:sp>
         <p:nvSpPr>
-          <p:cNvPr id="2" name="Title 1"/>
-          <p:cNvSpPr>
-            <a:spLocks noGrp="1"/>
-          </p:cNvSpPr>
-          <p:nvPr>
-            <p:ph type="title"/>
-          </p:nvPr>
-        </p:nvSpPr>
-        <p:spPr>
-          <a:xfrm>
-            <a:off x="502920" y="274320"/>
-            <a:ext cx="11185855" cy="777240"/>
-          </a:xfrm>
-        </p:spPr>
-        <p:txBody>
-          <a:bodyPr wrap="square" anchor="b"/>
-          <a:lstStyle/>
-          <a:p>
-            <a:pPr algn="l">
-              <a:lnSpc>
-                <a:spcPct val="100000"/>
-              </a:lnSpc>
-              <a:spcAft>
-                <a:spcPts val="0"/>
-              </a:spcAft>
-              <a:defRPr sz="2800" b="1">
-                <a:solidFill>
-                  <a:srgbClr val="1F3A5F"/>
-                </a:solidFill>
-                <a:latin typeface="Calibri"/>
-              </a:defRPr>
-            </a:pPr>
-            <a:r>
-              <a:rPr sz="2800" b="1">
-                <a:solidFill>
-                  <a:srgbClr val="1F3A5F"/>
-                </a:solidFill>
-                <a:latin typeface="Calibri"/>
-              </a:rPr>
-              <a:t>Where we are</a:t>
-            </a:r>
-          </a:p>
-        </p:txBody>
-      </p:sp>
-      <p:sp>
-        <p:nvSpPr>
-          <p:cNvPr id="3" name="Rectangle 2"/>
-          <p:cNvSpPr/>
-          <p:nvPr/>
-        </p:nvSpPr>
-        <p:spPr>
-          <a:xfrm>
-            <a:off x="502920" y="1097280"/>
-            <a:ext cx="11185855" cy="19050"/>
+          <p:cNvPr id="2" name="TextBox 1"/>
+          <p:cNvSpPr txBox="1"/>
+          <p:nvPr/>
+        </p:nvSpPr>
+        <p:spPr>
+          <a:xfrm>
+            <a:off x="502920" y="6382512"/>
+            <a:ext cx="10545775" cy="274320"/>
           </a:xfrm>
           <a:prstGeom prst="rect">
             <a:avLst/>
           </a:prstGeom>
+          <a:noFill/>
+        </p:spPr>
+        <p:txBody>
+          <a:bodyPr wrap="square" lIns="0" tIns="0">
+            <a:spAutoFit/>
+          </a:bodyPr>
+          <a:lstStyle/>
+          <a:p>
+            <a:pPr algn="l">
+              <a:lnSpc>
+                <a:spcPct val="100000"/>
+              </a:lnSpc>
+              <a:spcAft>
+                <a:spcPts val="0"/>
+              </a:spcAft>
+              <a:defRPr sz="1000" b="0">
+                <a:solidFill>
+                  <a:srgbClr val="666666"/>
+                </a:solidFill>
+                <a:latin typeface="Calibri"/>
+              </a:defRPr>
+            </a:pPr>
+            <a:r>
+              <a:rPr sz="1000" b="0">
+                <a:solidFill>
+                  <a:srgbClr val="666666"/>
+                </a:solidFill>
+                <a:latin typeface="Calibri"/>
+              </a:rPr>
+              <a:t>Pathfinder Beginner - PS3  |  Lesson 2</a:t>
+            </a:r>
+          </a:p>
+        </p:txBody>
+      </p:sp>
+      <p:sp>
+        <p:nvSpPr>
+          <p:cNvPr id="3" name="TextBox 2"/>
+          <p:cNvSpPr txBox="1"/>
+          <p:nvPr/>
+        </p:nvSpPr>
+        <p:spPr>
+          <a:xfrm>
+            <a:off x="11231575" y="6382512"/>
+            <a:ext cx="457200" cy="274320"/>
+          </a:xfrm>
+          <a:prstGeom prst="rect">
+            <a:avLst/>
+          </a:prstGeom>
+          <a:noFill/>
+        </p:spPr>
+        <p:txBody>
+          <a:bodyPr wrap="square" lIns="0" tIns="0">
+            <a:spAutoFit/>
+          </a:bodyPr>
+          <a:lstStyle/>
+          <a:p>
+            <a:pPr algn="r">
+              <a:lnSpc>
+                <a:spcPct val="100000"/>
+              </a:lnSpc>
+              <a:spcAft>
+                <a:spcPts val="0"/>
+              </a:spcAft>
+              <a:defRPr sz="1000" b="0">
+                <a:solidFill>
+                  <a:srgbClr val="666666"/>
+                </a:solidFill>
+                <a:latin typeface="Calibri"/>
+              </a:defRPr>
+            </a:pPr>
+            <a:r>
+              <a:rPr sz="1000" b="0">
+                <a:solidFill>
+                  <a:srgbClr val="666666"/>
+                </a:solidFill>
+                <a:latin typeface="Calibri"/>
+              </a:rPr>
+              <a:t>14</a:t>
+            </a:r>
+          </a:p>
+        </p:txBody>
+      </p:sp>
+      <p:sp>
+        <p:nvSpPr>
+          <p:cNvPr id="4" name="Rectangle 3"/>
+          <p:cNvSpPr/>
+          <p:nvPr/>
+        </p:nvSpPr>
+        <p:spPr>
+          <a:xfrm>
+            <a:off x="0" y="1234440"/>
+            <a:ext cx="256032" cy="1554480"/>
+          </a:xfrm>
+          <a:prstGeom prst="rect">
+            <a:avLst/>
+          </a:prstGeom>
           <a:solidFill>
-            <a:srgbClr val="C8D2DE"/>
+            <a:srgbClr val="0E7C86"/>
           </a:solidFill>
           <a:ln>
             <a:noFill/>
@@ -12565,14 +12599,14 @@
       </p:sp>
       <p:sp>
         <p:nvSpPr>
-          <p:cNvPr id="4" name="TextBox 3"/>
+          <p:cNvPr id="5" name="TextBox 4"/>
           <p:cNvSpPr txBox="1"/>
           <p:nvPr/>
         </p:nvSpPr>
         <p:spPr>
           <a:xfrm>
-            <a:off x="502920" y="6382512"/>
-            <a:ext cx="10545775" cy="274320"/>
+            <a:off x="777240" y="1325880"/>
+            <a:ext cx="10515600" cy="1051560"/>
           </a:xfrm>
           <a:prstGeom prst="rect">
             <a:avLst/>
@@ -12580,7 +12614,7 @@
           <a:noFill/>
         </p:spPr>
         <p:txBody>
-          <a:bodyPr wrap="square" lIns="0" tIns="0">
+          <a:bodyPr wrap="square" lIns="0" tIns="0" rIns="0" bIns="0">
             <a:spAutoFit/>
           </a:bodyPr>
           <a:lstStyle/>
@@ -12592,35 +12626,35 @@
               <a:spcAft>
                 <a:spcPts val="0"/>
               </a:spcAft>
-              <a:defRPr sz="1000" b="0">
-                <a:solidFill>
-                  <a:srgbClr val="666666"/>
-                </a:solidFill>
-                <a:latin typeface="Calibri"/>
-              </a:defRPr>
-            </a:pPr>
-            <a:r>
-              <a:rPr sz="1000" b="0">
-                <a:solidFill>
-                  <a:srgbClr val="666666"/>
-                </a:solidFill>
-                <a:latin typeface="Calibri"/>
-              </a:rPr>
-              <a:t>Pathfinder Beginner - PS3  |  Lesson 2</a:t>
-            </a:r>
-          </a:p>
-        </p:txBody>
-      </p:sp>
-      <p:sp>
-        <p:nvSpPr>
-          <p:cNvPr id="5" name="TextBox 4"/>
+              <a:defRPr sz="3600" b="1">
+                <a:solidFill>
+                  <a:srgbClr val="1F3A5F"/>
+                </a:solidFill>
+                <a:latin typeface="Calibri"/>
+              </a:defRPr>
+            </a:pPr>
+            <a:r>
+              <a:rPr sz="3600" b="1">
+                <a:solidFill>
+                  <a:srgbClr val="1F3A5F"/>
+                </a:solidFill>
+                <a:latin typeface="Calibri"/>
+              </a:rPr>
+              <a:t>Duty vs speed</a:t>
+            </a:r>
+          </a:p>
+        </p:txBody>
+      </p:sp>
+      <p:sp>
+        <p:nvSpPr>
+          <p:cNvPr id="6" name="TextBox 5"/>
           <p:cNvSpPr txBox="1"/>
           <p:nvPr/>
         </p:nvSpPr>
         <p:spPr>
           <a:xfrm>
-            <a:off x="11231575" y="6382512"/>
-            <a:ext cx="457200" cy="274320"/>
+            <a:off x="777240" y="2423160"/>
+            <a:ext cx="10515600" cy="685800"/>
           </a:xfrm>
           <a:prstGeom prst="rect">
             <a:avLst/>
@@ -12628,19 +12662,19 @@
           <a:noFill/>
         </p:spPr>
         <p:txBody>
-          <a:bodyPr wrap="square" lIns="0" tIns="0">
+          <a:bodyPr wrap="square" lIns="0" tIns="0" rIns="0" bIns="0">
             <a:spAutoFit/>
           </a:bodyPr>
           <a:lstStyle/>
           <a:p>
-            <a:pPr algn="r">
-              <a:lnSpc>
-                <a:spcPct val="100000"/>
-              </a:lnSpc>
-              <a:spcAft>
-                <a:spcPts val="0"/>
-              </a:spcAft>
-              <a:defRPr sz="1000" b="0">
+            <a:pPr algn="l">
+              <a:lnSpc>
+                <a:spcPct val="100000"/>
+              </a:lnSpc>
+              <a:spcAft>
+                <a:spcPts val="400"/>
+              </a:spcAft>
+              <a:defRPr sz="1600" b="0">
                 <a:solidFill>
                   <a:srgbClr val="666666"/>
                 </a:solidFill>
@@ -12648,27 +12682,27 @@
               </a:defRPr>
             </a:pPr>
             <a:r>
-              <a:rPr sz="1000" b="0">
+              <a:rPr sz="1600" b="0">
                 <a:solidFill>
                   <a:srgbClr val="666666"/>
                 </a:solidFill>
                 <a:latin typeface="Calibri"/>
               </a:rPr>
-              <a:t>14</a:t>
-            </a:r>
-          </a:p>
-        </p:txBody>
-      </p:sp>
-      <p:sp>
-        <p:nvSpPr>
-          <p:cNvPr id="6" name="Rounded Rectangle 5"/>
+              <a:t>About 20 minutes</a:t>
+            </a:r>
+          </a:p>
+        </p:txBody>
+      </p:sp>
+      <p:sp>
+        <p:nvSpPr>
+          <p:cNvPr id="7" name="Rounded Rectangle 6"/>
           <p:cNvSpPr/>
           <p:nvPr/>
         </p:nvSpPr>
         <p:spPr>
           <a:xfrm>
-            <a:off x="502920" y="2240280"/>
-            <a:ext cx="2120127" cy="1737360"/>
+            <a:off x="502920" y="3886200"/>
+            <a:ext cx="2120127" cy="1325880"/>
           </a:xfrm>
           <a:prstGeom prst="roundRect">
             <a:avLst>
@@ -12731,14 +12765,14 @@
       </p:sp>
       <p:sp>
         <p:nvSpPr>
-          <p:cNvPr id="7" name="TextBox 6"/>
+          <p:cNvPr id="8" name="TextBox 7"/>
           <p:cNvSpPr txBox="1"/>
           <p:nvPr/>
         </p:nvSpPr>
         <p:spPr>
           <a:xfrm>
-            <a:off x="502920" y="1856232"/>
-            <a:ext cx="2120127" cy="347472"/>
+            <a:off x="502920" y="3520440"/>
+            <a:ext cx="2120127" cy="310896"/>
           </a:xfrm>
           <a:prstGeom prst="rect">
             <a:avLst/>
@@ -12756,9 +12790,9 @@
                 <a:spcPct val="100000"/>
               </a:lnSpc>
               <a:spcAft>
-                <a:spcPts val="600"/>
-              </a:spcAft>
-              <a:defRPr sz="1200" b="1">
+                <a:spcPts val="200"/>
+              </a:spcAft>
+              <a:defRPr sz="1100" b="1">
                 <a:solidFill>
                   <a:srgbClr val="0E7C86"/>
                 </a:solidFill>
@@ -12766,7 +12800,7 @@
               </a:defRPr>
             </a:pPr>
             <a:r>
-              <a:rPr sz="1200" b="1">
+              <a:rPr sz="1100" b="1">
                 <a:solidFill>
                   <a:srgbClr val="0E7C86"/>
                 </a:solidFill>
@@ -12779,14 +12813,14 @@
       </p:sp>
       <p:sp>
         <p:nvSpPr>
-          <p:cNvPr id="8" name="Rounded Rectangle 7"/>
+          <p:cNvPr id="9" name="Rounded Rectangle 8"/>
           <p:cNvSpPr/>
           <p:nvPr/>
         </p:nvSpPr>
         <p:spPr>
           <a:xfrm>
-            <a:off x="2769351" y="2240280"/>
-            <a:ext cx="2120127" cy="1737360"/>
+            <a:off x="2769351" y="3886200"/>
+            <a:ext cx="2120127" cy="1325880"/>
           </a:xfrm>
           <a:prstGeom prst="roundRect">
             <a:avLst>
@@ -12849,14 +12883,14 @@
       </p:sp>
       <p:sp>
         <p:nvSpPr>
-          <p:cNvPr id="9" name="TextBox 8"/>
+          <p:cNvPr id="10" name="TextBox 9"/>
           <p:cNvSpPr txBox="1"/>
           <p:nvPr/>
         </p:nvSpPr>
         <p:spPr>
           <a:xfrm>
-            <a:off x="2769351" y="1856232"/>
-            <a:ext cx="2120127" cy="347472"/>
+            <a:off x="2769351" y="3520440"/>
+            <a:ext cx="2120127" cy="310896"/>
           </a:xfrm>
           <a:prstGeom prst="rect">
             <a:avLst/>
@@ -12874,9 +12908,9 @@
                 <a:spcPct val="100000"/>
               </a:lnSpc>
               <a:spcAft>
-                <a:spcPts val="600"/>
-              </a:spcAft>
-              <a:defRPr sz="1200" b="1">
+                <a:spcPts val="200"/>
+              </a:spcAft>
+              <a:defRPr sz="1100" b="1">
                 <a:solidFill>
                   <a:srgbClr val="0E7C86"/>
                 </a:solidFill>
@@ -12884,7 +12918,7 @@
               </a:defRPr>
             </a:pPr>
             <a:r>
-              <a:rPr sz="1200" b="1">
+              <a:rPr sz="1100" b="1">
                 <a:solidFill>
                   <a:srgbClr val="0E7C86"/>
                 </a:solidFill>
@@ -12897,14 +12931,14 @@
       </p:sp>
       <p:sp>
         <p:nvSpPr>
-          <p:cNvPr id="10" name="Rounded Rectangle 9"/>
+          <p:cNvPr id="11" name="Rounded Rectangle 10"/>
           <p:cNvSpPr/>
           <p:nvPr/>
         </p:nvSpPr>
         <p:spPr>
           <a:xfrm>
-            <a:off x="5035782" y="2240280"/>
-            <a:ext cx="2120127" cy="1737360"/>
+            <a:off x="5035782" y="3886200"/>
+            <a:ext cx="2120127" cy="1325880"/>
           </a:xfrm>
           <a:prstGeom prst="roundRect">
             <a:avLst>
@@ -12967,14 +13001,14 @@
       </p:sp>
       <p:sp>
         <p:nvSpPr>
-          <p:cNvPr id="11" name="TextBox 10"/>
+          <p:cNvPr id="12" name="TextBox 11"/>
           <p:cNvSpPr txBox="1"/>
           <p:nvPr/>
         </p:nvSpPr>
         <p:spPr>
           <a:xfrm>
-            <a:off x="5035782" y="1856232"/>
-            <a:ext cx="2120127" cy="347472"/>
+            <a:off x="5035782" y="3520440"/>
+            <a:ext cx="2120127" cy="310896"/>
           </a:xfrm>
           <a:prstGeom prst="rect">
             <a:avLst/>
@@ -12992,9 +13026,9 @@
                 <a:spcPct val="100000"/>
               </a:lnSpc>
               <a:spcAft>
-                <a:spcPts val="600"/>
-              </a:spcAft>
-              <a:defRPr sz="1200" b="1">
+                <a:spcPts val="200"/>
+              </a:spcAft>
+              <a:defRPr sz="1100" b="1">
                 <a:solidFill>
                   <a:srgbClr val="0E7C86"/>
                 </a:solidFill>
@@ -13002,7 +13036,7 @@
               </a:defRPr>
             </a:pPr>
             <a:r>
-              <a:rPr sz="1200" b="1">
+              <a:rPr sz="1100" b="1">
                 <a:solidFill>
                   <a:srgbClr val="0E7C86"/>
                 </a:solidFill>
@@ -13015,14 +13049,14 @@
       </p:sp>
       <p:sp>
         <p:nvSpPr>
-          <p:cNvPr id="12" name="Rounded Rectangle 11"/>
+          <p:cNvPr id="13" name="Rounded Rectangle 12"/>
           <p:cNvSpPr/>
           <p:nvPr/>
         </p:nvSpPr>
         <p:spPr>
           <a:xfrm>
-            <a:off x="7302213" y="2240280"/>
-            <a:ext cx="2120127" cy="1737360"/>
+            <a:off x="7302213" y="3886200"/>
+            <a:ext cx="2120127" cy="1325880"/>
           </a:xfrm>
           <a:prstGeom prst="roundRect">
             <a:avLst>
@@ -13085,14 +13119,14 @@
       </p:sp>
       <p:sp>
         <p:nvSpPr>
-          <p:cNvPr id="13" name="Rounded Rectangle 12"/>
+          <p:cNvPr id="14" name="Rounded Rectangle 13"/>
           <p:cNvSpPr/>
           <p:nvPr/>
         </p:nvSpPr>
         <p:spPr>
           <a:xfrm>
-            <a:off x="9568644" y="2240280"/>
-            <a:ext cx="2120127" cy="1737360"/>
+            <a:off x="9568644" y="3886200"/>
+            <a:ext cx="2120127" cy="1325880"/>
           </a:xfrm>
           <a:prstGeom prst="roundRect">
             <a:avLst>
@@ -14008,8 +14042,8 @@
         </p:nvSpPr>
         <p:spPr>
           <a:xfrm>
-            <a:off x="0" y="2194560"/>
-            <a:ext cx="256032" cy="1828800"/>
+            <a:off x="0" y="1234440"/>
+            <a:ext cx="256032" cy="1554480"/>
           </a:xfrm>
           <a:prstGeom prst="rect">
             <a:avLst/>
@@ -14052,8 +14086,8 @@
         </p:nvSpPr>
         <p:spPr>
           <a:xfrm>
-            <a:off x="777240" y="2286000"/>
-            <a:ext cx="10515600" cy="1188720"/>
+            <a:off x="777240" y="1325880"/>
+            <a:ext cx="10515600" cy="1051560"/>
           </a:xfrm>
           <a:prstGeom prst="rect">
             <a:avLst/>
@@ -14100,8 +14134,8 @@
         </p:nvSpPr>
         <p:spPr>
           <a:xfrm>
-            <a:off x="777240" y="3520440"/>
-            <a:ext cx="10515600" cy="914400"/>
+            <a:off x="777240" y="2423160"/>
+            <a:ext cx="10515600" cy="685800"/>
           </a:xfrm>
           <a:prstGeom prst="rect">
             <a:avLst/>
@@ -14136,6 +14170,548 @@
                 <a:latin typeface="Calibri"/>
               </a:rPr>
               <a:t>About 25 minutes</a:t>
+            </a:r>
+          </a:p>
+        </p:txBody>
+      </p:sp>
+      <p:sp>
+        <p:nvSpPr>
+          <p:cNvPr id="7" name="Rounded Rectangle 6"/>
+          <p:cNvSpPr/>
+          <p:nvPr/>
+        </p:nvSpPr>
+        <p:spPr>
+          <a:xfrm>
+            <a:off x="502920" y="3886200"/>
+            <a:ext cx="2120127" cy="1325880"/>
+          </a:xfrm>
+          <a:prstGeom prst="roundRect">
+            <a:avLst>
+              <a:gd name="adj" fmla="val 8000"/>
+            </a:avLst>
+          </a:prstGeom>
+          <a:solidFill>
+            <a:srgbClr val="EEF3F8"/>
+          </a:solidFill>
+          <a:ln w="12700">
+            <a:solidFill>
+              <a:srgbClr val="0E7C86"/>
+            </a:solidFill>
+          </a:ln>
+          <a:effectLst/>
+        </p:spPr>
+        <p:style>
+          <a:lnRef idx="1">
+            <a:schemeClr val="accent1"/>
+          </a:lnRef>
+          <a:fillRef idx="3">
+            <a:schemeClr val="accent1"/>
+          </a:fillRef>
+          <a:effectRef idx="2">
+            <a:schemeClr val="accent1"/>
+          </a:effectRef>
+          <a:fontRef idx="minor">
+            <a:schemeClr val="lt1"/>
+          </a:fontRef>
+        </p:style>
+        <p:txBody>
+          <a:bodyPr rtlCol="0" anchor="ctr" wrap="square" lIns="73152" rIns="73152"/>
+          <a:lstStyle/>
+          <a:p>
+            <a:pPr algn="ctr">
+              <a:lnSpc>
+                <a:spcPct val="100000"/>
+              </a:lnSpc>
+              <a:spcAft>
+                <a:spcPts val="0"/>
+              </a:spcAft>
+              <a:defRPr sz="1700" b="0">
+                <a:solidFill>
+                  <a:srgbClr val="1F3A5F"/>
+                </a:solidFill>
+                <a:latin typeface="Calibri"/>
+              </a:defRPr>
+            </a:pPr>
+            <a:r>
+              <a:rPr sz="1700" b="0">
+                <a:solidFill>
+                  <a:srgbClr val="1F3A5F"/>
+                </a:solidFill>
+                <a:latin typeface="Calibri"/>
+              </a:rPr>
+              <a:t>H-bridges and PWM</a:t>
+            </a:r>
+          </a:p>
+        </p:txBody>
+      </p:sp>
+      <p:sp>
+        <p:nvSpPr>
+          <p:cNvPr id="8" name="TextBox 7"/>
+          <p:cNvSpPr txBox="1"/>
+          <p:nvPr/>
+        </p:nvSpPr>
+        <p:spPr>
+          <a:xfrm>
+            <a:off x="502920" y="3520440"/>
+            <a:ext cx="2120127" cy="310896"/>
+          </a:xfrm>
+          <a:prstGeom prst="rect">
+            <a:avLst/>
+          </a:prstGeom>
+          <a:noFill/>
+        </p:spPr>
+        <p:txBody>
+          <a:bodyPr wrap="square" lIns="0" tIns="0" rIns="0" bIns="0">
+            <a:spAutoFit/>
+          </a:bodyPr>
+          <a:lstStyle/>
+          <a:p>
+            <a:pPr algn="ctr">
+              <a:lnSpc>
+                <a:spcPct val="100000"/>
+              </a:lnSpc>
+              <a:spcAft>
+                <a:spcPts val="200"/>
+              </a:spcAft>
+              <a:defRPr sz="1100" b="1">
+                <a:solidFill>
+                  <a:srgbClr val="0E7C86"/>
+                </a:solidFill>
+                <a:latin typeface="Calibri"/>
+              </a:defRPr>
+            </a:pPr>
+            <a:r>
+              <a:rPr sz="1100" b="1">
+                <a:solidFill>
+                  <a:srgbClr val="0E7C86"/>
+                </a:solidFill>
+                <a:latin typeface="Calibri"/>
+              </a:rPr>
+              <a:t>done</a:t>
+            </a:r>
+          </a:p>
+        </p:txBody>
+      </p:sp>
+      <p:sp>
+        <p:nvSpPr>
+          <p:cNvPr id="9" name="Rounded Rectangle 8"/>
+          <p:cNvSpPr/>
+          <p:nvPr/>
+        </p:nvSpPr>
+        <p:spPr>
+          <a:xfrm>
+            <a:off x="2769351" y="3886200"/>
+            <a:ext cx="2120127" cy="1325880"/>
+          </a:xfrm>
+          <a:prstGeom prst="roundRect">
+            <a:avLst>
+              <a:gd name="adj" fmla="val 8000"/>
+            </a:avLst>
+          </a:prstGeom>
+          <a:solidFill>
+            <a:srgbClr val="EEF3F8"/>
+          </a:solidFill>
+          <a:ln w="12700">
+            <a:solidFill>
+              <a:srgbClr val="0E7C86"/>
+            </a:solidFill>
+          </a:ln>
+          <a:effectLst/>
+        </p:spPr>
+        <p:style>
+          <a:lnRef idx="1">
+            <a:schemeClr val="accent1"/>
+          </a:lnRef>
+          <a:fillRef idx="3">
+            <a:schemeClr val="accent1"/>
+          </a:fillRef>
+          <a:effectRef idx="2">
+            <a:schemeClr val="accent1"/>
+          </a:effectRef>
+          <a:fontRef idx="minor">
+            <a:schemeClr val="lt1"/>
+          </a:fontRef>
+        </p:style>
+        <p:txBody>
+          <a:bodyPr rtlCol="0" anchor="ctr" wrap="square" lIns="73152" rIns="73152"/>
+          <a:lstStyle/>
+          <a:p>
+            <a:pPr algn="ctr">
+              <a:lnSpc>
+                <a:spcPct val="100000"/>
+              </a:lnSpc>
+              <a:spcAft>
+                <a:spcPts val="0"/>
+              </a:spcAft>
+              <a:defRPr sz="1700" b="0">
+                <a:solidFill>
+                  <a:srgbClr val="1F3A5F"/>
+                </a:solidFill>
+                <a:latin typeface="Calibri"/>
+              </a:defRPr>
+            </a:pPr>
+            <a:r>
+              <a:rPr sz="1700" b="0">
+                <a:solidFill>
+                  <a:srgbClr val="1F3A5F"/>
+                </a:solidFill>
+                <a:latin typeface="Calibri"/>
+              </a:rPr>
+              <a:t>One motor</a:t>
+            </a:r>
+          </a:p>
+        </p:txBody>
+      </p:sp>
+      <p:sp>
+        <p:nvSpPr>
+          <p:cNvPr id="10" name="TextBox 9"/>
+          <p:cNvSpPr txBox="1"/>
+          <p:nvPr/>
+        </p:nvSpPr>
+        <p:spPr>
+          <a:xfrm>
+            <a:off x="2769351" y="3520440"/>
+            <a:ext cx="2120127" cy="310896"/>
+          </a:xfrm>
+          <a:prstGeom prst="rect">
+            <a:avLst/>
+          </a:prstGeom>
+          <a:noFill/>
+        </p:spPr>
+        <p:txBody>
+          <a:bodyPr wrap="square" lIns="0" tIns="0" rIns="0" bIns="0">
+            <a:spAutoFit/>
+          </a:bodyPr>
+          <a:lstStyle/>
+          <a:p>
+            <a:pPr algn="ctr">
+              <a:lnSpc>
+                <a:spcPct val="100000"/>
+              </a:lnSpc>
+              <a:spcAft>
+                <a:spcPts val="200"/>
+              </a:spcAft>
+              <a:defRPr sz="1100" b="1">
+                <a:solidFill>
+                  <a:srgbClr val="0E7C86"/>
+                </a:solidFill>
+                <a:latin typeface="Calibri"/>
+              </a:defRPr>
+            </a:pPr>
+            <a:r>
+              <a:rPr sz="1100" b="1">
+                <a:solidFill>
+                  <a:srgbClr val="0E7C86"/>
+                </a:solidFill>
+                <a:latin typeface="Calibri"/>
+              </a:rPr>
+              <a:t>done</a:t>
+            </a:r>
+          </a:p>
+        </p:txBody>
+      </p:sp>
+      <p:sp>
+        <p:nvSpPr>
+          <p:cNvPr id="11" name="Rounded Rectangle 10"/>
+          <p:cNvSpPr/>
+          <p:nvPr/>
+        </p:nvSpPr>
+        <p:spPr>
+          <a:xfrm>
+            <a:off x="5035782" y="3886200"/>
+            <a:ext cx="2120127" cy="1325880"/>
+          </a:xfrm>
+          <a:prstGeom prst="roundRect">
+            <a:avLst>
+              <a:gd name="adj" fmla="val 8000"/>
+            </a:avLst>
+          </a:prstGeom>
+          <a:solidFill>
+            <a:srgbClr val="EEF3F8"/>
+          </a:solidFill>
+          <a:ln w="12700">
+            <a:solidFill>
+              <a:srgbClr val="0E7C86"/>
+            </a:solidFill>
+          </a:ln>
+          <a:effectLst/>
+        </p:spPr>
+        <p:style>
+          <a:lnRef idx="1">
+            <a:schemeClr val="accent1"/>
+          </a:lnRef>
+          <a:fillRef idx="3">
+            <a:schemeClr val="accent1"/>
+          </a:fillRef>
+          <a:effectRef idx="2">
+            <a:schemeClr val="accent1"/>
+          </a:effectRef>
+          <a:fontRef idx="minor">
+            <a:schemeClr val="lt1"/>
+          </a:fontRef>
+        </p:style>
+        <p:txBody>
+          <a:bodyPr rtlCol="0" anchor="ctr" wrap="square" lIns="73152" rIns="73152"/>
+          <a:lstStyle/>
+          <a:p>
+            <a:pPr algn="ctr">
+              <a:lnSpc>
+                <a:spcPct val="100000"/>
+              </a:lnSpc>
+              <a:spcAft>
+                <a:spcPts val="0"/>
+              </a:spcAft>
+              <a:defRPr sz="1700" b="0">
+                <a:solidFill>
+                  <a:srgbClr val="1F3A5F"/>
+                </a:solidFill>
+                <a:latin typeface="Calibri"/>
+              </a:defRPr>
+            </a:pPr>
+            <a:r>
+              <a:rPr sz="1700" b="0">
+                <a:solidFill>
+                  <a:srgbClr val="1F3A5F"/>
+                </a:solidFill>
+                <a:latin typeface="Calibri"/>
+              </a:rPr>
+              <a:t>Duty vs speed</a:t>
+            </a:r>
+          </a:p>
+        </p:txBody>
+      </p:sp>
+      <p:sp>
+        <p:nvSpPr>
+          <p:cNvPr id="12" name="TextBox 11"/>
+          <p:cNvSpPr txBox="1"/>
+          <p:nvPr/>
+        </p:nvSpPr>
+        <p:spPr>
+          <a:xfrm>
+            <a:off x="5035782" y="3520440"/>
+            <a:ext cx="2120127" cy="310896"/>
+          </a:xfrm>
+          <a:prstGeom prst="rect">
+            <a:avLst/>
+          </a:prstGeom>
+          <a:noFill/>
+        </p:spPr>
+        <p:txBody>
+          <a:bodyPr wrap="square" lIns="0" tIns="0" rIns="0" bIns="0">
+            <a:spAutoFit/>
+          </a:bodyPr>
+          <a:lstStyle/>
+          <a:p>
+            <a:pPr algn="ctr">
+              <a:lnSpc>
+                <a:spcPct val="100000"/>
+              </a:lnSpc>
+              <a:spcAft>
+                <a:spcPts val="200"/>
+              </a:spcAft>
+              <a:defRPr sz="1100" b="1">
+                <a:solidFill>
+                  <a:srgbClr val="0E7C86"/>
+                </a:solidFill>
+                <a:latin typeface="Calibri"/>
+              </a:defRPr>
+            </a:pPr>
+            <a:r>
+              <a:rPr sz="1100" b="1">
+                <a:solidFill>
+                  <a:srgbClr val="0E7C86"/>
+                </a:solidFill>
+                <a:latin typeface="Calibri"/>
+              </a:rPr>
+              <a:t>done</a:t>
+            </a:r>
+          </a:p>
+        </p:txBody>
+      </p:sp>
+      <p:sp>
+        <p:nvSpPr>
+          <p:cNvPr id="13" name="Rounded Rectangle 12"/>
+          <p:cNvSpPr/>
+          <p:nvPr/>
+        </p:nvSpPr>
+        <p:spPr>
+          <a:xfrm>
+            <a:off x="7302213" y="3886200"/>
+            <a:ext cx="2120127" cy="1325880"/>
+          </a:xfrm>
+          <a:prstGeom prst="roundRect">
+            <a:avLst>
+              <a:gd name="adj" fmla="val 8000"/>
+            </a:avLst>
+          </a:prstGeom>
+          <a:solidFill>
+            <a:srgbClr val="D6ECEE"/>
+          </a:solidFill>
+          <a:ln w="25400">
+            <a:solidFill>
+              <a:srgbClr val="0E7C86"/>
+            </a:solidFill>
+          </a:ln>
+          <a:effectLst/>
+        </p:spPr>
+        <p:style>
+          <a:lnRef idx="1">
+            <a:schemeClr val="accent1"/>
+          </a:lnRef>
+          <a:fillRef idx="3">
+            <a:schemeClr val="accent1"/>
+          </a:fillRef>
+          <a:effectRef idx="2">
+            <a:schemeClr val="accent1"/>
+          </a:effectRef>
+          <a:fontRef idx="minor">
+            <a:schemeClr val="lt1"/>
+          </a:fontRef>
+        </p:style>
+        <p:txBody>
+          <a:bodyPr rtlCol="0" anchor="ctr" wrap="square" lIns="73152" rIns="73152"/>
+          <a:lstStyle/>
+          <a:p>
+            <a:pPr algn="ctr">
+              <a:lnSpc>
+                <a:spcPct val="100000"/>
+              </a:lnSpc>
+              <a:spcAft>
+                <a:spcPts val="0"/>
+              </a:spcAft>
+              <a:defRPr sz="1700" b="1">
+                <a:solidFill>
+                  <a:srgbClr val="1F3A5F"/>
+                </a:solidFill>
+                <a:latin typeface="Calibri"/>
+              </a:defRPr>
+            </a:pPr>
+            <a:r>
+              <a:rPr sz="1700" b="1">
+                <a:solidFill>
+                  <a:srgbClr val="1F3A5F"/>
+                </a:solidFill>
+                <a:latin typeface="Calibri"/>
+              </a:rPr>
+              <a:t>Ohm's law and circuits</a:t>
+            </a:r>
+          </a:p>
+        </p:txBody>
+      </p:sp>
+      <p:sp>
+        <p:nvSpPr>
+          <p:cNvPr id="14" name="TextBox 13"/>
+          <p:cNvSpPr txBox="1"/>
+          <p:nvPr/>
+        </p:nvSpPr>
+        <p:spPr>
+          <a:xfrm>
+            <a:off x="7302213" y="3520440"/>
+            <a:ext cx="2120127" cy="310896"/>
+          </a:xfrm>
+          <a:prstGeom prst="rect">
+            <a:avLst/>
+          </a:prstGeom>
+          <a:noFill/>
+        </p:spPr>
+        <p:txBody>
+          <a:bodyPr wrap="square" lIns="0" tIns="0" rIns="0" bIns="0">
+            <a:spAutoFit/>
+          </a:bodyPr>
+          <a:lstStyle/>
+          <a:p>
+            <a:pPr algn="ctr">
+              <a:lnSpc>
+                <a:spcPct val="100000"/>
+              </a:lnSpc>
+              <a:spcAft>
+                <a:spcPts val="200"/>
+              </a:spcAft>
+              <a:defRPr sz="1100" b="1">
+                <a:solidFill>
+                  <a:srgbClr val="0E7C86"/>
+                </a:solidFill>
+                <a:latin typeface="Calibri"/>
+              </a:defRPr>
+            </a:pPr>
+            <a:r>
+              <a:rPr sz="1100" b="1">
+                <a:solidFill>
+                  <a:srgbClr val="0E7C86"/>
+                </a:solidFill>
+                <a:latin typeface="Calibri"/>
+              </a:rPr>
+              <a:t>NOW</a:t>
+            </a:r>
+          </a:p>
+        </p:txBody>
+      </p:sp>
+      <p:sp>
+        <p:nvSpPr>
+          <p:cNvPr id="15" name="Rounded Rectangle 14"/>
+          <p:cNvSpPr/>
+          <p:nvPr/>
+        </p:nvSpPr>
+        <p:spPr>
+          <a:xfrm>
+            <a:off x="9568644" y="3886200"/>
+            <a:ext cx="2120127" cy="1325880"/>
+          </a:xfrm>
+          <a:prstGeom prst="roundRect">
+            <a:avLst>
+              <a:gd name="adj" fmla="val 8000"/>
+            </a:avLst>
+          </a:prstGeom>
+          <a:solidFill>
+            <a:srgbClr val="FFFFFF"/>
+          </a:solidFill>
+          <a:ln w="12700">
+            <a:solidFill>
+              <a:srgbClr val="C8D2DE"/>
+            </a:solidFill>
+          </a:ln>
+          <a:effectLst/>
+        </p:spPr>
+        <p:style>
+          <a:lnRef idx="1">
+            <a:schemeClr val="accent1"/>
+          </a:lnRef>
+          <a:fillRef idx="3">
+            <a:schemeClr val="accent1"/>
+          </a:fillRef>
+          <a:effectRef idx="2">
+            <a:schemeClr val="accent1"/>
+          </a:effectRef>
+          <a:fontRef idx="minor">
+            <a:schemeClr val="lt1"/>
+          </a:fontRef>
+        </p:style>
+        <p:txBody>
+          <a:bodyPr rtlCol="0" anchor="ctr" wrap="square" lIns="73152" rIns="73152"/>
+          <a:lstStyle/>
+          <a:p>
+            <a:pPr algn="ctr">
+              <a:lnSpc>
+                <a:spcPct val="100000"/>
+              </a:lnSpc>
+              <a:spcAft>
+                <a:spcPts val="0"/>
+              </a:spcAft>
+              <a:defRPr sz="1700" b="0">
+                <a:solidFill>
+                  <a:srgbClr val="666666"/>
+                </a:solidFill>
+                <a:latin typeface="Calibri"/>
+              </a:defRPr>
+            </a:pPr>
+            <a:r>
+              <a:rPr sz="1700" b="0">
+                <a:solidFill>
+                  <a:srgbClr val="666666"/>
+                </a:solidFill>
+                <a:latin typeface="Calibri"/>
+              </a:rPr>
+              <a:t>Driving a square</a:t>
             </a:r>
           </a:p>
         </p:txBody>
@@ -19112,8 +19688,8 @@
         </p:nvSpPr>
         <p:spPr>
           <a:xfrm>
-            <a:off x="0" y="2194560"/>
-            <a:ext cx="256032" cy="1828800"/>
+            <a:off x="0" y="1234440"/>
+            <a:ext cx="256032" cy="1554480"/>
           </a:xfrm>
           <a:prstGeom prst="rect">
             <a:avLst/>
@@ -19156,8 +19732,8 @@
         </p:nvSpPr>
         <p:spPr>
           <a:xfrm>
-            <a:off x="777240" y="2286000"/>
-            <a:ext cx="10515600" cy="1188720"/>
+            <a:off x="777240" y="1325880"/>
+            <a:ext cx="10515600" cy="1051560"/>
           </a:xfrm>
           <a:prstGeom prst="rect">
             <a:avLst/>
@@ -19204,8 +19780,8 @@
         </p:nvSpPr>
         <p:spPr>
           <a:xfrm>
-            <a:off x="777240" y="3520440"/>
-            <a:ext cx="10515600" cy="914400"/>
+            <a:off x="777240" y="2423160"/>
+            <a:ext cx="10515600" cy="685800"/>
           </a:xfrm>
           <a:prstGeom prst="rect">
             <a:avLst/>
@@ -19240,6 +19816,596 @@
                 <a:latin typeface="Calibri"/>
               </a:rPr>
               <a:t>About 60 minutes</a:t>
+            </a:r>
+          </a:p>
+        </p:txBody>
+      </p:sp>
+      <p:sp>
+        <p:nvSpPr>
+          <p:cNvPr id="7" name="Rounded Rectangle 6"/>
+          <p:cNvSpPr/>
+          <p:nvPr/>
+        </p:nvSpPr>
+        <p:spPr>
+          <a:xfrm>
+            <a:off x="502920" y="3886200"/>
+            <a:ext cx="2120127" cy="1325880"/>
+          </a:xfrm>
+          <a:prstGeom prst="roundRect">
+            <a:avLst>
+              <a:gd name="adj" fmla="val 8000"/>
+            </a:avLst>
+          </a:prstGeom>
+          <a:solidFill>
+            <a:srgbClr val="EEF3F8"/>
+          </a:solidFill>
+          <a:ln w="12700">
+            <a:solidFill>
+              <a:srgbClr val="0E7C86"/>
+            </a:solidFill>
+          </a:ln>
+          <a:effectLst/>
+        </p:spPr>
+        <p:style>
+          <a:lnRef idx="1">
+            <a:schemeClr val="accent1"/>
+          </a:lnRef>
+          <a:fillRef idx="3">
+            <a:schemeClr val="accent1"/>
+          </a:fillRef>
+          <a:effectRef idx="2">
+            <a:schemeClr val="accent1"/>
+          </a:effectRef>
+          <a:fontRef idx="minor">
+            <a:schemeClr val="lt1"/>
+          </a:fontRef>
+        </p:style>
+        <p:txBody>
+          <a:bodyPr rtlCol="0" anchor="ctr" wrap="square" lIns="73152" rIns="73152"/>
+          <a:lstStyle/>
+          <a:p>
+            <a:pPr algn="ctr">
+              <a:lnSpc>
+                <a:spcPct val="100000"/>
+              </a:lnSpc>
+              <a:spcAft>
+                <a:spcPts val="0"/>
+              </a:spcAft>
+              <a:defRPr sz="1700" b="0">
+                <a:solidFill>
+                  <a:srgbClr val="1F3A5F"/>
+                </a:solidFill>
+                <a:latin typeface="Calibri"/>
+              </a:defRPr>
+            </a:pPr>
+            <a:r>
+              <a:rPr sz="1700" b="0">
+                <a:solidFill>
+                  <a:srgbClr val="1F3A5F"/>
+                </a:solidFill>
+                <a:latin typeface="Calibri"/>
+              </a:rPr>
+              <a:t>H-bridges and PWM</a:t>
+            </a:r>
+          </a:p>
+        </p:txBody>
+      </p:sp>
+      <p:sp>
+        <p:nvSpPr>
+          <p:cNvPr id="8" name="TextBox 7"/>
+          <p:cNvSpPr txBox="1"/>
+          <p:nvPr/>
+        </p:nvSpPr>
+        <p:spPr>
+          <a:xfrm>
+            <a:off x="502920" y="3520440"/>
+            <a:ext cx="2120127" cy="310896"/>
+          </a:xfrm>
+          <a:prstGeom prst="rect">
+            <a:avLst/>
+          </a:prstGeom>
+          <a:noFill/>
+        </p:spPr>
+        <p:txBody>
+          <a:bodyPr wrap="square" lIns="0" tIns="0" rIns="0" bIns="0">
+            <a:spAutoFit/>
+          </a:bodyPr>
+          <a:lstStyle/>
+          <a:p>
+            <a:pPr algn="ctr">
+              <a:lnSpc>
+                <a:spcPct val="100000"/>
+              </a:lnSpc>
+              <a:spcAft>
+                <a:spcPts val="200"/>
+              </a:spcAft>
+              <a:defRPr sz="1100" b="1">
+                <a:solidFill>
+                  <a:srgbClr val="0E7C86"/>
+                </a:solidFill>
+                <a:latin typeface="Calibri"/>
+              </a:defRPr>
+            </a:pPr>
+            <a:r>
+              <a:rPr sz="1100" b="1">
+                <a:solidFill>
+                  <a:srgbClr val="0E7C86"/>
+                </a:solidFill>
+                <a:latin typeface="Calibri"/>
+              </a:rPr>
+              <a:t>done</a:t>
+            </a:r>
+          </a:p>
+        </p:txBody>
+      </p:sp>
+      <p:sp>
+        <p:nvSpPr>
+          <p:cNvPr id="9" name="Rounded Rectangle 8"/>
+          <p:cNvSpPr/>
+          <p:nvPr/>
+        </p:nvSpPr>
+        <p:spPr>
+          <a:xfrm>
+            <a:off x="2769351" y="3886200"/>
+            <a:ext cx="2120127" cy="1325880"/>
+          </a:xfrm>
+          <a:prstGeom prst="roundRect">
+            <a:avLst>
+              <a:gd name="adj" fmla="val 8000"/>
+            </a:avLst>
+          </a:prstGeom>
+          <a:solidFill>
+            <a:srgbClr val="EEF3F8"/>
+          </a:solidFill>
+          <a:ln w="12700">
+            <a:solidFill>
+              <a:srgbClr val="0E7C86"/>
+            </a:solidFill>
+          </a:ln>
+          <a:effectLst/>
+        </p:spPr>
+        <p:style>
+          <a:lnRef idx="1">
+            <a:schemeClr val="accent1"/>
+          </a:lnRef>
+          <a:fillRef idx="3">
+            <a:schemeClr val="accent1"/>
+          </a:fillRef>
+          <a:effectRef idx="2">
+            <a:schemeClr val="accent1"/>
+          </a:effectRef>
+          <a:fontRef idx="minor">
+            <a:schemeClr val="lt1"/>
+          </a:fontRef>
+        </p:style>
+        <p:txBody>
+          <a:bodyPr rtlCol="0" anchor="ctr" wrap="square" lIns="73152" rIns="73152"/>
+          <a:lstStyle/>
+          <a:p>
+            <a:pPr algn="ctr">
+              <a:lnSpc>
+                <a:spcPct val="100000"/>
+              </a:lnSpc>
+              <a:spcAft>
+                <a:spcPts val="0"/>
+              </a:spcAft>
+              <a:defRPr sz="1700" b="0">
+                <a:solidFill>
+                  <a:srgbClr val="1F3A5F"/>
+                </a:solidFill>
+                <a:latin typeface="Calibri"/>
+              </a:defRPr>
+            </a:pPr>
+            <a:r>
+              <a:rPr sz="1700" b="0">
+                <a:solidFill>
+                  <a:srgbClr val="1F3A5F"/>
+                </a:solidFill>
+                <a:latin typeface="Calibri"/>
+              </a:rPr>
+              <a:t>One motor</a:t>
+            </a:r>
+          </a:p>
+        </p:txBody>
+      </p:sp>
+      <p:sp>
+        <p:nvSpPr>
+          <p:cNvPr id="10" name="TextBox 9"/>
+          <p:cNvSpPr txBox="1"/>
+          <p:nvPr/>
+        </p:nvSpPr>
+        <p:spPr>
+          <a:xfrm>
+            <a:off x="2769351" y="3520440"/>
+            <a:ext cx="2120127" cy="310896"/>
+          </a:xfrm>
+          <a:prstGeom prst="rect">
+            <a:avLst/>
+          </a:prstGeom>
+          <a:noFill/>
+        </p:spPr>
+        <p:txBody>
+          <a:bodyPr wrap="square" lIns="0" tIns="0" rIns="0" bIns="0">
+            <a:spAutoFit/>
+          </a:bodyPr>
+          <a:lstStyle/>
+          <a:p>
+            <a:pPr algn="ctr">
+              <a:lnSpc>
+                <a:spcPct val="100000"/>
+              </a:lnSpc>
+              <a:spcAft>
+                <a:spcPts val="200"/>
+              </a:spcAft>
+              <a:defRPr sz="1100" b="1">
+                <a:solidFill>
+                  <a:srgbClr val="0E7C86"/>
+                </a:solidFill>
+                <a:latin typeface="Calibri"/>
+              </a:defRPr>
+            </a:pPr>
+            <a:r>
+              <a:rPr sz="1100" b="1">
+                <a:solidFill>
+                  <a:srgbClr val="0E7C86"/>
+                </a:solidFill>
+                <a:latin typeface="Calibri"/>
+              </a:rPr>
+              <a:t>done</a:t>
+            </a:r>
+          </a:p>
+        </p:txBody>
+      </p:sp>
+      <p:sp>
+        <p:nvSpPr>
+          <p:cNvPr id="11" name="Rounded Rectangle 10"/>
+          <p:cNvSpPr/>
+          <p:nvPr/>
+        </p:nvSpPr>
+        <p:spPr>
+          <a:xfrm>
+            <a:off x="5035782" y="3886200"/>
+            <a:ext cx="2120127" cy="1325880"/>
+          </a:xfrm>
+          <a:prstGeom prst="roundRect">
+            <a:avLst>
+              <a:gd name="adj" fmla="val 8000"/>
+            </a:avLst>
+          </a:prstGeom>
+          <a:solidFill>
+            <a:srgbClr val="EEF3F8"/>
+          </a:solidFill>
+          <a:ln w="12700">
+            <a:solidFill>
+              <a:srgbClr val="0E7C86"/>
+            </a:solidFill>
+          </a:ln>
+          <a:effectLst/>
+        </p:spPr>
+        <p:style>
+          <a:lnRef idx="1">
+            <a:schemeClr val="accent1"/>
+          </a:lnRef>
+          <a:fillRef idx="3">
+            <a:schemeClr val="accent1"/>
+          </a:fillRef>
+          <a:effectRef idx="2">
+            <a:schemeClr val="accent1"/>
+          </a:effectRef>
+          <a:fontRef idx="minor">
+            <a:schemeClr val="lt1"/>
+          </a:fontRef>
+        </p:style>
+        <p:txBody>
+          <a:bodyPr rtlCol="0" anchor="ctr" wrap="square" lIns="73152" rIns="73152"/>
+          <a:lstStyle/>
+          <a:p>
+            <a:pPr algn="ctr">
+              <a:lnSpc>
+                <a:spcPct val="100000"/>
+              </a:lnSpc>
+              <a:spcAft>
+                <a:spcPts val="0"/>
+              </a:spcAft>
+              <a:defRPr sz="1700" b="0">
+                <a:solidFill>
+                  <a:srgbClr val="1F3A5F"/>
+                </a:solidFill>
+                <a:latin typeface="Calibri"/>
+              </a:defRPr>
+            </a:pPr>
+            <a:r>
+              <a:rPr sz="1700" b="0">
+                <a:solidFill>
+                  <a:srgbClr val="1F3A5F"/>
+                </a:solidFill>
+                <a:latin typeface="Calibri"/>
+              </a:rPr>
+              <a:t>Duty vs speed</a:t>
+            </a:r>
+          </a:p>
+        </p:txBody>
+      </p:sp>
+      <p:sp>
+        <p:nvSpPr>
+          <p:cNvPr id="12" name="TextBox 11"/>
+          <p:cNvSpPr txBox="1"/>
+          <p:nvPr/>
+        </p:nvSpPr>
+        <p:spPr>
+          <a:xfrm>
+            <a:off x="5035782" y="3520440"/>
+            <a:ext cx="2120127" cy="310896"/>
+          </a:xfrm>
+          <a:prstGeom prst="rect">
+            <a:avLst/>
+          </a:prstGeom>
+          <a:noFill/>
+        </p:spPr>
+        <p:txBody>
+          <a:bodyPr wrap="square" lIns="0" tIns="0" rIns="0" bIns="0">
+            <a:spAutoFit/>
+          </a:bodyPr>
+          <a:lstStyle/>
+          <a:p>
+            <a:pPr algn="ctr">
+              <a:lnSpc>
+                <a:spcPct val="100000"/>
+              </a:lnSpc>
+              <a:spcAft>
+                <a:spcPts val="200"/>
+              </a:spcAft>
+              <a:defRPr sz="1100" b="1">
+                <a:solidFill>
+                  <a:srgbClr val="0E7C86"/>
+                </a:solidFill>
+                <a:latin typeface="Calibri"/>
+              </a:defRPr>
+            </a:pPr>
+            <a:r>
+              <a:rPr sz="1100" b="1">
+                <a:solidFill>
+                  <a:srgbClr val="0E7C86"/>
+                </a:solidFill>
+                <a:latin typeface="Calibri"/>
+              </a:rPr>
+              <a:t>done</a:t>
+            </a:r>
+          </a:p>
+        </p:txBody>
+      </p:sp>
+      <p:sp>
+        <p:nvSpPr>
+          <p:cNvPr id="13" name="Rounded Rectangle 12"/>
+          <p:cNvSpPr/>
+          <p:nvPr/>
+        </p:nvSpPr>
+        <p:spPr>
+          <a:xfrm>
+            <a:off x="7302213" y="3886200"/>
+            <a:ext cx="2120127" cy="1325880"/>
+          </a:xfrm>
+          <a:prstGeom prst="roundRect">
+            <a:avLst>
+              <a:gd name="adj" fmla="val 8000"/>
+            </a:avLst>
+          </a:prstGeom>
+          <a:solidFill>
+            <a:srgbClr val="EEF3F8"/>
+          </a:solidFill>
+          <a:ln w="12700">
+            <a:solidFill>
+              <a:srgbClr val="0E7C86"/>
+            </a:solidFill>
+          </a:ln>
+          <a:effectLst/>
+        </p:spPr>
+        <p:style>
+          <a:lnRef idx="1">
+            <a:schemeClr val="accent1"/>
+          </a:lnRef>
+          <a:fillRef idx="3">
+            <a:schemeClr val="accent1"/>
+          </a:fillRef>
+          <a:effectRef idx="2">
+            <a:schemeClr val="accent1"/>
+          </a:effectRef>
+          <a:fontRef idx="minor">
+            <a:schemeClr val="lt1"/>
+          </a:fontRef>
+        </p:style>
+        <p:txBody>
+          <a:bodyPr rtlCol="0" anchor="ctr" wrap="square" lIns="73152" rIns="73152"/>
+          <a:lstStyle/>
+          <a:p>
+            <a:pPr algn="ctr">
+              <a:lnSpc>
+                <a:spcPct val="100000"/>
+              </a:lnSpc>
+              <a:spcAft>
+                <a:spcPts val="0"/>
+              </a:spcAft>
+              <a:defRPr sz="1700" b="0">
+                <a:solidFill>
+                  <a:srgbClr val="1F3A5F"/>
+                </a:solidFill>
+                <a:latin typeface="Calibri"/>
+              </a:defRPr>
+            </a:pPr>
+            <a:r>
+              <a:rPr sz="1700" b="0">
+                <a:solidFill>
+                  <a:srgbClr val="1F3A5F"/>
+                </a:solidFill>
+                <a:latin typeface="Calibri"/>
+              </a:rPr>
+              <a:t>Ohm's law and circuits</a:t>
+            </a:r>
+          </a:p>
+        </p:txBody>
+      </p:sp>
+      <p:sp>
+        <p:nvSpPr>
+          <p:cNvPr id="14" name="TextBox 13"/>
+          <p:cNvSpPr txBox="1"/>
+          <p:nvPr/>
+        </p:nvSpPr>
+        <p:spPr>
+          <a:xfrm>
+            <a:off x="7302213" y="3520440"/>
+            <a:ext cx="2120127" cy="310896"/>
+          </a:xfrm>
+          <a:prstGeom prst="rect">
+            <a:avLst/>
+          </a:prstGeom>
+          <a:noFill/>
+        </p:spPr>
+        <p:txBody>
+          <a:bodyPr wrap="square" lIns="0" tIns="0" rIns="0" bIns="0">
+            <a:spAutoFit/>
+          </a:bodyPr>
+          <a:lstStyle/>
+          <a:p>
+            <a:pPr algn="ctr">
+              <a:lnSpc>
+                <a:spcPct val="100000"/>
+              </a:lnSpc>
+              <a:spcAft>
+                <a:spcPts val="200"/>
+              </a:spcAft>
+              <a:defRPr sz="1100" b="1">
+                <a:solidFill>
+                  <a:srgbClr val="0E7C86"/>
+                </a:solidFill>
+                <a:latin typeface="Calibri"/>
+              </a:defRPr>
+            </a:pPr>
+            <a:r>
+              <a:rPr sz="1100" b="1">
+                <a:solidFill>
+                  <a:srgbClr val="0E7C86"/>
+                </a:solidFill>
+                <a:latin typeface="Calibri"/>
+              </a:rPr>
+              <a:t>done</a:t>
+            </a:r>
+          </a:p>
+        </p:txBody>
+      </p:sp>
+      <p:sp>
+        <p:nvSpPr>
+          <p:cNvPr id="15" name="Rounded Rectangle 14"/>
+          <p:cNvSpPr/>
+          <p:nvPr/>
+        </p:nvSpPr>
+        <p:spPr>
+          <a:xfrm>
+            <a:off x="9568644" y="3886200"/>
+            <a:ext cx="2120127" cy="1325880"/>
+          </a:xfrm>
+          <a:prstGeom prst="roundRect">
+            <a:avLst>
+              <a:gd name="adj" fmla="val 8000"/>
+            </a:avLst>
+          </a:prstGeom>
+          <a:solidFill>
+            <a:srgbClr val="D6ECEE"/>
+          </a:solidFill>
+          <a:ln w="25400">
+            <a:solidFill>
+              <a:srgbClr val="0E7C86"/>
+            </a:solidFill>
+          </a:ln>
+          <a:effectLst/>
+        </p:spPr>
+        <p:style>
+          <a:lnRef idx="1">
+            <a:schemeClr val="accent1"/>
+          </a:lnRef>
+          <a:fillRef idx="3">
+            <a:schemeClr val="accent1"/>
+          </a:fillRef>
+          <a:effectRef idx="2">
+            <a:schemeClr val="accent1"/>
+          </a:effectRef>
+          <a:fontRef idx="minor">
+            <a:schemeClr val="lt1"/>
+          </a:fontRef>
+        </p:style>
+        <p:txBody>
+          <a:bodyPr rtlCol="0" anchor="ctr" wrap="square" lIns="73152" rIns="73152"/>
+          <a:lstStyle/>
+          <a:p>
+            <a:pPr algn="ctr">
+              <a:lnSpc>
+                <a:spcPct val="100000"/>
+              </a:lnSpc>
+              <a:spcAft>
+                <a:spcPts val="0"/>
+              </a:spcAft>
+              <a:defRPr sz="1700" b="1">
+                <a:solidFill>
+                  <a:srgbClr val="1F3A5F"/>
+                </a:solidFill>
+                <a:latin typeface="Calibri"/>
+              </a:defRPr>
+            </a:pPr>
+            <a:r>
+              <a:rPr sz="1700" b="1">
+                <a:solidFill>
+                  <a:srgbClr val="1F3A5F"/>
+                </a:solidFill>
+                <a:latin typeface="Calibri"/>
+              </a:rPr>
+              <a:t>Driving a square</a:t>
+            </a:r>
+          </a:p>
+        </p:txBody>
+      </p:sp>
+      <p:sp>
+        <p:nvSpPr>
+          <p:cNvPr id="16" name="TextBox 15"/>
+          <p:cNvSpPr txBox="1"/>
+          <p:nvPr/>
+        </p:nvSpPr>
+        <p:spPr>
+          <a:xfrm>
+            <a:off x="9568644" y="3520440"/>
+            <a:ext cx="2120127" cy="310896"/>
+          </a:xfrm>
+          <a:prstGeom prst="rect">
+            <a:avLst/>
+          </a:prstGeom>
+          <a:noFill/>
+        </p:spPr>
+        <p:txBody>
+          <a:bodyPr wrap="square" lIns="0" tIns="0" rIns="0" bIns="0">
+            <a:spAutoFit/>
+          </a:bodyPr>
+          <a:lstStyle/>
+          <a:p>
+            <a:pPr algn="ctr">
+              <a:lnSpc>
+                <a:spcPct val="100000"/>
+              </a:lnSpc>
+              <a:spcAft>
+                <a:spcPts val="200"/>
+              </a:spcAft>
+              <a:defRPr sz="1100" b="1">
+                <a:solidFill>
+                  <a:srgbClr val="0E7C86"/>
+                </a:solidFill>
+                <a:latin typeface="Calibri"/>
+              </a:defRPr>
+            </a:pPr>
+            <a:r>
+              <a:rPr sz="1100" b="1">
+                <a:solidFill>
+                  <a:srgbClr val="0E7C86"/>
+                </a:solidFill>
+                <a:latin typeface="Calibri"/>
+              </a:rPr>
+              <a:t>NOW</a:t>
             </a:r>
           </a:p>
         </p:txBody>
@@ -30697,7 +31863,7 @@
                 </a:solidFill>
                 <a:latin typeface="Calibri"/>
               </a:rPr>
-              <a:t>Where we are</a:t>
+              <a:t>Do it now  -  drive a square</a:t>
             </a:r>
           </a:p>
         </p:txBody>
@@ -30850,21 +32016,19 @@
         </p:nvSpPr>
         <p:spPr>
           <a:xfrm>
-            <a:off x="502920" y="2240280"/>
-            <a:ext cx="2120127" cy="1737360"/>
+            <a:off x="502920" y="1188720"/>
+            <a:ext cx="11185855" cy="530352"/>
           </a:xfrm>
           <a:prstGeom prst="roundRect">
             <a:avLst>
-              <a:gd name="adj" fmla="val 8000"/>
+              <a:gd name="adj" fmla="val 4000"/>
             </a:avLst>
           </a:prstGeom>
           <a:solidFill>
-            <a:srgbClr val="EEF3F8"/>
+            <a:srgbClr val="0E7C86"/>
           </a:solidFill>
-          <a:ln w="12700">
-            <a:solidFill>
-              <a:srgbClr val="0E7C86"/>
-            </a:solidFill>
+          <a:ln>
+            <a:noFill/>
           </a:ln>
           <a:effectLst/>
         </p:spPr>
@@ -30883,31 +32047,36 @@
           </a:fontRef>
         </p:style>
         <p:txBody>
-          <a:bodyPr rtlCol="0" anchor="ctr" wrap="square" lIns="73152" rIns="73152"/>
-          <a:lstStyle/>
-          <a:p>
-            <a:pPr algn="ctr">
-              <a:lnSpc>
-                <a:spcPct val="100000"/>
-              </a:lnSpc>
-              <a:spcAft>
-                <a:spcPts val="0"/>
-              </a:spcAft>
-              <a:defRPr sz="1700" b="0">
-                <a:solidFill>
-                  <a:srgbClr val="1F3A5F"/>
-                </a:solidFill>
-                <a:latin typeface="Calibri"/>
-              </a:defRPr>
-            </a:pPr>
-            <a:r>
-              <a:rPr sz="1700" b="0">
-                <a:solidFill>
-                  <a:srgbClr val="1F3A5F"/>
-                </a:solidFill>
-                <a:latin typeface="Calibri"/>
-              </a:rPr>
-              <a:t>H-bridges and PWM</a:t>
+          <a:bodyPr rtlCol="0" anchor="ctr" wrap="square" lIns="182880"/>
+          <a:lstStyle/>
+          <a:p>
+            <a:pPr algn="l"/>
+            <a:r>
+              <a:rPr sz="1300" b="1">
+                <a:solidFill>
+                  <a:srgbClr val="FFFFFF"/>
+                </a:solidFill>
+                <a:latin typeface="Calibri"/>
+              </a:rPr>
+              <a:t>UPLOAD AND RUN:   </a:t>
+            </a:r>
+            <a:r>
+              <a:rPr sz="1500" b="1">
+                <a:solidFill>
+                  <a:srgbClr val="FFFFFF"/>
+                </a:solidFill>
+                <a:latin typeface="Consolas"/>
+              </a:rPr>
+              <a:t>l2c_maneuver_square</a:t>
+            </a:r>
+            <a:r>
+              <a:rPr sz="1200">
+                <a:solidFill>
+                  <a:srgbClr val="FFFFFF"/>
+                </a:solidFill>
+                <a:latin typeface="Calibri"/>
+              </a:rPr>
+              <a:t>     (30 minutes)</a:t>
             </a:r>
           </a:p>
         </p:txBody>
@@ -30920,8 +32089,8 @@
         </p:nvSpPr>
         <p:spPr>
           <a:xfrm>
-            <a:off x="502920" y="1856232"/>
-            <a:ext cx="2120127" cy="347472"/>
+            <a:off x="502920" y="1901952"/>
+            <a:ext cx="6249137" cy="3273552"/>
           </a:xfrm>
           <a:prstGeom prst="rect">
             <a:avLst/>
@@ -30934,14 +32103,212 @@
           </a:bodyPr>
           <a:lstStyle/>
           <a:p>
-            <a:pPr algn="ctr">
-              <a:lnSpc>
-                <a:spcPct val="100000"/>
-              </a:lnSpc>
-              <a:spcAft>
-                <a:spcPts val="600"/>
-              </a:spcAft>
-              <a:defRPr sz="1200" b="1">
+            <a:pPr algn="l">
+              <a:lnSpc>
+                <a:spcPct val="100000"/>
+              </a:lnSpc>
+              <a:spcAft>
+                <a:spcPts val="400"/>
+              </a:spcAft>
+              <a:defRPr sz="1800" b="0">
+                <a:solidFill>
+                  <a:srgbClr val="222222"/>
+                </a:solidFill>
+                <a:latin typeface="Calibri"/>
+              </a:defRPr>
+            </a:pPr>
+            <a:r>
+              <a:rPr sz="1800" b="0">
+                <a:solidFill>
+                  <a:srgbClr val="222222"/>
+                </a:solidFill>
+                <a:latin typeface="Calibri"/>
+              </a:rPr>
+              <a:t>1.  Clear three meters square. Bags and feet out.</a:t>
+            </a:r>
+          </a:p>
+          <a:p>
+            <a:pPr algn="l">
+              <a:lnSpc>
+                <a:spcPct val="100000"/>
+              </a:lnSpc>
+              <a:spcAft>
+                <a:spcPts val="400"/>
+              </a:spcAft>
+              <a:defRPr sz="1800" b="0">
+                <a:solidFill>
+                  <a:srgbClr val="222222"/>
+                </a:solidFill>
+                <a:latin typeface="Calibri"/>
+              </a:defRPr>
+            </a:pPr>
+            <a:r>
+              <a:rPr sz="1800" b="0">
+                <a:solidFill>
+                  <a:srgbClr val="222222"/>
+                </a:solidFill>
+                <a:latin typeface="Calibri"/>
+              </a:rPr>
+              <a:t>2.  Mark the starting point with tape.</a:t>
+            </a:r>
+          </a:p>
+          <a:p>
+            <a:pPr algn="l">
+              <a:lnSpc>
+                <a:spcPct val="100000"/>
+              </a:lnSpc>
+              <a:spcAft>
+                <a:spcPts val="400"/>
+              </a:spcAft>
+              <a:defRPr sz="1800" b="0">
+                <a:solidFill>
+                  <a:srgbClr val="222222"/>
+                </a:solidFill>
+                <a:latin typeface="Calibri"/>
+              </a:defRPr>
+            </a:pPr>
+            <a:r>
+              <a:rPr sz="1800" b="0">
+                <a:solidFill>
+                  <a:srgbClr val="222222"/>
+                </a:solidFill>
+                <a:latin typeface="Calibri"/>
+              </a:rPr>
+              <a:t>3.  Upload. It waits five seconds, then goes.</a:t>
+            </a:r>
+          </a:p>
+          <a:p>
+            <a:pPr algn="l">
+              <a:lnSpc>
+                <a:spcPct val="100000"/>
+              </a:lnSpc>
+              <a:spcAft>
+                <a:spcPts val="400"/>
+              </a:spcAft>
+              <a:defRPr sz="1800" b="0">
+                <a:solidFill>
+                  <a:srgbClr val="222222"/>
+                </a:solidFill>
+                <a:latin typeface="Calibri"/>
+              </a:defRPr>
+            </a:pPr>
+            <a:r>
+              <a:rPr sz="1800" b="0">
+                <a:solidFill>
+                  <a:srgbClr val="222222"/>
+                </a:solidFill>
+                <a:latin typeface="Calibri"/>
+              </a:rPr>
+              <a:t>4.  MEASURE one side of the square it actually drove.</a:t>
+            </a:r>
+          </a:p>
+          <a:p>
+            <a:pPr algn="l">
+              <a:lnSpc>
+                <a:spcPct val="100000"/>
+              </a:lnSpc>
+              <a:spcAft>
+                <a:spcPts val="400"/>
+              </a:spcAft>
+              <a:defRPr sz="1800" b="0">
+                <a:solidFill>
+                  <a:srgbClr val="222222"/>
+                </a:solidFill>
+                <a:latin typeface="Calibri"/>
+              </a:defRPr>
+            </a:pPr>
+            <a:r>
+              <a:rPr sz="1800" b="0">
+                <a:solidFill>
+                  <a:srgbClr val="222222"/>
+                </a:solidFill>
+                <a:latin typeface="Calibri"/>
+              </a:rPr>
+              <a:t>5.  Speed = side length / (FORWARD_MS / 1000)</a:t>
+            </a:r>
+          </a:p>
+          <a:p>
+            <a:pPr algn="l">
+              <a:lnSpc>
+                <a:spcPct val="100000"/>
+              </a:lnSpc>
+              <a:spcAft>
+                <a:spcPts val="400"/>
+              </a:spcAft>
+              <a:defRPr sz="1800" b="0">
+                <a:solidFill>
+                  <a:srgbClr val="222222"/>
+                </a:solidFill>
+                <a:latin typeface="Calibri"/>
+              </a:defRPr>
+            </a:pPr>
+            <a:r>
+              <a:rPr sz="1800" b="0">
+                <a:solidFill>
+                  <a:srgbClr val="222222"/>
+                </a:solidFill>
+                <a:latin typeface="Calibri"/>
+              </a:rPr>
+              <a:t>6.  The corners will not be 90 degrees. Adjust TURN_MS by 25 ms at a time until it comes back to its tape.</a:t>
+            </a:r>
+          </a:p>
+          <a:p>
+            <a:pPr algn="l">
+              <a:lnSpc>
+                <a:spcPct val="100000"/>
+              </a:lnSpc>
+              <a:spcAft>
+                <a:spcPts val="400"/>
+              </a:spcAft>
+              <a:defRPr sz="1800" b="0">
+                <a:solidFill>
+                  <a:srgbClr val="222222"/>
+                </a:solidFill>
+                <a:latin typeface="Calibri"/>
+              </a:defRPr>
+            </a:pPr>
+            <a:r>
+              <a:rPr sz="1800" b="0">
+                <a:solidFill>
+                  <a:srgbClr val="222222"/>
+                </a:solidFill>
+                <a:latin typeface="Calibri"/>
+              </a:rPr>
+              <a:t>7.  Change FORWARD_MS and PREDICT the new square before you run it. How close were you?</a:t>
+            </a:r>
+          </a:p>
+        </p:txBody>
+      </p:sp>
+      <p:sp>
+        <p:nvSpPr>
+          <p:cNvPr id="8" name="TextBox 7"/>
+          <p:cNvSpPr txBox="1"/>
+          <p:nvPr/>
+        </p:nvSpPr>
+        <p:spPr>
+          <a:xfrm>
+            <a:off x="7163537" y="1901952"/>
+            <a:ext cx="4525238" cy="365760"/>
+          </a:xfrm>
+          <a:prstGeom prst="rect">
+            <a:avLst/>
+          </a:prstGeom>
+          <a:noFill/>
+        </p:spPr>
+        <p:txBody>
+          <a:bodyPr wrap="square" lIns="0" tIns="0" rIns="0" bIns="0">
+            <a:spAutoFit/>
+          </a:bodyPr>
+          <a:lstStyle/>
+          <a:p>
+            <a:pPr algn="l">
+              <a:lnSpc>
+                <a:spcPct val="100000"/>
+              </a:lnSpc>
+              <a:spcAft>
+                <a:spcPts val="200"/>
+              </a:spcAft>
+              <a:defRPr sz="1800" b="1">
                 <a:solidFill>
                   <a:srgbClr val="0E7C86"/>
                 </a:solidFill>
@@ -30949,39 +32316,233 @@
               </a:defRPr>
             </a:pPr>
             <a:r>
-              <a:rPr sz="1200" b="1">
+              <a:rPr sz="1800" b="1">
                 <a:solidFill>
                   <a:srgbClr val="0E7C86"/>
                 </a:solidFill>
                 <a:latin typeface="Calibri"/>
               </a:rPr>
-              <a:t>done</a:t>
-            </a:r>
-          </a:p>
-        </p:txBody>
-      </p:sp>
-      <p:sp>
-        <p:nvSpPr>
-          <p:cNvPr id="8" name="Rounded Rectangle 7"/>
+              <a:t>What you should see</a:t>
+            </a:r>
+          </a:p>
+        </p:txBody>
+      </p:sp>
+      <p:sp>
+        <p:nvSpPr>
+          <p:cNvPr id="9" name="TextBox 8"/>
+          <p:cNvSpPr txBox="1"/>
+          <p:nvPr/>
+        </p:nvSpPr>
+        <p:spPr>
+          <a:xfrm>
+            <a:off x="7163537" y="2304288"/>
+            <a:ext cx="4525238" cy="1049849"/>
+          </a:xfrm>
+          <a:prstGeom prst="rect">
+            <a:avLst/>
+          </a:prstGeom>
+          <a:noFill/>
+        </p:spPr>
+        <p:txBody>
+          <a:bodyPr wrap="square" lIns="0" tIns="0" rIns="0" bIns="0">
+            <a:spAutoFit/>
+          </a:bodyPr>
+          <a:lstStyle/>
+          <a:p>
+            <a:pPr algn="l">
+              <a:lnSpc>
+                <a:spcPct val="100000"/>
+              </a:lnSpc>
+              <a:spcAft>
+                <a:spcPts val="300"/>
+              </a:spcAft>
+              <a:defRPr sz="1900" b="0">
+                <a:solidFill>
+                  <a:srgbClr val="222222"/>
+                </a:solidFill>
+                <a:latin typeface="Calibri"/>
+              </a:defRPr>
+            </a:pPr>
+            <a:r>
+              <a:rPr sz="1900" b="0">
+                <a:solidFill>
+                  <a:srgbClr val="222222"/>
+                </a:solidFill>
+                <a:latin typeface="Calibri"/>
+              </a:rPr>
+              <a:t>Roughly a square. Roughly.</a:t>
+            </a:r>
+          </a:p>
+          <a:p>
+            <a:pPr algn="l">
+              <a:lnSpc>
+                <a:spcPct val="100000"/>
+              </a:lnSpc>
+              <a:spcAft>
+                <a:spcPts val="300"/>
+              </a:spcAft>
+              <a:defRPr sz="1900" b="0">
+                <a:solidFill>
+                  <a:srgbClr val="222222"/>
+                </a:solidFill>
+                <a:latin typeface="Calibri"/>
+              </a:defRPr>
+            </a:pPr>
+            <a:r>
+              <a:rPr sz="1900" b="0">
+                <a:solidFill>
+                  <a:srgbClr val="222222"/>
+                </a:solidFill>
+                <a:latin typeface="Calibri"/>
+              </a:rPr>
+              <a:t>It will not close on the first attempt. That is the point, not a failure.</a:t>
+            </a:r>
+          </a:p>
+        </p:txBody>
+      </p:sp>
+      <p:sp>
+        <p:nvSpPr>
+          <p:cNvPr id="10" name="TextBox 9"/>
+          <p:cNvSpPr txBox="1"/>
+          <p:nvPr/>
+        </p:nvSpPr>
+        <p:spPr>
+          <a:xfrm>
+            <a:off x="7163537" y="3427289"/>
+            <a:ext cx="4525238" cy="365760"/>
+          </a:xfrm>
+          <a:prstGeom prst="rect">
+            <a:avLst/>
+          </a:prstGeom>
+          <a:noFill/>
+        </p:spPr>
+        <p:txBody>
+          <a:bodyPr wrap="square" lIns="0" tIns="0" rIns="0" bIns="0">
+            <a:spAutoFit/>
+          </a:bodyPr>
+          <a:lstStyle/>
+          <a:p>
+            <a:pPr algn="l">
+              <a:lnSpc>
+                <a:spcPct val="100000"/>
+              </a:lnSpc>
+              <a:spcAft>
+                <a:spcPts val="200"/>
+              </a:spcAft>
+              <a:defRPr sz="1800" b="1">
+                <a:solidFill>
+                  <a:srgbClr val="0E7C86"/>
+                </a:solidFill>
+                <a:latin typeface="Calibri"/>
+              </a:defRPr>
+            </a:pPr>
+            <a:r>
+              <a:rPr sz="1800" b="1">
+                <a:solidFill>
+                  <a:srgbClr val="0E7C86"/>
+                </a:solidFill>
+                <a:latin typeface="Calibri"/>
+              </a:rPr>
+              <a:t>Answer these</a:t>
+            </a:r>
+          </a:p>
+        </p:txBody>
+      </p:sp>
+      <p:sp>
+        <p:nvSpPr>
+          <p:cNvPr id="11" name="TextBox 10"/>
+          <p:cNvSpPr txBox="1"/>
+          <p:nvPr/>
+        </p:nvSpPr>
+        <p:spPr>
+          <a:xfrm>
+            <a:off x="7163537" y="3829625"/>
+            <a:ext cx="4525238" cy="1345878"/>
+          </a:xfrm>
+          <a:prstGeom prst="rect">
+            <a:avLst/>
+          </a:prstGeom>
+          <a:noFill/>
+        </p:spPr>
+        <p:txBody>
+          <a:bodyPr wrap="square" lIns="0" tIns="0" rIns="0" bIns="0">
+            <a:spAutoFit/>
+          </a:bodyPr>
+          <a:lstStyle/>
+          <a:p>
+            <a:pPr algn="l">
+              <a:lnSpc>
+                <a:spcPct val="100000"/>
+              </a:lnSpc>
+              <a:spcAft>
+                <a:spcPts val="300"/>
+              </a:spcAft>
+              <a:defRPr sz="1900" b="0">
+                <a:solidFill>
+                  <a:srgbClr val="222222"/>
+                </a:solidFill>
+                <a:latin typeface="Calibri"/>
+              </a:defRPr>
+            </a:pPr>
+            <a:r>
+              <a:rPr sz="1900" b="0">
+                <a:solidFill>
+                  <a:srgbClr val="222222"/>
+                </a:solidFill>
+                <a:latin typeface="Calibri"/>
+              </a:rPr>
+              <a:t>What is your vehicle's speed in feet per second?</a:t>
+            </a:r>
+          </a:p>
+          <a:p>
+            <a:pPr algn="l">
+              <a:lnSpc>
+                <a:spcPct val="100000"/>
+              </a:lnSpc>
+              <a:spcAft>
+                <a:spcPts val="300"/>
+              </a:spcAft>
+              <a:defRPr sz="1900" b="0">
+                <a:solidFill>
+                  <a:srgbClr val="222222"/>
+                </a:solidFill>
+                <a:latin typeface="Calibri"/>
+              </a:defRPr>
+            </a:pPr>
+            <a:r>
+              <a:rPr sz="1900" b="0">
+                <a:solidFill>
+                  <a:srgbClr val="222222"/>
+                </a:solidFill>
+                <a:latin typeface="Calibri"/>
+              </a:rPr>
+              <a:t>What is its turn rate in degrees per second?</a:t>
+            </a:r>
+          </a:p>
+        </p:txBody>
+      </p:sp>
+      <p:sp>
+        <p:nvSpPr>
+          <p:cNvPr id="12" name="Rounded Rectangle 11"/>
           <p:cNvSpPr/>
           <p:nvPr/>
         </p:nvSpPr>
         <p:spPr>
           <a:xfrm>
-            <a:off x="2769351" y="2240280"/>
-            <a:ext cx="2120127" cy="1737360"/>
+            <a:off x="502920" y="5303520"/>
+            <a:ext cx="11185855" cy="960120"/>
           </a:xfrm>
           <a:prstGeom prst="roundRect">
             <a:avLst>
-              <a:gd name="adj" fmla="val 8000"/>
+              <a:gd name="adj" fmla="val 4000"/>
             </a:avLst>
           </a:prstGeom>
           <a:solidFill>
-            <a:srgbClr val="EEF3F8"/>
+            <a:srgbClr val="FBECEC"/>
           </a:solidFill>
           <a:ln w="12700">
             <a:solidFill>
-              <a:srgbClr val="0E7C86"/>
+              <a:srgbClr val="A32A2A"/>
             </a:solidFill>
           </a:ln>
           <a:effectLst/>
@@ -31001,385 +32562,27 @@
           </a:fontRef>
         </p:style>
         <p:txBody>
-          <a:bodyPr rtlCol="0" anchor="ctr" wrap="square" lIns="73152" rIns="73152"/>
-          <a:lstStyle/>
-          <a:p>
-            <a:pPr algn="ctr">
-              <a:lnSpc>
-                <a:spcPct val="100000"/>
-              </a:lnSpc>
-              <a:spcAft>
-                <a:spcPts val="0"/>
-              </a:spcAft>
-              <a:defRPr sz="1700" b="0">
-                <a:solidFill>
-                  <a:srgbClr val="1F3A5F"/>
-                </a:solidFill>
-                <a:latin typeface="Calibri"/>
-              </a:defRPr>
-            </a:pPr>
-            <a:r>
-              <a:rPr sz="1700" b="0">
-                <a:solidFill>
-                  <a:srgbClr val="1F3A5F"/>
-                </a:solidFill>
-                <a:latin typeface="Calibri"/>
-              </a:rPr>
-              <a:t>One motor</a:t>
-            </a:r>
-          </a:p>
-        </p:txBody>
-      </p:sp>
-      <p:sp>
-        <p:nvSpPr>
-          <p:cNvPr id="9" name="TextBox 8"/>
-          <p:cNvSpPr txBox="1"/>
-          <p:nvPr/>
-        </p:nvSpPr>
-        <p:spPr>
-          <a:xfrm>
-            <a:off x="2769351" y="1856232"/>
-            <a:ext cx="2120127" cy="347472"/>
-          </a:xfrm>
-          <a:prstGeom prst="rect">
-            <a:avLst/>
-          </a:prstGeom>
-          <a:noFill/>
-        </p:spPr>
-        <p:txBody>
-          <a:bodyPr wrap="square" lIns="0" tIns="0" rIns="0" bIns="0">
-            <a:spAutoFit/>
-          </a:bodyPr>
-          <a:lstStyle/>
-          <a:p>
-            <a:pPr algn="ctr">
-              <a:lnSpc>
-                <a:spcPct val="100000"/>
-              </a:lnSpc>
-              <a:spcAft>
-                <a:spcPts val="600"/>
-              </a:spcAft>
-              <a:defRPr sz="1200" b="1">
-                <a:solidFill>
-                  <a:srgbClr val="0E7C86"/>
-                </a:solidFill>
-                <a:latin typeface="Calibri"/>
-              </a:defRPr>
-            </a:pPr>
-            <a:r>
-              <a:rPr sz="1200" b="1">
-                <a:solidFill>
-                  <a:srgbClr val="0E7C86"/>
-                </a:solidFill>
-                <a:latin typeface="Calibri"/>
-              </a:rPr>
-              <a:t>done</a:t>
-            </a:r>
-          </a:p>
-        </p:txBody>
-      </p:sp>
-      <p:sp>
-        <p:nvSpPr>
-          <p:cNvPr id="10" name="Rounded Rectangle 9"/>
-          <p:cNvSpPr/>
-          <p:nvPr/>
-        </p:nvSpPr>
-        <p:spPr>
-          <a:xfrm>
-            <a:off x="5035782" y="2240280"/>
-            <a:ext cx="2120127" cy="1737360"/>
-          </a:xfrm>
-          <a:prstGeom prst="roundRect">
-            <a:avLst>
-              <a:gd name="adj" fmla="val 8000"/>
-            </a:avLst>
-          </a:prstGeom>
-          <a:solidFill>
-            <a:srgbClr val="EEF3F8"/>
-          </a:solidFill>
-          <a:ln w="12700">
-            <a:solidFill>
-              <a:srgbClr val="0E7C86"/>
-            </a:solidFill>
-          </a:ln>
-          <a:effectLst/>
-        </p:spPr>
-        <p:style>
-          <a:lnRef idx="1">
-            <a:schemeClr val="accent1"/>
-          </a:lnRef>
-          <a:fillRef idx="3">
-            <a:schemeClr val="accent1"/>
-          </a:fillRef>
-          <a:effectRef idx="2">
-            <a:schemeClr val="accent1"/>
-          </a:effectRef>
-          <a:fontRef idx="minor">
-            <a:schemeClr val="lt1"/>
-          </a:fontRef>
-        </p:style>
-        <p:txBody>
-          <a:bodyPr rtlCol="0" anchor="ctr" wrap="square" lIns="73152" rIns="73152"/>
-          <a:lstStyle/>
-          <a:p>
-            <a:pPr algn="ctr">
-              <a:lnSpc>
-                <a:spcPct val="100000"/>
-              </a:lnSpc>
-              <a:spcAft>
-                <a:spcPts val="0"/>
-              </a:spcAft>
-              <a:defRPr sz="1700" b="0">
-                <a:solidFill>
-                  <a:srgbClr val="1F3A5F"/>
-                </a:solidFill>
-                <a:latin typeface="Calibri"/>
-              </a:defRPr>
-            </a:pPr>
-            <a:r>
-              <a:rPr sz="1700" b="0">
-                <a:solidFill>
-                  <a:srgbClr val="1F3A5F"/>
-                </a:solidFill>
-                <a:latin typeface="Calibri"/>
-              </a:rPr>
-              <a:t>Duty vs speed</a:t>
-            </a:r>
-          </a:p>
-        </p:txBody>
-      </p:sp>
-      <p:sp>
-        <p:nvSpPr>
-          <p:cNvPr id="11" name="TextBox 10"/>
-          <p:cNvSpPr txBox="1"/>
-          <p:nvPr/>
-        </p:nvSpPr>
-        <p:spPr>
-          <a:xfrm>
-            <a:off x="5035782" y="1856232"/>
-            <a:ext cx="2120127" cy="347472"/>
-          </a:xfrm>
-          <a:prstGeom prst="rect">
-            <a:avLst/>
-          </a:prstGeom>
-          <a:noFill/>
-        </p:spPr>
-        <p:txBody>
-          <a:bodyPr wrap="square" lIns="0" tIns="0" rIns="0" bIns="0">
-            <a:spAutoFit/>
-          </a:bodyPr>
-          <a:lstStyle/>
-          <a:p>
-            <a:pPr algn="ctr">
-              <a:lnSpc>
-                <a:spcPct val="100000"/>
-              </a:lnSpc>
-              <a:spcAft>
-                <a:spcPts val="600"/>
-              </a:spcAft>
-              <a:defRPr sz="1200" b="1">
-                <a:solidFill>
-                  <a:srgbClr val="0E7C86"/>
-                </a:solidFill>
-                <a:latin typeface="Calibri"/>
-              </a:defRPr>
-            </a:pPr>
-            <a:r>
-              <a:rPr sz="1200" b="1">
-                <a:solidFill>
-                  <a:srgbClr val="0E7C86"/>
-                </a:solidFill>
-                <a:latin typeface="Calibri"/>
-              </a:rPr>
-              <a:t>done</a:t>
-            </a:r>
-          </a:p>
-        </p:txBody>
-      </p:sp>
-      <p:sp>
-        <p:nvSpPr>
-          <p:cNvPr id="12" name="Rounded Rectangle 11"/>
-          <p:cNvSpPr/>
-          <p:nvPr/>
-        </p:nvSpPr>
-        <p:spPr>
-          <a:xfrm>
-            <a:off x="7302213" y="2240280"/>
-            <a:ext cx="2120127" cy="1737360"/>
-          </a:xfrm>
-          <a:prstGeom prst="roundRect">
-            <a:avLst>
-              <a:gd name="adj" fmla="val 8000"/>
-            </a:avLst>
-          </a:prstGeom>
-          <a:solidFill>
-            <a:srgbClr val="D6ECEE"/>
-          </a:solidFill>
-          <a:ln w="25400">
-            <a:solidFill>
-              <a:srgbClr val="0E7C86"/>
-            </a:solidFill>
-          </a:ln>
-          <a:effectLst/>
-        </p:spPr>
-        <p:style>
-          <a:lnRef idx="1">
-            <a:schemeClr val="accent1"/>
-          </a:lnRef>
-          <a:fillRef idx="3">
-            <a:schemeClr val="accent1"/>
-          </a:fillRef>
-          <a:effectRef idx="2">
-            <a:schemeClr val="accent1"/>
-          </a:effectRef>
-          <a:fontRef idx="minor">
-            <a:schemeClr val="lt1"/>
-          </a:fontRef>
-        </p:style>
-        <p:txBody>
-          <a:bodyPr rtlCol="0" anchor="ctr" wrap="square" lIns="73152" rIns="73152"/>
-          <a:lstStyle/>
-          <a:p>
-            <a:pPr algn="ctr">
-              <a:lnSpc>
-                <a:spcPct val="100000"/>
-              </a:lnSpc>
-              <a:spcAft>
-                <a:spcPts val="0"/>
-              </a:spcAft>
-              <a:defRPr sz="1700" b="1">
-                <a:solidFill>
-                  <a:srgbClr val="1F3A5F"/>
-                </a:solidFill>
-                <a:latin typeface="Calibri"/>
-              </a:defRPr>
-            </a:pPr>
-            <a:r>
-              <a:rPr sz="1700" b="1">
-                <a:solidFill>
-                  <a:srgbClr val="1F3A5F"/>
-                </a:solidFill>
-                <a:latin typeface="Calibri"/>
-              </a:rPr>
-              <a:t>Ohm's law and circuits</a:t>
-            </a:r>
-          </a:p>
-        </p:txBody>
-      </p:sp>
-      <p:sp>
-        <p:nvSpPr>
-          <p:cNvPr id="13" name="TextBox 12"/>
-          <p:cNvSpPr txBox="1"/>
-          <p:nvPr/>
-        </p:nvSpPr>
-        <p:spPr>
-          <a:xfrm>
-            <a:off x="7302213" y="1856232"/>
-            <a:ext cx="2120127" cy="347472"/>
-          </a:xfrm>
-          <a:prstGeom prst="rect">
-            <a:avLst/>
-          </a:prstGeom>
-          <a:noFill/>
-        </p:spPr>
-        <p:txBody>
-          <a:bodyPr wrap="square" lIns="0" tIns="0" rIns="0" bIns="0">
-            <a:spAutoFit/>
-          </a:bodyPr>
-          <a:lstStyle/>
-          <a:p>
-            <a:pPr algn="ctr">
-              <a:lnSpc>
-                <a:spcPct val="100000"/>
-              </a:lnSpc>
-              <a:spcAft>
-                <a:spcPts val="600"/>
-              </a:spcAft>
-              <a:defRPr sz="1200" b="1">
-                <a:solidFill>
-                  <a:srgbClr val="0E7C86"/>
-                </a:solidFill>
-                <a:latin typeface="Calibri"/>
-              </a:defRPr>
-            </a:pPr>
-            <a:r>
-              <a:rPr sz="1200" b="1">
-                <a:solidFill>
-                  <a:srgbClr val="0E7C86"/>
-                </a:solidFill>
-                <a:latin typeface="Calibri"/>
-              </a:rPr>
-              <a:t>NOW</a:t>
-            </a:r>
-          </a:p>
-        </p:txBody>
-      </p:sp>
-      <p:sp>
-        <p:nvSpPr>
-          <p:cNvPr id="14" name="Rounded Rectangle 13"/>
-          <p:cNvSpPr/>
-          <p:nvPr/>
-        </p:nvSpPr>
-        <p:spPr>
-          <a:xfrm>
-            <a:off x="9568644" y="2240280"/>
-            <a:ext cx="2120127" cy="1737360"/>
-          </a:xfrm>
-          <a:prstGeom prst="roundRect">
-            <a:avLst>
-              <a:gd name="adj" fmla="val 8000"/>
-            </a:avLst>
-          </a:prstGeom>
-          <a:solidFill>
-            <a:srgbClr val="FFFFFF"/>
-          </a:solidFill>
-          <a:ln w="12700">
-            <a:solidFill>
-              <a:srgbClr val="C8D2DE"/>
-            </a:solidFill>
-          </a:ln>
-          <a:effectLst/>
-        </p:spPr>
-        <p:style>
-          <a:lnRef idx="1">
-            <a:schemeClr val="accent1"/>
-          </a:lnRef>
-          <a:fillRef idx="3">
-            <a:schemeClr val="accent1"/>
-          </a:fillRef>
-          <a:effectRef idx="2">
-            <a:schemeClr val="accent1"/>
-          </a:effectRef>
-          <a:fontRef idx="minor">
-            <a:schemeClr val="lt1"/>
-          </a:fontRef>
-        </p:style>
-        <p:txBody>
-          <a:bodyPr rtlCol="0" anchor="ctr" wrap="square" lIns="73152" rIns="73152"/>
-          <a:lstStyle/>
-          <a:p>
-            <a:pPr algn="ctr">
-              <a:lnSpc>
-                <a:spcPct val="100000"/>
-              </a:lnSpc>
-              <a:spcAft>
-                <a:spcPts val="0"/>
-              </a:spcAft>
-              <a:defRPr sz="1700" b="0">
-                <a:solidFill>
-                  <a:srgbClr val="666666"/>
-                </a:solidFill>
-                <a:latin typeface="Calibri"/>
-              </a:defRPr>
-            </a:pPr>
-            <a:r>
-              <a:rPr sz="1700" b="0">
-                <a:solidFill>
-                  <a:srgbClr val="666666"/>
-                </a:solidFill>
-                <a:latin typeface="Calibri"/>
-              </a:rPr>
-              <a:t>Driving a square</a:t>
+          <a:bodyPr rtlCol="0" anchor="ctr" wrap="square" lIns="164592" rIns="164592" tIns="73152" bIns="73152"/>
+          <a:lstStyle/>
+          <a:p>
+            <a:pPr algn="l"/>
+            <a:r>
+              <a:rPr sz="1300" b="1">
+                <a:solidFill>
+                  <a:srgbClr val="A32A2A"/>
+                </a:solidFill>
+                <a:latin typeface="Calibri"/>
+              </a:rPr>
+              <a:t>SAFETY   </a:t>
+            </a:r>
+            <a:r>
+              <a:rPr sz="1500">
+                <a:solidFill>
+                  <a:srgbClr val="222222"/>
+                </a:solidFill>
+                <a:latin typeface="Calibri"/>
+              </a:rPr>
+              <a:t>This one drives on the floor. Know where your power switch is before you upload.</a:t>
             </a:r>
           </a:p>
         </p:txBody>
@@ -31443,7 +32646,7 @@
                 </a:solidFill>
                 <a:latin typeface="Calibri"/>
               </a:rPr>
-              <a:t>Do it now  -  drive a square</a:t>
+              <a:t>Dead reckoning, and what it cannot do</a:t>
             </a:r>
           </a:p>
         </p:txBody>
@@ -31590,14 +32793,212 @@
       </p:sp>
       <p:sp>
         <p:nvSpPr>
-          <p:cNvPr id="6" name="Rounded Rectangle 5"/>
+          <p:cNvPr id="6" name="TextBox 5"/>
+          <p:cNvSpPr txBox="1"/>
+          <p:nvPr/>
+        </p:nvSpPr>
+        <p:spPr>
+          <a:xfrm>
+            <a:off x="502920" y="1188720"/>
+            <a:ext cx="11185855" cy="3986784"/>
+          </a:xfrm>
+          <a:prstGeom prst="rect">
+            <a:avLst/>
+          </a:prstGeom>
+          <a:noFill/>
+        </p:spPr>
+        <p:txBody>
+          <a:bodyPr wrap="square" lIns="0" tIns="0" rIns="0" bIns="0">
+            <a:spAutoFit/>
+          </a:bodyPr>
+          <a:lstStyle/>
+          <a:p>
+            <a:pPr algn="l">
+              <a:lnSpc>
+                <a:spcPct val="100000"/>
+              </a:lnSpc>
+              <a:spcAft>
+                <a:spcPts val="600"/>
+              </a:spcAft>
+              <a:defRPr sz="2000" b="0">
+                <a:solidFill>
+                  <a:srgbClr val="222222"/>
+                </a:solidFill>
+                <a:latin typeface="Calibri"/>
+              </a:defRPr>
+            </a:pPr>
+            <a:r>
+              <a:rPr sz="2000" b="0">
+                <a:solidFill>
+                  <a:srgbClr val="222222"/>
+                </a:solidFill>
+                <a:latin typeface="Calibri"/>
+              </a:rPr>
+              <a:t>DEAD RECKONING is working out where you are from your speed, your heading and the time, with no outside reference at all. Ships and aircraft navigated this way for centuries, and submersibles still do, because GPS does not work underwater.</a:t>
+            </a:r>
+          </a:p>
+          <a:p>
+            <a:pPr algn="l">
+              <a:lnSpc>
+                <a:spcPct val="100000"/>
+              </a:lnSpc>
+              <a:spcAft>
+                <a:spcPts val="600"/>
+              </a:spcAft>
+              <a:defRPr sz="2000" b="0">
+                <a:solidFill>
+                  <a:srgbClr val="222222"/>
+                </a:solidFill>
+                <a:latin typeface="Calibri"/>
+              </a:defRPr>
+            </a:pPr>
+            <a:r>
+              <a:rPr sz="2000" b="0">
+                <a:solidFill>
+                  <a:srgbClr val="222222"/>
+                </a:solidFill>
+                <a:latin typeface="Calibri"/>
+              </a:rPr>
+              <a:t>It DRIFTS. Every small error accumulates and nothing ever corrects it. Yours came from:</a:t>
+            </a:r>
+          </a:p>
+          <a:p>
+            <a:pPr lvl="1" algn="l">
+              <a:lnSpc>
+                <a:spcPct val="100000"/>
+              </a:lnSpc>
+              <a:spcAft>
+                <a:spcPts val="600"/>
+              </a:spcAft>
+              <a:defRPr sz="2000" b="0">
+                <a:solidFill>
+                  <a:srgbClr val="222222"/>
+                </a:solidFill>
+                <a:latin typeface="Calibri"/>
+              </a:defRPr>
+            </a:pPr>
+            <a:r>
+              <a:rPr sz="2000" b="0">
+                <a:solidFill>
+                  <a:srgbClr val="222222"/>
+                </a:solidFill>
+                <a:latin typeface="Calibri"/>
+              </a:rPr>
+              <a:t>Battery charge - a fresher pack drives further</a:t>
+            </a:r>
+          </a:p>
+          <a:p>
+            <a:pPr lvl="1" algn="l">
+              <a:lnSpc>
+                <a:spcPct val="100000"/>
+              </a:lnSpc>
+              <a:spcAft>
+                <a:spcPts val="600"/>
+              </a:spcAft>
+              <a:defRPr sz="2000" b="0">
+                <a:solidFill>
+                  <a:srgbClr val="222222"/>
+                </a:solidFill>
+                <a:latin typeface="Calibri"/>
+              </a:defRPr>
+            </a:pPr>
+            <a:r>
+              <a:rPr sz="2000" b="0">
+                <a:solidFill>
+                  <a:srgbClr val="222222"/>
+                </a:solidFill>
+                <a:latin typeface="Calibri"/>
+              </a:rPr>
+              <a:t>Floor surface - carpet, tile and concrete all differ</a:t>
+            </a:r>
+          </a:p>
+          <a:p>
+            <a:pPr lvl="1" algn="l">
+              <a:lnSpc>
+                <a:spcPct val="100000"/>
+              </a:lnSpc>
+              <a:spcAft>
+                <a:spcPts val="600"/>
+              </a:spcAft>
+              <a:defRPr sz="2000" b="0">
+                <a:solidFill>
+                  <a:srgbClr val="222222"/>
+                </a:solidFill>
+                <a:latin typeface="Calibri"/>
+              </a:defRPr>
+            </a:pPr>
+            <a:r>
+              <a:rPr sz="2000" b="0">
+                <a:solidFill>
+                  <a:srgbClr val="222222"/>
+                </a:solidFill>
+                <a:latin typeface="Calibri"/>
+              </a:rPr>
+              <a:t>Wheel slip in the turns, which skid steering guarantees</a:t>
+            </a:r>
+          </a:p>
+          <a:p>
+            <a:pPr lvl="1" algn="l">
+              <a:lnSpc>
+                <a:spcPct val="100000"/>
+              </a:lnSpc>
+              <a:spcAft>
+                <a:spcPts val="600"/>
+              </a:spcAft>
+              <a:defRPr sz="2000" b="0">
+                <a:solidFill>
+                  <a:srgbClr val="222222"/>
+                </a:solidFill>
+                <a:latin typeface="Calibri"/>
+              </a:defRPr>
+            </a:pPr>
+            <a:r>
+              <a:rPr sz="2000" b="0">
+                <a:solidFill>
+                  <a:srgbClr val="222222"/>
+                </a:solidFill>
+                <a:latin typeface="Calibri"/>
+              </a:rPr>
+              <a:t>Motors not perfectly matched to each other</a:t>
+            </a:r>
+          </a:p>
+          <a:p>
+            <a:pPr algn="l">
+              <a:lnSpc>
+                <a:spcPct val="100000"/>
+              </a:lnSpc>
+              <a:spcAft>
+                <a:spcPts val="600"/>
+              </a:spcAft>
+              <a:defRPr sz="2000" b="0">
+                <a:solidFill>
+                  <a:srgbClr val="222222"/>
+                </a:solidFill>
+                <a:latin typeface="Calibri"/>
+              </a:defRPr>
+            </a:pPr>
+            <a:r>
+              <a:rPr sz="2000" b="0">
+                <a:solidFill>
+                  <a:srgbClr val="222222"/>
+                </a:solidFill>
+                <a:latin typeface="Calibri"/>
+              </a:rPr>
+              <a:t>The fix is a SENSOR that tells you something true about the outside world. That is where the course goes next.</a:t>
+            </a:r>
+          </a:p>
+        </p:txBody>
+      </p:sp>
+      <p:sp>
+        <p:nvSpPr>
+          <p:cNvPr id="7" name="Rounded Rectangle 6"/>
           <p:cNvSpPr/>
           <p:nvPr/>
         </p:nvSpPr>
         <p:spPr>
           <a:xfrm>
-            <a:off x="502920" y="1188720"/>
-            <a:ext cx="11185855" cy="530352"/>
+            <a:off x="502920" y="5303520"/>
+            <a:ext cx="11185855" cy="960120"/>
           </a:xfrm>
           <a:prstGeom prst="roundRect">
             <a:avLst>
@@ -31605,10 +33006,12 @@
             </a:avLst>
           </a:prstGeom>
           <a:solidFill>
-            <a:srgbClr val="0E7C86"/>
+            <a:srgbClr val="FDF3E3"/>
           </a:solidFill>
-          <a:ln>
-            <a:noFill/>
+          <a:ln w="12700">
+            <a:solidFill>
+              <a:srgbClr val="B46A0F"/>
+            </a:solidFill>
           </a:ln>
           <a:effectLst/>
         </p:spPr>
@@ -31627,533 +33030,18 @@
           </a:fontRef>
         </p:style>
         <p:txBody>
-          <a:bodyPr rtlCol="0" anchor="ctr" wrap="square" lIns="182880"/>
+          <a:bodyPr rtlCol="0" anchor="ctr" wrap="square" lIns="164592" rIns="164592" tIns="73152" bIns="73152"/>
           <a:lstStyle/>
           <a:p>
             <a:pPr algn="l"/>
             <a:r>
               <a:rPr sz="1300" b="1">
                 <a:solidFill>
-                  <a:srgbClr val="FFFFFF"/>
-                </a:solidFill>
-                <a:latin typeface="Calibri"/>
-              </a:rPr>
-              <a:t>UPLOAD AND RUN:   </a:t>
-            </a:r>
-            <a:r>
-              <a:rPr sz="1500" b="1">
-                <a:solidFill>
-                  <a:srgbClr val="FFFFFF"/>
-                </a:solidFill>
-                <a:latin typeface="Consolas"/>
-              </a:rPr>
-              <a:t>l2c_maneuver_square</a:t>
-            </a:r>
-            <a:r>
-              <a:rPr sz="1200">
-                <a:solidFill>
-                  <a:srgbClr val="FFFFFF"/>
-                </a:solidFill>
-                <a:latin typeface="Calibri"/>
-              </a:rPr>
-              <a:t>     (30 minutes)</a:t>
-            </a:r>
-          </a:p>
-        </p:txBody>
-      </p:sp>
-      <p:sp>
-        <p:nvSpPr>
-          <p:cNvPr id="7" name="TextBox 6"/>
-          <p:cNvSpPr txBox="1"/>
-          <p:nvPr/>
-        </p:nvSpPr>
-        <p:spPr>
-          <a:xfrm>
-            <a:off x="502920" y="1901952"/>
-            <a:ext cx="6249137" cy="3273552"/>
-          </a:xfrm>
-          <a:prstGeom prst="rect">
-            <a:avLst/>
-          </a:prstGeom>
-          <a:noFill/>
-        </p:spPr>
-        <p:txBody>
-          <a:bodyPr wrap="square" lIns="0" tIns="0" rIns="0" bIns="0">
-            <a:spAutoFit/>
-          </a:bodyPr>
-          <a:lstStyle/>
-          <a:p>
-            <a:pPr algn="l">
-              <a:lnSpc>
-                <a:spcPct val="100000"/>
-              </a:lnSpc>
-              <a:spcAft>
-                <a:spcPts val="400"/>
-              </a:spcAft>
-              <a:defRPr sz="1800" b="0">
-                <a:solidFill>
-                  <a:srgbClr val="222222"/>
-                </a:solidFill>
-                <a:latin typeface="Calibri"/>
-              </a:defRPr>
-            </a:pPr>
-            <a:r>
-              <a:rPr sz="1800" b="0">
-                <a:solidFill>
-                  <a:srgbClr val="222222"/>
-                </a:solidFill>
-                <a:latin typeface="Calibri"/>
-              </a:rPr>
-              <a:t>1.  Clear three meters square. Bags and feet out.</a:t>
-            </a:r>
-          </a:p>
-          <a:p>
-            <a:pPr algn="l">
-              <a:lnSpc>
-                <a:spcPct val="100000"/>
-              </a:lnSpc>
-              <a:spcAft>
-                <a:spcPts val="400"/>
-              </a:spcAft>
-              <a:defRPr sz="1800" b="0">
-                <a:solidFill>
-                  <a:srgbClr val="222222"/>
-                </a:solidFill>
-                <a:latin typeface="Calibri"/>
-              </a:defRPr>
-            </a:pPr>
-            <a:r>
-              <a:rPr sz="1800" b="0">
-                <a:solidFill>
-                  <a:srgbClr val="222222"/>
-                </a:solidFill>
-                <a:latin typeface="Calibri"/>
-              </a:rPr>
-              <a:t>2.  Mark the starting point with tape.</a:t>
-            </a:r>
-          </a:p>
-          <a:p>
-            <a:pPr algn="l">
-              <a:lnSpc>
-                <a:spcPct val="100000"/>
-              </a:lnSpc>
-              <a:spcAft>
-                <a:spcPts val="400"/>
-              </a:spcAft>
-              <a:defRPr sz="1800" b="0">
-                <a:solidFill>
-                  <a:srgbClr val="222222"/>
-                </a:solidFill>
-                <a:latin typeface="Calibri"/>
-              </a:defRPr>
-            </a:pPr>
-            <a:r>
-              <a:rPr sz="1800" b="0">
-                <a:solidFill>
-                  <a:srgbClr val="222222"/>
-                </a:solidFill>
-                <a:latin typeface="Calibri"/>
-              </a:rPr>
-              <a:t>3.  Upload. It waits five seconds, then goes.</a:t>
-            </a:r>
-          </a:p>
-          <a:p>
-            <a:pPr algn="l">
-              <a:lnSpc>
-                <a:spcPct val="100000"/>
-              </a:lnSpc>
-              <a:spcAft>
-                <a:spcPts val="400"/>
-              </a:spcAft>
-              <a:defRPr sz="1800" b="0">
-                <a:solidFill>
-                  <a:srgbClr val="222222"/>
-                </a:solidFill>
-                <a:latin typeface="Calibri"/>
-              </a:defRPr>
-            </a:pPr>
-            <a:r>
-              <a:rPr sz="1800" b="0">
-                <a:solidFill>
-                  <a:srgbClr val="222222"/>
-                </a:solidFill>
-                <a:latin typeface="Calibri"/>
-              </a:rPr>
-              <a:t>4.  MEASURE one side of the square it actually drove.</a:t>
-            </a:r>
-          </a:p>
-          <a:p>
-            <a:pPr algn="l">
-              <a:lnSpc>
-                <a:spcPct val="100000"/>
-              </a:lnSpc>
-              <a:spcAft>
-                <a:spcPts val="400"/>
-              </a:spcAft>
-              <a:defRPr sz="1800" b="0">
-                <a:solidFill>
-                  <a:srgbClr val="222222"/>
-                </a:solidFill>
-                <a:latin typeface="Calibri"/>
-              </a:defRPr>
-            </a:pPr>
-            <a:r>
-              <a:rPr sz="1800" b="0">
-                <a:solidFill>
-                  <a:srgbClr val="222222"/>
-                </a:solidFill>
-                <a:latin typeface="Calibri"/>
-              </a:rPr>
-              <a:t>5.  Speed = side length / (FORWARD_MS / 1000)</a:t>
-            </a:r>
-          </a:p>
-          <a:p>
-            <a:pPr algn="l">
-              <a:lnSpc>
-                <a:spcPct val="100000"/>
-              </a:lnSpc>
-              <a:spcAft>
-                <a:spcPts val="400"/>
-              </a:spcAft>
-              <a:defRPr sz="1800" b="0">
-                <a:solidFill>
-                  <a:srgbClr val="222222"/>
-                </a:solidFill>
-                <a:latin typeface="Calibri"/>
-              </a:defRPr>
-            </a:pPr>
-            <a:r>
-              <a:rPr sz="1800" b="0">
-                <a:solidFill>
-                  <a:srgbClr val="222222"/>
-                </a:solidFill>
-                <a:latin typeface="Calibri"/>
-              </a:rPr>
-              <a:t>6.  The corners will not be 90 degrees. Adjust TURN_MS by 25 ms at a time until it comes back to its tape.</a:t>
-            </a:r>
-          </a:p>
-          <a:p>
-            <a:pPr algn="l">
-              <a:lnSpc>
-                <a:spcPct val="100000"/>
-              </a:lnSpc>
-              <a:spcAft>
-                <a:spcPts val="400"/>
-              </a:spcAft>
-              <a:defRPr sz="1800" b="0">
-                <a:solidFill>
-                  <a:srgbClr val="222222"/>
-                </a:solidFill>
-                <a:latin typeface="Calibri"/>
-              </a:defRPr>
-            </a:pPr>
-            <a:r>
-              <a:rPr sz="1800" b="0">
-                <a:solidFill>
-                  <a:srgbClr val="222222"/>
-                </a:solidFill>
-                <a:latin typeface="Calibri"/>
-              </a:rPr>
-              <a:t>7.  Change FORWARD_MS and PREDICT the new square before you run it. How close were you?</a:t>
-            </a:r>
-          </a:p>
-        </p:txBody>
-      </p:sp>
-      <p:sp>
-        <p:nvSpPr>
-          <p:cNvPr id="8" name="TextBox 7"/>
-          <p:cNvSpPr txBox="1"/>
-          <p:nvPr/>
-        </p:nvSpPr>
-        <p:spPr>
-          <a:xfrm>
-            <a:off x="7163537" y="1901952"/>
-            <a:ext cx="4525238" cy="365760"/>
-          </a:xfrm>
-          <a:prstGeom prst="rect">
-            <a:avLst/>
-          </a:prstGeom>
-          <a:noFill/>
-        </p:spPr>
-        <p:txBody>
-          <a:bodyPr wrap="square" lIns="0" tIns="0" rIns="0" bIns="0">
-            <a:spAutoFit/>
-          </a:bodyPr>
-          <a:lstStyle/>
-          <a:p>
-            <a:pPr algn="l">
-              <a:lnSpc>
-                <a:spcPct val="100000"/>
-              </a:lnSpc>
-              <a:spcAft>
-                <a:spcPts val="200"/>
-              </a:spcAft>
-              <a:defRPr sz="1800" b="1">
-                <a:solidFill>
-                  <a:srgbClr val="0E7C86"/>
-                </a:solidFill>
-                <a:latin typeface="Calibri"/>
-              </a:defRPr>
-            </a:pPr>
-            <a:r>
-              <a:rPr sz="1800" b="1">
-                <a:solidFill>
-                  <a:srgbClr val="0E7C86"/>
-                </a:solidFill>
-                <a:latin typeface="Calibri"/>
-              </a:rPr>
-              <a:t>What you should see</a:t>
-            </a:r>
-          </a:p>
-        </p:txBody>
-      </p:sp>
-      <p:sp>
-        <p:nvSpPr>
-          <p:cNvPr id="9" name="TextBox 8"/>
-          <p:cNvSpPr txBox="1"/>
-          <p:nvPr/>
-        </p:nvSpPr>
-        <p:spPr>
-          <a:xfrm>
-            <a:off x="7163537" y="2304288"/>
-            <a:ext cx="4525238" cy="1049849"/>
-          </a:xfrm>
-          <a:prstGeom prst="rect">
-            <a:avLst/>
-          </a:prstGeom>
-          <a:noFill/>
-        </p:spPr>
-        <p:txBody>
-          <a:bodyPr wrap="square" lIns="0" tIns="0" rIns="0" bIns="0">
-            <a:spAutoFit/>
-          </a:bodyPr>
-          <a:lstStyle/>
-          <a:p>
-            <a:pPr algn="l">
-              <a:lnSpc>
-                <a:spcPct val="100000"/>
-              </a:lnSpc>
-              <a:spcAft>
-                <a:spcPts val="300"/>
-              </a:spcAft>
-              <a:defRPr sz="1900" b="0">
-                <a:solidFill>
-                  <a:srgbClr val="222222"/>
-                </a:solidFill>
-                <a:latin typeface="Calibri"/>
-              </a:defRPr>
-            </a:pPr>
-            <a:r>
-              <a:rPr sz="1900" b="0">
-                <a:solidFill>
-                  <a:srgbClr val="222222"/>
-                </a:solidFill>
-                <a:latin typeface="Calibri"/>
-              </a:rPr>
-              <a:t>Roughly a square. Roughly.</a:t>
-            </a:r>
-          </a:p>
-          <a:p>
-            <a:pPr algn="l">
-              <a:lnSpc>
-                <a:spcPct val="100000"/>
-              </a:lnSpc>
-              <a:spcAft>
-                <a:spcPts val="300"/>
-              </a:spcAft>
-              <a:defRPr sz="1900" b="0">
-                <a:solidFill>
-                  <a:srgbClr val="222222"/>
-                </a:solidFill>
-                <a:latin typeface="Calibri"/>
-              </a:defRPr>
-            </a:pPr>
-            <a:r>
-              <a:rPr sz="1900" b="0">
-                <a:solidFill>
-                  <a:srgbClr val="222222"/>
-                </a:solidFill>
-                <a:latin typeface="Calibri"/>
-              </a:rPr>
-              <a:t>It will not close on the first attempt. That is the point, not a failure.</a:t>
-            </a:r>
-          </a:p>
-        </p:txBody>
-      </p:sp>
-      <p:sp>
-        <p:nvSpPr>
-          <p:cNvPr id="10" name="TextBox 9"/>
-          <p:cNvSpPr txBox="1"/>
-          <p:nvPr/>
-        </p:nvSpPr>
-        <p:spPr>
-          <a:xfrm>
-            <a:off x="7163537" y="3427289"/>
-            <a:ext cx="4525238" cy="365760"/>
-          </a:xfrm>
-          <a:prstGeom prst="rect">
-            <a:avLst/>
-          </a:prstGeom>
-          <a:noFill/>
-        </p:spPr>
-        <p:txBody>
-          <a:bodyPr wrap="square" lIns="0" tIns="0" rIns="0" bIns="0">
-            <a:spAutoFit/>
-          </a:bodyPr>
-          <a:lstStyle/>
-          <a:p>
-            <a:pPr algn="l">
-              <a:lnSpc>
-                <a:spcPct val="100000"/>
-              </a:lnSpc>
-              <a:spcAft>
-                <a:spcPts val="200"/>
-              </a:spcAft>
-              <a:defRPr sz="1800" b="1">
-                <a:solidFill>
-                  <a:srgbClr val="0E7C86"/>
-                </a:solidFill>
-                <a:latin typeface="Calibri"/>
-              </a:defRPr>
-            </a:pPr>
-            <a:r>
-              <a:rPr sz="1800" b="1">
-                <a:solidFill>
-                  <a:srgbClr val="0E7C86"/>
-                </a:solidFill>
-                <a:latin typeface="Calibri"/>
-              </a:rPr>
-              <a:t>Answer these</a:t>
-            </a:r>
-          </a:p>
-        </p:txBody>
-      </p:sp>
-      <p:sp>
-        <p:nvSpPr>
-          <p:cNvPr id="11" name="TextBox 10"/>
-          <p:cNvSpPr txBox="1"/>
-          <p:nvPr/>
-        </p:nvSpPr>
-        <p:spPr>
-          <a:xfrm>
-            <a:off x="7163537" y="3829625"/>
-            <a:ext cx="4525238" cy="1345878"/>
-          </a:xfrm>
-          <a:prstGeom prst="rect">
-            <a:avLst/>
-          </a:prstGeom>
-          <a:noFill/>
-        </p:spPr>
-        <p:txBody>
-          <a:bodyPr wrap="square" lIns="0" tIns="0" rIns="0" bIns="0">
-            <a:spAutoFit/>
-          </a:bodyPr>
-          <a:lstStyle/>
-          <a:p>
-            <a:pPr algn="l">
-              <a:lnSpc>
-                <a:spcPct val="100000"/>
-              </a:lnSpc>
-              <a:spcAft>
-                <a:spcPts val="300"/>
-              </a:spcAft>
-              <a:defRPr sz="1900" b="0">
-                <a:solidFill>
-                  <a:srgbClr val="222222"/>
-                </a:solidFill>
-                <a:latin typeface="Calibri"/>
-              </a:defRPr>
-            </a:pPr>
-            <a:r>
-              <a:rPr sz="1900" b="0">
-                <a:solidFill>
-                  <a:srgbClr val="222222"/>
-                </a:solidFill>
-                <a:latin typeface="Calibri"/>
-              </a:rPr>
-              <a:t>What is your vehicle's speed in feet per second?</a:t>
-            </a:r>
-          </a:p>
-          <a:p>
-            <a:pPr algn="l">
-              <a:lnSpc>
-                <a:spcPct val="100000"/>
-              </a:lnSpc>
-              <a:spcAft>
-                <a:spcPts val="300"/>
-              </a:spcAft>
-              <a:defRPr sz="1900" b="0">
-                <a:solidFill>
-                  <a:srgbClr val="222222"/>
-                </a:solidFill>
-                <a:latin typeface="Calibri"/>
-              </a:defRPr>
-            </a:pPr>
-            <a:r>
-              <a:rPr sz="1900" b="0">
-                <a:solidFill>
-                  <a:srgbClr val="222222"/>
-                </a:solidFill>
-                <a:latin typeface="Calibri"/>
-              </a:rPr>
-              <a:t>What is its turn rate in degrees per second?</a:t>
-            </a:r>
-          </a:p>
-        </p:txBody>
-      </p:sp>
-      <p:sp>
-        <p:nvSpPr>
-          <p:cNvPr id="12" name="Rounded Rectangle 11"/>
-          <p:cNvSpPr/>
-          <p:nvPr/>
-        </p:nvSpPr>
-        <p:spPr>
-          <a:xfrm>
-            <a:off x="502920" y="5303520"/>
-            <a:ext cx="11185855" cy="960120"/>
-          </a:xfrm>
-          <a:prstGeom prst="roundRect">
-            <a:avLst>
-              <a:gd name="adj" fmla="val 4000"/>
-            </a:avLst>
-          </a:prstGeom>
-          <a:solidFill>
-            <a:srgbClr val="FBECEC"/>
-          </a:solidFill>
-          <a:ln w="12700">
-            <a:solidFill>
-              <a:srgbClr val="A32A2A"/>
-            </a:solidFill>
-          </a:ln>
-          <a:effectLst/>
-        </p:spPr>
-        <p:style>
-          <a:lnRef idx="1">
-            <a:schemeClr val="accent1"/>
-          </a:lnRef>
-          <a:fillRef idx="3">
-            <a:schemeClr val="accent1"/>
-          </a:fillRef>
-          <a:effectRef idx="2">
-            <a:schemeClr val="accent1"/>
-          </a:effectRef>
-          <a:fontRef idx="minor">
-            <a:schemeClr val="lt1"/>
-          </a:fontRef>
-        </p:style>
-        <p:txBody>
-          <a:bodyPr rtlCol="0" anchor="ctr" wrap="square" lIns="164592" rIns="164592" tIns="73152" bIns="73152"/>
-          <a:lstStyle/>
-          <a:p>
-            <a:pPr algn="l"/>
-            <a:r>
-              <a:rPr sz="1300" b="1">
-                <a:solidFill>
-                  <a:srgbClr val="A32A2A"/>
-                </a:solidFill>
-                <a:latin typeface="Calibri"/>
-              </a:rPr>
-              <a:t>SAFETY   </a:t>
+                  <a:srgbClr val="B46A0F"/>
+                </a:solidFill>
+                <a:latin typeface="Calibri"/>
+              </a:rPr>
+              <a:t>WATCH OUT   </a:t>
             </a:r>
             <a:r>
               <a:rPr sz="1500">
@@ -32162,7 +33050,7 @@
                 </a:solidFill>
                 <a:latin typeface="Calibri"/>
               </a:rPr>
-              <a:t>This one drives on the floor. Know where your power switch is before you upload.</a:t>
+              <a:t>Recharge the battery and run the same numbers again. The square gets bigger. Nothing in the program changed.</a:t>
             </a:r>
           </a:p>
         </p:txBody>
@@ -32226,7 +33114,7 @@
                 </a:solidFill>
                 <a:latin typeface="Calibri"/>
               </a:rPr>
-              <a:t>Dead reckoning, and what it cannot do</a:t>
+              <a:t>Drag race  -  next lesson and the one after</a:t>
             </a:r>
           </a:p>
         </p:txBody>
@@ -32380,7 +33268,7 @@
         <p:spPr>
           <a:xfrm>
             <a:off x="502920" y="1188720"/>
-            <a:ext cx="11185855" cy="3986784"/>
+            <a:ext cx="11185855" cy="530352"/>
           </a:xfrm>
           <a:prstGeom prst="rect">
             <a:avLst/>
@@ -32400,23 +33288,46 @@
               <a:spcAft>
                 <a:spcPts val="600"/>
               </a:spcAft>
-              <a:defRPr sz="2000" b="0">
-                <a:solidFill>
-                  <a:srgbClr val="222222"/>
-                </a:solidFill>
-                <a:latin typeface="Calibri"/>
-              </a:defRPr>
-            </a:pPr>
-            <a:r>
-              <a:rPr sz="2000" b="0">
-                <a:solidFill>
-                  <a:srgbClr val="222222"/>
-                </a:solidFill>
-                <a:latin typeface="Calibri"/>
-              </a:rPr>
-              <a:t>DEAD RECKONING is working out where you are from your speed, your heading and the time, with no outside reference at all. Ships and aircraft navigated this way for centuries, and submersibles still do, because GPS does not work underwater.</a:t>
-            </a:r>
-          </a:p>
+              <a:defRPr sz="1900" b="1">
+                <a:solidFill>
+                  <a:srgbClr val="0E7C86"/>
+                </a:solidFill>
+                <a:latin typeface="Calibri"/>
+              </a:defRPr>
+            </a:pPr>
+            <a:r>
+              <a:rPr sz="1900" b="1">
+                <a:solidFill>
+                  <a:srgbClr val="0E7C86"/>
+                </a:solidFill>
+                <a:latin typeface="Calibri"/>
+              </a:rPr>
+              <a:t>Calibrate first, then race</a:t>
+            </a:r>
+          </a:p>
+        </p:txBody>
+      </p:sp>
+      <p:sp>
+        <p:nvSpPr>
+          <p:cNvPr id="7" name="TextBox 6"/>
+          <p:cNvSpPr txBox="1"/>
+          <p:nvPr/>
+        </p:nvSpPr>
+        <p:spPr>
+          <a:xfrm>
+            <a:off x="502920" y="1755648"/>
+            <a:ext cx="11185855" cy="4507992"/>
+          </a:xfrm>
+          <a:prstGeom prst="rect">
+            <a:avLst/>
+          </a:prstGeom>
+          <a:noFill/>
+        </p:spPr>
+        <p:txBody>
+          <a:bodyPr wrap="square" lIns="0" tIns="0" rIns="0" bIns="0">
+            <a:spAutoFit/>
+          </a:bodyPr>
+          <a:lstStyle/>
           <a:p>
             <a:pPr algn="l">
               <a:lnSpc>
@@ -32425,122 +33336,113 @@
               <a:spcAft>
                 <a:spcPts val="600"/>
               </a:spcAft>
-              <a:defRPr sz="2000" b="0">
-                <a:solidFill>
-                  <a:srgbClr val="222222"/>
-                </a:solidFill>
-                <a:latin typeface="Calibri"/>
-              </a:defRPr>
-            </a:pPr>
-            <a:r>
-              <a:rPr sz="2000" b="0">
-                <a:solidFill>
-                  <a:srgbClr val="222222"/>
-                </a:solidFill>
-                <a:latin typeface="Calibri"/>
-              </a:rPr>
-              <a:t>It DRIFTS. Every small error accumulates and nothing ever corrects it. Yours came from:</a:t>
-            </a:r>
-          </a:p>
-          <a:p>
-            <a:pPr lvl="1" algn="l">
+              <a:defRPr sz="2100" b="0">
+                <a:solidFill>
+                  <a:srgbClr val="222222"/>
+                </a:solidFill>
+                <a:latin typeface="Calibri"/>
+              </a:defRPr>
+            </a:pPr>
+            <a:r>
+              <a:rPr sz="2100" b="0">
+                <a:solidFill>
+                  <a:srgbClr val="222222"/>
+                </a:solidFill>
+                <a:latin typeface="Calibri"/>
+              </a:rPr>
+              <a:t>Mark a start line and a finish line with tape. Measure the distance.</a:t>
+            </a:r>
+          </a:p>
+          <a:p>
+            <a:pPr algn="l">
               <a:lnSpc>
                 <a:spcPct val="100000"/>
               </a:lnSpc>
               <a:spcAft>
                 <a:spcPts val="600"/>
               </a:spcAft>
-              <a:defRPr sz="2000" b="0">
-                <a:solidFill>
-                  <a:srgbClr val="222222"/>
-                </a:solidFill>
-                <a:latin typeface="Calibri"/>
-              </a:defRPr>
-            </a:pPr>
-            <a:r>
-              <a:rPr sz="2000" b="0">
-                <a:solidFill>
-                  <a:srgbClr val="222222"/>
-                </a:solidFill>
-                <a:latin typeface="Calibri"/>
-              </a:rPr>
-              <a:t>Battery charge - a fresher pack drives further</a:t>
-            </a:r>
-          </a:p>
-          <a:p>
-            <a:pPr lvl="1" algn="l">
+              <a:defRPr sz="2100" b="0">
+                <a:solidFill>
+                  <a:srgbClr val="222222"/>
+                </a:solidFill>
+                <a:latin typeface="Calibri"/>
+              </a:defRPr>
+            </a:pPr>
+            <a:r>
+              <a:rPr sz="2100" b="0">
+                <a:solidFill>
+                  <a:srgbClr val="222222"/>
+                </a:solidFill>
+                <a:latin typeface="Calibri"/>
+              </a:rPr>
+              <a:t>Line up two or three vehicles. Hold the reset button until the start signal, then let go.</a:t>
+            </a:r>
+          </a:p>
+          <a:p>
+            <a:pPr algn="l">
               <a:lnSpc>
                 <a:spcPct val="100000"/>
               </a:lnSpc>
               <a:spcAft>
                 <a:spcPts val="600"/>
               </a:spcAft>
-              <a:defRPr sz="2000" b="0">
-                <a:solidFill>
-                  <a:srgbClr val="222222"/>
-                </a:solidFill>
-                <a:latin typeface="Calibri"/>
-              </a:defRPr>
-            </a:pPr>
-            <a:r>
-              <a:rPr sz="2000" b="0">
-                <a:solidFill>
-                  <a:srgbClr val="222222"/>
-                </a:solidFill>
-                <a:latin typeface="Calibri"/>
-              </a:rPr>
-              <a:t>Floor surface - carpet, tile and concrete all differ</a:t>
-            </a:r>
-          </a:p>
-          <a:p>
-            <a:pPr lvl="1" algn="l">
+              <a:defRPr sz="2100" b="0">
+                <a:solidFill>
+                  <a:srgbClr val="222222"/>
+                </a:solidFill>
+                <a:latin typeface="Calibri"/>
+              </a:defRPr>
+            </a:pPr>
+            <a:r>
+              <a:rPr sz="2100" b="0">
+                <a:solidFill>
+                  <a:srgbClr val="222222"/>
+                </a:solidFill>
+                <a:latin typeface="Calibri"/>
+              </a:rPr>
+              <a:t>Time from start to crossing the line. Speed = distance / time.</a:t>
+            </a:r>
+          </a:p>
+          <a:p>
+            <a:pPr algn="l">
               <a:lnSpc>
                 <a:spcPct val="100000"/>
               </a:lnSpc>
               <a:spcAft>
                 <a:spcPts val="600"/>
               </a:spcAft>
-              <a:defRPr sz="2000" b="0">
-                <a:solidFill>
-                  <a:srgbClr val="222222"/>
-                </a:solidFill>
-                <a:latin typeface="Calibri"/>
-              </a:defRPr>
-            </a:pPr>
-            <a:r>
-              <a:rPr sz="2000" b="0">
-                <a:solidFill>
-                  <a:srgbClr val="222222"/>
-                </a:solidFill>
-                <a:latin typeface="Calibri"/>
-              </a:rPr>
-              <a:t>Wheel slip in the turns, which skid steering guarantees</a:t>
-            </a:r>
-          </a:p>
-          <a:p>
-            <a:pPr lvl="1" algn="l">
+              <a:defRPr sz="2100" b="0">
+                <a:solidFill>
+                  <a:srgbClr val="222222"/>
+                </a:solidFill>
+                <a:latin typeface="Calibri"/>
+              </a:defRPr>
+            </a:pPr>
+            <a:r>
+              <a:rPr sz="2100" b="0">
+                <a:solidFill>
+                  <a:srgbClr val="222222"/>
+                </a:solidFill>
+                <a:latin typeface="Calibri"/>
+              </a:rPr>
+              <a:t>First across the line INSIDE the lane wins. Leaving the lane does not.</a:t>
+            </a:r>
+          </a:p>
+          <a:p>
+            <a:pPr algn="l">
               <a:lnSpc>
                 <a:spcPct val="100000"/>
               </a:lnSpc>
               <a:spcAft>
                 <a:spcPts val="600"/>
               </a:spcAft>
-              <a:defRPr sz="2000" b="0">
-                <a:solidFill>
-                  <a:srgbClr val="222222"/>
-                </a:solidFill>
-                <a:latin typeface="Calibri"/>
-              </a:defRPr>
-            </a:pPr>
-            <a:r>
-              <a:rPr sz="2000" b="0">
-                <a:solidFill>
-                  <a:srgbClr val="222222"/>
-                </a:solidFill>
-                <a:latin typeface="Calibri"/>
-              </a:rPr>
-              <a:t>Motors not perfectly matched to each other</a:t>
-            </a:r>
+              <a:defRPr sz="1050" b="0">
+                <a:solidFill>
+                  <a:srgbClr val="222222"/>
+                </a:solidFill>
+                <a:latin typeface="Calibri"/>
+              </a:defRPr>
+            </a:pPr>
           </a:p>
           <a:p>
             <a:pPr algn="l">
@@ -32550,87 +33452,71 @@
               <a:spcAft>
                 <a:spcPts val="600"/>
               </a:spcAft>
-              <a:defRPr sz="2000" b="0">
-                <a:solidFill>
-                  <a:srgbClr val="222222"/>
-                </a:solidFill>
-                <a:latin typeface="Calibri"/>
-              </a:defRPr>
-            </a:pPr>
-            <a:r>
-              <a:rPr sz="2000" b="0">
-                <a:solidFill>
-                  <a:srgbClr val="222222"/>
-                </a:solidFill>
-                <a:latin typeface="Calibri"/>
-              </a:rPr>
-              <a:t>The fix is a SENSOR that tells you something true about the outside world. That is where the course goes next.</a:t>
-            </a:r>
-          </a:p>
-        </p:txBody>
-      </p:sp>
-      <p:sp>
-        <p:nvSpPr>
-          <p:cNvPr id="7" name="Rounded Rectangle 6"/>
-          <p:cNvSpPr/>
-          <p:nvPr/>
-        </p:nvSpPr>
-        <p:spPr>
-          <a:xfrm>
-            <a:off x="502920" y="5303520"/>
-            <a:ext cx="11185855" cy="960120"/>
-          </a:xfrm>
-          <a:prstGeom prst="roundRect">
-            <a:avLst>
-              <a:gd name="adj" fmla="val 4000"/>
-            </a:avLst>
-          </a:prstGeom>
-          <a:solidFill>
-            <a:srgbClr val="FDF3E3"/>
-          </a:solidFill>
-          <a:ln w="12700">
-            <a:solidFill>
-              <a:srgbClr val="B46A0F"/>
-            </a:solidFill>
-          </a:ln>
-          <a:effectLst/>
-        </p:spPr>
-        <p:style>
-          <a:lnRef idx="1">
-            <a:schemeClr val="accent1"/>
-          </a:lnRef>
-          <a:fillRef idx="3">
-            <a:schemeClr val="accent1"/>
-          </a:fillRef>
-          <a:effectRef idx="2">
-            <a:schemeClr val="accent1"/>
-          </a:effectRef>
-          <a:fontRef idx="minor">
-            <a:schemeClr val="lt1"/>
-          </a:fontRef>
-        </p:style>
-        <p:txBody>
-          <a:bodyPr rtlCol="0" anchor="ctr" wrap="square" lIns="164592" rIns="164592" tIns="73152" bIns="73152"/>
-          <a:lstStyle/>
-          <a:p>
-            <a:pPr algn="l"/>
-            <a:r>
-              <a:rPr sz="1300" b="1">
-                <a:solidFill>
-                  <a:srgbClr val="B46A0F"/>
-                </a:solidFill>
-                <a:latin typeface="Calibri"/>
-              </a:rPr>
-              <a:t>WATCH OUT   </a:t>
-            </a:r>
-            <a:r>
-              <a:rPr sz="1500">
-                <a:solidFill>
-                  <a:srgbClr val="222222"/>
-                </a:solidFill>
-                <a:latin typeface="Calibri"/>
-              </a:rPr>
-              <a:t>Recharge the battery and run the same numbers again. The square gets bigger. Nothing in the program changed.</a:t>
+              <a:defRPr sz="2100" b="0">
+                <a:solidFill>
+                  <a:srgbClr val="222222"/>
+                </a:solidFill>
+                <a:latin typeface="Calibri"/>
+              </a:defRPr>
+            </a:pPr>
+            <a:r>
+              <a:rPr sz="2100" b="0">
+                <a:solidFill>
+                  <a:srgbClr val="222222"/>
+                </a:solidFill>
+                <a:latin typeface="Calibri"/>
+              </a:rPr>
+              <a:t>Calibrate: you now know what duty value 255 gives you in feet per second. Try 200 and 150 as well. Is it a straight line?</a:t>
+            </a:r>
+          </a:p>
+          <a:p>
+            <a:pPr algn="l">
+              <a:lnSpc>
+                <a:spcPct val="100000"/>
+              </a:lnSpc>
+              <a:spcAft>
+                <a:spcPts val="600"/>
+              </a:spcAft>
+              <a:defRPr sz="2100" b="0">
+                <a:solidFill>
+                  <a:srgbClr val="222222"/>
+                </a:solidFill>
+                <a:latin typeface="Calibri"/>
+              </a:defRPr>
+            </a:pPr>
+            <a:r>
+              <a:rPr sz="2100" b="0">
+                <a:solidFill>
+                  <a:srgbClr val="222222"/>
+                </a:solidFill>
+                <a:latin typeface="Calibri"/>
+              </a:rPr>
+              <a:t>If your vehicle pulls to one side, you can add a short turn correction into the program to straighten it.</a:t>
+            </a:r>
+          </a:p>
+          <a:p>
+            <a:pPr algn="l">
+              <a:lnSpc>
+                <a:spcPct val="100000"/>
+              </a:lnSpc>
+              <a:spcAft>
+                <a:spcPts val="600"/>
+              </a:spcAft>
+              <a:defRPr sz="2100" b="0">
+                <a:solidFill>
+                  <a:srgbClr val="222222"/>
+                </a:solidFill>
+                <a:latin typeface="Calibri"/>
+              </a:defRPr>
+            </a:pPr>
+            <a:r>
+              <a:rPr sz="2100" b="0">
+                <a:solidFill>
+                  <a:srgbClr val="222222"/>
+                </a:solidFill>
+                <a:latin typeface="Calibri"/>
+              </a:rPr>
+              <a:t>You can only brake by driving in reverse - try half speed for a short time and see how far it slides.</a:t>
             </a:r>
           </a:p>
         </p:txBody>
@@ -32694,7 +33580,7 @@
                 </a:solidFill>
                 <a:latin typeface="Calibri"/>
               </a:rPr>
-              <a:t>Drag race  -  next lesson and the one after</a:t>
+              <a:t>If you want to go further before the next lesson</a:t>
             </a:r>
           </a:p>
         </p:txBody>
@@ -32848,7 +33734,7 @@
         <p:spPr>
           <a:xfrm>
             <a:off x="502920" y="1188720"/>
-            <a:ext cx="11185855" cy="530352"/>
+            <a:ext cx="5427235" cy="457200"/>
           </a:xfrm>
           <a:prstGeom prst="rect">
             <a:avLst/>
@@ -32882,7 +33768,7 @@
                 </a:solidFill>
                 <a:latin typeface="Calibri"/>
               </a:rPr>
-              <a:t>Calibrate first, then race</a:t>
+              <a:t>Watch</a:t>
             </a:r>
           </a:p>
         </p:txBody>
@@ -32895,8 +33781,8 @@
         </p:nvSpPr>
         <p:spPr>
           <a:xfrm>
-            <a:off x="502920" y="1755648"/>
-            <a:ext cx="11185855" cy="4507992"/>
+            <a:off x="502920" y="1700784"/>
+            <a:ext cx="5427235" cy="3474720"/>
           </a:xfrm>
           <a:prstGeom prst="rect">
             <a:avLst/>
@@ -32914,48 +33800,319 @@
                 <a:spcPct val="100000"/>
               </a:lnSpc>
               <a:spcAft>
+                <a:spcPts val="800"/>
+              </a:spcAft>
+              <a:defRPr sz="1800" b="0">
+                <a:solidFill>
+                  <a:srgbClr val="222222"/>
+                </a:solidFill>
+                <a:latin typeface="Calibri"/>
+              </a:defRPr>
+            </a:pPr>
+            <a:r>
+              <a:rPr sz="1800" b="0">
+                <a:solidFill>
+                  <a:srgbClr val="222222"/>
+                </a:solidFill>
+                <a:latin typeface="Calibri"/>
+              </a:rPr>
+              <a:t>How PWM works, controlling a motor   (10:10)</a:t>
+            </a:r>
+          </a:p>
+          <a:p>
+            <a:pPr lvl="1" algn="l">
+              <a:lnSpc>
+                <a:spcPct val="100000"/>
+              </a:lnSpc>
+              <a:spcAft>
+                <a:spcPts val="800"/>
+              </a:spcAft>
+              <a:defRPr sz="1800" b="0">
+                <a:solidFill>
+                  <a:srgbClr val="222222"/>
+                </a:solidFill>
+                <a:latin typeface="Calibri"/>
+              </a:defRPr>
+            </a:pPr>
+            <a:r>
+              <a:rPr sz="1800" b="0">
+                <a:solidFill>
+                  <a:srgbClr val="222222"/>
+                </a:solidFill>
+                <a:latin typeface="Calibri"/>
+              </a:rPr>
+              <a:t>youtube.com/watch?v=5nwNKPs2gco</a:t>
+            </a:r>
+          </a:p>
+          <a:p>
+            <a:pPr algn="l">
+              <a:lnSpc>
+                <a:spcPct val="100000"/>
+              </a:lnSpc>
+              <a:spcAft>
+                <a:spcPts val="800"/>
+              </a:spcAft>
+              <a:defRPr sz="1800" b="0">
+                <a:solidFill>
+                  <a:srgbClr val="222222"/>
+                </a:solidFill>
+                <a:latin typeface="Calibri"/>
+              </a:defRPr>
+            </a:pPr>
+            <a:r>
+              <a:rPr sz="1800" b="0">
+                <a:solidFill>
+                  <a:srgbClr val="222222"/>
+                </a:solidFill>
+                <a:latin typeface="Calibri"/>
+              </a:rPr>
+              <a:t>Arduino DC motor control   (11:44)</a:t>
+            </a:r>
+          </a:p>
+          <a:p>
+            <a:pPr lvl="1" algn="l">
+              <a:lnSpc>
+                <a:spcPct val="100000"/>
+              </a:lnSpc>
+              <a:spcAft>
+                <a:spcPts val="800"/>
+              </a:spcAft>
+              <a:defRPr sz="1800" b="0">
+                <a:solidFill>
+                  <a:srgbClr val="222222"/>
+                </a:solidFill>
+                <a:latin typeface="Calibri"/>
+              </a:defRPr>
+            </a:pPr>
+            <a:r>
+              <a:rPr sz="1800" b="0">
+                <a:solidFill>
+                  <a:srgbClr val="222222"/>
+                </a:solidFill>
+                <a:latin typeface="Calibri"/>
+              </a:rPr>
+              <a:t>youtube.com/watch?v=HtbCL2NruUY</a:t>
+            </a:r>
+          </a:p>
+          <a:p>
+            <a:pPr algn="l">
+              <a:lnSpc>
+                <a:spcPct val="100000"/>
+              </a:lnSpc>
+              <a:spcAft>
+                <a:spcPts val="800"/>
+              </a:spcAft>
+              <a:defRPr sz="1800" b="0">
+                <a:solidFill>
+                  <a:srgbClr val="222222"/>
+                </a:solidFill>
+                <a:latin typeface="Calibri"/>
+              </a:defRPr>
+            </a:pPr>
+            <a:r>
+              <a:rPr sz="1800" b="0">
+                <a:solidFill>
+                  <a:srgbClr val="222222"/>
+                </a:solidFill>
+                <a:latin typeface="Calibri"/>
+              </a:rPr>
+              <a:t>Motor speed tutorial with PWM motors   (17:33)</a:t>
+            </a:r>
+          </a:p>
+          <a:p>
+            <a:pPr lvl="1" algn="l">
+              <a:lnSpc>
+                <a:spcPct val="100000"/>
+              </a:lnSpc>
+              <a:spcAft>
+                <a:spcPts val="800"/>
+              </a:spcAft>
+              <a:defRPr sz="1800" b="0">
+                <a:solidFill>
+                  <a:srgbClr val="222222"/>
+                </a:solidFill>
+                <a:latin typeface="Calibri"/>
+              </a:defRPr>
+            </a:pPr>
+            <a:r>
+              <a:rPr sz="1800" b="0">
+                <a:solidFill>
+                  <a:srgbClr val="222222"/>
+                </a:solidFill>
+                <a:latin typeface="Calibri"/>
+              </a:rPr>
+              <a:t>youtube.com/watch?v=UPTU6nYSaMo</a:t>
+            </a:r>
+          </a:p>
+          <a:p>
+            <a:pPr algn="l">
+              <a:lnSpc>
+                <a:spcPct val="100000"/>
+              </a:lnSpc>
+              <a:spcAft>
+                <a:spcPts val="800"/>
+              </a:spcAft>
+              <a:defRPr sz="1800" b="0">
+                <a:solidFill>
+                  <a:srgbClr val="222222"/>
+                </a:solidFill>
+                <a:latin typeface="Calibri"/>
+              </a:defRPr>
+            </a:pPr>
+            <a:r>
+              <a:rPr sz="1800" b="0">
+                <a:solidFill>
+                  <a:srgbClr val="222222"/>
+                </a:solidFill>
+                <a:latin typeface="Calibri"/>
+              </a:rPr>
+              <a:t>Loops in C   (video)</a:t>
+            </a:r>
+          </a:p>
+          <a:p>
+            <a:pPr lvl="1" algn="l">
+              <a:lnSpc>
+                <a:spcPct val="100000"/>
+              </a:lnSpc>
+              <a:spcAft>
+                <a:spcPts val="800"/>
+              </a:spcAft>
+              <a:defRPr sz="1800" b="0">
+                <a:solidFill>
+                  <a:srgbClr val="222222"/>
+                </a:solidFill>
+                <a:latin typeface="Calibri"/>
+              </a:defRPr>
+            </a:pPr>
+            <a:r>
+              <a:rPr sz="1800" b="0">
+                <a:solidFill>
+                  <a:srgbClr val="222222"/>
+                </a:solidFill>
+                <a:latin typeface="Calibri"/>
+              </a:rPr>
+              <a:t>youtube.com/watch?v=b4DPj0XAfSg</a:t>
+            </a:r>
+          </a:p>
+        </p:txBody>
+      </p:sp>
+      <p:sp>
+        <p:nvSpPr>
+          <p:cNvPr id="8" name="TextBox 7"/>
+          <p:cNvSpPr txBox="1"/>
+          <p:nvPr/>
+        </p:nvSpPr>
+        <p:spPr>
+          <a:xfrm>
+            <a:off x="6387355" y="1188720"/>
+            <a:ext cx="5301420" cy="457200"/>
+          </a:xfrm>
+          <a:prstGeom prst="rect">
+            <a:avLst/>
+          </a:prstGeom>
+          <a:noFill/>
+        </p:spPr>
+        <p:txBody>
+          <a:bodyPr wrap="square" lIns="0" tIns="0" rIns="0" bIns="0">
+            <a:spAutoFit/>
+          </a:bodyPr>
+          <a:lstStyle/>
+          <a:p>
+            <a:pPr algn="l">
+              <a:lnSpc>
+                <a:spcPct val="100000"/>
+              </a:lnSpc>
+              <a:spcAft>
                 <a:spcPts val="600"/>
               </a:spcAft>
-              <a:defRPr sz="2100" b="0">
-                <a:solidFill>
-                  <a:srgbClr val="222222"/>
-                </a:solidFill>
-                <a:latin typeface="Calibri"/>
-              </a:defRPr>
-            </a:pPr>
-            <a:r>
-              <a:rPr sz="2100" b="0">
-                <a:solidFill>
-                  <a:srgbClr val="222222"/>
-                </a:solidFill>
-                <a:latin typeface="Calibri"/>
-              </a:rPr>
-              <a:t>Mark a start line and a finish line with tape. Measure the distance.</a:t>
-            </a:r>
-          </a:p>
+              <a:defRPr sz="1900" b="1">
+                <a:solidFill>
+                  <a:srgbClr val="0E7C86"/>
+                </a:solidFill>
+                <a:latin typeface="Calibri"/>
+              </a:defRPr>
+            </a:pPr>
+            <a:r>
+              <a:rPr sz="1900" b="1">
+                <a:solidFill>
+                  <a:srgbClr val="0E7C86"/>
+                </a:solidFill>
+                <a:latin typeface="Calibri"/>
+              </a:rPr>
+              <a:t>Read</a:t>
+            </a:r>
+          </a:p>
+        </p:txBody>
+      </p:sp>
+      <p:sp>
+        <p:nvSpPr>
+          <p:cNvPr id="9" name="TextBox 8"/>
+          <p:cNvSpPr txBox="1"/>
+          <p:nvPr/>
+        </p:nvSpPr>
+        <p:spPr>
+          <a:xfrm>
+            <a:off x="6387355" y="1700784"/>
+            <a:ext cx="5301420" cy="3474720"/>
+          </a:xfrm>
+          <a:prstGeom prst="rect">
+            <a:avLst/>
+          </a:prstGeom>
+          <a:noFill/>
+        </p:spPr>
+        <p:txBody>
+          <a:bodyPr wrap="square" lIns="0" tIns="0" rIns="0" bIns="0">
+            <a:spAutoFit/>
+          </a:bodyPr>
+          <a:lstStyle/>
           <a:p>
             <a:pPr algn="l">
               <a:lnSpc>
                 <a:spcPct val="100000"/>
               </a:lnSpc>
               <a:spcAft>
-                <a:spcPts val="600"/>
-              </a:spcAft>
-              <a:defRPr sz="2100" b="0">
-                <a:solidFill>
-                  <a:srgbClr val="222222"/>
-                </a:solidFill>
-                <a:latin typeface="Calibri"/>
-              </a:defRPr>
-            </a:pPr>
-            <a:r>
-              <a:rPr sz="2100" b="0">
-                <a:solidFill>
-                  <a:srgbClr val="222222"/>
-                </a:solidFill>
-                <a:latin typeface="Calibri"/>
-              </a:rPr>
-              <a:t>Line up two or three vehicles. Hold the reset button until the start signal, then let go.</a:t>
+                <a:spcPts val="800"/>
+              </a:spcAft>
+              <a:defRPr sz="1900" b="0">
+                <a:solidFill>
+                  <a:srgbClr val="222222"/>
+                </a:solidFill>
+                <a:latin typeface="Calibri"/>
+              </a:defRPr>
+            </a:pPr>
+            <a:r>
+              <a:rPr sz="1900" b="0">
+                <a:solidFill>
+                  <a:srgbClr val="222222"/>
+                </a:solidFill>
+                <a:latin typeface="Calibri"/>
+              </a:rPr>
+              <a:t>If statements in C</a:t>
+            </a:r>
+          </a:p>
+          <a:p>
+            <a:pPr lvl="1" algn="l">
+              <a:lnSpc>
+                <a:spcPct val="100000"/>
+              </a:lnSpc>
+              <a:spcAft>
+                <a:spcPts val="800"/>
+              </a:spcAft>
+              <a:defRPr sz="1900" b="0">
+                <a:solidFill>
+                  <a:srgbClr val="222222"/>
+                </a:solidFill>
+                <a:latin typeface="Calibri"/>
+              </a:defRPr>
+            </a:pPr>
+            <a:r>
+              <a:rPr sz="1900" b="0">
+                <a:solidFill>
+                  <a:srgbClr val="222222"/>
+                </a:solidFill>
+                <a:latin typeface="Calibri"/>
+              </a:rPr>
+              <a:t>cplusplus.com/doc/tutorial/control/</a:t>
             </a:r>
           </a:p>
           <a:p>
@@ -32964,23 +34121,48 @@
                 <a:spcPct val="100000"/>
               </a:lnSpc>
               <a:spcAft>
-                <a:spcPts val="600"/>
-              </a:spcAft>
-              <a:defRPr sz="2100" b="0">
-                <a:solidFill>
-                  <a:srgbClr val="222222"/>
-                </a:solidFill>
-                <a:latin typeface="Calibri"/>
-              </a:defRPr>
-            </a:pPr>
-            <a:r>
-              <a:rPr sz="2100" b="0">
-                <a:solidFill>
-                  <a:srgbClr val="222222"/>
-                </a:solidFill>
-                <a:latin typeface="Calibri"/>
-              </a:rPr>
-              <a:t>Time from start to crossing the line. Speed = distance / time.</a:t>
+                <a:spcPts val="800"/>
+              </a:spcAft>
+              <a:defRPr sz="1900" b="0">
+                <a:solidFill>
+                  <a:srgbClr val="222222"/>
+                </a:solidFill>
+                <a:latin typeface="Calibri"/>
+              </a:defRPr>
+            </a:pPr>
+            <a:r>
+              <a:rPr sz="1900" b="0">
+                <a:solidFill>
+                  <a:srgbClr val="222222"/>
+                </a:solidFill>
+                <a:latin typeface="Calibri"/>
+              </a:rPr>
+              <a:t>Loops in C, worked through properly</a:t>
+            </a:r>
+          </a:p>
+          <a:p>
+            <a:pPr lvl="1" algn="l">
+              <a:lnSpc>
+                <a:spcPct val="100000"/>
+              </a:lnSpc>
+              <a:spcAft>
+                <a:spcPts val="800"/>
+              </a:spcAft>
+              <a:defRPr sz="1900" b="0">
+                <a:solidFill>
+                  <a:srgbClr val="222222"/>
+                </a:solidFill>
+                <a:latin typeface="Calibri"/>
+              </a:defRPr>
+            </a:pPr>
+            <a:r>
+              <a:rPr sz="1900" b="0">
+                <a:solidFill>
+                  <a:srgbClr val="222222"/>
+                </a:solidFill>
+                <a:latin typeface="Calibri"/>
+              </a:rPr>
+              <a:t>geeksforgeeks.org/c/c-loops/</a:t>
             </a:r>
           </a:p>
           <a:p>
@@ -32989,23 +34171,48 @@
                 <a:spcPct val="100000"/>
               </a:lnSpc>
               <a:spcAft>
-                <a:spcPts val="600"/>
-              </a:spcAft>
-              <a:defRPr sz="2100" b="0">
-                <a:solidFill>
-                  <a:srgbClr val="222222"/>
-                </a:solidFill>
-                <a:latin typeface="Calibri"/>
-              </a:defRPr>
-            </a:pPr>
-            <a:r>
-              <a:rPr sz="2100" b="0">
-                <a:solidFill>
-                  <a:srgbClr val="222222"/>
-                </a:solidFill>
-                <a:latin typeface="Calibri"/>
-              </a:rPr>
-              <a:t>First across the line INSIDE the lane wins. Leaving the lane does not.</a:t>
+                <a:spcPts val="800"/>
+              </a:spcAft>
+              <a:defRPr sz="1900" b="0">
+                <a:solidFill>
+                  <a:srgbClr val="222222"/>
+                </a:solidFill>
+                <a:latin typeface="Calibri"/>
+              </a:defRPr>
+            </a:pPr>
+            <a:r>
+              <a:rPr sz="1900" b="0">
+                <a:solidFill>
+                  <a:srgbClr val="222222"/>
+                </a:solidFill>
+                <a:latin typeface="Calibri"/>
+              </a:rPr>
+              <a:t>Functions</a:t>
+            </a:r>
+          </a:p>
+          <a:p>
+            <a:pPr lvl="1" algn="l">
+              <a:lnSpc>
+                <a:spcPct val="100000"/>
+              </a:lnSpc>
+              <a:spcAft>
+                <a:spcPts val="800"/>
+              </a:spcAft>
+              <a:defRPr sz="1900" b="0">
+                <a:solidFill>
+                  <a:srgbClr val="222222"/>
+                </a:solidFill>
+                <a:latin typeface="Calibri"/>
+              </a:defRPr>
+            </a:pPr>
+            <a:r>
+              <a:rPr sz="1900" b="0">
+                <a:solidFill>
+                  <a:srgbClr val="222222"/>
+                </a:solidFill>
+                <a:latin typeface="Calibri"/>
+              </a:rPr>
+              <a:t>cplusplus.com/doc/tutorial/functions/</a:t>
             </a:r>
           </a:p>
           <a:p>
@@ -33014,89 +34221,89 @@
                 <a:spcPct val="100000"/>
               </a:lnSpc>
               <a:spcAft>
-                <a:spcPts val="600"/>
-              </a:spcAft>
-              <a:defRPr sz="1050" b="0">
-                <a:solidFill>
-                  <a:srgbClr val="222222"/>
-                </a:solidFill>
-                <a:latin typeface="Calibri"/>
-              </a:defRPr>
-            </a:pPr>
-          </a:p>
-          <a:p>
-            <a:pPr algn="l">
-              <a:lnSpc>
-                <a:spcPct val="100000"/>
-              </a:lnSpc>
-              <a:spcAft>
-                <a:spcPts val="600"/>
-              </a:spcAft>
-              <a:defRPr sz="2100" b="0">
-                <a:solidFill>
-                  <a:srgbClr val="222222"/>
-                </a:solidFill>
-                <a:latin typeface="Calibri"/>
-              </a:defRPr>
-            </a:pPr>
-            <a:r>
-              <a:rPr sz="2100" b="0">
-                <a:solidFill>
-                  <a:srgbClr val="222222"/>
-                </a:solidFill>
-                <a:latin typeface="Calibri"/>
-              </a:rPr>
-              <a:t>Calibrate: you now know what duty value 255 gives you in feet per second. Try 200 and 150 as well. Is it a straight line?</a:t>
-            </a:r>
-          </a:p>
-          <a:p>
-            <a:pPr algn="l">
-              <a:lnSpc>
-                <a:spcPct val="100000"/>
-              </a:lnSpc>
-              <a:spcAft>
-                <a:spcPts val="600"/>
-              </a:spcAft>
-              <a:defRPr sz="2100" b="0">
-                <a:solidFill>
-                  <a:srgbClr val="222222"/>
-                </a:solidFill>
-                <a:latin typeface="Calibri"/>
-              </a:defRPr>
-            </a:pPr>
-            <a:r>
-              <a:rPr sz="2100" b="0">
-                <a:solidFill>
-                  <a:srgbClr val="222222"/>
-                </a:solidFill>
-                <a:latin typeface="Calibri"/>
-              </a:rPr>
-              <a:t>If your vehicle pulls to one side, you can add a short turn correction into the program to straighten it.</a:t>
-            </a:r>
-          </a:p>
-          <a:p>
-            <a:pPr algn="l">
-              <a:lnSpc>
-                <a:spcPct val="100000"/>
-              </a:lnSpc>
-              <a:spcAft>
-                <a:spcPts val="600"/>
-              </a:spcAft>
-              <a:defRPr sz="2100" b="0">
-                <a:solidFill>
-                  <a:srgbClr val="222222"/>
-                </a:solidFill>
-                <a:latin typeface="Calibri"/>
-              </a:defRPr>
-            </a:pPr>
-            <a:r>
-              <a:rPr sz="2100" b="0">
-                <a:solidFill>
-                  <a:srgbClr val="222222"/>
-                </a:solidFill>
-                <a:latin typeface="Calibri"/>
-              </a:rPr>
-              <a:t>You can only brake by driving in reverse - try half speed for a short time and see how far it slides.</a:t>
+                <a:spcPts val="800"/>
+              </a:spcAft>
+              <a:defRPr sz="1900" b="0">
+                <a:solidFill>
+                  <a:srgbClr val="222222"/>
+                </a:solidFill>
+                <a:latin typeface="Calibri"/>
+              </a:defRPr>
+            </a:pPr>
+            <a:r>
+              <a:rPr sz="1900" b="0">
+                <a:solidFill>
+                  <a:srgbClr val="222222"/>
+                </a:solidFill>
+                <a:latin typeface="Calibri"/>
+              </a:rPr>
+              <a:t>All of this is optional and none of it is examined.</a:t>
+            </a:r>
+          </a:p>
+        </p:txBody>
+      </p:sp>
+      <p:sp>
+        <p:nvSpPr>
+          <p:cNvPr id="10" name="Rounded Rectangle 9"/>
+          <p:cNvSpPr/>
+          <p:nvPr/>
+        </p:nvSpPr>
+        <p:spPr>
+          <a:xfrm>
+            <a:off x="502920" y="5303520"/>
+            <a:ext cx="11185855" cy="960120"/>
+          </a:xfrm>
+          <a:prstGeom prst="roundRect">
+            <a:avLst>
+              <a:gd name="adj" fmla="val 4000"/>
+            </a:avLst>
+          </a:prstGeom>
+          <a:solidFill>
+            <a:srgbClr val="EEF3F8"/>
+          </a:solidFill>
+          <a:ln w="12700">
+            <a:solidFill>
+              <a:srgbClr val="0E7C86"/>
+            </a:solidFill>
+          </a:ln>
+          <a:effectLst/>
+        </p:spPr>
+        <p:style>
+          <a:lnRef idx="1">
+            <a:schemeClr val="accent1"/>
+          </a:lnRef>
+          <a:fillRef idx="3">
+            <a:schemeClr val="accent1"/>
+          </a:fillRef>
+          <a:effectRef idx="2">
+            <a:schemeClr val="accent1"/>
+          </a:effectRef>
+          <a:fontRef idx="minor">
+            <a:schemeClr val="lt1"/>
+          </a:fontRef>
+        </p:style>
+        <p:txBody>
+          <a:bodyPr rtlCol="0" anchor="ctr" wrap="square" lIns="164592" rIns="164592" tIns="73152" bIns="73152"/>
+          <a:lstStyle/>
+          <a:p>
+            <a:pPr algn="l"/>
+            <a:r>
+              <a:rPr sz="1300" b="1">
+                <a:solidFill>
+                  <a:srgbClr val="0E7C86"/>
+                </a:solidFill>
+                <a:latin typeface="Calibri"/>
+              </a:rPr>
+              <a:t>KEY POINT   </a:t>
+            </a:r>
+            <a:r>
+              <a:rPr sz="1500">
+                <a:solidFill>
+                  <a:srgbClr val="222222"/>
+                </a:solidFill>
+                <a:latin typeface="Calibri"/>
+              </a:rPr>
+              <a:t>Watch the PWM video before Lesson 3 if today felt fast. It covers the same ground more slowly, and with an oscilloscope.</a:t>
             </a:r>
           </a:p>
         </p:txBody>
@@ -33160,7 +34367,7 @@
                 </a:solidFill>
                 <a:latin typeface="Calibri"/>
               </a:rPr>
-              <a:t>If you want to go further before the next lesson</a:t>
+              <a:t>Check yourself</a:t>
             </a:r>
           </a:p>
         </p:txBody>
@@ -33314,7 +34521,7 @@
         <p:spPr>
           <a:xfrm>
             <a:off x="502920" y="1188720"/>
-            <a:ext cx="5427235" cy="457200"/>
+            <a:ext cx="11185855" cy="411480"/>
           </a:xfrm>
           <a:prstGeom prst="rect">
             <a:avLst/>
@@ -33334,21 +34541,21 @@
               <a:spcAft>
                 <a:spcPts val="600"/>
               </a:spcAft>
-              <a:defRPr sz="1900" b="1">
-                <a:solidFill>
-                  <a:srgbClr val="0E7C86"/>
-                </a:solidFill>
-                <a:latin typeface="Calibri"/>
-              </a:defRPr>
-            </a:pPr>
-            <a:r>
-              <a:rPr sz="1900" b="1">
-                <a:solidFill>
-                  <a:srgbClr val="0E7C86"/>
-                </a:solidFill>
-                <a:latin typeface="Calibri"/>
-              </a:rPr>
-              <a:t>Watch</a:t>
+              <a:defRPr sz="1600" b="0">
+                <a:solidFill>
+                  <a:srgbClr val="666666"/>
+                </a:solidFill>
+                <a:latin typeface="Calibri"/>
+              </a:defRPr>
+            </a:pPr>
+            <a:r>
+              <a:rPr sz="1600" b="0">
+                <a:solidFill>
+                  <a:srgbClr val="666666"/>
+                </a:solidFill>
+                <a:latin typeface="Calibri"/>
+              </a:rPr>
+              <a:t>Next lesson: you get to drive it yourself.</a:t>
             </a:r>
           </a:p>
         </p:txBody>
@@ -33361,8 +34568,8 @@
         </p:nvSpPr>
         <p:spPr>
           <a:xfrm>
-            <a:off x="502920" y="1700784"/>
-            <a:ext cx="5427235" cy="3474720"/>
+            <a:off x="502920" y="1664208"/>
+            <a:ext cx="11185855" cy="4599432"/>
           </a:xfrm>
           <a:prstGeom prst="rect">
             <a:avLst/>
@@ -33380,48 +34587,23 @@
                 <a:spcPct val="100000"/>
               </a:lnSpc>
               <a:spcAft>
-                <a:spcPts val="800"/>
-              </a:spcAft>
-              <a:defRPr sz="1800" b="0">
-                <a:solidFill>
-                  <a:srgbClr val="222222"/>
-                </a:solidFill>
-                <a:latin typeface="Calibri"/>
-              </a:defRPr>
-            </a:pPr>
-            <a:r>
-              <a:rPr sz="1800" b="0">
-                <a:solidFill>
-                  <a:srgbClr val="222222"/>
-                </a:solidFill>
-                <a:latin typeface="Calibri"/>
-              </a:rPr>
-              <a:t>How PWM works, controlling a motor   (10:10)</a:t>
-            </a:r>
-          </a:p>
-          <a:p>
-            <a:pPr lvl="1" algn="l">
-              <a:lnSpc>
-                <a:spcPct val="100000"/>
-              </a:lnSpc>
-              <a:spcAft>
-                <a:spcPts val="800"/>
-              </a:spcAft>
-              <a:defRPr sz="1800" b="0">
-                <a:solidFill>
-                  <a:srgbClr val="222222"/>
-                </a:solidFill>
-                <a:latin typeface="Calibri"/>
-              </a:defRPr>
-            </a:pPr>
-            <a:r>
-              <a:rPr sz="1800" b="0">
-                <a:solidFill>
-                  <a:srgbClr val="222222"/>
-                </a:solidFill>
-                <a:latin typeface="Calibri"/>
-              </a:rPr>
-              <a:t>youtube.com/watch?v=5nwNKPs2gco</a:t>
+                <a:spcPts val="1100"/>
+              </a:spcAft>
+              <a:defRPr sz="1900" b="0">
+                <a:solidFill>
+                  <a:srgbClr val="222222"/>
+                </a:solidFill>
+                <a:latin typeface="Calibri"/>
+              </a:defRPr>
+            </a:pPr>
+            <a:r>
+              <a:rPr sz="1900" b="0">
+                <a:solidFill>
+                  <a:srgbClr val="222222"/>
+                </a:solidFill>
+                <a:latin typeface="Calibri"/>
+              </a:rPr>
+              <a:t>1.  Why does each motor need two pins instead of one?</a:t>
             </a:r>
           </a:p>
           <a:p>
@@ -33430,48 +34612,23 @@
                 <a:spcPct val="100000"/>
               </a:lnSpc>
               <a:spcAft>
-                <a:spcPts val="800"/>
-              </a:spcAft>
-              <a:defRPr sz="1800" b="0">
-                <a:solidFill>
-                  <a:srgbClr val="222222"/>
-                </a:solidFill>
-                <a:latin typeface="Calibri"/>
-              </a:defRPr>
-            </a:pPr>
-            <a:r>
-              <a:rPr sz="1800" b="0">
-                <a:solidFill>
-                  <a:srgbClr val="222222"/>
-                </a:solidFill>
-                <a:latin typeface="Calibri"/>
-              </a:rPr>
-              <a:t>Arduino DC motor control   (11:44)</a:t>
-            </a:r>
-          </a:p>
-          <a:p>
-            <a:pPr lvl="1" algn="l">
-              <a:lnSpc>
-                <a:spcPct val="100000"/>
-              </a:lnSpc>
-              <a:spcAft>
-                <a:spcPts val="800"/>
-              </a:spcAft>
-              <a:defRPr sz="1800" b="0">
-                <a:solidFill>
-                  <a:srgbClr val="222222"/>
-                </a:solidFill>
-                <a:latin typeface="Calibri"/>
-              </a:defRPr>
-            </a:pPr>
-            <a:r>
-              <a:rPr sz="1800" b="0">
-                <a:solidFill>
-                  <a:srgbClr val="222222"/>
-                </a:solidFill>
-                <a:latin typeface="Calibri"/>
-              </a:rPr>
-              <a:t>youtube.com/watch?v=HtbCL2NruUY</a:t>
+                <a:spcPts val="1100"/>
+              </a:spcAft>
+              <a:defRPr sz="1900" b="0">
+                <a:solidFill>
+                  <a:srgbClr val="222222"/>
+                </a:solidFill>
+                <a:latin typeface="Calibri"/>
+              </a:defRPr>
+            </a:pPr>
+            <a:r>
+              <a:rPr sz="1900" b="0">
+                <a:solidFill>
+                  <a:srgbClr val="222222"/>
+                </a:solidFill>
+                <a:latin typeface="Calibri"/>
+              </a:rPr>
+              <a:t>2.  A pin can only be on or off. Explain in one sentence how the vehicle gets a half speed.</a:t>
             </a:r>
           </a:p>
           <a:p>
@@ -33480,48 +34637,23 @@
                 <a:spcPct val="100000"/>
               </a:lnSpc>
               <a:spcAft>
-                <a:spcPts val="800"/>
-              </a:spcAft>
-              <a:defRPr sz="1800" b="0">
-                <a:solidFill>
-                  <a:srgbClr val="222222"/>
-                </a:solidFill>
-                <a:latin typeface="Calibri"/>
-              </a:defRPr>
-            </a:pPr>
-            <a:r>
-              <a:rPr sz="1800" b="0">
-                <a:solidFill>
-                  <a:srgbClr val="222222"/>
-                </a:solidFill>
-                <a:latin typeface="Calibri"/>
-              </a:rPr>
-              <a:t>Motor speed tutorial with PWM motors   (17:33)</a:t>
-            </a:r>
-          </a:p>
-          <a:p>
-            <a:pPr lvl="1" algn="l">
-              <a:lnSpc>
-                <a:spcPct val="100000"/>
-              </a:lnSpc>
-              <a:spcAft>
-                <a:spcPts val="800"/>
-              </a:spcAft>
-              <a:defRPr sz="1800" b="0">
-                <a:solidFill>
-                  <a:srgbClr val="222222"/>
-                </a:solidFill>
-                <a:latin typeface="Calibri"/>
-              </a:defRPr>
-            </a:pPr>
-            <a:r>
-              <a:rPr sz="1800" b="0">
-                <a:solidFill>
-                  <a:srgbClr val="222222"/>
-                </a:solidFill>
-                <a:latin typeface="Calibri"/>
-              </a:rPr>
-              <a:t>youtube.com/watch?v=UPTU6nYSaMo</a:t>
+                <a:spcPts val="1100"/>
+              </a:spcAft>
+              <a:defRPr sz="1900" b="0">
+                <a:solidFill>
+                  <a:srgbClr val="222222"/>
+                </a:solidFill>
+                <a:latin typeface="Calibri"/>
+              </a:defRPr>
+            </a:pPr>
+            <a:r>
+              <a:rPr sz="1900" b="0">
+                <a:solidFill>
+                  <a:srgbClr val="222222"/>
+                </a:solidFill>
+                <a:latin typeface="Calibri"/>
+              </a:rPr>
+              <a:t>3.  What duty value is 25% of full power at 8-bit resolution?</a:t>
             </a:r>
           </a:p>
           <a:p>
@@ -33530,128 +34662,57 @@
                 <a:spcPct val="100000"/>
               </a:lnSpc>
               <a:spcAft>
-                <a:spcPts val="800"/>
-              </a:spcAft>
-              <a:defRPr sz="1800" b="0">
-                <a:solidFill>
-                  <a:srgbClr val="222222"/>
-                </a:solidFill>
-                <a:latin typeface="Calibri"/>
-              </a:defRPr>
-            </a:pPr>
-            <a:r>
-              <a:rPr sz="1800" b="0">
-                <a:solidFill>
-                  <a:srgbClr val="222222"/>
-                </a:solidFill>
-                <a:latin typeface="Calibri"/>
-              </a:rPr>
-              <a:t>Loops in C   (video)</a:t>
-            </a:r>
-          </a:p>
-          <a:p>
-            <a:pPr lvl="1" algn="l">
-              <a:lnSpc>
-                <a:spcPct val="100000"/>
-              </a:lnSpc>
-              <a:spcAft>
-                <a:spcPts val="800"/>
-              </a:spcAft>
-              <a:defRPr sz="1800" b="0">
-                <a:solidFill>
-                  <a:srgbClr val="222222"/>
-                </a:solidFill>
-                <a:latin typeface="Calibri"/>
-              </a:defRPr>
-            </a:pPr>
-            <a:r>
-              <a:rPr sz="1800" b="0">
-                <a:solidFill>
-                  <a:srgbClr val="222222"/>
-                </a:solidFill>
-                <a:latin typeface="Calibri"/>
-              </a:rPr>
-              <a:t>youtube.com/watch?v=b4DPj0XAfSg</a:t>
-            </a:r>
-          </a:p>
-        </p:txBody>
-      </p:sp>
-      <p:sp>
-        <p:nvSpPr>
-          <p:cNvPr id="8" name="TextBox 7"/>
-          <p:cNvSpPr txBox="1"/>
-          <p:nvPr/>
-        </p:nvSpPr>
-        <p:spPr>
-          <a:xfrm>
-            <a:off x="6387355" y="1188720"/>
-            <a:ext cx="5301420" cy="457200"/>
-          </a:xfrm>
-          <a:prstGeom prst="rect">
-            <a:avLst/>
-          </a:prstGeom>
-          <a:noFill/>
-        </p:spPr>
-        <p:txBody>
-          <a:bodyPr wrap="square" lIns="0" tIns="0" rIns="0" bIns="0">
-            <a:spAutoFit/>
-          </a:bodyPr>
-          <a:lstStyle/>
+                <a:spcPts val="1100"/>
+              </a:spcAft>
+              <a:defRPr sz="1900" b="0">
+                <a:solidFill>
+                  <a:srgbClr val="222222"/>
+                </a:solidFill>
+                <a:latin typeface="Calibri"/>
+              </a:defRPr>
+            </a:pPr>
+            <a:r>
+              <a:rPr sz="1900" b="0">
+                <a:solidFill>
+                  <a:srgbClr val="222222"/>
+                </a:solidFill>
+                <a:latin typeface="Calibri"/>
+              </a:rPr>
+              <a:t>4.  Why do we switch at 20 kHz rather than 300 Hz?</a:t>
+            </a:r>
+          </a:p>
           <a:p>
             <a:pPr algn="l">
               <a:lnSpc>
                 <a:spcPct val="100000"/>
               </a:lnSpc>
               <a:spcAft>
-                <a:spcPts val="600"/>
-              </a:spcAft>
-              <a:defRPr sz="1900" b="1">
-                <a:solidFill>
-                  <a:srgbClr val="0E7C86"/>
-                </a:solidFill>
-                <a:latin typeface="Calibri"/>
-              </a:defRPr>
-            </a:pPr>
-            <a:r>
-              <a:rPr sz="1900" b="1">
-                <a:solidFill>
-                  <a:srgbClr val="0E7C86"/>
-                </a:solidFill>
-                <a:latin typeface="Calibri"/>
-              </a:rPr>
-              <a:t>Read</a:t>
-            </a:r>
-          </a:p>
-        </p:txBody>
-      </p:sp>
-      <p:sp>
-        <p:nvSpPr>
-          <p:cNvPr id="9" name="TextBox 8"/>
-          <p:cNvSpPr txBox="1"/>
-          <p:nvPr/>
-        </p:nvSpPr>
-        <p:spPr>
-          <a:xfrm>
-            <a:off x="6387355" y="1700784"/>
-            <a:ext cx="5301420" cy="3474720"/>
-          </a:xfrm>
-          <a:prstGeom prst="rect">
-            <a:avLst/>
-          </a:prstGeom>
-          <a:noFill/>
-        </p:spPr>
-        <p:txBody>
-          <a:bodyPr wrap="square" lIns="0" tIns="0" rIns="0" bIns="0">
-            <a:spAutoFit/>
-          </a:bodyPr>
-          <a:lstStyle/>
+                <a:spcPts val="1100"/>
+              </a:spcAft>
+              <a:defRPr sz="1900" b="0">
+                <a:solidFill>
+                  <a:srgbClr val="222222"/>
+                </a:solidFill>
+                <a:latin typeface="Calibri"/>
+              </a:defRPr>
+            </a:pPr>
+            <a:r>
+              <a:rPr sz="1900" b="0">
+                <a:solidFill>
+                  <a:srgbClr val="222222"/>
+                </a:solidFill>
+                <a:latin typeface="Calibri"/>
+              </a:rPr>
+              <a:t>5.  The left wheels get 200 and the right wheels get -200. What does the vehicle do?</a:t>
+            </a:r>
+          </a:p>
           <a:p>
             <a:pPr algn="l">
               <a:lnSpc>
                 <a:spcPct val="100000"/>
               </a:lnSpc>
               <a:spcAft>
-                <a:spcPts val="800"/>
+                <a:spcPts val="1100"/>
               </a:spcAft>
               <a:defRPr sz="1900" b="0">
                 <a:solidFill>
@@ -33667,16 +34728,16 @@
                 </a:solidFill>
                 <a:latin typeface="Calibri"/>
               </a:rPr>
-              <a:t>If statements in C</a:t>
-            </a:r>
-          </a:p>
-          <a:p>
-            <a:pPr lvl="1" algn="l">
-              <a:lnSpc>
-                <a:spcPct val="100000"/>
-              </a:lnSpc>
-              <a:spcAft>
-                <a:spcPts val="800"/>
+              <a:t>6.  Your wheel is 3 inches across. How far does the vehicle travel in one wheel turn?</a:t>
+            </a:r>
+          </a:p>
+          <a:p>
+            <a:pPr algn="l">
+              <a:lnSpc>
+                <a:spcPct val="100000"/>
+              </a:lnSpc>
+              <a:spcAft>
+                <a:spcPts val="1100"/>
               </a:spcAft>
               <a:defRPr sz="1900" b="0">
                 <a:solidFill>
@@ -33692,7 +34753,7 @@
                 </a:solidFill>
                 <a:latin typeface="Calibri"/>
               </a:rPr>
-              <a:t>cplusplus.com/doc/tutorial/control/</a:t>
+              <a:t>7.  Your square comes out as a rectangle. Which number is wrong, and which way should you change it?</a:t>
             </a:r>
           </a:p>
           <a:p>
@@ -33701,7 +34762,7 @@
                 <a:spcPct val="100000"/>
               </a:lnSpc>
               <a:spcAft>
-                <a:spcPts val="800"/>
+                <a:spcPts val="1100"/>
               </a:spcAft>
               <a:defRPr sz="1900" b="0">
                 <a:solidFill>
@@ -33717,173 +34778,7 @@
                 </a:solidFill>
                 <a:latin typeface="Calibri"/>
               </a:rPr>
-              <a:t>Loops in C, worked through properly</a:t>
-            </a:r>
-          </a:p>
-          <a:p>
-            <a:pPr lvl="1" algn="l">
-              <a:lnSpc>
-                <a:spcPct val="100000"/>
-              </a:lnSpc>
-              <a:spcAft>
-                <a:spcPts val="800"/>
-              </a:spcAft>
-              <a:defRPr sz="1900" b="0">
-                <a:solidFill>
-                  <a:srgbClr val="222222"/>
-                </a:solidFill>
-                <a:latin typeface="Calibri"/>
-              </a:defRPr>
-            </a:pPr>
-            <a:r>
-              <a:rPr sz="1900" b="0">
-                <a:solidFill>
-                  <a:srgbClr val="222222"/>
-                </a:solidFill>
-                <a:latin typeface="Calibri"/>
-              </a:rPr>
-              <a:t>geeksforgeeks.org/c/c-loops/</a:t>
-            </a:r>
-          </a:p>
-          <a:p>
-            <a:pPr algn="l">
-              <a:lnSpc>
-                <a:spcPct val="100000"/>
-              </a:lnSpc>
-              <a:spcAft>
-                <a:spcPts val="800"/>
-              </a:spcAft>
-              <a:defRPr sz="1900" b="0">
-                <a:solidFill>
-                  <a:srgbClr val="222222"/>
-                </a:solidFill>
-                <a:latin typeface="Calibri"/>
-              </a:defRPr>
-            </a:pPr>
-            <a:r>
-              <a:rPr sz="1900" b="0">
-                <a:solidFill>
-                  <a:srgbClr val="222222"/>
-                </a:solidFill>
-                <a:latin typeface="Calibri"/>
-              </a:rPr>
-              <a:t>Functions</a:t>
-            </a:r>
-          </a:p>
-          <a:p>
-            <a:pPr lvl="1" algn="l">
-              <a:lnSpc>
-                <a:spcPct val="100000"/>
-              </a:lnSpc>
-              <a:spcAft>
-                <a:spcPts val="800"/>
-              </a:spcAft>
-              <a:defRPr sz="1900" b="0">
-                <a:solidFill>
-                  <a:srgbClr val="222222"/>
-                </a:solidFill>
-                <a:latin typeface="Calibri"/>
-              </a:defRPr>
-            </a:pPr>
-            <a:r>
-              <a:rPr sz="1900" b="0">
-                <a:solidFill>
-                  <a:srgbClr val="222222"/>
-                </a:solidFill>
-                <a:latin typeface="Calibri"/>
-              </a:rPr>
-              <a:t>cplusplus.com/doc/tutorial/functions/</a:t>
-            </a:r>
-          </a:p>
-          <a:p>
-            <a:pPr algn="l">
-              <a:lnSpc>
-                <a:spcPct val="100000"/>
-              </a:lnSpc>
-              <a:spcAft>
-                <a:spcPts val="800"/>
-              </a:spcAft>
-              <a:defRPr sz="1900" b="0">
-                <a:solidFill>
-                  <a:srgbClr val="222222"/>
-                </a:solidFill>
-                <a:latin typeface="Calibri"/>
-              </a:defRPr>
-            </a:pPr>
-            <a:r>
-              <a:rPr sz="1900" b="0">
-                <a:solidFill>
-                  <a:srgbClr val="222222"/>
-                </a:solidFill>
-                <a:latin typeface="Calibri"/>
-              </a:rPr>
-              <a:t>All of this is optional and none of it is examined.</a:t>
-            </a:r>
-          </a:p>
-        </p:txBody>
-      </p:sp>
-      <p:sp>
-        <p:nvSpPr>
-          <p:cNvPr id="10" name="Rounded Rectangle 9"/>
-          <p:cNvSpPr/>
-          <p:nvPr/>
-        </p:nvSpPr>
-        <p:spPr>
-          <a:xfrm>
-            <a:off x="502920" y="5303520"/>
-            <a:ext cx="11185855" cy="960120"/>
-          </a:xfrm>
-          <a:prstGeom prst="roundRect">
-            <a:avLst>
-              <a:gd name="adj" fmla="val 4000"/>
-            </a:avLst>
-          </a:prstGeom>
-          <a:solidFill>
-            <a:srgbClr val="EEF3F8"/>
-          </a:solidFill>
-          <a:ln w="12700">
-            <a:solidFill>
-              <a:srgbClr val="0E7C86"/>
-            </a:solidFill>
-          </a:ln>
-          <a:effectLst/>
-        </p:spPr>
-        <p:style>
-          <a:lnRef idx="1">
-            <a:schemeClr val="accent1"/>
-          </a:lnRef>
-          <a:fillRef idx="3">
-            <a:schemeClr val="accent1"/>
-          </a:fillRef>
-          <a:effectRef idx="2">
-            <a:schemeClr val="accent1"/>
-          </a:effectRef>
-          <a:fontRef idx="minor">
-            <a:schemeClr val="lt1"/>
-          </a:fontRef>
-        </p:style>
-        <p:txBody>
-          <a:bodyPr rtlCol="0" anchor="ctr" wrap="square" lIns="164592" rIns="164592" tIns="73152" bIns="73152"/>
-          <a:lstStyle/>
-          <a:p>
-            <a:pPr algn="l"/>
-            <a:r>
-              <a:rPr sz="1300" b="1">
-                <a:solidFill>
-                  <a:srgbClr val="0E7C86"/>
-                </a:solidFill>
-                <a:latin typeface="Calibri"/>
-              </a:rPr>
-              <a:t>KEY POINT   </a:t>
-            </a:r>
-            <a:r>
-              <a:rPr sz="1500">
-                <a:solidFill>
-                  <a:srgbClr val="222222"/>
-                </a:solidFill>
-                <a:latin typeface="Calibri"/>
-              </a:rPr>
-              <a:t>Watch the PWM video before Lesson 3 if today felt fast. It covers the same ground more slowly, and with an oscilloscope.</a:t>
+              <a:t>8.  Give two reasons the same program gives a different square today than it did yesterday.</a:t>
             </a:r>
           </a:p>
         </p:txBody>
@@ -34624,481 +35519,6 @@
           </a:graphicData>
         </a:graphic>
       </p:graphicFrame>
-    </p:spTree>
-  </p:cSld>
-  <p:clrMapOvr>
-    <a:masterClrMapping/>
-  </p:clrMapOvr>
-</p:sld>
-</file>
-
-<file path=ppt/slides/slide40.xml><?xml version="1.0" encoding="utf-8"?>
-<p:sld xmlns:a="http://schemas.openxmlformats.org/drawingml/2006/main" xmlns:p="http://schemas.openxmlformats.org/presentationml/2006/main" xmlns:r="http://schemas.openxmlformats.org/officeDocument/2006/relationships">
-  <p:cSld>
-    <p:spTree>
-      <p:nvGrpSpPr>
-        <p:cNvPr id="1" name=""/>
-        <p:cNvGrpSpPr/>
-        <p:nvPr/>
-      </p:nvGrpSpPr>
-      <p:grpSpPr/>
-      <p:sp>
-        <p:nvSpPr>
-          <p:cNvPr id="2" name="Title 1"/>
-          <p:cNvSpPr>
-            <a:spLocks noGrp="1"/>
-          </p:cNvSpPr>
-          <p:nvPr>
-            <p:ph type="title"/>
-          </p:nvPr>
-        </p:nvSpPr>
-        <p:spPr>
-          <a:xfrm>
-            <a:off x="502920" y="274320"/>
-            <a:ext cx="11185855" cy="777240"/>
-          </a:xfrm>
-        </p:spPr>
-        <p:txBody>
-          <a:bodyPr wrap="square" anchor="b"/>
-          <a:lstStyle/>
-          <a:p>
-            <a:pPr algn="l">
-              <a:lnSpc>
-                <a:spcPct val="100000"/>
-              </a:lnSpc>
-              <a:spcAft>
-                <a:spcPts val="0"/>
-              </a:spcAft>
-              <a:defRPr sz="2800" b="1">
-                <a:solidFill>
-                  <a:srgbClr val="1F3A5F"/>
-                </a:solidFill>
-                <a:latin typeface="Calibri"/>
-              </a:defRPr>
-            </a:pPr>
-            <a:r>
-              <a:rPr sz="2800" b="1">
-                <a:solidFill>
-                  <a:srgbClr val="1F3A5F"/>
-                </a:solidFill>
-                <a:latin typeface="Calibri"/>
-              </a:rPr>
-              <a:t>Check yourself</a:t>
-            </a:r>
-          </a:p>
-        </p:txBody>
-      </p:sp>
-      <p:sp>
-        <p:nvSpPr>
-          <p:cNvPr id="3" name="Rectangle 2"/>
-          <p:cNvSpPr/>
-          <p:nvPr/>
-        </p:nvSpPr>
-        <p:spPr>
-          <a:xfrm>
-            <a:off x="502920" y="1097280"/>
-            <a:ext cx="11185855" cy="19050"/>
-          </a:xfrm>
-          <a:prstGeom prst="rect">
-            <a:avLst/>
-          </a:prstGeom>
-          <a:solidFill>
-            <a:srgbClr val="C8D2DE"/>
-          </a:solidFill>
-          <a:ln>
-            <a:noFill/>
-          </a:ln>
-          <a:effectLst/>
-        </p:spPr>
-        <p:style>
-          <a:lnRef idx="1">
-            <a:schemeClr val="accent1"/>
-          </a:lnRef>
-          <a:fillRef idx="3">
-            <a:schemeClr val="accent1"/>
-          </a:fillRef>
-          <a:effectRef idx="2">
-            <a:schemeClr val="accent1"/>
-          </a:effectRef>
-          <a:fontRef idx="minor">
-            <a:schemeClr val="lt1"/>
-          </a:fontRef>
-        </p:style>
-        <p:txBody>
-          <a:bodyPr rtlCol="0" anchor="ctr"/>
-          <a:lstStyle/>
-          <a:p>
-            <a:pPr algn="ctr"/>
-          </a:p>
-        </p:txBody>
-      </p:sp>
-      <p:sp>
-        <p:nvSpPr>
-          <p:cNvPr id="4" name="TextBox 3"/>
-          <p:cNvSpPr txBox="1"/>
-          <p:nvPr/>
-        </p:nvSpPr>
-        <p:spPr>
-          <a:xfrm>
-            <a:off x="502920" y="6382512"/>
-            <a:ext cx="10545775" cy="274320"/>
-          </a:xfrm>
-          <a:prstGeom prst="rect">
-            <a:avLst/>
-          </a:prstGeom>
-          <a:noFill/>
-        </p:spPr>
-        <p:txBody>
-          <a:bodyPr wrap="square" lIns="0" tIns="0">
-            <a:spAutoFit/>
-          </a:bodyPr>
-          <a:lstStyle/>
-          <a:p>
-            <a:pPr algn="l">
-              <a:lnSpc>
-                <a:spcPct val="100000"/>
-              </a:lnSpc>
-              <a:spcAft>
-                <a:spcPts val="0"/>
-              </a:spcAft>
-              <a:defRPr sz="1000" b="0">
-                <a:solidFill>
-                  <a:srgbClr val="666666"/>
-                </a:solidFill>
-                <a:latin typeface="Calibri"/>
-              </a:defRPr>
-            </a:pPr>
-            <a:r>
-              <a:rPr sz="1000" b="0">
-                <a:solidFill>
-                  <a:srgbClr val="666666"/>
-                </a:solidFill>
-                <a:latin typeface="Calibri"/>
-              </a:rPr>
-              <a:t>Pathfinder Beginner - PS3  |  Lesson 2</a:t>
-            </a:r>
-          </a:p>
-        </p:txBody>
-      </p:sp>
-      <p:sp>
-        <p:nvSpPr>
-          <p:cNvPr id="5" name="TextBox 4"/>
-          <p:cNvSpPr txBox="1"/>
-          <p:nvPr/>
-        </p:nvSpPr>
-        <p:spPr>
-          <a:xfrm>
-            <a:off x="11231575" y="6382512"/>
-            <a:ext cx="457200" cy="274320"/>
-          </a:xfrm>
-          <a:prstGeom prst="rect">
-            <a:avLst/>
-          </a:prstGeom>
-          <a:noFill/>
-        </p:spPr>
-        <p:txBody>
-          <a:bodyPr wrap="square" lIns="0" tIns="0">
-            <a:spAutoFit/>
-          </a:bodyPr>
-          <a:lstStyle/>
-          <a:p>
-            <a:pPr algn="r">
-              <a:lnSpc>
-                <a:spcPct val="100000"/>
-              </a:lnSpc>
-              <a:spcAft>
-                <a:spcPts val="0"/>
-              </a:spcAft>
-              <a:defRPr sz="1000" b="0">
-                <a:solidFill>
-                  <a:srgbClr val="666666"/>
-                </a:solidFill>
-                <a:latin typeface="Calibri"/>
-              </a:defRPr>
-            </a:pPr>
-            <a:r>
-              <a:rPr sz="1000" b="0">
-                <a:solidFill>
-                  <a:srgbClr val="666666"/>
-                </a:solidFill>
-                <a:latin typeface="Calibri"/>
-              </a:rPr>
-              <a:t>39</a:t>
-            </a:r>
-          </a:p>
-        </p:txBody>
-      </p:sp>
-      <p:sp>
-        <p:nvSpPr>
-          <p:cNvPr id="6" name="TextBox 5"/>
-          <p:cNvSpPr txBox="1"/>
-          <p:nvPr/>
-        </p:nvSpPr>
-        <p:spPr>
-          <a:xfrm>
-            <a:off x="502920" y="1188720"/>
-            <a:ext cx="11185855" cy="411480"/>
-          </a:xfrm>
-          <a:prstGeom prst="rect">
-            <a:avLst/>
-          </a:prstGeom>
-          <a:noFill/>
-        </p:spPr>
-        <p:txBody>
-          <a:bodyPr wrap="square" lIns="0" tIns="0" rIns="0" bIns="0">
-            <a:spAutoFit/>
-          </a:bodyPr>
-          <a:lstStyle/>
-          <a:p>
-            <a:pPr algn="l">
-              <a:lnSpc>
-                <a:spcPct val="100000"/>
-              </a:lnSpc>
-              <a:spcAft>
-                <a:spcPts val="600"/>
-              </a:spcAft>
-              <a:defRPr sz="1600" b="0">
-                <a:solidFill>
-                  <a:srgbClr val="666666"/>
-                </a:solidFill>
-                <a:latin typeface="Calibri"/>
-              </a:defRPr>
-            </a:pPr>
-            <a:r>
-              <a:rPr sz="1600" b="0">
-                <a:solidFill>
-                  <a:srgbClr val="666666"/>
-                </a:solidFill>
-                <a:latin typeface="Calibri"/>
-              </a:rPr>
-              <a:t>Next lesson: you get to drive it yourself.</a:t>
-            </a:r>
-          </a:p>
-        </p:txBody>
-      </p:sp>
-      <p:sp>
-        <p:nvSpPr>
-          <p:cNvPr id="7" name="TextBox 6"/>
-          <p:cNvSpPr txBox="1"/>
-          <p:nvPr/>
-        </p:nvSpPr>
-        <p:spPr>
-          <a:xfrm>
-            <a:off x="502920" y="1664208"/>
-            <a:ext cx="11185855" cy="4599432"/>
-          </a:xfrm>
-          <a:prstGeom prst="rect">
-            <a:avLst/>
-          </a:prstGeom>
-          <a:noFill/>
-        </p:spPr>
-        <p:txBody>
-          <a:bodyPr wrap="square" lIns="0" tIns="0" rIns="0" bIns="0">
-            <a:spAutoFit/>
-          </a:bodyPr>
-          <a:lstStyle/>
-          <a:p>
-            <a:pPr algn="l">
-              <a:lnSpc>
-                <a:spcPct val="100000"/>
-              </a:lnSpc>
-              <a:spcAft>
-                <a:spcPts val="1100"/>
-              </a:spcAft>
-              <a:defRPr sz="1900" b="0">
-                <a:solidFill>
-                  <a:srgbClr val="222222"/>
-                </a:solidFill>
-                <a:latin typeface="Calibri"/>
-              </a:defRPr>
-            </a:pPr>
-            <a:r>
-              <a:rPr sz="1900" b="0">
-                <a:solidFill>
-                  <a:srgbClr val="222222"/>
-                </a:solidFill>
-                <a:latin typeface="Calibri"/>
-              </a:rPr>
-              <a:t>1.  Why does each motor need two pins instead of one?</a:t>
-            </a:r>
-          </a:p>
-          <a:p>
-            <a:pPr algn="l">
-              <a:lnSpc>
-                <a:spcPct val="100000"/>
-              </a:lnSpc>
-              <a:spcAft>
-                <a:spcPts val="1100"/>
-              </a:spcAft>
-              <a:defRPr sz="1900" b="0">
-                <a:solidFill>
-                  <a:srgbClr val="222222"/>
-                </a:solidFill>
-                <a:latin typeface="Calibri"/>
-              </a:defRPr>
-            </a:pPr>
-            <a:r>
-              <a:rPr sz="1900" b="0">
-                <a:solidFill>
-                  <a:srgbClr val="222222"/>
-                </a:solidFill>
-                <a:latin typeface="Calibri"/>
-              </a:rPr>
-              <a:t>2.  A pin can only be on or off. Explain in one sentence how the vehicle gets a half speed.</a:t>
-            </a:r>
-          </a:p>
-          <a:p>
-            <a:pPr algn="l">
-              <a:lnSpc>
-                <a:spcPct val="100000"/>
-              </a:lnSpc>
-              <a:spcAft>
-                <a:spcPts val="1100"/>
-              </a:spcAft>
-              <a:defRPr sz="1900" b="0">
-                <a:solidFill>
-                  <a:srgbClr val="222222"/>
-                </a:solidFill>
-                <a:latin typeface="Calibri"/>
-              </a:defRPr>
-            </a:pPr>
-            <a:r>
-              <a:rPr sz="1900" b="0">
-                <a:solidFill>
-                  <a:srgbClr val="222222"/>
-                </a:solidFill>
-                <a:latin typeface="Calibri"/>
-              </a:rPr>
-              <a:t>3.  What duty value is 25% of full power at 8-bit resolution?</a:t>
-            </a:r>
-          </a:p>
-          <a:p>
-            <a:pPr algn="l">
-              <a:lnSpc>
-                <a:spcPct val="100000"/>
-              </a:lnSpc>
-              <a:spcAft>
-                <a:spcPts val="1100"/>
-              </a:spcAft>
-              <a:defRPr sz="1900" b="0">
-                <a:solidFill>
-                  <a:srgbClr val="222222"/>
-                </a:solidFill>
-                <a:latin typeface="Calibri"/>
-              </a:defRPr>
-            </a:pPr>
-            <a:r>
-              <a:rPr sz="1900" b="0">
-                <a:solidFill>
-                  <a:srgbClr val="222222"/>
-                </a:solidFill>
-                <a:latin typeface="Calibri"/>
-              </a:rPr>
-              <a:t>4.  Why do we switch at 20 kHz rather than 300 Hz?</a:t>
-            </a:r>
-          </a:p>
-          <a:p>
-            <a:pPr algn="l">
-              <a:lnSpc>
-                <a:spcPct val="100000"/>
-              </a:lnSpc>
-              <a:spcAft>
-                <a:spcPts val="1100"/>
-              </a:spcAft>
-              <a:defRPr sz="1900" b="0">
-                <a:solidFill>
-                  <a:srgbClr val="222222"/>
-                </a:solidFill>
-                <a:latin typeface="Calibri"/>
-              </a:defRPr>
-            </a:pPr>
-            <a:r>
-              <a:rPr sz="1900" b="0">
-                <a:solidFill>
-                  <a:srgbClr val="222222"/>
-                </a:solidFill>
-                <a:latin typeface="Calibri"/>
-              </a:rPr>
-              <a:t>5.  The left wheels get 200 and the right wheels get -200. What does the vehicle do?</a:t>
-            </a:r>
-          </a:p>
-          <a:p>
-            <a:pPr algn="l">
-              <a:lnSpc>
-                <a:spcPct val="100000"/>
-              </a:lnSpc>
-              <a:spcAft>
-                <a:spcPts val="1100"/>
-              </a:spcAft>
-              <a:defRPr sz="1900" b="0">
-                <a:solidFill>
-                  <a:srgbClr val="222222"/>
-                </a:solidFill>
-                <a:latin typeface="Calibri"/>
-              </a:defRPr>
-            </a:pPr>
-            <a:r>
-              <a:rPr sz="1900" b="0">
-                <a:solidFill>
-                  <a:srgbClr val="222222"/>
-                </a:solidFill>
-                <a:latin typeface="Calibri"/>
-              </a:rPr>
-              <a:t>6.  Your wheel is 3 inches across. How far does the vehicle travel in one wheel turn?</a:t>
-            </a:r>
-          </a:p>
-          <a:p>
-            <a:pPr algn="l">
-              <a:lnSpc>
-                <a:spcPct val="100000"/>
-              </a:lnSpc>
-              <a:spcAft>
-                <a:spcPts val="1100"/>
-              </a:spcAft>
-              <a:defRPr sz="1900" b="0">
-                <a:solidFill>
-                  <a:srgbClr val="222222"/>
-                </a:solidFill>
-                <a:latin typeface="Calibri"/>
-              </a:defRPr>
-            </a:pPr>
-            <a:r>
-              <a:rPr sz="1900" b="0">
-                <a:solidFill>
-                  <a:srgbClr val="222222"/>
-                </a:solidFill>
-                <a:latin typeface="Calibri"/>
-              </a:rPr>
-              <a:t>7.  Your square comes out as a rectangle. Which number is wrong, and which way should you change it?</a:t>
-            </a:r>
-          </a:p>
-          <a:p>
-            <a:pPr algn="l">
-              <a:lnSpc>
-                <a:spcPct val="100000"/>
-              </a:lnSpc>
-              <a:spcAft>
-                <a:spcPts val="1100"/>
-              </a:spcAft>
-              <a:defRPr sz="1900" b="0">
-                <a:solidFill>
-                  <a:srgbClr val="222222"/>
-                </a:solidFill>
-                <a:latin typeface="Calibri"/>
-              </a:defRPr>
-            </a:pPr>
-            <a:r>
-              <a:rPr sz="1900" b="0">
-                <a:solidFill>
-                  <a:srgbClr val="222222"/>
-                </a:solidFill>
-                <a:latin typeface="Calibri"/>
-              </a:rPr>
-              <a:t>8.  Give two reasons the same program gives a different square today than it did yesterday.</a:t>
-            </a:r>
-          </a:p>
-        </p:txBody>
-      </p:sp>
     </p:spTree>
   </p:cSld>
   <p:clrMapOvr>

--- a/ground-vehicle/docs/courses/beginner-ps3/l2_motor_control.pptx
+++ b/ground-vehicle/docs/courses/beginner-ps3/l2_motor_control.pptx
@@ -19815,7 +19815,7 @@
                 </a:solidFill>
                 <a:latin typeface="Calibri"/>
               </a:rPr>
-              <a:t>About 60 minutes</a:t>
+              <a:t>About 35 minutes</a:t>
             </a:r>
           </a:p>
         </p:txBody>

--- a/ground-vehicle/docs/courses/beginner-ps3/l2_motor_control.pptx
+++ b/ground-vehicle/docs/courses/beginner-ps3/l2_motor_control.pptx
@@ -7813,7 +7813,7 @@
                 </a:solidFill>
                 <a:latin typeface="Calibri"/>
               </a:rPr>
-              <a:t>9</a:t>
+              <a:t>10</a:t>
             </a:r>
           </a:p>
         </p:txBody>
@@ -9999,7 +9999,7 @@
                 </a:solidFill>
                 <a:latin typeface="Calibri"/>
               </a:rPr>
-              <a:t>10</a:t>
+              <a:t>11</a:t>
             </a:r>
           </a:p>
         </p:txBody>
@@ -10568,7 +10568,7 @@
                 </a:solidFill>
                 <a:latin typeface="Calibri"/>
               </a:rPr>
-              <a:t>11</a:t>
+              <a:t>12</a:t>
             </a:r>
           </a:p>
         </p:txBody>
@@ -11140,7 +11140,7 @@
                 </a:solidFill>
                 <a:latin typeface="Calibri"/>
               </a:rPr>
-              <a:t>12</a:t>
+              <a:t>13</a:t>
             </a:r>
           </a:p>
         </p:txBody>
@@ -11930,7 +11930,7 @@
                 </a:solidFill>
                 <a:latin typeface="Calibri"/>
               </a:rPr>
-              <a:t>13</a:t>
+              <a:t>14</a:t>
             </a:r>
           </a:p>
         </p:txBody>
@@ -12548,7 +12548,7 @@
                 </a:solidFill>
                 <a:latin typeface="Calibri"/>
               </a:rPr>
-              <a:t>14</a:t>
+              <a:t>15</a:t>
             </a:r>
           </a:p>
         </p:txBody>
@@ -13386,7 +13386,7 @@
                 </a:solidFill>
                 <a:latin typeface="Calibri"/>
               </a:rPr>
-              <a:t>15</a:t>
+              <a:t>16</a:t>
             </a:r>
           </a:p>
         </p:txBody>
@@ -14029,7 +14029,7 @@
                 </a:solidFill>
                 <a:latin typeface="Calibri"/>
               </a:rPr>
-              <a:t>16</a:t>
+              <a:t>17</a:t>
             </a:r>
           </a:p>
         </p:txBody>
@@ -14915,7 +14915,7 @@
                 </a:solidFill>
                 <a:latin typeface="Calibri"/>
               </a:rPr>
-              <a:t>17</a:t>
+              <a:t>18</a:t>
             </a:r>
           </a:p>
         </p:txBody>
@@ -15347,7 +15347,7 @@
                 </a:solidFill>
                 <a:latin typeface="Calibri"/>
               </a:rPr>
-              <a:t>18</a:t>
+              <a:t>19</a:t>
             </a:r>
           </a:p>
         </p:txBody>
@@ -16862,7 +16862,7 @@
                 </a:solidFill>
                 <a:latin typeface="Calibri"/>
               </a:rPr>
-              <a:t>1</a:t>
+              <a:t>2</a:t>
             </a:r>
           </a:p>
         </p:txBody>
@@ -17312,7 +17312,7 @@
                 </a:solidFill>
                 <a:latin typeface="Calibri"/>
               </a:rPr>
-              <a:t>19</a:t>
+              <a:t>20</a:t>
             </a:r>
           </a:p>
         </p:txBody>
@@ -17899,7 +17899,7 @@
                 </a:solidFill>
                 <a:latin typeface="Calibri"/>
               </a:rPr>
-              <a:t>20</a:t>
+              <a:t>21</a:t>
             </a:r>
           </a:p>
         </p:txBody>
@@ -19274,7 +19274,7 @@
                 </a:solidFill>
                 <a:latin typeface="Calibri"/>
               </a:rPr>
-              <a:t>21</a:t>
+              <a:t>22</a:t>
             </a:r>
           </a:p>
         </p:txBody>
@@ -19675,7 +19675,7 @@
                 </a:solidFill>
                 <a:latin typeface="Calibri"/>
               </a:rPr>
-              <a:t>22</a:t>
+              <a:t>23</a:t>
             </a:r>
           </a:p>
         </p:txBody>
@@ -20609,7 +20609,7 @@
                 </a:solidFill>
                 <a:latin typeface="Calibri"/>
               </a:rPr>
-              <a:t>23</a:t>
+              <a:t>24</a:t>
             </a:r>
           </a:p>
         </p:txBody>
@@ -21091,7 +21091,7 @@
                 </a:solidFill>
                 <a:latin typeface="Calibri"/>
               </a:rPr>
-              <a:t>24</a:t>
+              <a:t>25</a:t>
             </a:r>
           </a:p>
         </p:txBody>
@@ -22798,7 +22798,7 @@
                 </a:solidFill>
                 <a:latin typeface="Calibri"/>
               </a:rPr>
-              <a:t>25</a:t>
+              <a:t>26</a:t>
             </a:r>
           </a:p>
         </p:txBody>
@@ -23298,7 +23298,7 @@
                 </a:solidFill>
                 <a:latin typeface="Calibri"/>
               </a:rPr>
-              <a:t>26</a:t>
+              <a:t>27</a:t>
             </a:r>
           </a:p>
         </p:txBody>
@@ -24610,7 +24610,7 @@
                 </a:solidFill>
                 <a:latin typeface="Calibri"/>
               </a:rPr>
-              <a:t>27</a:t>
+              <a:t>28</a:t>
             </a:r>
           </a:p>
         </p:txBody>
@@ -27548,7 +27548,7 @@
                 </a:solidFill>
                 <a:latin typeface="Calibri"/>
               </a:rPr>
-              <a:t>28</a:t>
+              <a:t>29</a:t>
             </a:r>
           </a:p>
         </p:txBody>
@@ -28014,7 +28014,7 @@
                 </a:solidFill>
                 <a:latin typeface="Calibri"/>
               </a:rPr>
-              <a:t>2</a:t>
+              <a:t>3</a:t>
             </a:r>
           </a:p>
         </p:txBody>
@@ -28448,7 +28448,7 @@
                 </a:solidFill>
                 <a:latin typeface="Calibri"/>
               </a:rPr>
-              <a:t>29</a:t>
+              <a:t>30</a:t>
             </a:r>
           </a:p>
         </p:txBody>
@@ -29060,7 +29060,7 @@
                 </a:solidFill>
                 <a:latin typeface="Calibri"/>
               </a:rPr>
-              <a:t>30</a:t>
+              <a:t>31</a:t>
             </a:r>
           </a:p>
         </p:txBody>
@@ -29936,7 +29936,7 @@
                 </a:solidFill>
                 <a:latin typeface="Calibri"/>
               </a:rPr>
-              <a:t>31</a:t>
+              <a:t>32</a:t>
             </a:r>
           </a:p>
         </p:txBody>
@@ -30553,7 +30553,7 @@
                 </a:solidFill>
                 <a:latin typeface="Calibri"/>
               </a:rPr>
-              <a:t>32</a:t>
+              <a:t>33</a:t>
             </a:r>
           </a:p>
         </p:txBody>
@@ -31297,7 +31297,7 @@
                 </a:solidFill>
                 <a:latin typeface="Calibri"/>
               </a:rPr>
-              <a:t>33</a:t>
+              <a:t>34</a:t>
             </a:r>
           </a:p>
         </p:txBody>
@@ -32003,7 +32003,7 @@
                 </a:solidFill>
                 <a:latin typeface="Calibri"/>
               </a:rPr>
-              <a:t>34</a:t>
+              <a:t>35</a:t>
             </a:r>
           </a:p>
         </p:txBody>
@@ -32786,7 +32786,7 @@
                 </a:solidFill>
                 <a:latin typeface="Calibri"/>
               </a:rPr>
-              <a:t>35</a:t>
+              <a:t>36</a:t>
             </a:r>
           </a:p>
         </p:txBody>
@@ -33254,7 +33254,7 @@
                 </a:solidFill>
                 <a:latin typeface="Calibri"/>
               </a:rPr>
-              <a:t>36</a:t>
+              <a:t>37</a:t>
             </a:r>
           </a:p>
         </p:txBody>
@@ -33720,7 +33720,7 @@
                 </a:solidFill>
                 <a:latin typeface="Calibri"/>
               </a:rPr>
-              <a:t>37</a:t>
+              <a:t>38</a:t>
             </a:r>
           </a:p>
         </p:txBody>
@@ -34507,7 +34507,7 @@
                 </a:solidFill>
                 <a:latin typeface="Calibri"/>
               </a:rPr>
-              <a:t>38</a:t>
+              <a:t>39</a:t>
             </a:r>
           </a:p>
         </p:txBody>
@@ -34982,7 +34982,7 @@
                 </a:solidFill>
                 <a:latin typeface="Calibri"/>
               </a:rPr>
-              <a:t>3</a:t>
+              <a:t>4</a:t>
             </a:r>
           </a:p>
         </p:txBody>
@@ -35718,7 +35718,7 @@
                 </a:solidFill>
                 <a:latin typeface="Calibri"/>
               </a:rPr>
-              <a:t>4</a:t>
+              <a:t>5</a:t>
             </a:r>
           </a:p>
         </p:txBody>
@@ -36380,7 +36380,7 @@
                 </a:solidFill>
                 <a:latin typeface="Calibri"/>
               </a:rPr>
-              <a:t>5</a:t>
+              <a:t>6</a:t>
             </a:r>
           </a:p>
         </p:txBody>
@@ -37868,7 +37868,7 @@
                 </a:solidFill>
                 <a:latin typeface="Calibri"/>
               </a:rPr>
-              <a:t>6</a:t>
+              <a:t>7</a:t>
             </a:r>
           </a:p>
         </p:txBody>
@@ -38480,7 +38480,7 @@
                 </a:solidFill>
                 <a:latin typeface="Calibri"/>
               </a:rPr>
-              <a:t>7</a:t>
+              <a:t>8</a:t>
             </a:r>
           </a:p>
         </p:txBody>
@@ -38543,7 +38543,7 @@
         </p:nvGraphicFramePr>
         <p:xfrm>
           <a:off x="502920" y="1691640"/>
-          <a:ext cx="11185854" cy="2762250"/>
+          <a:ext cx="11185853" cy="2762250"/>
         </p:xfrm>
         <a:graphic>
           <a:graphicData uri="http://schemas.openxmlformats.org/drawingml/2006/table">
@@ -38555,7 +38555,7 @@
                 <a:gridCol w="3355756"/>
                 <a:gridCol w="1677878"/>
                 <a:gridCol w="1677878"/>
-                <a:gridCol w="4474342"/>
+                <a:gridCol w="4474341"/>
               </a:tblGrid>
               <a:tr h="552450">
                 <a:tc>
@@ -39276,7 +39276,7 @@
                 </a:solidFill>
                 <a:latin typeface="Calibri"/>
               </a:rPr>
-              <a:t>8</a:t>
+              <a:t>9</a:t>
             </a:r>
           </a:p>
         </p:txBody>

--- a/ground-vehicle/docs/courses/beginner-ps3/l2_motor_control.pptx
+++ b/ground-vehicle/docs/courses/beginner-ps3/l2_motor_control.pptx
@@ -9789,7 +9789,7 @@
               <a:t>KEY POINT   </a:t>
             </a:r>
             <a:r>
-              <a:rPr sz="1500">
+              <a:rPr sz="1800">
                 <a:solidFill>
                   <a:srgbClr val="222222"/>
                 </a:solidFill>
@@ -12428,7 +12428,7 @@
               <a:t>SAFETY   </a:t>
             </a:r>
             <a:r>
-              <a:rPr sz="1500">
+              <a:rPr sz="1800">
                 <a:solidFill>
                   <a:srgbClr val="222222"/>
                 </a:solidFill>
@@ -13909,7 +13909,7 @@
               <a:t>SAFETY   </a:t>
             </a:r>
             <a:r>
-              <a:rPr sz="1500">
+              <a:rPr sz="1800">
                 <a:solidFill>
                   <a:srgbClr val="222222"/>
                 </a:solidFill>
@@ -16652,7 +16652,7 @@
               <a:t>KEY POINT   </a:t>
             </a:r>
             <a:r>
-              <a:rPr sz="1500">
+              <a:rPr sz="1800">
                 <a:solidFill>
                   <a:srgbClr val="222222"/>
                 </a:solidFill>
@@ -17689,7 +17689,7 @@
               <a:t>KEY POINT   </a:t>
             </a:r>
             <a:r>
-              <a:rPr sz="1500">
+              <a:rPr sz="1800">
                 <a:solidFill>
                   <a:srgbClr val="222222"/>
                 </a:solidFill>
@@ -19017,8 +19017,8 @@
         </p:nvSpPr>
         <p:spPr>
           <a:xfrm>
-            <a:off x="502920" y="5303520"/>
-            <a:ext cx="11185855" cy="960120"/>
+            <a:off x="502920" y="5198364"/>
+            <a:ext cx="11185855" cy="1065276"/>
           </a:xfrm>
           <a:prstGeom prst="roundRect">
             <a:avLst>
@@ -19064,7 +19064,7 @@
               <a:t>KEY POINT   </a:t>
             </a:r>
             <a:r>
-              <a:rPr sz="1500">
+              <a:rPr sz="1800">
                 <a:solidFill>
                   <a:srgbClr val="222222"/>
                 </a:solidFill>
@@ -19555,7 +19555,7 @@
               <a:t>KEY POINT   </a:t>
             </a:r>
             <a:r>
-              <a:rPr sz="1500">
+              <a:rPr sz="1800">
                 <a:solidFill>
                   <a:srgbClr val="222222"/>
                 </a:solidFill>
@@ -22257,7 +22257,7 @@
                 </a:solidFill>
                 <a:latin typeface="Calibri"/>
               </a:rPr>
-              <a:t>stick centerd</a:t>
+              <a:t>stick centered</a:t>
             </a:r>
           </a:p>
         </p:txBody>
@@ -22588,7 +22588,7 @@
               <a:t>KEY POINT   </a:t>
             </a:r>
             <a:r>
-              <a:rPr sz="1500">
+              <a:rPr sz="1800">
                 <a:solidFill>
                   <a:srgbClr val="222222"/>
                 </a:solidFill>
@@ -23088,7 +23088,7 @@
               <a:t>KEY POINT   </a:t>
             </a:r>
             <a:r>
-              <a:rPr sz="1500">
+              <a:rPr sz="1800">
                 <a:solidFill>
                   <a:srgbClr val="222222"/>
                 </a:solidFill>
@@ -24400,7 +24400,7 @@
               <a:t>WATCH OUT   </a:t>
             </a:r>
             <a:r>
-              <a:rPr sz="1500">
+              <a:rPr sz="1800">
                 <a:solidFill>
                   <a:srgbClr val="222222"/>
                 </a:solidFill>
@@ -27338,7 +27338,7 @@
               <a:t>KEY POINT   </a:t>
             </a:r>
             <a:r>
-              <a:rPr sz="1500">
+              <a:rPr sz="1800">
                 <a:solidFill>
                   <a:srgbClr val="222222"/>
                 </a:solidFill>
@@ -27804,7 +27804,7 @@
               <a:t>KEY POINT   </a:t>
             </a:r>
             <a:r>
-              <a:rPr sz="1500">
+              <a:rPr sz="1800">
                 <a:solidFill>
                   <a:srgbClr val="222222"/>
                 </a:solidFill>
@@ -28238,7 +28238,7 @@
               <a:t>SAFETY   </a:t>
             </a:r>
             <a:r>
-              <a:rPr sz="1500">
+              <a:rPr sz="1800">
                 <a:solidFill>
                   <a:srgbClr val="222222"/>
                 </a:solidFill>
@@ -28850,7 +28850,7 @@
               <a:t>KEY POINT   </a:t>
             </a:r>
             <a:r>
-              <a:rPr sz="1500">
+              <a:rPr sz="1800">
                 <a:solidFill>
                   <a:srgbClr val="222222"/>
                 </a:solidFill>
@@ -30343,7 +30343,7 @@
               <a:t>KEY POINT   </a:t>
             </a:r>
             <a:r>
-              <a:rPr sz="1500">
+              <a:rPr sz="1800">
                 <a:solidFill>
                   <a:srgbClr val="222222"/>
                 </a:solidFill>
@@ -32576,7 +32576,7 @@
               <a:t>SAFETY   </a:t>
             </a:r>
             <a:r>
-              <a:rPr sz="1500">
+              <a:rPr sz="1800">
                 <a:solidFill>
                   <a:srgbClr val="222222"/>
                 </a:solidFill>
@@ -33044,7 +33044,7 @@
               <a:t>WATCH OUT   </a:t>
             </a:r>
             <a:r>
-              <a:rPr sz="1500">
+              <a:rPr sz="1800">
                 <a:solidFill>
                   <a:srgbClr val="222222"/>
                 </a:solidFill>
@@ -34297,7 +34297,7 @@
               <a:t>KEY POINT   </a:t>
             </a:r>
             <a:r>
-              <a:rPr sz="1500">
+              <a:rPr sz="1800">
                 <a:solidFill>
                   <a:srgbClr val="222222"/>
                 </a:solidFill>
@@ -36170,7 +36170,7 @@
               <a:t>KEY POINT   </a:t>
             </a:r>
             <a:r>
-              <a:rPr sz="1500">
+              <a:rPr sz="1800">
                 <a:solidFill>
                   <a:srgbClr val="222222"/>
                 </a:solidFill>
@@ -38270,7 +38270,7 @@
               <a:t>KEY POINT   </a:t>
             </a:r>
             <a:r>
-              <a:rPr sz="1500">
+              <a:rPr sz="1800">
                 <a:solidFill>
                   <a:srgbClr val="222222"/>
                 </a:solidFill>
@@ -39066,7 +39066,7 @@
               <a:t>KEY POINT   </a:t>
             </a:r>
             <a:r>
-              <a:rPr sz="1500">
+              <a:rPr sz="1800">
                 <a:solidFill>
                   <a:srgbClr val="222222"/>
                 </a:solidFill>

--- a/ground-vehicle/docs/courses/beginner-ps3/l2_motor_control.pptx
+++ b/ground-vehicle/docs/courses/beginner-ps3/l2_motor_control.pptx
@@ -4,48 +4,51 @@
   <p:sldMasterIdLst>
     <p:sldMasterId id="2147483648" r:id="rId1"/>
   </p:sldMasterIdLst>
+  <p:notesMasterIdLst>
+    <p:notesMasterId r:id="rId41"/>
+  </p:notesMasterIdLst>
   <p:sldIdLst>
-    <p:sldId id="256" r:id="rId7"/>
-    <p:sldId id="257" r:id="rId9"/>
-    <p:sldId id="258" r:id="rId10"/>
-    <p:sldId id="259" r:id="rId11"/>
-    <p:sldId id="260" r:id="rId12"/>
-    <p:sldId id="261" r:id="rId13"/>
-    <p:sldId id="262" r:id="rId14"/>
-    <p:sldId id="263" r:id="rId15"/>
-    <p:sldId id="264" r:id="rId16"/>
-    <p:sldId id="265" r:id="rId17"/>
-    <p:sldId id="266" r:id="rId18"/>
-    <p:sldId id="267" r:id="rId19"/>
-    <p:sldId id="268" r:id="rId20"/>
-    <p:sldId id="269" r:id="rId21"/>
-    <p:sldId id="270" r:id="rId22"/>
-    <p:sldId id="271" r:id="rId23"/>
-    <p:sldId id="272" r:id="rId24"/>
-    <p:sldId id="273" r:id="rId25"/>
-    <p:sldId id="274" r:id="rId26"/>
-    <p:sldId id="275" r:id="rId27"/>
-    <p:sldId id="276" r:id="rId28"/>
-    <p:sldId id="277" r:id="rId29"/>
-    <p:sldId id="278" r:id="rId30"/>
-    <p:sldId id="279" r:id="rId31"/>
-    <p:sldId id="280" r:id="rId32"/>
-    <p:sldId id="281" r:id="rId33"/>
-    <p:sldId id="282" r:id="rId34"/>
-    <p:sldId id="283" r:id="rId35"/>
-    <p:sldId id="284" r:id="rId36"/>
-    <p:sldId id="285" r:id="rId37"/>
-    <p:sldId id="286" r:id="rId38"/>
-    <p:sldId id="287" r:id="rId39"/>
-    <p:sldId id="288" r:id="rId40"/>
-    <p:sldId id="289" r:id="rId41"/>
-    <p:sldId id="290" r:id="rId42"/>
-    <p:sldId id="291" r:id="rId43"/>
-    <p:sldId id="292" r:id="rId44"/>
-    <p:sldId id="293" r:id="rId45"/>
-    <p:sldId id="294" r:id="rId46"/>
+    <p:sldId id="256" r:id="rId2"/>
+    <p:sldId id="257" r:id="rId3"/>
+    <p:sldId id="258" r:id="rId4"/>
+    <p:sldId id="259" r:id="rId5"/>
+    <p:sldId id="260" r:id="rId6"/>
+    <p:sldId id="261" r:id="rId7"/>
+    <p:sldId id="262" r:id="rId8"/>
+    <p:sldId id="263" r:id="rId9"/>
+    <p:sldId id="264" r:id="rId10"/>
+    <p:sldId id="265" r:id="rId11"/>
+    <p:sldId id="266" r:id="rId12"/>
+    <p:sldId id="267" r:id="rId13"/>
+    <p:sldId id="268" r:id="rId14"/>
+    <p:sldId id="269" r:id="rId15"/>
+    <p:sldId id="270" r:id="rId16"/>
+    <p:sldId id="271" r:id="rId17"/>
+    <p:sldId id="272" r:id="rId18"/>
+    <p:sldId id="273" r:id="rId19"/>
+    <p:sldId id="274" r:id="rId20"/>
+    <p:sldId id="275" r:id="rId21"/>
+    <p:sldId id="276" r:id="rId22"/>
+    <p:sldId id="277" r:id="rId23"/>
+    <p:sldId id="278" r:id="rId24"/>
+    <p:sldId id="279" r:id="rId25"/>
+    <p:sldId id="280" r:id="rId26"/>
+    <p:sldId id="281" r:id="rId27"/>
+    <p:sldId id="282" r:id="rId28"/>
+    <p:sldId id="283" r:id="rId29"/>
+    <p:sldId id="284" r:id="rId30"/>
+    <p:sldId id="285" r:id="rId31"/>
+    <p:sldId id="286" r:id="rId32"/>
+    <p:sldId id="287" r:id="rId33"/>
+    <p:sldId id="288" r:id="rId34"/>
+    <p:sldId id="289" r:id="rId35"/>
+    <p:sldId id="290" r:id="rId36"/>
+    <p:sldId id="291" r:id="rId37"/>
+    <p:sldId id="292" r:id="rId38"/>
+    <p:sldId id="293" r:id="rId39"/>
+    <p:sldId id="294" r:id="rId40"/>
   </p:sldIdLst>
-  <p:sldSz cx="12191695" cy="6858000" type="screen4x3"/>
+  <p:sldSz cx="12192000" cy="6858000"/>
   <p:notesSz cx="6858000" cy="9144000"/>
   <p:defaultTextStyle>
     <a:defPPr>
@@ -142,11 +145,56 @@
       </a:defRPr>
     </a:lvl9pPr>
   </p:defaultTextStyle>
+  <p:extLst>
+    <p:ext uri="{EFAFB233-063F-42B5-8137-9DF3F51BA10A}">
+      <p15:sldGuideLst xmlns:p15="http://schemas.microsoft.com/office/powerpoint/2012/main">
+        <p15:guide id="1" orient="horz" pos="2160">
+          <p15:clr>
+            <a:srgbClr val="A4A3A4"/>
+          </p15:clr>
+        </p15:guide>
+        <p15:guide id="2" pos="2880">
+          <p15:clr>
+            <a:srgbClr val="A4A3A4"/>
+          </p15:clr>
+        </p15:guide>
+      </p15:sldGuideLst>
+    </p:ext>
+  </p:extLst>
 </p:presentation>
 </file>
 
+<file path=ppt/changesInfos/changesInfo1.xml><?xml version="1.0" encoding="utf-8"?>
+<pc:chgInfo xmlns:a="http://schemas.openxmlformats.org/drawingml/2006/main" xmlns:r="http://schemas.openxmlformats.org/officeDocument/2006/relationships" xmlns:ac="http://schemas.microsoft.com/office/drawing/2013/main/command" xmlns:pc="http://schemas.microsoft.com/office/powerpoint/2013/main/command">
+  <pc:docChgLst>
+    <pc:chgData name="Kevin Bowen" userId="ee6702fae12807e4" providerId="LiveId" clId="{5CB6C98B-5151-4E5D-BF39-3ED613ABF9A3}"/>
+    <pc:docChg chg="modSld">
+      <pc:chgData name="Kevin Bowen" userId="ee6702fae12807e4" providerId="LiveId" clId="{5CB6C98B-5151-4E5D-BF39-3ED613ABF9A3}" dt="2026-09-07T16:32:17.844" v="106" actId="1076"/>
+      <pc:docMkLst>
+        <pc:docMk/>
+      </pc:docMkLst>
+      <pc:sldChg chg="modSp mod">
+        <pc:chgData name="Kevin Bowen" userId="ee6702fae12807e4" providerId="LiveId" clId="{5CB6C98B-5151-4E5D-BF39-3ED613ABF9A3}" dt="2026-09-07T16:32:17.844" v="106" actId="1076"/>
+        <pc:sldMkLst>
+          <pc:docMk/>
+          <pc:sldMk cId="0" sldId="283"/>
+        </pc:sldMkLst>
+        <pc:spChg chg="mod">
+          <ac:chgData name="Kevin Bowen" userId="ee6702fae12807e4" providerId="LiveId" clId="{5CB6C98B-5151-4E5D-BF39-3ED613ABF9A3}" dt="2026-09-07T16:32:17.844" v="106" actId="1076"/>
+          <ac:spMkLst>
+            <pc:docMk/>
+            <pc:sldMk cId="0" sldId="283"/>
+            <ac:spMk id="48" creationId="{00000000-0000-0000-0000-000000000000}"/>
+          </ac:spMkLst>
+        </pc:spChg>
+      </pc:sldChg>
+    </pc:docChg>
+  </pc:docChgLst>
+</pc:chgInfo>
+</file>
+
 <file path=ppt/notesMasters/notesMaster1.xml><?xml version="1.0" encoding="utf-8"?>
-<p:notesMaster xmlns:a="http://schemas.openxmlformats.org/drawingml/2006/main" xmlns:p="http://schemas.openxmlformats.org/presentationml/2006/main" xmlns:r="http://schemas.openxmlformats.org/officeDocument/2006/relationships">
+<p:notesMaster xmlns:a="http://schemas.openxmlformats.org/drawingml/2006/main" xmlns:r="http://schemas.openxmlformats.org/officeDocument/2006/relationships" xmlns:p="http://schemas.openxmlformats.org/presentationml/2006/main">
   <p:cSld>
     <p:bg>
       <p:bgRef idx="1001">
@@ -167,241 +215,16 @@
           <a:chExt cx="0" cy="0"/>
         </a:xfrm>
       </p:grpSpPr>
-      <p:sp>
-        <p:nvSpPr>
-          <p:cNvPr id="2" name="Header Placeholder 1"/>
-          <p:cNvSpPr>
-            <a:spLocks noGrp="1"/>
-          </p:cNvSpPr>
-          <p:nvPr>
-            <p:ph type="hdr" sz="quarter"/>
-          </p:nvPr>
-        </p:nvSpPr>
-        <p:spPr>
-          <a:xfrm>
-            <a:off x="0" y="0"/>
-            <a:ext cx="2971800" cy="457200"/>
-          </a:xfrm>
-          <a:prstGeom prst="rect">
-            <a:avLst/>
-          </a:prstGeom>
-        </p:spPr>
-        <p:txBody>
-          <a:bodyPr vert="horz" lIns="91440" tIns="45720" rIns="91440" bIns="45720" rtlCol="0"/>
-          <a:lstStyle>
-            <a:lvl1pPr algn="l">
-              <a:defRPr sz="1200"/>
-            </a:lvl1pPr>
-          </a:lstStyle>
-          <a:p>
-            <a:endParaRPr lang="en-US"/>
-          </a:p>
-        </p:txBody>
-      </p:sp>
-      <p:sp>
-        <p:nvSpPr>
-          <p:cNvPr id="3" name="Date Placeholder 2"/>
-          <p:cNvSpPr>
-            <a:spLocks noGrp="1"/>
-          </p:cNvSpPr>
-          <p:nvPr>
-            <p:ph type="dt" idx="1"/>
-          </p:nvPr>
-        </p:nvSpPr>
-        <p:spPr>
-          <a:xfrm>
-            <a:off x="3884613" y="0"/>
-            <a:ext cx="2971800" cy="457200"/>
-          </a:xfrm>
-          <a:prstGeom prst="rect">
-            <a:avLst/>
-          </a:prstGeom>
-        </p:spPr>
-        <p:txBody>
-          <a:bodyPr vert="horz" lIns="91440" tIns="45720" rIns="91440" bIns="45720" rtlCol="0"/>
-          <a:lstStyle>
-            <a:lvl1pPr algn="r">
-              <a:defRPr sz="1200"/>
-            </a:lvl1pPr>
-          </a:lstStyle>
-          <a:p>
-            <a:fld id="{0F89C1C7-3DCD-1040-A9CF-14679D8B5DDD}" type="datetimeFigureOut">
-              <a:rPr lang="en-US" smtClean="0"/>
-              <a:t>10/17/16</a:t>
-            </a:fld>
-            <a:endParaRPr lang="en-US"/>
-          </a:p>
-        </p:txBody>
-      </p:sp>
-      <p:sp>
-        <p:nvSpPr>
-          <p:cNvPr id="4" name="Slide Image Placeholder 3"/>
-          <p:cNvSpPr>
-            <a:spLocks noGrp="1" noRot="1" noChangeAspect="1"/>
-          </p:cNvSpPr>
-          <p:nvPr>
-            <p:ph type="sldImg" idx="2"/>
-          </p:nvPr>
-        </p:nvSpPr>
-        <p:spPr>
-          <a:xfrm>
-            <a:off x="1143000" y="685800"/>
-            <a:ext cx="4572000" cy="3429000"/>
-          </a:xfrm>
-          <a:prstGeom prst="rect">
-            <a:avLst/>
-          </a:prstGeom>
-          <a:noFill/>
-          <a:ln w="12700">
-            <a:solidFill>
-              <a:prstClr val="black"/>
-            </a:solidFill>
-          </a:ln>
-        </p:spPr>
-        <p:txBody>
-          <a:bodyPr vert="horz" lIns="91440" tIns="45720" rIns="91440" bIns="45720" rtlCol="0" anchor="ctr"/>
-          <a:lstStyle/>
-          <a:p>
-            <a:endParaRPr lang="en-US"/>
-          </a:p>
-        </p:txBody>
-      </p:sp>
-      <p:sp>
-        <p:nvSpPr>
-          <p:cNvPr id="5" name="Notes Placeholder 4"/>
-          <p:cNvSpPr>
-            <a:spLocks noGrp="1"/>
-          </p:cNvSpPr>
-          <p:nvPr>
-            <p:ph type="body" sz="quarter" idx="3"/>
-          </p:nvPr>
-        </p:nvSpPr>
-        <p:spPr>
-          <a:xfrm>
-            <a:off x="685800" y="4343400"/>
-            <a:ext cx="5486400" cy="4114800"/>
-          </a:xfrm>
-          <a:prstGeom prst="rect">
-            <a:avLst/>
-          </a:prstGeom>
-        </p:spPr>
-        <p:txBody>
-          <a:bodyPr vert="horz" lIns="91440" tIns="45720" rIns="91440" bIns="45720" rtlCol="0"/>
-          <a:lstStyle/>
-          <a:p>
-            <a:pPr lvl="0"/>
-            <a:r>
-              <a:rPr lang="en-US" smtClean="0"/>
-              <a:t>Click to edit Master text styles</a:t>
-            </a:r>
-          </a:p>
-          <a:p>
-            <a:pPr lvl="1"/>
-            <a:r>
-              <a:rPr lang="en-US" smtClean="0"/>
-              <a:t>Second level</a:t>
-            </a:r>
-          </a:p>
-          <a:p>
-            <a:pPr lvl="2"/>
-            <a:r>
-              <a:rPr lang="en-US" smtClean="0"/>
-              <a:t>Third level</a:t>
-            </a:r>
-          </a:p>
-          <a:p>
-            <a:pPr lvl="3"/>
-            <a:r>
-              <a:rPr lang="en-US" smtClean="0"/>
-              <a:t>Fourth level</a:t>
-            </a:r>
-          </a:p>
-          <a:p>
-            <a:pPr lvl="4"/>
-            <a:r>
-              <a:rPr lang="en-US" smtClean="0"/>
-              <a:t>Fifth level</a:t>
-            </a:r>
-            <a:endParaRPr lang="en-US"/>
-          </a:p>
-        </p:txBody>
-      </p:sp>
-      <p:sp>
-        <p:nvSpPr>
-          <p:cNvPr id="6" name="Footer Placeholder 5"/>
-          <p:cNvSpPr>
-            <a:spLocks noGrp="1"/>
-          </p:cNvSpPr>
-          <p:nvPr>
-            <p:ph type="ftr" sz="quarter" idx="4"/>
-          </p:nvPr>
-        </p:nvSpPr>
-        <p:spPr>
-          <a:xfrm>
-            <a:off x="0" y="8685213"/>
-            <a:ext cx="2971800" cy="457200"/>
-          </a:xfrm>
-          <a:prstGeom prst="rect">
-            <a:avLst/>
-          </a:prstGeom>
-        </p:spPr>
-        <p:txBody>
-          <a:bodyPr vert="horz" lIns="91440" tIns="45720" rIns="91440" bIns="45720" rtlCol="0" anchor="b"/>
-          <a:lstStyle>
-            <a:lvl1pPr algn="l">
-              <a:defRPr sz="1200"/>
-            </a:lvl1pPr>
-          </a:lstStyle>
-          <a:p>
-            <a:endParaRPr lang="en-US"/>
-          </a:p>
-        </p:txBody>
-      </p:sp>
-      <p:sp>
-        <p:nvSpPr>
-          <p:cNvPr id="7" name="Slide Number Placeholder 6"/>
-          <p:cNvSpPr>
-            <a:spLocks noGrp="1"/>
-          </p:cNvSpPr>
-          <p:nvPr>
-            <p:ph type="sldNum" sz="quarter" idx="5"/>
-          </p:nvPr>
-        </p:nvSpPr>
-        <p:spPr>
-          <a:xfrm>
-            <a:off x="3884613" y="8685213"/>
-            <a:ext cx="2971800" cy="457200"/>
-          </a:xfrm>
-          <a:prstGeom prst="rect">
-            <a:avLst/>
-          </a:prstGeom>
-        </p:spPr>
-        <p:txBody>
-          <a:bodyPr vert="horz" lIns="91440" tIns="45720" rIns="91440" bIns="45720" rtlCol="0" anchor="b"/>
-          <a:lstStyle>
-            <a:lvl1pPr algn="r">
-              <a:defRPr sz="1200"/>
-            </a:lvl1pPr>
-          </a:lstStyle>
-          <a:p>
-            <a:fld id="{BB5E49A5-4136-284D-997B-48E1D791AD67}" type="slidenum">
-              <a:rPr lang="en-US" smtClean="0"/>
-              <a:t>‹#›</a:t>
-            </a:fld>
-            <a:endParaRPr lang="en-US"/>
-          </a:p>
-        </p:txBody>
-      </p:sp>
     </p:spTree>
     <p:extLst>
       <p:ext uri="{BB962C8B-B14F-4D97-AF65-F5344CB8AC3E}">
-        <p14:creationId xmlns:p14="http://schemas.microsoft.com/office/powerpoint/2010/main" val="2623252185"/>
+        <p14:creationId xmlns:p14="http://schemas.microsoft.com/office/powerpoint/2010/main" val="469468903"/>
       </p:ext>
     </p:extLst>
   </p:cSld>
   <p:clrMap bg1="lt1" tx1="dk1" bg2="lt2" tx2="dk2" accent1="accent1" accent2="accent2" accent3="accent3" accent4="accent4" accent5="accent5" accent6="accent6" hlink="hlink" folHlink="folHlink"/>
   <p:notesStyle>
-    <a:lvl1pPr marL="0" algn="l" defTabSz="457200" rtl="0" eaLnBrk="1" latinLnBrk="0" hangingPunct="1">
+    <a:lvl1pPr marL="0" algn="l" defTabSz="914400" rtl="0" eaLnBrk="1" latinLnBrk="0" hangingPunct="1">
       <a:defRPr sz="1200" kern="1200">
         <a:solidFill>
           <a:schemeClr val="tx1"/>
@@ -411,7 +234,7 @@
         <a:cs typeface="+mn-cs"/>
       </a:defRPr>
     </a:lvl1pPr>
-    <a:lvl2pPr marL="457200" algn="l" defTabSz="457200" rtl="0" eaLnBrk="1" latinLnBrk="0" hangingPunct="1">
+    <a:lvl2pPr marL="457200" algn="l" defTabSz="914400" rtl="0" eaLnBrk="1" latinLnBrk="0" hangingPunct="1">
       <a:defRPr sz="1200" kern="1200">
         <a:solidFill>
           <a:schemeClr val="tx1"/>
@@ -421,7 +244,7 @@
         <a:cs typeface="+mn-cs"/>
       </a:defRPr>
     </a:lvl2pPr>
-    <a:lvl3pPr marL="914400" algn="l" defTabSz="457200" rtl="0" eaLnBrk="1" latinLnBrk="0" hangingPunct="1">
+    <a:lvl3pPr marL="914400" algn="l" defTabSz="914400" rtl="0" eaLnBrk="1" latinLnBrk="0" hangingPunct="1">
       <a:defRPr sz="1200" kern="1200">
         <a:solidFill>
           <a:schemeClr val="tx1"/>
@@ -431,7 +254,7 @@
         <a:cs typeface="+mn-cs"/>
       </a:defRPr>
     </a:lvl3pPr>
-    <a:lvl4pPr marL="1371600" algn="l" defTabSz="457200" rtl="0" eaLnBrk="1" latinLnBrk="0" hangingPunct="1">
+    <a:lvl4pPr marL="1371600" algn="l" defTabSz="914400" rtl="0" eaLnBrk="1" latinLnBrk="0" hangingPunct="1">
       <a:defRPr sz="1200" kern="1200">
         <a:solidFill>
           <a:schemeClr val="tx1"/>
@@ -441,7 +264,7 @@
         <a:cs typeface="+mn-cs"/>
       </a:defRPr>
     </a:lvl4pPr>
-    <a:lvl5pPr marL="1828800" algn="l" defTabSz="457200" rtl="0" eaLnBrk="1" latinLnBrk="0" hangingPunct="1">
+    <a:lvl5pPr marL="1828800" algn="l" defTabSz="914400" rtl="0" eaLnBrk="1" latinLnBrk="0" hangingPunct="1">
       <a:defRPr sz="1200" kern="1200">
         <a:solidFill>
           <a:schemeClr val="tx1"/>
@@ -451,7 +274,7 @@
         <a:cs typeface="+mn-cs"/>
       </a:defRPr>
     </a:lvl5pPr>
-    <a:lvl6pPr marL="2286000" algn="l" defTabSz="457200" rtl="0" eaLnBrk="1" latinLnBrk="0" hangingPunct="1">
+    <a:lvl6pPr marL="2286000" algn="l" defTabSz="914400" rtl="0" eaLnBrk="1" latinLnBrk="0" hangingPunct="1">
       <a:defRPr sz="1200" kern="1200">
         <a:solidFill>
           <a:schemeClr val="tx1"/>
@@ -461,7 +284,7 @@
         <a:cs typeface="+mn-cs"/>
       </a:defRPr>
     </a:lvl6pPr>
-    <a:lvl7pPr marL="2743200" algn="l" defTabSz="457200" rtl="0" eaLnBrk="1" latinLnBrk="0" hangingPunct="1">
+    <a:lvl7pPr marL="2743200" algn="l" defTabSz="914400" rtl="0" eaLnBrk="1" latinLnBrk="0" hangingPunct="1">
       <a:defRPr sz="1200" kern="1200">
         <a:solidFill>
           <a:schemeClr val="tx1"/>
@@ -471,7 +294,7 @@
         <a:cs typeface="+mn-cs"/>
       </a:defRPr>
     </a:lvl7pPr>
-    <a:lvl8pPr marL="3200400" algn="l" defTabSz="457200" rtl="0" eaLnBrk="1" latinLnBrk="0" hangingPunct="1">
+    <a:lvl8pPr marL="3200400" algn="l" defTabSz="914400" rtl="0" eaLnBrk="1" latinLnBrk="0" hangingPunct="1">
       <a:defRPr sz="1200" kern="1200">
         <a:solidFill>
           <a:schemeClr val="tx1"/>
@@ -481,7 +304,7 @@
         <a:cs typeface="+mn-cs"/>
       </a:defRPr>
     </a:lvl8pPr>
-    <a:lvl9pPr marL="3657600" algn="l" defTabSz="457200" rtl="0" eaLnBrk="1" latinLnBrk="0" hangingPunct="1">
+    <a:lvl9pPr marL="3657600" algn="l" defTabSz="914400" rtl="0" eaLnBrk="1" latinLnBrk="0" hangingPunct="1">
       <a:defRPr sz="1200" kern="1200">
         <a:solidFill>
           <a:schemeClr val="tx1"/>
@@ -496,7 +319,7 @@
 </file>
 
 <file path=ppt/notesSlides/notesSlide1.xml><?xml version="1.0" encoding="utf-8"?>
-<p:notes xmlns:a="http://schemas.openxmlformats.org/drawingml/2006/main" xmlns:p="http://schemas.openxmlformats.org/presentationml/2006/main" xmlns:r="http://schemas.openxmlformats.org/officeDocument/2006/relationships">
+<p:notes xmlns:a="http://schemas.openxmlformats.org/drawingml/2006/main" xmlns:r="http://schemas.openxmlformats.org/officeDocument/2006/relationships" xmlns:p="http://schemas.openxmlformats.org/presentationml/2006/main">
   <p:cSld>
     <p:spTree>
       <p:nvGrpSpPr>
@@ -516,7 +339,7 @@
         <p:nvSpPr>
           <p:cNvPr id="2" name="Slide Image Placeholder 1"/>
           <p:cNvSpPr>
-            <a:spLocks noGrp="1"/>
+            <a:spLocks noGrp="1" noRot="1" noChangeAspect="1"/>
           </p:cNvSpPr>
           <p:nvPr>
             <p:ph type="sldImg" idx="2"/>
@@ -531,7 +354,7 @@
             <a:spLocks noGrp="1"/>
           </p:cNvSpPr>
           <p:nvPr>
-            <p:ph type="body" idx="3" sz="quarter"/>
+            <p:ph type="body" sz="quarter" idx="3"/>
           </p:nvPr>
         </p:nvSpPr>
         <p:spPr/>
@@ -571,7 +394,7 @@
             <a:spLocks noGrp="1"/>
           </p:cNvSpPr>
           <p:nvPr>
-            <p:ph type="sldNum" idx="5" sz="quarter"/>
+            <p:ph type="sldNum" sz="quarter" idx="5"/>
           </p:nvPr>
         </p:nvSpPr>
         <p:spPr/>
@@ -585,7 +408,7 @@
 </file>
 
 <file path=ppt/notesSlides/notesSlide10.xml><?xml version="1.0" encoding="utf-8"?>
-<p:notes xmlns:a="http://schemas.openxmlformats.org/drawingml/2006/main" xmlns:p="http://schemas.openxmlformats.org/presentationml/2006/main" xmlns:r="http://schemas.openxmlformats.org/officeDocument/2006/relationships">
+<p:notes xmlns:a="http://schemas.openxmlformats.org/drawingml/2006/main" xmlns:r="http://schemas.openxmlformats.org/officeDocument/2006/relationships" xmlns:p="http://schemas.openxmlformats.org/presentationml/2006/main">
   <p:cSld>
     <p:spTree>
       <p:nvGrpSpPr>
@@ -605,7 +428,7 @@
         <p:nvSpPr>
           <p:cNvPr id="2" name="Slide Image Placeholder 1"/>
           <p:cNvSpPr>
-            <a:spLocks noGrp="1"/>
+            <a:spLocks noGrp="1" noRot="1" noChangeAspect="1"/>
           </p:cNvSpPr>
           <p:nvPr>
             <p:ph type="sldImg" idx="2"/>
@@ -620,7 +443,7 @@
             <a:spLocks noGrp="1"/>
           </p:cNvSpPr>
           <p:nvPr>
-            <p:ph type="body" idx="3" sz="quarter"/>
+            <p:ph type="body" sz="quarter" idx="3"/>
           </p:nvPr>
         </p:nvSpPr>
         <p:spPr/>
@@ -668,7 +491,7 @@
             <a:spLocks noGrp="1"/>
           </p:cNvSpPr>
           <p:nvPr>
-            <p:ph type="sldNum" idx="5" sz="quarter"/>
+            <p:ph type="sldNum" sz="quarter" idx="5"/>
           </p:nvPr>
         </p:nvSpPr>
         <p:spPr/>
@@ -682,7 +505,7 @@
 </file>
 
 <file path=ppt/notesSlides/notesSlide11.xml><?xml version="1.0" encoding="utf-8"?>
-<p:notes xmlns:a="http://schemas.openxmlformats.org/drawingml/2006/main" xmlns:p="http://schemas.openxmlformats.org/presentationml/2006/main" xmlns:r="http://schemas.openxmlformats.org/officeDocument/2006/relationships">
+<p:notes xmlns:a="http://schemas.openxmlformats.org/drawingml/2006/main" xmlns:r="http://schemas.openxmlformats.org/officeDocument/2006/relationships" xmlns:p="http://schemas.openxmlformats.org/presentationml/2006/main">
   <p:cSld>
     <p:spTree>
       <p:nvGrpSpPr>
@@ -702,7 +525,7 @@
         <p:nvSpPr>
           <p:cNvPr id="2" name="Slide Image Placeholder 1"/>
           <p:cNvSpPr>
-            <a:spLocks noGrp="1"/>
+            <a:spLocks noGrp="1" noRot="1" noChangeAspect="1"/>
           </p:cNvSpPr>
           <p:nvPr>
             <p:ph type="sldImg" idx="2"/>
@@ -717,7 +540,7 @@
             <a:spLocks noGrp="1"/>
           </p:cNvSpPr>
           <p:nvPr>
-            <p:ph type="body" idx="3" sz="quarter"/>
+            <p:ph type="body" sz="quarter" idx="3"/>
           </p:nvPr>
         </p:nvSpPr>
         <p:spPr/>
@@ -765,7 +588,7 @@
             <a:spLocks noGrp="1"/>
           </p:cNvSpPr>
           <p:nvPr>
-            <p:ph type="sldNum" idx="5" sz="quarter"/>
+            <p:ph type="sldNum" sz="quarter" idx="5"/>
           </p:nvPr>
         </p:nvSpPr>
         <p:spPr/>
@@ -779,7 +602,7 @@
 </file>
 
 <file path=ppt/notesSlides/notesSlide12.xml><?xml version="1.0" encoding="utf-8"?>
-<p:notes xmlns:a="http://schemas.openxmlformats.org/drawingml/2006/main" xmlns:p="http://schemas.openxmlformats.org/presentationml/2006/main" xmlns:r="http://schemas.openxmlformats.org/officeDocument/2006/relationships">
+<p:notes xmlns:a="http://schemas.openxmlformats.org/drawingml/2006/main" xmlns:r="http://schemas.openxmlformats.org/officeDocument/2006/relationships" xmlns:p="http://schemas.openxmlformats.org/presentationml/2006/main">
   <p:cSld>
     <p:spTree>
       <p:nvGrpSpPr>
@@ -799,7 +622,7 @@
         <p:nvSpPr>
           <p:cNvPr id="2" name="Slide Image Placeholder 1"/>
           <p:cNvSpPr>
-            <a:spLocks noGrp="1"/>
+            <a:spLocks noGrp="1" noRot="1" noChangeAspect="1"/>
           </p:cNvSpPr>
           <p:nvPr>
             <p:ph type="sldImg" idx="2"/>
@@ -814,7 +637,7 @@
             <a:spLocks noGrp="1"/>
           </p:cNvSpPr>
           <p:nvPr>
-            <p:ph type="body" idx="3" sz="quarter"/>
+            <p:ph type="body" sz="quarter" idx="3"/>
           </p:nvPr>
         </p:nvSpPr>
         <p:spPr/>
@@ -862,7 +685,7 @@
             <a:spLocks noGrp="1"/>
           </p:cNvSpPr>
           <p:nvPr>
-            <p:ph type="sldNum" idx="5" sz="quarter"/>
+            <p:ph type="sldNum" sz="quarter" idx="5"/>
           </p:nvPr>
         </p:nvSpPr>
         <p:spPr/>
@@ -876,7 +699,7 @@
 </file>
 
 <file path=ppt/notesSlides/notesSlide13.xml><?xml version="1.0" encoding="utf-8"?>
-<p:notes xmlns:a="http://schemas.openxmlformats.org/drawingml/2006/main" xmlns:p="http://schemas.openxmlformats.org/presentationml/2006/main" xmlns:r="http://schemas.openxmlformats.org/officeDocument/2006/relationships">
+<p:notes xmlns:a="http://schemas.openxmlformats.org/drawingml/2006/main" xmlns:r="http://schemas.openxmlformats.org/officeDocument/2006/relationships" xmlns:p="http://schemas.openxmlformats.org/presentationml/2006/main">
   <p:cSld>
     <p:spTree>
       <p:nvGrpSpPr>
@@ -896,7 +719,7 @@
         <p:nvSpPr>
           <p:cNvPr id="2" name="Slide Image Placeholder 1"/>
           <p:cNvSpPr>
-            <a:spLocks noGrp="1"/>
+            <a:spLocks noGrp="1" noRot="1" noChangeAspect="1"/>
           </p:cNvSpPr>
           <p:nvPr>
             <p:ph type="sldImg" idx="2"/>
@@ -911,7 +734,7 @@
             <a:spLocks noGrp="1"/>
           </p:cNvSpPr>
           <p:nvPr>
-            <p:ph type="body" idx="3" sz="quarter"/>
+            <p:ph type="body" sz="quarter" idx="3"/>
           </p:nvPr>
         </p:nvSpPr>
         <p:spPr/>
@@ -943,7 +766,7 @@
             <a:spLocks noGrp="1"/>
           </p:cNvSpPr>
           <p:nvPr>
-            <p:ph type="sldNum" idx="5" sz="quarter"/>
+            <p:ph type="sldNum" sz="quarter" idx="5"/>
           </p:nvPr>
         </p:nvSpPr>
         <p:spPr/>
@@ -957,7 +780,7 @@
 </file>
 
 <file path=ppt/notesSlides/notesSlide14.xml><?xml version="1.0" encoding="utf-8"?>
-<p:notes xmlns:a="http://schemas.openxmlformats.org/drawingml/2006/main" xmlns:p="http://schemas.openxmlformats.org/presentationml/2006/main" xmlns:r="http://schemas.openxmlformats.org/officeDocument/2006/relationships">
+<p:notes xmlns:a="http://schemas.openxmlformats.org/drawingml/2006/main" xmlns:r="http://schemas.openxmlformats.org/officeDocument/2006/relationships" xmlns:p="http://schemas.openxmlformats.org/presentationml/2006/main">
   <p:cSld>
     <p:spTree>
       <p:nvGrpSpPr>
@@ -977,7 +800,7 @@
         <p:nvSpPr>
           <p:cNvPr id="2" name="Slide Image Placeholder 1"/>
           <p:cNvSpPr>
-            <a:spLocks noGrp="1"/>
+            <a:spLocks noGrp="1" noRot="1" noChangeAspect="1"/>
           </p:cNvSpPr>
           <p:nvPr>
             <p:ph type="sldImg" idx="2"/>
@@ -992,7 +815,7 @@
             <a:spLocks noGrp="1"/>
           </p:cNvSpPr>
           <p:nvPr>
-            <p:ph type="body" idx="3" sz="quarter"/>
+            <p:ph type="body" sz="quarter" idx="3"/>
           </p:nvPr>
         </p:nvSpPr>
         <p:spPr/>
@@ -1040,7 +863,7 @@
             <a:spLocks noGrp="1"/>
           </p:cNvSpPr>
           <p:nvPr>
-            <p:ph type="sldNum" idx="5" sz="quarter"/>
+            <p:ph type="sldNum" sz="quarter" idx="5"/>
           </p:nvPr>
         </p:nvSpPr>
         <p:spPr/>
@@ -1054,7 +877,7 @@
 </file>
 
 <file path=ppt/notesSlides/notesSlide15.xml><?xml version="1.0" encoding="utf-8"?>
-<p:notes xmlns:a="http://schemas.openxmlformats.org/drawingml/2006/main" xmlns:p="http://schemas.openxmlformats.org/presentationml/2006/main" xmlns:r="http://schemas.openxmlformats.org/officeDocument/2006/relationships">
+<p:notes xmlns:a="http://schemas.openxmlformats.org/drawingml/2006/main" xmlns:r="http://schemas.openxmlformats.org/officeDocument/2006/relationships" xmlns:p="http://schemas.openxmlformats.org/presentationml/2006/main">
   <p:cSld>
     <p:spTree>
       <p:nvGrpSpPr>
@@ -1074,7 +897,7 @@
         <p:nvSpPr>
           <p:cNvPr id="2" name="Slide Image Placeholder 1"/>
           <p:cNvSpPr>
-            <a:spLocks noGrp="1"/>
+            <a:spLocks noGrp="1" noRot="1" noChangeAspect="1"/>
           </p:cNvSpPr>
           <p:nvPr>
             <p:ph type="sldImg" idx="2"/>
@@ -1089,7 +912,7 @@
             <a:spLocks noGrp="1"/>
           </p:cNvSpPr>
           <p:nvPr>
-            <p:ph type="body" idx="3" sz="quarter"/>
+            <p:ph type="body" sz="quarter" idx="3"/>
           </p:nvPr>
         </p:nvSpPr>
         <p:spPr/>
@@ -1113,7 +936,7 @@
             <a:spLocks noGrp="1"/>
           </p:cNvSpPr>
           <p:nvPr>
-            <p:ph type="sldNum" idx="5" sz="quarter"/>
+            <p:ph type="sldNum" sz="quarter" idx="5"/>
           </p:nvPr>
         </p:nvSpPr>
         <p:spPr/>
@@ -1127,7 +950,7 @@
 </file>
 
 <file path=ppt/notesSlides/notesSlide16.xml><?xml version="1.0" encoding="utf-8"?>
-<p:notes xmlns:a="http://schemas.openxmlformats.org/drawingml/2006/main" xmlns:p="http://schemas.openxmlformats.org/presentationml/2006/main" xmlns:r="http://schemas.openxmlformats.org/officeDocument/2006/relationships">
+<p:notes xmlns:a="http://schemas.openxmlformats.org/drawingml/2006/main" xmlns:r="http://schemas.openxmlformats.org/officeDocument/2006/relationships" xmlns:p="http://schemas.openxmlformats.org/presentationml/2006/main">
   <p:cSld>
     <p:spTree>
       <p:nvGrpSpPr>
@@ -1147,7 +970,7 @@
         <p:nvSpPr>
           <p:cNvPr id="2" name="Slide Image Placeholder 1"/>
           <p:cNvSpPr>
-            <a:spLocks noGrp="1"/>
+            <a:spLocks noGrp="1" noRot="1" noChangeAspect="1"/>
           </p:cNvSpPr>
           <p:nvPr>
             <p:ph type="sldImg" idx="2"/>
@@ -1162,7 +985,7 @@
             <a:spLocks noGrp="1"/>
           </p:cNvSpPr>
           <p:nvPr>
-            <p:ph type="body" idx="3" sz="quarter"/>
+            <p:ph type="body" sz="quarter" idx="3"/>
           </p:nvPr>
         </p:nvSpPr>
         <p:spPr/>
@@ -1210,7 +1033,7 @@
             <a:spLocks noGrp="1"/>
           </p:cNvSpPr>
           <p:nvPr>
-            <p:ph type="sldNum" idx="5" sz="quarter"/>
+            <p:ph type="sldNum" sz="quarter" idx="5"/>
           </p:nvPr>
         </p:nvSpPr>
         <p:spPr/>
@@ -1224,7 +1047,7 @@
 </file>
 
 <file path=ppt/notesSlides/notesSlide17.xml><?xml version="1.0" encoding="utf-8"?>
-<p:notes xmlns:a="http://schemas.openxmlformats.org/drawingml/2006/main" xmlns:p="http://schemas.openxmlformats.org/presentationml/2006/main" xmlns:r="http://schemas.openxmlformats.org/officeDocument/2006/relationships">
+<p:notes xmlns:a="http://schemas.openxmlformats.org/drawingml/2006/main" xmlns:r="http://schemas.openxmlformats.org/officeDocument/2006/relationships" xmlns:p="http://schemas.openxmlformats.org/presentationml/2006/main">
   <p:cSld>
     <p:spTree>
       <p:nvGrpSpPr>
@@ -1244,7 +1067,7 @@
         <p:nvSpPr>
           <p:cNvPr id="2" name="Slide Image Placeholder 1"/>
           <p:cNvSpPr>
-            <a:spLocks noGrp="1"/>
+            <a:spLocks noGrp="1" noRot="1" noChangeAspect="1"/>
           </p:cNvSpPr>
           <p:nvPr>
             <p:ph type="sldImg" idx="2"/>
@@ -1259,7 +1082,7 @@
             <a:spLocks noGrp="1"/>
           </p:cNvSpPr>
           <p:nvPr>
-            <p:ph type="body" idx="3" sz="quarter"/>
+            <p:ph type="body" sz="quarter" idx="3"/>
           </p:nvPr>
         </p:nvSpPr>
         <p:spPr/>
@@ -1291,7 +1114,7 @@
             <a:spLocks noGrp="1"/>
           </p:cNvSpPr>
           <p:nvPr>
-            <p:ph type="sldNum" idx="5" sz="quarter"/>
+            <p:ph type="sldNum" sz="quarter" idx="5"/>
           </p:nvPr>
         </p:nvSpPr>
         <p:spPr/>
@@ -1305,7 +1128,7 @@
 </file>
 
 <file path=ppt/notesSlides/notesSlide18.xml><?xml version="1.0" encoding="utf-8"?>
-<p:notes xmlns:a="http://schemas.openxmlformats.org/drawingml/2006/main" xmlns:p="http://schemas.openxmlformats.org/presentationml/2006/main" xmlns:r="http://schemas.openxmlformats.org/officeDocument/2006/relationships">
+<p:notes xmlns:a="http://schemas.openxmlformats.org/drawingml/2006/main" xmlns:r="http://schemas.openxmlformats.org/officeDocument/2006/relationships" xmlns:p="http://schemas.openxmlformats.org/presentationml/2006/main">
   <p:cSld>
     <p:spTree>
       <p:nvGrpSpPr>
@@ -1325,7 +1148,7 @@
         <p:nvSpPr>
           <p:cNvPr id="2" name="Slide Image Placeholder 1"/>
           <p:cNvSpPr>
-            <a:spLocks noGrp="1"/>
+            <a:spLocks noGrp="1" noRot="1" noChangeAspect="1"/>
           </p:cNvSpPr>
           <p:nvPr>
             <p:ph type="sldImg" idx="2"/>
@@ -1340,7 +1163,7 @@
             <a:spLocks noGrp="1"/>
           </p:cNvSpPr>
           <p:nvPr>
-            <p:ph type="body" idx="3" sz="quarter"/>
+            <p:ph type="body" sz="quarter" idx="3"/>
           </p:nvPr>
         </p:nvSpPr>
         <p:spPr/>
@@ -1372,7 +1195,7 @@
             <a:spLocks noGrp="1"/>
           </p:cNvSpPr>
           <p:nvPr>
-            <p:ph type="sldNum" idx="5" sz="quarter"/>
+            <p:ph type="sldNum" sz="quarter" idx="5"/>
           </p:nvPr>
         </p:nvSpPr>
         <p:spPr/>
@@ -1386,7 +1209,7 @@
 </file>
 
 <file path=ppt/notesSlides/notesSlide19.xml><?xml version="1.0" encoding="utf-8"?>
-<p:notes xmlns:a="http://schemas.openxmlformats.org/drawingml/2006/main" xmlns:p="http://schemas.openxmlformats.org/presentationml/2006/main" xmlns:r="http://schemas.openxmlformats.org/officeDocument/2006/relationships">
+<p:notes xmlns:a="http://schemas.openxmlformats.org/drawingml/2006/main" xmlns:r="http://schemas.openxmlformats.org/officeDocument/2006/relationships" xmlns:p="http://schemas.openxmlformats.org/presentationml/2006/main">
   <p:cSld>
     <p:spTree>
       <p:nvGrpSpPr>
@@ -1406,7 +1229,7 @@
         <p:nvSpPr>
           <p:cNvPr id="2" name="Slide Image Placeholder 1"/>
           <p:cNvSpPr>
-            <a:spLocks noGrp="1"/>
+            <a:spLocks noGrp="1" noRot="1" noChangeAspect="1"/>
           </p:cNvSpPr>
           <p:nvPr>
             <p:ph type="sldImg" idx="2"/>
@@ -1421,7 +1244,7 @@
             <a:spLocks noGrp="1"/>
           </p:cNvSpPr>
           <p:nvPr>
-            <p:ph type="body" idx="3" sz="quarter"/>
+            <p:ph type="body" sz="quarter" idx="3"/>
           </p:nvPr>
         </p:nvSpPr>
         <p:spPr/>
@@ -1469,7 +1292,7 @@
             <a:spLocks noGrp="1"/>
           </p:cNvSpPr>
           <p:nvPr>
-            <p:ph type="sldNum" idx="5" sz="quarter"/>
+            <p:ph type="sldNum" sz="quarter" idx="5"/>
           </p:nvPr>
         </p:nvSpPr>
         <p:spPr/>
@@ -1483,7 +1306,7 @@
 </file>
 
 <file path=ppt/notesSlides/notesSlide2.xml><?xml version="1.0" encoding="utf-8"?>
-<p:notes xmlns:a="http://schemas.openxmlformats.org/drawingml/2006/main" xmlns:p="http://schemas.openxmlformats.org/presentationml/2006/main" xmlns:r="http://schemas.openxmlformats.org/officeDocument/2006/relationships">
+<p:notes xmlns:a="http://schemas.openxmlformats.org/drawingml/2006/main" xmlns:r="http://schemas.openxmlformats.org/officeDocument/2006/relationships" xmlns:p="http://schemas.openxmlformats.org/presentationml/2006/main">
   <p:cSld>
     <p:spTree>
       <p:nvGrpSpPr>
@@ -1503,7 +1326,7 @@
         <p:nvSpPr>
           <p:cNvPr id="2" name="Slide Image Placeholder 1"/>
           <p:cNvSpPr>
-            <a:spLocks noGrp="1"/>
+            <a:spLocks noGrp="1" noRot="1" noChangeAspect="1"/>
           </p:cNvSpPr>
           <p:nvPr>
             <p:ph type="sldImg" idx="2"/>
@@ -1518,7 +1341,7 @@
             <a:spLocks noGrp="1"/>
           </p:cNvSpPr>
           <p:nvPr>
-            <p:ph type="body" idx="3" sz="quarter"/>
+            <p:ph type="body" sz="quarter" idx="3"/>
           </p:nvPr>
         </p:nvSpPr>
         <p:spPr/>
@@ -1550,7 +1373,7 @@
             <a:spLocks noGrp="1"/>
           </p:cNvSpPr>
           <p:nvPr>
-            <p:ph type="sldNum" idx="5" sz="quarter"/>
+            <p:ph type="sldNum" sz="quarter" idx="5"/>
           </p:nvPr>
         </p:nvSpPr>
         <p:spPr/>
@@ -1564,7 +1387,7 @@
 </file>
 
 <file path=ppt/notesSlides/notesSlide20.xml><?xml version="1.0" encoding="utf-8"?>
-<p:notes xmlns:a="http://schemas.openxmlformats.org/drawingml/2006/main" xmlns:p="http://schemas.openxmlformats.org/presentationml/2006/main" xmlns:r="http://schemas.openxmlformats.org/officeDocument/2006/relationships">
+<p:notes xmlns:a="http://schemas.openxmlformats.org/drawingml/2006/main" xmlns:r="http://schemas.openxmlformats.org/officeDocument/2006/relationships" xmlns:p="http://schemas.openxmlformats.org/presentationml/2006/main">
   <p:cSld>
     <p:spTree>
       <p:nvGrpSpPr>
@@ -1584,7 +1407,7 @@
         <p:nvSpPr>
           <p:cNvPr id="2" name="Slide Image Placeholder 1"/>
           <p:cNvSpPr>
-            <a:spLocks noGrp="1"/>
+            <a:spLocks noGrp="1" noRot="1" noChangeAspect="1"/>
           </p:cNvSpPr>
           <p:nvPr>
             <p:ph type="sldImg" idx="2"/>
@@ -1599,7 +1422,7 @@
             <a:spLocks noGrp="1"/>
           </p:cNvSpPr>
           <p:nvPr>
-            <p:ph type="body" idx="3" sz="quarter"/>
+            <p:ph type="body" sz="quarter" idx="3"/>
           </p:nvPr>
         </p:nvSpPr>
         <p:spPr/>
@@ -1631,7 +1454,7 @@
             <a:spLocks noGrp="1"/>
           </p:cNvSpPr>
           <p:nvPr>
-            <p:ph type="sldNum" idx="5" sz="quarter"/>
+            <p:ph type="sldNum" sz="quarter" idx="5"/>
           </p:nvPr>
         </p:nvSpPr>
         <p:spPr/>
@@ -1645,7 +1468,7 @@
 </file>
 
 <file path=ppt/notesSlides/notesSlide21.xml><?xml version="1.0" encoding="utf-8"?>
-<p:notes xmlns:a="http://schemas.openxmlformats.org/drawingml/2006/main" xmlns:p="http://schemas.openxmlformats.org/presentationml/2006/main" xmlns:r="http://schemas.openxmlformats.org/officeDocument/2006/relationships">
+<p:notes xmlns:a="http://schemas.openxmlformats.org/drawingml/2006/main" xmlns:r="http://schemas.openxmlformats.org/officeDocument/2006/relationships" xmlns:p="http://schemas.openxmlformats.org/presentationml/2006/main">
   <p:cSld>
     <p:spTree>
       <p:nvGrpSpPr>
@@ -1665,7 +1488,7 @@
         <p:nvSpPr>
           <p:cNvPr id="2" name="Slide Image Placeholder 1"/>
           <p:cNvSpPr>
-            <a:spLocks noGrp="1"/>
+            <a:spLocks noGrp="1" noRot="1" noChangeAspect="1"/>
           </p:cNvSpPr>
           <p:nvPr>
             <p:ph type="sldImg" idx="2"/>
@@ -1680,7 +1503,7 @@
             <a:spLocks noGrp="1"/>
           </p:cNvSpPr>
           <p:nvPr>
-            <p:ph type="body" idx="3" sz="quarter"/>
+            <p:ph type="body" sz="quarter" idx="3"/>
           </p:nvPr>
         </p:nvSpPr>
         <p:spPr/>
@@ -1728,7 +1551,7 @@
             <a:spLocks noGrp="1"/>
           </p:cNvSpPr>
           <p:nvPr>
-            <p:ph type="sldNum" idx="5" sz="quarter"/>
+            <p:ph type="sldNum" sz="quarter" idx="5"/>
           </p:nvPr>
         </p:nvSpPr>
         <p:spPr/>
@@ -1742,7 +1565,7 @@
 </file>
 
 <file path=ppt/notesSlides/notesSlide22.xml><?xml version="1.0" encoding="utf-8"?>
-<p:notes xmlns:a="http://schemas.openxmlformats.org/drawingml/2006/main" xmlns:p="http://schemas.openxmlformats.org/presentationml/2006/main" xmlns:r="http://schemas.openxmlformats.org/officeDocument/2006/relationships">
+<p:notes xmlns:a="http://schemas.openxmlformats.org/drawingml/2006/main" xmlns:r="http://schemas.openxmlformats.org/officeDocument/2006/relationships" xmlns:p="http://schemas.openxmlformats.org/presentationml/2006/main">
   <p:cSld>
     <p:spTree>
       <p:nvGrpSpPr>
@@ -1762,7 +1585,7 @@
         <p:nvSpPr>
           <p:cNvPr id="2" name="Slide Image Placeholder 1"/>
           <p:cNvSpPr>
-            <a:spLocks noGrp="1"/>
+            <a:spLocks noGrp="1" noRot="1" noChangeAspect="1"/>
           </p:cNvSpPr>
           <p:nvPr>
             <p:ph type="sldImg" idx="2"/>
@@ -1777,7 +1600,7 @@
             <a:spLocks noGrp="1"/>
           </p:cNvSpPr>
           <p:nvPr>
-            <p:ph type="body" idx="3" sz="quarter"/>
+            <p:ph type="body" sz="quarter" idx="3"/>
           </p:nvPr>
         </p:nvSpPr>
         <p:spPr/>
@@ -1809,7 +1632,7 @@
             <a:spLocks noGrp="1"/>
           </p:cNvSpPr>
           <p:nvPr>
-            <p:ph type="sldNum" idx="5" sz="quarter"/>
+            <p:ph type="sldNum" sz="quarter" idx="5"/>
           </p:nvPr>
         </p:nvSpPr>
         <p:spPr/>
@@ -1823,7 +1646,7 @@
 </file>
 
 <file path=ppt/notesSlides/notesSlide23.xml><?xml version="1.0" encoding="utf-8"?>
-<p:notes xmlns:a="http://schemas.openxmlformats.org/drawingml/2006/main" xmlns:p="http://schemas.openxmlformats.org/presentationml/2006/main" xmlns:r="http://schemas.openxmlformats.org/officeDocument/2006/relationships">
+<p:notes xmlns:a="http://schemas.openxmlformats.org/drawingml/2006/main" xmlns:r="http://schemas.openxmlformats.org/officeDocument/2006/relationships" xmlns:p="http://schemas.openxmlformats.org/presentationml/2006/main">
   <p:cSld>
     <p:spTree>
       <p:nvGrpSpPr>
@@ -1843,7 +1666,7 @@
         <p:nvSpPr>
           <p:cNvPr id="2" name="Slide Image Placeholder 1"/>
           <p:cNvSpPr>
-            <a:spLocks noGrp="1"/>
+            <a:spLocks noGrp="1" noRot="1" noChangeAspect="1"/>
           </p:cNvSpPr>
           <p:nvPr>
             <p:ph type="sldImg" idx="2"/>
@@ -1858,7 +1681,7 @@
             <a:spLocks noGrp="1"/>
           </p:cNvSpPr>
           <p:nvPr>
-            <p:ph type="body" idx="3" sz="quarter"/>
+            <p:ph type="body" sz="quarter" idx="3"/>
           </p:nvPr>
         </p:nvSpPr>
         <p:spPr/>
@@ -1890,7 +1713,7 @@
             <a:spLocks noGrp="1"/>
           </p:cNvSpPr>
           <p:nvPr>
-            <p:ph type="sldNum" idx="5" sz="quarter"/>
+            <p:ph type="sldNum" sz="quarter" idx="5"/>
           </p:nvPr>
         </p:nvSpPr>
         <p:spPr/>
@@ -1904,7 +1727,7 @@
 </file>
 
 <file path=ppt/notesSlides/notesSlide24.xml><?xml version="1.0" encoding="utf-8"?>
-<p:notes xmlns:a="http://schemas.openxmlformats.org/drawingml/2006/main" xmlns:p="http://schemas.openxmlformats.org/presentationml/2006/main" xmlns:r="http://schemas.openxmlformats.org/officeDocument/2006/relationships">
+<p:notes xmlns:a="http://schemas.openxmlformats.org/drawingml/2006/main" xmlns:r="http://schemas.openxmlformats.org/officeDocument/2006/relationships" xmlns:p="http://schemas.openxmlformats.org/presentationml/2006/main">
   <p:cSld>
     <p:spTree>
       <p:nvGrpSpPr>
@@ -1924,7 +1747,7 @@
         <p:nvSpPr>
           <p:cNvPr id="2" name="Slide Image Placeholder 1"/>
           <p:cNvSpPr>
-            <a:spLocks noGrp="1"/>
+            <a:spLocks noGrp="1" noRot="1" noChangeAspect="1"/>
           </p:cNvSpPr>
           <p:nvPr>
             <p:ph type="sldImg" idx="2"/>
@@ -1939,7 +1762,7 @@
             <a:spLocks noGrp="1"/>
           </p:cNvSpPr>
           <p:nvPr>
-            <p:ph type="body" idx="3" sz="quarter"/>
+            <p:ph type="body" sz="quarter" idx="3"/>
           </p:nvPr>
         </p:nvSpPr>
         <p:spPr/>
@@ -1987,7 +1810,7 @@
             <a:spLocks noGrp="1"/>
           </p:cNvSpPr>
           <p:nvPr>
-            <p:ph type="sldNum" idx="5" sz="quarter"/>
+            <p:ph type="sldNum" sz="quarter" idx="5"/>
           </p:nvPr>
         </p:nvSpPr>
         <p:spPr/>
@@ -2001,7 +1824,7 @@
 </file>
 
 <file path=ppt/notesSlides/notesSlide25.xml><?xml version="1.0" encoding="utf-8"?>
-<p:notes xmlns:a="http://schemas.openxmlformats.org/drawingml/2006/main" xmlns:p="http://schemas.openxmlformats.org/presentationml/2006/main" xmlns:r="http://schemas.openxmlformats.org/officeDocument/2006/relationships">
+<p:notes xmlns:a="http://schemas.openxmlformats.org/drawingml/2006/main" xmlns:r="http://schemas.openxmlformats.org/officeDocument/2006/relationships" xmlns:p="http://schemas.openxmlformats.org/presentationml/2006/main">
   <p:cSld>
     <p:spTree>
       <p:nvGrpSpPr>
@@ -2021,7 +1844,7 @@
         <p:nvSpPr>
           <p:cNvPr id="2" name="Slide Image Placeholder 1"/>
           <p:cNvSpPr>
-            <a:spLocks noGrp="1"/>
+            <a:spLocks noGrp="1" noRot="1" noChangeAspect="1"/>
           </p:cNvSpPr>
           <p:nvPr>
             <p:ph type="sldImg" idx="2"/>
@@ -2036,7 +1859,7 @@
             <a:spLocks noGrp="1"/>
           </p:cNvSpPr>
           <p:nvPr>
-            <p:ph type="body" idx="3" sz="quarter"/>
+            <p:ph type="body" sz="quarter" idx="3"/>
           </p:nvPr>
         </p:nvSpPr>
         <p:spPr/>
@@ -2076,7 +1899,7 @@
             <a:spLocks noGrp="1"/>
           </p:cNvSpPr>
           <p:nvPr>
-            <p:ph type="sldNum" idx="5" sz="quarter"/>
+            <p:ph type="sldNum" sz="quarter" idx="5"/>
           </p:nvPr>
         </p:nvSpPr>
         <p:spPr/>
@@ -2090,7 +1913,7 @@
 </file>
 
 <file path=ppt/notesSlides/notesSlide26.xml><?xml version="1.0" encoding="utf-8"?>
-<p:notes xmlns:a="http://schemas.openxmlformats.org/drawingml/2006/main" xmlns:p="http://schemas.openxmlformats.org/presentationml/2006/main" xmlns:r="http://schemas.openxmlformats.org/officeDocument/2006/relationships">
+<p:notes xmlns:a="http://schemas.openxmlformats.org/drawingml/2006/main" xmlns:r="http://schemas.openxmlformats.org/officeDocument/2006/relationships" xmlns:p="http://schemas.openxmlformats.org/presentationml/2006/main">
   <p:cSld>
     <p:spTree>
       <p:nvGrpSpPr>
@@ -2110,7 +1933,7 @@
         <p:nvSpPr>
           <p:cNvPr id="2" name="Slide Image Placeholder 1"/>
           <p:cNvSpPr>
-            <a:spLocks noGrp="1"/>
+            <a:spLocks noGrp="1" noRot="1" noChangeAspect="1"/>
           </p:cNvSpPr>
           <p:nvPr>
             <p:ph type="sldImg" idx="2"/>
@@ -2125,7 +1948,7 @@
             <a:spLocks noGrp="1"/>
           </p:cNvSpPr>
           <p:nvPr>
-            <p:ph type="body" idx="3" sz="quarter"/>
+            <p:ph type="body" sz="quarter" idx="3"/>
           </p:nvPr>
         </p:nvSpPr>
         <p:spPr/>
@@ -2173,7 +1996,7 @@
             <a:spLocks noGrp="1"/>
           </p:cNvSpPr>
           <p:nvPr>
-            <p:ph type="sldNum" idx="5" sz="quarter"/>
+            <p:ph type="sldNum" sz="quarter" idx="5"/>
           </p:nvPr>
         </p:nvSpPr>
         <p:spPr/>
@@ -2187,7 +2010,7 @@
 </file>
 
 <file path=ppt/notesSlides/notesSlide27.xml><?xml version="1.0" encoding="utf-8"?>
-<p:notes xmlns:a="http://schemas.openxmlformats.org/drawingml/2006/main" xmlns:p="http://schemas.openxmlformats.org/presentationml/2006/main" xmlns:r="http://schemas.openxmlformats.org/officeDocument/2006/relationships">
+<p:notes xmlns:a="http://schemas.openxmlformats.org/drawingml/2006/main" xmlns:r="http://schemas.openxmlformats.org/officeDocument/2006/relationships" xmlns:p="http://schemas.openxmlformats.org/presentationml/2006/main">
   <p:cSld>
     <p:spTree>
       <p:nvGrpSpPr>
@@ -2207,7 +2030,7 @@
         <p:nvSpPr>
           <p:cNvPr id="2" name="Slide Image Placeholder 1"/>
           <p:cNvSpPr>
-            <a:spLocks noGrp="1"/>
+            <a:spLocks noGrp="1" noRot="1" noChangeAspect="1"/>
           </p:cNvSpPr>
           <p:nvPr>
             <p:ph type="sldImg" idx="2"/>
@@ -2222,7 +2045,7 @@
             <a:spLocks noGrp="1"/>
           </p:cNvSpPr>
           <p:nvPr>
-            <p:ph type="body" idx="3" sz="quarter"/>
+            <p:ph type="body" sz="quarter" idx="3"/>
           </p:nvPr>
         </p:nvSpPr>
         <p:spPr/>
@@ -2270,7 +2093,7 @@
             <a:spLocks noGrp="1"/>
           </p:cNvSpPr>
           <p:nvPr>
-            <p:ph type="sldNum" idx="5" sz="quarter"/>
+            <p:ph type="sldNum" sz="quarter" idx="5"/>
           </p:nvPr>
         </p:nvSpPr>
         <p:spPr/>
@@ -2284,7 +2107,7 @@
 </file>
 
 <file path=ppt/notesSlides/notesSlide28.xml><?xml version="1.0" encoding="utf-8"?>
-<p:notes xmlns:a="http://schemas.openxmlformats.org/drawingml/2006/main" xmlns:p="http://schemas.openxmlformats.org/presentationml/2006/main" xmlns:r="http://schemas.openxmlformats.org/officeDocument/2006/relationships">
+<p:notes xmlns:a="http://schemas.openxmlformats.org/drawingml/2006/main" xmlns:r="http://schemas.openxmlformats.org/officeDocument/2006/relationships" xmlns:p="http://schemas.openxmlformats.org/presentationml/2006/main">
   <p:cSld>
     <p:spTree>
       <p:nvGrpSpPr>
@@ -2304,7 +2127,7 @@
         <p:nvSpPr>
           <p:cNvPr id="2" name="Slide Image Placeholder 1"/>
           <p:cNvSpPr>
-            <a:spLocks noGrp="1"/>
+            <a:spLocks noGrp="1" noRot="1" noChangeAspect="1"/>
           </p:cNvSpPr>
           <p:nvPr>
             <p:ph type="sldImg" idx="2"/>
@@ -2319,7 +2142,7 @@
             <a:spLocks noGrp="1"/>
           </p:cNvSpPr>
           <p:nvPr>
-            <p:ph type="body" idx="3" sz="quarter"/>
+            <p:ph type="body" sz="quarter" idx="3"/>
           </p:nvPr>
         </p:nvSpPr>
         <p:spPr/>
@@ -2383,7 +2206,7 @@
             <a:spLocks noGrp="1"/>
           </p:cNvSpPr>
           <p:nvPr>
-            <p:ph type="sldNum" idx="5" sz="quarter"/>
+            <p:ph type="sldNum" sz="quarter" idx="5"/>
           </p:nvPr>
         </p:nvSpPr>
         <p:spPr/>
@@ -2397,7 +2220,7 @@
 </file>
 
 <file path=ppt/notesSlides/notesSlide29.xml><?xml version="1.0" encoding="utf-8"?>
-<p:notes xmlns:a="http://schemas.openxmlformats.org/drawingml/2006/main" xmlns:p="http://schemas.openxmlformats.org/presentationml/2006/main" xmlns:r="http://schemas.openxmlformats.org/officeDocument/2006/relationships">
+<p:notes xmlns:a="http://schemas.openxmlformats.org/drawingml/2006/main" xmlns:r="http://schemas.openxmlformats.org/officeDocument/2006/relationships" xmlns:p="http://schemas.openxmlformats.org/presentationml/2006/main">
   <p:cSld>
     <p:spTree>
       <p:nvGrpSpPr>
@@ -2417,7 +2240,7 @@
         <p:nvSpPr>
           <p:cNvPr id="2" name="Slide Image Placeholder 1"/>
           <p:cNvSpPr>
-            <a:spLocks noGrp="1"/>
+            <a:spLocks noGrp="1" noRot="1" noChangeAspect="1"/>
           </p:cNvSpPr>
           <p:nvPr>
             <p:ph type="sldImg" idx="2"/>
@@ -2432,7 +2255,7 @@
             <a:spLocks noGrp="1"/>
           </p:cNvSpPr>
           <p:nvPr>
-            <p:ph type="body" idx="3" sz="quarter"/>
+            <p:ph type="body" sz="quarter" idx="3"/>
           </p:nvPr>
         </p:nvSpPr>
         <p:spPr/>
@@ -2488,7 +2311,7 @@
             <a:spLocks noGrp="1"/>
           </p:cNvSpPr>
           <p:nvPr>
-            <p:ph type="sldNum" idx="5" sz="quarter"/>
+            <p:ph type="sldNum" sz="quarter" idx="5"/>
           </p:nvPr>
         </p:nvSpPr>
         <p:spPr/>
@@ -2502,7 +2325,7 @@
 </file>
 
 <file path=ppt/notesSlides/notesSlide3.xml><?xml version="1.0" encoding="utf-8"?>
-<p:notes xmlns:a="http://schemas.openxmlformats.org/drawingml/2006/main" xmlns:p="http://schemas.openxmlformats.org/presentationml/2006/main" xmlns:r="http://schemas.openxmlformats.org/officeDocument/2006/relationships">
+<p:notes xmlns:a="http://schemas.openxmlformats.org/drawingml/2006/main" xmlns:r="http://schemas.openxmlformats.org/officeDocument/2006/relationships" xmlns:p="http://schemas.openxmlformats.org/presentationml/2006/main">
   <p:cSld>
     <p:spTree>
       <p:nvGrpSpPr>
@@ -2522,7 +2345,7 @@
         <p:nvSpPr>
           <p:cNvPr id="2" name="Slide Image Placeholder 1"/>
           <p:cNvSpPr>
-            <a:spLocks noGrp="1"/>
+            <a:spLocks noGrp="1" noRot="1" noChangeAspect="1"/>
           </p:cNvSpPr>
           <p:nvPr>
             <p:ph type="sldImg" idx="2"/>
@@ -2537,7 +2360,7 @@
             <a:spLocks noGrp="1"/>
           </p:cNvSpPr>
           <p:nvPr>
-            <p:ph type="body" idx="3" sz="quarter"/>
+            <p:ph type="body" sz="quarter" idx="3"/>
           </p:nvPr>
         </p:nvSpPr>
         <p:spPr/>
@@ -2569,7 +2392,7 @@
             <a:spLocks noGrp="1"/>
           </p:cNvSpPr>
           <p:nvPr>
-            <p:ph type="sldNum" idx="5" sz="quarter"/>
+            <p:ph type="sldNum" sz="quarter" idx="5"/>
           </p:nvPr>
         </p:nvSpPr>
         <p:spPr/>
@@ -2583,7 +2406,7 @@
 </file>
 
 <file path=ppt/notesSlides/notesSlide30.xml><?xml version="1.0" encoding="utf-8"?>
-<p:notes xmlns:a="http://schemas.openxmlformats.org/drawingml/2006/main" xmlns:p="http://schemas.openxmlformats.org/presentationml/2006/main" xmlns:r="http://schemas.openxmlformats.org/officeDocument/2006/relationships">
+<p:notes xmlns:a="http://schemas.openxmlformats.org/drawingml/2006/main" xmlns:r="http://schemas.openxmlformats.org/officeDocument/2006/relationships" xmlns:p="http://schemas.openxmlformats.org/presentationml/2006/main">
   <p:cSld>
     <p:spTree>
       <p:nvGrpSpPr>
@@ -2603,7 +2426,7 @@
         <p:nvSpPr>
           <p:cNvPr id="2" name="Slide Image Placeholder 1"/>
           <p:cNvSpPr>
-            <a:spLocks noGrp="1"/>
+            <a:spLocks noGrp="1" noRot="1" noChangeAspect="1"/>
           </p:cNvSpPr>
           <p:nvPr>
             <p:ph type="sldImg" idx="2"/>
@@ -2618,7 +2441,7 @@
             <a:spLocks noGrp="1"/>
           </p:cNvSpPr>
           <p:nvPr>
-            <p:ph type="body" idx="3" sz="quarter"/>
+            <p:ph type="body" sz="quarter" idx="3"/>
           </p:nvPr>
         </p:nvSpPr>
         <p:spPr/>
@@ -2666,7 +2489,7 @@
             <a:spLocks noGrp="1"/>
           </p:cNvSpPr>
           <p:nvPr>
-            <p:ph type="sldNum" idx="5" sz="quarter"/>
+            <p:ph type="sldNum" sz="quarter" idx="5"/>
           </p:nvPr>
         </p:nvSpPr>
         <p:spPr/>
@@ -2680,7 +2503,7 @@
 </file>
 
 <file path=ppt/notesSlides/notesSlide31.xml><?xml version="1.0" encoding="utf-8"?>
-<p:notes xmlns:a="http://schemas.openxmlformats.org/drawingml/2006/main" xmlns:p="http://schemas.openxmlformats.org/presentationml/2006/main" xmlns:r="http://schemas.openxmlformats.org/officeDocument/2006/relationships">
+<p:notes xmlns:a="http://schemas.openxmlformats.org/drawingml/2006/main" xmlns:r="http://schemas.openxmlformats.org/officeDocument/2006/relationships" xmlns:p="http://schemas.openxmlformats.org/presentationml/2006/main">
   <p:cSld>
     <p:spTree>
       <p:nvGrpSpPr>
@@ -2700,7 +2523,7 @@
         <p:nvSpPr>
           <p:cNvPr id="2" name="Slide Image Placeholder 1"/>
           <p:cNvSpPr>
-            <a:spLocks noGrp="1"/>
+            <a:spLocks noGrp="1" noRot="1" noChangeAspect="1"/>
           </p:cNvSpPr>
           <p:nvPr>
             <p:ph type="sldImg" idx="2"/>
@@ -2715,7 +2538,7 @@
             <a:spLocks noGrp="1"/>
           </p:cNvSpPr>
           <p:nvPr>
-            <p:ph type="body" idx="3" sz="quarter"/>
+            <p:ph type="body" sz="quarter" idx="3"/>
           </p:nvPr>
         </p:nvSpPr>
         <p:spPr/>
@@ -2763,7 +2586,7 @@
             <a:spLocks noGrp="1"/>
           </p:cNvSpPr>
           <p:nvPr>
-            <p:ph type="sldNum" idx="5" sz="quarter"/>
+            <p:ph type="sldNum" sz="quarter" idx="5"/>
           </p:nvPr>
         </p:nvSpPr>
         <p:spPr/>
@@ -2777,7 +2600,7 @@
 </file>
 
 <file path=ppt/notesSlides/notesSlide32.xml><?xml version="1.0" encoding="utf-8"?>
-<p:notes xmlns:a="http://schemas.openxmlformats.org/drawingml/2006/main" xmlns:p="http://schemas.openxmlformats.org/presentationml/2006/main" xmlns:r="http://schemas.openxmlformats.org/officeDocument/2006/relationships">
+<p:notes xmlns:a="http://schemas.openxmlformats.org/drawingml/2006/main" xmlns:r="http://schemas.openxmlformats.org/officeDocument/2006/relationships" xmlns:p="http://schemas.openxmlformats.org/presentationml/2006/main">
   <p:cSld>
     <p:spTree>
       <p:nvGrpSpPr>
@@ -2797,7 +2620,7 @@
         <p:nvSpPr>
           <p:cNvPr id="2" name="Slide Image Placeholder 1"/>
           <p:cNvSpPr>
-            <a:spLocks noGrp="1"/>
+            <a:spLocks noGrp="1" noRot="1" noChangeAspect="1"/>
           </p:cNvSpPr>
           <p:nvPr>
             <p:ph type="sldImg" idx="2"/>
@@ -2812,7 +2635,7 @@
             <a:spLocks noGrp="1"/>
           </p:cNvSpPr>
           <p:nvPr>
-            <p:ph type="body" idx="3" sz="quarter"/>
+            <p:ph type="body" sz="quarter" idx="3"/>
           </p:nvPr>
         </p:nvSpPr>
         <p:spPr/>
@@ -2860,7 +2683,7 @@
             <a:spLocks noGrp="1"/>
           </p:cNvSpPr>
           <p:nvPr>
-            <p:ph type="sldNum" idx="5" sz="quarter"/>
+            <p:ph type="sldNum" sz="quarter" idx="5"/>
           </p:nvPr>
         </p:nvSpPr>
         <p:spPr/>
@@ -2874,7 +2697,7 @@
 </file>
 
 <file path=ppt/notesSlides/notesSlide33.xml><?xml version="1.0" encoding="utf-8"?>
-<p:notes xmlns:a="http://schemas.openxmlformats.org/drawingml/2006/main" xmlns:p="http://schemas.openxmlformats.org/presentationml/2006/main" xmlns:r="http://schemas.openxmlformats.org/officeDocument/2006/relationships">
+<p:notes xmlns:a="http://schemas.openxmlformats.org/drawingml/2006/main" xmlns:r="http://schemas.openxmlformats.org/officeDocument/2006/relationships" xmlns:p="http://schemas.openxmlformats.org/presentationml/2006/main">
   <p:cSld>
     <p:spTree>
       <p:nvGrpSpPr>
@@ -2894,7 +2717,7 @@
         <p:nvSpPr>
           <p:cNvPr id="2" name="Slide Image Placeholder 1"/>
           <p:cNvSpPr>
-            <a:spLocks noGrp="1"/>
+            <a:spLocks noGrp="1" noRot="1" noChangeAspect="1"/>
           </p:cNvSpPr>
           <p:nvPr>
             <p:ph type="sldImg" idx="2"/>
@@ -2909,7 +2732,7 @@
             <a:spLocks noGrp="1"/>
           </p:cNvSpPr>
           <p:nvPr>
-            <p:ph type="body" idx="3" sz="quarter"/>
+            <p:ph type="body" sz="quarter" idx="3"/>
           </p:nvPr>
         </p:nvSpPr>
         <p:spPr/>
@@ -2957,7 +2780,7 @@
             <a:spLocks noGrp="1"/>
           </p:cNvSpPr>
           <p:nvPr>
-            <p:ph type="sldNum" idx="5" sz="quarter"/>
+            <p:ph type="sldNum" sz="quarter" idx="5"/>
           </p:nvPr>
         </p:nvSpPr>
         <p:spPr/>
@@ -2971,7 +2794,7 @@
 </file>
 
 <file path=ppt/notesSlides/notesSlide34.xml><?xml version="1.0" encoding="utf-8"?>
-<p:notes xmlns:a="http://schemas.openxmlformats.org/drawingml/2006/main" xmlns:p="http://schemas.openxmlformats.org/presentationml/2006/main" xmlns:r="http://schemas.openxmlformats.org/officeDocument/2006/relationships">
+<p:notes xmlns:a="http://schemas.openxmlformats.org/drawingml/2006/main" xmlns:r="http://schemas.openxmlformats.org/officeDocument/2006/relationships" xmlns:p="http://schemas.openxmlformats.org/presentationml/2006/main">
   <p:cSld>
     <p:spTree>
       <p:nvGrpSpPr>
@@ -2991,7 +2814,7 @@
         <p:nvSpPr>
           <p:cNvPr id="2" name="Slide Image Placeholder 1"/>
           <p:cNvSpPr>
-            <a:spLocks noGrp="1"/>
+            <a:spLocks noGrp="1" noRot="1" noChangeAspect="1"/>
           </p:cNvSpPr>
           <p:nvPr>
             <p:ph type="sldImg" idx="2"/>
@@ -3006,7 +2829,7 @@
             <a:spLocks noGrp="1"/>
           </p:cNvSpPr>
           <p:nvPr>
-            <p:ph type="body" idx="3" sz="quarter"/>
+            <p:ph type="body" sz="quarter" idx="3"/>
           </p:nvPr>
         </p:nvSpPr>
         <p:spPr/>
@@ -3054,7 +2877,7 @@
             <a:spLocks noGrp="1"/>
           </p:cNvSpPr>
           <p:nvPr>
-            <p:ph type="sldNum" idx="5" sz="quarter"/>
+            <p:ph type="sldNum" sz="quarter" idx="5"/>
           </p:nvPr>
         </p:nvSpPr>
         <p:spPr/>
@@ -3068,7 +2891,7 @@
 </file>
 
 <file path=ppt/notesSlides/notesSlide35.xml><?xml version="1.0" encoding="utf-8"?>
-<p:notes xmlns:a="http://schemas.openxmlformats.org/drawingml/2006/main" xmlns:p="http://schemas.openxmlformats.org/presentationml/2006/main" xmlns:r="http://schemas.openxmlformats.org/officeDocument/2006/relationships">
+<p:notes xmlns:a="http://schemas.openxmlformats.org/drawingml/2006/main" xmlns:r="http://schemas.openxmlformats.org/officeDocument/2006/relationships" xmlns:p="http://schemas.openxmlformats.org/presentationml/2006/main">
   <p:cSld>
     <p:spTree>
       <p:nvGrpSpPr>
@@ -3088,7 +2911,7 @@
         <p:nvSpPr>
           <p:cNvPr id="2" name="Slide Image Placeholder 1"/>
           <p:cNvSpPr>
-            <a:spLocks noGrp="1"/>
+            <a:spLocks noGrp="1" noRot="1" noChangeAspect="1"/>
           </p:cNvSpPr>
           <p:nvPr>
             <p:ph type="sldImg" idx="2"/>
@@ -3103,7 +2926,7 @@
             <a:spLocks noGrp="1"/>
           </p:cNvSpPr>
           <p:nvPr>
-            <p:ph type="body" idx="3" sz="quarter"/>
+            <p:ph type="body" sz="quarter" idx="3"/>
           </p:nvPr>
         </p:nvSpPr>
         <p:spPr/>
@@ -3159,7 +2982,7 @@
             <a:spLocks noGrp="1"/>
           </p:cNvSpPr>
           <p:nvPr>
-            <p:ph type="sldNum" idx="5" sz="quarter"/>
+            <p:ph type="sldNum" sz="quarter" idx="5"/>
           </p:nvPr>
         </p:nvSpPr>
         <p:spPr/>
@@ -3173,7 +2996,7 @@
 </file>
 
 <file path=ppt/notesSlides/notesSlide36.xml><?xml version="1.0" encoding="utf-8"?>
-<p:notes xmlns:a="http://schemas.openxmlformats.org/drawingml/2006/main" xmlns:p="http://schemas.openxmlformats.org/presentationml/2006/main" xmlns:r="http://schemas.openxmlformats.org/officeDocument/2006/relationships">
+<p:notes xmlns:a="http://schemas.openxmlformats.org/drawingml/2006/main" xmlns:r="http://schemas.openxmlformats.org/officeDocument/2006/relationships" xmlns:p="http://schemas.openxmlformats.org/presentationml/2006/main">
   <p:cSld>
     <p:spTree>
       <p:nvGrpSpPr>
@@ -3193,7 +3016,7 @@
         <p:nvSpPr>
           <p:cNvPr id="2" name="Slide Image Placeholder 1"/>
           <p:cNvSpPr>
-            <a:spLocks noGrp="1"/>
+            <a:spLocks noGrp="1" noRot="1" noChangeAspect="1"/>
           </p:cNvSpPr>
           <p:nvPr>
             <p:ph type="sldImg" idx="2"/>
@@ -3208,7 +3031,7 @@
             <a:spLocks noGrp="1"/>
           </p:cNvSpPr>
           <p:nvPr>
-            <p:ph type="body" idx="3" sz="quarter"/>
+            <p:ph type="body" sz="quarter" idx="3"/>
           </p:nvPr>
         </p:nvSpPr>
         <p:spPr/>
@@ -3256,7 +3079,7 @@
             <a:spLocks noGrp="1"/>
           </p:cNvSpPr>
           <p:nvPr>
-            <p:ph type="sldNum" idx="5" sz="quarter"/>
+            <p:ph type="sldNum" sz="quarter" idx="5"/>
           </p:nvPr>
         </p:nvSpPr>
         <p:spPr/>
@@ -3270,7 +3093,7 @@
 </file>
 
 <file path=ppt/notesSlides/notesSlide37.xml><?xml version="1.0" encoding="utf-8"?>
-<p:notes xmlns:a="http://schemas.openxmlformats.org/drawingml/2006/main" xmlns:p="http://schemas.openxmlformats.org/presentationml/2006/main" xmlns:r="http://schemas.openxmlformats.org/officeDocument/2006/relationships">
+<p:notes xmlns:a="http://schemas.openxmlformats.org/drawingml/2006/main" xmlns:r="http://schemas.openxmlformats.org/officeDocument/2006/relationships" xmlns:p="http://schemas.openxmlformats.org/presentationml/2006/main">
   <p:cSld>
     <p:spTree>
       <p:nvGrpSpPr>
@@ -3290,7 +3113,7 @@
         <p:nvSpPr>
           <p:cNvPr id="2" name="Slide Image Placeholder 1"/>
           <p:cNvSpPr>
-            <a:spLocks noGrp="1"/>
+            <a:spLocks noGrp="1" noRot="1" noChangeAspect="1"/>
           </p:cNvSpPr>
           <p:nvPr>
             <p:ph type="sldImg" idx="2"/>
@@ -3305,7 +3128,7 @@
             <a:spLocks noGrp="1"/>
           </p:cNvSpPr>
           <p:nvPr>
-            <p:ph type="body" idx="3" sz="quarter"/>
+            <p:ph type="body" sz="quarter" idx="3"/>
           </p:nvPr>
         </p:nvSpPr>
         <p:spPr/>
@@ -3345,7 +3168,7 @@
             <a:spLocks noGrp="1"/>
           </p:cNvSpPr>
           <p:nvPr>
-            <p:ph type="sldNum" idx="5" sz="quarter"/>
+            <p:ph type="sldNum" sz="quarter" idx="5"/>
           </p:nvPr>
         </p:nvSpPr>
         <p:spPr/>
@@ -3359,7 +3182,7 @@
 </file>
 
 <file path=ppt/notesSlides/notesSlide38.xml><?xml version="1.0" encoding="utf-8"?>
-<p:notes xmlns:a="http://schemas.openxmlformats.org/drawingml/2006/main" xmlns:p="http://schemas.openxmlformats.org/presentationml/2006/main" xmlns:r="http://schemas.openxmlformats.org/officeDocument/2006/relationships">
+<p:notes xmlns:a="http://schemas.openxmlformats.org/drawingml/2006/main" xmlns:r="http://schemas.openxmlformats.org/officeDocument/2006/relationships" xmlns:p="http://schemas.openxmlformats.org/presentationml/2006/main">
   <p:cSld>
     <p:spTree>
       <p:nvGrpSpPr>
@@ -3379,7 +3202,7 @@
         <p:nvSpPr>
           <p:cNvPr id="2" name="Slide Image Placeholder 1"/>
           <p:cNvSpPr>
-            <a:spLocks noGrp="1"/>
+            <a:spLocks noGrp="1" noRot="1" noChangeAspect="1"/>
           </p:cNvSpPr>
           <p:nvPr>
             <p:ph type="sldImg" idx="2"/>
@@ -3394,7 +3217,7 @@
             <a:spLocks noGrp="1"/>
           </p:cNvSpPr>
           <p:nvPr>
-            <p:ph type="body" idx="3" sz="quarter"/>
+            <p:ph type="body" sz="quarter" idx="3"/>
           </p:nvPr>
         </p:nvSpPr>
         <p:spPr/>
@@ -3434,7 +3257,7 @@
             <a:spLocks noGrp="1"/>
           </p:cNvSpPr>
           <p:nvPr>
-            <p:ph type="sldNum" idx="5" sz="quarter"/>
+            <p:ph type="sldNum" sz="quarter" idx="5"/>
           </p:nvPr>
         </p:nvSpPr>
         <p:spPr/>
@@ -3448,7 +3271,7 @@
 </file>
 
 <file path=ppt/notesSlides/notesSlide39.xml><?xml version="1.0" encoding="utf-8"?>
-<p:notes xmlns:a="http://schemas.openxmlformats.org/drawingml/2006/main" xmlns:p="http://schemas.openxmlformats.org/presentationml/2006/main" xmlns:r="http://schemas.openxmlformats.org/officeDocument/2006/relationships">
+<p:notes xmlns:a="http://schemas.openxmlformats.org/drawingml/2006/main" xmlns:r="http://schemas.openxmlformats.org/officeDocument/2006/relationships" xmlns:p="http://schemas.openxmlformats.org/presentationml/2006/main">
   <p:cSld>
     <p:spTree>
       <p:nvGrpSpPr>
@@ -3468,7 +3291,7 @@
         <p:nvSpPr>
           <p:cNvPr id="2" name="Slide Image Placeholder 1"/>
           <p:cNvSpPr>
-            <a:spLocks noGrp="1"/>
+            <a:spLocks noGrp="1" noRot="1" noChangeAspect="1"/>
           </p:cNvSpPr>
           <p:nvPr>
             <p:ph type="sldImg" idx="2"/>
@@ -3483,7 +3306,7 @@
             <a:spLocks noGrp="1"/>
           </p:cNvSpPr>
           <p:nvPr>
-            <p:ph type="body" idx="3" sz="quarter"/>
+            <p:ph type="body" sz="quarter" idx="3"/>
           </p:nvPr>
         </p:nvSpPr>
         <p:spPr/>
@@ -3539,7 +3362,7 @@
             <a:spLocks noGrp="1"/>
           </p:cNvSpPr>
           <p:nvPr>
-            <p:ph type="sldNum" idx="5" sz="quarter"/>
+            <p:ph type="sldNum" sz="quarter" idx="5"/>
           </p:nvPr>
         </p:nvSpPr>
         <p:spPr/>
@@ -3553,7 +3376,7 @@
 </file>
 
 <file path=ppt/notesSlides/notesSlide4.xml><?xml version="1.0" encoding="utf-8"?>
-<p:notes xmlns:a="http://schemas.openxmlformats.org/drawingml/2006/main" xmlns:p="http://schemas.openxmlformats.org/presentationml/2006/main" xmlns:r="http://schemas.openxmlformats.org/officeDocument/2006/relationships">
+<p:notes xmlns:a="http://schemas.openxmlformats.org/drawingml/2006/main" xmlns:r="http://schemas.openxmlformats.org/officeDocument/2006/relationships" xmlns:p="http://schemas.openxmlformats.org/presentationml/2006/main">
   <p:cSld>
     <p:spTree>
       <p:nvGrpSpPr>
@@ -3573,7 +3396,7 @@
         <p:nvSpPr>
           <p:cNvPr id="2" name="Slide Image Placeholder 1"/>
           <p:cNvSpPr>
-            <a:spLocks noGrp="1"/>
+            <a:spLocks noGrp="1" noRot="1" noChangeAspect="1"/>
           </p:cNvSpPr>
           <p:nvPr>
             <p:ph type="sldImg" idx="2"/>
@@ -3588,7 +3411,7 @@
             <a:spLocks noGrp="1"/>
           </p:cNvSpPr>
           <p:nvPr>
-            <p:ph type="body" idx="3" sz="quarter"/>
+            <p:ph type="body" sz="quarter" idx="3"/>
           </p:nvPr>
         </p:nvSpPr>
         <p:spPr/>
@@ -3620,7 +3443,7 @@
             <a:spLocks noGrp="1"/>
           </p:cNvSpPr>
           <p:nvPr>
-            <p:ph type="sldNum" idx="5" sz="quarter"/>
+            <p:ph type="sldNum" sz="quarter" idx="5"/>
           </p:nvPr>
         </p:nvSpPr>
         <p:spPr/>
@@ -3634,7 +3457,7 @@
 </file>
 
 <file path=ppt/notesSlides/notesSlide5.xml><?xml version="1.0" encoding="utf-8"?>
-<p:notes xmlns:a="http://schemas.openxmlformats.org/drawingml/2006/main" xmlns:p="http://schemas.openxmlformats.org/presentationml/2006/main" xmlns:r="http://schemas.openxmlformats.org/officeDocument/2006/relationships">
+<p:notes xmlns:a="http://schemas.openxmlformats.org/drawingml/2006/main" xmlns:r="http://schemas.openxmlformats.org/officeDocument/2006/relationships" xmlns:p="http://schemas.openxmlformats.org/presentationml/2006/main">
   <p:cSld>
     <p:spTree>
       <p:nvGrpSpPr>
@@ -3654,7 +3477,7 @@
         <p:nvSpPr>
           <p:cNvPr id="2" name="Slide Image Placeholder 1"/>
           <p:cNvSpPr>
-            <a:spLocks noGrp="1"/>
+            <a:spLocks noGrp="1" noRot="1" noChangeAspect="1"/>
           </p:cNvSpPr>
           <p:nvPr>
             <p:ph type="sldImg" idx="2"/>
@@ -3669,7 +3492,7 @@
             <a:spLocks noGrp="1"/>
           </p:cNvSpPr>
           <p:nvPr>
-            <p:ph type="body" idx="3" sz="quarter"/>
+            <p:ph type="body" sz="quarter" idx="3"/>
           </p:nvPr>
         </p:nvSpPr>
         <p:spPr/>
@@ -3709,7 +3532,7 @@
             <a:spLocks noGrp="1"/>
           </p:cNvSpPr>
           <p:nvPr>
-            <p:ph type="sldNum" idx="5" sz="quarter"/>
+            <p:ph type="sldNum" sz="quarter" idx="5"/>
           </p:nvPr>
         </p:nvSpPr>
         <p:spPr/>
@@ -3723,7 +3546,7 @@
 </file>
 
 <file path=ppt/notesSlides/notesSlide6.xml><?xml version="1.0" encoding="utf-8"?>
-<p:notes xmlns:a="http://schemas.openxmlformats.org/drawingml/2006/main" xmlns:p="http://schemas.openxmlformats.org/presentationml/2006/main" xmlns:r="http://schemas.openxmlformats.org/officeDocument/2006/relationships">
+<p:notes xmlns:a="http://schemas.openxmlformats.org/drawingml/2006/main" xmlns:r="http://schemas.openxmlformats.org/officeDocument/2006/relationships" xmlns:p="http://schemas.openxmlformats.org/presentationml/2006/main">
   <p:cSld>
     <p:spTree>
       <p:nvGrpSpPr>
@@ -3743,7 +3566,7 @@
         <p:nvSpPr>
           <p:cNvPr id="2" name="Slide Image Placeholder 1"/>
           <p:cNvSpPr>
-            <a:spLocks noGrp="1"/>
+            <a:spLocks noGrp="1" noRot="1" noChangeAspect="1"/>
           </p:cNvSpPr>
           <p:nvPr>
             <p:ph type="sldImg" idx="2"/>
@@ -3758,7 +3581,7 @@
             <a:spLocks noGrp="1"/>
           </p:cNvSpPr>
           <p:nvPr>
-            <p:ph type="body" idx="3" sz="quarter"/>
+            <p:ph type="body" sz="quarter" idx="3"/>
           </p:nvPr>
         </p:nvSpPr>
         <p:spPr/>
@@ -3806,7 +3629,7 @@
             <a:spLocks noGrp="1"/>
           </p:cNvSpPr>
           <p:nvPr>
-            <p:ph type="sldNum" idx="5" sz="quarter"/>
+            <p:ph type="sldNum" sz="quarter" idx="5"/>
           </p:nvPr>
         </p:nvSpPr>
         <p:spPr/>
@@ -3820,7 +3643,7 @@
 </file>
 
 <file path=ppt/notesSlides/notesSlide7.xml><?xml version="1.0" encoding="utf-8"?>
-<p:notes xmlns:a="http://schemas.openxmlformats.org/drawingml/2006/main" xmlns:p="http://schemas.openxmlformats.org/presentationml/2006/main" xmlns:r="http://schemas.openxmlformats.org/officeDocument/2006/relationships">
+<p:notes xmlns:a="http://schemas.openxmlformats.org/drawingml/2006/main" xmlns:r="http://schemas.openxmlformats.org/officeDocument/2006/relationships" xmlns:p="http://schemas.openxmlformats.org/presentationml/2006/main">
   <p:cSld>
     <p:spTree>
       <p:nvGrpSpPr>
@@ -3840,7 +3663,7 @@
         <p:nvSpPr>
           <p:cNvPr id="2" name="Slide Image Placeholder 1"/>
           <p:cNvSpPr>
-            <a:spLocks noGrp="1"/>
+            <a:spLocks noGrp="1" noRot="1" noChangeAspect="1"/>
           </p:cNvSpPr>
           <p:nvPr>
             <p:ph type="sldImg" idx="2"/>
@@ -3855,7 +3678,7 @@
             <a:spLocks noGrp="1"/>
           </p:cNvSpPr>
           <p:nvPr>
-            <p:ph type="body" idx="3" sz="quarter"/>
+            <p:ph type="body" sz="quarter" idx="3"/>
           </p:nvPr>
         </p:nvSpPr>
         <p:spPr/>
@@ -3895,7 +3718,7 @@
             <a:spLocks noGrp="1"/>
           </p:cNvSpPr>
           <p:nvPr>
-            <p:ph type="sldNum" idx="5" sz="quarter"/>
+            <p:ph type="sldNum" sz="quarter" idx="5"/>
           </p:nvPr>
         </p:nvSpPr>
         <p:spPr/>
@@ -3909,7 +3732,7 @@
 </file>
 
 <file path=ppt/notesSlides/notesSlide8.xml><?xml version="1.0" encoding="utf-8"?>
-<p:notes xmlns:a="http://schemas.openxmlformats.org/drawingml/2006/main" xmlns:p="http://schemas.openxmlformats.org/presentationml/2006/main" xmlns:r="http://schemas.openxmlformats.org/officeDocument/2006/relationships">
+<p:notes xmlns:a="http://schemas.openxmlformats.org/drawingml/2006/main" xmlns:r="http://schemas.openxmlformats.org/officeDocument/2006/relationships" xmlns:p="http://schemas.openxmlformats.org/presentationml/2006/main">
   <p:cSld>
     <p:spTree>
       <p:nvGrpSpPr>
@@ -3929,7 +3752,7 @@
         <p:nvSpPr>
           <p:cNvPr id="2" name="Slide Image Placeholder 1"/>
           <p:cNvSpPr>
-            <a:spLocks noGrp="1"/>
+            <a:spLocks noGrp="1" noRot="1" noChangeAspect="1"/>
           </p:cNvSpPr>
           <p:nvPr>
             <p:ph type="sldImg" idx="2"/>
@@ -3944,7 +3767,7 @@
             <a:spLocks noGrp="1"/>
           </p:cNvSpPr>
           <p:nvPr>
-            <p:ph type="body" idx="3" sz="quarter"/>
+            <p:ph type="body" sz="quarter" idx="3"/>
           </p:nvPr>
         </p:nvSpPr>
         <p:spPr/>
@@ -3984,7 +3807,7 @@
             <a:spLocks noGrp="1"/>
           </p:cNvSpPr>
           <p:nvPr>
-            <p:ph type="sldNum" idx="5" sz="quarter"/>
+            <p:ph type="sldNum" sz="quarter" idx="5"/>
           </p:nvPr>
         </p:nvSpPr>
         <p:spPr/>
@@ -3998,7 +3821,7 @@
 </file>
 
 <file path=ppt/notesSlides/notesSlide9.xml><?xml version="1.0" encoding="utf-8"?>
-<p:notes xmlns:a="http://schemas.openxmlformats.org/drawingml/2006/main" xmlns:p="http://schemas.openxmlformats.org/presentationml/2006/main" xmlns:r="http://schemas.openxmlformats.org/officeDocument/2006/relationships">
+<p:notes xmlns:a="http://schemas.openxmlformats.org/drawingml/2006/main" xmlns:r="http://schemas.openxmlformats.org/officeDocument/2006/relationships" xmlns:p="http://schemas.openxmlformats.org/presentationml/2006/main">
   <p:cSld>
     <p:spTree>
       <p:nvGrpSpPr>
@@ -4018,7 +3841,7 @@
         <p:nvSpPr>
           <p:cNvPr id="2" name="Slide Image Placeholder 1"/>
           <p:cNvSpPr>
-            <a:spLocks noGrp="1"/>
+            <a:spLocks noGrp="1" noRot="1" noChangeAspect="1"/>
           </p:cNvSpPr>
           <p:nvPr>
             <p:ph type="sldImg" idx="2"/>
@@ -4033,7 +3856,7 @@
             <a:spLocks noGrp="1"/>
           </p:cNvSpPr>
           <p:nvPr>
-            <p:ph type="body" idx="3" sz="quarter"/>
+            <p:ph type="body" sz="quarter" idx="3"/>
           </p:nvPr>
         </p:nvSpPr>
         <p:spPr/>
@@ -4081,7 +3904,7 @@
             <a:spLocks noGrp="1"/>
           </p:cNvSpPr>
           <p:nvPr>
-            <p:ph type="sldNum" idx="5" sz="quarter"/>
+            <p:ph type="sldNum" sz="quarter" idx="5"/>
           </p:nvPr>
         </p:nvSpPr>
         <p:spPr/>
@@ -4132,10 +3955,9 @@
           <a:lstStyle/>
           <a:p>
             <a:r>
-              <a:rPr lang="en-US" smtClean="0"/>
+              <a:rPr lang="en-US"/>
               <a:t>Click to edit Master title style</a:t>
             </a:r>
-            <a:endParaRPr lang="en-US"/>
           </a:p>
         </p:txBody>
       </p:sp>
@@ -4251,10 +4073,9 @@
           </a:lstStyle>
           <a:p>
             <a:r>
-              <a:rPr lang="en-US" smtClean="0"/>
+              <a:rPr lang="en-US"/>
               <a:t>Click to edit Master subtitle style</a:t>
             </a:r>
-            <a:endParaRPr lang="en-US"/>
           </a:p>
         </p:txBody>
       </p:sp>
@@ -4275,7 +4096,7 @@
           <a:p>
             <a:fld id="{5BCAD085-E8A6-8845-BD4E-CB4CCA059FC4}" type="datetimeFigureOut">
               <a:rPr lang="en-US" smtClean="0"/>
-              <a:t>1/27/13</a:t>
+              <a:t>9/7/2026</a:t>
             </a:fld>
             <a:endParaRPr lang="en-US"/>
           </a:p>
@@ -4369,10 +4190,9 @@
           <a:lstStyle/>
           <a:p>
             <a:r>
-              <a:rPr lang="en-US" smtClean="0"/>
+              <a:rPr lang="en-US"/>
               <a:t>Click to edit Master title style</a:t>
             </a:r>
-            <a:endParaRPr lang="en-US"/>
           </a:p>
         </p:txBody>
       </p:sp>
@@ -4393,38 +4213,37 @@
           <a:p>
             <a:pPr lvl="0"/>
             <a:r>
-              <a:rPr lang="en-US" smtClean="0"/>
+              <a:rPr lang="en-US"/>
               <a:t>Click to edit Master text styles</a:t>
             </a:r>
           </a:p>
           <a:p>
             <a:pPr lvl="1"/>
             <a:r>
-              <a:rPr lang="en-US" smtClean="0"/>
+              <a:rPr lang="en-US"/>
               <a:t>Second level</a:t>
             </a:r>
           </a:p>
           <a:p>
             <a:pPr lvl="2"/>
             <a:r>
-              <a:rPr lang="en-US" smtClean="0"/>
+              <a:rPr lang="en-US"/>
               <a:t>Third level</a:t>
             </a:r>
           </a:p>
           <a:p>
             <a:pPr lvl="3"/>
             <a:r>
-              <a:rPr lang="en-US" smtClean="0"/>
+              <a:rPr lang="en-US"/>
               <a:t>Fourth level</a:t>
             </a:r>
           </a:p>
           <a:p>
             <a:pPr lvl="4"/>
             <a:r>
-              <a:rPr lang="en-US" smtClean="0"/>
+              <a:rPr lang="en-US"/>
               <a:t>Fifth level</a:t>
             </a:r>
-            <a:endParaRPr lang="en-US"/>
           </a:p>
         </p:txBody>
       </p:sp>
@@ -4445,7 +4264,7 @@
           <a:p>
             <a:fld id="{5BCAD085-E8A6-8845-BD4E-CB4CCA059FC4}" type="datetimeFigureOut">
               <a:rPr lang="en-US" smtClean="0"/>
-              <a:t>1/27/13</a:t>
+              <a:t>9/7/2026</a:t>
             </a:fld>
             <a:endParaRPr lang="en-US"/>
           </a:p>
@@ -4544,10 +4363,9 @@
           <a:lstStyle/>
           <a:p>
             <a:r>
-              <a:rPr lang="en-US" smtClean="0"/>
+              <a:rPr lang="en-US"/>
               <a:t>Click to edit Master title style</a:t>
             </a:r>
-            <a:endParaRPr lang="en-US"/>
           </a:p>
         </p:txBody>
       </p:sp>
@@ -4573,38 +4391,37 @@
           <a:p>
             <a:pPr lvl="0"/>
             <a:r>
-              <a:rPr lang="en-US" smtClean="0"/>
+              <a:rPr lang="en-US"/>
               <a:t>Click to edit Master text styles</a:t>
             </a:r>
           </a:p>
           <a:p>
             <a:pPr lvl="1"/>
             <a:r>
-              <a:rPr lang="en-US" smtClean="0"/>
+              <a:rPr lang="en-US"/>
               <a:t>Second level</a:t>
             </a:r>
           </a:p>
           <a:p>
             <a:pPr lvl="2"/>
             <a:r>
-              <a:rPr lang="en-US" smtClean="0"/>
+              <a:rPr lang="en-US"/>
               <a:t>Third level</a:t>
             </a:r>
           </a:p>
           <a:p>
             <a:pPr lvl="3"/>
             <a:r>
-              <a:rPr lang="en-US" smtClean="0"/>
+              <a:rPr lang="en-US"/>
               <a:t>Fourth level</a:t>
             </a:r>
           </a:p>
           <a:p>
             <a:pPr lvl="4"/>
             <a:r>
-              <a:rPr lang="en-US" smtClean="0"/>
+              <a:rPr lang="en-US"/>
               <a:t>Fifth level</a:t>
             </a:r>
-            <a:endParaRPr lang="en-US"/>
           </a:p>
         </p:txBody>
       </p:sp>
@@ -4625,7 +4442,7 @@
           <a:p>
             <a:fld id="{5BCAD085-E8A6-8845-BD4E-CB4CCA059FC4}" type="datetimeFigureOut">
               <a:rPr lang="en-US" smtClean="0"/>
-              <a:t>1/27/13</a:t>
+              <a:t>9/7/2026</a:t>
             </a:fld>
             <a:endParaRPr lang="en-US"/>
           </a:p>
@@ -4719,10 +4536,9 @@
           <a:lstStyle/>
           <a:p>
             <a:r>
-              <a:rPr lang="en-US" smtClean="0"/>
+              <a:rPr lang="en-US"/>
               <a:t>Click to edit Master title style</a:t>
             </a:r>
-            <a:endParaRPr lang="en-US"/>
           </a:p>
         </p:txBody>
       </p:sp>
@@ -4743,38 +4559,37 @@
           <a:p>
             <a:pPr lvl="0"/>
             <a:r>
-              <a:rPr lang="en-US" smtClean="0"/>
+              <a:rPr lang="en-US"/>
               <a:t>Click to edit Master text styles</a:t>
             </a:r>
           </a:p>
           <a:p>
             <a:pPr lvl="1"/>
             <a:r>
-              <a:rPr lang="en-US" smtClean="0"/>
+              <a:rPr lang="en-US"/>
               <a:t>Second level</a:t>
             </a:r>
           </a:p>
           <a:p>
             <a:pPr lvl="2"/>
             <a:r>
-              <a:rPr lang="en-US" smtClean="0"/>
+              <a:rPr lang="en-US"/>
               <a:t>Third level</a:t>
             </a:r>
           </a:p>
           <a:p>
             <a:pPr lvl="3"/>
             <a:r>
-              <a:rPr lang="en-US" smtClean="0"/>
+              <a:rPr lang="en-US"/>
               <a:t>Fourth level</a:t>
             </a:r>
           </a:p>
           <a:p>
             <a:pPr lvl="4"/>
             <a:r>
-              <a:rPr lang="en-US" smtClean="0"/>
+              <a:rPr lang="en-US"/>
               <a:t>Fifth level</a:t>
             </a:r>
-            <a:endParaRPr lang="en-US"/>
           </a:p>
         </p:txBody>
       </p:sp>
@@ -4795,7 +4610,7 @@
           <a:p>
             <a:fld id="{5BCAD085-E8A6-8845-BD4E-CB4CCA059FC4}" type="datetimeFigureOut">
               <a:rPr lang="en-US" smtClean="0"/>
-              <a:t>1/27/13</a:t>
+              <a:t>9/7/2026</a:t>
             </a:fld>
             <a:endParaRPr lang="en-US"/>
           </a:p>
@@ -4898,10 +4713,9 @@
           </a:lstStyle>
           <a:p>
             <a:r>
-              <a:rPr lang="en-US" smtClean="0"/>
+              <a:rPr lang="en-US"/>
               <a:t>Click to edit Master title style</a:t>
             </a:r>
-            <a:endParaRPr lang="en-US"/>
           </a:p>
         </p:txBody>
       </p:sp>
@@ -5018,7 +4832,7 @@
           <a:p>
             <a:pPr lvl="0"/>
             <a:r>
-              <a:rPr lang="en-US" smtClean="0"/>
+              <a:rPr lang="en-US"/>
               <a:t>Click to edit Master text styles</a:t>
             </a:r>
           </a:p>
@@ -5041,7 +4855,7 @@
           <a:p>
             <a:fld id="{5BCAD085-E8A6-8845-BD4E-CB4CCA059FC4}" type="datetimeFigureOut">
               <a:rPr lang="en-US" smtClean="0"/>
-              <a:t>1/27/13</a:t>
+              <a:t>9/7/2026</a:t>
             </a:fld>
             <a:endParaRPr lang="en-US"/>
           </a:p>
@@ -5135,10 +4949,9 @@
           <a:lstStyle/>
           <a:p>
             <a:r>
-              <a:rPr lang="en-US" smtClean="0"/>
+              <a:rPr lang="en-US"/>
               <a:t>Click to edit Master title style</a:t>
             </a:r>
-            <a:endParaRPr lang="en-US"/>
           </a:p>
         </p:txBody>
       </p:sp>
@@ -5192,38 +5005,37 @@
           <a:p>
             <a:pPr lvl="0"/>
             <a:r>
-              <a:rPr lang="en-US" smtClean="0"/>
+              <a:rPr lang="en-US"/>
               <a:t>Click to edit Master text styles</a:t>
             </a:r>
           </a:p>
           <a:p>
             <a:pPr lvl="1"/>
             <a:r>
-              <a:rPr lang="en-US" smtClean="0"/>
+              <a:rPr lang="en-US"/>
               <a:t>Second level</a:t>
             </a:r>
           </a:p>
           <a:p>
             <a:pPr lvl="2"/>
             <a:r>
-              <a:rPr lang="en-US" smtClean="0"/>
+              <a:rPr lang="en-US"/>
               <a:t>Third level</a:t>
             </a:r>
           </a:p>
           <a:p>
             <a:pPr lvl="3"/>
             <a:r>
-              <a:rPr lang="en-US" smtClean="0"/>
+              <a:rPr lang="en-US"/>
               <a:t>Fourth level</a:t>
             </a:r>
           </a:p>
           <a:p>
             <a:pPr lvl="4"/>
             <a:r>
-              <a:rPr lang="en-US" smtClean="0"/>
+              <a:rPr lang="en-US"/>
               <a:t>Fifth level</a:t>
             </a:r>
-            <a:endParaRPr lang="en-US"/>
           </a:p>
         </p:txBody>
       </p:sp>
@@ -5277,38 +5089,37 @@
           <a:p>
             <a:pPr lvl="0"/>
             <a:r>
-              <a:rPr lang="en-US" smtClean="0"/>
+              <a:rPr lang="en-US"/>
               <a:t>Click to edit Master text styles</a:t>
             </a:r>
           </a:p>
           <a:p>
             <a:pPr lvl="1"/>
             <a:r>
-              <a:rPr lang="en-US" smtClean="0"/>
+              <a:rPr lang="en-US"/>
               <a:t>Second level</a:t>
             </a:r>
           </a:p>
           <a:p>
             <a:pPr lvl="2"/>
             <a:r>
-              <a:rPr lang="en-US" smtClean="0"/>
+              <a:rPr lang="en-US"/>
               <a:t>Third level</a:t>
             </a:r>
           </a:p>
           <a:p>
             <a:pPr lvl="3"/>
             <a:r>
-              <a:rPr lang="en-US" smtClean="0"/>
+              <a:rPr lang="en-US"/>
               <a:t>Fourth level</a:t>
             </a:r>
           </a:p>
           <a:p>
             <a:pPr lvl="4"/>
             <a:r>
-              <a:rPr lang="en-US" smtClean="0"/>
+              <a:rPr lang="en-US"/>
               <a:t>Fifth level</a:t>
             </a:r>
-            <a:endParaRPr lang="en-US"/>
           </a:p>
         </p:txBody>
       </p:sp>
@@ -5329,7 +5140,7 @@
           <a:p>
             <a:fld id="{5BCAD085-E8A6-8845-BD4E-CB4CCA059FC4}" type="datetimeFigureOut">
               <a:rPr lang="en-US" smtClean="0"/>
-              <a:t>1/27/13</a:t>
+              <a:t>9/7/2026</a:t>
             </a:fld>
             <a:endParaRPr lang="en-US"/>
           </a:p>
@@ -5427,10 +5238,9 @@
           </a:lstStyle>
           <a:p>
             <a:r>
-              <a:rPr lang="en-US" smtClean="0"/>
+              <a:rPr lang="en-US"/>
               <a:t>Click to edit Master title style</a:t>
             </a:r>
-            <a:endParaRPr lang="en-US"/>
           </a:p>
         </p:txBody>
       </p:sp>
@@ -5493,7 +5303,7 @@
           <a:p>
             <a:pPr lvl="0"/>
             <a:r>
-              <a:rPr lang="en-US" smtClean="0"/>
+              <a:rPr lang="en-US"/>
               <a:t>Click to edit Master text styles</a:t>
             </a:r>
           </a:p>
@@ -5549,38 +5359,37 @@
           <a:p>
             <a:pPr lvl="0"/>
             <a:r>
-              <a:rPr lang="en-US" smtClean="0"/>
+              <a:rPr lang="en-US"/>
               <a:t>Click to edit Master text styles</a:t>
             </a:r>
           </a:p>
           <a:p>
             <a:pPr lvl="1"/>
             <a:r>
-              <a:rPr lang="en-US" smtClean="0"/>
+              <a:rPr lang="en-US"/>
               <a:t>Second level</a:t>
             </a:r>
           </a:p>
           <a:p>
             <a:pPr lvl="2"/>
             <a:r>
-              <a:rPr lang="en-US" smtClean="0"/>
+              <a:rPr lang="en-US"/>
               <a:t>Third level</a:t>
             </a:r>
           </a:p>
           <a:p>
             <a:pPr lvl="3"/>
             <a:r>
-              <a:rPr lang="en-US" smtClean="0"/>
+              <a:rPr lang="en-US"/>
               <a:t>Fourth level</a:t>
             </a:r>
           </a:p>
           <a:p>
             <a:pPr lvl="4"/>
             <a:r>
-              <a:rPr lang="en-US" smtClean="0"/>
+              <a:rPr lang="en-US"/>
               <a:t>Fifth level</a:t>
             </a:r>
-            <a:endParaRPr lang="en-US"/>
           </a:p>
         </p:txBody>
       </p:sp>
@@ -5643,7 +5452,7 @@
           <a:p>
             <a:pPr lvl="0"/>
             <a:r>
-              <a:rPr lang="en-US" smtClean="0"/>
+              <a:rPr lang="en-US"/>
               <a:t>Click to edit Master text styles</a:t>
             </a:r>
           </a:p>
@@ -5699,38 +5508,37 @@
           <a:p>
             <a:pPr lvl="0"/>
             <a:r>
-              <a:rPr lang="en-US" smtClean="0"/>
+              <a:rPr lang="en-US"/>
               <a:t>Click to edit Master text styles</a:t>
             </a:r>
           </a:p>
           <a:p>
             <a:pPr lvl="1"/>
             <a:r>
-              <a:rPr lang="en-US" smtClean="0"/>
+              <a:rPr lang="en-US"/>
               <a:t>Second level</a:t>
             </a:r>
           </a:p>
           <a:p>
             <a:pPr lvl="2"/>
             <a:r>
-              <a:rPr lang="en-US" smtClean="0"/>
+              <a:rPr lang="en-US"/>
               <a:t>Third level</a:t>
             </a:r>
           </a:p>
           <a:p>
             <a:pPr lvl="3"/>
             <a:r>
-              <a:rPr lang="en-US" smtClean="0"/>
+              <a:rPr lang="en-US"/>
               <a:t>Fourth level</a:t>
             </a:r>
           </a:p>
           <a:p>
             <a:pPr lvl="4"/>
             <a:r>
-              <a:rPr lang="en-US" smtClean="0"/>
+              <a:rPr lang="en-US"/>
               <a:t>Fifth level</a:t>
             </a:r>
-            <a:endParaRPr lang="en-US"/>
           </a:p>
         </p:txBody>
       </p:sp>
@@ -5751,7 +5559,7 @@
           <a:p>
             <a:fld id="{5BCAD085-E8A6-8845-BD4E-CB4CCA059FC4}" type="datetimeFigureOut">
               <a:rPr lang="en-US" smtClean="0"/>
-              <a:t>1/27/13</a:t>
+              <a:t>9/7/2026</a:t>
             </a:fld>
             <a:endParaRPr lang="en-US"/>
           </a:p>
@@ -5845,10 +5653,9 @@
           <a:lstStyle/>
           <a:p>
             <a:r>
-              <a:rPr lang="en-US" smtClean="0"/>
+              <a:rPr lang="en-US"/>
               <a:t>Click to edit Master title style</a:t>
             </a:r>
-            <a:endParaRPr lang="en-US"/>
           </a:p>
         </p:txBody>
       </p:sp>
@@ -5869,7 +5676,7 @@
           <a:p>
             <a:fld id="{5BCAD085-E8A6-8845-BD4E-CB4CCA059FC4}" type="datetimeFigureOut">
               <a:rPr lang="en-US" smtClean="0"/>
-              <a:t>1/27/13</a:t>
+              <a:t>9/7/2026</a:t>
             </a:fld>
             <a:endParaRPr lang="en-US"/>
           </a:p>
@@ -5964,7 +5771,7 @@
           <a:p>
             <a:fld id="{5BCAD085-E8A6-8845-BD4E-CB4CCA059FC4}" type="datetimeFigureOut">
               <a:rPr lang="en-US" smtClean="0"/>
-              <a:t>1/27/13</a:t>
+              <a:t>9/7/2026</a:t>
             </a:fld>
             <a:endParaRPr lang="en-US"/>
           </a:p>
@@ -6067,10 +5874,9 @@
           </a:lstStyle>
           <a:p>
             <a:r>
-              <a:rPr lang="en-US" smtClean="0"/>
+              <a:rPr lang="en-US"/>
               <a:t>Click to edit Master title style</a:t>
             </a:r>
-            <a:endParaRPr lang="en-US"/>
           </a:p>
         </p:txBody>
       </p:sp>
@@ -6124,38 +5930,37 @@
           <a:p>
             <a:pPr lvl="0"/>
             <a:r>
-              <a:rPr lang="en-US" smtClean="0"/>
+              <a:rPr lang="en-US"/>
               <a:t>Click to edit Master text styles</a:t>
             </a:r>
           </a:p>
           <a:p>
             <a:pPr lvl="1"/>
             <a:r>
-              <a:rPr lang="en-US" smtClean="0"/>
+              <a:rPr lang="en-US"/>
               <a:t>Second level</a:t>
             </a:r>
           </a:p>
           <a:p>
             <a:pPr lvl="2"/>
             <a:r>
-              <a:rPr lang="en-US" smtClean="0"/>
+              <a:rPr lang="en-US"/>
               <a:t>Third level</a:t>
             </a:r>
           </a:p>
           <a:p>
             <a:pPr lvl="3"/>
             <a:r>
-              <a:rPr lang="en-US" smtClean="0"/>
+              <a:rPr lang="en-US"/>
               <a:t>Fourth level</a:t>
             </a:r>
           </a:p>
           <a:p>
             <a:pPr lvl="4"/>
             <a:r>
-              <a:rPr lang="en-US" smtClean="0"/>
+              <a:rPr lang="en-US"/>
               <a:t>Fifth level</a:t>
             </a:r>
-            <a:endParaRPr lang="en-US"/>
           </a:p>
         </p:txBody>
       </p:sp>
@@ -6218,7 +6023,7 @@
           <a:p>
             <a:pPr lvl="0"/>
             <a:r>
-              <a:rPr lang="en-US" smtClean="0"/>
+              <a:rPr lang="en-US"/>
               <a:t>Click to edit Master text styles</a:t>
             </a:r>
           </a:p>
@@ -6241,7 +6046,7 @@
           <a:p>
             <a:fld id="{5BCAD085-E8A6-8845-BD4E-CB4CCA059FC4}" type="datetimeFigureOut">
               <a:rPr lang="en-US" smtClean="0"/>
-              <a:t>1/27/13</a:t>
+              <a:t>9/7/2026</a:t>
             </a:fld>
             <a:endParaRPr lang="en-US"/>
           </a:p>
@@ -6344,10 +6149,9 @@
           </a:lstStyle>
           <a:p>
             <a:r>
-              <a:rPr lang="en-US" smtClean="0"/>
+              <a:rPr lang="en-US"/>
               <a:t>Click to edit Master title style</a:t>
             </a:r>
-            <a:endParaRPr lang="en-US"/>
           </a:p>
         </p:txBody>
       </p:sp>
@@ -6471,7 +6275,7 @@
           <a:p>
             <a:pPr lvl="0"/>
             <a:r>
-              <a:rPr lang="en-US" smtClean="0"/>
+              <a:rPr lang="en-US"/>
               <a:t>Click to edit Master text styles</a:t>
             </a:r>
           </a:p>
@@ -6494,7 +6298,7 @@
           <a:p>
             <a:fld id="{5BCAD085-E8A6-8845-BD4E-CB4CCA059FC4}" type="datetimeFigureOut">
               <a:rPr lang="en-US" smtClean="0"/>
-              <a:t>1/27/13</a:t>
+              <a:t>9/7/2026</a:t>
             </a:fld>
             <a:endParaRPr lang="en-US"/>
           </a:p>
@@ -6603,10 +6407,9 @@
           <a:lstStyle/>
           <a:p>
             <a:r>
-              <a:rPr lang="en-US" smtClean="0"/>
+              <a:rPr lang="en-US"/>
               <a:t>Click to edit Master title style</a:t>
             </a:r>
-            <a:endParaRPr lang="en-US"/>
           </a:p>
         </p:txBody>
       </p:sp>
@@ -6637,38 +6440,37 @@
           <a:p>
             <a:pPr lvl="0"/>
             <a:r>
-              <a:rPr lang="en-US" smtClean="0"/>
+              <a:rPr lang="en-US"/>
               <a:t>Click to edit Master text styles</a:t>
             </a:r>
           </a:p>
           <a:p>
             <a:pPr lvl="1"/>
             <a:r>
-              <a:rPr lang="en-US" smtClean="0"/>
+              <a:rPr lang="en-US"/>
               <a:t>Second level</a:t>
             </a:r>
           </a:p>
           <a:p>
             <a:pPr lvl="2"/>
             <a:r>
-              <a:rPr lang="en-US" smtClean="0"/>
+              <a:rPr lang="en-US"/>
               <a:t>Third level</a:t>
             </a:r>
           </a:p>
           <a:p>
             <a:pPr lvl="3"/>
             <a:r>
-              <a:rPr lang="en-US" smtClean="0"/>
+              <a:rPr lang="en-US"/>
               <a:t>Fourth level</a:t>
             </a:r>
           </a:p>
           <a:p>
             <a:pPr lvl="4"/>
             <a:r>
-              <a:rPr lang="en-US" smtClean="0"/>
+              <a:rPr lang="en-US"/>
               <a:t>Fifth level</a:t>
             </a:r>
-            <a:endParaRPr lang="en-US"/>
           </a:p>
         </p:txBody>
       </p:sp>
@@ -6707,7 +6509,7 @@
           <a:p>
             <a:fld id="{5BCAD085-E8A6-8845-BD4E-CB4CCA059FC4}" type="datetimeFigureOut">
               <a:rPr lang="en-US" smtClean="0"/>
-              <a:t>1/27/13</a:t>
+              <a:t>9/7/2026</a:t>
             </a:fld>
             <a:endParaRPr lang="en-US"/>
           </a:p>
@@ -7066,7 +6868,7 @@
 </file>
 
 <file path=ppt/slides/slide1.xml><?xml version="1.0" encoding="utf-8"?>
-<p:sld xmlns:a="http://schemas.openxmlformats.org/drawingml/2006/main" xmlns:p="http://schemas.openxmlformats.org/presentationml/2006/main" xmlns:r="http://schemas.openxmlformats.org/officeDocument/2006/relationships">
+<p:sld xmlns:a="http://schemas.openxmlformats.org/drawingml/2006/main" xmlns:r="http://schemas.openxmlformats.org/officeDocument/2006/relationships" xmlns:p="http://schemas.openxmlformats.org/presentationml/2006/main">
   <p:cSld>
     <p:spTree>
       <p:nvGrpSpPr>
@@ -7074,7 +6876,14 @@
         <p:cNvGrpSpPr/>
         <p:nvPr/>
       </p:nvGrpSpPr>
-      <p:grpSpPr/>
+      <p:grpSpPr>
+        <a:xfrm>
+          <a:off x="0" y="0"/>
+          <a:ext cx="0" cy="0"/>
+          <a:chOff x="0" y="0"/>
+          <a:chExt cx="0" cy="0"/>
+        </a:xfrm>
+      </p:grpSpPr>
       <p:sp>
         <p:nvSpPr>
           <p:cNvPr id="2" name="Rectangle 1"/>
@@ -7116,6 +6925,7 @@
           <a:lstStyle/>
           <a:p>
             <a:pPr algn="ctr"/>
+            <a:endParaRPr/>
           </a:p>
         </p:txBody>
       </p:sp>
@@ -7128,7 +6938,7 @@
           <p:nvPr/>
         </p:nvPicPr>
         <p:blipFill>
-          <a:blip r:embed="rId2"/>
+          <a:blip r:embed="rId3"/>
           <a:stretch>
             <a:fillRect/>
           </a:stretch>
@@ -7373,6 +7183,12 @@
                 <a:latin typeface="Calibri"/>
               </a:defRPr>
             </a:pPr>
+            <a:endParaRPr sz="1200" b="0">
+              <a:solidFill>
+                <a:srgbClr val="666666"/>
+              </a:solidFill>
+              <a:latin typeface="Calibri"/>
+            </a:endParaRPr>
           </a:p>
           <a:p>
             <a:pPr algn="l">
@@ -7514,6 +7330,12 @@
                 <a:latin typeface="Calibri"/>
               </a:defRPr>
             </a:pPr>
+            <a:endParaRPr sz="1200" b="0">
+              <a:solidFill>
+                <a:srgbClr val="666666"/>
+              </a:solidFill>
+              <a:latin typeface="Calibri"/>
+            </a:endParaRPr>
           </a:p>
           <a:p>
             <a:pPr algn="l">
@@ -7551,7 +7373,7 @@
           <p:nvPr/>
         </p:nvPicPr>
         <p:blipFill>
-          <a:blip r:embed="rId3"/>
+          <a:blip r:embed="rId4"/>
           <a:stretch>
             <a:fillRect/>
           </a:stretch>
@@ -7623,7 +7445,7 @@
 </file>
 
 <file path=ppt/slides/slide10.xml><?xml version="1.0" encoding="utf-8"?>
-<p:sld xmlns:a="http://schemas.openxmlformats.org/drawingml/2006/main" xmlns:p="http://schemas.openxmlformats.org/presentationml/2006/main" xmlns:r="http://schemas.openxmlformats.org/officeDocument/2006/relationships">
+<p:sld xmlns:a="http://schemas.openxmlformats.org/drawingml/2006/main" xmlns:r="http://schemas.openxmlformats.org/officeDocument/2006/relationships" xmlns:p="http://schemas.openxmlformats.org/presentationml/2006/main">
   <p:cSld>
     <p:spTree>
       <p:nvGrpSpPr>
@@ -7631,7 +7453,14 @@
         <p:cNvGrpSpPr/>
         <p:nvPr/>
       </p:nvGrpSpPr>
-      <p:grpSpPr/>
+      <p:grpSpPr>
+        <a:xfrm>
+          <a:off x="0" y="0"/>
+          <a:ext cx="0" cy="0"/>
+          <a:chOff x="0" y="0"/>
+          <a:chExt cx="0" cy="0"/>
+        </a:xfrm>
+      </p:grpSpPr>
       <p:sp>
         <p:nvSpPr>
           <p:cNvPr id="2" name="Title 1"/>
@@ -7719,6 +7548,7 @@
           <a:lstStyle/>
           <a:p>
             <a:pPr algn="ctr"/>
+            <a:endParaRPr/>
           </a:p>
         </p:txBody>
       </p:sp>
@@ -9775,7 +9605,7 @@
           </a:fontRef>
         </p:style>
         <p:txBody>
-          <a:bodyPr rtlCol="0" anchor="ctr" wrap="square" lIns="164592" rIns="164592" tIns="73152" bIns="73152"/>
+          <a:bodyPr wrap="square" lIns="164592" tIns="73152" rIns="164592" bIns="73152" rtlCol="0" anchor="ctr"/>
           <a:lstStyle/>
           <a:p>
             <a:pPr algn="l"/>
@@ -9809,7 +9639,7 @@
 </file>
 
 <file path=ppt/slides/slide11.xml><?xml version="1.0" encoding="utf-8"?>
-<p:sld xmlns:a="http://schemas.openxmlformats.org/drawingml/2006/main" xmlns:p="http://schemas.openxmlformats.org/presentationml/2006/main" xmlns:r="http://schemas.openxmlformats.org/officeDocument/2006/relationships">
+<p:sld xmlns:a="http://schemas.openxmlformats.org/drawingml/2006/main" xmlns:r="http://schemas.openxmlformats.org/officeDocument/2006/relationships" xmlns:p="http://schemas.openxmlformats.org/presentationml/2006/main">
   <p:cSld>
     <p:spTree>
       <p:nvGrpSpPr>
@@ -9817,7 +9647,14 @@
         <p:cNvGrpSpPr/>
         <p:nvPr/>
       </p:nvGrpSpPr>
-      <p:grpSpPr/>
+      <p:grpSpPr>
+        <a:xfrm>
+          <a:off x="0" y="0"/>
+          <a:ext cx="0" cy="0"/>
+          <a:chOff x="0" y="0"/>
+          <a:chExt cx="0" cy="0"/>
+        </a:xfrm>
+      </p:grpSpPr>
       <p:sp>
         <p:nvSpPr>
           <p:cNvPr id="2" name="Title 1"/>
@@ -9905,6 +9742,7 @@
           <a:lstStyle/>
           <a:p>
             <a:pPr algn="ctr"/>
+            <a:endParaRPr/>
           </a:p>
         </p:txBody>
       </p:sp>
@@ -10113,6 +9951,12 @@
                 <a:latin typeface="Calibri"/>
               </a:defRPr>
             </a:pPr>
+            <a:endParaRPr sz="2500" b="0">
+              <a:solidFill>
+                <a:srgbClr val="222222"/>
+              </a:solidFill>
+              <a:latin typeface="Calibri"/>
+            </a:endParaRPr>
           </a:p>
           <a:p>
             <a:pPr algn="l">
@@ -10154,6 +9998,12 @@
                 <a:latin typeface="Calibri"/>
               </a:defRPr>
             </a:pPr>
+            <a:endParaRPr sz="2500" b="0">
+              <a:solidFill>
+                <a:srgbClr val="222222"/>
+              </a:solidFill>
+              <a:latin typeface="Calibri"/>
+            </a:endParaRPr>
           </a:p>
           <a:p>
             <a:pPr algn="l">
@@ -10341,6 +10191,12 @@
                 <a:latin typeface="Calibri"/>
               </a:defRPr>
             </a:pPr>
+            <a:endParaRPr sz="2400" b="0">
+              <a:solidFill>
+                <a:srgbClr val="222222"/>
+              </a:solidFill>
+              <a:latin typeface="Calibri"/>
+            </a:endParaRPr>
           </a:p>
           <a:p>
             <a:pPr algn="l">
@@ -10378,7 +10234,7 @@
 </file>
 
 <file path=ppt/slides/slide12.xml><?xml version="1.0" encoding="utf-8"?>
-<p:sld xmlns:a="http://schemas.openxmlformats.org/drawingml/2006/main" xmlns:p="http://schemas.openxmlformats.org/presentationml/2006/main" xmlns:r="http://schemas.openxmlformats.org/officeDocument/2006/relationships">
+<p:sld xmlns:a="http://schemas.openxmlformats.org/drawingml/2006/main" xmlns:r="http://schemas.openxmlformats.org/officeDocument/2006/relationships" xmlns:p="http://schemas.openxmlformats.org/presentationml/2006/main">
   <p:cSld>
     <p:spTree>
       <p:nvGrpSpPr>
@@ -10386,7 +10242,14 @@
         <p:cNvGrpSpPr/>
         <p:nvPr/>
       </p:nvGrpSpPr>
-      <p:grpSpPr/>
+      <p:grpSpPr>
+        <a:xfrm>
+          <a:off x="0" y="0"/>
+          <a:ext cx="0" cy="0"/>
+          <a:chOff x="0" y="0"/>
+          <a:chExt cx="0" cy="0"/>
+        </a:xfrm>
+      </p:grpSpPr>
       <p:sp>
         <p:nvSpPr>
           <p:cNvPr id="2" name="Title 1"/>
@@ -10474,6 +10337,7 @@
           <a:lstStyle/>
           <a:p>
             <a:pPr algn="ctr"/>
+            <a:endParaRPr/>
           </a:p>
         </p:txBody>
       </p:sp>
@@ -10662,7 +10526,7 @@
           </a:fontRef>
         </p:style>
         <p:txBody>
-          <a:bodyPr rtlCol="0" anchor="t" wrap="square" lIns="146304" tIns="91440" bIns="73152"/>
+          <a:bodyPr wrap="square" lIns="146304" tIns="91440" bIns="73152" rtlCol="0" anchor="t"/>
           <a:lstStyle/>
           <a:p>
             <a:pPr algn="l">
@@ -11040,7 +10904,7 @@
 </file>
 
 <file path=ppt/slides/slide13.xml><?xml version="1.0" encoding="utf-8"?>
-<p:sld xmlns:a="http://schemas.openxmlformats.org/drawingml/2006/main" xmlns:p="http://schemas.openxmlformats.org/presentationml/2006/main" xmlns:r="http://schemas.openxmlformats.org/officeDocument/2006/relationships">
+<p:sld xmlns:a="http://schemas.openxmlformats.org/drawingml/2006/main" xmlns:r="http://schemas.openxmlformats.org/officeDocument/2006/relationships" xmlns:p="http://schemas.openxmlformats.org/presentationml/2006/main">
   <p:cSld>
     <p:spTree>
       <p:nvGrpSpPr>
@@ -11048,7 +10912,14 @@
         <p:cNvGrpSpPr/>
         <p:nvPr/>
       </p:nvGrpSpPr>
-      <p:grpSpPr/>
+      <p:grpSpPr>
+        <a:xfrm>
+          <a:off x="0" y="0"/>
+          <a:ext cx="0" cy="0"/>
+          <a:chOff x="0" y="0"/>
+          <a:chExt cx="0" cy="0"/>
+        </a:xfrm>
+      </p:grpSpPr>
       <p:sp>
         <p:nvSpPr>
           <p:cNvPr id="2" name="TextBox 1"/>
@@ -11186,6 +11057,7 @@
           <a:lstStyle/>
           <a:p>
             <a:pPr algn="ctr"/>
+            <a:endParaRPr/>
           </a:p>
         </p:txBody>
       </p:sp>
@@ -11326,7 +11198,7 @@
           </a:fontRef>
         </p:style>
         <p:txBody>
-          <a:bodyPr rtlCol="0" anchor="ctr" wrap="square" lIns="73152" rIns="73152"/>
+          <a:bodyPr wrap="square" lIns="73152" rIns="73152" rtlCol="0" anchor="ctr"/>
           <a:lstStyle/>
           <a:p>
             <a:pPr algn="ctr">
@@ -11444,7 +11316,7 @@
           </a:fontRef>
         </p:style>
         <p:txBody>
-          <a:bodyPr rtlCol="0" anchor="ctr" wrap="square" lIns="73152" rIns="73152"/>
+          <a:bodyPr wrap="square" lIns="73152" rIns="73152" rtlCol="0" anchor="ctr"/>
           <a:lstStyle/>
           <a:p>
             <a:pPr algn="ctr">
@@ -11562,7 +11434,7 @@
           </a:fontRef>
         </p:style>
         <p:txBody>
-          <a:bodyPr rtlCol="0" anchor="ctr" wrap="square" lIns="73152" rIns="73152"/>
+          <a:bodyPr wrap="square" lIns="73152" rIns="73152" rtlCol="0" anchor="ctr"/>
           <a:lstStyle/>
           <a:p>
             <a:pPr algn="ctr">
@@ -11632,7 +11504,7 @@
           </a:fontRef>
         </p:style>
         <p:txBody>
-          <a:bodyPr rtlCol="0" anchor="ctr" wrap="square" lIns="73152" rIns="73152"/>
+          <a:bodyPr wrap="square" lIns="73152" rIns="73152" rtlCol="0" anchor="ctr"/>
           <a:lstStyle/>
           <a:p>
             <a:pPr algn="ctr">
@@ -11702,7 +11574,7 @@
           </a:fontRef>
         </p:style>
         <p:txBody>
-          <a:bodyPr rtlCol="0" anchor="ctr" wrap="square" lIns="73152" rIns="73152"/>
+          <a:bodyPr wrap="square" lIns="73152" rIns="73152" rtlCol="0" anchor="ctr"/>
           <a:lstStyle/>
           <a:p>
             <a:pPr algn="ctr">
@@ -11740,7 +11612,7 @@
 </file>
 
 <file path=ppt/slides/slide14.xml><?xml version="1.0" encoding="utf-8"?>
-<p:sld xmlns:a="http://schemas.openxmlformats.org/drawingml/2006/main" xmlns:p="http://schemas.openxmlformats.org/presentationml/2006/main" xmlns:r="http://schemas.openxmlformats.org/officeDocument/2006/relationships">
+<p:sld xmlns:a="http://schemas.openxmlformats.org/drawingml/2006/main" xmlns:r="http://schemas.openxmlformats.org/officeDocument/2006/relationships" xmlns:p="http://schemas.openxmlformats.org/presentationml/2006/main">
   <p:cSld>
     <p:spTree>
       <p:nvGrpSpPr>
@@ -11748,7 +11620,14 @@
         <p:cNvGrpSpPr/>
         <p:nvPr/>
       </p:nvGrpSpPr>
-      <p:grpSpPr/>
+      <p:grpSpPr>
+        <a:xfrm>
+          <a:off x="0" y="0"/>
+          <a:ext cx="0" cy="0"/>
+          <a:chOff x="0" y="0"/>
+          <a:chExt cx="0" cy="0"/>
+        </a:xfrm>
+      </p:grpSpPr>
       <p:sp>
         <p:nvSpPr>
           <p:cNvPr id="2" name="Title 1"/>
@@ -11836,6 +11715,7 @@
           <a:lstStyle/>
           <a:p>
             <a:pPr algn="ctr"/>
+            <a:endParaRPr/>
           </a:p>
         </p:txBody>
       </p:sp>
@@ -11974,7 +11854,7 @@
           </a:fontRef>
         </p:style>
         <p:txBody>
-          <a:bodyPr rtlCol="0" anchor="ctr" wrap="square" lIns="182880"/>
+          <a:bodyPr wrap="square" lIns="182880" rtlCol="0" anchor="ctr"/>
           <a:lstStyle/>
           <a:p>
             <a:pPr algn="l"/>
@@ -12414,7 +12294,7 @@
           </a:fontRef>
         </p:style>
         <p:txBody>
-          <a:bodyPr rtlCol="0" anchor="ctr" wrap="square" lIns="164592" rIns="164592" tIns="73152" bIns="73152"/>
+          <a:bodyPr wrap="square" lIns="164592" tIns="73152" rIns="164592" bIns="73152" rtlCol="0" anchor="ctr"/>
           <a:lstStyle/>
           <a:p>
             <a:pPr algn="l"/>
@@ -12448,7 +12328,7 @@
 </file>
 
 <file path=ppt/slides/slide15.xml><?xml version="1.0" encoding="utf-8"?>
-<p:sld xmlns:a="http://schemas.openxmlformats.org/drawingml/2006/main" xmlns:p="http://schemas.openxmlformats.org/presentationml/2006/main" xmlns:r="http://schemas.openxmlformats.org/officeDocument/2006/relationships">
+<p:sld xmlns:a="http://schemas.openxmlformats.org/drawingml/2006/main" xmlns:r="http://schemas.openxmlformats.org/officeDocument/2006/relationships" xmlns:p="http://schemas.openxmlformats.org/presentationml/2006/main">
   <p:cSld>
     <p:spTree>
       <p:nvGrpSpPr>
@@ -12456,7 +12336,14 @@
         <p:cNvGrpSpPr/>
         <p:nvPr/>
       </p:nvGrpSpPr>
-      <p:grpSpPr/>
+      <p:grpSpPr>
+        <a:xfrm>
+          <a:off x="0" y="0"/>
+          <a:ext cx="0" cy="0"/>
+          <a:chOff x="0" y="0"/>
+          <a:chExt cx="0" cy="0"/>
+        </a:xfrm>
+      </p:grpSpPr>
       <p:sp>
         <p:nvSpPr>
           <p:cNvPr id="2" name="TextBox 1"/>
@@ -12594,6 +12481,7 @@
           <a:lstStyle/>
           <a:p>
             <a:pPr algn="ctr"/>
+            <a:endParaRPr/>
           </a:p>
         </p:txBody>
       </p:sp>
@@ -12734,7 +12622,7 @@
           </a:fontRef>
         </p:style>
         <p:txBody>
-          <a:bodyPr rtlCol="0" anchor="ctr" wrap="square" lIns="73152" rIns="73152"/>
+          <a:bodyPr wrap="square" lIns="73152" rIns="73152" rtlCol="0" anchor="ctr"/>
           <a:lstStyle/>
           <a:p>
             <a:pPr algn="ctr">
@@ -12852,7 +12740,7 @@
           </a:fontRef>
         </p:style>
         <p:txBody>
-          <a:bodyPr rtlCol="0" anchor="ctr" wrap="square" lIns="73152" rIns="73152"/>
+          <a:bodyPr wrap="square" lIns="73152" rIns="73152" rtlCol="0" anchor="ctr"/>
           <a:lstStyle/>
           <a:p>
             <a:pPr algn="ctr">
@@ -12970,7 +12858,7 @@
           </a:fontRef>
         </p:style>
         <p:txBody>
-          <a:bodyPr rtlCol="0" anchor="ctr" wrap="square" lIns="73152" rIns="73152"/>
+          <a:bodyPr wrap="square" lIns="73152" rIns="73152" rtlCol="0" anchor="ctr"/>
           <a:lstStyle/>
           <a:p>
             <a:pPr algn="ctr">
@@ -13088,7 +12976,7 @@
           </a:fontRef>
         </p:style>
         <p:txBody>
-          <a:bodyPr rtlCol="0" anchor="ctr" wrap="square" lIns="73152" rIns="73152"/>
+          <a:bodyPr wrap="square" lIns="73152" rIns="73152" rtlCol="0" anchor="ctr"/>
           <a:lstStyle/>
           <a:p>
             <a:pPr algn="ctr">
@@ -13158,7 +13046,7 @@
           </a:fontRef>
         </p:style>
         <p:txBody>
-          <a:bodyPr rtlCol="0" anchor="ctr" wrap="square" lIns="73152" rIns="73152"/>
+          <a:bodyPr wrap="square" lIns="73152" rIns="73152" rtlCol="0" anchor="ctr"/>
           <a:lstStyle/>
           <a:p>
             <a:pPr algn="ctr">
@@ -13196,7 +13084,7 @@
 </file>
 
 <file path=ppt/slides/slide16.xml><?xml version="1.0" encoding="utf-8"?>
-<p:sld xmlns:a="http://schemas.openxmlformats.org/drawingml/2006/main" xmlns:p="http://schemas.openxmlformats.org/presentationml/2006/main" xmlns:r="http://schemas.openxmlformats.org/officeDocument/2006/relationships">
+<p:sld xmlns:a="http://schemas.openxmlformats.org/drawingml/2006/main" xmlns:r="http://schemas.openxmlformats.org/officeDocument/2006/relationships" xmlns:p="http://schemas.openxmlformats.org/presentationml/2006/main">
   <p:cSld>
     <p:spTree>
       <p:nvGrpSpPr>
@@ -13204,7 +13092,14 @@
         <p:cNvGrpSpPr/>
         <p:nvPr/>
       </p:nvGrpSpPr>
-      <p:grpSpPr/>
+      <p:grpSpPr>
+        <a:xfrm>
+          <a:off x="0" y="0"/>
+          <a:ext cx="0" cy="0"/>
+          <a:chOff x="0" y="0"/>
+          <a:chExt cx="0" cy="0"/>
+        </a:xfrm>
+      </p:grpSpPr>
       <p:sp>
         <p:nvSpPr>
           <p:cNvPr id="2" name="Title 1"/>
@@ -13292,6 +13187,7 @@
           <a:lstStyle/>
           <a:p>
             <a:pPr algn="ctr"/>
+            <a:endParaRPr/>
           </a:p>
         </p:txBody>
       </p:sp>
@@ -13430,7 +13326,7 @@
           </a:fontRef>
         </p:style>
         <p:txBody>
-          <a:bodyPr rtlCol="0" anchor="ctr" wrap="square" lIns="182880"/>
+          <a:bodyPr wrap="square" lIns="182880" rtlCol="0" anchor="ctr"/>
           <a:lstStyle/>
           <a:p>
             <a:pPr algn="l"/>
@@ -13895,7 +13791,7 @@
           </a:fontRef>
         </p:style>
         <p:txBody>
-          <a:bodyPr rtlCol="0" anchor="ctr" wrap="square" lIns="164592" rIns="164592" tIns="73152" bIns="73152"/>
+          <a:bodyPr wrap="square" lIns="164592" tIns="73152" rIns="164592" bIns="73152" rtlCol="0" anchor="ctr"/>
           <a:lstStyle/>
           <a:p>
             <a:pPr algn="l"/>
@@ -13929,7 +13825,7 @@
 </file>
 
 <file path=ppt/slides/slide17.xml><?xml version="1.0" encoding="utf-8"?>
-<p:sld xmlns:a="http://schemas.openxmlformats.org/drawingml/2006/main" xmlns:p="http://schemas.openxmlformats.org/presentationml/2006/main" xmlns:r="http://schemas.openxmlformats.org/officeDocument/2006/relationships">
+<p:sld xmlns:a="http://schemas.openxmlformats.org/drawingml/2006/main" xmlns:r="http://schemas.openxmlformats.org/officeDocument/2006/relationships" xmlns:p="http://schemas.openxmlformats.org/presentationml/2006/main">
   <p:cSld>
     <p:spTree>
       <p:nvGrpSpPr>
@@ -13937,7 +13833,14 @@
         <p:cNvGrpSpPr/>
         <p:nvPr/>
       </p:nvGrpSpPr>
-      <p:grpSpPr/>
+      <p:grpSpPr>
+        <a:xfrm>
+          <a:off x="0" y="0"/>
+          <a:ext cx="0" cy="0"/>
+          <a:chOff x="0" y="0"/>
+          <a:chExt cx="0" cy="0"/>
+        </a:xfrm>
+      </p:grpSpPr>
       <p:sp>
         <p:nvSpPr>
           <p:cNvPr id="2" name="TextBox 1"/>
@@ -14075,6 +13978,7 @@
           <a:lstStyle/>
           <a:p>
             <a:pPr algn="ctr"/>
+            <a:endParaRPr/>
           </a:p>
         </p:txBody>
       </p:sp>
@@ -14215,7 +14119,7 @@
           </a:fontRef>
         </p:style>
         <p:txBody>
-          <a:bodyPr rtlCol="0" anchor="ctr" wrap="square" lIns="73152" rIns="73152"/>
+          <a:bodyPr wrap="square" lIns="73152" rIns="73152" rtlCol="0" anchor="ctr"/>
           <a:lstStyle/>
           <a:p>
             <a:pPr algn="ctr">
@@ -14333,7 +14237,7 @@
           </a:fontRef>
         </p:style>
         <p:txBody>
-          <a:bodyPr rtlCol="0" anchor="ctr" wrap="square" lIns="73152" rIns="73152"/>
+          <a:bodyPr wrap="square" lIns="73152" rIns="73152" rtlCol="0" anchor="ctr"/>
           <a:lstStyle/>
           <a:p>
             <a:pPr algn="ctr">
@@ -14451,7 +14355,7 @@
           </a:fontRef>
         </p:style>
         <p:txBody>
-          <a:bodyPr rtlCol="0" anchor="ctr" wrap="square" lIns="73152" rIns="73152"/>
+          <a:bodyPr wrap="square" lIns="73152" rIns="73152" rtlCol="0" anchor="ctr"/>
           <a:lstStyle/>
           <a:p>
             <a:pPr algn="ctr">
@@ -14569,7 +14473,7 @@
           </a:fontRef>
         </p:style>
         <p:txBody>
-          <a:bodyPr rtlCol="0" anchor="ctr" wrap="square" lIns="73152" rIns="73152"/>
+          <a:bodyPr wrap="square" lIns="73152" rIns="73152" rtlCol="0" anchor="ctr"/>
           <a:lstStyle/>
           <a:p>
             <a:pPr algn="ctr">
@@ -14687,7 +14591,7 @@
           </a:fontRef>
         </p:style>
         <p:txBody>
-          <a:bodyPr rtlCol="0" anchor="ctr" wrap="square" lIns="73152" rIns="73152"/>
+          <a:bodyPr wrap="square" lIns="73152" rIns="73152" rtlCol="0" anchor="ctr"/>
           <a:lstStyle/>
           <a:p>
             <a:pPr algn="ctr">
@@ -14725,7 +14629,7 @@
 </file>
 
 <file path=ppt/slides/slide18.xml><?xml version="1.0" encoding="utf-8"?>
-<p:sld xmlns:a="http://schemas.openxmlformats.org/drawingml/2006/main" xmlns:p="http://schemas.openxmlformats.org/presentationml/2006/main" xmlns:r="http://schemas.openxmlformats.org/officeDocument/2006/relationships">
+<p:sld xmlns:a="http://schemas.openxmlformats.org/drawingml/2006/main" xmlns:r="http://schemas.openxmlformats.org/officeDocument/2006/relationships" xmlns:p="http://schemas.openxmlformats.org/presentationml/2006/main">
   <p:cSld>
     <p:spTree>
       <p:nvGrpSpPr>
@@ -14733,7 +14637,14 @@
         <p:cNvGrpSpPr/>
         <p:nvPr/>
       </p:nvGrpSpPr>
-      <p:grpSpPr/>
+      <p:grpSpPr>
+        <a:xfrm>
+          <a:off x="0" y="0"/>
+          <a:ext cx="0" cy="0"/>
+          <a:chOff x="0" y="0"/>
+          <a:chExt cx="0" cy="0"/>
+        </a:xfrm>
+      </p:grpSpPr>
       <p:sp>
         <p:nvSpPr>
           <p:cNvPr id="2" name="Title 1"/>
@@ -14821,6 +14732,7 @@
           <a:lstStyle/>
           <a:p>
             <a:pPr algn="ctr"/>
+            <a:endParaRPr/>
           </a:p>
         </p:txBody>
       </p:sp>
@@ -15029,6 +14941,12 @@
                 <a:latin typeface="Calibri"/>
               </a:defRPr>
             </a:pPr>
+            <a:endParaRPr sz="2200" b="0">
+              <a:solidFill>
+                <a:srgbClr val="222222"/>
+              </a:solidFill>
+              <a:latin typeface="Calibri"/>
+            </a:endParaRPr>
           </a:p>
           <a:p>
             <a:pPr algn="l">
@@ -15120,6 +15038,12 @@
                 <a:latin typeface="Calibri"/>
               </a:defRPr>
             </a:pPr>
+            <a:endParaRPr sz="2200" b="0">
+              <a:solidFill>
+                <a:srgbClr val="222222"/>
+              </a:solidFill>
+              <a:latin typeface="Calibri"/>
+            </a:endParaRPr>
           </a:p>
           <a:p>
             <a:pPr algn="l">
@@ -15157,7 +15081,7 @@
 </file>
 
 <file path=ppt/slides/slide19.xml><?xml version="1.0" encoding="utf-8"?>
-<p:sld xmlns:a="http://schemas.openxmlformats.org/drawingml/2006/main" xmlns:p="http://schemas.openxmlformats.org/presentationml/2006/main" xmlns:r="http://schemas.openxmlformats.org/officeDocument/2006/relationships">
+<p:sld xmlns:a="http://schemas.openxmlformats.org/drawingml/2006/main" xmlns:r="http://schemas.openxmlformats.org/officeDocument/2006/relationships" xmlns:p="http://schemas.openxmlformats.org/presentationml/2006/main">
   <p:cSld>
     <p:spTree>
       <p:nvGrpSpPr>
@@ -15165,7 +15089,14 @@
         <p:cNvGrpSpPr/>
         <p:nvPr/>
       </p:nvGrpSpPr>
-      <p:grpSpPr/>
+      <p:grpSpPr>
+        <a:xfrm>
+          <a:off x="0" y="0"/>
+          <a:ext cx="0" cy="0"/>
+          <a:chOff x="0" y="0"/>
+          <a:chExt cx="0" cy="0"/>
+        </a:xfrm>
+      </p:grpSpPr>
       <p:sp>
         <p:nvSpPr>
           <p:cNvPr id="2" name="Title 1"/>
@@ -15253,6 +15184,7 @@
           <a:lstStyle/>
           <a:p>
             <a:pPr algn="ctr"/>
+            <a:endParaRPr/>
           </a:p>
         </p:txBody>
       </p:sp>
@@ -15439,7 +15371,7 @@
           </a:fontRef>
         </p:style>
         <p:txBody>
-          <a:bodyPr rtlCol="0" anchor="ctr" wrap="square"/>
+          <a:bodyPr wrap="square" rtlCol="0" anchor="ctr"/>
           <a:lstStyle/>
           <a:p>
             <a:pPr algn="l">
@@ -15456,6 +15388,7 @@
                 <a:latin typeface="Calibri"/>
               </a:defRPr>
             </a:pPr>
+            <a:endParaRPr/>
           </a:p>
         </p:txBody>
       </p:sp>
@@ -15677,7 +15610,7 @@
           </a:fontRef>
         </p:style>
         <p:txBody>
-          <a:bodyPr rtlCol="0" anchor="ctr" wrap="square" lIns="45720" rIns="45720" tIns="18288" bIns="18288"/>
+          <a:bodyPr wrap="square" lIns="45720" tIns="18288" rIns="45720" bIns="18288" rtlCol="0" anchor="ctr"/>
           <a:lstStyle/>
           <a:p>
             <a:pPr algn="ctr">
@@ -15891,7 +15824,7 @@
           </a:fontRef>
         </p:style>
         <p:txBody>
-          <a:bodyPr rtlCol="0" anchor="ctr" wrap="square"/>
+          <a:bodyPr wrap="square" rtlCol="0" anchor="ctr"/>
           <a:lstStyle/>
           <a:p>
             <a:pPr algn="l">
@@ -15908,6 +15841,7 @@
                 <a:latin typeface="Calibri"/>
               </a:defRPr>
             </a:pPr>
+            <a:endParaRPr/>
           </a:p>
         </p:txBody>
       </p:sp>
@@ -16129,7 +16063,7 @@
           </a:fontRef>
         </p:style>
         <p:txBody>
-          <a:bodyPr rtlCol="0" anchor="ctr" wrap="square" lIns="45720" rIns="45720" tIns="18288" bIns="18288"/>
+          <a:bodyPr wrap="square" lIns="45720" tIns="18288" rIns="45720" bIns="18288" rtlCol="0" anchor="ctr"/>
           <a:lstStyle/>
           <a:p>
             <a:pPr algn="ctr">
@@ -16295,7 +16229,7 @@
           </a:fontRef>
         </p:style>
         <p:txBody>
-          <a:bodyPr rtlCol="0" anchor="ctr" wrap="square" lIns="45720" rIns="45720" tIns="18288" bIns="18288"/>
+          <a:bodyPr wrap="square" lIns="45720" tIns="18288" rIns="45720" bIns="18288" rtlCol="0" anchor="ctr"/>
           <a:lstStyle/>
           <a:p>
             <a:pPr algn="ctr">
@@ -16362,6 +16296,12 @@
                 <a:latin typeface="Calibri"/>
               </a:defRPr>
             </a:pPr>
+            <a:endParaRPr sz="1800" b="0">
+              <a:solidFill>
+                <a:srgbClr val="222222"/>
+              </a:solidFill>
+              <a:latin typeface="Calibri"/>
+            </a:endParaRPr>
           </a:p>
           <a:p>
             <a:pPr algn="ctr">
@@ -16428,6 +16368,12 @@
                 <a:latin typeface="Calibri"/>
               </a:defRPr>
             </a:pPr>
+            <a:endParaRPr sz="1800" b="0">
+              <a:solidFill>
+                <a:srgbClr val="222222"/>
+              </a:solidFill>
+              <a:latin typeface="Calibri"/>
+            </a:endParaRPr>
           </a:p>
           <a:p>
             <a:pPr algn="ctr">
@@ -16519,6 +16465,12 @@
                 <a:latin typeface="Calibri"/>
               </a:defRPr>
             </a:pPr>
+            <a:endParaRPr sz="1800" b="0">
+              <a:solidFill>
+                <a:srgbClr val="222222"/>
+              </a:solidFill>
+              <a:latin typeface="Calibri"/>
+            </a:endParaRPr>
           </a:p>
           <a:p>
             <a:pPr algn="ctr">
@@ -16638,7 +16590,7 @@
           </a:fontRef>
         </p:style>
         <p:txBody>
-          <a:bodyPr rtlCol="0" anchor="ctr" wrap="square" lIns="164592" rIns="164592" tIns="73152" bIns="73152"/>
+          <a:bodyPr wrap="square" lIns="164592" tIns="73152" rIns="164592" bIns="73152" rtlCol="0" anchor="ctr"/>
           <a:lstStyle/>
           <a:p>
             <a:pPr algn="l"/>
@@ -16672,7 +16624,7 @@
 </file>
 
 <file path=ppt/slides/slide2.xml><?xml version="1.0" encoding="utf-8"?>
-<p:sld xmlns:a="http://schemas.openxmlformats.org/drawingml/2006/main" xmlns:p="http://schemas.openxmlformats.org/presentationml/2006/main" xmlns:r="http://schemas.openxmlformats.org/officeDocument/2006/relationships">
+<p:sld xmlns:a="http://schemas.openxmlformats.org/drawingml/2006/main" xmlns:r="http://schemas.openxmlformats.org/officeDocument/2006/relationships" xmlns:p="http://schemas.openxmlformats.org/presentationml/2006/main">
   <p:cSld>
     <p:spTree>
       <p:nvGrpSpPr>
@@ -16680,7 +16632,14 @@
         <p:cNvGrpSpPr/>
         <p:nvPr/>
       </p:nvGrpSpPr>
-      <p:grpSpPr/>
+      <p:grpSpPr>
+        <a:xfrm>
+          <a:off x="0" y="0"/>
+          <a:ext cx="0" cy="0"/>
+          <a:chOff x="0" y="0"/>
+          <a:chExt cx="0" cy="0"/>
+        </a:xfrm>
+      </p:grpSpPr>
       <p:sp>
         <p:nvSpPr>
           <p:cNvPr id="2" name="Title 1"/>
@@ -16768,6 +16727,7 @@
           <a:lstStyle/>
           <a:p>
             <a:pPr algn="ctr"/>
+            <a:endParaRPr/>
           </a:p>
         </p:txBody>
       </p:sp>
@@ -17122,7 +17082,7 @@
 </file>
 
 <file path=ppt/slides/slide20.xml><?xml version="1.0" encoding="utf-8"?>
-<p:sld xmlns:a="http://schemas.openxmlformats.org/drawingml/2006/main" xmlns:p="http://schemas.openxmlformats.org/presentationml/2006/main" xmlns:r="http://schemas.openxmlformats.org/officeDocument/2006/relationships">
+<p:sld xmlns:a="http://schemas.openxmlformats.org/drawingml/2006/main" xmlns:r="http://schemas.openxmlformats.org/officeDocument/2006/relationships" xmlns:p="http://schemas.openxmlformats.org/presentationml/2006/main">
   <p:cSld>
     <p:spTree>
       <p:nvGrpSpPr>
@@ -17130,7 +17090,14 @@
         <p:cNvGrpSpPr/>
         <p:nvPr/>
       </p:nvGrpSpPr>
-      <p:grpSpPr/>
+      <p:grpSpPr>
+        <a:xfrm>
+          <a:off x="0" y="0"/>
+          <a:ext cx="0" cy="0"/>
+          <a:chOff x="0" y="0"/>
+          <a:chExt cx="0" cy="0"/>
+        </a:xfrm>
+      </p:grpSpPr>
       <p:sp>
         <p:nvSpPr>
           <p:cNvPr id="2" name="Title 1"/>
@@ -17218,6 +17185,7 @@
           <a:lstStyle/>
           <a:p>
             <a:pPr algn="ctr"/>
+            <a:endParaRPr/>
           </a:p>
         </p:txBody>
       </p:sp>
@@ -17426,6 +17394,12 @@
                 <a:latin typeface="Calibri"/>
               </a:defRPr>
             </a:pPr>
+            <a:endParaRPr sz="2300" b="0">
+              <a:solidFill>
+                <a:srgbClr val="222222"/>
+              </a:solidFill>
+              <a:latin typeface="Calibri"/>
+            </a:endParaRPr>
           </a:p>
           <a:p>
             <a:pPr algn="l">
@@ -17540,6 +17514,12 @@
                 <a:latin typeface="Calibri"/>
               </a:defRPr>
             </a:pPr>
+            <a:endParaRPr sz="2200" b="0">
+              <a:solidFill>
+                <a:srgbClr val="222222"/>
+              </a:solidFill>
+              <a:latin typeface="Calibri"/>
+            </a:endParaRPr>
           </a:p>
           <a:p>
             <a:pPr algn="l">
@@ -17606,6 +17586,12 @@
                 <a:latin typeface="Calibri"/>
               </a:defRPr>
             </a:pPr>
+            <a:endParaRPr sz="2200" b="0">
+              <a:solidFill>
+                <a:srgbClr val="222222"/>
+              </a:solidFill>
+              <a:latin typeface="Calibri"/>
+            </a:endParaRPr>
           </a:p>
           <a:p>
             <a:pPr algn="l">
@@ -17675,7 +17661,7 @@
           </a:fontRef>
         </p:style>
         <p:txBody>
-          <a:bodyPr rtlCol="0" anchor="ctr" wrap="square" lIns="164592" rIns="164592" tIns="73152" bIns="73152"/>
+          <a:bodyPr wrap="square" lIns="164592" tIns="73152" rIns="164592" bIns="73152" rtlCol="0" anchor="ctr"/>
           <a:lstStyle/>
           <a:p>
             <a:pPr algn="l"/>
@@ -17709,7 +17695,7 @@
 </file>
 
 <file path=ppt/slides/slide21.xml><?xml version="1.0" encoding="utf-8"?>
-<p:sld xmlns:a="http://schemas.openxmlformats.org/drawingml/2006/main" xmlns:p="http://schemas.openxmlformats.org/presentationml/2006/main" xmlns:r="http://schemas.openxmlformats.org/officeDocument/2006/relationships">
+<p:sld xmlns:a="http://schemas.openxmlformats.org/drawingml/2006/main" xmlns:r="http://schemas.openxmlformats.org/officeDocument/2006/relationships" xmlns:p="http://schemas.openxmlformats.org/presentationml/2006/main">
   <p:cSld>
     <p:spTree>
       <p:nvGrpSpPr>
@@ -17717,7 +17703,14 @@
         <p:cNvGrpSpPr/>
         <p:nvPr/>
       </p:nvGrpSpPr>
-      <p:grpSpPr/>
+      <p:grpSpPr>
+        <a:xfrm>
+          <a:off x="0" y="0"/>
+          <a:ext cx="0" cy="0"/>
+          <a:chOff x="0" y="0"/>
+          <a:chExt cx="0" cy="0"/>
+        </a:xfrm>
+      </p:grpSpPr>
       <p:sp>
         <p:nvSpPr>
           <p:cNvPr id="2" name="Title 1"/>
@@ -17805,6 +17798,7 @@
           <a:lstStyle/>
           <a:p>
             <a:pPr algn="ctr"/>
+            <a:endParaRPr/>
           </a:p>
         </p:txBody>
       </p:sp>
@@ -18181,7 +18175,7 @@
           </a:fontRef>
         </p:style>
         <p:txBody>
-          <a:bodyPr rtlCol="0" anchor="ctr" wrap="square" lIns="45720" rIns="45720" tIns="18288" bIns="18288"/>
+          <a:bodyPr wrap="square" lIns="45720" tIns="18288" rIns="45720" bIns="18288" rtlCol="0" anchor="ctr"/>
           <a:lstStyle/>
           <a:p>
             <a:pPr algn="ctr">
@@ -18251,7 +18245,7 @@
           </a:fontRef>
         </p:style>
         <p:txBody>
-          <a:bodyPr rtlCol="0" anchor="ctr" wrap="square" lIns="45720" rIns="45720" tIns="18288" bIns="18288"/>
+          <a:bodyPr wrap="square" lIns="45720" tIns="18288" rIns="45720" bIns="18288" rtlCol="0" anchor="ctr"/>
           <a:lstStyle/>
           <a:p>
             <a:pPr algn="ctr">
@@ -18319,7 +18313,7 @@
           </a:fontRef>
         </p:style>
         <p:txBody>
-          <a:bodyPr rtlCol="0" anchor="ctr" wrap="square" lIns="45720" rIns="45720" tIns="18288" bIns="18288"/>
+          <a:bodyPr wrap="square" lIns="45720" tIns="18288" rIns="45720" bIns="18288" rtlCol="0" anchor="ctr"/>
           <a:lstStyle/>
           <a:p>
             <a:pPr algn="ctr">
@@ -18361,6 +18355,12 @@
                 <a:latin typeface="Calibri"/>
               </a:defRPr>
             </a:pPr>
+            <a:endParaRPr sz="1800" b="0">
+              <a:solidFill>
+                <a:srgbClr val="222222"/>
+              </a:solidFill>
+              <a:latin typeface="Calibri"/>
+            </a:endParaRPr>
           </a:p>
           <a:p>
             <a:pPr algn="ctr">
@@ -18751,7 +18751,7 @@
           </a:fontRef>
         </p:style>
         <p:txBody>
-          <a:bodyPr rtlCol="0" anchor="ctr" wrap="square" lIns="45720" rIns="45720" tIns="18288" bIns="18288"/>
+          <a:bodyPr wrap="square" lIns="45720" tIns="18288" rIns="45720" bIns="18288" rtlCol="0" anchor="ctr"/>
           <a:lstStyle/>
           <a:p>
             <a:pPr algn="ctr">
@@ -18821,7 +18821,7 @@
           </a:fontRef>
         </p:style>
         <p:txBody>
-          <a:bodyPr rtlCol="0" anchor="ctr" wrap="square" lIns="45720" rIns="45720" tIns="18288" bIns="18288"/>
+          <a:bodyPr wrap="square" lIns="45720" tIns="18288" rIns="45720" bIns="18288" rtlCol="0" anchor="ctr"/>
           <a:lstStyle/>
           <a:p>
             <a:pPr algn="ctr">
@@ -18889,7 +18889,7 @@
           </a:fontRef>
         </p:style>
         <p:txBody>
-          <a:bodyPr rtlCol="0" anchor="ctr" wrap="square" lIns="45720" rIns="45720" tIns="18288" bIns="18288"/>
+          <a:bodyPr wrap="square" lIns="45720" tIns="18288" rIns="45720" bIns="18288" rtlCol="0" anchor="ctr"/>
           <a:lstStyle/>
           <a:p>
             <a:pPr algn="ctr">
@@ -18931,6 +18931,12 @@
                 <a:latin typeface="Calibri"/>
               </a:defRPr>
             </a:pPr>
+            <a:endParaRPr sz="1800" b="0">
+              <a:solidFill>
+                <a:srgbClr val="222222"/>
+              </a:solidFill>
+              <a:latin typeface="Calibri"/>
+            </a:endParaRPr>
           </a:p>
           <a:p>
             <a:pPr algn="ctr">
@@ -19050,7 +19056,7 @@
           </a:fontRef>
         </p:style>
         <p:txBody>
-          <a:bodyPr rtlCol="0" anchor="ctr" wrap="square" lIns="164592" rIns="164592" tIns="73152" bIns="73152"/>
+          <a:bodyPr wrap="square" lIns="164592" tIns="73152" rIns="164592" bIns="73152" rtlCol="0" anchor="ctr"/>
           <a:lstStyle/>
           <a:p>
             <a:pPr algn="l"/>
@@ -19084,7 +19090,7 @@
 </file>
 
 <file path=ppt/slides/slide22.xml><?xml version="1.0" encoding="utf-8"?>
-<p:sld xmlns:a="http://schemas.openxmlformats.org/drawingml/2006/main" xmlns:p="http://schemas.openxmlformats.org/presentationml/2006/main" xmlns:r="http://schemas.openxmlformats.org/officeDocument/2006/relationships">
+<p:sld xmlns:a="http://schemas.openxmlformats.org/drawingml/2006/main" xmlns:r="http://schemas.openxmlformats.org/officeDocument/2006/relationships" xmlns:p="http://schemas.openxmlformats.org/presentationml/2006/main">
   <p:cSld>
     <p:spTree>
       <p:nvGrpSpPr>
@@ -19092,7 +19098,14 @@
         <p:cNvGrpSpPr/>
         <p:nvPr/>
       </p:nvGrpSpPr>
-      <p:grpSpPr/>
+      <p:grpSpPr>
+        <a:xfrm>
+          <a:off x="0" y="0"/>
+          <a:ext cx="0" cy="0"/>
+          <a:chOff x="0" y="0"/>
+          <a:chExt cx="0" cy="0"/>
+        </a:xfrm>
+      </p:grpSpPr>
       <p:sp>
         <p:nvSpPr>
           <p:cNvPr id="2" name="Title 1"/>
@@ -19180,6 +19193,7 @@
           <a:lstStyle/>
           <a:p>
             <a:pPr algn="ctr"/>
+            <a:endParaRPr/>
           </a:p>
         </p:txBody>
       </p:sp>
@@ -19541,7 +19555,7 @@
           </a:fontRef>
         </p:style>
         <p:txBody>
-          <a:bodyPr rtlCol="0" anchor="ctr" wrap="square" lIns="164592" rIns="164592" tIns="73152" bIns="73152"/>
+          <a:bodyPr wrap="square" lIns="164592" tIns="73152" rIns="164592" bIns="73152" rtlCol="0" anchor="ctr"/>
           <a:lstStyle/>
           <a:p>
             <a:pPr algn="l"/>
@@ -19575,7 +19589,7 @@
 </file>
 
 <file path=ppt/slides/slide23.xml><?xml version="1.0" encoding="utf-8"?>
-<p:sld xmlns:a="http://schemas.openxmlformats.org/drawingml/2006/main" xmlns:p="http://schemas.openxmlformats.org/presentationml/2006/main" xmlns:r="http://schemas.openxmlformats.org/officeDocument/2006/relationships">
+<p:sld xmlns:a="http://schemas.openxmlformats.org/drawingml/2006/main" xmlns:r="http://schemas.openxmlformats.org/officeDocument/2006/relationships" xmlns:p="http://schemas.openxmlformats.org/presentationml/2006/main">
   <p:cSld>
     <p:spTree>
       <p:nvGrpSpPr>
@@ -19583,7 +19597,14 @@
         <p:cNvGrpSpPr/>
         <p:nvPr/>
       </p:nvGrpSpPr>
-      <p:grpSpPr/>
+      <p:grpSpPr>
+        <a:xfrm>
+          <a:off x="0" y="0"/>
+          <a:ext cx="0" cy="0"/>
+          <a:chOff x="0" y="0"/>
+          <a:chExt cx="0" cy="0"/>
+        </a:xfrm>
+      </p:grpSpPr>
       <p:sp>
         <p:nvSpPr>
           <p:cNvPr id="2" name="TextBox 1"/>
@@ -19721,6 +19742,7 @@
           <a:lstStyle/>
           <a:p>
             <a:pPr algn="ctr"/>
+            <a:endParaRPr/>
           </a:p>
         </p:txBody>
       </p:sp>
@@ -19861,7 +19883,7 @@
           </a:fontRef>
         </p:style>
         <p:txBody>
-          <a:bodyPr rtlCol="0" anchor="ctr" wrap="square" lIns="73152" rIns="73152"/>
+          <a:bodyPr wrap="square" lIns="73152" rIns="73152" rtlCol="0" anchor="ctr"/>
           <a:lstStyle/>
           <a:p>
             <a:pPr algn="ctr">
@@ -19979,7 +20001,7 @@
           </a:fontRef>
         </p:style>
         <p:txBody>
-          <a:bodyPr rtlCol="0" anchor="ctr" wrap="square" lIns="73152" rIns="73152"/>
+          <a:bodyPr wrap="square" lIns="73152" rIns="73152" rtlCol="0" anchor="ctr"/>
           <a:lstStyle/>
           <a:p>
             <a:pPr algn="ctr">
@@ -20097,7 +20119,7 @@
           </a:fontRef>
         </p:style>
         <p:txBody>
-          <a:bodyPr rtlCol="0" anchor="ctr" wrap="square" lIns="73152" rIns="73152"/>
+          <a:bodyPr wrap="square" lIns="73152" rIns="73152" rtlCol="0" anchor="ctr"/>
           <a:lstStyle/>
           <a:p>
             <a:pPr algn="ctr">
@@ -20215,7 +20237,7 @@
           </a:fontRef>
         </p:style>
         <p:txBody>
-          <a:bodyPr rtlCol="0" anchor="ctr" wrap="square" lIns="73152" rIns="73152"/>
+          <a:bodyPr wrap="square" lIns="73152" rIns="73152" rtlCol="0" anchor="ctr"/>
           <a:lstStyle/>
           <a:p>
             <a:pPr algn="ctr">
@@ -20333,7 +20355,7 @@
           </a:fontRef>
         </p:style>
         <p:txBody>
-          <a:bodyPr rtlCol="0" anchor="ctr" wrap="square" lIns="73152" rIns="73152"/>
+          <a:bodyPr wrap="square" lIns="73152" rIns="73152" rtlCol="0" anchor="ctr"/>
           <a:lstStyle/>
           <a:p>
             <a:pPr algn="ctr">
@@ -20419,7 +20441,7 @@
 </file>
 
 <file path=ppt/slides/slide24.xml><?xml version="1.0" encoding="utf-8"?>
-<p:sld xmlns:a="http://schemas.openxmlformats.org/drawingml/2006/main" xmlns:p="http://schemas.openxmlformats.org/presentationml/2006/main" xmlns:r="http://schemas.openxmlformats.org/officeDocument/2006/relationships">
+<p:sld xmlns:a="http://schemas.openxmlformats.org/drawingml/2006/main" xmlns:r="http://schemas.openxmlformats.org/officeDocument/2006/relationships" xmlns:p="http://schemas.openxmlformats.org/presentationml/2006/main">
   <p:cSld>
     <p:spTree>
       <p:nvGrpSpPr>
@@ -20427,7 +20449,14 @@
         <p:cNvGrpSpPr/>
         <p:nvPr/>
       </p:nvGrpSpPr>
-      <p:grpSpPr/>
+      <p:grpSpPr>
+        <a:xfrm>
+          <a:off x="0" y="0"/>
+          <a:ext cx="0" cy="0"/>
+          <a:chOff x="0" y="0"/>
+          <a:chExt cx="0" cy="0"/>
+        </a:xfrm>
+      </p:grpSpPr>
       <p:sp>
         <p:nvSpPr>
           <p:cNvPr id="2" name="Title 1"/>
@@ -20515,6 +20544,7 @@
           <a:lstStyle/>
           <a:p>
             <a:pPr algn="ctr"/>
+            <a:endParaRPr/>
           </a:p>
         </p:txBody>
       </p:sp>
@@ -20823,6 +20853,12 @@
                 <a:latin typeface="Calibri"/>
               </a:defRPr>
             </a:pPr>
+            <a:endParaRPr sz="2000" b="0">
+              <a:solidFill>
+                <a:srgbClr val="222222"/>
+              </a:solidFill>
+              <a:latin typeface="Calibri"/>
+            </a:endParaRPr>
           </a:p>
           <a:p>
             <a:pPr algn="l">
@@ -20864,6 +20900,12 @@
                 <a:latin typeface="Calibri"/>
               </a:defRPr>
             </a:pPr>
+            <a:endParaRPr sz="2000" b="0">
+              <a:solidFill>
+                <a:srgbClr val="222222"/>
+              </a:solidFill>
+              <a:latin typeface="Calibri"/>
+            </a:endParaRPr>
           </a:p>
           <a:p>
             <a:pPr algn="l">
@@ -20901,7 +20943,7 @@
 </file>
 
 <file path=ppt/slides/slide25.xml><?xml version="1.0" encoding="utf-8"?>
-<p:sld xmlns:a="http://schemas.openxmlformats.org/drawingml/2006/main" xmlns:p="http://schemas.openxmlformats.org/presentationml/2006/main" xmlns:r="http://schemas.openxmlformats.org/officeDocument/2006/relationships">
+<p:sld xmlns:a="http://schemas.openxmlformats.org/drawingml/2006/main" xmlns:r="http://schemas.openxmlformats.org/officeDocument/2006/relationships" xmlns:p="http://schemas.openxmlformats.org/presentationml/2006/main">
   <p:cSld>
     <p:spTree>
       <p:nvGrpSpPr>
@@ -20909,7 +20951,14 @@
         <p:cNvGrpSpPr/>
         <p:nvPr/>
       </p:nvGrpSpPr>
-      <p:grpSpPr/>
+      <p:grpSpPr>
+        <a:xfrm>
+          <a:off x="0" y="0"/>
+          <a:ext cx="0" cy="0"/>
+          <a:chOff x="0" y="0"/>
+          <a:chExt cx="0" cy="0"/>
+        </a:xfrm>
+      </p:grpSpPr>
       <p:sp>
         <p:nvSpPr>
           <p:cNvPr id="2" name="Title 1"/>
@@ -20997,6 +21046,7 @@
           <a:lstStyle/>
           <a:p>
             <a:pPr algn="ctr"/>
+            <a:endParaRPr/>
           </a:p>
         </p:txBody>
       </p:sp>
@@ -21185,7 +21235,7 @@
           </a:fontRef>
         </p:style>
         <p:txBody>
-          <a:bodyPr rtlCol="0" anchor="ctr" wrap="square" lIns="45720" rIns="45720" tIns="18288" bIns="18288"/>
+          <a:bodyPr wrap="square" lIns="45720" tIns="18288" rIns="45720" bIns="18288" rtlCol="0" anchor="ctr"/>
           <a:lstStyle/>
           <a:p>
             <a:pPr algn="ctr">
@@ -21253,7 +21303,7 @@
           </a:fontRef>
         </p:style>
         <p:txBody>
-          <a:bodyPr rtlCol="0" anchor="ctr" wrap="square" lIns="45720" rIns="45720" tIns="18288" bIns="18288"/>
+          <a:bodyPr wrap="square" lIns="45720" tIns="18288" rIns="45720" bIns="18288" rtlCol="0" anchor="ctr"/>
           <a:lstStyle/>
           <a:p>
             <a:pPr algn="ctr">
@@ -21383,7 +21433,7 @@
           </a:fontRef>
         </p:style>
         <p:txBody>
-          <a:bodyPr rtlCol="0" anchor="ctr" wrap="square" lIns="45720" rIns="45720" tIns="18288" bIns="18288"/>
+          <a:bodyPr wrap="square" lIns="45720" tIns="18288" rIns="45720" bIns="18288" rtlCol="0" anchor="ctr"/>
           <a:lstStyle/>
           <a:p>
             <a:pPr algn="ctr">
@@ -21526,7 +21576,7 @@
           </a:fontRef>
         </p:style>
         <p:txBody>
-          <a:bodyPr rtlCol="0" anchor="ctr" wrap="square" lIns="45720" rIns="45720" tIns="18288" bIns="18288"/>
+          <a:bodyPr wrap="square" lIns="45720" tIns="18288" rIns="45720" bIns="18288" rtlCol="0" anchor="ctr"/>
           <a:lstStyle/>
           <a:p>
             <a:pPr algn="ctr">
@@ -21594,7 +21644,7 @@
           </a:fontRef>
         </p:style>
         <p:txBody>
-          <a:bodyPr rtlCol="0" anchor="ctr" wrap="square" lIns="45720" rIns="45720" tIns="18288" bIns="18288"/>
+          <a:bodyPr wrap="square" lIns="45720" tIns="18288" rIns="45720" bIns="18288" rtlCol="0" anchor="ctr"/>
           <a:lstStyle/>
           <a:p>
             <a:pPr algn="ctr">
@@ -21724,7 +21774,7 @@
           </a:fontRef>
         </p:style>
         <p:txBody>
-          <a:bodyPr rtlCol="0" anchor="ctr" wrap="square" lIns="45720" rIns="45720" tIns="18288" bIns="18288"/>
+          <a:bodyPr wrap="square" lIns="45720" tIns="18288" rIns="45720" bIns="18288" rtlCol="0" anchor="ctr"/>
           <a:lstStyle/>
           <a:p>
             <a:pPr algn="ctr">
@@ -21892,7 +21942,7 @@
           </a:fontRef>
         </p:style>
         <p:txBody>
-          <a:bodyPr rtlCol="0" anchor="ctr" wrap="square" lIns="45720" rIns="45720" tIns="18288" bIns="18288"/>
+          <a:bodyPr wrap="square" lIns="45720" tIns="18288" rIns="45720" bIns="18288" rtlCol="0" anchor="ctr"/>
           <a:lstStyle/>
           <a:p>
             <a:pPr algn="ctr">
@@ -21960,7 +22010,7 @@
           </a:fontRef>
         </p:style>
         <p:txBody>
-          <a:bodyPr rtlCol="0" anchor="ctr" wrap="square" lIns="45720" rIns="45720" tIns="18288" bIns="18288"/>
+          <a:bodyPr wrap="square" lIns="45720" tIns="18288" rIns="45720" bIns="18288" rtlCol="0" anchor="ctr"/>
           <a:lstStyle/>
           <a:p>
             <a:pPr algn="ctr">
@@ -22090,7 +22140,7 @@
           </a:fontRef>
         </p:style>
         <p:txBody>
-          <a:bodyPr rtlCol="0" anchor="ctr" wrap="square" lIns="45720" rIns="45720" tIns="18288" bIns="18288"/>
+          <a:bodyPr wrap="square" lIns="45720" tIns="18288" rIns="45720" bIns="18288" rtlCol="0" anchor="ctr"/>
           <a:lstStyle/>
           <a:p>
             <a:pPr algn="ctr">
@@ -22233,7 +22283,7 @@
           </a:fontRef>
         </p:style>
         <p:txBody>
-          <a:bodyPr rtlCol="0" anchor="ctr" wrap="square" lIns="45720" rIns="45720" tIns="18288" bIns="18288"/>
+          <a:bodyPr wrap="square" lIns="45720" tIns="18288" rIns="45720" bIns="18288" rtlCol="0" anchor="ctr"/>
           <a:lstStyle/>
           <a:p>
             <a:pPr algn="ctr">
@@ -22301,7 +22351,7 @@
           </a:fontRef>
         </p:style>
         <p:txBody>
-          <a:bodyPr rtlCol="0" anchor="ctr" wrap="square" lIns="45720" rIns="45720" tIns="18288" bIns="18288"/>
+          <a:bodyPr wrap="square" lIns="45720" tIns="18288" rIns="45720" bIns="18288" rtlCol="0" anchor="ctr"/>
           <a:lstStyle/>
           <a:p>
             <a:pPr algn="ctr">
@@ -22431,7 +22481,7 @@
           </a:fontRef>
         </p:style>
         <p:txBody>
-          <a:bodyPr rtlCol="0" anchor="ctr" wrap="square" lIns="45720" rIns="45720" tIns="18288" bIns="18288"/>
+          <a:bodyPr wrap="square" lIns="45720" tIns="18288" rIns="45720" bIns="18288" rtlCol="0" anchor="ctr"/>
           <a:lstStyle/>
           <a:p>
             <a:pPr algn="ctr">
@@ -22574,7 +22624,7 @@
           </a:fontRef>
         </p:style>
         <p:txBody>
-          <a:bodyPr rtlCol="0" anchor="ctr" wrap="square" lIns="164592" rIns="164592" tIns="73152" bIns="73152"/>
+          <a:bodyPr wrap="square" lIns="164592" tIns="73152" rIns="164592" bIns="73152" rtlCol="0" anchor="ctr"/>
           <a:lstStyle/>
           <a:p>
             <a:pPr algn="l"/>
@@ -22608,7 +22658,7 @@
 </file>
 
 <file path=ppt/slides/slide26.xml><?xml version="1.0" encoding="utf-8"?>
-<p:sld xmlns:a="http://schemas.openxmlformats.org/drawingml/2006/main" xmlns:p="http://schemas.openxmlformats.org/presentationml/2006/main" xmlns:r="http://schemas.openxmlformats.org/officeDocument/2006/relationships">
+<p:sld xmlns:a="http://schemas.openxmlformats.org/drawingml/2006/main" xmlns:r="http://schemas.openxmlformats.org/officeDocument/2006/relationships" xmlns:p="http://schemas.openxmlformats.org/presentationml/2006/main">
   <p:cSld>
     <p:spTree>
       <p:nvGrpSpPr>
@@ -22616,7 +22666,14 @@
         <p:cNvGrpSpPr/>
         <p:nvPr/>
       </p:nvGrpSpPr>
-      <p:grpSpPr/>
+      <p:grpSpPr>
+        <a:xfrm>
+          <a:off x="0" y="0"/>
+          <a:ext cx="0" cy="0"/>
+          <a:chOff x="0" y="0"/>
+          <a:chExt cx="0" cy="0"/>
+        </a:xfrm>
+      </p:grpSpPr>
       <p:sp>
         <p:nvSpPr>
           <p:cNvPr id="2" name="Title 1"/>
@@ -22704,6 +22761,7 @@
           <a:lstStyle/>
           <a:p>
             <a:pPr algn="ctr"/>
+            <a:endParaRPr/>
           </a:p>
         </p:txBody>
       </p:sp>
@@ -22914,6 +22972,12 @@
                 <a:latin typeface="Calibri"/>
               </a:defRPr>
             </a:pPr>
+            <a:endParaRPr sz="2100" b="0">
+              <a:solidFill>
+                <a:srgbClr val="222222"/>
+              </a:solidFill>
+              <a:latin typeface="Calibri"/>
+            </a:endParaRPr>
           </a:p>
           <a:p>
             <a:pPr algn="l">
@@ -23005,6 +23069,12 @@
                 <a:latin typeface="Calibri"/>
               </a:defRPr>
             </a:pPr>
+            <a:endParaRPr sz="2100" b="0">
+              <a:solidFill>
+                <a:srgbClr val="222222"/>
+              </a:solidFill>
+              <a:latin typeface="Calibri"/>
+            </a:endParaRPr>
           </a:p>
           <a:p>
             <a:pPr algn="l">
@@ -23074,7 +23144,7 @@
           </a:fontRef>
         </p:style>
         <p:txBody>
-          <a:bodyPr rtlCol="0" anchor="ctr" wrap="square" lIns="164592" rIns="164592" tIns="73152" bIns="73152"/>
+          <a:bodyPr wrap="square" lIns="164592" tIns="73152" rIns="164592" bIns="73152" rtlCol="0" anchor="ctr"/>
           <a:lstStyle/>
           <a:p>
             <a:pPr algn="l"/>
@@ -23108,7 +23178,7 @@
 </file>
 
 <file path=ppt/slides/slide27.xml><?xml version="1.0" encoding="utf-8"?>
-<p:sld xmlns:a="http://schemas.openxmlformats.org/drawingml/2006/main" xmlns:p="http://schemas.openxmlformats.org/presentationml/2006/main" xmlns:r="http://schemas.openxmlformats.org/officeDocument/2006/relationships">
+<p:sld xmlns:a="http://schemas.openxmlformats.org/drawingml/2006/main" xmlns:r="http://schemas.openxmlformats.org/officeDocument/2006/relationships" xmlns:p="http://schemas.openxmlformats.org/presentationml/2006/main">
   <p:cSld>
     <p:spTree>
       <p:nvGrpSpPr>
@@ -23116,7 +23186,14 @@
         <p:cNvGrpSpPr/>
         <p:nvPr/>
       </p:nvGrpSpPr>
-      <p:grpSpPr/>
+      <p:grpSpPr>
+        <a:xfrm>
+          <a:off x="0" y="0"/>
+          <a:ext cx="0" cy="0"/>
+          <a:chOff x="0" y="0"/>
+          <a:chExt cx="0" cy="0"/>
+        </a:xfrm>
+      </p:grpSpPr>
       <p:sp>
         <p:nvSpPr>
           <p:cNvPr id="2" name="Title 1"/>
@@ -23204,6 +23281,7 @@
           <a:lstStyle/>
           <a:p>
             <a:pPr algn="ctr"/>
+            <a:endParaRPr/>
           </a:p>
         </p:txBody>
       </p:sp>
@@ -23680,7 +23758,7 @@
           </a:fontRef>
         </p:style>
         <p:txBody>
-          <a:bodyPr rtlCol="0" anchor="ctr" wrap="square"/>
+          <a:bodyPr wrap="square" rtlCol="0" anchor="ctr"/>
           <a:lstStyle/>
           <a:p>
             <a:pPr algn="l">
@@ -23697,6 +23775,7 @@
                 <a:latin typeface="Calibri"/>
               </a:defRPr>
             </a:pPr>
+            <a:endParaRPr/>
           </a:p>
         </p:txBody>
       </p:sp>
@@ -23737,7 +23816,7 @@
           </a:fontRef>
         </p:style>
         <p:txBody>
-          <a:bodyPr rtlCol="0" anchor="ctr" wrap="square"/>
+          <a:bodyPr wrap="square" rtlCol="0" anchor="ctr"/>
           <a:lstStyle/>
           <a:p>
             <a:pPr algn="l">
@@ -23754,6 +23833,7 @@
                 <a:latin typeface="Calibri"/>
               </a:defRPr>
             </a:pPr>
+            <a:endParaRPr/>
           </a:p>
         </p:txBody>
       </p:sp>
@@ -23794,7 +23874,7 @@
           </a:fontRef>
         </p:style>
         <p:txBody>
-          <a:bodyPr rtlCol="0" anchor="ctr" wrap="square"/>
+          <a:bodyPr wrap="square" rtlCol="0" anchor="ctr"/>
           <a:lstStyle/>
           <a:p>
             <a:pPr algn="l">
@@ -23811,6 +23891,7 @@
                 <a:latin typeface="Calibri"/>
               </a:defRPr>
             </a:pPr>
+            <a:endParaRPr/>
           </a:p>
         </p:txBody>
       </p:sp>
@@ -23851,7 +23932,7 @@
           </a:fontRef>
         </p:style>
         <p:txBody>
-          <a:bodyPr rtlCol="0" anchor="ctr" wrap="square"/>
+          <a:bodyPr wrap="square" rtlCol="0" anchor="ctr"/>
           <a:lstStyle/>
           <a:p>
             <a:pPr algn="l">
@@ -23868,6 +23949,7 @@
                 <a:latin typeface="Calibri"/>
               </a:defRPr>
             </a:pPr>
+            <a:endParaRPr/>
           </a:p>
         </p:txBody>
       </p:sp>
@@ -24102,7 +24184,7 @@
           </a:fontRef>
         </p:style>
         <p:txBody>
-          <a:bodyPr rtlCol="0" anchor="ctr" wrap="square" lIns="45720" rIns="45720" tIns="18288" bIns="18288"/>
+          <a:bodyPr wrap="square" lIns="45720" tIns="18288" rIns="45720" bIns="18288" rtlCol="0" anchor="ctr"/>
           <a:lstStyle/>
           <a:p>
             <a:pPr algn="l">
@@ -24292,6 +24374,12 @@
                 <a:latin typeface="Calibri"/>
               </a:defRPr>
             </a:pPr>
+            <a:endParaRPr sz="1800" b="0">
+              <a:solidFill>
+                <a:srgbClr val="222222"/>
+              </a:solidFill>
+              <a:latin typeface="Calibri"/>
+            </a:endParaRPr>
           </a:p>
           <a:p>
             <a:pPr algn="l">
@@ -24386,7 +24474,7 @@
           </a:fontRef>
         </p:style>
         <p:txBody>
-          <a:bodyPr rtlCol="0" anchor="ctr" wrap="square" lIns="164592" rIns="164592" tIns="73152" bIns="73152"/>
+          <a:bodyPr wrap="square" lIns="164592" tIns="73152" rIns="164592" bIns="73152" rtlCol="0" anchor="ctr"/>
           <a:lstStyle/>
           <a:p>
             <a:pPr algn="l"/>
@@ -24420,7 +24508,7 @@
 </file>
 
 <file path=ppt/slides/slide28.xml><?xml version="1.0" encoding="utf-8"?>
-<p:sld xmlns:a="http://schemas.openxmlformats.org/drawingml/2006/main" xmlns:p="http://schemas.openxmlformats.org/presentationml/2006/main" xmlns:r="http://schemas.openxmlformats.org/officeDocument/2006/relationships">
+<p:sld xmlns:a="http://schemas.openxmlformats.org/drawingml/2006/main" xmlns:r="http://schemas.openxmlformats.org/officeDocument/2006/relationships" xmlns:p="http://schemas.openxmlformats.org/presentationml/2006/main">
   <p:cSld>
     <p:spTree>
       <p:nvGrpSpPr>
@@ -24428,7 +24516,14 @@
         <p:cNvGrpSpPr/>
         <p:nvPr/>
       </p:nvGrpSpPr>
-      <p:grpSpPr/>
+      <p:grpSpPr>
+        <a:xfrm>
+          <a:off x="0" y="0"/>
+          <a:ext cx="0" cy="0"/>
+          <a:chOff x="0" y="0"/>
+          <a:chExt cx="0" cy="0"/>
+        </a:xfrm>
+      </p:grpSpPr>
       <p:sp>
         <p:nvSpPr>
           <p:cNvPr id="2" name="Title 1"/>
@@ -24516,6 +24611,7 @@
           <a:lstStyle/>
           <a:p>
             <a:pPr algn="ctr"/>
+            <a:endParaRPr/>
           </a:p>
         </p:txBody>
       </p:sp>
@@ -24704,7 +24800,7 @@
           </a:fontRef>
         </p:style>
         <p:txBody>
-          <a:bodyPr rtlCol="0" anchor="ctr" wrap="square" lIns="45720" rIns="45720" tIns="18288" bIns="18288"/>
+          <a:bodyPr wrap="square" lIns="45720" tIns="18288" rIns="45720" bIns="18288" rtlCol="0" anchor="ctr"/>
           <a:lstStyle/>
           <a:p>
             <a:pPr algn="l">
@@ -25252,7 +25348,7 @@
           </a:fontRef>
         </p:style>
         <p:txBody>
-          <a:bodyPr rtlCol="0" anchor="ctr" wrap="square" lIns="45720" rIns="45720" tIns="18288" bIns="18288"/>
+          <a:bodyPr wrap="square" lIns="45720" tIns="18288" rIns="45720" bIns="18288" rtlCol="0" anchor="ctr"/>
           <a:lstStyle/>
           <a:p>
             <a:pPr algn="ctr">
@@ -25320,7 +25416,7 @@
           </a:fontRef>
         </p:style>
         <p:txBody>
-          <a:bodyPr rtlCol="0" anchor="ctr" wrap="square" lIns="45720" rIns="45720" tIns="18288" bIns="18288"/>
+          <a:bodyPr wrap="square" lIns="45720" tIns="18288" rIns="45720" bIns="18288" rtlCol="0" anchor="ctr"/>
           <a:lstStyle/>
           <a:p>
             <a:pPr algn="ctr">
@@ -25388,7 +25484,7 @@
           </a:fontRef>
         </p:style>
         <p:txBody>
-          <a:bodyPr rtlCol="0" anchor="ctr" wrap="square" lIns="45720" rIns="45720" tIns="18288" bIns="18288"/>
+          <a:bodyPr wrap="square" lIns="45720" tIns="18288" rIns="45720" bIns="18288" rtlCol="0" anchor="ctr"/>
           <a:lstStyle/>
           <a:p>
             <a:pPr algn="ctr">
@@ -25456,7 +25552,7 @@
           </a:fontRef>
         </p:style>
         <p:txBody>
-          <a:bodyPr rtlCol="0" anchor="ctr" wrap="square" lIns="45720" rIns="45720" tIns="18288" bIns="18288"/>
+          <a:bodyPr wrap="square" lIns="45720" tIns="18288" rIns="45720" bIns="18288" rtlCol="0" anchor="ctr"/>
           <a:lstStyle/>
           <a:p>
             <a:pPr algn="ctr">
@@ -25524,7 +25620,7 @@
           </a:fontRef>
         </p:style>
         <p:txBody>
-          <a:bodyPr rtlCol="0" anchor="ctr" wrap="square" lIns="45720" rIns="45720" tIns="18288" bIns="18288"/>
+          <a:bodyPr wrap="square" lIns="45720" tIns="18288" rIns="45720" bIns="18288" rtlCol="0" anchor="ctr"/>
           <a:lstStyle/>
           <a:p>
             <a:pPr algn="ctr">
@@ -25592,7 +25688,7 @@
           </a:fontRef>
         </p:style>
         <p:txBody>
-          <a:bodyPr rtlCol="0" anchor="ctr" wrap="square" lIns="45720" rIns="45720" tIns="18288" bIns="18288"/>
+          <a:bodyPr wrap="square" lIns="45720" tIns="18288" rIns="45720" bIns="18288" rtlCol="0" anchor="ctr"/>
           <a:lstStyle/>
           <a:p>
             <a:pPr algn="ctr">
@@ -25660,7 +25756,7 @@
           </a:fontRef>
         </p:style>
         <p:txBody>
-          <a:bodyPr rtlCol="0" anchor="ctr" wrap="square" lIns="45720" rIns="45720" tIns="18288" bIns="18288"/>
+          <a:bodyPr wrap="square" lIns="45720" tIns="18288" rIns="45720" bIns="18288" rtlCol="0" anchor="ctr"/>
           <a:lstStyle/>
           <a:p>
             <a:pPr algn="ctr">
@@ -25728,7 +25824,7 @@
           </a:fontRef>
         </p:style>
         <p:txBody>
-          <a:bodyPr rtlCol="0" anchor="ctr" wrap="square" lIns="45720" rIns="45720" tIns="18288" bIns="18288"/>
+          <a:bodyPr wrap="square" lIns="45720" tIns="18288" rIns="45720" bIns="18288" rtlCol="0" anchor="ctr"/>
           <a:lstStyle/>
           <a:p>
             <a:pPr algn="ctr">
@@ -25796,7 +25892,7 @@
           </a:fontRef>
         </p:style>
         <p:txBody>
-          <a:bodyPr rtlCol="0" anchor="ctr" wrap="square" lIns="45720" rIns="45720" tIns="18288" bIns="18288"/>
+          <a:bodyPr wrap="square" lIns="45720" tIns="18288" rIns="45720" bIns="18288" rtlCol="0" anchor="ctr"/>
           <a:lstStyle/>
           <a:p>
             <a:pPr algn="ctr">
@@ -25864,7 +25960,7 @@
           </a:fontRef>
         </p:style>
         <p:txBody>
-          <a:bodyPr rtlCol="0" anchor="ctr" wrap="square" lIns="45720" rIns="45720" tIns="18288" bIns="18288"/>
+          <a:bodyPr wrap="square" lIns="45720" tIns="18288" rIns="45720" bIns="18288" rtlCol="0" anchor="ctr"/>
           <a:lstStyle/>
           <a:p>
             <a:pPr algn="ctr">
@@ -25932,7 +26028,7 @@
           </a:fontRef>
         </p:style>
         <p:txBody>
-          <a:bodyPr rtlCol="0" anchor="ctr" wrap="square" lIns="45720" rIns="45720" tIns="18288" bIns="18288"/>
+          <a:bodyPr wrap="square" lIns="45720" tIns="18288" rIns="45720" bIns="18288" rtlCol="0" anchor="ctr"/>
           <a:lstStyle/>
           <a:p>
             <a:pPr algn="ctr">
@@ -26000,7 +26096,7 @@
           </a:fontRef>
         </p:style>
         <p:txBody>
-          <a:bodyPr rtlCol="0" anchor="ctr" wrap="square" lIns="45720" rIns="45720" tIns="18288" bIns="18288"/>
+          <a:bodyPr wrap="square" lIns="45720" tIns="18288" rIns="45720" bIns="18288" rtlCol="0" anchor="ctr"/>
           <a:lstStyle/>
           <a:p>
             <a:pPr algn="ctr">
@@ -26068,7 +26164,7 @@
           </a:fontRef>
         </p:style>
         <p:txBody>
-          <a:bodyPr rtlCol="0" anchor="ctr" wrap="square" lIns="45720" rIns="45720" tIns="18288" bIns="18288"/>
+          <a:bodyPr wrap="square" lIns="45720" tIns="18288" rIns="45720" bIns="18288" rtlCol="0" anchor="ctr"/>
           <a:lstStyle/>
           <a:p>
             <a:pPr algn="ctr">
@@ -26136,7 +26232,7 @@
           </a:fontRef>
         </p:style>
         <p:txBody>
-          <a:bodyPr rtlCol="0" anchor="ctr" wrap="square" lIns="45720" rIns="45720" tIns="18288" bIns="18288"/>
+          <a:bodyPr wrap="square" lIns="45720" tIns="18288" rIns="45720" bIns="18288" rtlCol="0" anchor="ctr"/>
           <a:lstStyle/>
           <a:p>
             <a:pPr algn="ctr">
@@ -26204,7 +26300,7 @@
           </a:fontRef>
         </p:style>
         <p:txBody>
-          <a:bodyPr rtlCol="0" anchor="ctr" wrap="square" lIns="45720" rIns="45720" tIns="18288" bIns="18288"/>
+          <a:bodyPr wrap="square" lIns="45720" tIns="18288" rIns="45720" bIns="18288" rtlCol="0" anchor="ctr"/>
           <a:lstStyle/>
           <a:p>
             <a:pPr algn="ctr">
@@ -26272,7 +26368,7 @@
           </a:fontRef>
         </p:style>
         <p:txBody>
-          <a:bodyPr rtlCol="0" anchor="ctr" wrap="square" lIns="45720" rIns="45720" tIns="18288" bIns="18288"/>
+          <a:bodyPr wrap="square" lIns="45720" tIns="18288" rIns="45720" bIns="18288" rtlCol="0" anchor="ctr"/>
           <a:lstStyle/>
           <a:p>
             <a:pPr algn="ctr">
@@ -26340,7 +26436,7 @@
           </a:fontRef>
         </p:style>
         <p:txBody>
-          <a:bodyPr rtlCol="0" anchor="ctr" wrap="square" lIns="45720" rIns="45720" tIns="18288" bIns="18288"/>
+          <a:bodyPr wrap="square" lIns="45720" tIns="18288" rIns="45720" bIns="18288" rtlCol="0" anchor="ctr"/>
           <a:lstStyle/>
           <a:p>
             <a:pPr algn="ctr">
@@ -26408,7 +26504,7 @@
           </a:fontRef>
         </p:style>
         <p:txBody>
-          <a:bodyPr rtlCol="0" anchor="ctr" wrap="square" lIns="45720" rIns="45720" tIns="18288" bIns="18288"/>
+          <a:bodyPr wrap="square" lIns="45720" tIns="18288" rIns="45720" bIns="18288" rtlCol="0" anchor="ctr"/>
           <a:lstStyle/>
           <a:p>
             <a:pPr algn="ctr">
@@ -26476,7 +26572,7 @@
           </a:fontRef>
         </p:style>
         <p:txBody>
-          <a:bodyPr rtlCol="0" anchor="ctr" wrap="square" lIns="45720" rIns="45720" tIns="18288" bIns="18288"/>
+          <a:bodyPr wrap="square" lIns="45720" tIns="18288" rIns="45720" bIns="18288" rtlCol="0" anchor="ctr"/>
           <a:lstStyle/>
           <a:p>
             <a:pPr algn="ctr">
@@ -26544,7 +26640,7 @@
           </a:fontRef>
         </p:style>
         <p:txBody>
-          <a:bodyPr rtlCol="0" anchor="ctr" wrap="square" lIns="45720" rIns="45720" tIns="18288" bIns="18288"/>
+          <a:bodyPr wrap="square" lIns="45720" tIns="18288" rIns="45720" bIns="18288" rtlCol="0" anchor="ctr"/>
           <a:lstStyle/>
           <a:p>
             <a:pPr algn="ctr">
@@ -26612,7 +26708,7 @@
           </a:fontRef>
         </p:style>
         <p:txBody>
-          <a:bodyPr rtlCol="0" anchor="ctr" wrap="square" lIns="45720" rIns="45720" tIns="18288" bIns="18288"/>
+          <a:bodyPr wrap="square" lIns="45720" tIns="18288" rIns="45720" bIns="18288" rtlCol="0" anchor="ctr"/>
           <a:lstStyle/>
           <a:p>
             <a:pPr algn="ctr">
@@ -26680,7 +26776,7 @@
           </a:fontRef>
         </p:style>
         <p:txBody>
-          <a:bodyPr rtlCol="0" anchor="ctr" wrap="square" lIns="45720" rIns="45720" tIns="18288" bIns="18288"/>
+          <a:bodyPr wrap="square" lIns="45720" tIns="18288" rIns="45720" bIns="18288" rtlCol="0" anchor="ctr"/>
           <a:lstStyle/>
           <a:p>
             <a:pPr algn="ctr">
@@ -26748,7 +26844,7 @@
           </a:fontRef>
         </p:style>
         <p:txBody>
-          <a:bodyPr rtlCol="0" anchor="ctr" wrap="square" lIns="45720" rIns="45720" tIns="18288" bIns="18288"/>
+          <a:bodyPr wrap="square" lIns="45720" tIns="18288" rIns="45720" bIns="18288" rtlCol="0" anchor="ctr"/>
           <a:lstStyle/>
           <a:p>
             <a:pPr algn="ctr">
@@ -26816,7 +26912,7 @@
           </a:fontRef>
         </p:style>
         <p:txBody>
-          <a:bodyPr rtlCol="0" anchor="ctr" wrap="square" lIns="45720" rIns="45720" tIns="18288" bIns="18288"/>
+          <a:bodyPr wrap="square" lIns="45720" tIns="18288" rIns="45720" bIns="18288" rtlCol="0" anchor="ctr"/>
           <a:lstStyle/>
           <a:p>
             <a:pPr algn="ctr">
@@ -26884,7 +26980,7 @@
           </a:fontRef>
         </p:style>
         <p:txBody>
-          <a:bodyPr rtlCol="0" anchor="ctr" wrap="square" lIns="45720" rIns="45720" tIns="18288" bIns="18288"/>
+          <a:bodyPr wrap="square" lIns="45720" tIns="18288" rIns="45720" bIns="18288" rtlCol="0" anchor="ctr"/>
           <a:lstStyle/>
           <a:p>
             <a:pPr algn="ctr">
@@ -26952,7 +27048,7 @@
           </a:fontRef>
         </p:style>
         <p:txBody>
-          <a:bodyPr rtlCol="0" anchor="ctr" wrap="square" lIns="45720" rIns="45720" tIns="18288" bIns="18288"/>
+          <a:bodyPr wrap="square" lIns="45720" tIns="18288" rIns="45720" bIns="18288" rtlCol="0" anchor="ctr"/>
           <a:lstStyle/>
           <a:p>
             <a:pPr algn="ctr">
@@ -26969,6 +27065,7 @@
                 <a:latin typeface="Calibri"/>
               </a:defRPr>
             </a:pPr>
+            <a:endParaRPr/>
           </a:p>
         </p:txBody>
       </p:sp>
@@ -27011,7 +27108,7 @@
           </a:fontRef>
         </p:style>
         <p:txBody>
-          <a:bodyPr rtlCol="0" anchor="ctr" wrap="square" lIns="45720" rIns="45720" tIns="18288" bIns="18288"/>
+          <a:bodyPr wrap="square" lIns="45720" tIns="18288" rIns="45720" bIns="18288" rtlCol="0" anchor="ctr"/>
           <a:lstStyle/>
           <a:p>
             <a:pPr algn="ctr">
@@ -27028,6 +27125,7 @@
                 <a:latin typeface="Calibri"/>
               </a:defRPr>
             </a:pPr>
+            <a:endParaRPr/>
           </a:p>
         </p:txBody>
       </p:sp>
@@ -27070,7 +27168,7 @@
           </a:fontRef>
         </p:style>
         <p:txBody>
-          <a:bodyPr rtlCol="0" anchor="ctr" wrap="square" lIns="45720" rIns="45720" tIns="18288" bIns="18288"/>
+          <a:bodyPr wrap="square" lIns="45720" tIns="18288" rIns="45720" bIns="18288" rtlCol="0" anchor="ctr"/>
           <a:lstStyle/>
           <a:p>
             <a:pPr algn="ctr">
@@ -27138,7 +27236,7 @@
           </a:fontRef>
         </p:style>
         <p:txBody>
-          <a:bodyPr rtlCol="0" anchor="ctr" wrap="square" lIns="45720" rIns="45720" tIns="18288" bIns="18288"/>
+          <a:bodyPr wrap="square" lIns="45720" tIns="18288" rIns="45720" bIns="18288" rtlCol="0" anchor="ctr"/>
           <a:lstStyle/>
           <a:p>
             <a:pPr algn="ctr">
@@ -27206,7 +27304,7 @@
           </a:fontRef>
         </p:style>
         <p:txBody>
-          <a:bodyPr rtlCol="0" anchor="ctr" wrap="square" lIns="45720" rIns="45720" tIns="18288" bIns="18288"/>
+          <a:bodyPr wrap="square" lIns="45720" tIns="18288" rIns="45720" bIns="18288" rtlCol="0" anchor="ctr"/>
           <a:lstStyle/>
           <a:p>
             <a:pPr algn="ctr">
@@ -27243,8 +27341,8 @@
         </p:nvSpPr>
         <p:spPr>
           <a:xfrm>
-            <a:off x="6537960" y="4407408"/>
-            <a:ext cx="5120640" cy="646684"/>
+            <a:off x="6355080" y="4356977"/>
+            <a:ext cx="5669279" cy="553998"/>
           </a:xfrm>
           <a:prstGeom prst="rect">
             <a:avLst/>
@@ -27272,14 +27370,51 @@
               </a:defRPr>
             </a:pPr>
             <a:r>
-              <a:rPr sz="1800" b="0">
+              <a:rPr sz="1800" b="0" dirty="0">
                 <a:solidFill>
                   <a:srgbClr val="666666"/>
                 </a:solidFill>
                 <a:latin typeface="Calibri"/>
               </a:rPr>
-              <a:t>At 3.34 ft/s a 10 s leg is 33.4 ft, and sin(45) = cos(45) = 0.707.</a:t>
-            </a:r>
+              <a:t>At 3.34 ft/s a 10 s leg is 33.4 ft, and sin(45) = cos(45) = 0.707</a:t>
+            </a:r>
+            <a:endParaRPr lang="en-US" sz="1800" b="0" dirty="0">
+              <a:solidFill>
+                <a:srgbClr val="666666"/>
+              </a:solidFill>
+              <a:latin typeface="Calibri"/>
+            </a:endParaRPr>
+          </a:p>
+          <a:p>
+            <a:pPr algn="l">
+              <a:lnSpc>
+                <a:spcPct val="100000"/>
+              </a:lnSpc>
+              <a:spcAft>
+                <a:spcPts val="0"/>
+              </a:spcAft>
+              <a:defRPr sz="1800" b="0">
+                <a:solidFill>
+                  <a:srgbClr val="666666"/>
+                </a:solidFill>
+                <a:latin typeface="Calibri"/>
+              </a:defRPr>
+            </a:pPr>
+            <a:r>
+              <a:rPr lang="en-US" dirty="0">
+                <a:solidFill>
+                  <a:srgbClr val="666666"/>
+                </a:solidFill>
+                <a:latin typeface="Calibri"/>
+              </a:rPr>
+              <a:t>In Excel, =SIN(RADIANS(45) =SIN(45*(3.14/180)) = 0.707</a:t>
+            </a:r>
+            <a:endParaRPr b="0" dirty="0">
+              <a:solidFill>
+                <a:srgbClr val="666666"/>
+              </a:solidFill>
+              <a:latin typeface="Calibri"/>
+            </a:endParaRPr>
           </a:p>
         </p:txBody>
       </p:sp>
@@ -27324,7 +27459,7 @@
           </a:fontRef>
         </p:style>
         <p:txBody>
-          <a:bodyPr rtlCol="0" anchor="ctr" wrap="square" lIns="164592" rIns="164592" tIns="73152" bIns="73152"/>
+          <a:bodyPr wrap="square" lIns="164592" tIns="73152" rIns="164592" bIns="73152" rtlCol="0" anchor="ctr"/>
           <a:lstStyle/>
           <a:p>
             <a:pPr algn="l"/>
@@ -27358,7 +27493,7 @@
 </file>
 
 <file path=ppt/slides/slide29.xml><?xml version="1.0" encoding="utf-8"?>
-<p:sld xmlns:a="http://schemas.openxmlformats.org/drawingml/2006/main" xmlns:p="http://schemas.openxmlformats.org/presentationml/2006/main" xmlns:r="http://schemas.openxmlformats.org/officeDocument/2006/relationships">
+<p:sld xmlns:a="http://schemas.openxmlformats.org/drawingml/2006/main" xmlns:r="http://schemas.openxmlformats.org/officeDocument/2006/relationships" xmlns:p="http://schemas.openxmlformats.org/presentationml/2006/main">
   <p:cSld>
     <p:spTree>
       <p:nvGrpSpPr>
@@ -27366,7 +27501,14 @@
         <p:cNvGrpSpPr/>
         <p:nvPr/>
       </p:nvGrpSpPr>
-      <p:grpSpPr/>
+      <p:grpSpPr>
+        <a:xfrm>
+          <a:off x="0" y="0"/>
+          <a:ext cx="0" cy="0"/>
+          <a:chOff x="0" y="0"/>
+          <a:chExt cx="0" cy="0"/>
+        </a:xfrm>
+      </p:grpSpPr>
       <p:sp>
         <p:nvSpPr>
           <p:cNvPr id="2" name="Title 1"/>
@@ -27454,6 +27596,7 @@
           <a:lstStyle/>
           <a:p>
             <a:pPr algn="ctr"/>
+            <a:endParaRPr/>
           </a:p>
         </p:txBody>
       </p:sp>
@@ -27790,7 +27933,7 @@
           </a:fontRef>
         </p:style>
         <p:txBody>
-          <a:bodyPr rtlCol="0" anchor="ctr" wrap="square" lIns="164592" rIns="164592" tIns="73152" bIns="73152"/>
+          <a:bodyPr wrap="square" lIns="164592" tIns="73152" rIns="164592" bIns="73152" rtlCol="0" anchor="ctr"/>
           <a:lstStyle/>
           <a:p>
             <a:pPr algn="l"/>
@@ -27824,7 +27967,7 @@
 </file>
 
 <file path=ppt/slides/slide3.xml><?xml version="1.0" encoding="utf-8"?>
-<p:sld xmlns:a="http://schemas.openxmlformats.org/drawingml/2006/main" xmlns:p="http://schemas.openxmlformats.org/presentationml/2006/main" xmlns:r="http://schemas.openxmlformats.org/officeDocument/2006/relationships">
+<p:sld xmlns:a="http://schemas.openxmlformats.org/drawingml/2006/main" xmlns:r="http://schemas.openxmlformats.org/officeDocument/2006/relationships" xmlns:p="http://schemas.openxmlformats.org/presentationml/2006/main">
   <p:cSld>
     <p:spTree>
       <p:nvGrpSpPr>
@@ -27832,7 +27975,14 @@
         <p:cNvGrpSpPr/>
         <p:nvPr/>
       </p:nvGrpSpPr>
-      <p:grpSpPr/>
+      <p:grpSpPr>
+        <a:xfrm>
+          <a:off x="0" y="0"/>
+          <a:ext cx="0" cy="0"/>
+          <a:chOff x="0" y="0"/>
+          <a:chExt cx="0" cy="0"/>
+        </a:xfrm>
+      </p:grpSpPr>
       <p:sp>
         <p:nvSpPr>
           <p:cNvPr id="2" name="Title 1"/>
@@ -27920,6 +28070,7 @@
           <a:lstStyle/>
           <a:p>
             <a:pPr algn="ctr"/>
+            <a:endParaRPr/>
           </a:p>
         </p:txBody>
       </p:sp>
@@ -28155,6 +28306,12 @@
                 <a:latin typeface="Calibri"/>
               </a:defRPr>
             </a:pPr>
+            <a:endParaRPr sz="2700" b="0">
+              <a:solidFill>
+                <a:srgbClr val="222222"/>
+              </a:solidFill>
+              <a:latin typeface="Calibri"/>
+            </a:endParaRPr>
           </a:p>
           <a:p>
             <a:pPr algn="l">
@@ -28224,7 +28381,7 @@
           </a:fontRef>
         </p:style>
         <p:txBody>
-          <a:bodyPr rtlCol="0" anchor="ctr" wrap="square" lIns="164592" rIns="164592" tIns="73152" bIns="73152"/>
+          <a:bodyPr wrap="square" lIns="164592" tIns="73152" rIns="164592" bIns="73152" rtlCol="0" anchor="ctr"/>
           <a:lstStyle/>
           <a:p>
             <a:pPr algn="l"/>
@@ -28258,7 +28415,7 @@
 </file>
 
 <file path=ppt/slides/slide30.xml><?xml version="1.0" encoding="utf-8"?>
-<p:sld xmlns:a="http://schemas.openxmlformats.org/drawingml/2006/main" xmlns:p="http://schemas.openxmlformats.org/presentationml/2006/main" xmlns:r="http://schemas.openxmlformats.org/officeDocument/2006/relationships">
+<p:sld xmlns:a="http://schemas.openxmlformats.org/drawingml/2006/main" xmlns:r="http://schemas.openxmlformats.org/officeDocument/2006/relationships" xmlns:p="http://schemas.openxmlformats.org/presentationml/2006/main">
   <p:cSld>
     <p:spTree>
       <p:nvGrpSpPr>
@@ -28266,7 +28423,14 @@
         <p:cNvGrpSpPr/>
         <p:nvPr/>
       </p:nvGrpSpPr>
-      <p:grpSpPr/>
+      <p:grpSpPr>
+        <a:xfrm>
+          <a:off x="0" y="0"/>
+          <a:ext cx="0" cy="0"/>
+          <a:chOff x="0" y="0"/>
+          <a:chExt cx="0" cy="0"/>
+        </a:xfrm>
+      </p:grpSpPr>
       <p:sp>
         <p:nvSpPr>
           <p:cNvPr id="2" name="Title 1"/>
@@ -28354,6 +28518,7 @@
           <a:lstStyle/>
           <a:p>
             <a:pPr algn="ctr"/>
+            <a:endParaRPr/>
           </a:p>
         </p:txBody>
       </p:sp>
@@ -28836,7 +29001,7 @@
           </a:fontRef>
         </p:style>
         <p:txBody>
-          <a:bodyPr rtlCol="0" anchor="ctr" wrap="square" lIns="164592" rIns="164592" tIns="73152" bIns="73152"/>
+          <a:bodyPr wrap="square" lIns="164592" tIns="73152" rIns="164592" bIns="73152" rtlCol="0" anchor="ctr"/>
           <a:lstStyle/>
           <a:p>
             <a:pPr algn="l"/>
@@ -28870,7 +29035,7 @@
 </file>
 
 <file path=ppt/slides/slide31.xml><?xml version="1.0" encoding="utf-8"?>
-<p:sld xmlns:a="http://schemas.openxmlformats.org/drawingml/2006/main" xmlns:p="http://schemas.openxmlformats.org/presentationml/2006/main" xmlns:r="http://schemas.openxmlformats.org/officeDocument/2006/relationships">
+<p:sld xmlns:a="http://schemas.openxmlformats.org/drawingml/2006/main" xmlns:r="http://schemas.openxmlformats.org/officeDocument/2006/relationships" xmlns:p="http://schemas.openxmlformats.org/presentationml/2006/main">
   <p:cSld>
     <p:spTree>
       <p:nvGrpSpPr>
@@ -28878,7 +29043,14 @@
         <p:cNvGrpSpPr/>
         <p:nvPr/>
       </p:nvGrpSpPr>
-      <p:grpSpPr/>
+      <p:grpSpPr>
+        <a:xfrm>
+          <a:off x="0" y="0"/>
+          <a:ext cx="0" cy="0"/>
+          <a:chOff x="0" y="0"/>
+          <a:chExt cx="0" cy="0"/>
+        </a:xfrm>
+      </p:grpSpPr>
       <p:sp>
         <p:nvSpPr>
           <p:cNvPr id="2" name="Title 1"/>
@@ -28966,6 +29138,7 @@
           <a:lstStyle/>
           <a:p>
             <a:pPr algn="ctr"/>
+            <a:endParaRPr/>
           </a:p>
         </p:txBody>
       </p:sp>
@@ -29154,7 +29327,7 @@
           </a:fontRef>
         </p:style>
         <p:txBody>
-          <a:bodyPr rtlCol="0" anchor="t" wrap="square" lIns="146304" tIns="91440" bIns="73152"/>
+          <a:bodyPr wrap="square" lIns="146304" tIns="91440" bIns="73152" rtlCol="0" anchor="t"/>
           <a:lstStyle/>
           <a:p>
             <a:pPr algn="l">
@@ -29709,6 +29882,12 @@
                 <a:latin typeface="Calibri"/>
               </a:defRPr>
             </a:pPr>
+            <a:endParaRPr sz="1800" b="0">
+              <a:solidFill>
+                <a:srgbClr val="222222"/>
+              </a:solidFill>
+              <a:latin typeface="Calibri"/>
+            </a:endParaRPr>
           </a:p>
           <a:p>
             <a:pPr algn="l">
@@ -29746,7 +29925,7 @@
 </file>
 
 <file path=ppt/slides/slide32.xml><?xml version="1.0" encoding="utf-8"?>
-<p:sld xmlns:a="http://schemas.openxmlformats.org/drawingml/2006/main" xmlns:p="http://schemas.openxmlformats.org/presentationml/2006/main" xmlns:r="http://schemas.openxmlformats.org/officeDocument/2006/relationships">
+<p:sld xmlns:a="http://schemas.openxmlformats.org/drawingml/2006/main" xmlns:r="http://schemas.openxmlformats.org/officeDocument/2006/relationships" xmlns:p="http://schemas.openxmlformats.org/presentationml/2006/main">
   <p:cSld>
     <p:spTree>
       <p:nvGrpSpPr>
@@ -29754,7 +29933,14 @@
         <p:cNvGrpSpPr/>
         <p:nvPr/>
       </p:nvGrpSpPr>
-      <p:grpSpPr/>
+      <p:grpSpPr>
+        <a:xfrm>
+          <a:off x="0" y="0"/>
+          <a:ext cx="0" cy="0"/>
+          <a:chOff x="0" y="0"/>
+          <a:chExt cx="0" cy="0"/>
+        </a:xfrm>
+      </p:grpSpPr>
       <p:sp>
         <p:nvSpPr>
           <p:cNvPr id="2" name="Title 1"/>
@@ -29842,6 +30028,7 @@
           <a:lstStyle/>
           <a:p>
             <a:pPr algn="ctr"/>
+            <a:endParaRPr/>
           </a:p>
         </p:txBody>
       </p:sp>
@@ -30008,9 +30195,27 @@
                 <a:tableStyleId>{5C22544A-7EE6-4342-B048-85BDC9FD1C3A}</a:tableStyleId>
               </a:tblPr>
               <a:tblGrid>
-                <a:gridCol w="1423654"/>
-                <a:gridCol w="2643929"/>
-                <a:gridCol w="7118271"/>
+                <a:gridCol w="1423654">
+                  <a:extLst>
+                    <a:ext uri="{9D8B030D-6E8A-4147-A177-3AD203B41FA5}">
+                      <a16:colId xmlns:a16="http://schemas.microsoft.com/office/drawing/2014/main" val="20000"/>
+                    </a:ext>
+                  </a:extLst>
+                </a:gridCol>
+                <a:gridCol w="2643929">
+                  <a:extLst>
+                    <a:ext uri="{9D8B030D-6E8A-4147-A177-3AD203B41FA5}">
+                      <a16:colId xmlns:a16="http://schemas.microsoft.com/office/drawing/2014/main" val="20001"/>
+                    </a:ext>
+                  </a:extLst>
+                </a:gridCol>
+                <a:gridCol w="7118271">
+                  <a:extLst>
+                    <a:ext uri="{9D8B030D-6E8A-4147-A177-3AD203B41FA5}">
+                      <a16:colId xmlns:a16="http://schemas.microsoft.com/office/drawing/2014/main" val="20002"/>
+                    </a:ext>
+                  </a:extLst>
+                </a:gridCol>
               </a:tblGrid>
               <a:tr h="838200">
                 <a:tc>
@@ -30079,6 +30284,11 @@
                     </a:solidFill>
                   </a:tcPr>
                 </a:tc>
+                <a:extLst>
+                  <a:ext uri="{0D108BD9-81ED-4DB2-BD59-A6C34878D82A}">
+                    <a16:rowId xmlns:a16="http://schemas.microsoft.com/office/drawing/2014/main" val="10000"/>
+                  </a:ext>
+                </a:extLst>
               </a:tr>
               <a:tr h="838200">
                 <a:tc>
@@ -30147,6 +30357,11 @@
                     </a:solidFill>
                   </a:tcPr>
                 </a:tc>
+                <a:extLst>
+                  <a:ext uri="{0D108BD9-81ED-4DB2-BD59-A6C34878D82A}">
+                    <a16:rowId xmlns:a16="http://schemas.microsoft.com/office/drawing/2014/main" val="10001"/>
+                  </a:ext>
+                </a:extLst>
               </a:tr>
               <a:tr h="838200">
                 <a:tc>
@@ -30215,6 +30430,11 @@
                     </a:solidFill>
                   </a:tcPr>
                 </a:tc>
+                <a:extLst>
+                  <a:ext uri="{0D108BD9-81ED-4DB2-BD59-A6C34878D82A}">
+                    <a16:rowId xmlns:a16="http://schemas.microsoft.com/office/drawing/2014/main" val="10002"/>
+                  </a:ext>
+                </a:extLst>
               </a:tr>
               <a:tr h="838200">
                 <a:tc>
@@ -30283,6 +30503,11 @@
                     </a:solidFill>
                   </a:tcPr>
                 </a:tc>
+                <a:extLst>
+                  <a:ext uri="{0D108BD9-81ED-4DB2-BD59-A6C34878D82A}">
+                    <a16:rowId xmlns:a16="http://schemas.microsoft.com/office/drawing/2014/main" val="10003"/>
+                  </a:ext>
+                </a:extLst>
               </a:tr>
             </a:tbl>
           </a:graphicData>
@@ -30329,7 +30554,7 @@
           </a:fontRef>
         </p:style>
         <p:txBody>
-          <a:bodyPr rtlCol="0" anchor="ctr" wrap="square" lIns="164592" rIns="164592" tIns="73152" bIns="73152"/>
+          <a:bodyPr wrap="square" lIns="164592" tIns="73152" rIns="164592" bIns="73152" rtlCol="0" anchor="ctr"/>
           <a:lstStyle/>
           <a:p>
             <a:pPr algn="l"/>
@@ -30363,7 +30588,7 @@
 </file>
 
 <file path=ppt/slides/slide33.xml><?xml version="1.0" encoding="utf-8"?>
-<p:sld xmlns:a="http://schemas.openxmlformats.org/drawingml/2006/main" xmlns:p="http://schemas.openxmlformats.org/presentationml/2006/main" xmlns:r="http://schemas.openxmlformats.org/officeDocument/2006/relationships">
+<p:sld xmlns:a="http://schemas.openxmlformats.org/drawingml/2006/main" xmlns:r="http://schemas.openxmlformats.org/officeDocument/2006/relationships" xmlns:p="http://schemas.openxmlformats.org/presentationml/2006/main">
   <p:cSld>
     <p:spTree>
       <p:nvGrpSpPr>
@@ -30371,7 +30596,14 @@
         <p:cNvGrpSpPr/>
         <p:nvPr/>
       </p:nvGrpSpPr>
-      <p:grpSpPr/>
+      <p:grpSpPr>
+        <a:xfrm>
+          <a:off x="0" y="0"/>
+          <a:ext cx="0" cy="0"/>
+          <a:chOff x="0" y="0"/>
+          <a:chExt cx="0" cy="0"/>
+        </a:xfrm>
+      </p:grpSpPr>
       <p:sp>
         <p:nvSpPr>
           <p:cNvPr id="2" name="Title 1"/>
@@ -30459,6 +30691,7 @@
           <a:lstStyle/>
           <a:p>
             <a:pPr algn="ctr"/>
+            <a:endParaRPr/>
           </a:p>
         </p:txBody>
       </p:sp>
@@ -30647,7 +30880,7 @@
           </a:fontRef>
         </p:style>
         <p:txBody>
-          <a:bodyPr rtlCol="0" anchor="t" wrap="square" lIns="146304" tIns="91440" bIns="73152"/>
+          <a:bodyPr wrap="square" lIns="146304" tIns="91440" bIns="73152" rtlCol="0" anchor="t"/>
           <a:lstStyle/>
           <a:p>
             <a:pPr algn="l">
@@ -31070,6 +31303,12 @@
                 <a:latin typeface="Calibri"/>
               </a:defRPr>
             </a:pPr>
+            <a:endParaRPr sz="1800" b="0">
+              <a:solidFill>
+                <a:srgbClr val="222222"/>
+              </a:solidFill>
+              <a:latin typeface="Calibri"/>
+            </a:endParaRPr>
           </a:p>
           <a:p>
             <a:pPr algn="l">
@@ -31107,7 +31346,7 @@
 </file>
 
 <file path=ppt/slides/slide34.xml><?xml version="1.0" encoding="utf-8"?>
-<p:sld xmlns:a="http://schemas.openxmlformats.org/drawingml/2006/main" xmlns:p="http://schemas.openxmlformats.org/presentationml/2006/main" xmlns:r="http://schemas.openxmlformats.org/officeDocument/2006/relationships">
+<p:sld xmlns:a="http://schemas.openxmlformats.org/drawingml/2006/main" xmlns:r="http://schemas.openxmlformats.org/officeDocument/2006/relationships" xmlns:p="http://schemas.openxmlformats.org/presentationml/2006/main">
   <p:cSld>
     <p:spTree>
       <p:nvGrpSpPr>
@@ -31115,7 +31354,14 @@
         <p:cNvGrpSpPr/>
         <p:nvPr/>
       </p:nvGrpSpPr>
-      <p:grpSpPr/>
+      <p:grpSpPr>
+        <a:xfrm>
+          <a:off x="0" y="0"/>
+          <a:ext cx="0" cy="0"/>
+          <a:chOff x="0" y="0"/>
+          <a:chExt cx="0" cy="0"/>
+        </a:xfrm>
+      </p:grpSpPr>
       <p:sp>
         <p:nvSpPr>
           <p:cNvPr id="2" name="Title 1"/>
@@ -31203,6 +31449,7 @@
           <a:lstStyle/>
           <a:p>
             <a:pPr algn="ctr"/>
+            <a:endParaRPr/>
           </a:p>
         </p:txBody>
       </p:sp>
@@ -31391,7 +31638,7 @@
           </a:fontRef>
         </p:style>
         <p:txBody>
-          <a:bodyPr rtlCol="0" anchor="t" wrap="square" lIns="146304" tIns="91440" bIns="73152"/>
+          <a:bodyPr wrap="square" lIns="146304" tIns="91440" bIns="73152" rtlCol="0" anchor="t"/>
           <a:lstStyle/>
           <a:p>
             <a:pPr algn="l">
@@ -31813,7 +32060,7 @@
 </file>
 
 <file path=ppt/slides/slide35.xml><?xml version="1.0" encoding="utf-8"?>
-<p:sld xmlns:a="http://schemas.openxmlformats.org/drawingml/2006/main" xmlns:p="http://schemas.openxmlformats.org/presentationml/2006/main" xmlns:r="http://schemas.openxmlformats.org/officeDocument/2006/relationships">
+<p:sld xmlns:a="http://schemas.openxmlformats.org/drawingml/2006/main" xmlns:r="http://schemas.openxmlformats.org/officeDocument/2006/relationships" xmlns:p="http://schemas.openxmlformats.org/presentationml/2006/main">
   <p:cSld>
     <p:spTree>
       <p:nvGrpSpPr>
@@ -31821,7 +32068,14 @@
         <p:cNvGrpSpPr/>
         <p:nvPr/>
       </p:nvGrpSpPr>
-      <p:grpSpPr/>
+      <p:grpSpPr>
+        <a:xfrm>
+          <a:off x="0" y="0"/>
+          <a:ext cx="0" cy="0"/>
+          <a:chOff x="0" y="0"/>
+          <a:chExt cx="0" cy="0"/>
+        </a:xfrm>
+      </p:grpSpPr>
       <p:sp>
         <p:nvSpPr>
           <p:cNvPr id="2" name="Title 1"/>
@@ -31909,6 +32163,7 @@
           <a:lstStyle/>
           <a:p>
             <a:pPr algn="ctr"/>
+            <a:endParaRPr/>
           </a:p>
         </p:txBody>
       </p:sp>
@@ -32047,7 +32302,7 @@
           </a:fontRef>
         </p:style>
         <p:txBody>
-          <a:bodyPr rtlCol="0" anchor="ctr" wrap="square" lIns="182880"/>
+          <a:bodyPr wrap="square" lIns="182880" rtlCol="0" anchor="ctr"/>
           <a:lstStyle/>
           <a:p>
             <a:pPr algn="l"/>
@@ -32562,7 +32817,7 @@
           </a:fontRef>
         </p:style>
         <p:txBody>
-          <a:bodyPr rtlCol="0" anchor="ctr" wrap="square" lIns="164592" rIns="164592" tIns="73152" bIns="73152"/>
+          <a:bodyPr wrap="square" lIns="164592" tIns="73152" rIns="164592" bIns="73152" rtlCol="0" anchor="ctr"/>
           <a:lstStyle/>
           <a:p>
             <a:pPr algn="l"/>
@@ -32596,7 +32851,7 @@
 </file>
 
 <file path=ppt/slides/slide36.xml><?xml version="1.0" encoding="utf-8"?>
-<p:sld xmlns:a="http://schemas.openxmlformats.org/drawingml/2006/main" xmlns:p="http://schemas.openxmlformats.org/presentationml/2006/main" xmlns:r="http://schemas.openxmlformats.org/officeDocument/2006/relationships">
+<p:sld xmlns:a="http://schemas.openxmlformats.org/drawingml/2006/main" xmlns:r="http://schemas.openxmlformats.org/officeDocument/2006/relationships" xmlns:p="http://schemas.openxmlformats.org/presentationml/2006/main">
   <p:cSld>
     <p:spTree>
       <p:nvGrpSpPr>
@@ -32604,7 +32859,14 @@
         <p:cNvGrpSpPr/>
         <p:nvPr/>
       </p:nvGrpSpPr>
-      <p:grpSpPr/>
+      <p:grpSpPr>
+        <a:xfrm>
+          <a:off x="0" y="0"/>
+          <a:ext cx="0" cy="0"/>
+          <a:chOff x="0" y="0"/>
+          <a:chExt cx="0" cy="0"/>
+        </a:xfrm>
+      </p:grpSpPr>
       <p:sp>
         <p:nvSpPr>
           <p:cNvPr id="2" name="Title 1"/>
@@ -32692,6 +32954,7 @@
           <a:lstStyle/>
           <a:p>
             <a:pPr algn="ctr"/>
+            <a:endParaRPr/>
           </a:p>
         </p:txBody>
       </p:sp>
@@ -33030,7 +33293,7 @@
           </a:fontRef>
         </p:style>
         <p:txBody>
-          <a:bodyPr rtlCol="0" anchor="ctr" wrap="square" lIns="164592" rIns="164592" tIns="73152" bIns="73152"/>
+          <a:bodyPr wrap="square" lIns="164592" tIns="73152" rIns="164592" bIns="73152" rtlCol="0" anchor="ctr"/>
           <a:lstStyle/>
           <a:p>
             <a:pPr algn="l"/>
@@ -33064,7 +33327,7 @@
 </file>
 
 <file path=ppt/slides/slide37.xml><?xml version="1.0" encoding="utf-8"?>
-<p:sld xmlns:a="http://schemas.openxmlformats.org/drawingml/2006/main" xmlns:p="http://schemas.openxmlformats.org/presentationml/2006/main" xmlns:r="http://schemas.openxmlformats.org/officeDocument/2006/relationships">
+<p:sld xmlns:a="http://schemas.openxmlformats.org/drawingml/2006/main" xmlns:r="http://schemas.openxmlformats.org/officeDocument/2006/relationships" xmlns:p="http://schemas.openxmlformats.org/presentationml/2006/main">
   <p:cSld>
     <p:spTree>
       <p:nvGrpSpPr>
@@ -33072,7 +33335,14 @@
         <p:cNvGrpSpPr/>
         <p:nvPr/>
       </p:nvGrpSpPr>
-      <p:grpSpPr/>
+      <p:grpSpPr>
+        <a:xfrm>
+          <a:off x="0" y="0"/>
+          <a:ext cx="0" cy="0"/>
+          <a:chOff x="0" y="0"/>
+          <a:chExt cx="0" cy="0"/>
+        </a:xfrm>
+      </p:grpSpPr>
       <p:sp>
         <p:nvSpPr>
           <p:cNvPr id="2" name="Title 1"/>
@@ -33160,6 +33430,7 @@
           <a:lstStyle/>
           <a:p>
             <a:pPr algn="ctr"/>
+            <a:endParaRPr/>
           </a:p>
         </p:txBody>
       </p:sp>
@@ -33443,6 +33714,12 @@
                 <a:latin typeface="Calibri"/>
               </a:defRPr>
             </a:pPr>
+            <a:endParaRPr sz="2100" b="0">
+              <a:solidFill>
+                <a:srgbClr val="222222"/>
+              </a:solidFill>
+              <a:latin typeface="Calibri"/>
+            </a:endParaRPr>
           </a:p>
           <a:p>
             <a:pPr algn="l">
@@ -33530,7 +33807,7 @@
 </file>
 
 <file path=ppt/slides/slide38.xml><?xml version="1.0" encoding="utf-8"?>
-<p:sld xmlns:a="http://schemas.openxmlformats.org/drawingml/2006/main" xmlns:p="http://schemas.openxmlformats.org/presentationml/2006/main" xmlns:r="http://schemas.openxmlformats.org/officeDocument/2006/relationships">
+<p:sld xmlns:a="http://schemas.openxmlformats.org/drawingml/2006/main" xmlns:r="http://schemas.openxmlformats.org/officeDocument/2006/relationships" xmlns:p="http://schemas.openxmlformats.org/presentationml/2006/main">
   <p:cSld>
     <p:spTree>
       <p:nvGrpSpPr>
@@ -33538,7 +33815,14 @@
         <p:cNvGrpSpPr/>
         <p:nvPr/>
       </p:nvGrpSpPr>
-      <p:grpSpPr/>
+      <p:grpSpPr>
+        <a:xfrm>
+          <a:off x="0" y="0"/>
+          <a:ext cx="0" cy="0"/>
+          <a:chOff x="0" y="0"/>
+          <a:chExt cx="0" cy="0"/>
+        </a:xfrm>
+      </p:grpSpPr>
       <p:sp>
         <p:nvSpPr>
           <p:cNvPr id="2" name="Title 1"/>
@@ -33626,6 +33910,7 @@
           <a:lstStyle/>
           <a:p>
             <a:pPr algn="ctr"/>
+            <a:endParaRPr/>
           </a:p>
         </p:txBody>
       </p:sp>
@@ -34283,7 +34568,7 @@
           </a:fontRef>
         </p:style>
         <p:txBody>
-          <a:bodyPr rtlCol="0" anchor="ctr" wrap="square" lIns="164592" rIns="164592" tIns="73152" bIns="73152"/>
+          <a:bodyPr wrap="square" lIns="164592" tIns="73152" rIns="164592" bIns="73152" rtlCol="0" anchor="ctr"/>
           <a:lstStyle/>
           <a:p>
             <a:pPr algn="l"/>
@@ -34317,7 +34602,7 @@
 </file>
 
 <file path=ppt/slides/slide39.xml><?xml version="1.0" encoding="utf-8"?>
-<p:sld xmlns:a="http://schemas.openxmlformats.org/drawingml/2006/main" xmlns:p="http://schemas.openxmlformats.org/presentationml/2006/main" xmlns:r="http://schemas.openxmlformats.org/officeDocument/2006/relationships">
+<p:sld xmlns:a="http://schemas.openxmlformats.org/drawingml/2006/main" xmlns:r="http://schemas.openxmlformats.org/officeDocument/2006/relationships" xmlns:p="http://schemas.openxmlformats.org/presentationml/2006/main">
   <p:cSld>
     <p:spTree>
       <p:nvGrpSpPr>
@@ -34325,7 +34610,14 @@
         <p:cNvGrpSpPr/>
         <p:nvPr/>
       </p:nvGrpSpPr>
-      <p:grpSpPr/>
+      <p:grpSpPr>
+        <a:xfrm>
+          <a:off x="0" y="0"/>
+          <a:ext cx="0" cy="0"/>
+          <a:chOff x="0" y="0"/>
+          <a:chExt cx="0" cy="0"/>
+        </a:xfrm>
+      </p:grpSpPr>
       <p:sp>
         <p:nvSpPr>
           <p:cNvPr id="2" name="Title 1"/>
@@ -34413,6 +34705,7 @@
           <a:lstStyle/>
           <a:p>
             <a:pPr algn="ctr"/>
+            <a:endParaRPr/>
           </a:p>
         </p:txBody>
       </p:sp>
@@ -34792,7 +35085,7 @@
 </file>
 
 <file path=ppt/slides/slide4.xml><?xml version="1.0" encoding="utf-8"?>
-<p:sld xmlns:a="http://schemas.openxmlformats.org/drawingml/2006/main" xmlns:p="http://schemas.openxmlformats.org/presentationml/2006/main" xmlns:r="http://schemas.openxmlformats.org/officeDocument/2006/relationships">
+<p:sld xmlns:a="http://schemas.openxmlformats.org/drawingml/2006/main" xmlns:r="http://schemas.openxmlformats.org/officeDocument/2006/relationships" xmlns:p="http://schemas.openxmlformats.org/presentationml/2006/main">
   <p:cSld>
     <p:spTree>
       <p:nvGrpSpPr>
@@ -34800,7 +35093,14 @@
         <p:cNvGrpSpPr/>
         <p:nvPr/>
       </p:nvGrpSpPr>
-      <p:grpSpPr/>
+      <p:grpSpPr>
+        <a:xfrm>
+          <a:off x="0" y="0"/>
+          <a:ext cx="0" cy="0"/>
+          <a:chOff x="0" y="0"/>
+          <a:chExt cx="0" cy="0"/>
+        </a:xfrm>
+      </p:grpSpPr>
       <p:sp>
         <p:nvSpPr>
           <p:cNvPr id="2" name="Title 1"/>
@@ -34888,6 +35188,7 @@
           <a:lstStyle/>
           <a:p>
             <a:pPr algn="ctr"/>
+            <a:endParaRPr/>
           </a:p>
         </p:txBody>
       </p:sp>
@@ -35006,8 +35307,20 @@
                 <a:tableStyleId>{5C22544A-7EE6-4342-B048-85BDC9FD1C3A}</a:tableStyleId>
               </a:tblPr>
               <a:tblGrid>
-                <a:gridCol w="1118585"/>
-                <a:gridCol w="10067269"/>
+                <a:gridCol w="1118585">
+                  <a:extLst>
+                    <a:ext uri="{9D8B030D-6E8A-4147-A177-3AD203B41FA5}">
+                      <a16:colId xmlns:a16="http://schemas.microsoft.com/office/drawing/2014/main" val="20000"/>
+                    </a:ext>
+                  </a:extLst>
+                </a:gridCol>
+                <a:gridCol w="10067269">
+                  <a:extLst>
+                    <a:ext uri="{9D8B030D-6E8A-4147-A177-3AD203B41FA5}">
+                      <a16:colId xmlns:a16="http://schemas.microsoft.com/office/drawing/2014/main" val="20001"/>
+                    </a:ext>
+                  </a:extLst>
+                </a:gridCol>
               </a:tblGrid>
               <a:tr h="457200">
                 <a:tc>
@@ -35054,6 +35367,11 @@
                     </a:solidFill>
                   </a:tcPr>
                 </a:tc>
+                <a:extLst>
+                  <a:ext uri="{0D108BD9-81ED-4DB2-BD59-A6C34878D82A}">
+                    <a16:rowId xmlns:a16="http://schemas.microsoft.com/office/drawing/2014/main" val="10000"/>
+                  </a:ext>
+                </a:extLst>
               </a:tr>
               <a:tr h="457200">
                 <a:tc>
@@ -35100,6 +35418,11 @@
                     </a:solidFill>
                   </a:tcPr>
                 </a:tc>
+                <a:extLst>
+                  <a:ext uri="{0D108BD9-81ED-4DB2-BD59-A6C34878D82A}">
+                    <a16:rowId xmlns:a16="http://schemas.microsoft.com/office/drawing/2014/main" val="10001"/>
+                  </a:ext>
+                </a:extLst>
               </a:tr>
               <a:tr h="457200">
                 <a:tc>
@@ -35146,6 +35469,11 @@
                     </a:solidFill>
                   </a:tcPr>
                 </a:tc>
+                <a:extLst>
+                  <a:ext uri="{0D108BD9-81ED-4DB2-BD59-A6C34878D82A}">
+                    <a16:rowId xmlns:a16="http://schemas.microsoft.com/office/drawing/2014/main" val="10002"/>
+                  </a:ext>
+                </a:extLst>
               </a:tr>
               <a:tr h="457200">
                 <a:tc>
@@ -35192,6 +35520,11 @@
                     </a:solidFill>
                   </a:tcPr>
                 </a:tc>
+                <a:extLst>
+                  <a:ext uri="{0D108BD9-81ED-4DB2-BD59-A6C34878D82A}">
+                    <a16:rowId xmlns:a16="http://schemas.microsoft.com/office/drawing/2014/main" val="10003"/>
+                  </a:ext>
+                </a:extLst>
               </a:tr>
               <a:tr h="457200">
                 <a:tc>
@@ -35238,6 +35571,11 @@
                     </a:solidFill>
                   </a:tcPr>
                 </a:tc>
+                <a:extLst>
+                  <a:ext uri="{0D108BD9-81ED-4DB2-BD59-A6C34878D82A}">
+                    <a16:rowId xmlns:a16="http://schemas.microsoft.com/office/drawing/2014/main" val="10004"/>
+                  </a:ext>
+                </a:extLst>
               </a:tr>
               <a:tr h="457200">
                 <a:tc>
@@ -35284,6 +35622,11 @@
                     </a:solidFill>
                   </a:tcPr>
                 </a:tc>
+                <a:extLst>
+                  <a:ext uri="{0D108BD9-81ED-4DB2-BD59-A6C34878D82A}">
+                    <a16:rowId xmlns:a16="http://schemas.microsoft.com/office/drawing/2014/main" val="10005"/>
+                  </a:ext>
+                </a:extLst>
               </a:tr>
               <a:tr h="457200">
                 <a:tc>
@@ -35330,6 +35673,11 @@
                     </a:solidFill>
                   </a:tcPr>
                 </a:tc>
+                <a:extLst>
+                  <a:ext uri="{0D108BD9-81ED-4DB2-BD59-A6C34878D82A}">
+                    <a16:rowId xmlns:a16="http://schemas.microsoft.com/office/drawing/2014/main" val="10006"/>
+                  </a:ext>
+                </a:extLst>
               </a:tr>
               <a:tr h="457200">
                 <a:tc>
@@ -35376,6 +35724,11 @@
                     </a:solidFill>
                   </a:tcPr>
                 </a:tc>
+                <a:extLst>
+                  <a:ext uri="{0D108BD9-81ED-4DB2-BD59-A6C34878D82A}">
+                    <a16:rowId xmlns:a16="http://schemas.microsoft.com/office/drawing/2014/main" val="10007"/>
+                  </a:ext>
+                </a:extLst>
               </a:tr>
               <a:tr h="457200">
                 <a:tc>
@@ -35422,6 +35775,11 @@
                     </a:solidFill>
                   </a:tcPr>
                 </a:tc>
+                <a:extLst>
+                  <a:ext uri="{0D108BD9-81ED-4DB2-BD59-A6C34878D82A}">
+                    <a16:rowId xmlns:a16="http://schemas.microsoft.com/office/drawing/2014/main" val="10008"/>
+                  </a:ext>
+                </a:extLst>
               </a:tr>
               <a:tr h="457200">
                 <a:tc>
@@ -35468,6 +35826,11 @@
                     </a:solidFill>
                   </a:tcPr>
                 </a:tc>
+                <a:extLst>
+                  <a:ext uri="{0D108BD9-81ED-4DB2-BD59-A6C34878D82A}">
+                    <a16:rowId xmlns:a16="http://schemas.microsoft.com/office/drawing/2014/main" val="10009"/>
+                  </a:ext>
+                </a:extLst>
               </a:tr>
               <a:tr h="457200">
                 <a:tc>
@@ -35514,6 +35877,11 @@
                     </a:solidFill>
                   </a:tcPr>
                 </a:tc>
+                <a:extLst>
+                  <a:ext uri="{0D108BD9-81ED-4DB2-BD59-A6C34878D82A}">
+                    <a16:rowId xmlns:a16="http://schemas.microsoft.com/office/drawing/2014/main" val="10010"/>
+                  </a:ext>
+                </a:extLst>
               </a:tr>
             </a:tbl>
           </a:graphicData>
@@ -35528,7 +35896,7 @@
 </file>
 
 <file path=ppt/slides/slide5.xml><?xml version="1.0" encoding="utf-8"?>
-<p:sld xmlns:a="http://schemas.openxmlformats.org/drawingml/2006/main" xmlns:p="http://schemas.openxmlformats.org/presentationml/2006/main" xmlns:r="http://schemas.openxmlformats.org/officeDocument/2006/relationships">
+<p:sld xmlns:a="http://schemas.openxmlformats.org/drawingml/2006/main" xmlns:r="http://schemas.openxmlformats.org/officeDocument/2006/relationships" xmlns:p="http://schemas.openxmlformats.org/presentationml/2006/main">
   <p:cSld>
     <p:spTree>
       <p:nvGrpSpPr>
@@ -35536,7 +35904,14 @@
         <p:cNvGrpSpPr/>
         <p:nvPr/>
       </p:nvGrpSpPr>
-      <p:grpSpPr/>
+      <p:grpSpPr>
+        <a:xfrm>
+          <a:off x="0" y="0"/>
+          <a:ext cx="0" cy="0"/>
+          <a:chOff x="0" y="0"/>
+          <a:chExt cx="0" cy="0"/>
+        </a:xfrm>
+      </p:grpSpPr>
       <p:sp>
         <p:nvSpPr>
           <p:cNvPr id="2" name="Title 1"/>
@@ -35624,6 +35999,7 @@
           <a:lstStyle/>
           <a:p>
             <a:pPr algn="ctr"/>
+            <a:endParaRPr/>
           </a:p>
         </p:txBody>
       </p:sp>
@@ -36156,7 +36532,7 @@
           </a:fontRef>
         </p:style>
         <p:txBody>
-          <a:bodyPr rtlCol="0" anchor="ctr" wrap="square" lIns="164592" rIns="164592" tIns="73152" bIns="73152"/>
+          <a:bodyPr wrap="square" lIns="164592" tIns="73152" rIns="164592" bIns="73152" rtlCol="0" anchor="ctr"/>
           <a:lstStyle/>
           <a:p>
             <a:pPr algn="l"/>
@@ -36190,7 +36566,7 @@
 </file>
 
 <file path=ppt/slides/slide6.xml><?xml version="1.0" encoding="utf-8"?>
-<p:sld xmlns:a="http://schemas.openxmlformats.org/drawingml/2006/main" xmlns:p="http://schemas.openxmlformats.org/presentationml/2006/main" xmlns:r="http://schemas.openxmlformats.org/officeDocument/2006/relationships">
+<p:sld xmlns:a="http://schemas.openxmlformats.org/drawingml/2006/main" xmlns:r="http://schemas.openxmlformats.org/officeDocument/2006/relationships" xmlns:p="http://schemas.openxmlformats.org/presentationml/2006/main">
   <p:cSld>
     <p:spTree>
       <p:nvGrpSpPr>
@@ -36198,7 +36574,14 @@
         <p:cNvGrpSpPr/>
         <p:nvPr/>
       </p:nvGrpSpPr>
-      <p:grpSpPr/>
+      <p:grpSpPr>
+        <a:xfrm>
+          <a:off x="0" y="0"/>
+          <a:ext cx="0" cy="0"/>
+          <a:chOff x="0" y="0"/>
+          <a:chExt cx="0" cy="0"/>
+        </a:xfrm>
+      </p:grpSpPr>
       <p:sp>
         <p:nvSpPr>
           <p:cNvPr id="2" name="Title 1"/>
@@ -36286,6 +36669,7 @@
           <a:lstStyle/>
           <a:p>
             <a:pPr algn="ctr"/>
+            <a:endParaRPr/>
           </a:p>
         </p:txBody>
       </p:sp>
@@ -36424,7 +36808,7 @@
           </a:fontRef>
         </p:style>
         <p:txBody>
-          <a:bodyPr rtlCol="0" anchor="ctr" wrap="square" lIns="45720" rIns="45720" tIns="18288" bIns="18288"/>
+          <a:bodyPr wrap="square" lIns="45720" tIns="18288" rIns="45720" bIns="18288" rtlCol="0" anchor="ctr"/>
           <a:lstStyle/>
           <a:p>
             <a:pPr algn="ctr">
@@ -36494,7 +36878,7 @@
           </a:fontRef>
         </p:style>
         <p:txBody>
-          <a:bodyPr rtlCol="0" anchor="ctr" wrap="square" lIns="45720" rIns="45720" tIns="18288" bIns="18288"/>
+          <a:bodyPr wrap="square" lIns="45720" tIns="18288" rIns="45720" bIns="18288" rtlCol="0" anchor="ctr"/>
           <a:lstStyle/>
           <a:p>
             <a:pPr algn="ctr">
@@ -36610,7 +36994,7 @@
           </a:fontRef>
         </p:style>
         <p:txBody>
-          <a:bodyPr rtlCol="0" anchor="ctr" wrap="square" lIns="45720" rIns="45720" tIns="18288" bIns="18288"/>
+          <a:bodyPr wrap="square" lIns="45720" tIns="18288" rIns="45720" bIns="18288" rtlCol="0" anchor="ctr"/>
           <a:lstStyle/>
           <a:p>
             <a:pPr algn="ctr">
@@ -36680,7 +37064,7 @@
           </a:fontRef>
         </p:style>
         <p:txBody>
-          <a:bodyPr rtlCol="0" anchor="ctr" wrap="square" lIns="45720" rIns="45720" tIns="18288" bIns="18288"/>
+          <a:bodyPr wrap="square" lIns="45720" tIns="18288" rIns="45720" bIns="18288" rtlCol="0" anchor="ctr"/>
           <a:lstStyle/>
           <a:p>
             <a:pPr algn="ctr">
@@ -36796,7 +37180,7 @@
           </a:fontRef>
         </p:style>
         <p:txBody>
-          <a:bodyPr rtlCol="0" anchor="ctr" wrap="square" lIns="45720" rIns="45720" tIns="18288" bIns="18288"/>
+          <a:bodyPr wrap="square" lIns="45720" tIns="18288" rIns="45720" bIns="18288" rtlCol="0" anchor="ctr"/>
           <a:lstStyle/>
           <a:p>
             <a:pPr algn="ctr">
@@ -36866,7 +37250,7 @@
           </a:fontRef>
         </p:style>
         <p:txBody>
-          <a:bodyPr rtlCol="0" anchor="ctr" wrap="square" lIns="45720" rIns="45720" tIns="18288" bIns="18288"/>
+          <a:bodyPr wrap="square" lIns="45720" tIns="18288" rIns="45720" bIns="18288" rtlCol="0" anchor="ctr"/>
           <a:lstStyle/>
           <a:p>
             <a:pPr algn="ctr">
@@ -37007,7 +37391,7 @@
           </a:fontRef>
         </p:style>
         <p:txBody>
-          <a:bodyPr rtlCol="0" anchor="ctr" wrap="square" lIns="45720" rIns="45720" tIns="18288" bIns="18288"/>
+          <a:bodyPr wrap="square" lIns="45720" tIns="18288" rIns="45720" bIns="18288" rtlCol="0" anchor="ctr"/>
           <a:lstStyle/>
           <a:p>
             <a:pPr algn="ctr">
@@ -37077,7 +37461,7 @@
           </a:fontRef>
         </p:style>
         <p:txBody>
-          <a:bodyPr rtlCol="0" anchor="ctr" wrap="square" lIns="45720" rIns="45720" tIns="18288" bIns="18288"/>
+          <a:bodyPr wrap="square" lIns="45720" tIns="18288" rIns="45720" bIns="18288" rtlCol="0" anchor="ctr"/>
           <a:lstStyle/>
           <a:p>
             <a:pPr algn="ctr">
@@ -37428,7 +37812,7 @@
           </a:fontRef>
         </p:style>
         <p:txBody>
-          <a:bodyPr rtlCol="0" anchor="ctr" wrap="square" lIns="45720" rIns="45720" tIns="18288" bIns="18288"/>
+          <a:bodyPr wrap="square" lIns="45720" tIns="18288" rIns="45720" bIns="18288" rtlCol="0" anchor="ctr"/>
           <a:lstStyle/>
           <a:p>
             <a:pPr algn="ctr">
@@ -37494,7 +37878,7 @@
               </a:defRPr>
             </a:pPr>
             <a:r>
-              <a:rPr sz="1800" b="1">
+              <a:rPr sz="1800" b="1" dirty="0">
                 <a:solidFill>
                   <a:srgbClr val="0E7C86"/>
                 </a:solidFill>
@@ -37502,9 +37886,11 @@
               </a:rPr>
               <a:t>IN1</a:t>
             </a:r>
-            <a:br/>
-            <a:r>
-              <a:rPr sz="1800" b="1">
+            <a:br>
+              <a:rPr dirty="0"/>
+            </a:br>
+            <a:r>
+              <a:rPr sz="1800" b="1" dirty="0">
                 <a:solidFill>
                   <a:srgbClr val="0E7C86"/>
                 </a:solidFill>
@@ -37678,7 +38064,7 @@
 </file>
 
 <file path=ppt/slides/slide7.xml><?xml version="1.0" encoding="utf-8"?>
-<p:sld xmlns:a="http://schemas.openxmlformats.org/drawingml/2006/main" xmlns:p="http://schemas.openxmlformats.org/presentationml/2006/main" xmlns:r="http://schemas.openxmlformats.org/officeDocument/2006/relationships">
+<p:sld xmlns:a="http://schemas.openxmlformats.org/drawingml/2006/main" xmlns:r="http://schemas.openxmlformats.org/officeDocument/2006/relationships" xmlns:p="http://schemas.openxmlformats.org/presentationml/2006/main">
   <p:cSld>
     <p:spTree>
       <p:nvGrpSpPr>
@@ -37686,7 +38072,14 @@
         <p:cNvGrpSpPr/>
         <p:nvPr/>
       </p:nvGrpSpPr>
-      <p:grpSpPr/>
+      <p:grpSpPr>
+        <a:xfrm>
+          <a:off x="0" y="0"/>
+          <a:ext cx="0" cy="0"/>
+          <a:chOff x="0" y="0"/>
+          <a:chExt cx="0" cy="0"/>
+        </a:xfrm>
+      </p:grpSpPr>
       <p:sp>
         <p:nvSpPr>
           <p:cNvPr id="2" name="Title 1"/>
@@ -37774,6 +38167,7 @@
           <a:lstStyle/>
           <a:p>
             <a:pPr algn="ctr"/>
+            <a:endParaRPr/>
           </a:p>
         </p:txBody>
       </p:sp>
@@ -38256,7 +38650,7 @@
           </a:fontRef>
         </p:style>
         <p:txBody>
-          <a:bodyPr rtlCol="0" anchor="ctr" wrap="square" lIns="164592" rIns="164592" tIns="73152" bIns="73152"/>
+          <a:bodyPr wrap="square" lIns="164592" tIns="73152" rIns="164592" bIns="73152" rtlCol="0" anchor="ctr"/>
           <a:lstStyle/>
           <a:p>
             <a:pPr algn="l"/>
@@ -38290,7 +38684,7 @@
 </file>
 
 <file path=ppt/slides/slide8.xml><?xml version="1.0" encoding="utf-8"?>
-<p:sld xmlns:a="http://schemas.openxmlformats.org/drawingml/2006/main" xmlns:p="http://schemas.openxmlformats.org/presentationml/2006/main" xmlns:r="http://schemas.openxmlformats.org/officeDocument/2006/relationships">
+<p:sld xmlns:a="http://schemas.openxmlformats.org/drawingml/2006/main" xmlns:r="http://schemas.openxmlformats.org/officeDocument/2006/relationships" xmlns:p="http://schemas.openxmlformats.org/presentationml/2006/main">
   <p:cSld>
     <p:spTree>
       <p:nvGrpSpPr>
@@ -38298,7 +38692,14 @@
         <p:cNvGrpSpPr/>
         <p:nvPr/>
       </p:nvGrpSpPr>
-      <p:grpSpPr/>
+      <p:grpSpPr>
+        <a:xfrm>
+          <a:off x="0" y="0"/>
+          <a:ext cx="0" cy="0"/>
+          <a:chOff x="0" y="0"/>
+          <a:chExt cx="0" cy="0"/>
+        </a:xfrm>
+      </p:grpSpPr>
       <p:sp>
         <p:nvSpPr>
           <p:cNvPr id="2" name="Title 1"/>
@@ -38386,6 +38787,7 @@
           <a:lstStyle/>
           <a:p>
             <a:pPr algn="ctr"/>
+            <a:endParaRPr/>
           </a:p>
         </p:txBody>
       </p:sp>
@@ -38552,10 +38954,34 @@
                 <a:tableStyleId>{5C22544A-7EE6-4342-B048-85BDC9FD1C3A}</a:tableStyleId>
               </a:tblPr>
               <a:tblGrid>
-                <a:gridCol w="3355756"/>
-                <a:gridCol w="1677878"/>
-                <a:gridCol w="1677878"/>
-                <a:gridCol w="4474341"/>
+                <a:gridCol w="3355756">
+                  <a:extLst>
+                    <a:ext uri="{9D8B030D-6E8A-4147-A177-3AD203B41FA5}">
+                      <a16:colId xmlns:a16="http://schemas.microsoft.com/office/drawing/2014/main" val="20000"/>
+                    </a:ext>
+                  </a:extLst>
+                </a:gridCol>
+                <a:gridCol w="1677878">
+                  <a:extLst>
+                    <a:ext uri="{9D8B030D-6E8A-4147-A177-3AD203B41FA5}">
+                      <a16:colId xmlns:a16="http://schemas.microsoft.com/office/drawing/2014/main" val="20001"/>
+                    </a:ext>
+                  </a:extLst>
+                </a:gridCol>
+                <a:gridCol w="1677878">
+                  <a:extLst>
+                    <a:ext uri="{9D8B030D-6E8A-4147-A177-3AD203B41FA5}">
+                      <a16:colId xmlns:a16="http://schemas.microsoft.com/office/drawing/2014/main" val="20002"/>
+                    </a:ext>
+                  </a:extLst>
+                </a:gridCol>
+                <a:gridCol w="4474341">
+                  <a:extLst>
+                    <a:ext uri="{9D8B030D-6E8A-4147-A177-3AD203B41FA5}">
+                      <a16:colId xmlns:a16="http://schemas.microsoft.com/office/drawing/2014/main" val="20003"/>
+                    </a:ext>
+                  </a:extLst>
+                </a:gridCol>
               </a:tblGrid>
               <a:tr h="552450">
                 <a:tc>
@@ -38646,6 +39072,11 @@
                     </a:solidFill>
                   </a:tcPr>
                 </a:tc>
+                <a:extLst>
+                  <a:ext uri="{0D108BD9-81ED-4DB2-BD59-A6C34878D82A}">
+                    <a16:rowId xmlns:a16="http://schemas.microsoft.com/office/drawing/2014/main" val="10000"/>
+                  </a:ext>
+                </a:extLst>
               </a:tr>
               <a:tr h="552450">
                 <a:tc>
@@ -38736,6 +39167,11 @@
                     </a:solidFill>
                   </a:tcPr>
                 </a:tc>
+                <a:extLst>
+                  <a:ext uri="{0D108BD9-81ED-4DB2-BD59-A6C34878D82A}">
+                    <a16:rowId xmlns:a16="http://schemas.microsoft.com/office/drawing/2014/main" val="10001"/>
+                  </a:ext>
+                </a:extLst>
               </a:tr>
               <a:tr h="552450">
                 <a:tc>
@@ -38826,6 +39262,11 @@
                     </a:solidFill>
                   </a:tcPr>
                 </a:tc>
+                <a:extLst>
+                  <a:ext uri="{0D108BD9-81ED-4DB2-BD59-A6C34878D82A}">
+                    <a16:rowId xmlns:a16="http://schemas.microsoft.com/office/drawing/2014/main" val="10002"/>
+                  </a:ext>
+                </a:extLst>
               </a:tr>
               <a:tr h="552450">
                 <a:tc>
@@ -38916,6 +39357,11 @@
                     </a:solidFill>
                   </a:tcPr>
                 </a:tc>
+                <a:extLst>
+                  <a:ext uri="{0D108BD9-81ED-4DB2-BD59-A6C34878D82A}">
+                    <a16:rowId xmlns:a16="http://schemas.microsoft.com/office/drawing/2014/main" val="10003"/>
+                  </a:ext>
+                </a:extLst>
               </a:tr>
               <a:tr h="552450">
                 <a:tc>
@@ -39006,6 +39452,11 @@
                     </a:solidFill>
                   </a:tcPr>
                 </a:tc>
+                <a:extLst>
+                  <a:ext uri="{0D108BD9-81ED-4DB2-BD59-A6C34878D82A}">
+                    <a16:rowId xmlns:a16="http://schemas.microsoft.com/office/drawing/2014/main" val="10004"/>
+                  </a:ext>
+                </a:extLst>
               </a:tr>
             </a:tbl>
           </a:graphicData>
@@ -39052,7 +39503,7 @@
           </a:fontRef>
         </p:style>
         <p:txBody>
-          <a:bodyPr rtlCol="0" anchor="ctr" wrap="square" lIns="164592" rIns="164592" tIns="73152" bIns="73152"/>
+          <a:bodyPr wrap="square" lIns="164592" tIns="73152" rIns="164592" bIns="73152" rtlCol="0" anchor="ctr"/>
           <a:lstStyle/>
           <a:p>
             <a:pPr algn="l"/>
@@ -39086,7 +39537,7 @@
 </file>
 
 <file path=ppt/slides/slide9.xml><?xml version="1.0" encoding="utf-8"?>
-<p:sld xmlns:a="http://schemas.openxmlformats.org/drawingml/2006/main" xmlns:p="http://schemas.openxmlformats.org/presentationml/2006/main" xmlns:r="http://schemas.openxmlformats.org/officeDocument/2006/relationships">
+<p:sld xmlns:a="http://schemas.openxmlformats.org/drawingml/2006/main" xmlns:r="http://schemas.openxmlformats.org/officeDocument/2006/relationships" xmlns:p="http://schemas.openxmlformats.org/presentationml/2006/main">
   <p:cSld>
     <p:spTree>
       <p:nvGrpSpPr>
@@ -39094,7 +39545,14 @@
         <p:cNvGrpSpPr/>
         <p:nvPr/>
       </p:nvGrpSpPr>
-      <p:grpSpPr/>
+      <p:grpSpPr>
+        <a:xfrm>
+          <a:off x="0" y="0"/>
+          <a:ext cx="0" cy="0"/>
+          <a:chOff x="0" y="0"/>
+          <a:chExt cx="0" cy="0"/>
+        </a:xfrm>
+      </p:grpSpPr>
       <p:sp>
         <p:nvSpPr>
           <p:cNvPr id="2" name="Title 1"/>
@@ -39182,6 +39640,7 @@
           <a:lstStyle/>
           <a:p>
             <a:pPr algn="ctr"/>
+            <a:endParaRPr/>
           </a:p>
         </p:txBody>
       </p:sp>
@@ -39415,6 +39874,12 @@
                 <a:latin typeface="Calibri"/>
               </a:defRPr>
             </a:pPr>
+            <a:endParaRPr sz="2200" b="0">
+              <a:solidFill>
+                <a:srgbClr val="222222"/>
+              </a:solidFill>
+              <a:latin typeface="Calibri"/>
+            </a:endParaRPr>
           </a:p>
           <a:p>
             <a:pPr algn="l">
@@ -39481,6 +39946,12 @@
                 <a:latin typeface="Calibri"/>
               </a:defRPr>
             </a:pPr>
+            <a:endParaRPr sz="2200" b="0">
+              <a:solidFill>
+                <a:srgbClr val="222222"/>
+              </a:solidFill>
+              <a:latin typeface="Calibri"/>
+            </a:endParaRPr>
           </a:p>
           <a:p>
             <a:pPr algn="l">
@@ -39848,44 +40319,44 @@
         <a:sysClr val="window" lastClr="FFFFFF"/>
       </a:lt1>
       <a:dk2>
-        <a:srgbClr val="1F497D"/>
+        <a:srgbClr val="0E2841"/>
       </a:dk2>
       <a:lt2>
-        <a:srgbClr val="EEECE1"/>
+        <a:srgbClr val="E8E8E8"/>
       </a:lt2>
       <a:accent1>
-        <a:srgbClr val="4F81BD"/>
+        <a:srgbClr val="156082"/>
       </a:accent1>
       <a:accent2>
-        <a:srgbClr val="C0504D"/>
+        <a:srgbClr val="E97132"/>
       </a:accent2>
       <a:accent3>
-        <a:srgbClr val="9BBB59"/>
+        <a:srgbClr val="196B24"/>
       </a:accent3>
       <a:accent4>
-        <a:srgbClr val="8064A2"/>
+        <a:srgbClr val="0F9ED5"/>
       </a:accent4>
       <a:accent5>
-        <a:srgbClr val="4BACC6"/>
+        <a:srgbClr val="A02B93"/>
       </a:accent5>
       <a:accent6>
-        <a:srgbClr val="F79646"/>
+        <a:srgbClr val="4EA72E"/>
       </a:accent6>
       <a:hlink>
-        <a:srgbClr val="0000FF"/>
+        <a:srgbClr val="467886"/>
       </a:hlink>
       <a:folHlink>
-        <a:srgbClr val="800080"/>
+        <a:srgbClr val="96607D"/>
       </a:folHlink>
     </a:clrScheme>
     <a:fontScheme name="Office">
       <a:majorFont>
-        <a:latin typeface="Calibri"/>
+        <a:latin typeface="Aptos Display" panose="02110004020202020204"/>
         <a:ea typeface=""/>
         <a:cs typeface=""/>
-        <a:font script="Jpan" typeface="ＭＳ Ｐゴシック"/>
+        <a:font script="Jpan" typeface="游ゴシック Light"/>
         <a:font script="Hang" typeface="맑은 고딕"/>
-        <a:font script="Hans" typeface="宋体"/>
+        <a:font script="Hans" typeface="等线 Light"/>
         <a:font script="Hant" typeface="新細明體"/>
         <a:font script="Arab" typeface="Times New Roman"/>
         <a:font script="Hebr" typeface="Times New Roman"/>
@@ -39913,14 +40384,31 @@
         <a:font script="Viet" typeface="Times New Roman"/>
         <a:font script="Uigh" typeface="Microsoft Uighur"/>
         <a:font script="Geor" typeface="Sylfaen"/>
+        <a:font script="Armn" typeface="Arial"/>
+        <a:font script="Bugi" typeface="Leelawadee UI"/>
+        <a:font script="Bopo" typeface="Microsoft JhengHei"/>
+        <a:font script="Java" typeface="Javanese Text"/>
+        <a:font script="Lisu" typeface="Segoe UI"/>
+        <a:font script="Mymr" typeface="Myanmar Text"/>
+        <a:font script="Nkoo" typeface="Ebrima"/>
+        <a:font script="Olck" typeface="Nirmala UI"/>
+        <a:font script="Osma" typeface="Ebrima"/>
+        <a:font script="Phag" typeface="Phagspa"/>
+        <a:font script="Syrn" typeface="Estrangelo Edessa"/>
+        <a:font script="Syrj" typeface="Estrangelo Edessa"/>
+        <a:font script="Syre" typeface="Estrangelo Edessa"/>
+        <a:font script="Sora" typeface="Nirmala UI"/>
+        <a:font script="Tale" typeface="Microsoft Tai Le"/>
+        <a:font script="Talu" typeface="Microsoft New Tai Lue"/>
+        <a:font script="Tfng" typeface="Ebrima"/>
       </a:majorFont>
       <a:minorFont>
-        <a:latin typeface="Calibri"/>
+        <a:latin typeface="Aptos" panose="02110004020202020204"/>
         <a:ea typeface=""/>
         <a:cs typeface=""/>
-        <a:font script="Jpan" typeface="ＭＳ Ｐゴシック"/>
+        <a:font script="Jpan" typeface="游ゴシック"/>
         <a:font script="Hang" typeface="맑은 고딕"/>
-        <a:font script="Hans" typeface="宋体"/>
+        <a:font script="Hans" typeface="等线"/>
         <a:font script="Hant" typeface="新細明體"/>
         <a:font script="Arab" typeface="Arial"/>
         <a:font script="Hebr" typeface="Arial"/>
@@ -39948,6 +40436,23 @@
         <a:font script="Viet" typeface="Arial"/>
         <a:font script="Uigh" typeface="Microsoft Uighur"/>
         <a:font script="Geor" typeface="Sylfaen"/>
+        <a:font script="Armn" typeface="Arial"/>
+        <a:font script="Bugi" typeface="Leelawadee UI"/>
+        <a:font script="Bopo" typeface="Microsoft JhengHei"/>
+        <a:font script="Java" typeface="Javanese Text"/>
+        <a:font script="Lisu" typeface="Segoe UI"/>
+        <a:font script="Mymr" typeface="Myanmar Text"/>
+        <a:font script="Nkoo" typeface="Ebrima"/>
+        <a:font script="Olck" typeface="Nirmala UI"/>
+        <a:font script="Osma" typeface="Ebrima"/>
+        <a:font script="Phag" typeface="Phagspa"/>
+        <a:font script="Syrn" typeface="Estrangelo Edessa"/>
+        <a:font script="Syrj" typeface="Estrangelo Edessa"/>
+        <a:font script="Syre" typeface="Estrangelo Edessa"/>
+        <a:font script="Sora" typeface="Nirmala UI"/>
+        <a:font script="Tale" typeface="Microsoft Tai Le"/>
+        <a:font script="Talu" typeface="Microsoft New Tai Lue"/>
+        <a:font script="Tfng" typeface="Ebrima"/>
       </a:minorFont>
     </a:fontScheme>
     <a:fmtScheme name="Office">
@@ -39959,180 +40464,136 @@
           <a:gsLst>
             <a:gs pos="0">
               <a:schemeClr val="phClr">
-                <a:tint val="50000"/>
-                <a:satMod val="300000"/>
+                <a:lumMod val="110000"/>
+                <a:satMod val="105000"/>
+                <a:tint val="67000"/>
               </a:schemeClr>
             </a:gs>
-            <a:gs pos="35000">
+            <a:gs pos="50000">
               <a:schemeClr val="phClr">
-                <a:tint val="37000"/>
-                <a:satMod val="300000"/>
+                <a:lumMod val="105000"/>
+                <a:satMod val="103000"/>
+                <a:tint val="73000"/>
               </a:schemeClr>
             </a:gs>
             <a:gs pos="100000">
               <a:schemeClr val="phClr">
-                <a:tint val="15000"/>
-                <a:satMod val="350000"/>
+                <a:lumMod val="105000"/>
+                <a:satMod val="109000"/>
+                <a:tint val="81000"/>
               </a:schemeClr>
             </a:gs>
           </a:gsLst>
-          <a:lin ang="16200000" scaled="1"/>
+          <a:lin ang="5400000" scaled="0"/>
         </a:gradFill>
         <a:gradFill rotWithShape="1">
           <a:gsLst>
             <a:gs pos="0">
               <a:schemeClr val="phClr">
-                <a:tint val="100000"/>
+                <a:satMod val="103000"/>
+                <a:lumMod val="102000"/>
+                <a:tint val="94000"/>
+              </a:schemeClr>
+            </a:gs>
+            <a:gs pos="50000">
+              <a:schemeClr val="phClr">
+                <a:satMod val="110000"/>
+                <a:lumMod val="100000"/>
                 <a:shade val="100000"/>
-                <a:satMod val="130000"/>
               </a:schemeClr>
             </a:gs>
             <a:gs pos="100000">
               <a:schemeClr val="phClr">
-                <a:tint val="50000"/>
-                <a:shade val="100000"/>
-                <a:satMod val="350000"/>
+                <a:lumMod val="99000"/>
+                <a:satMod val="120000"/>
+                <a:shade val="78000"/>
               </a:schemeClr>
             </a:gs>
           </a:gsLst>
-          <a:lin ang="16200000" scaled="0"/>
+          <a:lin ang="5400000" scaled="0"/>
         </a:gradFill>
       </a:fillStyleLst>
       <a:lnStyleLst>
-        <a:ln w="9525" cap="flat" cmpd="sng" algn="ctr">
+        <a:ln w="12700" cap="flat" cmpd="sng" algn="ctr">
           <a:solidFill>
-            <a:schemeClr val="phClr">
-              <a:shade val="95000"/>
-              <a:satMod val="105000"/>
-            </a:schemeClr>
+            <a:schemeClr val="phClr"/>
           </a:solidFill>
           <a:prstDash val="solid"/>
+          <a:miter lim="800000"/>
+        </a:ln>
+        <a:ln w="19050" cap="flat" cmpd="sng" algn="ctr">
+          <a:solidFill>
+            <a:schemeClr val="phClr"/>
+          </a:solidFill>
+          <a:prstDash val="solid"/>
+          <a:miter lim="800000"/>
         </a:ln>
         <a:ln w="25400" cap="flat" cmpd="sng" algn="ctr">
           <a:solidFill>
             <a:schemeClr val="phClr"/>
           </a:solidFill>
           <a:prstDash val="solid"/>
-        </a:ln>
-        <a:ln w="38100" cap="flat" cmpd="sng" algn="ctr">
-          <a:solidFill>
-            <a:schemeClr val="phClr"/>
-          </a:solidFill>
-          <a:prstDash val="solid"/>
+          <a:miter lim="800000"/>
         </a:ln>
       </a:lnStyleLst>
       <a:effectStyleLst>
         <a:effectStyle>
+          <a:effectLst/>
+        </a:effectStyle>
+        <a:effectStyle>
+          <a:effectLst/>
+        </a:effectStyle>
+        <a:effectStyle>
           <a:effectLst>
-            <a:outerShdw blurRad="40000" dist="20000" dir="5400000" rotWithShape="0">
+            <a:outerShdw blurRad="57150" dist="19050" dir="5400000" algn="ctr" rotWithShape="0">
               <a:srgbClr val="000000">
-                <a:alpha val="38000"/>
+                <a:alpha val="63000"/>
               </a:srgbClr>
             </a:outerShdw>
           </a:effectLst>
-        </a:effectStyle>
-        <a:effectStyle>
-          <a:effectLst>
-            <a:outerShdw blurRad="40000" dist="23000" dir="5400000" rotWithShape="0">
-              <a:srgbClr val="000000">
-                <a:alpha val="35000"/>
-              </a:srgbClr>
-            </a:outerShdw>
-          </a:effectLst>
-        </a:effectStyle>
-        <a:effectStyle>
-          <a:effectLst>
-            <a:outerShdw blurRad="40000" dist="23000" dir="5400000" rotWithShape="0">
-              <a:srgbClr val="000000">
-                <a:alpha val="35000"/>
-              </a:srgbClr>
-            </a:outerShdw>
-          </a:effectLst>
-          <a:scene3d>
-            <a:camera prst="orthographicFront">
-              <a:rot lat="0" lon="0" rev="0"/>
-            </a:camera>
-            <a:lightRig rig="threePt" dir="t">
-              <a:rot lat="0" lon="0" rev="1200000"/>
-            </a:lightRig>
-          </a:scene3d>
-          <a:sp3d>
-            <a:bevelT w="63500" h="25400"/>
-          </a:sp3d>
         </a:effectStyle>
       </a:effectStyleLst>
       <a:bgFillStyleLst>
         <a:solidFill>
           <a:schemeClr val="phClr"/>
         </a:solidFill>
+        <a:solidFill>
+          <a:schemeClr val="phClr">
+            <a:tint val="95000"/>
+            <a:satMod val="170000"/>
+          </a:schemeClr>
+        </a:solidFill>
         <a:gradFill rotWithShape="1">
           <a:gsLst>
             <a:gs pos="0">
               <a:schemeClr val="phClr">
-                <a:tint val="40000"/>
-                <a:satMod val="350000"/>
+                <a:tint val="93000"/>
+                <a:satMod val="150000"/>
+                <a:shade val="98000"/>
+                <a:lumMod val="102000"/>
               </a:schemeClr>
             </a:gs>
-            <a:gs pos="40000">
+            <a:gs pos="50000">
               <a:schemeClr val="phClr">
-                <a:tint val="45000"/>
-                <a:shade val="99000"/>
-                <a:satMod val="350000"/>
+                <a:tint val="98000"/>
+                <a:satMod val="130000"/>
+                <a:shade val="90000"/>
+                <a:lumMod val="103000"/>
               </a:schemeClr>
             </a:gs>
             <a:gs pos="100000">
               <a:schemeClr val="phClr">
-                <a:shade val="20000"/>
-                <a:satMod val="255000"/>
+                <a:shade val="63000"/>
+                <a:satMod val="120000"/>
               </a:schemeClr>
             </a:gs>
           </a:gsLst>
-          <a:path path="circle">
-            <a:fillToRect l="50000" t="-80000" r="50000" b="180000"/>
-          </a:path>
-        </a:gradFill>
-        <a:gradFill rotWithShape="1">
-          <a:gsLst>
-            <a:gs pos="0">
-              <a:schemeClr val="phClr">
-                <a:tint val="80000"/>
-                <a:satMod val="300000"/>
-              </a:schemeClr>
-            </a:gs>
-            <a:gs pos="100000">
-              <a:schemeClr val="phClr">
-                <a:shade val="30000"/>
-                <a:satMod val="200000"/>
-              </a:schemeClr>
-            </a:gs>
-          </a:gsLst>
-          <a:path path="circle">
-            <a:fillToRect l="50000" t="50000" r="50000" b="50000"/>
-          </a:path>
+          <a:lin ang="5400000" scaled="0"/>
         </a:gradFill>
       </a:bgFillStyleLst>
     </a:fmtScheme>
   </a:themeElements>
   <a:objectDefaults>
-    <a:spDef>
-      <a:spPr/>
-      <a:bodyPr/>
-      <a:lstStyle/>
-      <a:style>
-        <a:lnRef idx="1">
-          <a:schemeClr val="accent1"/>
-        </a:lnRef>
-        <a:fillRef idx="3">
-          <a:schemeClr val="accent1"/>
-        </a:fillRef>
-        <a:effectRef idx="2">
-          <a:schemeClr val="accent1"/>
-        </a:effectRef>
-        <a:fontRef idx="minor">
-          <a:schemeClr val="lt1"/>
-        </a:fontRef>
-      </a:style>
-    </a:spDef>
     <a:lnDef>
       <a:spPr/>
       <a:bodyPr/>
@@ -40154,5 +40615,10 @@
     </a:lnDef>
   </a:objectDefaults>
   <a:extraClrSchemeLst/>
+  <a:extLst>
+    <a:ext uri="{05A4C25C-085E-4340-85A3-A5531E510DB2}">
+      <thm15:themeFamily xmlns:thm15="http://schemas.microsoft.com/office/thememl/2012/main" name="Office Theme" id="{2E142A2C-CD16-42D6-873A-C26D2A0506FA}" vid="{1BDDFF52-6CD6-40A5-AB3C-68EB2F1E4D0A}"/>
+    </a:ext>
+  </a:extLst>
 </a:theme>
 </file>
--- a/ground-vehicle/docs/courses/beginner-ps3/l2_motor_control.pptx
+++ b/ground-vehicle/docs/courses/beginner-ps3/l2_motor_control.pptx
@@ -4,51 +4,48 @@
   <p:sldMasterIdLst>
     <p:sldMasterId id="2147483648" r:id="rId1"/>
   </p:sldMasterIdLst>
-  <p:notesMasterIdLst>
-    <p:notesMasterId r:id="rId41"/>
-  </p:notesMasterIdLst>
   <p:sldIdLst>
-    <p:sldId id="256" r:id="rId2"/>
-    <p:sldId id="257" r:id="rId3"/>
-    <p:sldId id="258" r:id="rId4"/>
-    <p:sldId id="259" r:id="rId5"/>
-    <p:sldId id="260" r:id="rId6"/>
-    <p:sldId id="261" r:id="rId7"/>
-    <p:sldId id="262" r:id="rId8"/>
-    <p:sldId id="263" r:id="rId9"/>
-    <p:sldId id="264" r:id="rId10"/>
-    <p:sldId id="265" r:id="rId11"/>
-    <p:sldId id="266" r:id="rId12"/>
-    <p:sldId id="267" r:id="rId13"/>
-    <p:sldId id="268" r:id="rId14"/>
-    <p:sldId id="269" r:id="rId15"/>
-    <p:sldId id="270" r:id="rId16"/>
-    <p:sldId id="271" r:id="rId17"/>
-    <p:sldId id="272" r:id="rId18"/>
-    <p:sldId id="273" r:id="rId19"/>
-    <p:sldId id="274" r:id="rId20"/>
-    <p:sldId id="275" r:id="rId21"/>
-    <p:sldId id="276" r:id="rId22"/>
-    <p:sldId id="277" r:id="rId23"/>
-    <p:sldId id="278" r:id="rId24"/>
-    <p:sldId id="279" r:id="rId25"/>
-    <p:sldId id="280" r:id="rId26"/>
-    <p:sldId id="281" r:id="rId27"/>
-    <p:sldId id="282" r:id="rId28"/>
-    <p:sldId id="283" r:id="rId29"/>
-    <p:sldId id="284" r:id="rId30"/>
-    <p:sldId id="285" r:id="rId31"/>
-    <p:sldId id="286" r:id="rId32"/>
-    <p:sldId id="287" r:id="rId33"/>
-    <p:sldId id="288" r:id="rId34"/>
-    <p:sldId id="289" r:id="rId35"/>
-    <p:sldId id="290" r:id="rId36"/>
-    <p:sldId id="291" r:id="rId37"/>
-    <p:sldId id="292" r:id="rId38"/>
-    <p:sldId id="293" r:id="rId39"/>
-    <p:sldId id="294" r:id="rId40"/>
+    <p:sldId id="256" r:id="rId7"/>
+    <p:sldId id="257" r:id="rId9"/>
+    <p:sldId id="258" r:id="rId10"/>
+    <p:sldId id="259" r:id="rId11"/>
+    <p:sldId id="260" r:id="rId12"/>
+    <p:sldId id="261" r:id="rId13"/>
+    <p:sldId id="262" r:id="rId14"/>
+    <p:sldId id="263" r:id="rId15"/>
+    <p:sldId id="264" r:id="rId16"/>
+    <p:sldId id="265" r:id="rId17"/>
+    <p:sldId id="266" r:id="rId18"/>
+    <p:sldId id="267" r:id="rId19"/>
+    <p:sldId id="268" r:id="rId20"/>
+    <p:sldId id="269" r:id="rId21"/>
+    <p:sldId id="270" r:id="rId22"/>
+    <p:sldId id="271" r:id="rId23"/>
+    <p:sldId id="272" r:id="rId24"/>
+    <p:sldId id="273" r:id="rId25"/>
+    <p:sldId id="274" r:id="rId26"/>
+    <p:sldId id="275" r:id="rId27"/>
+    <p:sldId id="276" r:id="rId28"/>
+    <p:sldId id="277" r:id="rId29"/>
+    <p:sldId id="278" r:id="rId30"/>
+    <p:sldId id="279" r:id="rId31"/>
+    <p:sldId id="280" r:id="rId32"/>
+    <p:sldId id="281" r:id="rId33"/>
+    <p:sldId id="282" r:id="rId34"/>
+    <p:sldId id="283" r:id="rId35"/>
+    <p:sldId id="284" r:id="rId36"/>
+    <p:sldId id="285" r:id="rId37"/>
+    <p:sldId id="286" r:id="rId38"/>
+    <p:sldId id="287" r:id="rId39"/>
+    <p:sldId id="288" r:id="rId40"/>
+    <p:sldId id="289" r:id="rId41"/>
+    <p:sldId id="290" r:id="rId42"/>
+    <p:sldId id="291" r:id="rId43"/>
+    <p:sldId id="292" r:id="rId44"/>
+    <p:sldId id="293" r:id="rId45"/>
+    <p:sldId id="294" r:id="rId46"/>
   </p:sldIdLst>
-  <p:sldSz cx="12192000" cy="6858000"/>
+  <p:sldSz cx="12191695" cy="6858000" type="screen4x3"/>
   <p:notesSz cx="6858000" cy="9144000"/>
   <p:defaultTextStyle>
     <a:defPPr>
@@ -145,56 +142,11 @@
       </a:defRPr>
     </a:lvl9pPr>
   </p:defaultTextStyle>
-  <p:extLst>
-    <p:ext uri="{EFAFB233-063F-42B5-8137-9DF3F51BA10A}">
-      <p15:sldGuideLst xmlns:p15="http://schemas.microsoft.com/office/powerpoint/2012/main">
-        <p15:guide id="1" orient="horz" pos="2160">
-          <p15:clr>
-            <a:srgbClr val="A4A3A4"/>
-          </p15:clr>
-        </p15:guide>
-        <p15:guide id="2" pos="2880">
-          <p15:clr>
-            <a:srgbClr val="A4A3A4"/>
-          </p15:clr>
-        </p15:guide>
-      </p15:sldGuideLst>
-    </p:ext>
-  </p:extLst>
 </p:presentation>
 </file>
 
-<file path=ppt/changesInfos/changesInfo1.xml><?xml version="1.0" encoding="utf-8"?>
-<pc:chgInfo xmlns:a="http://schemas.openxmlformats.org/drawingml/2006/main" xmlns:r="http://schemas.openxmlformats.org/officeDocument/2006/relationships" xmlns:ac="http://schemas.microsoft.com/office/drawing/2013/main/command" xmlns:pc="http://schemas.microsoft.com/office/powerpoint/2013/main/command">
-  <pc:docChgLst>
-    <pc:chgData name="Kevin Bowen" userId="ee6702fae12807e4" providerId="LiveId" clId="{5CB6C98B-5151-4E5D-BF39-3ED613ABF9A3}"/>
-    <pc:docChg chg="modSld">
-      <pc:chgData name="Kevin Bowen" userId="ee6702fae12807e4" providerId="LiveId" clId="{5CB6C98B-5151-4E5D-BF39-3ED613ABF9A3}" dt="2026-09-07T16:32:17.844" v="106" actId="1076"/>
-      <pc:docMkLst>
-        <pc:docMk/>
-      </pc:docMkLst>
-      <pc:sldChg chg="modSp mod">
-        <pc:chgData name="Kevin Bowen" userId="ee6702fae12807e4" providerId="LiveId" clId="{5CB6C98B-5151-4E5D-BF39-3ED613ABF9A3}" dt="2026-09-07T16:32:17.844" v="106" actId="1076"/>
-        <pc:sldMkLst>
-          <pc:docMk/>
-          <pc:sldMk cId="0" sldId="283"/>
-        </pc:sldMkLst>
-        <pc:spChg chg="mod">
-          <ac:chgData name="Kevin Bowen" userId="ee6702fae12807e4" providerId="LiveId" clId="{5CB6C98B-5151-4E5D-BF39-3ED613ABF9A3}" dt="2026-09-07T16:32:17.844" v="106" actId="1076"/>
-          <ac:spMkLst>
-            <pc:docMk/>
-            <pc:sldMk cId="0" sldId="283"/>
-            <ac:spMk id="48" creationId="{00000000-0000-0000-0000-000000000000}"/>
-          </ac:spMkLst>
-        </pc:spChg>
-      </pc:sldChg>
-    </pc:docChg>
-  </pc:docChgLst>
-</pc:chgInfo>
-</file>
-
 <file path=ppt/notesMasters/notesMaster1.xml><?xml version="1.0" encoding="utf-8"?>
-<p:notesMaster xmlns:a="http://schemas.openxmlformats.org/drawingml/2006/main" xmlns:r="http://schemas.openxmlformats.org/officeDocument/2006/relationships" xmlns:p="http://schemas.openxmlformats.org/presentationml/2006/main">
+<p:notesMaster xmlns:a="http://schemas.openxmlformats.org/drawingml/2006/main" xmlns:p="http://schemas.openxmlformats.org/presentationml/2006/main" xmlns:r="http://schemas.openxmlformats.org/officeDocument/2006/relationships">
   <p:cSld>
     <p:bg>
       <p:bgRef idx="1001">
@@ -215,16 +167,241 @@
           <a:chExt cx="0" cy="0"/>
         </a:xfrm>
       </p:grpSpPr>
+      <p:sp>
+        <p:nvSpPr>
+          <p:cNvPr id="2" name="Header Placeholder 1"/>
+          <p:cNvSpPr>
+            <a:spLocks noGrp="1"/>
+          </p:cNvSpPr>
+          <p:nvPr>
+            <p:ph type="hdr" sz="quarter"/>
+          </p:nvPr>
+        </p:nvSpPr>
+        <p:spPr>
+          <a:xfrm>
+            <a:off x="0" y="0"/>
+            <a:ext cx="2971800" cy="457200"/>
+          </a:xfrm>
+          <a:prstGeom prst="rect">
+            <a:avLst/>
+          </a:prstGeom>
+        </p:spPr>
+        <p:txBody>
+          <a:bodyPr vert="horz" lIns="91440" tIns="45720" rIns="91440" bIns="45720" rtlCol="0"/>
+          <a:lstStyle>
+            <a:lvl1pPr algn="l">
+              <a:defRPr sz="1200"/>
+            </a:lvl1pPr>
+          </a:lstStyle>
+          <a:p>
+            <a:endParaRPr lang="en-US"/>
+          </a:p>
+        </p:txBody>
+      </p:sp>
+      <p:sp>
+        <p:nvSpPr>
+          <p:cNvPr id="3" name="Date Placeholder 2"/>
+          <p:cNvSpPr>
+            <a:spLocks noGrp="1"/>
+          </p:cNvSpPr>
+          <p:nvPr>
+            <p:ph type="dt" idx="1"/>
+          </p:nvPr>
+        </p:nvSpPr>
+        <p:spPr>
+          <a:xfrm>
+            <a:off x="3884613" y="0"/>
+            <a:ext cx="2971800" cy="457200"/>
+          </a:xfrm>
+          <a:prstGeom prst="rect">
+            <a:avLst/>
+          </a:prstGeom>
+        </p:spPr>
+        <p:txBody>
+          <a:bodyPr vert="horz" lIns="91440" tIns="45720" rIns="91440" bIns="45720" rtlCol="0"/>
+          <a:lstStyle>
+            <a:lvl1pPr algn="r">
+              <a:defRPr sz="1200"/>
+            </a:lvl1pPr>
+          </a:lstStyle>
+          <a:p>
+            <a:fld id="{0F89C1C7-3DCD-1040-A9CF-14679D8B5DDD}" type="datetimeFigureOut">
+              <a:rPr lang="en-US" smtClean="0"/>
+              <a:t>10/17/16</a:t>
+            </a:fld>
+            <a:endParaRPr lang="en-US"/>
+          </a:p>
+        </p:txBody>
+      </p:sp>
+      <p:sp>
+        <p:nvSpPr>
+          <p:cNvPr id="4" name="Slide Image Placeholder 3"/>
+          <p:cNvSpPr>
+            <a:spLocks noGrp="1" noRot="1" noChangeAspect="1"/>
+          </p:cNvSpPr>
+          <p:nvPr>
+            <p:ph type="sldImg" idx="2"/>
+          </p:nvPr>
+        </p:nvSpPr>
+        <p:spPr>
+          <a:xfrm>
+            <a:off x="1143000" y="685800"/>
+            <a:ext cx="4572000" cy="3429000"/>
+          </a:xfrm>
+          <a:prstGeom prst="rect">
+            <a:avLst/>
+          </a:prstGeom>
+          <a:noFill/>
+          <a:ln w="12700">
+            <a:solidFill>
+              <a:prstClr val="black"/>
+            </a:solidFill>
+          </a:ln>
+        </p:spPr>
+        <p:txBody>
+          <a:bodyPr vert="horz" lIns="91440" tIns="45720" rIns="91440" bIns="45720" rtlCol="0" anchor="ctr"/>
+          <a:lstStyle/>
+          <a:p>
+            <a:endParaRPr lang="en-US"/>
+          </a:p>
+        </p:txBody>
+      </p:sp>
+      <p:sp>
+        <p:nvSpPr>
+          <p:cNvPr id="5" name="Notes Placeholder 4"/>
+          <p:cNvSpPr>
+            <a:spLocks noGrp="1"/>
+          </p:cNvSpPr>
+          <p:nvPr>
+            <p:ph type="body" sz="quarter" idx="3"/>
+          </p:nvPr>
+        </p:nvSpPr>
+        <p:spPr>
+          <a:xfrm>
+            <a:off x="685800" y="4343400"/>
+            <a:ext cx="5486400" cy="4114800"/>
+          </a:xfrm>
+          <a:prstGeom prst="rect">
+            <a:avLst/>
+          </a:prstGeom>
+        </p:spPr>
+        <p:txBody>
+          <a:bodyPr vert="horz" lIns="91440" tIns="45720" rIns="91440" bIns="45720" rtlCol="0"/>
+          <a:lstStyle/>
+          <a:p>
+            <a:pPr lvl="0"/>
+            <a:r>
+              <a:rPr lang="en-US" smtClean="0"/>
+              <a:t>Click to edit Master text styles</a:t>
+            </a:r>
+          </a:p>
+          <a:p>
+            <a:pPr lvl="1"/>
+            <a:r>
+              <a:rPr lang="en-US" smtClean="0"/>
+              <a:t>Second level</a:t>
+            </a:r>
+          </a:p>
+          <a:p>
+            <a:pPr lvl="2"/>
+            <a:r>
+              <a:rPr lang="en-US" smtClean="0"/>
+              <a:t>Third level</a:t>
+            </a:r>
+          </a:p>
+          <a:p>
+            <a:pPr lvl="3"/>
+            <a:r>
+              <a:rPr lang="en-US" smtClean="0"/>
+              <a:t>Fourth level</a:t>
+            </a:r>
+          </a:p>
+          <a:p>
+            <a:pPr lvl="4"/>
+            <a:r>
+              <a:rPr lang="en-US" smtClean="0"/>
+              <a:t>Fifth level</a:t>
+            </a:r>
+            <a:endParaRPr lang="en-US"/>
+          </a:p>
+        </p:txBody>
+      </p:sp>
+      <p:sp>
+        <p:nvSpPr>
+          <p:cNvPr id="6" name="Footer Placeholder 5"/>
+          <p:cNvSpPr>
+            <a:spLocks noGrp="1"/>
+          </p:cNvSpPr>
+          <p:nvPr>
+            <p:ph type="ftr" sz="quarter" idx="4"/>
+          </p:nvPr>
+        </p:nvSpPr>
+        <p:spPr>
+          <a:xfrm>
+            <a:off x="0" y="8685213"/>
+            <a:ext cx="2971800" cy="457200"/>
+          </a:xfrm>
+          <a:prstGeom prst="rect">
+            <a:avLst/>
+          </a:prstGeom>
+        </p:spPr>
+        <p:txBody>
+          <a:bodyPr vert="horz" lIns="91440" tIns="45720" rIns="91440" bIns="45720" rtlCol="0" anchor="b"/>
+          <a:lstStyle>
+            <a:lvl1pPr algn="l">
+              <a:defRPr sz="1200"/>
+            </a:lvl1pPr>
+          </a:lstStyle>
+          <a:p>
+            <a:endParaRPr lang="en-US"/>
+          </a:p>
+        </p:txBody>
+      </p:sp>
+      <p:sp>
+        <p:nvSpPr>
+          <p:cNvPr id="7" name="Slide Number Placeholder 6"/>
+          <p:cNvSpPr>
+            <a:spLocks noGrp="1"/>
+          </p:cNvSpPr>
+          <p:nvPr>
+            <p:ph type="sldNum" sz="quarter" idx="5"/>
+          </p:nvPr>
+        </p:nvSpPr>
+        <p:spPr>
+          <a:xfrm>
+            <a:off x="3884613" y="8685213"/>
+            <a:ext cx="2971800" cy="457200"/>
+          </a:xfrm>
+          <a:prstGeom prst="rect">
+            <a:avLst/>
+          </a:prstGeom>
+        </p:spPr>
+        <p:txBody>
+          <a:bodyPr vert="horz" lIns="91440" tIns="45720" rIns="91440" bIns="45720" rtlCol="0" anchor="b"/>
+          <a:lstStyle>
+            <a:lvl1pPr algn="r">
+              <a:defRPr sz="1200"/>
+            </a:lvl1pPr>
+          </a:lstStyle>
+          <a:p>
+            <a:fld id="{BB5E49A5-4136-284D-997B-48E1D791AD67}" type="slidenum">
+              <a:rPr lang="en-US" smtClean="0"/>
+              <a:t>‹#›</a:t>
+            </a:fld>
+            <a:endParaRPr lang="en-US"/>
+          </a:p>
+        </p:txBody>
+      </p:sp>
     </p:spTree>
     <p:extLst>
       <p:ext uri="{BB962C8B-B14F-4D97-AF65-F5344CB8AC3E}">
-        <p14:creationId xmlns:p14="http://schemas.microsoft.com/office/powerpoint/2010/main" val="469468903"/>
+        <p14:creationId xmlns:p14="http://schemas.microsoft.com/office/powerpoint/2010/main" val="2623252185"/>
       </p:ext>
     </p:extLst>
   </p:cSld>
   <p:clrMap bg1="lt1" tx1="dk1" bg2="lt2" tx2="dk2" accent1="accent1" accent2="accent2" accent3="accent3" accent4="accent4" accent5="accent5" accent6="accent6" hlink="hlink" folHlink="folHlink"/>
   <p:notesStyle>
-    <a:lvl1pPr marL="0" algn="l" defTabSz="914400" rtl="0" eaLnBrk="1" latinLnBrk="0" hangingPunct="1">
+    <a:lvl1pPr marL="0" algn="l" defTabSz="457200" rtl="0" eaLnBrk="1" latinLnBrk="0" hangingPunct="1">
       <a:defRPr sz="1200" kern="1200">
         <a:solidFill>
           <a:schemeClr val="tx1"/>
@@ -234,7 +411,7 @@
         <a:cs typeface="+mn-cs"/>
       </a:defRPr>
     </a:lvl1pPr>
-    <a:lvl2pPr marL="457200" algn="l" defTabSz="914400" rtl="0" eaLnBrk="1" latinLnBrk="0" hangingPunct="1">
+    <a:lvl2pPr marL="457200" algn="l" defTabSz="457200" rtl="0" eaLnBrk="1" latinLnBrk="0" hangingPunct="1">
       <a:defRPr sz="1200" kern="1200">
         <a:solidFill>
           <a:schemeClr val="tx1"/>
@@ -244,7 +421,7 @@
         <a:cs typeface="+mn-cs"/>
       </a:defRPr>
     </a:lvl2pPr>
-    <a:lvl3pPr marL="914400" algn="l" defTabSz="914400" rtl="0" eaLnBrk="1" latinLnBrk="0" hangingPunct="1">
+    <a:lvl3pPr marL="914400" algn="l" defTabSz="457200" rtl="0" eaLnBrk="1" latinLnBrk="0" hangingPunct="1">
       <a:defRPr sz="1200" kern="1200">
         <a:solidFill>
           <a:schemeClr val="tx1"/>
@@ -254,7 +431,7 @@
         <a:cs typeface="+mn-cs"/>
       </a:defRPr>
     </a:lvl3pPr>
-    <a:lvl4pPr marL="1371600" algn="l" defTabSz="914400" rtl="0" eaLnBrk="1" latinLnBrk="0" hangingPunct="1">
+    <a:lvl4pPr marL="1371600" algn="l" defTabSz="457200" rtl="0" eaLnBrk="1" latinLnBrk="0" hangingPunct="1">
       <a:defRPr sz="1200" kern="1200">
         <a:solidFill>
           <a:schemeClr val="tx1"/>
@@ -264,7 +441,7 @@
         <a:cs typeface="+mn-cs"/>
       </a:defRPr>
     </a:lvl4pPr>
-    <a:lvl5pPr marL="1828800" algn="l" defTabSz="914400" rtl="0" eaLnBrk="1" latinLnBrk="0" hangingPunct="1">
+    <a:lvl5pPr marL="1828800" algn="l" defTabSz="457200" rtl="0" eaLnBrk="1" latinLnBrk="0" hangingPunct="1">
       <a:defRPr sz="1200" kern="1200">
         <a:solidFill>
           <a:schemeClr val="tx1"/>
@@ -274,7 +451,7 @@
         <a:cs typeface="+mn-cs"/>
       </a:defRPr>
     </a:lvl5pPr>
-    <a:lvl6pPr marL="2286000" algn="l" defTabSz="914400" rtl="0" eaLnBrk="1" latinLnBrk="0" hangingPunct="1">
+    <a:lvl6pPr marL="2286000" algn="l" defTabSz="457200" rtl="0" eaLnBrk="1" latinLnBrk="0" hangingPunct="1">
       <a:defRPr sz="1200" kern="1200">
         <a:solidFill>
           <a:schemeClr val="tx1"/>
@@ -284,7 +461,7 @@
         <a:cs typeface="+mn-cs"/>
       </a:defRPr>
     </a:lvl6pPr>
-    <a:lvl7pPr marL="2743200" algn="l" defTabSz="914400" rtl="0" eaLnBrk="1" latinLnBrk="0" hangingPunct="1">
+    <a:lvl7pPr marL="2743200" algn="l" defTabSz="457200" rtl="0" eaLnBrk="1" latinLnBrk="0" hangingPunct="1">
       <a:defRPr sz="1200" kern="1200">
         <a:solidFill>
           <a:schemeClr val="tx1"/>
@@ -294,7 +471,7 @@
         <a:cs typeface="+mn-cs"/>
       </a:defRPr>
     </a:lvl7pPr>
-    <a:lvl8pPr marL="3200400" algn="l" defTabSz="914400" rtl="0" eaLnBrk="1" latinLnBrk="0" hangingPunct="1">
+    <a:lvl8pPr marL="3200400" algn="l" defTabSz="457200" rtl="0" eaLnBrk="1" latinLnBrk="0" hangingPunct="1">
       <a:defRPr sz="1200" kern="1200">
         <a:solidFill>
           <a:schemeClr val="tx1"/>
@@ -304,7 +481,7 @@
         <a:cs typeface="+mn-cs"/>
       </a:defRPr>
     </a:lvl8pPr>
-    <a:lvl9pPr marL="3657600" algn="l" defTabSz="914400" rtl="0" eaLnBrk="1" latinLnBrk="0" hangingPunct="1">
+    <a:lvl9pPr marL="3657600" algn="l" defTabSz="457200" rtl="0" eaLnBrk="1" latinLnBrk="0" hangingPunct="1">
       <a:defRPr sz="1200" kern="1200">
         <a:solidFill>
           <a:schemeClr val="tx1"/>
@@ -319,7 +496,7 @@
 </file>
 
 <file path=ppt/notesSlides/notesSlide1.xml><?xml version="1.0" encoding="utf-8"?>
-<p:notes xmlns:a="http://schemas.openxmlformats.org/drawingml/2006/main" xmlns:r="http://schemas.openxmlformats.org/officeDocument/2006/relationships" xmlns:p="http://schemas.openxmlformats.org/presentationml/2006/main">
+<p:notes xmlns:a="http://schemas.openxmlformats.org/drawingml/2006/main" xmlns:p="http://schemas.openxmlformats.org/presentationml/2006/main" xmlns:r="http://schemas.openxmlformats.org/officeDocument/2006/relationships">
   <p:cSld>
     <p:spTree>
       <p:nvGrpSpPr>
@@ -339,7 +516,7 @@
         <p:nvSpPr>
           <p:cNvPr id="2" name="Slide Image Placeholder 1"/>
           <p:cNvSpPr>
-            <a:spLocks noGrp="1" noRot="1" noChangeAspect="1"/>
+            <a:spLocks noGrp="1"/>
           </p:cNvSpPr>
           <p:nvPr>
             <p:ph type="sldImg" idx="2"/>
@@ -354,7 +531,7 @@
             <a:spLocks noGrp="1"/>
           </p:cNvSpPr>
           <p:nvPr>
-            <p:ph type="body" sz="quarter" idx="3"/>
+            <p:ph type="body" idx="3" sz="quarter"/>
           </p:nvPr>
         </p:nvSpPr>
         <p:spPr/>
@@ -394,7 +571,7 @@
             <a:spLocks noGrp="1"/>
           </p:cNvSpPr>
           <p:nvPr>
-            <p:ph type="sldNum" sz="quarter" idx="5"/>
+            <p:ph type="sldNum" idx="5" sz="quarter"/>
           </p:nvPr>
         </p:nvSpPr>
         <p:spPr/>
@@ -408,7 +585,7 @@
 </file>
 
 <file path=ppt/notesSlides/notesSlide10.xml><?xml version="1.0" encoding="utf-8"?>
-<p:notes xmlns:a="http://schemas.openxmlformats.org/drawingml/2006/main" xmlns:r="http://schemas.openxmlformats.org/officeDocument/2006/relationships" xmlns:p="http://schemas.openxmlformats.org/presentationml/2006/main">
+<p:notes xmlns:a="http://schemas.openxmlformats.org/drawingml/2006/main" xmlns:p="http://schemas.openxmlformats.org/presentationml/2006/main" xmlns:r="http://schemas.openxmlformats.org/officeDocument/2006/relationships">
   <p:cSld>
     <p:spTree>
       <p:nvGrpSpPr>
@@ -428,7 +605,7 @@
         <p:nvSpPr>
           <p:cNvPr id="2" name="Slide Image Placeholder 1"/>
           <p:cNvSpPr>
-            <a:spLocks noGrp="1" noRot="1" noChangeAspect="1"/>
+            <a:spLocks noGrp="1"/>
           </p:cNvSpPr>
           <p:nvPr>
             <p:ph type="sldImg" idx="2"/>
@@ -443,7 +620,7 @@
             <a:spLocks noGrp="1"/>
           </p:cNvSpPr>
           <p:nvPr>
-            <p:ph type="body" sz="quarter" idx="3"/>
+            <p:ph type="body" idx="3" sz="quarter"/>
           </p:nvPr>
         </p:nvSpPr>
         <p:spPr/>
@@ -491,7 +668,7 @@
             <a:spLocks noGrp="1"/>
           </p:cNvSpPr>
           <p:nvPr>
-            <p:ph type="sldNum" sz="quarter" idx="5"/>
+            <p:ph type="sldNum" idx="5" sz="quarter"/>
           </p:nvPr>
         </p:nvSpPr>
         <p:spPr/>
@@ -505,7 +682,7 @@
 </file>
 
 <file path=ppt/notesSlides/notesSlide11.xml><?xml version="1.0" encoding="utf-8"?>
-<p:notes xmlns:a="http://schemas.openxmlformats.org/drawingml/2006/main" xmlns:r="http://schemas.openxmlformats.org/officeDocument/2006/relationships" xmlns:p="http://schemas.openxmlformats.org/presentationml/2006/main">
+<p:notes xmlns:a="http://schemas.openxmlformats.org/drawingml/2006/main" xmlns:p="http://schemas.openxmlformats.org/presentationml/2006/main" xmlns:r="http://schemas.openxmlformats.org/officeDocument/2006/relationships">
   <p:cSld>
     <p:spTree>
       <p:nvGrpSpPr>
@@ -525,7 +702,7 @@
         <p:nvSpPr>
           <p:cNvPr id="2" name="Slide Image Placeholder 1"/>
           <p:cNvSpPr>
-            <a:spLocks noGrp="1" noRot="1" noChangeAspect="1"/>
+            <a:spLocks noGrp="1"/>
           </p:cNvSpPr>
           <p:nvPr>
             <p:ph type="sldImg" idx="2"/>
@@ -540,7 +717,7 @@
             <a:spLocks noGrp="1"/>
           </p:cNvSpPr>
           <p:nvPr>
-            <p:ph type="body" sz="quarter" idx="3"/>
+            <p:ph type="body" idx="3" sz="quarter"/>
           </p:nvPr>
         </p:nvSpPr>
         <p:spPr/>
@@ -588,7 +765,7 @@
             <a:spLocks noGrp="1"/>
           </p:cNvSpPr>
           <p:nvPr>
-            <p:ph type="sldNum" sz="quarter" idx="5"/>
+            <p:ph type="sldNum" idx="5" sz="quarter"/>
           </p:nvPr>
         </p:nvSpPr>
         <p:spPr/>
@@ -602,7 +779,7 @@
 </file>
 
 <file path=ppt/notesSlides/notesSlide12.xml><?xml version="1.0" encoding="utf-8"?>
-<p:notes xmlns:a="http://schemas.openxmlformats.org/drawingml/2006/main" xmlns:r="http://schemas.openxmlformats.org/officeDocument/2006/relationships" xmlns:p="http://schemas.openxmlformats.org/presentationml/2006/main">
+<p:notes xmlns:a="http://schemas.openxmlformats.org/drawingml/2006/main" xmlns:p="http://schemas.openxmlformats.org/presentationml/2006/main" xmlns:r="http://schemas.openxmlformats.org/officeDocument/2006/relationships">
   <p:cSld>
     <p:spTree>
       <p:nvGrpSpPr>
@@ -622,7 +799,7 @@
         <p:nvSpPr>
           <p:cNvPr id="2" name="Slide Image Placeholder 1"/>
           <p:cNvSpPr>
-            <a:spLocks noGrp="1" noRot="1" noChangeAspect="1"/>
+            <a:spLocks noGrp="1"/>
           </p:cNvSpPr>
           <p:nvPr>
             <p:ph type="sldImg" idx="2"/>
@@ -637,7 +814,7 @@
             <a:spLocks noGrp="1"/>
           </p:cNvSpPr>
           <p:nvPr>
-            <p:ph type="body" sz="quarter" idx="3"/>
+            <p:ph type="body" idx="3" sz="quarter"/>
           </p:nvPr>
         </p:nvSpPr>
         <p:spPr/>
@@ -685,7 +862,7 @@
             <a:spLocks noGrp="1"/>
           </p:cNvSpPr>
           <p:nvPr>
-            <p:ph type="sldNum" sz="quarter" idx="5"/>
+            <p:ph type="sldNum" idx="5" sz="quarter"/>
           </p:nvPr>
         </p:nvSpPr>
         <p:spPr/>
@@ -699,7 +876,7 @@
 </file>
 
 <file path=ppt/notesSlides/notesSlide13.xml><?xml version="1.0" encoding="utf-8"?>
-<p:notes xmlns:a="http://schemas.openxmlformats.org/drawingml/2006/main" xmlns:r="http://schemas.openxmlformats.org/officeDocument/2006/relationships" xmlns:p="http://schemas.openxmlformats.org/presentationml/2006/main">
+<p:notes xmlns:a="http://schemas.openxmlformats.org/drawingml/2006/main" xmlns:p="http://schemas.openxmlformats.org/presentationml/2006/main" xmlns:r="http://schemas.openxmlformats.org/officeDocument/2006/relationships">
   <p:cSld>
     <p:spTree>
       <p:nvGrpSpPr>
@@ -719,7 +896,7 @@
         <p:nvSpPr>
           <p:cNvPr id="2" name="Slide Image Placeholder 1"/>
           <p:cNvSpPr>
-            <a:spLocks noGrp="1" noRot="1" noChangeAspect="1"/>
+            <a:spLocks noGrp="1"/>
           </p:cNvSpPr>
           <p:nvPr>
             <p:ph type="sldImg" idx="2"/>
@@ -734,7 +911,7 @@
             <a:spLocks noGrp="1"/>
           </p:cNvSpPr>
           <p:nvPr>
-            <p:ph type="body" sz="quarter" idx="3"/>
+            <p:ph type="body" idx="3" sz="quarter"/>
           </p:nvPr>
         </p:nvSpPr>
         <p:spPr/>
@@ -766,7 +943,7 @@
             <a:spLocks noGrp="1"/>
           </p:cNvSpPr>
           <p:nvPr>
-            <p:ph type="sldNum" sz="quarter" idx="5"/>
+            <p:ph type="sldNum" idx="5" sz="quarter"/>
           </p:nvPr>
         </p:nvSpPr>
         <p:spPr/>
@@ -780,7 +957,7 @@
 </file>
 
 <file path=ppt/notesSlides/notesSlide14.xml><?xml version="1.0" encoding="utf-8"?>
-<p:notes xmlns:a="http://schemas.openxmlformats.org/drawingml/2006/main" xmlns:r="http://schemas.openxmlformats.org/officeDocument/2006/relationships" xmlns:p="http://schemas.openxmlformats.org/presentationml/2006/main">
+<p:notes xmlns:a="http://schemas.openxmlformats.org/drawingml/2006/main" xmlns:p="http://schemas.openxmlformats.org/presentationml/2006/main" xmlns:r="http://schemas.openxmlformats.org/officeDocument/2006/relationships">
   <p:cSld>
     <p:spTree>
       <p:nvGrpSpPr>
@@ -800,7 +977,7 @@
         <p:nvSpPr>
           <p:cNvPr id="2" name="Slide Image Placeholder 1"/>
           <p:cNvSpPr>
-            <a:spLocks noGrp="1" noRot="1" noChangeAspect="1"/>
+            <a:spLocks noGrp="1"/>
           </p:cNvSpPr>
           <p:nvPr>
             <p:ph type="sldImg" idx="2"/>
@@ -815,7 +992,7 @@
             <a:spLocks noGrp="1"/>
           </p:cNvSpPr>
           <p:nvPr>
-            <p:ph type="body" sz="quarter" idx="3"/>
+            <p:ph type="body" idx="3" sz="quarter"/>
           </p:nvPr>
         </p:nvSpPr>
         <p:spPr/>
@@ -863,7 +1040,7 @@
             <a:spLocks noGrp="1"/>
           </p:cNvSpPr>
           <p:nvPr>
-            <p:ph type="sldNum" sz="quarter" idx="5"/>
+            <p:ph type="sldNum" idx="5" sz="quarter"/>
           </p:nvPr>
         </p:nvSpPr>
         <p:spPr/>
@@ -877,7 +1054,7 @@
 </file>
 
 <file path=ppt/notesSlides/notesSlide15.xml><?xml version="1.0" encoding="utf-8"?>
-<p:notes xmlns:a="http://schemas.openxmlformats.org/drawingml/2006/main" xmlns:r="http://schemas.openxmlformats.org/officeDocument/2006/relationships" xmlns:p="http://schemas.openxmlformats.org/presentationml/2006/main">
+<p:notes xmlns:a="http://schemas.openxmlformats.org/drawingml/2006/main" xmlns:p="http://schemas.openxmlformats.org/presentationml/2006/main" xmlns:r="http://schemas.openxmlformats.org/officeDocument/2006/relationships">
   <p:cSld>
     <p:spTree>
       <p:nvGrpSpPr>
@@ -897,7 +1074,7 @@
         <p:nvSpPr>
           <p:cNvPr id="2" name="Slide Image Placeholder 1"/>
           <p:cNvSpPr>
-            <a:spLocks noGrp="1" noRot="1" noChangeAspect="1"/>
+            <a:spLocks noGrp="1"/>
           </p:cNvSpPr>
           <p:nvPr>
             <p:ph type="sldImg" idx="2"/>
@@ -912,7 +1089,7 @@
             <a:spLocks noGrp="1"/>
           </p:cNvSpPr>
           <p:nvPr>
-            <p:ph type="body" sz="quarter" idx="3"/>
+            <p:ph type="body" idx="3" sz="quarter"/>
           </p:nvPr>
         </p:nvSpPr>
         <p:spPr/>
@@ -936,7 +1113,7 @@
             <a:spLocks noGrp="1"/>
           </p:cNvSpPr>
           <p:nvPr>
-            <p:ph type="sldNum" sz="quarter" idx="5"/>
+            <p:ph type="sldNum" idx="5" sz="quarter"/>
           </p:nvPr>
         </p:nvSpPr>
         <p:spPr/>
@@ -950,7 +1127,7 @@
 </file>
 
 <file path=ppt/notesSlides/notesSlide16.xml><?xml version="1.0" encoding="utf-8"?>
-<p:notes xmlns:a="http://schemas.openxmlformats.org/drawingml/2006/main" xmlns:r="http://schemas.openxmlformats.org/officeDocument/2006/relationships" xmlns:p="http://schemas.openxmlformats.org/presentationml/2006/main">
+<p:notes xmlns:a="http://schemas.openxmlformats.org/drawingml/2006/main" xmlns:p="http://schemas.openxmlformats.org/presentationml/2006/main" xmlns:r="http://schemas.openxmlformats.org/officeDocument/2006/relationships">
   <p:cSld>
     <p:spTree>
       <p:nvGrpSpPr>
@@ -970,7 +1147,7 @@
         <p:nvSpPr>
           <p:cNvPr id="2" name="Slide Image Placeholder 1"/>
           <p:cNvSpPr>
-            <a:spLocks noGrp="1" noRot="1" noChangeAspect="1"/>
+            <a:spLocks noGrp="1"/>
           </p:cNvSpPr>
           <p:nvPr>
             <p:ph type="sldImg" idx="2"/>
@@ -985,7 +1162,7 @@
             <a:spLocks noGrp="1"/>
           </p:cNvSpPr>
           <p:nvPr>
-            <p:ph type="body" sz="quarter" idx="3"/>
+            <p:ph type="body" idx="3" sz="quarter"/>
           </p:nvPr>
         </p:nvSpPr>
         <p:spPr/>
@@ -1033,7 +1210,7 @@
             <a:spLocks noGrp="1"/>
           </p:cNvSpPr>
           <p:nvPr>
-            <p:ph type="sldNum" sz="quarter" idx="5"/>
+            <p:ph type="sldNum" idx="5" sz="quarter"/>
           </p:nvPr>
         </p:nvSpPr>
         <p:spPr/>
@@ -1047,7 +1224,7 @@
 </file>
 
 <file path=ppt/notesSlides/notesSlide17.xml><?xml version="1.0" encoding="utf-8"?>
-<p:notes xmlns:a="http://schemas.openxmlformats.org/drawingml/2006/main" xmlns:r="http://schemas.openxmlformats.org/officeDocument/2006/relationships" xmlns:p="http://schemas.openxmlformats.org/presentationml/2006/main">
+<p:notes xmlns:a="http://schemas.openxmlformats.org/drawingml/2006/main" xmlns:p="http://schemas.openxmlformats.org/presentationml/2006/main" xmlns:r="http://schemas.openxmlformats.org/officeDocument/2006/relationships">
   <p:cSld>
     <p:spTree>
       <p:nvGrpSpPr>
@@ -1067,7 +1244,7 @@
         <p:nvSpPr>
           <p:cNvPr id="2" name="Slide Image Placeholder 1"/>
           <p:cNvSpPr>
-            <a:spLocks noGrp="1" noRot="1" noChangeAspect="1"/>
+            <a:spLocks noGrp="1"/>
           </p:cNvSpPr>
           <p:nvPr>
             <p:ph type="sldImg" idx="2"/>
@@ -1082,7 +1259,7 @@
             <a:spLocks noGrp="1"/>
           </p:cNvSpPr>
           <p:nvPr>
-            <p:ph type="body" sz="quarter" idx="3"/>
+            <p:ph type="body" idx="3" sz="quarter"/>
           </p:nvPr>
         </p:nvSpPr>
         <p:spPr/>
@@ -1114,7 +1291,7 @@
             <a:spLocks noGrp="1"/>
           </p:cNvSpPr>
           <p:nvPr>
-            <p:ph type="sldNum" sz="quarter" idx="5"/>
+            <p:ph type="sldNum" idx="5" sz="quarter"/>
           </p:nvPr>
         </p:nvSpPr>
         <p:spPr/>
@@ -1128,7 +1305,7 @@
 </file>
 
 <file path=ppt/notesSlides/notesSlide18.xml><?xml version="1.0" encoding="utf-8"?>
-<p:notes xmlns:a="http://schemas.openxmlformats.org/drawingml/2006/main" xmlns:r="http://schemas.openxmlformats.org/officeDocument/2006/relationships" xmlns:p="http://schemas.openxmlformats.org/presentationml/2006/main">
+<p:notes xmlns:a="http://schemas.openxmlformats.org/drawingml/2006/main" xmlns:p="http://schemas.openxmlformats.org/presentationml/2006/main" xmlns:r="http://schemas.openxmlformats.org/officeDocument/2006/relationships">
   <p:cSld>
     <p:spTree>
       <p:nvGrpSpPr>
@@ -1148,7 +1325,7 @@
         <p:nvSpPr>
           <p:cNvPr id="2" name="Slide Image Placeholder 1"/>
           <p:cNvSpPr>
-            <a:spLocks noGrp="1" noRot="1" noChangeAspect="1"/>
+            <a:spLocks noGrp="1"/>
           </p:cNvSpPr>
           <p:nvPr>
             <p:ph type="sldImg" idx="2"/>
@@ -1163,7 +1340,7 @@
             <a:spLocks noGrp="1"/>
           </p:cNvSpPr>
           <p:nvPr>
-            <p:ph type="body" sz="quarter" idx="3"/>
+            <p:ph type="body" idx="3" sz="quarter"/>
           </p:nvPr>
         </p:nvSpPr>
         <p:spPr/>
@@ -1195,7 +1372,7 @@
             <a:spLocks noGrp="1"/>
           </p:cNvSpPr>
           <p:nvPr>
-            <p:ph type="sldNum" sz="quarter" idx="5"/>
+            <p:ph type="sldNum" idx="5" sz="quarter"/>
           </p:nvPr>
         </p:nvSpPr>
         <p:spPr/>
@@ -1209,7 +1386,7 @@
 </file>
 
 <file path=ppt/notesSlides/notesSlide19.xml><?xml version="1.0" encoding="utf-8"?>
-<p:notes xmlns:a="http://schemas.openxmlformats.org/drawingml/2006/main" xmlns:r="http://schemas.openxmlformats.org/officeDocument/2006/relationships" xmlns:p="http://schemas.openxmlformats.org/presentationml/2006/main">
+<p:notes xmlns:a="http://schemas.openxmlformats.org/drawingml/2006/main" xmlns:p="http://schemas.openxmlformats.org/presentationml/2006/main" xmlns:r="http://schemas.openxmlformats.org/officeDocument/2006/relationships">
   <p:cSld>
     <p:spTree>
       <p:nvGrpSpPr>
@@ -1229,7 +1406,7 @@
         <p:nvSpPr>
           <p:cNvPr id="2" name="Slide Image Placeholder 1"/>
           <p:cNvSpPr>
-            <a:spLocks noGrp="1" noRot="1" noChangeAspect="1"/>
+            <a:spLocks noGrp="1"/>
           </p:cNvSpPr>
           <p:nvPr>
             <p:ph type="sldImg" idx="2"/>
@@ -1244,7 +1421,7 @@
             <a:spLocks noGrp="1"/>
           </p:cNvSpPr>
           <p:nvPr>
-            <p:ph type="body" sz="quarter" idx="3"/>
+            <p:ph type="body" idx="3" sz="quarter"/>
           </p:nvPr>
         </p:nvSpPr>
         <p:spPr/>
@@ -1292,7 +1469,7 @@
             <a:spLocks noGrp="1"/>
           </p:cNvSpPr>
           <p:nvPr>
-            <p:ph type="sldNum" sz="quarter" idx="5"/>
+            <p:ph type="sldNum" idx="5" sz="quarter"/>
           </p:nvPr>
         </p:nvSpPr>
         <p:spPr/>
@@ -1306,7 +1483,7 @@
 </file>
 
 <file path=ppt/notesSlides/notesSlide2.xml><?xml version="1.0" encoding="utf-8"?>
-<p:notes xmlns:a="http://schemas.openxmlformats.org/drawingml/2006/main" xmlns:r="http://schemas.openxmlformats.org/officeDocument/2006/relationships" xmlns:p="http://schemas.openxmlformats.org/presentationml/2006/main">
+<p:notes xmlns:a="http://schemas.openxmlformats.org/drawingml/2006/main" xmlns:p="http://schemas.openxmlformats.org/presentationml/2006/main" xmlns:r="http://schemas.openxmlformats.org/officeDocument/2006/relationships">
   <p:cSld>
     <p:spTree>
       <p:nvGrpSpPr>
@@ -1326,7 +1503,7 @@
         <p:nvSpPr>
           <p:cNvPr id="2" name="Slide Image Placeholder 1"/>
           <p:cNvSpPr>
-            <a:spLocks noGrp="1" noRot="1" noChangeAspect="1"/>
+            <a:spLocks noGrp="1"/>
           </p:cNvSpPr>
           <p:nvPr>
             <p:ph type="sldImg" idx="2"/>
@@ -1341,7 +1518,7 @@
             <a:spLocks noGrp="1"/>
           </p:cNvSpPr>
           <p:nvPr>
-            <p:ph type="body" sz="quarter" idx="3"/>
+            <p:ph type="body" idx="3" sz="quarter"/>
           </p:nvPr>
         </p:nvSpPr>
         <p:spPr/>
@@ -1373,7 +1550,7 @@
             <a:spLocks noGrp="1"/>
           </p:cNvSpPr>
           <p:nvPr>
-            <p:ph type="sldNum" sz="quarter" idx="5"/>
+            <p:ph type="sldNum" idx="5" sz="quarter"/>
           </p:nvPr>
         </p:nvSpPr>
         <p:spPr/>
@@ -1387,7 +1564,7 @@
 </file>
 
 <file path=ppt/notesSlides/notesSlide20.xml><?xml version="1.0" encoding="utf-8"?>
-<p:notes xmlns:a="http://schemas.openxmlformats.org/drawingml/2006/main" xmlns:r="http://schemas.openxmlformats.org/officeDocument/2006/relationships" xmlns:p="http://schemas.openxmlformats.org/presentationml/2006/main">
+<p:notes xmlns:a="http://schemas.openxmlformats.org/drawingml/2006/main" xmlns:p="http://schemas.openxmlformats.org/presentationml/2006/main" xmlns:r="http://schemas.openxmlformats.org/officeDocument/2006/relationships">
   <p:cSld>
     <p:spTree>
       <p:nvGrpSpPr>
@@ -1407,7 +1584,7 @@
         <p:nvSpPr>
           <p:cNvPr id="2" name="Slide Image Placeholder 1"/>
           <p:cNvSpPr>
-            <a:spLocks noGrp="1" noRot="1" noChangeAspect="1"/>
+            <a:spLocks noGrp="1"/>
           </p:cNvSpPr>
           <p:nvPr>
             <p:ph type="sldImg" idx="2"/>
@@ -1422,7 +1599,7 @@
             <a:spLocks noGrp="1"/>
           </p:cNvSpPr>
           <p:nvPr>
-            <p:ph type="body" sz="quarter" idx="3"/>
+            <p:ph type="body" idx="3" sz="quarter"/>
           </p:nvPr>
         </p:nvSpPr>
         <p:spPr/>
@@ -1454,7 +1631,7 @@
             <a:spLocks noGrp="1"/>
           </p:cNvSpPr>
           <p:nvPr>
-            <p:ph type="sldNum" sz="quarter" idx="5"/>
+            <p:ph type="sldNum" idx="5" sz="quarter"/>
           </p:nvPr>
         </p:nvSpPr>
         <p:spPr/>
@@ -1468,7 +1645,7 @@
 </file>
 
 <file path=ppt/notesSlides/notesSlide21.xml><?xml version="1.0" encoding="utf-8"?>
-<p:notes xmlns:a="http://schemas.openxmlformats.org/drawingml/2006/main" xmlns:r="http://schemas.openxmlformats.org/officeDocument/2006/relationships" xmlns:p="http://schemas.openxmlformats.org/presentationml/2006/main">
+<p:notes xmlns:a="http://schemas.openxmlformats.org/drawingml/2006/main" xmlns:p="http://schemas.openxmlformats.org/presentationml/2006/main" xmlns:r="http://schemas.openxmlformats.org/officeDocument/2006/relationships">
   <p:cSld>
     <p:spTree>
       <p:nvGrpSpPr>
@@ -1488,7 +1665,7 @@
         <p:nvSpPr>
           <p:cNvPr id="2" name="Slide Image Placeholder 1"/>
           <p:cNvSpPr>
-            <a:spLocks noGrp="1" noRot="1" noChangeAspect="1"/>
+            <a:spLocks noGrp="1"/>
           </p:cNvSpPr>
           <p:nvPr>
             <p:ph type="sldImg" idx="2"/>
@@ -1503,7 +1680,7 @@
             <a:spLocks noGrp="1"/>
           </p:cNvSpPr>
           <p:nvPr>
-            <p:ph type="body" sz="quarter" idx="3"/>
+            <p:ph type="body" idx="3" sz="quarter"/>
           </p:nvPr>
         </p:nvSpPr>
         <p:spPr/>
@@ -1551,7 +1728,7 @@
             <a:spLocks noGrp="1"/>
           </p:cNvSpPr>
           <p:nvPr>
-            <p:ph type="sldNum" sz="quarter" idx="5"/>
+            <p:ph type="sldNum" idx="5" sz="quarter"/>
           </p:nvPr>
         </p:nvSpPr>
         <p:spPr/>
@@ -1565,7 +1742,7 @@
 </file>
 
 <file path=ppt/notesSlides/notesSlide22.xml><?xml version="1.0" encoding="utf-8"?>
-<p:notes xmlns:a="http://schemas.openxmlformats.org/drawingml/2006/main" xmlns:r="http://schemas.openxmlformats.org/officeDocument/2006/relationships" xmlns:p="http://schemas.openxmlformats.org/presentationml/2006/main">
+<p:notes xmlns:a="http://schemas.openxmlformats.org/drawingml/2006/main" xmlns:p="http://schemas.openxmlformats.org/presentationml/2006/main" xmlns:r="http://schemas.openxmlformats.org/officeDocument/2006/relationships">
   <p:cSld>
     <p:spTree>
       <p:nvGrpSpPr>
@@ -1585,7 +1762,7 @@
         <p:nvSpPr>
           <p:cNvPr id="2" name="Slide Image Placeholder 1"/>
           <p:cNvSpPr>
-            <a:spLocks noGrp="1" noRot="1" noChangeAspect="1"/>
+            <a:spLocks noGrp="1"/>
           </p:cNvSpPr>
           <p:nvPr>
             <p:ph type="sldImg" idx="2"/>
@@ -1600,7 +1777,7 @@
             <a:spLocks noGrp="1"/>
           </p:cNvSpPr>
           <p:nvPr>
-            <p:ph type="body" sz="quarter" idx="3"/>
+            <p:ph type="body" idx="3" sz="quarter"/>
           </p:nvPr>
         </p:nvSpPr>
         <p:spPr/>
@@ -1632,7 +1809,7 @@
             <a:spLocks noGrp="1"/>
           </p:cNvSpPr>
           <p:nvPr>
-            <p:ph type="sldNum" sz="quarter" idx="5"/>
+            <p:ph type="sldNum" idx="5" sz="quarter"/>
           </p:nvPr>
         </p:nvSpPr>
         <p:spPr/>
@@ -1646,7 +1823,7 @@
 </file>
 
 <file path=ppt/notesSlides/notesSlide23.xml><?xml version="1.0" encoding="utf-8"?>
-<p:notes xmlns:a="http://schemas.openxmlformats.org/drawingml/2006/main" xmlns:r="http://schemas.openxmlformats.org/officeDocument/2006/relationships" xmlns:p="http://schemas.openxmlformats.org/presentationml/2006/main">
+<p:notes xmlns:a="http://schemas.openxmlformats.org/drawingml/2006/main" xmlns:p="http://schemas.openxmlformats.org/presentationml/2006/main" xmlns:r="http://schemas.openxmlformats.org/officeDocument/2006/relationships">
   <p:cSld>
     <p:spTree>
       <p:nvGrpSpPr>
@@ -1666,7 +1843,7 @@
         <p:nvSpPr>
           <p:cNvPr id="2" name="Slide Image Placeholder 1"/>
           <p:cNvSpPr>
-            <a:spLocks noGrp="1" noRot="1" noChangeAspect="1"/>
+            <a:spLocks noGrp="1"/>
           </p:cNvSpPr>
           <p:nvPr>
             <p:ph type="sldImg" idx="2"/>
@@ -1681,7 +1858,7 @@
             <a:spLocks noGrp="1"/>
           </p:cNvSpPr>
           <p:nvPr>
-            <p:ph type="body" sz="quarter" idx="3"/>
+            <p:ph type="body" idx="3" sz="quarter"/>
           </p:nvPr>
         </p:nvSpPr>
         <p:spPr/>
@@ -1713,7 +1890,7 @@
             <a:spLocks noGrp="1"/>
           </p:cNvSpPr>
           <p:nvPr>
-            <p:ph type="sldNum" sz="quarter" idx="5"/>
+            <p:ph type="sldNum" idx="5" sz="quarter"/>
           </p:nvPr>
         </p:nvSpPr>
         <p:spPr/>
@@ -1727,7 +1904,7 @@
 </file>
 
 <file path=ppt/notesSlides/notesSlide24.xml><?xml version="1.0" encoding="utf-8"?>
-<p:notes xmlns:a="http://schemas.openxmlformats.org/drawingml/2006/main" xmlns:r="http://schemas.openxmlformats.org/officeDocument/2006/relationships" xmlns:p="http://schemas.openxmlformats.org/presentationml/2006/main">
+<p:notes xmlns:a="http://schemas.openxmlformats.org/drawingml/2006/main" xmlns:p="http://schemas.openxmlformats.org/presentationml/2006/main" xmlns:r="http://schemas.openxmlformats.org/officeDocument/2006/relationships">
   <p:cSld>
     <p:spTree>
       <p:nvGrpSpPr>
@@ -1747,7 +1924,7 @@
         <p:nvSpPr>
           <p:cNvPr id="2" name="Slide Image Placeholder 1"/>
           <p:cNvSpPr>
-            <a:spLocks noGrp="1" noRot="1" noChangeAspect="1"/>
+            <a:spLocks noGrp="1"/>
           </p:cNvSpPr>
           <p:nvPr>
             <p:ph type="sldImg" idx="2"/>
@@ -1762,7 +1939,7 @@
             <a:spLocks noGrp="1"/>
           </p:cNvSpPr>
           <p:nvPr>
-            <p:ph type="body" sz="quarter" idx="3"/>
+            <p:ph type="body" idx="3" sz="quarter"/>
           </p:nvPr>
         </p:nvSpPr>
         <p:spPr/>
@@ -1810,7 +1987,7 @@
             <a:spLocks noGrp="1"/>
           </p:cNvSpPr>
           <p:nvPr>
-            <p:ph type="sldNum" sz="quarter" idx="5"/>
+            <p:ph type="sldNum" idx="5" sz="quarter"/>
           </p:nvPr>
         </p:nvSpPr>
         <p:spPr/>
@@ -1824,7 +2001,7 @@
 </file>
 
 <file path=ppt/notesSlides/notesSlide25.xml><?xml version="1.0" encoding="utf-8"?>
-<p:notes xmlns:a="http://schemas.openxmlformats.org/drawingml/2006/main" xmlns:r="http://schemas.openxmlformats.org/officeDocument/2006/relationships" xmlns:p="http://schemas.openxmlformats.org/presentationml/2006/main">
+<p:notes xmlns:a="http://schemas.openxmlformats.org/drawingml/2006/main" xmlns:p="http://schemas.openxmlformats.org/presentationml/2006/main" xmlns:r="http://schemas.openxmlformats.org/officeDocument/2006/relationships">
   <p:cSld>
     <p:spTree>
       <p:nvGrpSpPr>
@@ -1844,7 +2021,7 @@
         <p:nvSpPr>
           <p:cNvPr id="2" name="Slide Image Placeholder 1"/>
           <p:cNvSpPr>
-            <a:spLocks noGrp="1" noRot="1" noChangeAspect="1"/>
+            <a:spLocks noGrp="1"/>
           </p:cNvSpPr>
           <p:nvPr>
             <p:ph type="sldImg" idx="2"/>
@@ -1859,7 +2036,7 @@
             <a:spLocks noGrp="1"/>
           </p:cNvSpPr>
           <p:nvPr>
-            <p:ph type="body" sz="quarter" idx="3"/>
+            <p:ph type="body" idx="3" sz="quarter"/>
           </p:nvPr>
         </p:nvSpPr>
         <p:spPr/>
@@ -1899,7 +2076,7 @@
             <a:spLocks noGrp="1"/>
           </p:cNvSpPr>
           <p:nvPr>
-            <p:ph type="sldNum" sz="quarter" idx="5"/>
+            <p:ph type="sldNum" idx="5" sz="quarter"/>
           </p:nvPr>
         </p:nvSpPr>
         <p:spPr/>
@@ -1913,7 +2090,7 @@
 </file>
 
 <file path=ppt/notesSlides/notesSlide26.xml><?xml version="1.0" encoding="utf-8"?>
-<p:notes xmlns:a="http://schemas.openxmlformats.org/drawingml/2006/main" xmlns:r="http://schemas.openxmlformats.org/officeDocument/2006/relationships" xmlns:p="http://schemas.openxmlformats.org/presentationml/2006/main">
+<p:notes xmlns:a="http://schemas.openxmlformats.org/drawingml/2006/main" xmlns:p="http://schemas.openxmlformats.org/presentationml/2006/main" xmlns:r="http://schemas.openxmlformats.org/officeDocument/2006/relationships">
   <p:cSld>
     <p:spTree>
       <p:nvGrpSpPr>
@@ -1933,7 +2110,7 @@
         <p:nvSpPr>
           <p:cNvPr id="2" name="Slide Image Placeholder 1"/>
           <p:cNvSpPr>
-            <a:spLocks noGrp="1" noRot="1" noChangeAspect="1"/>
+            <a:spLocks noGrp="1"/>
           </p:cNvSpPr>
           <p:nvPr>
             <p:ph type="sldImg" idx="2"/>
@@ -1948,7 +2125,7 @@
             <a:spLocks noGrp="1"/>
           </p:cNvSpPr>
           <p:nvPr>
-            <p:ph type="body" sz="quarter" idx="3"/>
+            <p:ph type="body" idx="3" sz="quarter"/>
           </p:nvPr>
         </p:nvSpPr>
         <p:spPr/>
@@ -1996,7 +2173,7 @@
             <a:spLocks noGrp="1"/>
           </p:cNvSpPr>
           <p:nvPr>
-            <p:ph type="sldNum" sz="quarter" idx="5"/>
+            <p:ph type="sldNum" idx="5" sz="quarter"/>
           </p:nvPr>
         </p:nvSpPr>
         <p:spPr/>
@@ -2010,7 +2187,7 @@
 </file>
 
 <file path=ppt/notesSlides/notesSlide27.xml><?xml version="1.0" encoding="utf-8"?>
-<p:notes xmlns:a="http://schemas.openxmlformats.org/drawingml/2006/main" xmlns:r="http://schemas.openxmlformats.org/officeDocument/2006/relationships" xmlns:p="http://schemas.openxmlformats.org/presentationml/2006/main">
+<p:notes xmlns:a="http://schemas.openxmlformats.org/drawingml/2006/main" xmlns:p="http://schemas.openxmlformats.org/presentationml/2006/main" xmlns:r="http://schemas.openxmlformats.org/officeDocument/2006/relationships">
   <p:cSld>
     <p:spTree>
       <p:nvGrpSpPr>
@@ -2030,7 +2207,7 @@
         <p:nvSpPr>
           <p:cNvPr id="2" name="Slide Image Placeholder 1"/>
           <p:cNvSpPr>
-            <a:spLocks noGrp="1" noRot="1" noChangeAspect="1"/>
+            <a:spLocks noGrp="1"/>
           </p:cNvSpPr>
           <p:nvPr>
             <p:ph type="sldImg" idx="2"/>
@@ -2045,7 +2222,7 @@
             <a:spLocks noGrp="1"/>
           </p:cNvSpPr>
           <p:nvPr>
-            <p:ph type="body" sz="quarter" idx="3"/>
+            <p:ph type="body" idx="3" sz="quarter"/>
           </p:nvPr>
         </p:nvSpPr>
         <p:spPr/>
@@ -2093,7 +2270,7 @@
             <a:spLocks noGrp="1"/>
           </p:cNvSpPr>
           <p:nvPr>
-            <p:ph type="sldNum" sz="quarter" idx="5"/>
+            <p:ph type="sldNum" idx="5" sz="quarter"/>
           </p:nvPr>
         </p:nvSpPr>
         <p:spPr/>
@@ -2107,7 +2284,7 @@
 </file>
 
 <file path=ppt/notesSlides/notesSlide28.xml><?xml version="1.0" encoding="utf-8"?>
-<p:notes xmlns:a="http://schemas.openxmlformats.org/drawingml/2006/main" xmlns:r="http://schemas.openxmlformats.org/officeDocument/2006/relationships" xmlns:p="http://schemas.openxmlformats.org/presentationml/2006/main">
+<p:notes xmlns:a="http://schemas.openxmlformats.org/drawingml/2006/main" xmlns:p="http://schemas.openxmlformats.org/presentationml/2006/main" xmlns:r="http://schemas.openxmlformats.org/officeDocument/2006/relationships">
   <p:cSld>
     <p:spTree>
       <p:nvGrpSpPr>
@@ -2127,7 +2304,7 @@
         <p:nvSpPr>
           <p:cNvPr id="2" name="Slide Image Placeholder 1"/>
           <p:cNvSpPr>
-            <a:spLocks noGrp="1" noRot="1" noChangeAspect="1"/>
+            <a:spLocks noGrp="1"/>
           </p:cNvSpPr>
           <p:nvPr>
             <p:ph type="sldImg" idx="2"/>
@@ -2142,7 +2319,7 @@
             <a:spLocks noGrp="1"/>
           </p:cNvSpPr>
           <p:nvPr>
-            <p:ph type="body" sz="quarter" idx="3"/>
+            <p:ph type="body" idx="3" sz="quarter"/>
           </p:nvPr>
         </p:nvSpPr>
         <p:spPr/>
@@ -2206,7 +2383,7 @@
             <a:spLocks noGrp="1"/>
           </p:cNvSpPr>
           <p:nvPr>
-            <p:ph type="sldNum" sz="quarter" idx="5"/>
+            <p:ph type="sldNum" idx="5" sz="quarter"/>
           </p:nvPr>
         </p:nvSpPr>
         <p:spPr/>
@@ -2220,7 +2397,7 @@
 </file>
 
 <file path=ppt/notesSlides/notesSlide29.xml><?xml version="1.0" encoding="utf-8"?>
-<p:notes xmlns:a="http://schemas.openxmlformats.org/drawingml/2006/main" xmlns:r="http://schemas.openxmlformats.org/officeDocument/2006/relationships" xmlns:p="http://schemas.openxmlformats.org/presentationml/2006/main">
+<p:notes xmlns:a="http://schemas.openxmlformats.org/drawingml/2006/main" xmlns:p="http://schemas.openxmlformats.org/presentationml/2006/main" xmlns:r="http://schemas.openxmlformats.org/officeDocument/2006/relationships">
   <p:cSld>
     <p:spTree>
       <p:nvGrpSpPr>
@@ -2240,7 +2417,7 @@
         <p:nvSpPr>
           <p:cNvPr id="2" name="Slide Image Placeholder 1"/>
           <p:cNvSpPr>
-            <a:spLocks noGrp="1" noRot="1" noChangeAspect="1"/>
+            <a:spLocks noGrp="1"/>
           </p:cNvSpPr>
           <p:nvPr>
             <p:ph type="sldImg" idx="2"/>
@@ -2255,7 +2432,7 @@
             <a:spLocks noGrp="1"/>
           </p:cNvSpPr>
           <p:nvPr>
-            <p:ph type="body" sz="quarter" idx="3"/>
+            <p:ph type="body" idx="3" sz="quarter"/>
           </p:nvPr>
         </p:nvSpPr>
         <p:spPr/>
@@ -2311,7 +2488,7 @@
             <a:spLocks noGrp="1"/>
           </p:cNvSpPr>
           <p:nvPr>
-            <p:ph type="sldNum" sz="quarter" idx="5"/>
+            <p:ph type="sldNum" idx="5" sz="quarter"/>
           </p:nvPr>
         </p:nvSpPr>
         <p:spPr/>
@@ -2325,7 +2502,7 @@
 </file>
 
 <file path=ppt/notesSlides/notesSlide3.xml><?xml version="1.0" encoding="utf-8"?>
-<p:notes xmlns:a="http://schemas.openxmlformats.org/drawingml/2006/main" xmlns:r="http://schemas.openxmlformats.org/officeDocument/2006/relationships" xmlns:p="http://schemas.openxmlformats.org/presentationml/2006/main">
+<p:notes xmlns:a="http://schemas.openxmlformats.org/drawingml/2006/main" xmlns:p="http://schemas.openxmlformats.org/presentationml/2006/main" xmlns:r="http://schemas.openxmlformats.org/officeDocument/2006/relationships">
   <p:cSld>
     <p:spTree>
       <p:nvGrpSpPr>
@@ -2345,7 +2522,7 @@
         <p:nvSpPr>
           <p:cNvPr id="2" name="Slide Image Placeholder 1"/>
           <p:cNvSpPr>
-            <a:spLocks noGrp="1" noRot="1" noChangeAspect="1"/>
+            <a:spLocks noGrp="1"/>
           </p:cNvSpPr>
           <p:nvPr>
             <p:ph type="sldImg" idx="2"/>
@@ -2360,7 +2537,7 @@
             <a:spLocks noGrp="1"/>
           </p:cNvSpPr>
           <p:nvPr>
-            <p:ph type="body" sz="quarter" idx="3"/>
+            <p:ph type="body" idx="3" sz="quarter"/>
           </p:nvPr>
         </p:nvSpPr>
         <p:spPr/>
@@ -2392,7 +2569,7 @@
             <a:spLocks noGrp="1"/>
           </p:cNvSpPr>
           <p:nvPr>
-            <p:ph type="sldNum" sz="quarter" idx="5"/>
+            <p:ph type="sldNum" idx="5" sz="quarter"/>
           </p:nvPr>
         </p:nvSpPr>
         <p:spPr/>
@@ -2406,7 +2583,7 @@
 </file>
 
 <file path=ppt/notesSlides/notesSlide30.xml><?xml version="1.0" encoding="utf-8"?>
-<p:notes xmlns:a="http://schemas.openxmlformats.org/drawingml/2006/main" xmlns:r="http://schemas.openxmlformats.org/officeDocument/2006/relationships" xmlns:p="http://schemas.openxmlformats.org/presentationml/2006/main">
+<p:notes xmlns:a="http://schemas.openxmlformats.org/drawingml/2006/main" xmlns:p="http://schemas.openxmlformats.org/presentationml/2006/main" xmlns:r="http://schemas.openxmlformats.org/officeDocument/2006/relationships">
   <p:cSld>
     <p:spTree>
       <p:nvGrpSpPr>
@@ -2426,7 +2603,7 @@
         <p:nvSpPr>
           <p:cNvPr id="2" name="Slide Image Placeholder 1"/>
           <p:cNvSpPr>
-            <a:spLocks noGrp="1" noRot="1" noChangeAspect="1"/>
+            <a:spLocks noGrp="1"/>
           </p:cNvSpPr>
           <p:nvPr>
             <p:ph type="sldImg" idx="2"/>
@@ -2441,7 +2618,7 @@
             <a:spLocks noGrp="1"/>
           </p:cNvSpPr>
           <p:nvPr>
-            <p:ph type="body" sz="quarter" idx="3"/>
+            <p:ph type="body" idx="3" sz="quarter"/>
           </p:nvPr>
         </p:nvSpPr>
         <p:spPr/>
@@ -2489,7 +2666,7 @@
             <a:spLocks noGrp="1"/>
           </p:cNvSpPr>
           <p:nvPr>
-            <p:ph type="sldNum" sz="quarter" idx="5"/>
+            <p:ph type="sldNum" idx="5" sz="quarter"/>
           </p:nvPr>
         </p:nvSpPr>
         <p:spPr/>
@@ -2503,7 +2680,7 @@
 </file>
 
 <file path=ppt/notesSlides/notesSlide31.xml><?xml version="1.0" encoding="utf-8"?>
-<p:notes xmlns:a="http://schemas.openxmlformats.org/drawingml/2006/main" xmlns:r="http://schemas.openxmlformats.org/officeDocument/2006/relationships" xmlns:p="http://schemas.openxmlformats.org/presentationml/2006/main">
+<p:notes xmlns:a="http://schemas.openxmlformats.org/drawingml/2006/main" xmlns:p="http://schemas.openxmlformats.org/presentationml/2006/main" xmlns:r="http://schemas.openxmlformats.org/officeDocument/2006/relationships">
   <p:cSld>
     <p:spTree>
       <p:nvGrpSpPr>
@@ -2523,7 +2700,7 @@
         <p:nvSpPr>
           <p:cNvPr id="2" name="Slide Image Placeholder 1"/>
           <p:cNvSpPr>
-            <a:spLocks noGrp="1" noRot="1" noChangeAspect="1"/>
+            <a:spLocks noGrp="1"/>
           </p:cNvSpPr>
           <p:nvPr>
             <p:ph type="sldImg" idx="2"/>
@@ -2538,7 +2715,7 @@
             <a:spLocks noGrp="1"/>
           </p:cNvSpPr>
           <p:nvPr>
-            <p:ph type="body" sz="quarter" idx="3"/>
+            <p:ph type="body" idx="3" sz="quarter"/>
           </p:nvPr>
         </p:nvSpPr>
         <p:spPr/>
@@ -2586,7 +2763,7 @@
             <a:spLocks noGrp="1"/>
           </p:cNvSpPr>
           <p:nvPr>
-            <p:ph type="sldNum" sz="quarter" idx="5"/>
+            <p:ph type="sldNum" idx="5" sz="quarter"/>
           </p:nvPr>
         </p:nvSpPr>
         <p:spPr/>
@@ -2600,7 +2777,7 @@
 </file>
 
 <file path=ppt/notesSlides/notesSlide32.xml><?xml version="1.0" encoding="utf-8"?>
-<p:notes xmlns:a="http://schemas.openxmlformats.org/drawingml/2006/main" xmlns:r="http://schemas.openxmlformats.org/officeDocument/2006/relationships" xmlns:p="http://schemas.openxmlformats.org/presentationml/2006/main">
+<p:notes xmlns:a="http://schemas.openxmlformats.org/drawingml/2006/main" xmlns:p="http://schemas.openxmlformats.org/presentationml/2006/main" xmlns:r="http://schemas.openxmlformats.org/officeDocument/2006/relationships">
   <p:cSld>
     <p:spTree>
       <p:nvGrpSpPr>
@@ -2620,7 +2797,7 @@
         <p:nvSpPr>
           <p:cNvPr id="2" name="Slide Image Placeholder 1"/>
           <p:cNvSpPr>
-            <a:spLocks noGrp="1" noRot="1" noChangeAspect="1"/>
+            <a:spLocks noGrp="1"/>
           </p:cNvSpPr>
           <p:nvPr>
             <p:ph type="sldImg" idx="2"/>
@@ -2635,7 +2812,7 @@
             <a:spLocks noGrp="1"/>
           </p:cNvSpPr>
           <p:nvPr>
-            <p:ph type="body" sz="quarter" idx="3"/>
+            <p:ph type="body" idx="3" sz="quarter"/>
           </p:nvPr>
         </p:nvSpPr>
         <p:spPr/>
@@ -2683,7 +2860,7 @@
             <a:spLocks noGrp="1"/>
           </p:cNvSpPr>
           <p:nvPr>
-            <p:ph type="sldNum" sz="quarter" idx="5"/>
+            <p:ph type="sldNum" idx="5" sz="quarter"/>
           </p:nvPr>
         </p:nvSpPr>
         <p:spPr/>
@@ -2697,7 +2874,7 @@
 </file>
 
 <file path=ppt/notesSlides/notesSlide33.xml><?xml version="1.0" encoding="utf-8"?>
-<p:notes xmlns:a="http://schemas.openxmlformats.org/drawingml/2006/main" xmlns:r="http://schemas.openxmlformats.org/officeDocument/2006/relationships" xmlns:p="http://schemas.openxmlformats.org/presentationml/2006/main">
+<p:notes xmlns:a="http://schemas.openxmlformats.org/drawingml/2006/main" xmlns:p="http://schemas.openxmlformats.org/presentationml/2006/main" xmlns:r="http://schemas.openxmlformats.org/officeDocument/2006/relationships">
   <p:cSld>
     <p:spTree>
       <p:nvGrpSpPr>
@@ -2717,7 +2894,7 @@
         <p:nvSpPr>
           <p:cNvPr id="2" name="Slide Image Placeholder 1"/>
           <p:cNvSpPr>
-            <a:spLocks noGrp="1" noRot="1" noChangeAspect="1"/>
+            <a:spLocks noGrp="1"/>
           </p:cNvSpPr>
           <p:nvPr>
             <p:ph type="sldImg" idx="2"/>
@@ -2732,7 +2909,7 @@
             <a:spLocks noGrp="1"/>
           </p:cNvSpPr>
           <p:nvPr>
-            <p:ph type="body" sz="quarter" idx="3"/>
+            <p:ph type="body" idx="3" sz="quarter"/>
           </p:nvPr>
         </p:nvSpPr>
         <p:spPr/>
@@ -2780,7 +2957,7 @@
             <a:spLocks noGrp="1"/>
           </p:cNvSpPr>
           <p:nvPr>
-            <p:ph type="sldNum" sz="quarter" idx="5"/>
+            <p:ph type="sldNum" idx="5" sz="quarter"/>
           </p:nvPr>
         </p:nvSpPr>
         <p:spPr/>
@@ -2794,7 +2971,7 @@
 </file>
 
 <file path=ppt/notesSlides/notesSlide34.xml><?xml version="1.0" encoding="utf-8"?>
-<p:notes xmlns:a="http://schemas.openxmlformats.org/drawingml/2006/main" xmlns:r="http://schemas.openxmlformats.org/officeDocument/2006/relationships" xmlns:p="http://schemas.openxmlformats.org/presentationml/2006/main">
+<p:notes xmlns:a="http://schemas.openxmlformats.org/drawingml/2006/main" xmlns:p="http://schemas.openxmlformats.org/presentationml/2006/main" xmlns:r="http://schemas.openxmlformats.org/officeDocument/2006/relationships">
   <p:cSld>
     <p:spTree>
       <p:nvGrpSpPr>
@@ -2814,7 +2991,7 @@
         <p:nvSpPr>
           <p:cNvPr id="2" name="Slide Image Placeholder 1"/>
           <p:cNvSpPr>
-            <a:spLocks noGrp="1" noRot="1" noChangeAspect="1"/>
+            <a:spLocks noGrp="1"/>
           </p:cNvSpPr>
           <p:nvPr>
             <p:ph type="sldImg" idx="2"/>
@@ -2829,7 +3006,7 @@
             <a:spLocks noGrp="1"/>
           </p:cNvSpPr>
           <p:nvPr>
-            <p:ph type="body" sz="quarter" idx="3"/>
+            <p:ph type="body" idx="3" sz="quarter"/>
           </p:nvPr>
         </p:nvSpPr>
         <p:spPr/>
@@ -2877,7 +3054,7 @@
             <a:spLocks noGrp="1"/>
           </p:cNvSpPr>
           <p:nvPr>
-            <p:ph type="sldNum" sz="quarter" idx="5"/>
+            <p:ph type="sldNum" idx="5" sz="quarter"/>
           </p:nvPr>
         </p:nvSpPr>
         <p:spPr/>
@@ -2891,7 +3068,7 @@
 </file>
 
 <file path=ppt/notesSlides/notesSlide35.xml><?xml version="1.0" encoding="utf-8"?>
-<p:notes xmlns:a="http://schemas.openxmlformats.org/drawingml/2006/main" xmlns:r="http://schemas.openxmlformats.org/officeDocument/2006/relationships" xmlns:p="http://schemas.openxmlformats.org/presentationml/2006/main">
+<p:notes xmlns:a="http://schemas.openxmlformats.org/drawingml/2006/main" xmlns:p="http://schemas.openxmlformats.org/presentationml/2006/main" xmlns:r="http://schemas.openxmlformats.org/officeDocument/2006/relationships">
   <p:cSld>
     <p:spTree>
       <p:nvGrpSpPr>
@@ -2911,7 +3088,7 @@
         <p:nvSpPr>
           <p:cNvPr id="2" name="Slide Image Placeholder 1"/>
           <p:cNvSpPr>
-            <a:spLocks noGrp="1" noRot="1" noChangeAspect="1"/>
+            <a:spLocks noGrp="1"/>
           </p:cNvSpPr>
           <p:nvPr>
             <p:ph type="sldImg" idx="2"/>
@@ -2926,7 +3103,7 @@
             <a:spLocks noGrp="1"/>
           </p:cNvSpPr>
           <p:nvPr>
-            <p:ph type="body" sz="quarter" idx="3"/>
+            <p:ph type="body" idx="3" sz="quarter"/>
           </p:nvPr>
         </p:nvSpPr>
         <p:spPr/>
@@ -2982,7 +3159,7 @@
             <a:spLocks noGrp="1"/>
           </p:cNvSpPr>
           <p:nvPr>
-            <p:ph type="sldNum" sz="quarter" idx="5"/>
+            <p:ph type="sldNum" idx="5" sz="quarter"/>
           </p:nvPr>
         </p:nvSpPr>
         <p:spPr/>
@@ -2996,7 +3173,7 @@
 </file>
 
 <file path=ppt/notesSlides/notesSlide36.xml><?xml version="1.0" encoding="utf-8"?>
-<p:notes xmlns:a="http://schemas.openxmlformats.org/drawingml/2006/main" xmlns:r="http://schemas.openxmlformats.org/officeDocument/2006/relationships" xmlns:p="http://schemas.openxmlformats.org/presentationml/2006/main">
+<p:notes xmlns:a="http://schemas.openxmlformats.org/drawingml/2006/main" xmlns:p="http://schemas.openxmlformats.org/presentationml/2006/main" xmlns:r="http://schemas.openxmlformats.org/officeDocument/2006/relationships">
   <p:cSld>
     <p:spTree>
       <p:nvGrpSpPr>
@@ -3016,7 +3193,7 @@
         <p:nvSpPr>
           <p:cNvPr id="2" name="Slide Image Placeholder 1"/>
           <p:cNvSpPr>
-            <a:spLocks noGrp="1" noRot="1" noChangeAspect="1"/>
+            <a:spLocks noGrp="1"/>
           </p:cNvSpPr>
           <p:nvPr>
             <p:ph type="sldImg" idx="2"/>
@@ -3031,7 +3208,7 @@
             <a:spLocks noGrp="1"/>
           </p:cNvSpPr>
           <p:nvPr>
-            <p:ph type="body" sz="quarter" idx="3"/>
+            <p:ph type="body" idx="3" sz="quarter"/>
           </p:nvPr>
         </p:nvSpPr>
         <p:spPr/>
@@ -3079,7 +3256,7 @@
             <a:spLocks noGrp="1"/>
           </p:cNvSpPr>
           <p:nvPr>
-            <p:ph type="sldNum" sz="quarter" idx="5"/>
+            <p:ph type="sldNum" idx="5" sz="quarter"/>
           </p:nvPr>
         </p:nvSpPr>
         <p:spPr/>
@@ -3093,7 +3270,7 @@
 </file>
 
 <file path=ppt/notesSlides/notesSlide37.xml><?xml version="1.0" encoding="utf-8"?>
-<p:notes xmlns:a="http://schemas.openxmlformats.org/drawingml/2006/main" xmlns:r="http://schemas.openxmlformats.org/officeDocument/2006/relationships" xmlns:p="http://schemas.openxmlformats.org/presentationml/2006/main">
+<p:notes xmlns:a="http://schemas.openxmlformats.org/drawingml/2006/main" xmlns:p="http://schemas.openxmlformats.org/presentationml/2006/main" xmlns:r="http://schemas.openxmlformats.org/officeDocument/2006/relationships">
   <p:cSld>
     <p:spTree>
       <p:nvGrpSpPr>
@@ -3113,7 +3290,7 @@
         <p:nvSpPr>
           <p:cNvPr id="2" name="Slide Image Placeholder 1"/>
           <p:cNvSpPr>
-            <a:spLocks noGrp="1" noRot="1" noChangeAspect="1"/>
+            <a:spLocks noGrp="1"/>
           </p:cNvSpPr>
           <p:nvPr>
             <p:ph type="sldImg" idx="2"/>
@@ -3128,7 +3305,7 @@
             <a:spLocks noGrp="1"/>
           </p:cNvSpPr>
           <p:nvPr>
-            <p:ph type="body" sz="quarter" idx="3"/>
+            <p:ph type="body" idx="3" sz="quarter"/>
           </p:nvPr>
         </p:nvSpPr>
         <p:spPr/>
@@ -3168,7 +3345,7 @@
             <a:spLocks noGrp="1"/>
           </p:cNvSpPr>
           <p:nvPr>
-            <p:ph type="sldNum" sz="quarter" idx="5"/>
+            <p:ph type="sldNum" idx="5" sz="quarter"/>
           </p:nvPr>
         </p:nvSpPr>
         <p:spPr/>
@@ -3182,7 +3359,7 @@
 </file>
 
 <file path=ppt/notesSlides/notesSlide38.xml><?xml version="1.0" encoding="utf-8"?>
-<p:notes xmlns:a="http://schemas.openxmlformats.org/drawingml/2006/main" xmlns:r="http://schemas.openxmlformats.org/officeDocument/2006/relationships" xmlns:p="http://schemas.openxmlformats.org/presentationml/2006/main">
+<p:notes xmlns:a="http://schemas.openxmlformats.org/drawingml/2006/main" xmlns:p="http://schemas.openxmlformats.org/presentationml/2006/main" xmlns:r="http://schemas.openxmlformats.org/officeDocument/2006/relationships">
   <p:cSld>
     <p:spTree>
       <p:nvGrpSpPr>
@@ -3202,7 +3379,7 @@
         <p:nvSpPr>
           <p:cNvPr id="2" name="Slide Image Placeholder 1"/>
           <p:cNvSpPr>
-            <a:spLocks noGrp="1" noRot="1" noChangeAspect="1"/>
+            <a:spLocks noGrp="1"/>
           </p:cNvSpPr>
           <p:nvPr>
             <p:ph type="sldImg" idx="2"/>
@@ -3217,7 +3394,7 @@
             <a:spLocks noGrp="1"/>
           </p:cNvSpPr>
           <p:nvPr>
-            <p:ph type="body" sz="quarter" idx="3"/>
+            <p:ph type="body" idx="3" sz="quarter"/>
           </p:nvPr>
         </p:nvSpPr>
         <p:spPr/>
@@ -3257,7 +3434,7 @@
             <a:spLocks noGrp="1"/>
           </p:cNvSpPr>
           <p:nvPr>
-            <p:ph type="sldNum" sz="quarter" idx="5"/>
+            <p:ph type="sldNum" idx="5" sz="quarter"/>
           </p:nvPr>
         </p:nvSpPr>
         <p:spPr/>
@@ -3271,7 +3448,7 @@
 </file>
 
 <file path=ppt/notesSlides/notesSlide39.xml><?xml version="1.0" encoding="utf-8"?>
-<p:notes xmlns:a="http://schemas.openxmlformats.org/drawingml/2006/main" xmlns:r="http://schemas.openxmlformats.org/officeDocument/2006/relationships" xmlns:p="http://schemas.openxmlformats.org/presentationml/2006/main">
+<p:notes xmlns:a="http://schemas.openxmlformats.org/drawingml/2006/main" xmlns:p="http://schemas.openxmlformats.org/presentationml/2006/main" xmlns:r="http://schemas.openxmlformats.org/officeDocument/2006/relationships">
   <p:cSld>
     <p:spTree>
       <p:nvGrpSpPr>
@@ -3291,7 +3468,7 @@
         <p:nvSpPr>
           <p:cNvPr id="2" name="Slide Image Placeholder 1"/>
           <p:cNvSpPr>
-            <a:spLocks noGrp="1" noRot="1" noChangeAspect="1"/>
+            <a:spLocks noGrp="1"/>
           </p:cNvSpPr>
           <p:nvPr>
             <p:ph type="sldImg" idx="2"/>
@@ -3306,7 +3483,7 @@
             <a:spLocks noGrp="1"/>
           </p:cNvSpPr>
           <p:nvPr>
-            <p:ph type="body" sz="quarter" idx="3"/>
+            <p:ph type="body" idx="3" sz="quarter"/>
           </p:nvPr>
         </p:nvSpPr>
         <p:spPr/>
@@ -3362,7 +3539,7 @@
             <a:spLocks noGrp="1"/>
           </p:cNvSpPr>
           <p:nvPr>
-            <p:ph type="sldNum" sz="quarter" idx="5"/>
+            <p:ph type="sldNum" idx="5" sz="quarter"/>
           </p:nvPr>
         </p:nvSpPr>
         <p:spPr/>
@@ -3376,7 +3553,7 @@
 </file>
 
 <file path=ppt/notesSlides/notesSlide4.xml><?xml version="1.0" encoding="utf-8"?>
-<p:notes xmlns:a="http://schemas.openxmlformats.org/drawingml/2006/main" xmlns:r="http://schemas.openxmlformats.org/officeDocument/2006/relationships" xmlns:p="http://schemas.openxmlformats.org/presentationml/2006/main">
+<p:notes xmlns:a="http://schemas.openxmlformats.org/drawingml/2006/main" xmlns:p="http://schemas.openxmlformats.org/presentationml/2006/main" xmlns:r="http://schemas.openxmlformats.org/officeDocument/2006/relationships">
   <p:cSld>
     <p:spTree>
       <p:nvGrpSpPr>
@@ -3396,7 +3573,7 @@
         <p:nvSpPr>
           <p:cNvPr id="2" name="Slide Image Placeholder 1"/>
           <p:cNvSpPr>
-            <a:spLocks noGrp="1" noRot="1" noChangeAspect="1"/>
+            <a:spLocks noGrp="1"/>
           </p:cNvSpPr>
           <p:nvPr>
             <p:ph type="sldImg" idx="2"/>
@@ -3411,7 +3588,7 @@
             <a:spLocks noGrp="1"/>
           </p:cNvSpPr>
           <p:nvPr>
-            <p:ph type="body" sz="quarter" idx="3"/>
+            <p:ph type="body" idx="3" sz="quarter"/>
           </p:nvPr>
         </p:nvSpPr>
         <p:spPr/>
@@ -3443,7 +3620,7 @@
             <a:spLocks noGrp="1"/>
           </p:cNvSpPr>
           <p:nvPr>
-            <p:ph type="sldNum" sz="quarter" idx="5"/>
+            <p:ph type="sldNum" idx="5" sz="quarter"/>
           </p:nvPr>
         </p:nvSpPr>
         <p:spPr/>
@@ -3457,7 +3634,7 @@
 </file>
 
 <file path=ppt/notesSlides/notesSlide5.xml><?xml version="1.0" encoding="utf-8"?>
-<p:notes xmlns:a="http://schemas.openxmlformats.org/drawingml/2006/main" xmlns:r="http://schemas.openxmlformats.org/officeDocument/2006/relationships" xmlns:p="http://schemas.openxmlformats.org/presentationml/2006/main">
+<p:notes xmlns:a="http://schemas.openxmlformats.org/drawingml/2006/main" xmlns:p="http://schemas.openxmlformats.org/presentationml/2006/main" xmlns:r="http://schemas.openxmlformats.org/officeDocument/2006/relationships">
   <p:cSld>
     <p:spTree>
       <p:nvGrpSpPr>
@@ -3477,7 +3654,7 @@
         <p:nvSpPr>
           <p:cNvPr id="2" name="Slide Image Placeholder 1"/>
           <p:cNvSpPr>
-            <a:spLocks noGrp="1" noRot="1" noChangeAspect="1"/>
+            <a:spLocks noGrp="1"/>
           </p:cNvSpPr>
           <p:nvPr>
             <p:ph type="sldImg" idx="2"/>
@@ -3492,7 +3669,7 @@
             <a:spLocks noGrp="1"/>
           </p:cNvSpPr>
           <p:nvPr>
-            <p:ph type="body" sz="quarter" idx="3"/>
+            <p:ph type="body" idx="3" sz="quarter"/>
           </p:nvPr>
         </p:nvSpPr>
         <p:spPr/>
@@ -3532,7 +3709,7 @@
             <a:spLocks noGrp="1"/>
           </p:cNvSpPr>
           <p:nvPr>
-            <p:ph type="sldNum" sz="quarter" idx="5"/>
+            <p:ph type="sldNum" idx="5" sz="quarter"/>
           </p:nvPr>
         </p:nvSpPr>
         <p:spPr/>
@@ -3546,7 +3723,7 @@
 </file>
 
 <file path=ppt/notesSlides/notesSlide6.xml><?xml version="1.0" encoding="utf-8"?>
-<p:notes xmlns:a="http://schemas.openxmlformats.org/drawingml/2006/main" xmlns:r="http://schemas.openxmlformats.org/officeDocument/2006/relationships" xmlns:p="http://schemas.openxmlformats.org/presentationml/2006/main">
+<p:notes xmlns:a="http://schemas.openxmlformats.org/drawingml/2006/main" xmlns:p="http://schemas.openxmlformats.org/presentationml/2006/main" xmlns:r="http://schemas.openxmlformats.org/officeDocument/2006/relationships">
   <p:cSld>
     <p:spTree>
       <p:nvGrpSpPr>
@@ -3566,7 +3743,7 @@
         <p:nvSpPr>
           <p:cNvPr id="2" name="Slide Image Placeholder 1"/>
           <p:cNvSpPr>
-            <a:spLocks noGrp="1" noRot="1" noChangeAspect="1"/>
+            <a:spLocks noGrp="1"/>
           </p:cNvSpPr>
           <p:nvPr>
             <p:ph type="sldImg" idx="2"/>
@@ -3581,7 +3758,7 @@
             <a:spLocks noGrp="1"/>
           </p:cNvSpPr>
           <p:nvPr>
-            <p:ph type="body" sz="quarter" idx="3"/>
+            <p:ph type="body" idx="3" sz="quarter"/>
           </p:nvPr>
         </p:nvSpPr>
         <p:spPr/>
@@ -3629,7 +3806,7 @@
             <a:spLocks noGrp="1"/>
           </p:cNvSpPr>
           <p:nvPr>
-            <p:ph type="sldNum" sz="quarter" idx="5"/>
+            <p:ph type="sldNum" idx="5" sz="quarter"/>
           </p:nvPr>
         </p:nvSpPr>
         <p:spPr/>
@@ -3643,7 +3820,7 @@
 </file>
 
 <file path=ppt/notesSlides/notesSlide7.xml><?xml version="1.0" encoding="utf-8"?>
-<p:notes xmlns:a="http://schemas.openxmlformats.org/drawingml/2006/main" xmlns:r="http://schemas.openxmlformats.org/officeDocument/2006/relationships" xmlns:p="http://schemas.openxmlformats.org/presentationml/2006/main">
+<p:notes xmlns:a="http://schemas.openxmlformats.org/drawingml/2006/main" xmlns:p="http://schemas.openxmlformats.org/presentationml/2006/main" xmlns:r="http://schemas.openxmlformats.org/officeDocument/2006/relationships">
   <p:cSld>
     <p:spTree>
       <p:nvGrpSpPr>
@@ -3663,7 +3840,7 @@
         <p:nvSpPr>
           <p:cNvPr id="2" name="Slide Image Placeholder 1"/>
           <p:cNvSpPr>
-            <a:spLocks noGrp="1" noRot="1" noChangeAspect="1"/>
+            <a:spLocks noGrp="1"/>
           </p:cNvSpPr>
           <p:nvPr>
             <p:ph type="sldImg" idx="2"/>
@@ -3678,7 +3855,7 @@
             <a:spLocks noGrp="1"/>
           </p:cNvSpPr>
           <p:nvPr>
-            <p:ph type="body" sz="quarter" idx="3"/>
+            <p:ph type="body" idx="3" sz="quarter"/>
           </p:nvPr>
         </p:nvSpPr>
         <p:spPr/>
@@ -3718,7 +3895,7 @@
             <a:spLocks noGrp="1"/>
           </p:cNvSpPr>
           <p:nvPr>
-            <p:ph type="sldNum" sz="quarter" idx="5"/>
+            <p:ph type="sldNum" idx="5" sz="quarter"/>
           </p:nvPr>
         </p:nvSpPr>
         <p:spPr/>
@@ -3732,7 +3909,7 @@
 </file>
 
 <file path=ppt/notesSlides/notesSlide8.xml><?xml version="1.0" encoding="utf-8"?>
-<p:notes xmlns:a="http://schemas.openxmlformats.org/drawingml/2006/main" xmlns:r="http://schemas.openxmlformats.org/officeDocument/2006/relationships" xmlns:p="http://schemas.openxmlformats.org/presentationml/2006/main">
+<p:notes xmlns:a="http://schemas.openxmlformats.org/drawingml/2006/main" xmlns:p="http://schemas.openxmlformats.org/presentationml/2006/main" xmlns:r="http://schemas.openxmlformats.org/officeDocument/2006/relationships">
   <p:cSld>
     <p:spTree>
       <p:nvGrpSpPr>
@@ -3752,7 +3929,7 @@
         <p:nvSpPr>
           <p:cNvPr id="2" name="Slide Image Placeholder 1"/>
           <p:cNvSpPr>
-            <a:spLocks noGrp="1" noRot="1" noChangeAspect="1"/>
+            <a:spLocks noGrp="1"/>
           </p:cNvSpPr>
           <p:nvPr>
             <p:ph type="sldImg" idx="2"/>
@@ -3767,7 +3944,7 @@
             <a:spLocks noGrp="1"/>
           </p:cNvSpPr>
           <p:nvPr>
-            <p:ph type="body" sz="quarter" idx="3"/>
+            <p:ph type="body" idx="3" sz="quarter"/>
           </p:nvPr>
         </p:nvSpPr>
         <p:spPr/>
@@ -3807,7 +3984,7 @@
             <a:spLocks noGrp="1"/>
           </p:cNvSpPr>
           <p:nvPr>
-            <p:ph type="sldNum" sz="quarter" idx="5"/>
+            <p:ph type="sldNum" idx="5" sz="quarter"/>
           </p:nvPr>
         </p:nvSpPr>
         <p:spPr/>
@@ -3821,7 +3998,7 @@
 </file>
 
 <file path=ppt/notesSlides/notesSlide9.xml><?xml version="1.0" encoding="utf-8"?>
-<p:notes xmlns:a="http://schemas.openxmlformats.org/drawingml/2006/main" xmlns:r="http://schemas.openxmlformats.org/officeDocument/2006/relationships" xmlns:p="http://schemas.openxmlformats.org/presentationml/2006/main">
+<p:notes xmlns:a="http://schemas.openxmlformats.org/drawingml/2006/main" xmlns:p="http://schemas.openxmlformats.org/presentationml/2006/main" xmlns:r="http://schemas.openxmlformats.org/officeDocument/2006/relationships">
   <p:cSld>
     <p:spTree>
       <p:nvGrpSpPr>
@@ -3841,7 +4018,7 @@
         <p:nvSpPr>
           <p:cNvPr id="2" name="Slide Image Placeholder 1"/>
           <p:cNvSpPr>
-            <a:spLocks noGrp="1" noRot="1" noChangeAspect="1"/>
+            <a:spLocks noGrp="1"/>
           </p:cNvSpPr>
           <p:nvPr>
             <p:ph type="sldImg" idx="2"/>
@@ -3856,7 +4033,7 @@
             <a:spLocks noGrp="1"/>
           </p:cNvSpPr>
           <p:nvPr>
-            <p:ph type="body" sz="quarter" idx="3"/>
+            <p:ph type="body" idx="3" sz="quarter"/>
           </p:nvPr>
         </p:nvSpPr>
         <p:spPr/>
@@ -3904,7 +4081,7 @@
             <a:spLocks noGrp="1"/>
           </p:cNvSpPr>
           <p:nvPr>
-            <p:ph type="sldNum" sz="quarter" idx="5"/>
+            <p:ph type="sldNum" idx="5" sz="quarter"/>
           </p:nvPr>
         </p:nvSpPr>
         <p:spPr/>
@@ -3955,9 +4132,10 @@
           <a:lstStyle/>
           <a:p>
             <a:r>
-              <a:rPr lang="en-US"/>
+              <a:rPr lang="en-US" smtClean="0"/>
               <a:t>Click to edit Master title style</a:t>
             </a:r>
+            <a:endParaRPr lang="en-US"/>
           </a:p>
         </p:txBody>
       </p:sp>
@@ -4073,9 +4251,10 @@
           </a:lstStyle>
           <a:p>
             <a:r>
-              <a:rPr lang="en-US"/>
+              <a:rPr lang="en-US" smtClean="0"/>
               <a:t>Click to edit Master subtitle style</a:t>
             </a:r>
+            <a:endParaRPr lang="en-US"/>
           </a:p>
         </p:txBody>
       </p:sp>
@@ -4096,7 +4275,7 @@
           <a:p>
             <a:fld id="{5BCAD085-E8A6-8845-BD4E-CB4CCA059FC4}" type="datetimeFigureOut">
               <a:rPr lang="en-US" smtClean="0"/>
-              <a:t>9/7/2026</a:t>
+              <a:t>1/27/13</a:t>
             </a:fld>
             <a:endParaRPr lang="en-US"/>
           </a:p>
@@ -4190,9 +4369,10 @@
           <a:lstStyle/>
           <a:p>
             <a:r>
-              <a:rPr lang="en-US"/>
+              <a:rPr lang="en-US" smtClean="0"/>
               <a:t>Click to edit Master title style</a:t>
             </a:r>
+            <a:endParaRPr lang="en-US"/>
           </a:p>
         </p:txBody>
       </p:sp>
@@ -4213,37 +4393,38 @@
           <a:p>
             <a:pPr lvl="0"/>
             <a:r>
-              <a:rPr lang="en-US"/>
+              <a:rPr lang="en-US" smtClean="0"/>
               <a:t>Click to edit Master text styles</a:t>
             </a:r>
           </a:p>
           <a:p>
             <a:pPr lvl="1"/>
             <a:r>
-              <a:rPr lang="en-US"/>
+              <a:rPr lang="en-US" smtClean="0"/>
               <a:t>Second level</a:t>
             </a:r>
           </a:p>
           <a:p>
             <a:pPr lvl="2"/>
             <a:r>
-              <a:rPr lang="en-US"/>
+              <a:rPr lang="en-US" smtClean="0"/>
               <a:t>Third level</a:t>
             </a:r>
           </a:p>
           <a:p>
             <a:pPr lvl="3"/>
             <a:r>
-              <a:rPr lang="en-US"/>
+              <a:rPr lang="en-US" smtClean="0"/>
               <a:t>Fourth level</a:t>
             </a:r>
           </a:p>
           <a:p>
             <a:pPr lvl="4"/>
             <a:r>
-              <a:rPr lang="en-US"/>
+              <a:rPr lang="en-US" smtClean="0"/>
               <a:t>Fifth level</a:t>
             </a:r>
+            <a:endParaRPr lang="en-US"/>
           </a:p>
         </p:txBody>
       </p:sp>
@@ -4264,7 +4445,7 @@
           <a:p>
             <a:fld id="{5BCAD085-E8A6-8845-BD4E-CB4CCA059FC4}" type="datetimeFigureOut">
               <a:rPr lang="en-US" smtClean="0"/>
-              <a:t>9/7/2026</a:t>
+              <a:t>1/27/13</a:t>
             </a:fld>
             <a:endParaRPr lang="en-US"/>
           </a:p>
@@ -4363,9 +4544,10 @@
           <a:lstStyle/>
           <a:p>
             <a:r>
-              <a:rPr lang="en-US"/>
+              <a:rPr lang="en-US" smtClean="0"/>
               <a:t>Click to edit Master title style</a:t>
             </a:r>
+            <a:endParaRPr lang="en-US"/>
           </a:p>
         </p:txBody>
       </p:sp>
@@ -4391,37 +4573,38 @@
           <a:p>
             <a:pPr lvl="0"/>
             <a:r>
-              <a:rPr lang="en-US"/>
+              <a:rPr lang="en-US" smtClean="0"/>
               <a:t>Click to edit Master text styles</a:t>
             </a:r>
           </a:p>
           <a:p>
             <a:pPr lvl="1"/>
             <a:r>
-              <a:rPr lang="en-US"/>
+              <a:rPr lang="en-US" smtClean="0"/>
               <a:t>Second level</a:t>
             </a:r>
           </a:p>
           <a:p>
             <a:pPr lvl="2"/>
             <a:r>
-              <a:rPr lang="en-US"/>
+              <a:rPr lang="en-US" smtClean="0"/>
               <a:t>Third level</a:t>
             </a:r>
           </a:p>
           <a:p>
             <a:pPr lvl="3"/>
             <a:r>
-              <a:rPr lang="en-US"/>
+              <a:rPr lang="en-US" smtClean="0"/>
               <a:t>Fourth level</a:t>
             </a:r>
           </a:p>
           <a:p>
             <a:pPr lvl="4"/>
             <a:r>
-              <a:rPr lang="en-US"/>
+              <a:rPr lang="en-US" smtClean="0"/>
               <a:t>Fifth level</a:t>
             </a:r>
+            <a:endParaRPr lang="en-US"/>
           </a:p>
         </p:txBody>
       </p:sp>
@@ -4442,7 +4625,7 @@
           <a:p>
             <a:fld id="{5BCAD085-E8A6-8845-BD4E-CB4CCA059FC4}" type="datetimeFigureOut">
               <a:rPr lang="en-US" smtClean="0"/>
-              <a:t>9/7/2026</a:t>
+              <a:t>1/27/13</a:t>
             </a:fld>
             <a:endParaRPr lang="en-US"/>
           </a:p>
@@ -4536,9 +4719,10 @@
           <a:lstStyle/>
           <a:p>
             <a:r>
-              <a:rPr lang="en-US"/>
+              <a:rPr lang="en-US" smtClean="0"/>
               <a:t>Click to edit Master title style</a:t>
             </a:r>
+            <a:endParaRPr lang="en-US"/>
           </a:p>
         </p:txBody>
       </p:sp>
@@ -4559,37 +4743,38 @@
           <a:p>
             <a:pPr lvl="0"/>
             <a:r>
-              <a:rPr lang="en-US"/>
+              <a:rPr lang="en-US" smtClean="0"/>
               <a:t>Click to edit Master text styles</a:t>
             </a:r>
           </a:p>
           <a:p>
             <a:pPr lvl="1"/>
             <a:r>
-              <a:rPr lang="en-US"/>
+              <a:rPr lang="en-US" smtClean="0"/>
               <a:t>Second level</a:t>
             </a:r>
           </a:p>
           <a:p>
             <a:pPr lvl="2"/>
             <a:r>
-              <a:rPr lang="en-US"/>
+              <a:rPr lang="en-US" smtClean="0"/>
               <a:t>Third level</a:t>
             </a:r>
           </a:p>
           <a:p>
             <a:pPr lvl="3"/>
             <a:r>
-              <a:rPr lang="en-US"/>
+              <a:rPr lang="en-US" smtClean="0"/>
               <a:t>Fourth level</a:t>
             </a:r>
           </a:p>
           <a:p>
             <a:pPr lvl="4"/>
             <a:r>
-              <a:rPr lang="en-US"/>
+              <a:rPr lang="en-US" smtClean="0"/>
               <a:t>Fifth level</a:t>
             </a:r>
+            <a:endParaRPr lang="en-US"/>
           </a:p>
         </p:txBody>
       </p:sp>
@@ -4610,7 +4795,7 @@
           <a:p>
             <a:fld id="{5BCAD085-E8A6-8845-BD4E-CB4CCA059FC4}" type="datetimeFigureOut">
               <a:rPr lang="en-US" smtClean="0"/>
-              <a:t>9/7/2026</a:t>
+              <a:t>1/27/13</a:t>
             </a:fld>
             <a:endParaRPr lang="en-US"/>
           </a:p>
@@ -4713,9 +4898,10 @@
           </a:lstStyle>
           <a:p>
             <a:r>
-              <a:rPr lang="en-US"/>
+              <a:rPr lang="en-US" smtClean="0"/>
               <a:t>Click to edit Master title style</a:t>
             </a:r>
+            <a:endParaRPr lang="en-US"/>
           </a:p>
         </p:txBody>
       </p:sp>
@@ -4832,7 +5018,7 @@
           <a:p>
             <a:pPr lvl="0"/>
             <a:r>
-              <a:rPr lang="en-US"/>
+              <a:rPr lang="en-US" smtClean="0"/>
               <a:t>Click to edit Master text styles</a:t>
             </a:r>
           </a:p>
@@ -4855,7 +5041,7 @@
           <a:p>
             <a:fld id="{5BCAD085-E8A6-8845-BD4E-CB4CCA059FC4}" type="datetimeFigureOut">
               <a:rPr lang="en-US" smtClean="0"/>
-              <a:t>9/7/2026</a:t>
+              <a:t>1/27/13</a:t>
             </a:fld>
             <a:endParaRPr lang="en-US"/>
           </a:p>
@@ -4949,9 +5135,10 @@
           <a:lstStyle/>
           <a:p>
             <a:r>
-              <a:rPr lang="en-US"/>
+              <a:rPr lang="en-US" smtClean="0"/>
               <a:t>Click to edit Master title style</a:t>
             </a:r>
+            <a:endParaRPr lang="en-US"/>
           </a:p>
         </p:txBody>
       </p:sp>
@@ -5005,37 +5192,38 @@
           <a:p>
             <a:pPr lvl="0"/>
             <a:r>
-              <a:rPr lang="en-US"/>
+              <a:rPr lang="en-US" smtClean="0"/>
               <a:t>Click to edit Master text styles</a:t>
             </a:r>
           </a:p>
           <a:p>
             <a:pPr lvl="1"/>
             <a:r>
-              <a:rPr lang="en-US"/>
+              <a:rPr lang="en-US" smtClean="0"/>
               <a:t>Second level</a:t>
             </a:r>
           </a:p>
           <a:p>
             <a:pPr lvl="2"/>
             <a:r>
-              <a:rPr lang="en-US"/>
+              <a:rPr lang="en-US" smtClean="0"/>
               <a:t>Third level</a:t>
             </a:r>
           </a:p>
           <a:p>
             <a:pPr lvl="3"/>
             <a:r>
-              <a:rPr lang="en-US"/>
+              <a:rPr lang="en-US" smtClean="0"/>
               <a:t>Fourth level</a:t>
             </a:r>
           </a:p>
           <a:p>
             <a:pPr lvl="4"/>
             <a:r>
-              <a:rPr lang="en-US"/>
+              <a:rPr lang="en-US" smtClean="0"/>
               <a:t>Fifth level</a:t>
             </a:r>
+            <a:endParaRPr lang="en-US"/>
           </a:p>
         </p:txBody>
       </p:sp>
@@ -5089,37 +5277,38 @@
           <a:p>
             <a:pPr lvl="0"/>
             <a:r>
-              <a:rPr lang="en-US"/>
+              <a:rPr lang="en-US" smtClean="0"/>
               <a:t>Click to edit Master text styles</a:t>
             </a:r>
           </a:p>
           <a:p>
             <a:pPr lvl="1"/>
             <a:r>
-              <a:rPr lang="en-US"/>
+              <a:rPr lang="en-US" smtClean="0"/>
               <a:t>Second level</a:t>
             </a:r>
           </a:p>
           <a:p>
             <a:pPr lvl="2"/>
             <a:r>
-              <a:rPr lang="en-US"/>
+              <a:rPr lang="en-US" smtClean="0"/>
               <a:t>Third level</a:t>
             </a:r>
           </a:p>
           <a:p>
             <a:pPr lvl="3"/>
             <a:r>
-              <a:rPr lang="en-US"/>
+              <a:rPr lang="en-US" smtClean="0"/>
               <a:t>Fourth level</a:t>
             </a:r>
           </a:p>
           <a:p>
             <a:pPr lvl="4"/>
             <a:r>
-              <a:rPr lang="en-US"/>
+              <a:rPr lang="en-US" smtClean="0"/>
               <a:t>Fifth level</a:t>
             </a:r>
+            <a:endParaRPr lang="en-US"/>
           </a:p>
         </p:txBody>
       </p:sp>
@@ -5140,7 +5329,7 @@
           <a:p>
             <a:fld id="{5BCAD085-E8A6-8845-BD4E-CB4CCA059FC4}" type="datetimeFigureOut">
               <a:rPr lang="en-US" smtClean="0"/>
-              <a:t>9/7/2026</a:t>
+              <a:t>1/27/13</a:t>
             </a:fld>
             <a:endParaRPr lang="en-US"/>
           </a:p>
@@ -5238,9 +5427,10 @@
           </a:lstStyle>
           <a:p>
             <a:r>
-              <a:rPr lang="en-US"/>
+              <a:rPr lang="en-US" smtClean="0"/>
               <a:t>Click to edit Master title style</a:t>
             </a:r>
+            <a:endParaRPr lang="en-US"/>
           </a:p>
         </p:txBody>
       </p:sp>
@@ -5303,7 +5493,7 @@
           <a:p>
             <a:pPr lvl="0"/>
             <a:r>
-              <a:rPr lang="en-US"/>
+              <a:rPr lang="en-US" smtClean="0"/>
               <a:t>Click to edit Master text styles</a:t>
             </a:r>
           </a:p>
@@ -5359,37 +5549,38 @@
           <a:p>
             <a:pPr lvl="0"/>
             <a:r>
-              <a:rPr lang="en-US"/>
+              <a:rPr lang="en-US" smtClean="0"/>
               <a:t>Click to edit Master text styles</a:t>
             </a:r>
           </a:p>
           <a:p>
             <a:pPr lvl="1"/>
             <a:r>
-              <a:rPr lang="en-US"/>
+              <a:rPr lang="en-US" smtClean="0"/>
               <a:t>Second level</a:t>
             </a:r>
           </a:p>
           <a:p>
             <a:pPr lvl="2"/>
             <a:r>
-              <a:rPr lang="en-US"/>
+              <a:rPr lang="en-US" smtClean="0"/>
               <a:t>Third level</a:t>
             </a:r>
           </a:p>
           <a:p>
             <a:pPr lvl="3"/>
             <a:r>
-              <a:rPr lang="en-US"/>
+              <a:rPr lang="en-US" smtClean="0"/>
               <a:t>Fourth level</a:t>
             </a:r>
           </a:p>
           <a:p>
             <a:pPr lvl="4"/>
             <a:r>
-              <a:rPr lang="en-US"/>
+              <a:rPr lang="en-US" smtClean="0"/>
               <a:t>Fifth level</a:t>
             </a:r>
+            <a:endParaRPr lang="en-US"/>
           </a:p>
         </p:txBody>
       </p:sp>
@@ -5452,7 +5643,7 @@
           <a:p>
             <a:pPr lvl="0"/>
             <a:r>
-              <a:rPr lang="en-US"/>
+              <a:rPr lang="en-US" smtClean="0"/>
               <a:t>Click to edit Master text styles</a:t>
             </a:r>
           </a:p>
@@ -5508,37 +5699,38 @@
           <a:p>
             <a:pPr lvl="0"/>
             <a:r>
-              <a:rPr lang="en-US"/>
+              <a:rPr lang="en-US" smtClean="0"/>
               <a:t>Click to edit Master text styles</a:t>
             </a:r>
           </a:p>
           <a:p>
             <a:pPr lvl="1"/>
             <a:r>
-              <a:rPr lang="en-US"/>
+              <a:rPr lang="en-US" smtClean="0"/>
               <a:t>Second level</a:t>
             </a:r>
           </a:p>
           <a:p>
             <a:pPr lvl="2"/>
             <a:r>
-              <a:rPr lang="en-US"/>
+              <a:rPr lang="en-US" smtClean="0"/>
               <a:t>Third level</a:t>
             </a:r>
           </a:p>
           <a:p>
             <a:pPr lvl="3"/>
             <a:r>
-              <a:rPr lang="en-US"/>
+              <a:rPr lang="en-US" smtClean="0"/>
               <a:t>Fourth level</a:t>
             </a:r>
           </a:p>
           <a:p>
             <a:pPr lvl="4"/>
             <a:r>
-              <a:rPr lang="en-US"/>
+              <a:rPr lang="en-US" smtClean="0"/>
               <a:t>Fifth level</a:t>
             </a:r>
+            <a:endParaRPr lang="en-US"/>
           </a:p>
         </p:txBody>
       </p:sp>
@@ -5559,7 +5751,7 @@
           <a:p>
             <a:fld id="{5BCAD085-E8A6-8845-BD4E-CB4CCA059FC4}" type="datetimeFigureOut">
               <a:rPr lang="en-US" smtClean="0"/>
-              <a:t>9/7/2026</a:t>
+              <a:t>1/27/13</a:t>
             </a:fld>
             <a:endParaRPr lang="en-US"/>
           </a:p>
@@ -5653,9 +5845,10 @@
           <a:lstStyle/>
           <a:p>
             <a:r>
-              <a:rPr lang="en-US"/>
+              <a:rPr lang="en-US" smtClean="0"/>
               <a:t>Click to edit Master title style</a:t>
             </a:r>
+            <a:endParaRPr lang="en-US"/>
           </a:p>
         </p:txBody>
       </p:sp>
@@ -5676,7 +5869,7 @@
           <a:p>
             <a:fld id="{5BCAD085-E8A6-8845-BD4E-CB4CCA059FC4}" type="datetimeFigureOut">
               <a:rPr lang="en-US" smtClean="0"/>
-              <a:t>9/7/2026</a:t>
+              <a:t>1/27/13</a:t>
             </a:fld>
             <a:endParaRPr lang="en-US"/>
           </a:p>
@@ -5771,7 +5964,7 @@
           <a:p>
             <a:fld id="{5BCAD085-E8A6-8845-BD4E-CB4CCA059FC4}" type="datetimeFigureOut">
               <a:rPr lang="en-US" smtClean="0"/>
-              <a:t>9/7/2026</a:t>
+              <a:t>1/27/13</a:t>
             </a:fld>
             <a:endParaRPr lang="en-US"/>
           </a:p>
@@ -5874,9 +6067,10 @@
           </a:lstStyle>
           <a:p>
             <a:r>
-              <a:rPr lang="en-US"/>
+              <a:rPr lang="en-US" smtClean="0"/>
               <a:t>Click to edit Master title style</a:t>
             </a:r>
+            <a:endParaRPr lang="en-US"/>
           </a:p>
         </p:txBody>
       </p:sp>
@@ -5930,37 +6124,38 @@
           <a:p>
             <a:pPr lvl="0"/>
             <a:r>
-              <a:rPr lang="en-US"/>
+              <a:rPr lang="en-US" smtClean="0"/>
               <a:t>Click to edit Master text styles</a:t>
             </a:r>
           </a:p>
           <a:p>
             <a:pPr lvl="1"/>
             <a:r>
-              <a:rPr lang="en-US"/>
+              <a:rPr lang="en-US" smtClean="0"/>
               <a:t>Second level</a:t>
             </a:r>
           </a:p>
           <a:p>
             <a:pPr lvl="2"/>
             <a:r>
-              <a:rPr lang="en-US"/>
+              <a:rPr lang="en-US" smtClean="0"/>
               <a:t>Third level</a:t>
             </a:r>
           </a:p>
           <a:p>
             <a:pPr lvl="3"/>
             <a:r>
-              <a:rPr lang="en-US"/>
+              <a:rPr lang="en-US" smtClean="0"/>
               <a:t>Fourth level</a:t>
             </a:r>
           </a:p>
           <a:p>
             <a:pPr lvl="4"/>
             <a:r>
-              <a:rPr lang="en-US"/>
+              <a:rPr lang="en-US" smtClean="0"/>
               <a:t>Fifth level</a:t>
             </a:r>
+            <a:endParaRPr lang="en-US"/>
           </a:p>
         </p:txBody>
       </p:sp>
@@ -6023,7 +6218,7 @@
           <a:p>
             <a:pPr lvl="0"/>
             <a:r>
-              <a:rPr lang="en-US"/>
+              <a:rPr lang="en-US" smtClean="0"/>
               <a:t>Click to edit Master text styles</a:t>
             </a:r>
           </a:p>
@@ -6046,7 +6241,7 @@
           <a:p>
             <a:fld id="{5BCAD085-E8A6-8845-BD4E-CB4CCA059FC4}" type="datetimeFigureOut">
               <a:rPr lang="en-US" smtClean="0"/>
-              <a:t>9/7/2026</a:t>
+              <a:t>1/27/13</a:t>
             </a:fld>
             <a:endParaRPr lang="en-US"/>
           </a:p>
@@ -6149,9 +6344,10 @@
           </a:lstStyle>
           <a:p>
             <a:r>
-              <a:rPr lang="en-US"/>
+              <a:rPr lang="en-US" smtClean="0"/>
               <a:t>Click to edit Master title style</a:t>
             </a:r>
+            <a:endParaRPr lang="en-US"/>
           </a:p>
         </p:txBody>
       </p:sp>
@@ -6275,7 +6471,7 @@
           <a:p>
             <a:pPr lvl="0"/>
             <a:r>
-              <a:rPr lang="en-US"/>
+              <a:rPr lang="en-US" smtClean="0"/>
               <a:t>Click to edit Master text styles</a:t>
             </a:r>
           </a:p>
@@ -6298,7 +6494,7 @@
           <a:p>
             <a:fld id="{5BCAD085-E8A6-8845-BD4E-CB4CCA059FC4}" type="datetimeFigureOut">
               <a:rPr lang="en-US" smtClean="0"/>
-              <a:t>9/7/2026</a:t>
+              <a:t>1/27/13</a:t>
             </a:fld>
             <a:endParaRPr lang="en-US"/>
           </a:p>
@@ -6407,9 +6603,10 @@
           <a:lstStyle/>
           <a:p>
             <a:r>
-              <a:rPr lang="en-US"/>
+              <a:rPr lang="en-US" smtClean="0"/>
               <a:t>Click to edit Master title style</a:t>
             </a:r>
+            <a:endParaRPr lang="en-US"/>
           </a:p>
         </p:txBody>
       </p:sp>
@@ -6440,37 +6637,38 @@
           <a:p>
             <a:pPr lvl="0"/>
             <a:r>
-              <a:rPr lang="en-US"/>
+              <a:rPr lang="en-US" smtClean="0"/>
               <a:t>Click to edit Master text styles</a:t>
             </a:r>
           </a:p>
           <a:p>
             <a:pPr lvl="1"/>
             <a:r>
-              <a:rPr lang="en-US"/>
+              <a:rPr lang="en-US" smtClean="0"/>
               <a:t>Second level</a:t>
             </a:r>
           </a:p>
           <a:p>
             <a:pPr lvl="2"/>
             <a:r>
-              <a:rPr lang="en-US"/>
+              <a:rPr lang="en-US" smtClean="0"/>
               <a:t>Third level</a:t>
             </a:r>
           </a:p>
           <a:p>
             <a:pPr lvl="3"/>
             <a:r>
-              <a:rPr lang="en-US"/>
+              <a:rPr lang="en-US" smtClean="0"/>
               <a:t>Fourth level</a:t>
             </a:r>
           </a:p>
           <a:p>
             <a:pPr lvl="4"/>
             <a:r>
-              <a:rPr lang="en-US"/>
+              <a:rPr lang="en-US" smtClean="0"/>
               <a:t>Fifth level</a:t>
             </a:r>
+            <a:endParaRPr lang="en-US"/>
           </a:p>
         </p:txBody>
       </p:sp>
@@ -6509,7 +6707,7 @@
           <a:p>
             <a:fld id="{5BCAD085-E8A6-8845-BD4E-CB4CCA059FC4}" type="datetimeFigureOut">
               <a:rPr lang="en-US" smtClean="0"/>
-              <a:t>9/7/2026</a:t>
+              <a:t>1/27/13</a:t>
             </a:fld>
             <a:endParaRPr lang="en-US"/>
           </a:p>
@@ -6868,7 +7066,7 @@
 </file>
 
 <file path=ppt/slides/slide1.xml><?xml version="1.0" encoding="utf-8"?>
-<p:sld xmlns:a="http://schemas.openxmlformats.org/drawingml/2006/main" xmlns:r="http://schemas.openxmlformats.org/officeDocument/2006/relationships" xmlns:p="http://schemas.openxmlformats.org/presentationml/2006/main">
+<p:sld xmlns:a="http://schemas.openxmlformats.org/drawingml/2006/main" xmlns:p="http://schemas.openxmlformats.org/presentationml/2006/main" xmlns:r="http://schemas.openxmlformats.org/officeDocument/2006/relationships">
   <p:cSld>
     <p:spTree>
       <p:nvGrpSpPr>
@@ -6876,14 +7074,7 @@
         <p:cNvGrpSpPr/>
         <p:nvPr/>
       </p:nvGrpSpPr>
-      <p:grpSpPr>
-        <a:xfrm>
-          <a:off x="0" y="0"/>
-          <a:ext cx="0" cy="0"/>
-          <a:chOff x="0" y="0"/>
-          <a:chExt cx="0" cy="0"/>
-        </a:xfrm>
-      </p:grpSpPr>
+      <p:grpSpPr/>
       <p:sp>
         <p:nvSpPr>
           <p:cNvPr id="2" name="Rectangle 1"/>
@@ -6925,7 +7116,6 @@
           <a:lstStyle/>
           <a:p>
             <a:pPr algn="ctr"/>
-            <a:endParaRPr/>
           </a:p>
         </p:txBody>
       </p:sp>
@@ -6938,7 +7128,7 @@
           <p:nvPr/>
         </p:nvPicPr>
         <p:blipFill>
-          <a:blip r:embed="rId3"/>
+          <a:blip r:embed="rId2"/>
           <a:stretch>
             <a:fillRect/>
           </a:stretch>
@@ -7183,12 +7373,6 @@
                 <a:latin typeface="Calibri"/>
               </a:defRPr>
             </a:pPr>
-            <a:endParaRPr sz="1200" b="0">
-              <a:solidFill>
-                <a:srgbClr val="666666"/>
-              </a:solidFill>
-              <a:latin typeface="Calibri"/>
-            </a:endParaRPr>
           </a:p>
           <a:p>
             <a:pPr algn="l">
@@ -7330,12 +7514,6 @@
                 <a:latin typeface="Calibri"/>
               </a:defRPr>
             </a:pPr>
-            <a:endParaRPr sz="1200" b="0">
-              <a:solidFill>
-                <a:srgbClr val="666666"/>
-              </a:solidFill>
-              <a:latin typeface="Calibri"/>
-            </a:endParaRPr>
           </a:p>
           <a:p>
             <a:pPr algn="l">
@@ -7373,7 +7551,7 @@
           <p:nvPr/>
         </p:nvPicPr>
         <p:blipFill>
-          <a:blip r:embed="rId4"/>
+          <a:blip r:embed="rId3"/>
           <a:stretch>
             <a:fillRect/>
           </a:stretch>
@@ -7445,7 +7623,7 @@
 </file>
 
 <file path=ppt/slides/slide10.xml><?xml version="1.0" encoding="utf-8"?>
-<p:sld xmlns:a="http://schemas.openxmlformats.org/drawingml/2006/main" xmlns:r="http://schemas.openxmlformats.org/officeDocument/2006/relationships" xmlns:p="http://schemas.openxmlformats.org/presentationml/2006/main">
+<p:sld xmlns:a="http://schemas.openxmlformats.org/drawingml/2006/main" xmlns:p="http://schemas.openxmlformats.org/presentationml/2006/main" xmlns:r="http://schemas.openxmlformats.org/officeDocument/2006/relationships">
   <p:cSld>
     <p:spTree>
       <p:nvGrpSpPr>
@@ -7453,14 +7631,7 @@
         <p:cNvGrpSpPr/>
         <p:nvPr/>
       </p:nvGrpSpPr>
-      <p:grpSpPr>
-        <a:xfrm>
-          <a:off x="0" y="0"/>
-          <a:ext cx="0" cy="0"/>
-          <a:chOff x="0" y="0"/>
-          <a:chExt cx="0" cy="0"/>
-        </a:xfrm>
-      </p:grpSpPr>
+      <p:grpSpPr/>
       <p:sp>
         <p:nvSpPr>
           <p:cNvPr id="2" name="Title 1"/>
@@ -7548,7 +7719,6 @@
           <a:lstStyle/>
           <a:p>
             <a:pPr algn="ctr"/>
-            <a:endParaRPr/>
           </a:p>
         </p:txBody>
       </p:sp>
@@ -9605,7 +9775,7 @@
           </a:fontRef>
         </p:style>
         <p:txBody>
-          <a:bodyPr wrap="square" lIns="164592" tIns="73152" rIns="164592" bIns="73152" rtlCol="0" anchor="ctr"/>
+          <a:bodyPr rtlCol="0" anchor="ctr" wrap="square" lIns="164592" rIns="164592" tIns="73152" bIns="73152"/>
           <a:lstStyle/>
           <a:p>
             <a:pPr algn="l"/>
@@ -9639,7 +9809,7 @@
 </file>
 
 <file path=ppt/slides/slide11.xml><?xml version="1.0" encoding="utf-8"?>
-<p:sld xmlns:a="http://schemas.openxmlformats.org/drawingml/2006/main" xmlns:r="http://schemas.openxmlformats.org/officeDocument/2006/relationships" xmlns:p="http://schemas.openxmlformats.org/presentationml/2006/main">
+<p:sld xmlns:a="http://schemas.openxmlformats.org/drawingml/2006/main" xmlns:p="http://schemas.openxmlformats.org/presentationml/2006/main" xmlns:r="http://schemas.openxmlformats.org/officeDocument/2006/relationships">
   <p:cSld>
     <p:spTree>
       <p:nvGrpSpPr>
@@ -9647,14 +9817,7 @@
         <p:cNvGrpSpPr/>
         <p:nvPr/>
       </p:nvGrpSpPr>
-      <p:grpSpPr>
-        <a:xfrm>
-          <a:off x="0" y="0"/>
-          <a:ext cx="0" cy="0"/>
-          <a:chOff x="0" y="0"/>
-          <a:chExt cx="0" cy="0"/>
-        </a:xfrm>
-      </p:grpSpPr>
+      <p:grpSpPr/>
       <p:sp>
         <p:nvSpPr>
           <p:cNvPr id="2" name="Title 1"/>
@@ -9742,7 +9905,6 @@
           <a:lstStyle/>
           <a:p>
             <a:pPr algn="ctr"/>
-            <a:endParaRPr/>
           </a:p>
         </p:txBody>
       </p:sp>
@@ -9951,12 +10113,6 @@
                 <a:latin typeface="Calibri"/>
               </a:defRPr>
             </a:pPr>
-            <a:endParaRPr sz="2500" b="0">
-              <a:solidFill>
-                <a:srgbClr val="222222"/>
-              </a:solidFill>
-              <a:latin typeface="Calibri"/>
-            </a:endParaRPr>
           </a:p>
           <a:p>
             <a:pPr algn="l">
@@ -9998,12 +10154,6 @@
                 <a:latin typeface="Calibri"/>
               </a:defRPr>
             </a:pPr>
-            <a:endParaRPr sz="2500" b="0">
-              <a:solidFill>
-                <a:srgbClr val="222222"/>
-              </a:solidFill>
-              <a:latin typeface="Calibri"/>
-            </a:endParaRPr>
           </a:p>
           <a:p>
             <a:pPr algn="l">
@@ -10191,12 +10341,6 @@
                 <a:latin typeface="Calibri"/>
               </a:defRPr>
             </a:pPr>
-            <a:endParaRPr sz="2400" b="0">
-              <a:solidFill>
-                <a:srgbClr val="222222"/>
-              </a:solidFill>
-              <a:latin typeface="Calibri"/>
-            </a:endParaRPr>
           </a:p>
           <a:p>
             <a:pPr algn="l">
@@ -10234,7 +10378,7 @@
 </file>
 
 <file path=ppt/slides/slide12.xml><?xml version="1.0" encoding="utf-8"?>
-<p:sld xmlns:a="http://schemas.openxmlformats.org/drawingml/2006/main" xmlns:r="http://schemas.openxmlformats.org/officeDocument/2006/relationships" xmlns:p="http://schemas.openxmlformats.org/presentationml/2006/main">
+<p:sld xmlns:a="http://schemas.openxmlformats.org/drawingml/2006/main" xmlns:p="http://schemas.openxmlformats.org/presentationml/2006/main" xmlns:r="http://schemas.openxmlformats.org/officeDocument/2006/relationships">
   <p:cSld>
     <p:spTree>
       <p:nvGrpSpPr>
@@ -10242,14 +10386,7 @@
         <p:cNvGrpSpPr/>
         <p:nvPr/>
       </p:nvGrpSpPr>
-      <p:grpSpPr>
-        <a:xfrm>
-          <a:off x="0" y="0"/>
-          <a:ext cx="0" cy="0"/>
-          <a:chOff x="0" y="0"/>
-          <a:chExt cx="0" cy="0"/>
-        </a:xfrm>
-      </p:grpSpPr>
+      <p:grpSpPr/>
       <p:sp>
         <p:nvSpPr>
           <p:cNvPr id="2" name="Title 1"/>
@@ -10337,7 +10474,6 @@
           <a:lstStyle/>
           <a:p>
             <a:pPr algn="ctr"/>
-            <a:endParaRPr/>
           </a:p>
         </p:txBody>
       </p:sp>
@@ -10526,7 +10662,7 @@
           </a:fontRef>
         </p:style>
         <p:txBody>
-          <a:bodyPr wrap="square" lIns="146304" tIns="91440" bIns="73152" rtlCol="0" anchor="t"/>
+          <a:bodyPr rtlCol="0" anchor="t" wrap="square" lIns="146304" tIns="91440" bIns="73152"/>
           <a:lstStyle/>
           <a:p>
             <a:pPr algn="l">
@@ -10904,7 +11040,7 @@
 </file>
 
 <file path=ppt/slides/slide13.xml><?xml version="1.0" encoding="utf-8"?>
-<p:sld xmlns:a="http://schemas.openxmlformats.org/drawingml/2006/main" xmlns:r="http://schemas.openxmlformats.org/officeDocument/2006/relationships" xmlns:p="http://schemas.openxmlformats.org/presentationml/2006/main">
+<p:sld xmlns:a="http://schemas.openxmlformats.org/drawingml/2006/main" xmlns:p="http://schemas.openxmlformats.org/presentationml/2006/main" xmlns:r="http://schemas.openxmlformats.org/officeDocument/2006/relationships">
   <p:cSld>
     <p:spTree>
       <p:nvGrpSpPr>
@@ -10912,14 +11048,7 @@
         <p:cNvGrpSpPr/>
         <p:nvPr/>
       </p:nvGrpSpPr>
-      <p:grpSpPr>
-        <a:xfrm>
-          <a:off x="0" y="0"/>
-          <a:ext cx="0" cy="0"/>
-          <a:chOff x="0" y="0"/>
-          <a:chExt cx="0" cy="0"/>
-        </a:xfrm>
-      </p:grpSpPr>
+      <p:grpSpPr/>
       <p:sp>
         <p:nvSpPr>
           <p:cNvPr id="2" name="TextBox 1"/>
@@ -11057,7 +11186,6 @@
           <a:lstStyle/>
           <a:p>
             <a:pPr algn="ctr"/>
-            <a:endParaRPr/>
           </a:p>
         </p:txBody>
       </p:sp>
@@ -11198,7 +11326,7 @@
           </a:fontRef>
         </p:style>
         <p:txBody>
-          <a:bodyPr wrap="square" lIns="73152" rIns="73152" rtlCol="0" anchor="ctr"/>
+          <a:bodyPr rtlCol="0" anchor="ctr" wrap="square" lIns="73152" rIns="73152"/>
           <a:lstStyle/>
           <a:p>
             <a:pPr algn="ctr">
@@ -11316,7 +11444,7 @@
           </a:fontRef>
         </p:style>
         <p:txBody>
-          <a:bodyPr wrap="square" lIns="73152" rIns="73152" rtlCol="0" anchor="ctr"/>
+          <a:bodyPr rtlCol="0" anchor="ctr" wrap="square" lIns="73152" rIns="73152"/>
           <a:lstStyle/>
           <a:p>
             <a:pPr algn="ctr">
@@ -11434,7 +11562,7 @@
           </a:fontRef>
         </p:style>
         <p:txBody>
-          <a:bodyPr wrap="square" lIns="73152" rIns="73152" rtlCol="0" anchor="ctr"/>
+          <a:bodyPr rtlCol="0" anchor="ctr" wrap="square" lIns="73152" rIns="73152"/>
           <a:lstStyle/>
           <a:p>
             <a:pPr algn="ctr">
@@ -11504,7 +11632,7 @@
           </a:fontRef>
         </p:style>
         <p:txBody>
-          <a:bodyPr wrap="square" lIns="73152" rIns="73152" rtlCol="0" anchor="ctr"/>
+          <a:bodyPr rtlCol="0" anchor="ctr" wrap="square" lIns="73152" rIns="73152"/>
           <a:lstStyle/>
           <a:p>
             <a:pPr algn="ctr">
@@ -11574,7 +11702,7 @@
           </a:fontRef>
         </p:style>
         <p:txBody>
-          <a:bodyPr wrap="square" lIns="73152" rIns="73152" rtlCol="0" anchor="ctr"/>
+          <a:bodyPr rtlCol="0" anchor="ctr" wrap="square" lIns="73152" rIns="73152"/>
           <a:lstStyle/>
           <a:p>
             <a:pPr algn="ctr">
@@ -11612,7 +11740,7 @@
 </file>
 
 <file path=ppt/slides/slide14.xml><?xml version="1.0" encoding="utf-8"?>
-<p:sld xmlns:a="http://schemas.openxmlformats.org/drawingml/2006/main" xmlns:r="http://schemas.openxmlformats.org/officeDocument/2006/relationships" xmlns:p="http://schemas.openxmlformats.org/presentationml/2006/main">
+<p:sld xmlns:a="http://schemas.openxmlformats.org/drawingml/2006/main" xmlns:p="http://schemas.openxmlformats.org/presentationml/2006/main" xmlns:r="http://schemas.openxmlformats.org/officeDocument/2006/relationships">
   <p:cSld>
     <p:spTree>
       <p:nvGrpSpPr>
@@ -11620,14 +11748,7 @@
         <p:cNvGrpSpPr/>
         <p:nvPr/>
       </p:nvGrpSpPr>
-      <p:grpSpPr>
-        <a:xfrm>
-          <a:off x="0" y="0"/>
-          <a:ext cx="0" cy="0"/>
-          <a:chOff x="0" y="0"/>
-          <a:chExt cx="0" cy="0"/>
-        </a:xfrm>
-      </p:grpSpPr>
+      <p:grpSpPr/>
       <p:sp>
         <p:nvSpPr>
           <p:cNvPr id="2" name="Title 1"/>
@@ -11715,7 +11836,6 @@
           <a:lstStyle/>
           <a:p>
             <a:pPr algn="ctr"/>
-            <a:endParaRPr/>
           </a:p>
         </p:txBody>
       </p:sp>
@@ -11854,7 +11974,7 @@
           </a:fontRef>
         </p:style>
         <p:txBody>
-          <a:bodyPr wrap="square" lIns="182880" rtlCol="0" anchor="ctr"/>
+          <a:bodyPr rtlCol="0" anchor="ctr" wrap="square" lIns="182880"/>
           <a:lstStyle/>
           <a:p>
             <a:pPr algn="l"/>
@@ -12294,7 +12414,7 @@
           </a:fontRef>
         </p:style>
         <p:txBody>
-          <a:bodyPr wrap="square" lIns="164592" tIns="73152" rIns="164592" bIns="73152" rtlCol="0" anchor="ctr"/>
+          <a:bodyPr rtlCol="0" anchor="ctr" wrap="square" lIns="164592" rIns="164592" tIns="73152" bIns="73152"/>
           <a:lstStyle/>
           <a:p>
             <a:pPr algn="l"/>
@@ -12328,7 +12448,7 @@
 </file>
 
 <file path=ppt/slides/slide15.xml><?xml version="1.0" encoding="utf-8"?>
-<p:sld xmlns:a="http://schemas.openxmlformats.org/drawingml/2006/main" xmlns:r="http://schemas.openxmlformats.org/officeDocument/2006/relationships" xmlns:p="http://schemas.openxmlformats.org/presentationml/2006/main">
+<p:sld xmlns:a="http://schemas.openxmlformats.org/drawingml/2006/main" xmlns:p="http://schemas.openxmlformats.org/presentationml/2006/main" xmlns:r="http://schemas.openxmlformats.org/officeDocument/2006/relationships">
   <p:cSld>
     <p:spTree>
       <p:nvGrpSpPr>
@@ -12336,14 +12456,7 @@
         <p:cNvGrpSpPr/>
         <p:nvPr/>
       </p:nvGrpSpPr>
-      <p:grpSpPr>
-        <a:xfrm>
-          <a:off x="0" y="0"/>
-          <a:ext cx="0" cy="0"/>
-          <a:chOff x="0" y="0"/>
-          <a:chExt cx="0" cy="0"/>
-        </a:xfrm>
-      </p:grpSpPr>
+      <p:grpSpPr/>
       <p:sp>
         <p:nvSpPr>
           <p:cNvPr id="2" name="TextBox 1"/>
@@ -12481,7 +12594,6 @@
           <a:lstStyle/>
           <a:p>
             <a:pPr algn="ctr"/>
-            <a:endParaRPr/>
           </a:p>
         </p:txBody>
       </p:sp>
@@ -12622,7 +12734,7 @@
           </a:fontRef>
         </p:style>
         <p:txBody>
-          <a:bodyPr wrap="square" lIns="73152" rIns="73152" rtlCol="0" anchor="ctr"/>
+          <a:bodyPr rtlCol="0" anchor="ctr" wrap="square" lIns="73152" rIns="73152"/>
           <a:lstStyle/>
           <a:p>
             <a:pPr algn="ctr">
@@ -12740,7 +12852,7 @@
           </a:fontRef>
         </p:style>
         <p:txBody>
-          <a:bodyPr wrap="square" lIns="73152" rIns="73152" rtlCol="0" anchor="ctr"/>
+          <a:bodyPr rtlCol="0" anchor="ctr" wrap="square" lIns="73152" rIns="73152"/>
           <a:lstStyle/>
           <a:p>
             <a:pPr algn="ctr">
@@ -12858,7 +12970,7 @@
           </a:fontRef>
         </p:style>
         <p:txBody>
-          <a:bodyPr wrap="square" lIns="73152" rIns="73152" rtlCol="0" anchor="ctr"/>
+          <a:bodyPr rtlCol="0" anchor="ctr" wrap="square" lIns="73152" rIns="73152"/>
           <a:lstStyle/>
           <a:p>
             <a:pPr algn="ctr">
@@ -12976,7 +13088,7 @@
           </a:fontRef>
         </p:style>
         <p:txBody>
-          <a:bodyPr wrap="square" lIns="73152" rIns="73152" rtlCol="0" anchor="ctr"/>
+          <a:bodyPr rtlCol="0" anchor="ctr" wrap="square" lIns="73152" rIns="73152"/>
           <a:lstStyle/>
           <a:p>
             <a:pPr algn="ctr">
@@ -13046,7 +13158,7 @@
           </a:fontRef>
         </p:style>
         <p:txBody>
-          <a:bodyPr wrap="square" lIns="73152" rIns="73152" rtlCol="0" anchor="ctr"/>
+          <a:bodyPr rtlCol="0" anchor="ctr" wrap="square" lIns="73152" rIns="73152"/>
           <a:lstStyle/>
           <a:p>
             <a:pPr algn="ctr">
@@ -13084,7 +13196,7 @@
 </file>
 
 <file path=ppt/slides/slide16.xml><?xml version="1.0" encoding="utf-8"?>
-<p:sld xmlns:a="http://schemas.openxmlformats.org/drawingml/2006/main" xmlns:r="http://schemas.openxmlformats.org/officeDocument/2006/relationships" xmlns:p="http://schemas.openxmlformats.org/presentationml/2006/main">
+<p:sld xmlns:a="http://schemas.openxmlformats.org/drawingml/2006/main" xmlns:p="http://schemas.openxmlformats.org/presentationml/2006/main" xmlns:r="http://schemas.openxmlformats.org/officeDocument/2006/relationships">
   <p:cSld>
     <p:spTree>
       <p:nvGrpSpPr>
@@ -13092,14 +13204,7 @@
         <p:cNvGrpSpPr/>
         <p:nvPr/>
       </p:nvGrpSpPr>
-      <p:grpSpPr>
-        <a:xfrm>
-          <a:off x="0" y="0"/>
-          <a:ext cx="0" cy="0"/>
-          <a:chOff x="0" y="0"/>
-          <a:chExt cx="0" cy="0"/>
-        </a:xfrm>
-      </p:grpSpPr>
+      <p:grpSpPr/>
       <p:sp>
         <p:nvSpPr>
           <p:cNvPr id="2" name="Title 1"/>
@@ -13187,7 +13292,6 @@
           <a:lstStyle/>
           <a:p>
             <a:pPr algn="ctr"/>
-            <a:endParaRPr/>
           </a:p>
         </p:txBody>
       </p:sp>
@@ -13326,7 +13430,7 @@
           </a:fontRef>
         </p:style>
         <p:txBody>
-          <a:bodyPr wrap="square" lIns="182880" rtlCol="0" anchor="ctr"/>
+          <a:bodyPr rtlCol="0" anchor="ctr" wrap="square" lIns="182880"/>
           <a:lstStyle/>
           <a:p>
             <a:pPr algn="l"/>
@@ -13791,7 +13895,7 @@
           </a:fontRef>
         </p:style>
         <p:txBody>
-          <a:bodyPr wrap="square" lIns="164592" tIns="73152" rIns="164592" bIns="73152" rtlCol="0" anchor="ctr"/>
+          <a:bodyPr rtlCol="0" anchor="ctr" wrap="square" lIns="164592" rIns="164592" tIns="73152" bIns="73152"/>
           <a:lstStyle/>
           <a:p>
             <a:pPr algn="l"/>
@@ -13825,7 +13929,7 @@
 </file>
 
 <file path=ppt/slides/slide17.xml><?xml version="1.0" encoding="utf-8"?>
-<p:sld xmlns:a="http://schemas.openxmlformats.org/drawingml/2006/main" xmlns:r="http://schemas.openxmlformats.org/officeDocument/2006/relationships" xmlns:p="http://schemas.openxmlformats.org/presentationml/2006/main">
+<p:sld xmlns:a="http://schemas.openxmlformats.org/drawingml/2006/main" xmlns:p="http://schemas.openxmlformats.org/presentationml/2006/main" xmlns:r="http://schemas.openxmlformats.org/officeDocument/2006/relationships">
   <p:cSld>
     <p:spTree>
       <p:nvGrpSpPr>
@@ -13833,14 +13937,7 @@
         <p:cNvGrpSpPr/>
         <p:nvPr/>
       </p:nvGrpSpPr>
-      <p:grpSpPr>
-        <a:xfrm>
-          <a:off x="0" y="0"/>
-          <a:ext cx="0" cy="0"/>
-          <a:chOff x="0" y="0"/>
-          <a:chExt cx="0" cy="0"/>
-        </a:xfrm>
-      </p:grpSpPr>
+      <p:grpSpPr/>
       <p:sp>
         <p:nvSpPr>
           <p:cNvPr id="2" name="TextBox 1"/>
@@ -13978,7 +14075,6 @@
           <a:lstStyle/>
           <a:p>
             <a:pPr algn="ctr"/>
-            <a:endParaRPr/>
           </a:p>
         </p:txBody>
       </p:sp>
@@ -14119,7 +14215,7 @@
           </a:fontRef>
         </p:style>
         <p:txBody>
-          <a:bodyPr wrap="square" lIns="73152" rIns="73152" rtlCol="0" anchor="ctr"/>
+          <a:bodyPr rtlCol="0" anchor="ctr" wrap="square" lIns="73152" rIns="73152"/>
           <a:lstStyle/>
           <a:p>
             <a:pPr algn="ctr">
@@ -14237,7 +14333,7 @@
           </a:fontRef>
         </p:style>
         <p:txBody>
-          <a:bodyPr wrap="square" lIns="73152" rIns="73152" rtlCol="0" anchor="ctr"/>
+          <a:bodyPr rtlCol="0" anchor="ctr" wrap="square" lIns="73152" rIns="73152"/>
           <a:lstStyle/>
           <a:p>
             <a:pPr algn="ctr">
@@ -14355,7 +14451,7 @@
           </a:fontRef>
         </p:style>
         <p:txBody>
-          <a:bodyPr wrap="square" lIns="73152" rIns="73152" rtlCol="0" anchor="ctr"/>
+          <a:bodyPr rtlCol="0" anchor="ctr" wrap="square" lIns="73152" rIns="73152"/>
           <a:lstStyle/>
           <a:p>
             <a:pPr algn="ctr">
@@ -14473,7 +14569,7 @@
           </a:fontRef>
         </p:style>
         <p:txBody>
-          <a:bodyPr wrap="square" lIns="73152" rIns="73152" rtlCol="0" anchor="ctr"/>
+          <a:bodyPr rtlCol="0" anchor="ctr" wrap="square" lIns="73152" rIns="73152"/>
           <a:lstStyle/>
           <a:p>
             <a:pPr algn="ctr">
@@ -14591,7 +14687,7 @@
           </a:fontRef>
         </p:style>
         <p:txBody>
-          <a:bodyPr wrap="square" lIns="73152" rIns="73152" rtlCol="0" anchor="ctr"/>
+          <a:bodyPr rtlCol="0" anchor="ctr" wrap="square" lIns="73152" rIns="73152"/>
           <a:lstStyle/>
           <a:p>
             <a:pPr algn="ctr">
@@ -14629,7 +14725,7 @@
 </file>
 
 <file path=ppt/slides/slide18.xml><?xml version="1.0" encoding="utf-8"?>
-<p:sld xmlns:a="http://schemas.openxmlformats.org/drawingml/2006/main" xmlns:r="http://schemas.openxmlformats.org/officeDocument/2006/relationships" xmlns:p="http://schemas.openxmlformats.org/presentationml/2006/main">
+<p:sld xmlns:a="http://schemas.openxmlformats.org/drawingml/2006/main" xmlns:p="http://schemas.openxmlformats.org/presentationml/2006/main" xmlns:r="http://schemas.openxmlformats.org/officeDocument/2006/relationships">
   <p:cSld>
     <p:spTree>
       <p:nvGrpSpPr>
@@ -14637,14 +14733,7 @@
         <p:cNvGrpSpPr/>
         <p:nvPr/>
       </p:nvGrpSpPr>
-      <p:grpSpPr>
-        <a:xfrm>
-          <a:off x="0" y="0"/>
-          <a:ext cx="0" cy="0"/>
-          <a:chOff x="0" y="0"/>
-          <a:chExt cx="0" cy="0"/>
-        </a:xfrm>
-      </p:grpSpPr>
+      <p:grpSpPr/>
       <p:sp>
         <p:nvSpPr>
           <p:cNvPr id="2" name="Title 1"/>
@@ -14732,7 +14821,6 @@
           <a:lstStyle/>
           <a:p>
             <a:pPr algn="ctr"/>
-            <a:endParaRPr/>
           </a:p>
         </p:txBody>
       </p:sp>
@@ -14941,12 +15029,6 @@
                 <a:latin typeface="Calibri"/>
               </a:defRPr>
             </a:pPr>
-            <a:endParaRPr sz="2200" b="0">
-              <a:solidFill>
-                <a:srgbClr val="222222"/>
-              </a:solidFill>
-              <a:latin typeface="Calibri"/>
-            </a:endParaRPr>
           </a:p>
           <a:p>
             <a:pPr algn="l">
@@ -15038,12 +15120,6 @@
                 <a:latin typeface="Calibri"/>
               </a:defRPr>
             </a:pPr>
-            <a:endParaRPr sz="2200" b="0">
-              <a:solidFill>
-                <a:srgbClr val="222222"/>
-              </a:solidFill>
-              <a:latin typeface="Calibri"/>
-            </a:endParaRPr>
           </a:p>
           <a:p>
             <a:pPr algn="l">
@@ -15081,7 +15157,7 @@
 </file>
 
 <file path=ppt/slides/slide19.xml><?xml version="1.0" encoding="utf-8"?>
-<p:sld xmlns:a="http://schemas.openxmlformats.org/drawingml/2006/main" xmlns:r="http://schemas.openxmlformats.org/officeDocument/2006/relationships" xmlns:p="http://schemas.openxmlformats.org/presentationml/2006/main">
+<p:sld xmlns:a="http://schemas.openxmlformats.org/drawingml/2006/main" xmlns:p="http://schemas.openxmlformats.org/presentationml/2006/main" xmlns:r="http://schemas.openxmlformats.org/officeDocument/2006/relationships">
   <p:cSld>
     <p:spTree>
       <p:nvGrpSpPr>
@@ -15089,14 +15165,7 @@
         <p:cNvGrpSpPr/>
         <p:nvPr/>
       </p:nvGrpSpPr>
-      <p:grpSpPr>
-        <a:xfrm>
-          <a:off x="0" y="0"/>
-          <a:ext cx="0" cy="0"/>
-          <a:chOff x="0" y="0"/>
-          <a:chExt cx="0" cy="0"/>
-        </a:xfrm>
-      </p:grpSpPr>
+      <p:grpSpPr/>
       <p:sp>
         <p:nvSpPr>
           <p:cNvPr id="2" name="Title 1"/>
@@ -15184,7 +15253,6 @@
           <a:lstStyle/>
           <a:p>
             <a:pPr algn="ctr"/>
-            <a:endParaRPr/>
           </a:p>
         </p:txBody>
       </p:sp>
@@ -15371,7 +15439,7 @@
           </a:fontRef>
         </p:style>
         <p:txBody>
-          <a:bodyPr wrap="square" rtlCol="0" anchor="ctr"/>
+          <a:bodyPr rtlCol="0" anchor="ctr" wrap="square"/>
           <a:lstStyle/>
           <a:p>
             <a:pPr algn="l">
@@ -15388,7 +15456,6 @@
                 <a:latin typeface="Calibri"/>
               </a:defRPr>
             </a:pPr>
-            <a:endParaRPr/>
           </a:p>
         </p:txBody>
       </p:sp>
@@ -15610,7 +15677,7 @@
           </a:fontRef>
         </p:style>
         <p:txBody>
-          <a:bodyPr wrap="square" lIns="45720" tIns="18288" rIns="45720" bIns="18288" rtlCol="0" anchor="ctr"/>
+          <a:bodyPr rtlCol="0" anchor="ctr" wrap="square" lIns="45720" rIns="45720" tIns="18288" bIns="18288"/>
           <a:lstStyle/>
           <a:p>
             <a:pPr algn="ctr">
@@ -15824,7 +15891,7 @@
           </a:fontRef>
         </p:style>
         <p:txBody>
-          <a:bodyPr wrap="square" rtlCol="0" anchor="ctr"/>
+          <a:bodyPr rtlCol="0" anchor="ctr" wrap="square"/>
           <a:lstStyle/>
           <a:p>
             <a:pPr algn="l">
@@ -15841,7 +15908,6 @@
                 <a:latin typeface="Calibri"/>
               </a:defRPr>
             </a:pPr>
-            <a:endParaRPr/>
           </a:p>
         </p:txBody>
       </p:sp>
@@ -16063,7 +16129,7 @@
           </a:fontRef>
         </p:style>
         <p:txBody>
-          <a:bodyPr wrap="square" lIns="45720" tIns="18288" rIns="45720" bIns="18288" rtlCol="0" anchor="ctr"/>
+          <a:bodyPr rtlCol="0" anchor="ctr" wrap="square" lIns="45720" rIns="45720" tIns="18288" bIns="18288"/>
           <a:lstStyle/>
           <a:p>
             <a:pPr algn="ctr">
@@ -16229,7 +16295,7 @@
           </a:fontRef>
         </p:style>
         <p:txBody>
-          <a:bodyPr wrap="square" lIns="45720" tIns="18288" rIns="45720" bIns="18288" rtlCol="0" anchor="ctr"/>
+          <a:bodyPr rtlCol="0" anchor="ctr" wrap="square" lIns="45720" rIns="45720" tIns="18288" bIns="18288"/>
           <a:lstStyle/>
           <a:p>
             <a:pPr algn="ctr">
@@ -16296,12 +16362,6 @@
                 <a:latin typeface="Calibri"/>
               </a:defRPr>
             </a:pPr>
-            <a:endParaRPr sz="1800" b="0">
-              <a:solidFill>
-                <a:srgbClr val="222222"/>
-              </a:solidFill>
-              <a:latin typeface="Calibri"/>
-            </a:endParaRPr>
           </a:p>
           <a:p>
             <a:pPr algn="ctr">
@@ -16368,12 +16428,6 @@
                 <a:latin typeface="Calibri"/>
               </a:defRPr>
             </a:pPr>
-            <a:endParaRPr sz="1800" b="0">
-              <a:solidFill>
-                <a:srgbClr val="222222"/>
-              </a:solidFill>
-              <a:latin typeface="Calibri"/>
-            </a:endParaRPr>
           </a:p>
           <a:p>
             <a:pPr algn="ctr">
@@ -16465,12 +16519,6 @@
                 <a:latin typeface="Calibri"/>
               </a:defRPr>
             </a:pPr>
-            <a:endParaRPr sz="1800" b="0">
-              <a:solidFill>
-                <a:srgbClr val="222222"/>
-              </a:solidFill>
-              <a:latin typeface="Calibri"/>
-            </a:endParaRPr>
           </a:p>
           <a:p>
             <a:pPr algn="ctr">
@@ -16590,7 +16638,7 @@
           </a:fontRef>
         </p:style>
         <p:txBody>
-          <a:bodyPr wrap="square" lIns="164592" tIns="73152" rIns="164592" bIns="73152" rtlCol="0" anchor="ctr"/>
+          <a:bodyPr rtlCol="0" anchor="ctr" wrap="square" lIns="164592" rIns="164592" tIns="73152" bIns="73152"/>
           <a:lstStyle/>
           <a:p>
             <a:pPr algn="l"/>
@@ -16624,7 +16672,7 @@
 </file>
 
 <file path=ppt/slides/slide2.xml><?xml version="1.0" encoding="utf-8"?>
-<p:sld xmlns:a="http://schemas.openxmlformats.org/drawingml/2006/main" xmlns:r="http://schemas.openxmlformats.org/officeDocument/2006/relationships" xmlns:p="http://schemas.openxmlformats.org/presentationml/2006/main">
+<p:sld xmlns:a="http://schemas.openxmlformats.org/drawingml/2006/main" xmlns:p="http://schemas.openxmlformats.org/presentationml/2006/main" xmlns:r="http://schemas.openxmlformats.org/officeDocument/2006/relationships">
   <p:cSld>
     <p:spTree>
       <p:nvGrpSpPr>
@@ -16632,14 +16680,7 @@
         <p:cNvGrpSpPr/>
         <p:nvPr/>
       </p:nvGrpSpPr>
-      <p:grpSpPr>
-        <a:xfrm>
-          <a:off x="0" y="0"/>
-          <a:ext cx="0" cy="0"/>
-          <a:chOff x="0" y="0"/>
-          <a:chExt cx="0" cy="0"/>
-        </a:xfrm>
-      </p:grpSpPr>
+      <p:grpSpPr/>
       <p:sp>
         <p:nvSpPr>
           <p:cNvPr id="2" name="Title 1"/>
@@ -16727,7 +16768,6 @@
           <a:lstStyle/>
           <a:p>
             <a:pPr algn="ctr"/>
-            <a:endParaRPr/>
           </a:p>
         </p:txBody>
       </p:sp>
@@ -17082,7 +17122,7 @@
 </file>
 
 <file path=ppt/slides/slide20.xml><?xml version="1.0" encoding="utf-8"?>
-<p:sld xmlns:a="http://schemas.openxmlformats.org/drawingml/2006/main" xmlns:r="http://schemas.openxmlformats.org/officeDocument/2006/relationships" xmlns:p="http://schemas.openxmlformats.org/presentationml/2006/main">
+<p:sld xmlns:a="http://schemas.openxmlformats.org/drawingml/2006/main" xmlns:p="http://schemas.openxmlformats.org/presentationml/2006/main" xmlns:r="http://schemas.openxmlformats.org/officeDocument/2006/relationships">
   <p:cSld>
     <p:spTree>
       <p:nvGrpSpPr>
@@ -17090,14 +17130,7 @@
         <p:cNvGrpSpPr/>
         <p:nvPr/>
       </p:nvGrpSpPr>
-      <p:grpSpPr>
-        <a:xfrm>
-          <a:off x="0" y="0"/>
-          <a:ext cx="0" cy="0"/>
-          <a:chOff x="0" y="0"/>
-          <a:chExt cx="0" cy="0"/>
-        </a:xfrm>
-      </p:grpSpPr>
+      <p:grpSpPr/>
       <p:sp>
         <p:nvSpPr>
           <p:cNvPr id="2" name="Title 1"/>
@@ -17185,7 +17218,6 @@
           <a:lstStyle/>
           <a:p>
             <a:pPr algn="ctr"/>
-            <a:endParaRPr/>
           </a:p>
         </p:txBody>
       </p:sp>
@@ -17394,12 +17426,6 @@
                 <a:latin typeface="Calibri"/>
               </a:defRPr>
             </a:pPr>
-            <a:endParaRPr sz="2300" b="0">
-              <a:solidFill>
-                <a:srgbClr val="222222"/>
-              </a:solidFill>
-              <a:latin typeface="Calibri"/>
-            </a:endParaRPr>
           </a:p>
           <a:p>
             <a:pPr algn="l">
@@ -17514,12 +17540,6 @@
                 <a:latin typeface="Calibri"/>
               </a:defRPr>
             </a:pPr>
-            <a:endParaRPr sz="2200" b="0">
-              <a:solidFill>
-                <a:srgbClr val="222222"/>
-              </a:solidFill>
-              <a:latin typeface="Calibri"/>
-            </a:endParaRPr>
           </a:p>
           <a:p>
             <a:pPr algn="l">
@@ -17586,12 +17606,6 @@
                 <a:latin typeface="Calibri"/>
               </a:defRPr>
             </a:pPr>
-            <a:endParaRPr sz="2200" b="0">
-              <a:solidFill>
-                <a:srgbClr val="222222"/>
-              </a:solidFill>
-              <a:latin typeface="Calibri"/>
-            </a:endParaRPr>
           </a:p>
           <a:p>
             <a:pPr algn="l">
@@ -17661,7 +17675,7 @@
           </a:fontRef>
         </p:style>
         <p:txBody>
-          <a:bodyPr wrap="square" lIns="164592" tIns="73152" rIns="164592" bIns="73152" rtlCol="0" anchor="ctr"/>
+          <a:bodyPr rtlCol="0" anchor="ctr" wrap="square" lIns="164592" rIns="164592" tIns="73152" bIns="73152"/>
           <a:lstStyle/>
           <a:p>
             <a:pPr algn="l"/>
@@ -17695,7 +17709,7 @@
 </file>
 
 <file path=ppt/slides/slide21.xml><?xml version="1.0" encoding="utf-8"?>
-<p:sld xmlns:a="http://schemas.openxmlformats.org/drawingml/2006/main" xmlns:r="http://schemas.openxmlformats.org/officeDocument/2006/relationships" xmlns:p="http://schemas.openxmlformats.org/presentationml/2006/main">
+<p:sld xmlns:a="http://schemas.openxmlformats.org/drawingml/2006/main" xmlns:p="http://schemas.openxmlformats.org/presentationml/2006/main" xmlns:r="http://schemas.openxmlformats.org/officeDocument/2006/relationships">
   <p:cSld>
     <p:spTree>
       <p:nvGrpSpPr>
@@ -17703,14 +17717,7 @@
         <p:cNvGrpSpPr/>
         <p:nvPr/>
       </p:nvGrpSpPr>
-      <p:grpSpPr>
-        <a:xfrm>
-          <a:off x="0" y="0"/>
-          <a:ext cx="0" cy="0"/>
-          <a:chOff x="0" y="0"/>
-          <a:chExt cx="0" cy="0"/>
-        </a:xfrm>
-      </p:grpSpPr>
+      <p:grpSpPr/>
       <p:sp>
         <p:nvSpPr>
           <p:cNvPr id="2" name="Title 1"/>
@@ -17798,7 +17805,6 @@
           <a:lstStyle/>
           <a:p>
             <a:pPr algn="ctr"/>
-            <a:endParaRPr/>
           </a:p>
         </p:txBody>
       </p:sp>
@@ -18175,7 +18181,7 @@
           </a:fontRef>
         </p:style>
         <p:txBody>
-          <a:bodyPr wrap="square" lIns="45720" tIns="18288" rIns="45720" bIns="18288" rtlCol="0" anchor="ctr"/>
+          <a:bodyPr rtlCol="0" anchor="ctr" wrap="square" lIns="45720" rIns="45720" tIns="18288" bIns="18288"/>
           <a:lstStyle/>
           <a:p>
             <a:pPr algn="ctr">
@@ -18245,7 +18251,7 @@
           </a:fontRef>
         </p:style>
         <p:txBody>
-          <a:bodyPr wrap="square" lIns="45720" tIns="18288" rIns="45720" bIns="18288" rtlCol="0" anchor="ctr"/>
+          <a:bodyPr rtlCol="0" anchor="ctr" wrap="square" lIns="45720" rIns="45720" tIns="18288" bIns="18288"/>
           <a:lstStyle/>
           <a:p>
             <a:pPr algn="ctr">
@@ -18313,7 +18319,7 @@
           </a:fontRef>
         </p:style>
         <p:txBody>
-          <a:bodyPr wrap="square" lIns="45720" tIns="18288" rIns="45720" bIns="18288" rtlCol="0" anchor="ctr"/>
+          <a:bodyPr rtlCol="0" anchor="ctr" wrap="square" lIns="45720" rIns="45720" tIns="18288" bIns="18288"/>
           <a:lstStyle/>
           <a:p>
             <a:pPr algn="ctr">
@@ -18355,12 +18361,6 @@
                 <a:latin typeface="Calibri"/>
               </a:defRPr>
             </a:pPr>
-            <a:endParaRPr sz="1800" b="0">
-              <a:solidFill>
-                <a:srgbClr val="222222"/>
-              </a:solidFill>
-              <a:latin typeface="Calibri"/>
-            </a:endParaRPr>
           </a:p>
           <a:p>
             <a:pPr algn="ctr">
@@ -18751,7 +18751,7 @@
           </a:fontRef>
         </p:style>
         <p:txBody>
-          <a:bodyPr wrap="square" lIns="45720" tIns="18288" rIns="45720" bIns="18288" rtlCol="0" anchor="ctr"/>
+          <a:bodyPr rtlCol="0" anchor="ctr" wrap="square" lIns="45720" rIns="45720" tIns="18288" bIns="18288"/>
           <a:lstStyle/>
           <a:p>
             <a:pPr algn="ctr">
@@ -18821,7 +18821,7 @@
           </a:fontRef>
         </p:style>
         <p:txBody>
-          <a:bodyPr wrap="square" lIns="45720" tIns="18288" rIns="45720" bIns="18288" rtlCol="0" anchor="ctr"/>
+          <a:bodyPr rtlCol="0" anchor="ctr" wrap="square" lIns="45720" rIns="45720" tIns="18288" bIns="18288"/>
           <a:lstStyle/>
           <a:p>
             <a:pPr algn="ctr">
@@ -18889,7 +18889,7 @@
           </a:fontRef>
         </p:style>
         <p:txBody>
-          <a:bodyPr wrap="square" lIns="45720" tIns="18288" rIns="45720" bIns="18288" rtlCol="0" anchor="ctr"/>
+          <a:bodyPr rtlCol="0" anchor="ctr" wrap="square" lIns="45720" rIns="45720" tIns="18288" bIns="18288"/>
           <a:lstStyle/>
           <a:p>
             <a:pPr algn="ctr">
@@ -18931,12 +18931,6 @@
                 <a:latin typeface="Calibri"/>
               </a:defRPr>
             </a:pPr>
-            <a:endParaRPr sz="1800" b="0">
-              <a:solidFill>
-                <a:srgbClr val="222222"/>
-              </a:solidFill>
-              <a:latin typeface="Calibri"/>
-            </a:endParaRPr>
           </a:p>
           <a:p>
             <a:pPr algn="ctr">
@@ -19056,7 +19050,7 @@
           </a:fontRef>
         </p:style>
         <p:txBody>
-          <a:bodyPr wrap="square" lIns="164592" tIns="73152" rIns="164592" bIns="73152" rtlCol="0" anchor="ctr"/>
+          <a:bodyPr rtlCol="0" anchor="ctr" wrap="square" lIns="164592" rIns="164592" tIns="73152" bIns="73152"/>
           <a:lstStyle/>
           <a:p>
             <a:pPr algn="l"/>
@@ -19090,7 +19084,7 @@
 </file>
 
 <file path=ppt/slides/slide22.xml><?xml version="1.0" encoding="utf-8"?>
-<p:sld xmlns:a="http://schemas.openxmlformats.org/drawingml/2006/main" xmlns:r="http://schemas.openxmlformats.org/officeDocument/2006/relationships" xmlns:p="http://schemas.openxmlformats.org/presentationml/2006/main">
+<p:sld xmlns:a="http://schemas.openxmlformats.org/drawingml/2006/main" xmlns:p="http://schemas.openxmlformats.org/presentationml/2006/main" xmlns:r="http://schemas.openxmlformats.org/officeDocument/2006/relationships">
   <p:cSld>
     <p:spTree>
       <p:nvGrpSpPr>
@@ -19098,14 +19092,7 @@
         <p:cNvGrpSpPr/>
         <p:nvPr/>
       </p:nvGrpSpPr>
-      <p:grpSpPr>
-        <a:xfrm>
-          <a:off x="0" y="0"/>
-          <a:ext cx="0" cy="0"/>
-          <a:chOff x="0" y="0"/>
-          <a:chExt cx="0" cy="0"/>
-        </a:xfrm>
-      </p:grpSpPr>
+      <p:grpSpPr/>
       <p:sp>
         <p:nvSpPr>
           <p:cNvPr id="2" name="Title 1"/>
@@ -19193,7 +19180,6 @@
           <a:lstStyle/>
           <a:p>
             <a:pPr algn="ctr"/>
-            <a:endParaRPr/>
           </a:p>
         </p:txBody>
       </p:sp>
@@ -19555,7 +19541,7 @@
           </a:fontRef>
         </p:style>
         <p:txBody>
-          <a:bodyPr wrap="square" lIns="164592" tIns="73152" rIns="164592" bIns="73152" rtlCol="0" anchor="ctr"/>
+          <a:bodyPr rtlCol="0" anchor="ctr" wrap="square" lIns="164592" rIns="164592" tIns="73152" bIns="73152"/>
           <a:lstStyle/>
           <a:p>
             <a:pPr algn="l"/>
@@ -19589,7 +19575,7 @@
 </file>
 
 <file path=ppt/slides/slide23.xml><?xml version="1.0" encoding="utf-8"?>
-<p:sld xmlns:a="http://schemas.openxmlformats.org/drawingml/2006/main" xmlns:r="http://schemas.openxmlformats.org/officeDocument/2006/relationships" xmlns:p="http://schemas.openxmlformats.org/presentationml/2006/main">
+<p:sld xmlns:a="http://schemas.openxmlformats.org/drawingml/2006/main" xmlns:p="http://schemas.openxmlformats.org/presentationml/2006/main" xmlns:r="http://schemas.openxmlformats.org/officeDocument/2006/relationships">
   <p:cSld>
     <p:spTree>
       <p:nvGrpSpPr>
@@ -19597,14 +19583,7 @@
         <p:cNvGrpSpPr/>
         <p:nvPr/>
       </p:nvGrpSpPr>
-      <p:grpSpPr>
-        <a:xfrm>
-          <a:off x="0" y="0"/>
-          <a:ext cx="0" cy="0"/>
-          <a:chOff x="0" y="0"/>
-          <a:chExt cx="0" cy="0"/>
-        </a:xfrm>
-      </p:grpSpPr>
+      <p:grpSpPr/>
       <p:sp>
         <p:nvSpPr>
           <p:cNvPr id="2" name="TextBox 1"/>
@@ -19742,7 +19721,6 @@
           <a:lstStyle/>
           <a:p>
             <a:pPr algn="ctr"/>
-            <a:endParaRPr/>
           </a:p>
         </p:txBody>
       </p:sp>
@@ -19883,7 +19861,7 @@
           </a:fontRef>
         </p:style>
         <p:txBody>
-          <a:bodyPr wrap="square" lIns="73152" rIns="73152" rtlCol="0" anchor="ctr"/>
+          <a:bodyPr rtlCol="0" anchor="ctr" wrap="square" lIns="73152" rIns="73152"/>
           <a:lstStyle/>
           <a:p>
             <a:pPr algn="ctr">
@@ -20001,7 +19979,7 @@
           </a:fontRef>
         </p:style>
         <p:txBody>
-          <a:bodyPr wrap="square" lIns="73152" rIns="73152" rtlCol="0" anchor="ctr"/>
+          <a:bodyPr rtlCol="0" anchor="ctr" wrap="square" lIns="73152" rIns="73152"/>
           <a:lstStyle/>
           <a:p>
             <a:pPr algn="ctr">
@@ -20119,7 +20097,7 @@
           </a:fontRef>
         </p:style>
         <p:txBody>
-          <a:bodyPr wrap="square" lIns="73152" rIns="73152" rtlCol="0" anchor="ctr"/>
+          <a:bodyPr rtlCol="0" anchor="ctr" wrap="square" lIns="73152" rIns="73152"/>
           <a:lstStyle/>
           <a:p>
             <a:pPr algn="ctr">
@@ -20237,7 +20215,7 @@
           </a:fontRef>
         </p:style>
         <p:txBody>
-          <a:bodyPr wrap="square" lIns="73152" rIns="73152" rtlCol="0" anchor="ctr"/>
+          <a:bodyPr rtlCol="0" anchor="ctr" wrap="square" lIns="73152" rIns="73152"/>
           <a:lstStyle/>
           <a:p>
             <a:pPr algn="ctr">
@@ -20355,7 +20333,7 @@
           </a:fontRef>
         </p:style>
         <p:txBody>
-          <a:bodyPr wrap="square" lIns="73152" rIns="73152" rtlCol="0" anchor="ctr"/>
+          <a:bodyPr rtlCol="0" anchor="ctr" wrap="square" lIns="73152" rIns="73152"/>
           <a:lstStyle/>
           <a:p>
             <a:pPr algn="ctr">
@@ -20441,7 +20419,7 @@
 </file>
 
 <file path=ppt/slides/slide24.xml><?xml version="1.0" encoding="utf-8"?>
-<p:sld xmlns:a="http://schemas.openxmlformats.org/drawingml/2006/main" xmlns:r="http://schemas.openxmlformats.org/officeDocument/2006/relationships" xmlns:p="http://schemas.openxmlformats.org/presentationml/2006/main">
+<p:sld xmlns:a="http://schemas.openxmlformats.org/drawingml/2006/main" xmlns:p="http://schemas.openxmlformats.org/presentationml/2006/main" xmlns:r="http://schemas.openxmlformats.org/officeDocument/2006/relationships">
   <p:cSld>
     <p:spTree>
       <p:nvGrpSpPr>
@@ -20449,14 +20427,7 @@
         <p:cNvGrpSpPr/>
         <p:nvPr/>
       </p:nvGrpSpPr>
-      <p:grpSpPr>
-        <a:xfrm>
-          <a:off x="0" y="0"/>
-          <a:ext cx="0" cy="0"/>
-          <a:chOff x="0" y="0"/>
-          <a:chExt cx="0" cy="0"/>
-        </a:xfrm>
-      </p:grpSpPr>
+      <p:grpSpPr/>
       <p:sp>
         <p:nvSpPr>
           <p:cNvPr id="2" name="Title 1"/>
@@ -20544,7 +20515,6 @@
           <a:lstStyle/>
           <a:p>
             <a:pPr algn="ctr"/>
-            <a:endParaRPr/>
           </a:p>
         </p:txBody>
       </p:sp>
@@ -20853,12 +20823,6 @@
                 <a:latin typeface="Calibri"/>
               </a:defRPr>
             </a:pPr>
-            <a:endParaRPr sz="2000" b="0">
-              <a:solidFill>
-                <a:srgbClr val="222222"/>
-              </a:solidFill>
-              <a:latin typeface="Calibri"/>
-            </a:endParaRPr>
           </a:p>
           <a:p>
             <a:pPr algn="l">
@@ -20900,12 +20864,6 @@
                 <a:latin typeface="Calibri"/>
               </a:defRPr>
             </a:pPr>
-            <a:endParaRPr sz="2000" b="0">
-              <a:solidFill>
-                <a:srgbClr val="222222"/>
-              </a:solidFill>
-              <a:latin typeface="Calibri"/>
-            </a:endParaRPr>
           </a:p>
           <a:p>
             <a:pPr algn="l">
@@ -20943,7 +20901,7 @@
 </file>
 
 <file path=ppt/slides/slide25.xml><?xml version="1.0" encoding="utf-8"?>
-<p:sld xmlns:a="http://schemas.openxmlformats.org/drawingml/2006/main" xmlns:r="http://schemas.openxmlformats.org/officeDocument/2006/relationships" xmlns:p="http://schemas.openxmlformats.org/presentationml/2006/main">
+<p:sld xmlns:a="http://schemas.openxmlformats.org/drawingml/2006/main" xmlns:p="http://schemas.openxmlformats.org/presentationml/2006/main" xmlns:r="http://schemas.openxmlformats.org/officeDocument/2006/relationships">
   <p:cSld>
     <p:spTree>
       <p:nvGrpSpPr>
@@ -20951,14 +20909,7 @@
         <p:cNvGrpSpPr/>
         <p:nvPr/>
       </p:nvGrpSpPr>
-      <p:grpSpPr>
-        <a:xfrm>
-          <a:off x="0" y="0"/>
-          <a:ext cx="0" cy="0"/>
-          <a:chOff x="0" y="0"/>
-          <a:chExt cx="0" cy="0"/>
-        </a:xfrm>
-      </p:grpSpPr>
+      <p:grpSpPr/>
       <p:sp>
         <p:nvSpPr>
           <p:cNvPr id="2" name="Title 1"/>
@@ -21046,7 +20997,6 @@
           <a:lstStyle/>
           <a:p>
             <a:pPr algn="ctr"/>
-            <a:endParaRPr/>
           </a:p>
         </p:txBody>
       </p:sp>
@@ -21235,7 +21185,7 @@
           </a:fontRef>
         </p:style>
         <p:txBody>
-          <a:bodyPr wrap="square" lIns="45720" tIns="18288" rIns="45720" bIns="18288" rtlCol="0" anchor="ctr"/>
+          <a:bodyPr rtlCol="0" anchor="ctr" wrap="square" lIns="45720" rIns="45720" tIns="18288" bIns="18288"/>
           <a:lstStyle/>
           <a:p>
             <a:pPr algn="ctr">
@@ -21303,7 +21253,7 @@
           </a:fontRef>
         </p:style>
         <p:txBody>
-          <a:bodyPr wrap="square" lIns="45720" tIns="18288" rIns="45720" bIns="18288" rtlCol="0" anchor="ctr"/>
+          <a:bodyPr rtlCol="0" anchor="ctr" wrap="square" lIns="45720" rIns="45720" tIns="18288" bIns="18288"/>
           <a:lstStyle/>
           <a:p>
             <a:pPr algn="ctr">
@@ -21433,7 +21383,7 @@
           </a:fontRef>
         </p:style>
         <p:txBody>
-          <a:bodyPr wrap="square" lIns="45720" tIns="18288" rIns="45720" bIns="18288" rtlCol="0" anchor="ctr"/>
+          <a:bodyPr rtlCol="0" anchor="ctr" wrap="square" lIns="45720" rIns="45720" tIns="18288" bIns="18288"/>
           <a:lstStyle/>
           <a:p>
             <a:pPr algn="ctr">
@@ -21576,7 +21526,7 @@
           </a:fontRef>
         </p:style>
         <p:txBody>
-          <a:bodyPr wrap="square" lIns="45720" tIns="18288" rIns="45720" bIns="18288" rtlCol="0" anchor="ctr"/>
+          <a:bodyPr rtlCol="0" anchor="ctr" wrap="square" lIns="45720" rIns="45720" tIns="18288" bIns="18288"/>
           <a:lstStyle/>
           <a:p>
             <a:pPr algn="ctr">
@@ -21644,7 +21594,7 @@
           </a:fontRef>
         </p:style>
         <p:txBody>
-          <a:bodyPr wrap="square" lIns="45720" tIns="18288" rIns="45720" bIns="18288" rtlCol="0" anchor="ctr"/>
+          <a:bodyPr rtlCol="0" anchor="ctr" wrap="square" lIns="45720" rIns="45720" tIns="18288" bIns="18288"/>
           <a:lstStyle/>
           <a:p>
             <a:pPr algn="ctr">
@@ -21774,7 +21724,7 @@
           </a:fontRef>
         </p:style>
         <p:txBody>
-          <a:bodyPr wrap="square" lIns="45720" tIns="18288" rIns="45720" bIns="18288" rtlCol="0" anchor="ctr"/>
+          <a:bodyPr rtlCol="0" anchor="ctr" wrap="square" lIns="45720" rIns="45720" tIns="18288" bIns="18288"/>
           <a:lstStyle/>
           <a:p>
             <a:pPr algn="ctr">
@@ -21942,7 +21892,7 @@
           </a:fontRef>
         </p:style>
         <p:txBody>
-          <a:bodyPr wrap="square" lIns="45720" tIns="18288" rIns="45720" bIns="18288" rtlCol="0" anchor="ctr"/>
+          <a:bodyPr rtlCol="0" anchor="ctr" wrap="square" lIns="45720" rIns="45720" tIns="18288" bIns="18288"/>
           <a:lstStyle/>
           <a:p>
             <a:pPr algn="ctr">
@@ -22010,7 +21960,7 @@
           </a:fontRef>
         </p:style>
         <p:txBody>
-          <a:bodyPr wrap="square" lIns="45720" tIns="18288" rIns="45720" bIns="18288" rtlCol="0" anchor="ctr"/>
+          <a:bodyPr rtlCol="0" anchor="ctr" wrap="square" lIns="45720" rIns="45720" tIns="18288" bIns="18288"/>
           <a:lstStyle/>
           <a:p>
             <a:pPr algn="ctr">
@@ -22140,7 +22090,7 @@
           </a:fontRef>
         </p:style>
         <p:txBody>
-          <a:bodyPr wrap="square" lIns="45720" tIns="18288" rIns="45720" bIns="18288" rtlCol="0" anchor="ctr"/>
+          <a:bodyPr rtlCol="0" anchor="ctr" wrap="square" lIns="45720" rIns="45720" tIns="18288" bIns="18288"/>
           <a:lstStyle/>
           <a:p>
             <a:pPr algn="ctr">
@@ -22283,7 +22233,7 @@
           </a:fontRef>
         </p:style>
         <p:txBody>
-          <a:bodyPr wrap="square" lIns="45720" tIns="18288" rIns="45720" bIns="18288" rtlCol="0" anchor="ctr"/>
+          <a:bodyPr rtlCol="0" anchor="ctr" wrap="square" lIns="45720" rIns="45720" tIns="18288" bIns="18288"/>
           <a:lstStyle/>
           <a:p>
             <a:pPr algn="ctr">
@@ -22351,7 +22301,7 @@
           </a:fontRef>
         </p:style>
         <p:txBody>
-          <a:bodyPr wrap="square" lIns="45720" tIns="18288" rIns="45720" bIns="18288" rtlCol="0" anchor="ctr"/>
+          <a:bodyPr rtlCol="0" anchor="ctr" wrap="square" lIns="45720" rIns="45720" tIns="18288" bIns="18288"/>
           <a:lstStyle/>
           <a:p>
             <a:pPr algn="ctr">
@@ -22481,7 +22431,7 @@
           </a:fontRef>
         </p:style>
         <p:txBody>
-          <a:bodyPr wrap="square" lIns="45720" tIns="18288" rIns="45720" bIns="18288" rtlCol="0" anchor="ctr"/>
+          <a:bodyPr rtlCol="0" anchor="ctr" wrap="square" lIns="45720" rIns="45720" tIns="18288" bIns="18288"/>
           <a:lstStyle/>
           <a:p>
             <a:pPr algn="ctr">
@@ -22624,7 +22574,7 @@
           </a:fontRef>
         </p:style>
         <p:txBody>
-          <a:bodyPr wrap="square" lIns="164592" tIns="73152" rIns="164592" bIns="73152" rtlCol="0" anchor="ctr"/>
+          <a:bodyPr rtlCol="0" anchor="ctr" wrap="square" lIns="164592" rIns="164592" tIns="73152" bIns="73152"/>
           <a:lstStyle/>
           <a:p>
             <a:pPr algn="l"/>
@@ -22658,7 +22608,7 @@
 </file>
 
 <file path=ppt/slides/slide26.xml><?xml version="1.0" encoding="utf-8"?>
-<p:sld xmlns:a="http://schemas.openxmlformats.org/drawingml/2006/main" xmlns:r="http://schemas.openxmlformats.org/officeDocument/2006/relationships" xmlns:p="http://schemas.openxmlformats.org/presentationml/2006/main">
+<p:sld xmlns:a="http://schemas.openxmlformats.org/drawingml/2006/main" xmlns:p="http://schemas.openxmlformats.org/presentationml/2006/main" xmlns:r="http://schemas.openxmlformats.org/officeDocument/2006/relationships">
   <p:cSld>
     <p:spTree>
       <p:nvGrpSpPr>
@@ -22666,14 +22616,7 @@
         <p:cNvGrpSpPr/>
         <p:nvPr/>
       </p:nvGrpSpPr>
-      <p:grpSpPr>
-        <a:xfrm>
-          <a:off x="0" y="0"/>
-          <a:ext cx="0" cy="0"/>
-          <a:chOff x="0" y="0"/>
-          <a:chExt cx="0" cy="0"/>
-        </a:xfrm>
-      </p:grpSpPr>
+      <p:grpSpPr/>
       <p:sp>
         <p:nvSpPr>
           <p:cNvPr id="2" name="Title 1"/>
@@ -22761,7 +22704,6 @@
           <a:lstStyle/>
           <a:p>
             <a:pPr algn="ctr"/>
-            <a:endParaRPr/>
           </a:p>
         </p:txBody>
       </p:sp>
@@ -22972,12 +22914,6 @@
                 <a:latin typeface="Calibri"/>
               </a:defRPr>
             </a:pPr>
-            <a:endParaRPr sz="2100" b="0">
-              <a:solidFill>
-                <a:srgbClr val="222222"/>
-              </a:solidFill>
-              <a:latin typeface="Calibri"/>
-            </a:endParaRPr>
           </a:p>
           <a:p>
             <a:pPr algn="l">
@@ -23069,12 +23005,6 @@
                 <a:latin typeface="Calibri"/>
               </a:defRPr>
             </a:pPr>
-            <a:endParaRPr sz="2100" b="0">
-              <a:solidFill>
-                <a:srgbClr val="222222"/>
-              </a:solidFill>
-              <a:latin typeface="Calibri"/>
-            </a:endParaRPr>
           </a:p>
           <a:p>
             <a:pPr algn="l">
@@ -23144,7 +23074,7 @@
           </a:fontRef>
         </p:style>
         <p:txBody>
-          <a:bodyPr wrap="square" lIns="164592" tIns="73152" rIns="164592" bIns="73152" rtlCol="0" anchor="ctr"/>
+          <a:bodyPr rtlCol="0" anchor="ctr" wrap="square" lIns="164592" rIns="164592" tIns="73152" bIns="73152"/>
           <a:lstStyle/>
           <a:p>
             <a:pPr algn="l"/>
@@ -23178,7 +23108,7 @@
 </file>
 
 <file path=ppt/slides/slide27.xml><?xml version="1.0" encoding="utf-8"?>
-<p:sld xmlns:a="http://schemas.openxmlformats.org/drawingml/2006/main" xmlns:r="http://schemas.openxmlformats.org/officeDocument/2006/relationships" xmlns:p="http://schemas.openxmlformats.org/presentationml/2006/main">
+<p:sld xmlns:a="http://schemas.openxmlformats.org/drawingml/2006/main" xmlns:p="http://schemas.openxmlformats.org/presentationml/2006/main" xmlns:r="http://schemas.openxmlformats.org/officeDocument/2006/relationships">
   <p:cSld>
     <p:spTree>
       <p:nvGrpSpPr>
@@ -23186,14 +23116,7 @@
         <p:cNvGrpSpPr/>
         <p:nvPr/>
       </p:nvGrpSpPr>
-      <p:grpSpPr>
-        <a:xfrm>
-          <a:off x="0" y="0"/>
-          <a:ext cx="0" cy="0"/>
-          <a:chOff x="0" y="0"/>
-          <a:chExt cx="0" cy="0"/>
-        </a:xfrm>
-      </p:grpSpPr>
+      <p:grpSpPr/>
       <p:sp>
         <p:nvSpPr>
           <p:cNvPr id="2" name="Title 1"/>
@@ -23281,7 +23204,6 @@
           <a:lstStyle/>
           <a:p>
             <a:pPr algn="ctr"/>
-            <a:endParaRPr/>
           </a:p>
         </p:txBody>
       </p:sp>
@@ -23758,7 +23680,7 @@
           </a:fontRef>
         </p:style>
         <p:txBody>
-          <a:bodyPr wrap="square" rtlCol="0" anchor="ctr"/>
+          <a:bodyPr rtlCol="0" anchor="ctr" wrap="square"/>
           <a:lstStyle/>
           <a:p>
             <a:pPr algn="l">
@@ -23775,7 +23697,6 @@
                 <a:latin typeface="Calibri"/>
               </a:defRPr>
             </a:pPr>
-            <a:endParaRPr/>
           </a:p>
         </p:txBody>
       </p:sp>
@@ -23816,7 +23737,7 @@
           </a:fontRef>
         </p:style>
         <p:txBody>
-          <a:bodyPr wrap="square" rtlCol="0" anchor="ctr"/>
+          <a:bodyPr rtlCol="0" anchor="ctr" wrap="square"/>
           <a:lstStyle/>
           <a:p>
             <a:pPr algn="l">
@@ -23833,7 +23754,6 @@
                 <a:latin typeface="Calibri"/>
               </a:defRPr>
             </a:pPr>
-            <a:endParaRPr/>
           </a:p>
         </p:txBody>
       </p:sp>
@@ -23874,7 +23794,7 @@
           </a:fontRef>
         </p:style>
         <p:txBody>
-          <a:bodyPr wrap="square" rtlCol="0" anchor="ctr"/>
+          <a:bodyPr rtlCol="0" anchor="ctr" wrap="square"/>
           <a:lstStyle/>
           <a:p>
             <a:pPr algn="l">
@@ -23891,7 +23811,6 @@
                 <a:latin typeface="Calibri"/>
               </a:defRPr>
             </a:pPr>
-            <a:endParaRPr/>
           </a:p>
         </p:txBody>
       </p:sp>
@@ -23932,7 +23851,7 @@
           </a:fontRef>
         </p:style>
         <p:txBody>
-          <a:bodyPr wrap="square" rtlCol="0" anchor="ctr"/>
+          <a:bodyPr rtlCol="0" anchor="ctr" wrap="square"/>
           <a:lstStyle/>
           <a:p>
             <a:pPr algn="l">
@@ -23949,7 +23868,6 @@
                 <a:latin typeface="Calibri"/>
               </a:defRPr>
             </a:pPr>
-            <a:endParaRPr/>
           </a:p>
         </p:txBody>
       </p:sp>
@@ -24184,7 +24102,7 @@
           </a:fontRef>
         </p:style>
         <p:txBody>
-          <a:bodyPr wrap="square" lIns="45720" tIns="18288" rIns="45720" bIns="18288" rtlCol="0" anchor="ctr"/>
+          <a:bodyPr rtlCol="0" anchor="ctr" wrap="square" lIns="45720" rIns="45720" tIns="18288" bIns="18288"/>
           <a:lstStyle/>
           <a:p>
             <a:pPr algn="l">
@@ -24374,12 +24292,6 @@
                 <a:latin typeface="Calibri"/>
               </a:defRPr>
             </a:pPr>
-            <a:endParaRPr sz="1800" b="0">
-              <a:solidFill>
-                <a:srgbClr val="222222"/>
-              </a:solidFill>
-              <a:latin typeface="Calibri"/>
-            </a:endParaRPr>
           </a:p>
           <a:p>
             <a:pPr algn="l">
@@ -24474,7 +24386,7 @@
           </a:fontRef>
         </p:style>
         <p:txBody>
-          <a:bodyPr wrap="square" lIns="164592" tIns="73152" rIns="164592" bIns="73152" rtlCol="0" anchor="ctr"/>
+          <a:bodyPr rtlCol="0" anchor="ctr" wrap="square" lIns="164592" rIns="164592" tIns="73152" bIns="73152"/>
           <a:lstStyle/>
           <a:p>
             <a:pPr algn="l"/>
@@ -24508,7 +24420,7 @@
 </file>
 
 <file path=ppt/slides/slide28.xml><?xml version="1.0" encoding="utf-8"?>
-<p:sld xmlns:a="http://schemas.openxmlformats.org/drawingml/2006/main" xmlns:r="http://schemas.openxmlformats.org/officeDocument/2006/relationships" xmlns:p="http://schemas.openxmlformats.org/presentationml/2006/main">
+<p:sld xmlns:a="http://schemas.openxmlformats.org/drawingml/2006/main" xmlns:p="http://schemas.openxmlformats.org/presentationml/2006/main" xmlns:r="http://schemas.openxmlformats.org/officeDocument/2006/relationships">
   <p:cSld>
     <p:spTree>
       <p:nvGrpSpPr>
@@ -24516,14 +24428,7 @@
         <p:cNvGrpSpPr/>
         <p:nvPr/>
       </p:nvGrpSpPr>
-      <p:grpSpPr>
-        <a:xfrm>
-          <a:off x="0" y="0"/>
-          <a:ext cx="0" cy="0"/>
-          <a:chOff x="0" y="0"/>
-          <a:chExt cx="0" cy="0"/>
-        </a:xfrm>
-      </p:grpSpPr>
+      <p:grpSpPr/>
       <p:sp>
         <p:nvSpPr>
           <p:cNvPr id="2" name="Title 1"/>
@@ -24611,7 +24516,6 @@
           <a:lstStyle/>
           <a:p>
             <a:pPr algn="ctr"/>
-            <a:endParaRPr/>
           </a:p>
         </p:txBody>
       </p:sp>
@@ -24800,7 +24704,7 @@
           </a:fontRef>
         </p:style>
         <p:txBody>
-          <a:bodyPr wrap="square" lIns="45720" tIns="18288" rIns="45720" bIns="18288" rtlCol="0" anchor="ctr"/>
+          <a:bodyPr rtlCol="0" anchor="ctr" wrap="square" lIns="45720" rIns="45720" tIns="18288" bIns="18288"/>
           <a:lstStyle/>
           <a:p>
             <a:pPr algn="l">
@@ -25348,7 +25252,7 @@
           </a:fontRef>
         </p:style>
         <p:txBody>
-          <a:bodyPr wrap="square" lIns="45720" tIns="18288" rIns="45720" bIns="18288" rtlCol="0" anchor="ctr"/>
+          <a:bodyPr rtlCol="0" anchor="ctr" wrap="square" lIns="45720" rIns="45720" tIns="18288" bIns="18288"/>
           <a:lstStyle/>
           <a:p>
             <a:pPr algn="ctr">
@@ -25416,7 +25320,7 @@
           </a:fontRef>
         </p:style>
         <p:txBody>
-          <a:bodyPr wrap="square" lIns="45720" tIns="18288" rIns="45720" bIns="18288" rtlCol="0" anchor="ctr"/>
+          <a:bodyPr rtlCol="0" anchor="ctr" wrap="square" lIns="45720" rIns="45720" tIns="18288" bIns="18288"/>
           <a:lstStyle/>
           <a:p>
             <a:pPr algn="ctr">
@@ -25484,7 +25388,7 @@
           </a:fontRef>
         </p:style>
         <p:txBody>
-          <a:bodyPr wrap="square" lIns="45720" tIns="18288" rIns="45720" bIns="18288" rtlCol="0" anchor="ctr"/>
+          <a:bodyPr rtlCol="0" anchor="ctr" wrap="square" lIns="45720" rIns="45720" tIns="18288" bIns="18288"/>
           <a:lstStyle/>
           <a:p>
             <a:pPr algn="ctr">
@@ -25552,7 +25456,7 @@
           </a:fontRef>
         </p:style>
         <p:txBody>
-          <a:bodyPr wrap="square" lIns="45720" tIns="18288" rIns="45720" bIns="18288" rtlCol="0" anchor="ctr"/>
+          <a:bodyPr rtlCol="0" anchor="ctr" wrap="square" lIns="45720" rIns="45720" tIns="18288" bIns="18288"/>
           <a:lstStyle/>
           <a:p>
             <a:pPr algn="ctr">
@@ -25620,7 +25524,7 @@
           </a:fontRef>
         </p:style>
         <p:txBody>
-          <a:bodyPr wrap="square" lIns="45720" tIns="18288" rIns="45720" bIns="18288" rtlCol="0" anchor="ctr"/>
+          <a:bodyPr rtlCol="0" anchor="ctr" wrap="square" lIns="45720" rIns="45720" tIns="18288" bIns="18288"/>
           <a:lstStyle/>
           <a:p>
             <a:pPr algn="ctr">
@@ -25688,7 +25592,7 @@
           </a:fontRef>
         </p:style>
         <p:txBody>
-          <a:bodyPr wrap="square" lIns="45720" tIns="18288" rIns="45720" bIns="18288" rtlCol="0" anchor="ctr"/>
+          <a:bodyPr rtlCol="0" anchor="ctr" wrap="square" lIns="45720" rIns="45720" tIns="18288" bIns="18288"/>
           <a:lstStyle/>
           <a:p>
             <a:pPr algn="ctr">
@@ -25756,7 +25660,7 @@
           </a:fontRef>
         </p:style>
         <p:txBody>
-          <a:bodyPr wrap="square" lIns="45720" tIns="18288" rIns="45720" bIns="18288" rtlCol="0" anchor="ctr"/>
+          <a:bodyPr rtlCol="0" anchor="ctr" wrap="square" lIns="45720" rIns="45720" tIns="18288" bIns="18288"/>
           <a:lstStyle/>
           <a:p>
             <a:pPr algn="ctr">
@@ -25824,7 +25728,7 @@
           </a:fontRef>
         </p:style>
         <p:txBody>
-          <a:bodyPr wrap="square" lIns="45720" tIns="18288" rIns="45720" bIns="18288" rtlCol="0" anchor="ctr"/>
+          <a:bodyPr rtlCol="0" anchor="ctr" wrap="square" lIns="45720" rIns="45720" tIns="18288" bIns="18288"/>
           <a:lstStyle/>
           <a:p>
             <a:pPr algn="ctr">
@@ -25892,7 +25796,7 @@
           </a:fontRef>
         </p:style>
         <p:txBody>
-          <a:bodyPr wrap="square" lIns="45720" tIns="18288" rIns="45720" bIns="18288" rtlCol="0" anchor="ctr"/>
+          <a:bodyPr rtlCol="0" anchor="ctr" wrap="square" lIns="45720" rIns="45720" tIns="18288" bIns="18288"/>
           <a:lstStyle/>
           <a:p>
             <a:pPr algn="ctr">
@@ -25960,7 +25864,7 @@
           </a:fontRef>
         </p:style>
         <p:txBody>
-          <a:bodyPr wrap="square" lIns="45720" tIns="18288" rIns="45720" bIns="18288" rtlCol="0" anchor="ctr"/>
+          <a:bodyPr rtlCol="0" anchor="ctr" wrap="square" lIns="45720" rIns="45720" tIns="18288" bIns="18288"/>
           <a:lstStyle/>
           <a:p>
             <a:pPr algn="ctr">
@@ -26028,7 +25932,7 @@
           </a:fontRef>
         </p:style>
         <p:txBody>
-          <a:bodyPr wrap="square" lIns="45720" tIns="18288" rIns="45720" bIns="18288" rtlCol="0" anchor="ctr"/>
+          <a:bodyPr rtlCol="0" anchor="ctr" wrap="square" lIns="45720" rIns="45720" tIns="18288" bIns="18288"/>
           <a:lstStyle/>
           <a:p>
             <a:pPr algn="ctr">
@@ -26096,7 +26000,7 @@
           </a:fontRef>
         </p:style>
         <p:txBody>
-          <a:bodyPr wrap="square" lIns="45720" tIns="18288" rIns="45720" bIns="18288" rtlCol="0" anchor="ctr"/>
+          <a:bodyPr rtlCol="0" anchor="ctr" wrap="square" lIns="45720" rIns="45720" tIns="18288" bIns="18288"/>
           <a:lstStyle/>
           <a:p>
             <a:pPr algn="ctr">
@@ -26164,7 +26068,7 @@
           </a:fontRef>
         </p:style>
         <p:txBody>
-          <a:bodyPr wrap="square" lIns="45720" tIns="18288" rIns="45720" bIns="18288" rtlCol="0" anchor="ctr"/>
+          <a:bodyPr rtlCol="0" anchor="ctr" wrap="square" lIns="45720" rIns="45720" tIns="18288" bIns="18288"/>
           <a:lstStyle/>
           <a:p>
             <a:pPr algn="ctr">
@@ -26232,7 +26136,7 @@
           </a:fontRef>
         </p:style>
         <p:txBody>
-          <a:bodyPr wrap="square" lIns="45720" tIns="18288" rIns="45720" bIns="18288" rtlCol="0" anchor="ctr"/>
+          <a:bodyPr rtlCol="0" anchor="ctr" wrap="square" lIns="45720" rIns="45720" tIns="18288" bIns="18288"/>
           <a:lstStyle/>
           <a:p>
             <a:pPr algn="ctr">
@@ -26300,7 +26204,7 @@
           </a:fontRef>
         </p:style>
         <p:txBody>
-          <a:bodyPr wrap="square" lIns="45720" tIns="18288" rIns="45720" bIns="18288" rtlCol="0" anchor="ctr"/>
+          <a:bodyPr rtlCol="0" anchor="ctr" wrap="square" lIns="45720" rIns="45720" tIns="18288" bIns="18288"/>
           <a:lstStyle/>
           <a:p>
             <a:pPr algn="ctr">
@@ -26368,7 +26272,7 @@
           </a:fontRef>
         </p:style>
         <p:txBody>
-          <a:bodyPr wrap="square" lIns="45720" tIns="18288" rIns="45720" bIns="18288" rtlCol="0" anchor="ctr"/>
+          <a:bodyPr rtlCol="0" anchor="ctr" wrap="square" lIns="45720" rIns="45720" tIns="18288" bIns="18288"/>
           <a:lstStyle/>
           <a:p>
             <a:pPr algn="ctr">
@@ -26436,7 +26340,7 @@
           </a:fontRef>
         </p:style>
         <p:txBody>
-          <a:bodyPr wrap="square" lIns="45720" tIns="18288" rIns="45720" bIns="18288" rtlCol="0" anchor="ctr"/>
+          <a:bodyPr rtlCol="0" anchor="ctr" wrap="square" lIns="45720" rIns="45720" tIns="18288" bIns="18288"/>
           <a:lstStyle/>
           <a:p>
             <a:pPr algn="ctr">
@@ -26504,7 +26408,7 @@
           </a:fontRef>
         </p:style>
         <p:txBody>
-          <a:bodyPr wrap="square" lIns="45720" tIns="18288" rIns="45720" bIns="18288" rtlCol="0" anchor="ctr"/>
+          <a:bodyPr rtlCol="0" anchor="ctr" wrap="square" lIns="45720" rIns="45720" tIns="18288" bIns="18288"/>
           <a:lstStyle/>
           <a:p>
             <a:pPr algn="ctr">
@@ -26572,7 +26476,7 @@
           </a:fontRef>
         </p:style>
         <p:txBody>
-          <a:bodyPr wrap="square" lIns="45720" tIns="18288" rIns="45720" bIns="18288" rtlCol="0" anchor="ctr"/>
+          <a:bodyPr rtlCol="0" anchor="ctr" wrap="square" lIns="45720" rIns="45720" tIns="18288" bIns="18288"/>
           <a:lstStyle/>
           <a:p>
             <a:pPr algn="ctr">
@@ -26640,7 +26544,7 @@
           </a:fontRef>
         </p:style>
         <p:txBody>
-          <a:bodyPr wrap="square" lIns="45720" tIns="18288" rIns="45720" bIns="18288" rtlCol="0" anchor="ctr"/>
+          <a:bodyPr rtlCol="0" anchor="ctr" wrap="square" lIns="45720" rIns="45720" tIns="18288" bIns="18288"/>
           <a:lstStyle/>
           <a:p>
             <a:pPr algn="ctr">
@@ -26708,7 +26612,7 @@
           </a:fontRef>
         </p:style>
         <p:txBody>
-          <a:bodyPr wrap="square" lIns="45720" tIns="18288" rIns="45720" bIns="18288" rtlCol="0" anchor="ctr"/>
+          <a:bodyPr rtlCol="0" anchor="ctr" wrap="square" lIns="45720" rIns="45720" tIns="18288" bIns="18288"/>
           <a:lstStyle/>
           <a:p>
             <a:pPr algn="ctr">
@@ -26776,7 +26680,7 @@
           </a:fontRef>
         </p:style>
         <p:txBody>
-          <a:bodyPr wrap="square" lIns="45720" tIns="18288" rIns="45720" bIns="18288" rtlCol="0" anchor="ctr"/>
+          <a:bodyPr rtlCol="0" anchor="ctr" wrap="square" lIns="45720" rIns="45720" tIns="18288" bIns="18288"/>
           <a:lstStyle/>
           <a:p>
             <a:pPr algn="ctr">
@@ -26844,7 +26748,7 @@
           </a:fontRef>
         </p:style>
         <p:txBody>
-          <a:bodyPr wrap="square" lIns="45720" tIns="18288" rIns="45720" bIns="18288" rtlCol="0" anchor="ctr"/>
+          <a:bodyPr rtlCol="0" anchor="ctr" wrap="square" lIns="45720" rIns="45720" tIns="18288" bIns="18288"/>
           <a:lstStyle/>
           <a:p>
             <a:pPr algn="ctr">
@@ -26912,7 +26816,7 @@
           </a:fontRef>
         </p:style>
         <p:txBody>
-          <a:bodyPr wrap="square" lIns="45720" tIns="18288" rIns="45720" bIns="18288" rtlCol="0" anchor="ctr"/>
+          <a:bodyPr rtlCol="0" anchor="ctr" wrap="square" lIns="45720" rIns="45720" tIns="18288" bIns="18288"/>
           <a:lstStyle/>
           <a:p>
             <a:pPr algn="ctr">
@@ -26980,7 +26884,7 @@
           </a:fontRef>
         </p:style>
         <p:txBody>
-          <a:bodyPr wrap="square" lIns="45720" tIns="18288" rIns="45720" bIns="18288" rtlCol="0" anchor="ctr"/>
+          <a:bodyPr rtlCol="0" anchor="ctr" wrap="square" lIns="45720" rIns="45720" tIns="18288" bIns="18288"/>
           <a:lstStyle/>
           <a:p>
             <a:pPr algn="ctr">
@@ -27048,7 +26952,7 @@
           </a:fontRef>
         </p:style>
         <p:txBody>
-          <a:bodyPr wrap="square" lIns="45720" tIns="18288" rIns="45720" bIns="18288" rtlCol="0" anchor="ctr"/>
+          <a:bodyPr rtlCol="0" anchor="ctr" wrap="square" lIns="45720" rIns="45720" tIns="18288" bIns="18288"/>
           <a:lstStyle/>
           <a:p>
             <a:pPr algn="ctr">
@@ -27065,7 +26969,6 @@
                 <a:latin typeface="Calibri"/>
               </a:defRPr>
             </a:pPr>
-            <a:endParaRPr/>
           </a:p>
         </p:txBody>
       </p:sp>
@@ -27108,7 +27011,7 @@
           </a:fontRef>
         </p:style>
         <p:txBody>
-          <a:bodyPr wrap="square" lIns="45720" tIns="18288" rIns="45720" bIns="18288" rtlCol="0" anchor="ctr"/>
+          <a:bodyPr rtlCol="0" anchor="ctr" wrap="square" lIns="45720" rIns="45720" tIns="18288" bIns="18288"/>
           <a:lstStyle/>
           <a:p>
             <a:pPr algn="ctr">
@@ -27125,7 +27028,6 @@
                 <a:latin typeface="Calibri"/>
               </a:defRPr>
             </a:pPr>
-            <a:endParaRPr/>
           </a:p>
         </p:txBody>
       </p:sp>
@@ -27168,7 +27070,7 @@
           </a:fontRef>
         </p:style>
         <p:txBody>
-          <a:bodyPr wrap="square" lIns="45720" tIns="18288" rIns="45720" bIns="18288" rtlCol="0" anchor="ctr"/>
+          <a:bodyPr rtlCol="0" anchor="ctr" wrap="square" lIns="45720" rIns="45720" tIns="18288" bIns="18288"/>
           <a:lstStyle/>
           <a:p>
             <a:pPr algn="ctr">
@@ -27236,7 +27138,7 @@
           </a:fontRef>
         </p:style>
         <p:txBody>
-          <a:bodyPr wrap="square" lIns="45720" tIns="18288" rIns="45720" bIns="18288" rtlCol="0" anchor="ctr"/>
+          <a:bodyPr rtlCol="0" anchor="ctr" wrap="square" lIns="45720" rIns="45720" tIns="18288" bIns="18288"/>
           <a:lstStyle/>
           <a:p>
             <a:pPr algn="ctr">
@@ -27304,7 +27206,7 @@
           </a:fontRef>
         </p:style>
         <p:txBody>
-          <a:bodyPr wrap="square" lIns="45720" tIns="18288" rIns="45720" bIns="18288" rtlCol="0" anchor="ctr"/>
+          <a:bodyPr rtlCol="0" anchor="ctr" wrap="square" lIns="45720" rIns="45720" tIns="18288" bIns="18288"/>
           <a:lstStyle/>
           <a:p>
             <a:pPr algn="ctr">
@@ -27341,8 +27243,8 @@
         </p:nvSpPr>
         <p:spPr>
           <a:xfrm>
-            <a:off x="6355080" y="4356977"/>
-            <a:ext cx="5669279" cy="553998"/>
+            <a:off x="6537960" y="4407408"/>
+            <a:ext cx="5120640" cy="1217168"/>
           </a:xfrm>
           <a:prstGeom prst="rect">
             <a:avLst/>
@@ -27370,20 +27272,14 @@
               </a:defRPr>
             </a:pPr>
             <a:r>
-              <a:rPr sz="1800" b="0" dirty="0">
+              <a:rPr sz="1800" b="0">
                 <a:solidFill>
                   <a:srgbClr val="666666"/>
                 </a:solidFill>
                 <a:latin typeface="Calibri"/>
               </a:rPr>
-              <a:t>At 3.34 ft/s a 10 s leg is 33.4 ft, and sin(45) = cos(45) = 0.707</a:t>
-            </a:r>
-            <a:endParaRPr lang="en-US" sz="1800" b="0" dirty="0">
-              <a:solidFill>
-                <a:srgbClr val="666666"/>
-              </a:solidFill>
-              <a:latin typeface="Calibri"/>
-            </a:endParaRPr>
+              <a:t>At 3.34 ft/s a 10 s leg is 33.4 ft, and sin(45) = cos(45) = 0.707.</a:t>
+            </a:r>
           </a:p>
           <a:p>
             <a:pPr algn="l">
@@ -27401,20 +27297,14 @@
               </a:defRPr>
             </a:pPr>
             <a:r>
-              <a:rPr lang="en-US" dirty="0">
+              <a:rPr sz="1800" b="0">
                 <a:solidFill>
                   <a:srgbClr val="666666"/>
                 </a:solidFill>
                 <a:latin typeface="Calibri"/>
               </a:rPr>
-              <a:t>In Excel, =SIN(RADIANS(45) =SIN(45*(3.14/180)) = 0.707</a:t>
-            </a:r>
-            <a:endParaRPr b="0" dirty="0">
-              <a:solidFill>
-                <a:srgbClr val="666666"/>
-              </a:solidFill>
-              <a:latin typeface="Calibri"/>
-            </a:endParaRPr>
+              <a:t>In Excel:  =SIN(RADIANS(45))  or  =SIN(45*(3.14/180))  =  0.707</a:t>
+            </a:r>
           </a:p>
         </p:txBody>
       </p:sp>
@@ -27459,7 +27349,7 @@
           </a:fontRef>
         </p:style>
         <p:txBody>
-          <a:bodyPr wrap="square" lIns="164592" tIns="73152" rIns="164592" bIns="73152" rtlCol="0" anchor="ctr"/>
+          <a:bodyPr rtlCol="0" anchor="ctr" wrap="square" lIns="164592" rIns="164592" tIns="73152" bIns="73152"/>
           <a:lstStyle/>
           <a:p>
             <a:pPr algn="l"/>
@@ -27493,7 +27383,7 @@
 </file>
 
 <file path=ppt/slides/slide29.xml><?xml version="1.0" encoding="utf-8"?>
-<p:sld xmlns:a="http://schemas.openxmlformats.org/drawingml/2006/main" xmlns:r="http://schemas.openxmlformats.org/officeDocument/2006/relationships" xmlns:p="http://schemas.openxmlformats.org/presentationml/2006/main">
+<p:sld xmlns:a="http://schemas.openxmlformats.org/drawingml/2006/main" xmlns:p="http://schemas.openxmlformats.org/presentationml/2006/main" xmlns:r="http://schemas.openxmlformats.org/officeDocument/2006/relationships">
   <p:cSld>
     <p:spTree>
       <p:nvGrpSpPr>
@@ -27501,14 +27391,7 @@
         <p:cNvGrpSpPr/>
         <p:nvPr/>
       </p:nvGrpSpPr>
-      <p:grpSpPr>
-        <a:xfrm>
-          <a:off x="0" y="0"/>
-          <a:ext cx="0" cy="0"/>
-          <a:chOff x="0" y="0"/>
-          <a:chExt cx="0" cy="0"/>
-        </a:xfrm>
-      </p:grpSpPr>
+      <p:grpSpPr/>
       <p:sp>
         <p:nvSpPr>
           <p:cNvPr id="2" name="Title 1"/>
@@ -27596,7 +27479,6 @@
           <a:lstStyle/>
           <a:p>
             <a:pPr algn="ctr"/>
-            <a:endParaRPr/>
           </a:p>
         </p:txBody>
       </p:sp>
@@ -27933,7 +27815,7 @@
           </a:fontRef>
         </p:style>
         <p:txBody>
-          <a:bodyPr wrap="square" lIns="164592" tIns="73152" rIns="164592" bIns="73152" rtlCol="0" anchor="ctr"/>
+          <a:bodyPr rtlCol="0" anchor="ctr" wrap="square" lIns="164592" rIns="164592" tIns="73152" bIns="73152"/>
           <a:lstStyle/>
           <a:p>
             <a:pPr algn="l"/>
@@ -27967,7 +27849,7 @@
 </file>
 
 <file path=ppt/slides/slide3.xml><?xml version="1.0" encoding="utf-8"?>
-<p:sld xmlns:a="http://schemas.openxmlformats.org/drawingml/2006/main" xmlns:r="http://schemas.openxmlformats.org/officeDocument/2006/relationships" xmlns:p="http://schemas.openxmlformats.org/presentationml/2006/main">
+<p:sld xmlns:a="http://schemas.openxmlformats.org/drawingml/2006/main" xmlns:p="http://schemas.openxmlformats.org/presentationml/2006/main" xmlns:r="http://schemas.openxmlformats.org/officeDocument/2006/relationships">
   <p:cSld>
     <p:spTree>
       <p:nvGrpSpPr>
@@ -27975,14 +27857,7 @@
         <p:cNvGrpSpPr/>
         <p:nvPr/>
       </p:nvGrpSpPr>
-      <p:grpSpPr>
-        <a:xfrm>
-          <a:off x="0" y="0"/>
-          <a:ext cx="0" cy="0"/>
-          <a:chOff x="0" y="0"/>
-          <a:chExt cx="0" cy="0"/>
-        </a:xfrm>
-      </p:grpSpPr>
+      <p:grpSpPr/>
       <p:sp>
         <p:nvSpPr>
           <p:cNvPr id="2" name="Title 1"/>
@@ -28070,7 +27945,6 @@
           <a:lstStyle/>
           <a:p>
             <a:pPr algn="ctr"/>
-            <a:endParaRPr/>
           </a:p>
         </p:txBody>
       </p:sp>
@@ -28306,12 +28180,6 @@
                 <a:latin typeface="Calibri"/>
               </a:defRPr>
             </a:pPr>
-            <a:endParaRPr sz="2700" b="0">
-              <a:solidFill>
-                <a:srgbClr val="222222"/>
-              </a:solidFill>
-              <a:latin typeface="Calibri"/>
-            </a:endParaRPr>
           </a:p>
           <a:p>
             <a:pPr algn="l">
@@ -28381,7 +28249,7 @@
           </a:fontRef>
         </p:style>
         <p:txBody>
-          <a:bodyPr wrap="square" lIns="164592" tIns="73152" rIns="164592" bIns="73152" rtlCol="0" anchor="ctr"/>
+          <a:bodyPr rtlCol="0" anchor="ctr" wrap="square" lIns="164592" rIns="164592" tIns="73152" bIns="73152"/>
           <a:lstStyle/>
           <a:p>
             <a:pPr algn="l"/>
@@ -28415,7 +28283,7 @@
 </file>
 
 <file path=ppt/slides/slide30.xml><?xml version="1.0" encoding="utf-8"?>
-<p:sld xmlns:a="http://schemas.openxmlformats.org/drawingml/2006/main" xmlns:r="http://schemas.openxmlformats.org/officeDocument/2006/relationships" xmlns:p="http://schemas.openxmlformats.org/presentationml/2006/main">
+<p:sld xmlns:a="http://schemas.openxmlformats.org/drawingml/2006/main" xmlns:p="http://schemas.openxmlformats.org/presentationml/2006/main" xmlns:r="http://schemas.openxmlformats.org/officeDocument/2006/relationships">
   <p:cSld>
     <p:spTree>
       <p:nvGrpSpPr>
@@ -28423,14 +28291,7 @@
         <p:cNvGrpSpPr/>
         <p:nvPr/>
       </p:nvGrpSpPr>
-      <p:grpSpPr>
-        <a:xfrm>
-          <a:off x="0" y="0"/>
-          <a:ext cx="0" cy="0"/>
-          <a:chOff x="0" y="0"/>
-          <a:chExt cx="0" cy="0"/>
-        </a:xfrm>
-      </p:grpSpPr>
+      <p:grpSpPr/>
       <p:sp>
         <p:nvSpPr>
           <p:cNvPr id="2" name="Title 1"/>
@@ -28518,7 +28379,6 @@
           <a:lstStyle/>
           <a:p>
             <a:pPr algn="ctr"/>
-            <a:endParaRPr/>
           </a:p>
         </p:txBody>
       </p:sp>
@@ -29001,7 +28861,7 @@
           </a:fontRef>
         </p:style>
         <p:txBody>
-          <a:bodyPr wrap="square" lIns="164592" tIns="73152" rIns="164592" bIns="73152" rtlCol="0" anchor="ctr"/>
+          <a:bodyPr rtlCol="0" anchor="ctr" wrap="square" lIns="164592" rIns="164592" tIns="73152" bIns="73152"/>
           <a:lstStyle/>
           <a:p>
             <a:pPr algn="l"/>
@@ -29035,7 +28895,7 @@
 </file>
 
 <file path=ppt/slides/slide31.xml><?xml version="1.0" encoding="utf-8"?>
-<p:sld xmlns:a="http://schemas.openxmlformats.org/drawingml/2006/main" xmlns:r="http://schemas.openxmlformats.org/officeDocument/2006/relationships" xmlns:p="http://schemas.openxmlformats.org/presentationml/2006/main">
+<p:sld xmlns:a="http://schemas.openxmlformats.org/drawingml/2006/main" xmlns:p="http://schemas.openxmlformats.org/presentationml/2006/main" xmlns:r="http://schemas.openxmlformats.org/officeDocument/2006/relationships">
   <p:cSld>
     <p:spTree>
       <p:nvGrpSpPr>
@@ -29043,14 +28903,7 @@
         <p:cNvGrpSpPr/>
         <p:nvPr/>
       </p:nvGrpSpPr>
-      <p:grpSpPr>
-        <a:xfrm>
-          <a:off x="0" y="0"/>
-          <a:ext cx="0" cy="0"/>
-          <a:chOff x="0" y="0"/>
-          <a:chExt cx="0" cy="0"/>
-        </a:xfrm>
-      </p:grpSpPr>
+      <p:grpSpPr/>
       <p:sp>
         <p:nvSpPr>
           <p:cNvPr id="2" name="Title 1"/>
@@ -29138,7 +28991,6 @@
           <a:lstStyle/>
           <a:p>
             <a:pPr algn="ctr"/>
-            <a:endParaRPr/>
           </a:p>
         </p:txBody>
       </p:sp>
@@ -29327,7 +29179,7 @@
           </a:fontRef>
         </p:style>
         <p:txBody>
-          <a:bodyPr wrap="square" lIns="146304" tIns="91440" bIns="73152" rtlCol="0" anchor="t"/>
+          <a:bodyPr rtlCol="0" anchor="t" wrap="square" lIns="146304" tIns="91440" bIns="73152"/>
           <a:lstStyle/>
           <a:p>
             <a:pPr algn="l">
@@ -29882,12 +29734,6 @@
                 <a:latin typeface="Calibri"/>
               </a:defRPr>
             </a:pPr>
-            <a:endParaRPr sz="1800" b="0">
-              <a:solidFill>
-                <a:srgbClr val="222222"/>
-              </a:solidFill>
-              <a:latin typeface="Calibri"/>
-            </a:endParaRPr>
           </a:p>
           <a:p>
             <a:pPr algn="l">
@@ -29925,7 +29771,7 @@
 </file>
 
 <file path=ppt/slides/slide32.xml><?xml version="1.0" encoding="utf-8"?>
-<p:sld xmlns:a="http://schemas.openxmlformats.org/drawingml/2006/main" xmlns:r="http://schemas.openxmlformats.org/officeDocument/2006/relationships" xmlns:p="http://schemas.openxmlformats.org/presentationml/2006/main">
+<p:sld xmlns:a="http://schemas.openxmlformats.org/drawingml/2006/main" xmlns:p="http://schemas.openxmlformats.org/presentationml/2006/main" xmlns:r="http://schemas.openxmlformats.org/officeDocument/2006/relationships">
   <p:cSld>
     <p:spTree>
       <p:nvGrpSpPr>
@@ -29933,14 +29779,7 @@
         <p:cNvGrpSpPr/>
         <p:nvPr/>
       </p:nvGrpSpPr>
-      <p:grpSpPr>
-        <a:xfrm>
-          <a:off x="0" y="0"/>
-          <a:ext cx="0" cy="0"/>
-          <a:chOff x="0" y="0"/>
-          <a:chExt cx="0" cy="0"/>
-        </a:xfrm>
-      </p:grpSpPr>
+      <p:grpSpPr/>
       <p:sp>
         <p:nvSpPr>
           <p:cNvPr id="2" name="Title 1"/>
@@ -30028,7 +29867,6 @@
           <a:lstStyle/>
           <a:p>
             <a:pPr algn="ctr"/>
-            <a:endParaRPr/>
           </a:p>
         </p:txBody>
       </p:sp>
@@ -30195,27 +30033,9 @@
                 <a:tableStyleId>{5C22544A-7EE6-4342-B048-85BDC9FD1C3A}</a:tableStyleId>
               </a:tblPr>
               <a:tblGrid>
-                <a:gridCol w="1423654">
-                  <a:extLst>
-                    <a:ext uri="{9D8B030D-6E8A-4147-A177-3AD203B41FA5}">
-                      <a16:colId xmlns:a16="http://schemas.microsoft.com/office/drawing/2014/main" val="20000"/>
-                    </a:ext>
-                  </a:extLst>
-                </a:gridCol>
-                <a:gridCol w="2643929">
-                  <a:extLst>
-                    <a:ext uri="{9D8B030D-6E8A-4147-A177-3AD203B41FA5}">
-                      <a16:colId xmlns:a16="http://schemas.microsoft.com/office/drawing/2014/main" val="20001"/>
-                    </a:ext>
-                  </a:extLst>
-                </a:gridCol>
-                <a:gridCol w="7118271">
-                  <a:extLst>
-                    <a:ext uri="{9D8B030D-6E8A-4147-A177-3AD203B41FA5}">
-                      <a16:colId xmlns:a16="http://schemas.microsoft.com/office/drawing/2014/main" val="20002"/>
-                    </a:ext>
-                  </a:extLst>
-                </a:gridCol>
+                <a:gridCol w="1423654"/>
+                <a:gridCol w="2643929"/>
+                <a:gridCol w="7118271"/>
               </a:tblGrid>
               <a:tr h="838200">
                 <a:tc>
@@ -30284,11 +30104,6 @@
                     </a:solidFill>
                   </a:tcPr>
                 </a:tc>
-                <a:extLst>
-                  <a:ext uri="{0D108BD9-81ED-4DB2-BD59-A6C34878D82A}">
-                    <a16:rowId xmlns:a16="http://schemas.microsoft.com/office/drawing/2014/main" val="10000"/>
-                  </a:ext>
-                </a:extLst>
               </a:tr>
               <a:tr h="838200">
                 <a:tc>
@@ -30357,11 +30172,6 @@
                     </a:solidFill>
                   </a:tcPr>
                 </a:tc>
-                <a:extLst>
-                  <a:ext uri="{0D108BD9-81ED-4DB2-BD59-A6C34878D82A}">
-                    <a16:rowId xmlns:a16="http://schemas.microsoft.com/office/drawing/2014/main" val="10001"/>
-                  </a:ext>
-                </a:extLst>
               </a:tr>
               <a:tr h="838200">
                 <a:tc>
@@ -30430,11 +30240,6 @@
                     </a:solidFill>
                   </a:tcPr>
                 </a:tc>
-                <a:extLst>
-                  <a:ext uri="{0D108BD9-81ED-4DB2-BD59-A6C34878D82A}">
-                    <a16:rowId xmlns:a16="http://schemas.microsoft.com/office/drawing/2014/main" val="10002"/>
-                  </a:ext>
-                </a:extLst>
               </a:tr>
               <a:tr h="838200">
                 <a:tc>
@@ -30503,11 +30308,6 @@
                     </a:solidFill>
                   </a:tcPr>
                 </a:tc>
-                <a:extLst>
-                  <a:ext uri="{0D108BD9-81ED-4DB2-BD59-A6C34878D82A}">
-                    <a16:rowId xmlns:a16="http://schemas.microsoft.com/office/drawing/2014/main" val="10003"/>
-                  </a:ext>
-                </a:extLst>
               </a:tr>
             </a:tbl>
           </a:graphicData>
@@ -30554,7 +30354,7 @@
           </a:fontRef>
         </p:style>
         <p:txBody>
-          <a:bodyPr wrap="square" lIns="164592" tIns="73152" rIns="164592" bIns="73152" rtlCol="0" anchor="ctr"/>
+          <a:bodyPr rtlCol="0" anchor="ctr" wrap="square" lIns="164592" rIns="164592" tIns="73152" bIns="73152"/>
           <a:lstStyle/>
           <a:p>
             <a:pPr algn="l"/>
@@ -30588,7 +30388,7 @@
 </file>
 
 <file path=ppt/slides/slide33.xml><?xml version="1.0" encoding="utf-8"?>
-<p:sld xmlns:a="http://schemas.openxmlformats.org/drawingml/2006/main" xmlns:r="http://schemas.openxmlformats.org/officeDocument/2006/relationships" xmlns:p="http://schemas.openxmlformats.org/presentationml/2006/main">
+<p:sld xmlns:a="http://schemas.openxmlformats.org/drawingml/2006/main" xmlns:p="http://schemas.openxmlformats.org/presentationml/2006/main" xmlns:r="http://schemas.openxmlformats.org/officeDocument/2006/relationships">
   <p:cSld>
     <p:spTree>
       <p:nvGrpSpPr>
@@ -30596,14 +30396,7 @@
         <p:cNvGrpSpPr/>
         <p:nvPr/>
       </p:nvGrpSpPr>
-      <p:grpSpPr>
-        <a:xfrm>
-          <a:off x="0" y="0"/>
-          <a:ext cx="0" cy="0"/>
-          <a:chOff x="0" y="0"/>
-          <a:chExt cx="0" cy="0"/>
-        </a:xfrm>
-      </p:grpSpPr>
+      <p:grpSpPr/>
       <p:sp>
         <p:nvSpPr>
           <p:cNvPr id="2" name="Title 1"/>
@@ -30691,7 +30484,6 @@
           <a:lstStyle/>
           <a:p>
             <a:pPr algn="ctr"/>
-            <a:endParaRPr/>
           </a:p>
         </p:txBody>
       </p:sp>
@@ -30880,7 +30672,7 @@
           </a:fontRef>
         </p:style>
         <p:txBody>
-          <a:bodyPr wrap="square" lIns="146304" tIns="91440" bIns="73152" rtlCol="0" anchor="t"/>
+          <a:bodyPr rtlCol="0" anchor="t" wrap="square" lIns="146304" tIns="91440" bIns="73152"/>
           <a:lstStyle/>
           <a:p>
             <a:pPr algn="l">
@@ -31303,12 +31095,6 @@
                 <a:latin typeface="Calibri"/>
               </a:defRPr>
             </a:pPr>
-            <a:endParaRPr sz="1800" b="0">
-              <a:solidFill>
-                <a:srgbClr val="222222"/>
-              </a:solidFill>
-              <a:latin typeface="Calibri"/>
-            </a:endParaRPr>
           </a:p>
           <a:p>
             <a:pPr algn="l">
@@ -31346,7 +31132,7 @@
 </file>
 
 <file path=ppt/slides/slide34.xml><?xml version="1.0" encoding="utf-8"?>
-<p:sld xmlns:a="http://schemas.openxmlformats.org/drawingml/2006/main" xmlns:r="http://schemas.openxmlformats.org/officeDocument/2006/relationships" xmlns:p="http://schemas.openxmlformats.org/presentationml/2006/main">
+<p:sld xmlns:a="http://schemas.openxmlformats.org/drawingml/2006/main" xmlns:p="http://schemas.openxmlformats.org/presentationml/2006/main" xmlns:r="http://schemas.openxmlformats.org/officeDocument/2006/relationships">
   <p:cSld>
     <p:spTree>
       <p:nvGrpSpPr>
@@ -31354,14 +31140,7 @@
         <p:cNvGrpSpPr/>
         <p:nvPr/>
       </p:nvGrpSpPr>
-      <p:grpSpPr>
-        <a:xfrm>
-          <a:off x="0" y="0"/>
-          <a:ext cx="0" cy="0"/>
-          <a:chOff x="0" y="0"/>
-          <a:chExt cx="0" cy="0"/>
-        </a:xfrm>
-      </p:grpSpPr>
+      <p:grpSpPr/>
       <p:sp>
         <p:nvSpPr>
           <p:cNvPr id="2" name="Title 1"/>
@@ -31449,7 +31228,6 @@
           <a:lstStyle/>
           <a:p>
             <a:pPr algn="ctr"/>
-            <a:endParaRPr/>
           </a:p>
         </p:txBody>
       </p:sp>
@@ -31638,7 +31416,7 @@
           </a:fontRef>
         </p:style>
         <p:txBody>
-          <a:bodyPr wrap="square" lIns="146304" tIns="91440" bIns="73152" rtlCol="0" anchor="t"/>
+          <a:bodyPr rtlCol="0" anchor="t" wrap="square" lIns="146304" tIns="91440" bIns="73152"/>
           <a:lstStyle/>
           <a:p>
             <a:pPr algn="l">
@@ -32060,7 +31838,7 @@
 </file>
 
 <file path=ppt/slides/slide35.xml><?xml version="1.0" encoding="utf-8"?>
-<p:sld xmlns:a="http://schemas.openxmlformats.org/drawingml/2006/main" xmlns:r="http://schemas.openxmlformats.org/officeDocument/2006/relationships" xmlns:p="http://schemas.openxmlformats.org/presentationml/2006/main">
+<p:sld xmlns:a="http://schemas.openxmlformats.org/drawingml/2006/main" xmlns:p="http://schemas.openxmlformats.org/presentationml/2006/main" xmlns:r="http://schemas.openxmlformats.org/officeDocument/2006/relationships">
   <p:cSld>
     <p:spTree>
       <p:nvGrpSpPr>
@@ -32068,14 +31846,7 @@
         <p:cNvGrpSpPr/>
         <p:nvPr/>
       </p:nvGrpSpPr>
-      <p:grpSpPr>
-        <a:xfrm>
-          <a:off x="0" y="0"/>
-          <a:ext cx="0" cy="0"/>
-          <a:chOff x="0" y="0"/>
-          <a:chExt cx="0" cy="0"/>
-        </a:xfrm>
-      </p:grpSpPr>
+      <p:grpSpPr/>
       <p:sp>
         <p:nvSpPr>
           <p:cNvPr id="2" name="Title 1"/>
@@ -32163,7 +31934,6 @@
           <a:lstStyle/>
           <a:p>
             <a:pPr algn="ctr"/>
-            <a:endParaRPr/>
           </a:p>
         </p:txBody>
       </p:sp>
@@ -32302,7 +32072,7 @@
           </a:fontRef>
         </p:style>
         <p:txBody>
-          <a:bodyPr wrap="square" lIns="182880" rtlCol="0" anchor="ctr"/>
+          <a:bodyPr rtlCol="0" anchor="ctr" wrap="square" lIns="182880"/>
           <a:lstStyle/>
           <a:p>
             <a:pPr algn="l"/>
@@ -32817,7 +32587,7 @@
           </a:fontRef>
         </p:style>
         <p:txBody>
-          <a:bodyPr wrap="square" lIns="164592" tIns="73152" rIns="164592" bIns="73152" rtlCol="0" anchor="ctr"/>
+          <a:bodyPr rtlCol="0" anchor="ctr" wrap="square" lIns="164592" rIns="164592" tIns="73152" bIns="73152"/>
           <a:lstStyle/>
           <a:p>
             <a:pPr algn="l"/>
@@ -32851,7 +32621,7 @@
 </file>
 
 <file path=ppt/slides/slide36.xml><?xml version="1.0" encoding="utf-8"?>
-<p:sld xmlns:a="http://schemas.openxmlformats.org/drawingml/2006/main" xmlns:r="http://schemas.openxmlformats.org/officeDocument/2006/relationships" xmlns:p="http://schemas.openxmlformats.org/presentationml/2006/main">
+<p:sld xmlns:a="http://schemas.openxmlformats.org/drawingml/2006/main" xmlns:p="http://schemas.openxmlformats.org/presentationml/2006/main" xmlns:r="http://schemas.openxmlformats.org/officeDocument/2006/relationships">
   <p:cSld>
     <p:spTree>
       <p:nvGrpSpPr>
@@ -32859,14 +32629,7 @@
         <p:cNvGrpSpPr/>
         <p:nvPr/>
       </p:nvGrpSpPr>
-      <p:grpSpPr>
-        <a:xfrm>
-          <a:off x="0" y="0"/>
-          <a:ext cx="0" cy="0"/>
-          <a:chOff x="0" y="0"/>
-          <a:chExt cx="0" cy="0"/>
-        </a:xfrm>
-      </p:grpSpPr>
+      <p:grpSpPr/>
       <p:sp>
         <p:nvSpPr>
           <p:cNvPr id="2" name="Title 1"/>
@@ -32954,7 +32717,6 @@
           <a:lstStyle/>
           <a:p>
             <a:pPr algn="ctr"/>
-            <a:endParaRPr/>
           </a:p>
         </p:txBody>
       </p:sp>
@@ -33293,7 +33055,7 @@
           </a:fontRef>
         </p:style>
         <p:txBody>
-          <a:bodyPr wrap="square" lIns="164592" tIns="73152" rIns="164592" bIns="73152" rtlCol="0" anchor="ctr"/>
+          <a:bodyPr rtlCol="0" anchor="ctr" wrap="square" lIns="164592" rIns="164592" tIns="73152" bIns="73152"/>
           <a:lstStyle/>
           <a:p>
             <a:pPr algn="l"/>
@@ -33327,7 +33089,7 @@
 </file>
 
 <file path=ppt/slides/slide37.xml><?xml version="1.0" encoding="utf-8"?>
-<p:sld xmlns:a="http://schemas.openxmlformats.org/drawingml/2006/main" xmlns:r="http://schemas.openxmlformats.org/officeDocument/2006/relationships" xmlns:p="http://schemas.openxmlformats.org/presentationml/2006/main">
+<p:sld xmlns:a="http://schemas.openxmlformats.org/drawingml/2006/main" xmlns:p="http://schemas.openxmlformats.org/presentationml/2006/main" xmlns:r="http://schemas.openxmlformats.org/officeDocument/2006/relationships">
   <p:cSld>
     <p:spTree>
       <p:nvGrpSpPr>
@@ -33335,14 +33097,7 @@
         <p:cNvGrpSpPr/>
         <p:nvPr/>
       </p:nvGrpSpPr>
-      <p:grpSpPr>
-        <a:xfrm>
-          <a:off x="0" y="0"/>
-          <a:ext cx="0" cy="0"/>
-          <a:chOff x="0" y="0"/>
-          <a:chExt cx="0" cy="0"/>
-        </a:xfrm>
-      </p:grpSpPr>
+      <p:grpSpPr/>
       <p:sp>
         <p:nvSpPr>
           <p:cNvPr id="2" name="Title 1"/>
@@ -33430,7 +33185,6 @@
           <a:lstStyle/>
           <a:p>
             <a:pPr algn="ctr"/>
-            <a:endParaRPr/>
           </a:p>
         </p:txBody>
       </p:sp>
@@ -33714,12 +33468,6 @@
                 <a:latin typeface="Calibri"/>
               </a:defRPr>
             </a:pPr>
-            <a:endParaRPr sz="2100" b="0">
-              <a:solidFill>
-                <a:srgbClr val="222222"/>
-              </a:solidFill>
-              <a:latin typeface="Calibri"/>
-            </a:endParaRPr>
           </a:p>
           <a:p>
             <a:pPr algn="l">
@@ -33807,7 +33555,7 @@
 </file>
 
 <file path=ppt/slides/slide38.xml><?xml version="1.0" encoding="utf-8"?>
-<p:sld xmlns:a="http://schemas.openxmlformats.org/drawingml/2006/main" xmlns:r="http://schemas.openxmlformats.org/officeDocument/2006/relationships" xmlns:p="http://schemas.openxmlformats.org/presentationml/2006/main">
+<p:sld xmlns:a="http://schemas.openxmlformats.org/drawingml/2006/main" xmlns:p="http://schemas.openxmlformats.org/presentationml/2006/main" xmlns:r="http://schemas.openxmlformats.org/officeDocument/2006/relationships">
   <p:cSld>
     <p:spTree>
       <p:nvGrpSpPr>
@@ -33815,14 +33563,7 @@
         <p:cNvGrpSpPr/>
         <p:nvPr/>
       </p:nvGrpSpPr>
-      <p:grpSpPr>
-        <a:xfrm>
-          <a:off x="0" y="0"/>
-          <a:ext cx="0" cy="0"/>
-          <a:chOff x="0" y="0"/>
-          <a:chExt cx="0" cy="0"/>
-        </a:xfrm>
-      </p:grpSpPr>
+      <p:grpSpPr/>
       <p:sp>
         <p:nvSpPr>
           <p:cNvPr id="2" name="Title 1"/>
@@ -33910,7 +33651,6 @@
           <a:lstStyle/>
           <a:p>
             <a:pPr algn="ctr"/>
-            <a:endParaRPr/>
           </a:p>
         </p:txBody>
       </p:sp>
@@ -34568,7 +34308,7 @@
           </a:fontRef>
         </p:style>
         <p:txBody>
-          <a:bodyPr wrap="square" lIns="164592" tIns="73152" rIns="164592" bIns="73152" rtlCol="0" anchor="ctr"/>
+          <a:bodyPr rtlCol="0" anchor="ctr" wrap="square" lIns="164592" rIns="164592" tIns="73152" bIns="73152"/>
           <a:lstStyle/>
           <a:p>
             <a:pPr algn="l"/>
@@ -34602,7 +34342,7 @@
 </file>
 
 <file path=ppt/slides/slide39.xml><?xml version="1.0" encoding="utf-8"?>
-<p:sld xmlns:a="http://schemas.openxmlformats.org/drawingml/2006/main" xmlns:r="http://schemas.openxmlformats.org/officeDocument/2006/relationships" xmlns:p="http://schemas.openxmlformats.org/presentationml/2006/main">
+<p:sld xmlns:a="http://schemas.openxmlformats.org/drawingml/2006/main" xmlns:p="http://schemas.openxmlformats.org/presentationml/2006/main" xmlns:r="http://schemas.openxmlformats.org/officeDocument/2006/relationships">
   <p:cSld>
     <p:spTree>
       <p:nvGrpSpPr>
@@ -34610,14 +34350,7 @@
         <p:cNvGrpSpPr/>
         <p:nvPr/>
       </p:nvGrpSpPr>
-      <p:grpSpPr>
-        <a:xfrm>
-          <a:off x="0" y="0"/>
-          <a:ext cx="0" cy="0"/>
-          <a:chOff x="0" y="0"/>
-          <a:chExt cx="0" cy="0"/>
-        </a:xfrm>
-      </p:grpSpPr>
+      <p:grpSpPr/>
       <p:sp>
         <p:nvSpPr>
           <p:cNvPr id="2" name="Title 1"/>
@@ -34705,7 +34438,6 @@
           <a:lstStyle/>
           <a:p>
             <a:pPr algn="ctr"/>
-            <a:endParaRPr/>
           </a:p>
         </p:txBody>
       </p:sp>
@@ -35085,7 +34817,7 @@
 </file>
 
 <file path=ppt/slides/slide4.xml><?xml version="1.0" encoding="utf-8"?>
-<p:sld xmlns:a="http://schemas.openxmlformats.org/drawingml/2006/main" xmlns:r="http://schemas.openxmlformats.org/officeDocument/2006/relationships" xmlns:p="http://schemas.openxmlformats.org/presentationml/2006/main">
+<p:sld xmlns:a="http://schemas.openxmlformats.org/drawingml/2006/main" xmlns:p="http://schemas.openxmlformats.org/presentationml/2006/main" xmlns:r="http://schemas.openxmlformats.org/officeDocument/2006/relationships">
   <p:cSld>
     <p:spTree>
       <p:nvGrpSpPr>
@@ -35093,14 +34825,7 @@
         <p:cNvGrpSpPr/>
         <p:nvPr/>
       </p:nvGrpSpPr>
-      <p:grpSpPr>
-        <a:xfrm>
-          <a:off x="0" y="0"/>
-          <a:ext cx="0" cy="0"/>
-          <a:chOff x="0" y="0"/>
-          <a:chExt cx="0" cy="0"/>
-        </a:xfrm>
-      </p:grpSpPr>
+      <p:grpSpPr/>
       <p:sp>
         <p:nvSpPr>
           <p:cNvPr id="2" name="Title 1"/>
@@ -35188,7 +34913,6 @@
           <a:lstStyle/>
           <a:p>
             <a:pPr algn="ctr"/>
-            <a:endParaRPr/>
           </a:p>
         </p:txBody>
       </p:sp>
@@ -35307,20 +35031,8 @@
                 <a:tableStyleId>{5C22544A-7EE6-4342-B048-85BDC9FD1C3A}</a:tableStyleId>
               </a:tblPr>
               <a:tblGrid>
-                <a:gridCol w="1118585">
-                  <a:extLst>
-                    <a:ext uri="{9D8B030D-6E8A-4147-A177-3AD203B41FA5}">
-                      <a16:colId xmlns:a16="http://schemas.microsoft.com/office/drawing/2014/main" val="20000"/>
-                    </a:ext>
-                  </a:extLst>
-                </a:gridCol>
-                <a:gridCol w="10067269">
-                  <a:extLst>
-                    <a:ext uri="{9D8B030D-6E8A-4147-A177-3AD203B41FA5}">
-                      <a16:colId xmlns:a16="http://schemas.microsoft.com/office/drawing/2014/main" val="20001"/>
-                    </a:ext>
-                  </a:extLst>
-                </a:gridCol>
+                <a:gridCol w="1118585"/>
+                <a:gridCol w="10067269"/>
               </a:tblGrid>
               <a:tr h="457200">
                 <a:tc>
@@ -35367,11 +35079,6 @@
                     </a:solidFill>
                   </a:tcPr>
                 </a:tc>
-                <a:extLst>
-                  <a:ext uri="{0D108BD9-81ED-4DB2-BD59-A6C34878D82A}">
-                    <a16:rowId xmlns:a16="http://schemas.microsoft.com/office/drawing/2014/main" val="10000"/>
-                  </a:ext>
-                </a:extLst>
               </a:tr>
               <a:tr h="457200">
                 <a:tc>
@@ -35418,11 +35125,6 @@
                     </a:solidFill>
                   </a:tcPr>
                 </a:tc>
-                <a:extLst>
-                  <a:ext uri="{0D108BD9-81ED-4DB2-BD59-A6C34878D82A}">
-                    <a16:rowId xmlns:a16="http://schemas.microsoft.com/office/drawing/2014/main" val="10001"/>
-                  </a:ext>
-                </a:extLst>
               </a:tr>
               <a:tr h="457200">
                 <a:tc>
@@ -35469,11 +35171,6 @@
                     </a:solidFill>
                   </a:tcPr>
                 </a:tc>
-                <a:extLst>
-                  <a:ext uri="{0D108BD9-81ED-4DB2-BD59-A6C34878D82A}">
-                    <a16:rowId xmlns:a16="http://schemas.microsoft.com/office/drawing/2014/main" val="10002"/>
-                  </a:ext>
-                </a:extLst>
               </a:tr>
               <a:tr h="457200">
                 <a:tc>
@@ -35520,11 +35217,6 @@
                     </a:solidFill>
                   </a:tcPr>
                 </a:tc>
-                <a:extLst>
-                  <a:ext uri="{0D108BD9-81ED-4DB2-BD59-A6C34878D82A}">
-                    <a16:rowId xmlns:a16="http://schemas.microsoft.com/office/drawing/2014/main" val="10003"/>
-                  </a:ext>
-                </a:extLst>
               </a:tr>
               <a:tr h="457200">
                 <a:tc>
@@ -35571,11 +35263,6 @@
                     </a:solidFill>
                   </a:tcPr>
                 </a:tc>
-                <a:extLst>
-                  <a:ext uri="{0D108BD9-81ED-4DB2-BD59-A6C34878D82A}">
-                    <a16:rowId xmlns:a16="http://schemas.microsoft.com/office/drawing/2014/main" val="10004"/>
-                  </a:ext>
-                </a:extLst>
               </a:tr>
               <a:tr h="457200">
                 <a:tc>
@@ -35622,11 +35309,6 @@
                     </a:solidFill>
                   </a:tcPr>
                 </a:tc>
-                <a:extLst>
-                  <a:ext uri="{0D108BD9-81ED-4DB2-BD59-A6C34878D82A}">
-                    <a16:rowId xmlns:a16="http://schemas.microsoft.com/office/drawing/2014/main" val="10005"/>
-                  </a:ext>
-                </a:extLst>
               </a:tr>
               <a:tr h="457200">
                 <a:tc>
@@ -35673,11 +35355,6 @@
                     </a:solidFill>
                   </a:tcPr>
                 </a:tc>
-                <a:extLst>
-                  <a:ext uri="{0D108BD9-81ED-4DB2-BD59-A6C34878D82A}">
-                    <a16:rowId xmlns:a16="http://schemas.microsoft.com/office/drawing/2014/main" val="10006"/>
-                  </a:ext>
-                </a:extLst>
               </a:tr>
               <a:tr h="457200">
                 <a:tc>
@@ -35724,11 +35401,6 @@
                     </a:solidFill>
                   </a:tcPr>
                 </a:tc>
-                <a:extLst>
-                  <a:ext uri="{0D108BD9-81ED-4DB2-BD59-A6C34878D82A}">
-                    <a16:rowId xmlns:a16="http://schemas.microsoft.com/office/drawing/2014/main" val="10007"/>
-                  </a:ext>
-                </a:extLst>
               </a:tr>
               <a:tr h="457200">
                 <a:tc>
@@ -35775,11 +35447,6 @@
                     </a:solidFill>
                   </a:tcPr>
                 </a:tc>
-                <a:extLst>
-                  <a:ext uri="{0D108BD9-81ED-4DB2-BD59-A6C34878D82A}">
-                    <a16:rowId xmlns:a16="http://schemas.microsoft.com/office/drawing/2014/main" val="10008"/>
-                  </a:ext>
-                </a:extLst>
               </a:tr>
               <a:tr h="457200">
                 <a:tc>
@@ -35826,11 +35493,6 @@
                     </a:solidFill>
                   </a:tcPr>
                 </a:tc>
-                <a:extLst>
-                  <a:ext uri="{0D108BD9-81ED-4DB2-BD59-A6C34878D82A}">
-                    <a16:rowId xmlns:a16="http://schemas.microsoft.com/office/drawing/2014/main" val="10009"/>
-                  </a:ext>
-                </a:extLst>
               </a:tr>
               <a:tr h="457200">
                 <a:tc>
@@ -35877,11 +35539,6 @@
                     </a:solidFill>
                   </a:tcPr>
                 </a:tc>
-                <a:extLst>
-                  <a:ext uri="{0D108BD9-81ED-4DB2-BD59-A6C34878D82A}">
-                    <a16:rowId xmlns:a16="http://schemas.microsoft.com/office/drawing/2014/main" val="10010"/>
-                  </a:ext>
-                </a:extLst>
               </a:tr>
             </a:tbl>
           </a:graphicData>
@@ -35896,7 +35553,7 @@
 </file>
 
 <file path=ppt/slides/slide5.xml><?xml version="1.0" encoding="utf-8"?>
-<p:sld xmlns:a="http://schemas.openxmlformats.org/drawingml/2006/main" xmlns:r="http://schemas.openxmlformats.org/officeDocument/2006/relationships" xmlns:p="http://schemas.openxmlformats.org/presentationml/2006/main">
+<p:sld xmlns:a="http://schemas.openxmlformats.org/drawingml/2006/main" xmlns:p="http://schemas.openxmlformats.org/presentationml/2006/main" xmlns:r="http://schemas.openxmlformats.org/officeDocument/2006/relationships">
   <p:cSld>
     <p:spTree>
       <p:nvGrpSpPr>
@@ -35904,14 +35561,7 @@
         <p:cNvGrpSpPr/>
         <p:nvPr/>
       </p:nvGrpSpPr>
-      <p:grpSpPr>
-        <a:xfrm>
-          <a:off x="0" y="0"/>
-          <a:ext cx="0" cy="0"/>
-          <a:chOff x="0" y="0"/>
-          <a:chExt cx="0" cy="0"/>
-        </a:xfrm>
-      </p:grpSpPr>
+      <p:grpSpPr/>
       <p:sp>
         <p:nvSpPr>
           <p:cNvPr id="2" name="Title 1"/>
@@ -35999,7 +35649,6 @@
           <a:lstStyle/>
           <a:p>
             <a:pPr algn="ctr"/>
-            <a:endParaRPr/>
           </a:p>
         </p:txBody>
       </p:sp>
@@ -36532,7 +36181,7 @@
           </a:fontRef>
         </p:style>
         <p:txBody>
-          <a:bodyPr wrap="square" lIns="164592" tIns="73152" rIns="164592" bIns="73152" rtlCol="0" anchor="ctr"/>
+          <a:bodyPr rtlCol="0" anchor="ctr" wrap="square" lIns="164592" rIns="164592" tIns="73152" bIns="73152"/>
           <a:lstStyle/>
           <a:p>
             <a:pPr algn="l"/>
@@ -36566,7 +36215,7 @@
 </file>
 
 <file path=ppt/slides/slide6.xml><?xml version="1.0" encoding="utf-8"?>
-<p:sld xmlns:a="http://schemas.openxmlformats.org/drawingml/2006/main" xmlns:r="http://schemas.openxmlformats.org/officeDocument/2006/relationships" xmlns:p="http://schemas.openxmlformats.org/presentationml/2006/main">
+<p:sld xmlns:a="http://schemas.openxmlformats.org/drawingml/2006/main" xmlns:p="http://schemas.openxmlformats.org/presentationml/2006/main" xmlns:r="http://schemas.openxmlformats.org/officeDocument/2006/relationships">
   <p:cSld>
     <p:spTree>
       <p:nvGrpSpPr>
@@ -36574,14 +36223,7 @@
         <p:cNvGrpSpPr/>
         <p:nvPr/>
       </p:nvGrpSpPr>
-      <p:grpSpPr>
-        <a:xfrm>
-          <a:off x="0" y="0"/>
-          <a:ext cx="0" cy="0"/>
-          <a:chOff x="0" y="0"/>
-          <a:chExt cx="0" cy="0"/>
-        </a:xfrm>
-      </p:grpSpPr>
+      <p:grpSpPr/>
       <p:sp>
         <p:nvSpPr>
           <p:cNvPr id="2" name="Title 1"/>
@@ -36669,7 +36311,6 @@
           <a:lstStyle/>
           <a:p>
             <a:pPr algn="ctr"/>
-            <a:endParaRPr/>
           </a:p>
         </p:txBody>
       </p:sp>
@@ -36808,7 +36449,7 @@
           </a:fontRef>
         </p:style>
         <p:txBody>
-          <a:bodyPr wrap="square" lIns="45720" tIns="18288" rIns="45720" bIns="18288" rtlCol="0" anchor="ctr"/>
+          <a:bodyPr rtlCol="0" anchor="ctr" wrap="square" lIns="45720" rIns="45720" tIns="18288" bIns="18288"/>
           <a:lstStyle/>
           <a:p>
             <a:pPr algn="ctr">
@@ -36878,7 +36519,7 @@
           </a:fontRef>
         </p:style>
         <p:txBody>
-          <a:bodyPr wrap="square" lIns="45720" tIns="18288" rIns="45720" bIns="18288" rtlCol="0" anchor="ctr"/>
+          <a:bodyPr rtlCol="0" anchor="ctr" wrap="square" lIns="45720" rIns="45720" tIns="18288" bIns="18288"/>
           <a:lstStyle/>
           <a:p>
             <a:pPr algn="ctr">
@@ -36994,7 +36635,7 @@
           </a:fontRef>
         </p:style>
         <p:txBody>
-          <a:bodyPr wrap="square" lIns="45720" tIns="18288" rIns="45720" bIns="18288" rtlCol="0" anchor="ctr"/>
+          <a:bodyPr rtlCol="0" anchor="ctr" wrap="square" lIns="45720" rIns="45720" tIns="18288" bIns="18288"/>
           <a:lstStyle/>
           <a:p>
             <a:pPr algn="ctr">
@@ -37064,7 +36705,7 @@
           </a:fontRef>
         </p:style>
         <p:txBody>
-          <a:bodyPr wrap="square" lIns="45720" tIns="18288" rIns="45720" bIns="18288" rtlCol="0" anchor="ctr"/>
+          <a:bodyPr rtlCol="0" anchor="ctr" wrap="square" lIns="45720" rIns="45720" tIns="18288" bIns="18288"/>
           <a:lstStyle/>
           <a:p>
             <a:pPr algn="ctr">
@@ -37180,7 +36821,7 @@
           </a:fontRef>
         </p:style>
         <p:txBody>
-          <a:bodyPr wrap="square" lIns="45720" tIns="18288" rIns="45720" bIns="18288" rtlCol="0" anchor="ctr"/>
+          <a:bodyPr rtlCol="0" anchor="ctr" wrap="square" lIns="45720" rIns="45720" tIns="18288" bIns="18288"/>
           <a:lstStyle/>
           <a:p>
             <a:pPr algn="ctr">
@@ -37250,7 +36891,7 @@
           </a:fontRef>
         </p:style>
         <p:txBody>
-          <a:bodyPr wrap="square" lIns="45720" tIns="18288" rIns="45720" bIns="18288" rtlCol="0" anchor="ctr"/>
+          <a:bodyPr rtlCol="0" anchor="ctr" wrap="square" lIns="45720" rIns="45720" tIns="18288" bIns="18288"/>
           <a:lstStyle/>
           <a:p>
             <a:pPr algn="ctr">
@@ -37391,7 +37032,7 @@
           </a:fontRef>
         </p:style>
         <p:txBody>
-          <a:bodyPr wrap="square" lIns="45720" tIns="18288" rIns="45720" bIns="18288" rtlCol="0" anchor="ctr"/>
+          <a:bodyPr rtlCol="0" anchor="ctr" wrap="square" lIns="45720" rIns="45720" tIns="18288" bIns="18288"/>
           <a:lstStyle/>
           <a:p>
             <a:pPr algn="ctr">
@@ -37461,7 +37102,7 @@
           </a:fontRef>
         </p:style>
         <p:txBody>
-          <a:bodyPr wrap="square" lIns="45720" tIns="18288" rIns="45720" bIns="18288" rtlCol="0" anchor="ctr"/>
+          <a:bodyPr rtlCol="0" anchor="ctr" wrap="square" lIns="45720" rIns="45720" tIns="18288" bIns="18288"/>
           <a:lstStyle/>
           <a:p>
             <a:pPr algn="ctr">
@@ -37711,8 +37352,8 @@
         </p:nvCxnSpPr>
         <p:spPr>
           <a:xfrm>
-            <a:off x="3611880" y="4526280"/>
-            <a:ext cx="2194560" cy="0"/>
+            <a:off x="4178808" y="4526280"/>
+            <a:ext cx="1627632" cy="0"/>
           </a:xfrm>
           <a:prstGeom prst="line">
             <a:avLst/>
@@ -37747,7 +37388,7 @@
         <p:spPr>
           <a:xfrm>
             <a:off x="7269480" y="4526280"/>
-            <a:ext cx="2194560" cy="0"/>
+            <a:ext cx="1627632" cy="0"/>
           </a:xfrm>
           <a:prstGeom prst="line">
             <a:avLst/>
@@ -37773,9 +37414,197 @@
           </a:fontRef>
         </p:style>
       </p:cxnSp>
-      <p:sp>
-        <p:nvSpPr>
-          <p:cNvPr id="24" name="Oval 23"/>
+      <p:cxnSp>
+        <p:nvCxnSpPr>
+          <p:cNvPr id="24" name="Connector 23"/>
+          <p:cNvCxnSpPr/>
+          <p:nvPr/>
+        </p:nvCxnSpPr>
+        <p:spPr>
+          <a:xfrm flipV="1">
+            <a:off x="3611880" y="4251960"/>
+            <a:ext cx="566928" cy="274320"/>
+          </a:xfrm>
+          <a:prstGeom prst="line">
+            <a:avLst/>
+          </a:prstGeom>
+          <a:ln w="28575">
+            <a:solidFill>
+              <a:srgbClr val="0E7C86"/>
+            </a:solidFill>
+          </a:ln>
+        </p:spPr>
+        <p:style>
+          <a:lnRef idx="2">
+            <a:schemeClr val="accent1"/>
+          </a:lnRef>
+          <a:fillRef idx="0">
+            <a:schemeClr val="accent1"/>
+          </a:fillRef>
+          <a:effectRef idx="1">
+            <a:schemeClr val="accent1"/>
+          </a:effectRef>
+          <a:fontRef idx="minor">
+            <a:schemeClr val="tx1"/>
+          </a:fontRef>
+        </p:style>
+      </p:cxnSp>
+      <p:sp>
+        <p:nvSpPr>
+          <p:cNvPr id="25" name="Oval 24"/>
+          <p:cNvSpPr/>
+          <p:nvPr/>
+        </p:nvSpPr>
+        <p:spPr>
+          <a:xfrm>
+            <a:off x="3547872" y="4462272"/>
+            <a:ext cx="128016" cy="128016"/>
+          </a:xfrm>
+          <a:prstGeom prst="ellipse">
+            <a:avLst/>
+          </a:prstGeom>
+          <a:solidFill>
+            <a:srgbClr val="0E7C86"/>
+          </a:solidFill>
+          <a:ln w="9525">
+            <a:solidFill>
+              <a:srgbClr val="0E7C86"/>
+            </a:solidFill>
+          </a:ln>
+          <a:effectLst/>
+        </p:spPr>
+        <p:style>
+          <a:lnRef idx="1">
+            <a:schemeClr val="accent1"/>
+          </a:lnRef>
+          <a:fillRef idx="3">
+            <a:schemeClr val="accent1"/>
+          </a:fillRef>
+          <a:effectRef idx="2">
+            <a:schemeClr val="accent1"/>
+          </a:effectRef>
+          <a:fontRef idx="minor">
+            <a:schemeClr val="lt1"/>
+          </a:fontRef>
+        </p:style>
+        <p:txBody>
+          <a:bodyPr rtlCol="0" anchor="ctr" wrap="square" lIns="45720" rIns="45720" tIns="18288" bIns="18288"/>
+          <a:lstStyle/>
+          <a:p>
+            <a:pPr algn="ctr">
+              <a:lnSpc>
+                <a:spcPct val="100000"/>
+              </a:lnSpc>
+              <a:spcAft>
+                <a:spcPts val="0"/>
+              </a:spcAft>
+              <a:defRPr sz="900" b="0">
+                <a:solidFill>
+                  <a:srgbClr val="222222"/>
+                </a:solidFill>
+                <a:latin typeface="Calibri"/>
+              </a:defRPr>
+            </a:pPr>
+          </a:p>
+        </p:txBody>
+      </p:sp>
+      <p:cxnSp>
+        <p:nvCxnSpPr>
+          <p:cNvPr id="26" name="Connector 25"/>
+          <p:cNvCxnSpPr/>
+          <p:nvPr/>
+        </p:nvCxnSpPr>
+        <p:spPr>
+          <a:xfrm flipH="1" flipV="1">
+            <a:off x="8897112" y="4251960"/>
+            <a:ext cx="566928" cy="274320"/>
+          </a:xfrm>
+          <a:prstGeom prst="line">
+            <a:avLst/>
+          </a:prstGeom>
+          <a:ln w="28575">
+            <a:solidFill>
+              <a:srgbClr val="0E7C86"/>
+            </a:solidFill>
+          </a:ln>
+        </p:spPr>
+        <p:style>
+          <a:lnRef idx="2">
+            <a:schemeClr val="accent1"/>
+          </a:lnRef>
+          <a:fillRef idx="0">
+            <a:schemeClr val="accent1"/>
+          </a:fillRef>
+          <a:effectRef idx="1">
+            <a:schemeClr val="accent1"/>
+          </a:effectRef>
+          <a:fontRef idx="minor">
+            <a:schemeClr val="tx1"/>
+          </a:fontRef>
+        </p:style>
+      </p:cxnSp>
+      <p:sp>
+        <p:nvSpPr>
+          <p:cNvPr id="27" name="Oval 26"/>
+          <p:cNvSpPr/>
+          <p:nvPr/>
+        </p:nvSpPr>
+        <p:spPr>
+          <a:xfrm>
+            <a:off x="9400032" y="4462272"/>
+            <a:ext cx="128016" cy="128016"/>
+          </a:xfrm>
+          <a:prstGeom prst="ellipse">
+            <a:avLst/>
+          </a:prstGeom>
+          <a:solidFill>
+            <a:srgbClr val="0E7C86"/>
+          </a:solidFill>
+          <a:ln w="9525">
+            <a:solidFill>
+              <a:srgbClr val="0E7C86"/>
+            </a:solidFill>
+          </a:ln>
+          <a:effectLst/>
+        </p:spPr>
+        <p:style>
+          <a:lnRef idx="1">
+            <a:schemeClr val="accent1"/>
+          </a:lnRef>
+          <a:fillRef idx="3">
+            <a:schemeClr val="accent1"/>
+          </a:fillRef>
+          <a:effectRef idx="2">
+            <a:schemeClr val="accent1"/>
+          </a:effectRef>
+          <a:fontRef idx="minor">
+            <a:schemeClr val="lt1"/>
+          </a:fontRef>
+        </p:style>
+        <p:txBody>
+          <a:bodyPr rtlCol="0" anchor="ctr" wrap="square" lIns="45720" rIns="45720" tIns="18288" bIns="18288"/>
+          <a:lstStyle/>
+          <a:p>
+            <a:pPr algn="ctr">
+              <a:lnSpc>
+                <a:spcPct val="100000"/>
+              </a:lnSpc>
+              <a:spcAft>
+                <a:spcPts val="0"/>
+              </a:spcAft>
+              <a:defRPr sz="900" b="0">
+                <a:solidFill>
+                  <a:srgbClr val="222222"/>
+                </a:solidFill>
+                <a:latin typeface="Calibri"/>
+              </a:defRPr>
+            </a:pPr>
+          </a:p>
+        </p:txBody>
+      </p:sp>
+      <p:sp>
+        <p:nvSpPr>
+          <p:cNvPr id="28" name="Oval 27"/>
           <p:cNvSpPr/>
           <p:nvPr/>
         </p:nvSpPr>
@@ -37812,7 +37641,7 @@
           </a:fontRef>
         </p:style>
         <p:txBody>
-          <a:bodyPr wrap="square" lIns="45720" tIns="18288" rIns="45720" bIns="18288" rtlCol="0" anchor="ctr"/>
+          <a:bodyPr rtlCol="0" anchor="ctr" wrap="square" lIns="45720" rIns="45720" tIns="18288" bIns="18288"/>
           <a:lstStyle/>
           <a:p>
             <a:pPr algn="ctr">
@@ -37841,16 +37670,127 @@
           </a:p>
         </p:txBody>
       </p:sp>
-      <p:sp>
-        <p:nvSpPr>
-          <p:cNvPr id="25" name="TextBox 24"/>
+      <p:cxnSp>
+        <p:nvCxnSpPr>
+          <p:cNvPr id="29" name="Connector 28"/>
+          <p:cNvCxnSpPr/>
+          <p:nvPr/>
+        </p:nvCxnSpPr>
+        <p:spPr>
+          <a:xfrm flipH="1">
+            <a:off x="4800600" y="3657600"/>
+            <a:ext cx="1463040" cy="0"/>
+          </a:xfrm>
+          <a:prstGeom prst="line">
+            <a:avLst/>
+          </a:prstGeom>
+          <a:ln w="19050">
+            <a:solidFill>
+              <a:srgbClr val="0E7C86"/>
+            </a:solidFill>
+            <a:headEnd/>
+            <a:tailEnd type="triangle" w="med" len="med"/>
+          </a:ln>
+        </p:spPr>
+        <p:style>
+          <a:lnRef idx="2">
+            <a:schemeClr val="accent1"/>
+          </a:lnRef>
+          <a:fillRef idx="0">
+            <a:schemeClr val="accent1"/>
+          </a:fillRef>
+          <a:effectRef idx="1">
+            <a:schemeClr val="accent1"/>
+          </a:effectRef>
+          <a:fontRef idx="minor">
+            <a:schemeClr val="tx1"/>
+          </a:fontRef>
+        </p:style>
+      </p:cxnSp>
+      <p:cxnSp>
+        <p:nvCxnSpPr>
+          <p:cNvPr id="30" name="Connector 29"/>
+          <p:cNvCxnSpPr/>
+          <p:nvPr/>
+        </p:nvCxnSpPr>
+        <p:spPr>
+          <a:xfrm flipH="1">
+            <a:off x="6995160" y="5394960"/>
+            <a:ext cx="1280160" cy="0"/>
+          </a:xfrm>
+          <a:prstGeom prst="line">
+            <a:avLst/>
+          </a:prstGeom>
+          <a:ln w="19050">
+            <a:solidFill>
+              <a:srgbClr val="0E7C86"/>
+            </a:solidFill>
+            <a:headEnd/>
+            <a:tailEnd type="triangle" w="med" len="med"/>
+          </a:ln>
+        </p:spPr>
+        <p:style>
+          <a:lnRef idx="2">
+            <a:schemeClr val="accent1"/>
+          </a:lnRef>
+          <a:fillRef idx="0">
+            <a:schemeClr val="accent1"/>
+          </a:fillRef>
+          <a:effectRef idx="1">
+            <a:schemeClr val="accent1"/>
+          </a:effectRef>
+          <a:fontRef idx="minor">
+            <a:schemeClr val="tx1"/>
+          </a:fontRef>
+        </p:style>
+      </p:cxnSp>
+      <p:cxnSp>
+        <p:nvCxnSpPr>
+          <p:cNvPr id="31" name="Connector 30"/>
+          <p:cNvCxnSpPr/>
+          <p:nvPr/>
+        </p:nvCxnSpPr>
+        <p:spPr>
+          <a:xfrm>
+            <a:off x="4846320" y="4233672"/>
+            <a:ext cx="822960" cy="0"/>
+          </a:xfrm>
+          <a:prstGeom prst="line">
+            <a:avLst/>
+          </a:prstGeom>
+          <a:ln w="19050">
+            <a:solidFill>
+              <a:srgbClr val="0E7C86"/>
+            </a:solidFill>
+            <a:headEnd/>
+            <a:tailEnd type="triangle" w="med" len="med"/>
+          </a:ln>
+        </p:spPr>
+        <p:style>
+          <a:lnRef idx="2">
+            <a:schemeClr val="accent1"/>
+          </a:lnRef>
+          <a:fillRef idx="0">
+            <a:schemeClr val="accent1"/>
+          </a:fillRef>
+          <a:effectRef idx="1">
+            <a:schemeClr val="accent1"/>
+          </a:effectRef>
+          <a:fontRef idx="minor">
+            <a:schemeClr val="tx1"/>
+          </a:fontRef>
+        </p:style>
+      </p:cxnSp>
+      <p:sp>
+        <p:nvSpPr>
+          <p:cNvPr id="32" name="TextBox 31"/>
           <p:cNvSpPr txBox="1"/>
           <p:nvPr/>
         </p:nvSpPr>
         <p:spPr>
           <a:xfrm>
-            <a:off x="2651760" y="4069080"/>
-            <a:ext cx="914400" cy="646684"/>
+            <a:off x="4663440" y="3739896"/>
+            <a:ext cx="2194560" cy="367792"/>
           </a:xfrm>
           <a:prstGeom prst="rect">
             <a:avLst/>
@@ -37863,7 +37803,7 @@
           </a:bodyPr>
           <a:lstStyle/>
           <a:p>
-            <a:pPr algn="r">
+            <a:pPr algn="ctr">
               <a:lnSpc>
                 <a:spcPct val="100000"/>
               </a:lnSpc>
@@ -37878,39 +37818,27 @@
               </a:defRPr>
             </a:pPr>
             <a:r>
-              <a:rPr sz="1800" b="1" dirty="0">
+              <a:rPr sz="1800" b="1">
                 <a:solidFill>
                   <a:srgbClr val="0E7C86"/>
                 </a:solidFill>
                 <a:latin typeface="Calibri"/>
               </a:rPr>
-              <a:t>IN1</a:t>
-            </a:r>
-            <a:br>
-              <a:rPr dirty="0"/>
-            </a:br>
-            <a:r>
-              <a:rPr sz="1800" b="1" dirty="0">
-                <a:solidFill>
-                  <a:srgbClr val="0E7C86"/>
-                </a:solidFill>
-                <a:latin typeface="Calibri"/>
-              </a:rPr>
-              <a:t>(pin A)</a:t>
-            </a:r>
-          </a:p>
-        </p:txBody>
-      </p:sp>
-      <p:sp>
-        <p:nvSpPr>
-          <p:cNvPr id="26" name="TextBox 25"/>
+              <a:t>Forward   CW</a:t>
+            </a:r>
+          </a:p>
+        </p:txBody>
+      </p:sp>
+      <p:sp>
+        <p:nvSpPr>
+          <p:cNvPr id="33" name="TextBox 32"/>
           <p:cNvSpPr txBox="1"/>
           <p:nvPr/>
         </p:nvSpPr>
         <p:spPr>
           <a:xfrm>
-            <a:off x="9555480" y="4069080"/>
-            <a:ext cx="1005840" cy="646684"/>
+            <a:off x="2496312" y="4069080"/>
+            <a:ext cx="914400" cy="646684"/>
           </a:xfrm>
           <a:prstGeom prst="rect">
             <a:avLst/>
@@ -37923,7 +37851,7 @@
           </a:bodyPr>
           <a:lstStyle/>
           <a:p>
-            <a:pPr algn="l">
+            <a:pPr algn="r">
               <a:lnSpc>
                 <a:spcPct val="100000"/>
               </a:lnSpc>
@@ -37944,7 +37872,7 @@
                 </a:solidFill>
                 <a:latin typeface="Calibri"/>
               </a:rPr>
-              <a:t>IN2</a:t>
+              <a:t>IN1</a:t>
             </a:r>
             <a:br/>
             <a:r>
@@ -37954,21 +37882,21 @@
                 </a:solidFill>
                 <a:latin typeface="Calibri"/>
               </a:rPr>
-              <a:t>(pin B)</a:t>
-            </a:r>
-          </a:p>
-        </p:txBody>
-      </p:sp>
-      <p:sp>
-        <p:nvSpPr>
-          <p:cNvPr id="27" name="TextBox 26"/>
+              <a:t>(pin A)</a:t>
+            </a:r>
+          </a:p>
+        </p:txBody>
+      </p:sp>
+      <p:sp>
+        <p:nvSpPr>
+          <p:cNvPr id="34" name="TextBox 33"/>
           <p:cNvSpPr txBox="1"/>
           <p:nvPr/>
         </p:nvSpPr>
         <p:spPr>
           <a:xfrm>
-            <a:off x="5989320" y="3328416"/>
-            <a:ext cx="1280160" cy="367792"/>
+            <a:off x="9665208" y="4069080"/>
+            <a:ext cx="1005840" cy="646684"/>
           </a:xfrm>
           <a:prstGeom prst="rect">
             <a:avLst/>
@@ -37981,7 +37909,7 @@
           </a:bodyPr>
           <a:lstStyle/>
           <a:p>
-            <a:pPr algn="ctr">
+            <a:pPr algn="l">
               <a:lnSpc>
                 <a:spcPct val="100000"/>
               </a:lnSpc>
@@ -37990,7 +37918,7 @@
               </a:spcAft>
               <a:defRPr sz="1800" b="1">
                 <a:solidFill>
-                  <a:srgbClr val="666666"/>
+                  <a:srgbClr val="0E7C86"/>
                 </a:solidFill>
                 <a:latin typeface="Calibri"/>
               </a:defRPr>
@@ -37998,24 +37926,34 @@
             <a:r>
               <a:rPr sz="1800" b="1">
                 <a:solidFill>
-                  <a:srgbClr val="666666"/>
-                </a:solidFill>
-                <a:latin typeface="Calibri"/>
-              </a:rPr>
-              <a:t>+ V</a:t>
-            </a:r>
-          </a:p>
-        </p:txBody>
-      </p:sp>
-      <p:sp>
-        <p:nvSpPr>
-          <p:cNvPr id="28" name="TextBox 27"/>
+                  <a:srgbClr val="0E7C86"/>
+                </a:solidFill>
+                <a:latin typeface="Calibri"/>
+              </a:rPr>
+              <a:t>IN2</a:t>
+            </a:r>
+            <a:br/>
+            <a:r>
+              <a:rPr sz="1800" b="1">
+                <a:solidFill>
+                  <a:srgbClr val="0E7C86"/>
+                </a:solidFill>
+                <a:latin typeface="Calibri"/>
+              </a:rPr>
+              <a:t>(pin B)</a:t>
+            </a:r>
+          </a:p>
+        </p:txBody>
+      </p:sp>
+      <p:sp>
+        <p:nvSpPr>
+          <p:cNvPr id="35" name="TextBox 34"/>
           <p:cNvSpPr txBox="1"/>
           <p:nvPr/>
         </p:nvSpPr>
         <p:spPr>
           <a:xfrm>
-            <a:off x="5989320" y="5449824"/>
+            <a:off x="5989320" y="3328416"/>
             <a:ext cx="1280160" cy="367792"/>
           </a:xfrm>
           <a:prstGeom prst="rect">
@@ -38050,7 +37988,103 @@
                 </a:solidFill>
                 <a:latin typeface="Calibri"/>
               </a:rPr>
+              <a:t>+ V</a:t>
+            </a:r>
+          </a:p>
+        </p:txBody>
+      </p:sp>
+      <p:sp>
+        <p:nvSpPr>
+          <p:cNvPr id="36" name="TextBox 35"/>
+          <p:cNvSpPr txBox="1"/>
+          <p:nvPr/>
+        </p:nvSpPr>
+        <p:spPr>
+          <a:xfrm>
+            <a:off x="5989320" y="5449824"/>
+            <a:ext cx="1280160" cy="367792"/>
+          </a:xfrm>
+          <a:prstGeom prst="rect">
+            <a:avLst/>
+          </a:prstGeom>
+          <a:noFill/>
+        </p:spPr>
+        <p:txBody>
+          <a:bodyPr wrap="square" lIns="0" tIns="0" rIns="0" bIns="0">
+            <a:spAutoFit/>
+          </a:bodyPr>
+          <a:lstStyle/>
+          <a:p>
+            <a:pPr algn="ctr">
+              <a:lnSpc>
+                <a:spcPct val="100000"/>
+              </a:lnSpc>
+              <a:spcAft>
+                <a:spcPts val="0"/>
+              </a:spcAft>
+              <a:defRPr sz="1800" b="1">
+                <a:solidFill>
+                  <a:srgbClr val="666666"/>
+                </a:solidFill>
+                <a:latin typeface="Calibri"/>
+              </a:defRPr>
+            </a:pPr>
+            <a:r>
+              <a:rPr sz="1800" b="1">
+                <a:solidFill>
+                  <a:srgbClr val="666666"/>
+                </a:solidFill>
+                <a:latin typeface="Calibri"/>
+              </a:rPr>
               <a:t>GND</a:t>
+            </a:r>
+          </a:p>
+        </p:txBody>
+      </p:sp>
+      <p:sp>
+        <p:nvSpPr>
+          <p:cNvPr id="37" name="TextBox 36"/>
+          <p:cNvSpPr txBox="1"/>
+          <p:nvPr/>
+        </p:nvSpPr>
+        <p:spPr>
+          <a:xfrm>
+            <a:off x="502920" y="5815584"/>
+            <a:ext cx="11185855" cy="646684"/>
+          </a:xfrm>
+          <a:prstGeom prst="rect">
+            <a:avLst/>
+          </a:prstGeom>
+          <a:noFill/>
+        </p:spPr>
+        <p:txBody>
+          <a:bodyPr wrap="square" lIns="0" tIns="0" rIns="0" bIns="0">
+            <a:spAutoFit/>
+          </a:bodyPr>
+          <a:lstStyle/>
+          <a:p>
+            <a:pPr algn="ctr">
+              <a:lnSpc>
+                <a:spcPct val="100000"/>
+              </a:lnSpc>
+              <a:spcAft>
+                <a:spcPts val="0"/>
+              </a:spcAft>
+              <a:defRPr sz="1800" b="0">
+                <a:solidFill>
+                  <a:srgbClr val="666666"/>
+                </a:solidFill>
+                <a:latin typeface="Calibri"/>
+              </a:defRPr>
+            </a:pPr>
+            <a:r>
+              <a:rPr sz="1800" b="0">
+                <a:solidFill>
+                  <a:srgbClr val="666666"/>
+                </a:solidFill>
+                <a:latin typeface="Calibri"/>
+              </a:rPr>
+              <a:t>Drawn in the first state: IN1 closed to + V, IN2 closed to GND. Reverse is the same picture with both switches thrown and the arrows running the other way.</a:t>
             </a:r>
           </a:p>
         </p:txBody>
@@ -38064,7 +38098,7 @@
 </file>
 
 <file path=ppt/slides/slide7.xml><?xml version="1.0" encoding="utf-8"?>
-<p:sld xmlns:a="http://schemas.openxmlformats.org/drawingml/2006/main" xmlns:r="http://schemas.openxmlformats.org/officeDocument/2006/relationships" xmlns:p="http://schemas.openxmlformats.org/presentationml/2006/main">
+<p:sld xmlns:a="http://schemas.openxmlformats.org/drawingml/2006/main" xmlns:p="http://schemas.openxmlformats.org/presentationml/2006/main" xmlns:r="http://schemas.openxmlformats.org/officeDocument/2006/relationships">
   <p:cSld>
     <p:spTree>
       <p:nvGrpSpPr>
@@ -38072,14 +38106,7 @@
         <p:cNvGrpSpPr/>
         <p:nvPr/>
       </p:nvGrpSpPr>
-      <p:grpSpPr>
-        <a:xfrm>
-          <a:off x="0" y="0"/>
-          <a:ext cx="0" cy="0"/>
-          <a:chOff x="0" y="0"/>
-          <a:chExt cx="0" cy="0"/>
-        </a:xfrm>
-      </p:grpSpPr>
+      <p:grpSpPr/>
       <p:sp>
         <p:nvSpPr>
           <p:cNvPr id="2" name="Title 1"/>
@@ -38167,7 +38194,6 @@
           <a:lstStyle/>
           <a:p>
             <a:pPr algn="ctr"/>
-            <a:endParaRPr/>
           </a:p>
         </p:txBody>
       </p:sp>
@@ -38650,7 +38676,7 @@
           </a:fontRef>
         </p:style>
         <p:txBody>
-          <a:bodyPr wrap="square" lIns="164592" tIns="73152" rIns="164592" bIns="73152" rtlCol="0" anchor="ctr"/>
+          <a:bodyPr rtlCol="0" anchor="ctr" wrap="square" lIns="164592" rIns="164592" tIns="73152" bIns="73152"/>
           <a:lstStyle/>
           <a:p>
             <a:pPr algn="l"/>
@@ -38684,7 +38710,7 @@
 </file>
 
 <file path=ppt/slides/slide8.xml><?xml version="1.0" encoding="utf-8"?>
-<p:sld xmlns:a="http://schemas.openxmlformats.org/drawingml/2006/main" xmlns:r="http://schemas.openxmlformats.org/officeDocument/2006/relationships" xmlns:p="http://schemas.openxmlformats.org/presentationml/2006/main">
+<p:sld xmlns:a="http://schemas.openxmlformats.org/drawingml/2006/main" xmlns:p="http://schemas.openxmlformats.org/presentationml/2006/main" xmlns:r="http://schemas.openxmlformats.org/officeDocument/2006/relationships">
   <p:cSld>
     <p:spTree>
       <p:nvGrpSpPr>
@@ -38692,14 +38718,7 @@
         <p:cNvGrpSpPr/>
         <p:nvPr/>
       </p:nvGrpSpPr>
-      <p:grpSpPr>
-        <a:xfrm>
-          <a:off x="0" y="0"/>
-          <a:ext cx="0" cy="0"/>
-          <a:chOff x="0" y="0"/>
-          <a:chExt cx="0" cy="0"/>
-        </a:xfrm>
-      </p:grpSpPr>
+      <p:grpSpPr/>
       <p:sp>
         <p:nvSpPr>
           <p:cNvPr id="2" name="Title 1"/>
@@ -38787,7 +38806,6 @@
           <a:lstStyle/>
           <a:p>
             <a:pPr algn="ctr"/>
-            <a:endParaRPr/>
           </a:p>
         </p:txBody>
       </p:sp>
@@ -38954,34 +38972,10 @@
                 <a:tableStyleId>{5C22544A-7EE6-4342-B048-85BDC9FD1C3A}</a:tableStyleId>
               </a:tblPr>
               <a:tblGrid>
-                <a:gridCol w="3355756">
-                  <a:extLst>
-                    <a:ext uri="{9D8B030D-6E8A-4147-A177-3AD203B41FA5}">
-                      <a16:colId xmlns:a16="http://schemas.microsoft.com/office/drawing/2014/main" val="20000"/>
-                    </a:ext>
-                  </a:extLst>
-                </a:gridCol>
-                <a:gridCol w="1677878">
-                  <a:extLst>
-                    <a:ext uri="{9D8B030D-6E8A-4147-A177-3AD203B41FA5}">
-                      <a16:colId xmlns:a16="http://schemas.microsoft.com/office/drawing/2014/main" val="20001"/>
-                    </a:ext>
-                  </a:extLst>
-                </a:gridCol>
-                <a:gridCol w="1677878">
-                  <a:extLst>
-                    <a:ext uri="{9D8B030D-6E8A-4147-A177-3AD203B41FA5}">
-                      <a16:colId xmlns:a16="http://schemas.microsoft.com/office/drawing/2014/main" val="20002"/>
-                    </a:ext>
-                  </a:extLst>
-                </a:gridCol>
-                <a:gridCol w="4474341">
-                  <a:extLst>
-                    <a:ext uri="{9D8B030D-6E8A-4147-A177-3AD203B41FA5}">
-                      <a16:colId xmlns:a16="http://schemas.microsoft.com/office/drawing/2014/main" val="20003"/>
-                    </a:ext>
-                  </a:extLst>
-                </a:gridCol>
+                <a:gridCol w="3355756"/>
+                <a:gridCol w="1677878"/>
+                <a:gridCol w="1677878"/>
+                <a:gridCol w="4474341"/>
               </a:tblGrid>
               <a:tr h="552450">
                 <a:tc>
@@ -39072,11 +39066,6 @@
                     </a:solidFill>
                   </a:tcPr>
                 </a:tc>
-                <a:extLst>
-                  <a:ext uri="{0D108BD9-81ED-4DB2-BD59-A6C34878D82A}">
-                    <a16:rowId xmlns:a16="http://schemas.microsoft.com/office/drawing/2014/main" val="10000"/>
-                  </a:ext>
-                </a:extLst>
               </a:tr>
               <a:tr h="552450">
                 <a:tc>
@@ -39167,11 +39156,6 @@
                     </a:solidFill>
                   </a:tcPr>
                 </a:tc>
-                <a:extLst>
-                  <a:ext uri="{0D108BD9-81ED-4DB2-BD59-A6C34878D82A}">
-                    <a16:rowId xmlns:a16="http://schemas.microsoft.com/office/drawing/2014/main" val="10001"/>
-                  </a:ext>
-                </a:extLst>
               </a:tr>
               <a:tr h="552450">
                 <a:tc>
@@ -39262,11 +39246,6 @@
                     </a:solidFill>
                   </a:tcPr>
                 </a:tc>
-                <a:extLst>
-                  <a:ext uri="{0D108BD9-81ED-4DB2-BD59-A6C34878D82A}">
-                    <a16:rowId xmlns:a16="http://schemas.microsoft.com/office/drawing/2014/main" val="10002"/>
-                  </a:ext>
-                </a:extLst>
               </a:tr>
               <a:tr h="552450">
                 <a:tc>
@@ -39357,11 +39336,6 @@
                     </a:solidFill>
                   </a:tcPr>
                 </a:tc>
-                <a:extLst>
-                  <a:ext uri="{0D108BD9-81ED-4DB2-BD59-A6C34878D82A}">
-                    <a16:rowId xmlns:a16="http://schemas.microsoft.com/office/drawing/2014/main" val="10003"/>
-                  </a:ext>
-                </a:extLst>
               </a:tr>
               <a:tr h="552450">
                 <a:tc>
@@ -39452,11 +39426,6 @@
                     </a:solidFill>
                   </a:tcPr>
                 </a:tc>
-                <a:extLst>
-                  <a:ext uri="{0D108BD9-81ED-4DB2-BD59-A6C34878D82A}">
-                    <a16:rowId xmlns:a16="http://schemas.microsoft.com/office/drawing/2014/main" val="10004"/>
-                  </a:ext>
-                </a:extLst>
               </a:tr>
             </a:tbl>
           </a:graphicData>
@@ -39503,7 +39472,7 @@
           </a:fontRef>
         </p:style>
         <p:txBody>
-          <a:bodyPr wrap="square" lIns="164592" tIns="73152" rIns="164592" bIns="73152" rtlCol="0" anchor="ctr"/>
+          <a:bodyPr rtlCol="0" anchor="ctr" wrap="square" lIns="164592" rIns="164592" tIns="73152" bIns="73152"/>
           <a:lstStyle/>
           <a:p>
             <a:pPr algn="l"/>
@@ -39537,7 +39506,7 @@
 </file>
 
 <file path=ppt/slides/slide9.xml><?xml version="1.0" encoding="utf-8"?>
-<p:sld xmlns:a="http://schemas.openxmlformats.org/drawingml/2006/main" xmlns:r="http://schemas.openxmlformats.org/officeDocument/2006/relationships" xmlns:p="http://schemas.openxmlformats.org/presentationml/2006/main">
+<p:sld xmlns:a="http://schemas.openxmlformats.org/drawingml/2006/main" xmlns:p="http://schemas.openxmlformats.org/presentationml/2006/main" xmlns:r="http://schemas.openxmlformats.org/officeDocument/2006/relationships">
   <p:cSld>
     <p:spTree>
       <p:nvGrpSpPr>
@@ -39545,14 +39514,7 @@
         <p:cNvGrpSpPr/>
         <p:nvPr/>
       </p:nvGrpSpPr>
-      <p:grpSpPr>
-        <a:xfrm>
-          <a:off x="0" y="0"/>
-          <a:ext cx="0" cy="0"/>
-          <a:chOff x="0" y="0"/>
-          <a:chExt cx="0" cy="0"/>
-        </a:xfrm>
-      </p:grpSpPr>
+      <p:grpSpPr/>
       <p:sp>
         <p:nvSpPr>
           <p:cNvPr id="2" name="Title 1"/>
@@ -39640,7 +39602,6 @@
           <a:lstStyle/>
           <a:p>
             <a:pPr algn="ctr"/>
-            <a:endParaRPr/>
           </a:p>
         </p:txBody>
       </p:sp>
@@ -39874,12 +39835,6 @@
                 <a:latin typeface="Calibri"/>
               </a:defRPr>
             </a:pPr>
-            <a:endParaRPr sz="2200" b="0">
-              <a:solidFill>
-                <a:srgbClr val="222222"/>
-              </a:solidFill>
-              <a:latin typeface="Calibri"/>
-            </a:endParaRPr>
           </a:p>
           <a:p>
             <a:pPr algn="l">
@@ -39946,12 +39901,6 @@
                 <a:latin typeface="Calibri"/>
               </a:defRPr>
             </a:pPr>
-            <a:endParaRPr sz="2200" b="0">
-              <a:solidFill>
-                <a:srgbClr val="222222"/>
-              </a:solidFill>
-              <a:latin typeface="Calibri"/>
-            </a:endParaRPr>
           </a:p>
           <a:p>
             <a:pPr algn="l">
@@ -40319,44 +40268,44 @@
         <a:sysClr val="window" lastClr="FFFFFF"/>
       </a:lt1>
       <a:dk2>
-        <a:srgbClr val="0E2841"/>
+        <a:srgbClr val="1F497D"/>
       </a:dk2>
       <a:lt2>
-        <a:srgbClr val="E8E8E8"/>
+        <a:srgbClr val="EEECE1"/>
       </a:lt2>
       <a:accent1>
-        <a:srgbClr val="156082"/>
+        <a:srgbClr val="4F81BD"/>
       </a:accent1>
       <a:accent2>
-        <a:srgbClr val="E97132"/>
+        <a:srgbClr val="C0504D"/>
       </a:accent2>
       <a:accent3>
-        <a:srgbClr val="196B24"/>
+        <a:srgbClr val="9BBB59"/>
       </a:accent3>
       <a:accent4>
-        <a:srgbClr val="0F9ED5"/>
+        <a:srgbClr val="8064A2"/>
       </a:accent4>
       <a:accent5>
-        <a:srgbClr val="A02B93"/>
+        <a:srgbClr val="4BACC6"/>
       </a:accent5>
       <a:accent6>
-        <a:srgbClr val="4EA72E"/>
+        <a:srgbClr val="F79646"/>
       </a:accent6>
       <a:hlink>
-        <a:srgbClr val="467886"/>
+        <a:srgbClr val="0000FF"/>
       </a:hlink>
       <a:folHlink>
-        <a:srgbClr val="96607D"/>
+        <a:srgbClr val="800080"/>
       </a:folHlink>
     </a:clrScheme>
     <a:fontScheme name="Office">
       <a:majorFont>
-        <a:latin typeface="Aptos Display" panose="02110004020202020204"/>
+        <a:latin typeface="Calibri"/>
         <a:ea typeface=""/>
         <a:cs typeface=""/>
-        <a:font script="Jpan" typeface="游ゴシック Light"/>
+        <a:font script="Jpan" typeface="ＭＳ Ｐゴシック"/>
         <a:font script="Hang" typeface="맑은 고딕"/>
-        <a:font script="Hans" typeface="等线 Light"/>
+        <a:font script="Hans" typeface="宋体"/>
         <a:font script="Hant" typeface="新細明體"/>
         <a:font script="Arab" typeface="Times New Roman"/>
         <a:font script="Hebr" typeface="Times New Roman"/>
@@ -40384,31 +40333,14 @@
         <a:font script="Viet" typeface="Times New Roman"/>
         <a:font script="Uigh" typeface="Microsoft Uighur"/>
         <a:font script="Geor" typeface="Sylfaen"/>
-        <a:font script="Armn" typeface="Arial"/>
-        <a:font script="Bugi" typeface="Leelawadee UI"/>
-        <a:font script="Bopo" typeface="Microsoft JhengHei"/>
-        <a:font script="Java" typeface="Javanese Text"/>
-        <a:font script="Lisu" typeface="Segoe UI"/>
-        <a:font script="Mymr" typeface="Myanmar Text"/>
-        <a:font script="Nkoo" typeface="Ebrima"/>
-        <a:font script="Olck" typeface="Nirmala UI"/>
-        <a:font script="Osma" typeface="Ebrima"/>
-        <a:font script="Phag" typeface="Phagspa"/>
-        <a:font script="Syrn" typeface="Estrangelo Edessa"/>
-        <a:font script="Syrj" typeface="Estrangelo Edessa"/>
-        <a:font script="Syre" typeface="Estrangelo Edessa"/>
-        <a:font script="Sora" typeface="Nirmala UI"/>
-        <a:font script="Tale" typeface="Microsoft Tai Le"/>
-        <a:font script="Talu" typeface="Microsoft New Tai Lue"/>
-        <a:font script="Tfng" typeface="Ebrima"/>
       </a:majorFont>
       <a:minorFont>
-        <a:latin typeface="Aptos" panose="02110004020202020204"/>
+        <a:latin typeface="Calibri"/>
         <a:ea typeface=""/>
         <a:cs typeface=""/>
-        <a:font script="Jpan" typeface="游ゴシック"/>
+        <a:font script="Jpan" typeface="ＭＳ Ｐゴシック"/>
         <a:font script="Hang" typeface="맑은 고딕"/>
-        <a:font script="Hans" typeface="等线"/>
+        <a:font script="Hans" typeface="宋体"/>
         <a:font script="Hant" typeface="新細明體"/>
         <a:font script="Arab" typeface="Arial"/>
         <a:font script="Hebr" typeface="Arial"/>
@@ -40436,23 +40368,6 @@
         <a:font script="Viet" typeface="Arial"/>
         <a:font script="Uigh" typeface="Microsoft Uighur"/>
         <a:font script="Geor" typeface="Sylfaen"/>
-        <a:font script="Armn" typeface="Arial"/>
-        <a:font script="Bugi" typeface="Leelawadee UI"/>
-        <a:font script="Bopo" typeface="Microsoft JhengHei"/>
-        <a:font script="Java" typeface="Javanese Text"/>
-        <a:font script="Lisu" typeface="Segoe UI"/>
-        <a:font script="Mymr" typeface="Myanmar Text"/>
-        <a:font script="Nkoo" typeface="Ebrima"/>
-        <a:font script="Olck" typeface="Nirmala UI"/>
-        <a:font script="Osma" typeface="Ebrima"/>
-        <a:font script="Phag" typeface="Phagspa"/>
-        <a:font script="Syrn" typeface="Estrangelo Edessa"/>
-        <a:font script="Syrj" typeface="Estrangelo Edessa"/>
-        <a:font script="Syre" typeface="Estrangelo Edessa"/>
-        <a:font script="Sora" typeface="Nirmala UI"/>
-        <a:font script="Tale" typeface="Microsoft Tai Le"/>
-        <a:font script="Talu" typeface="Microsoft New Tai Lue"/>
-        <a:font script="Tfng" typeface="Ebrima"/>
       </a:minorFont>
     </a:fontScheme>
     <a:fmtScheme name="Office">
@@ -40464,136 +40379,180 @@
           <a:gsLst>
             <a:gs pos="0">
               <a:schemeClr val="phClr">
-                <a:lumMod val="110000"/>
-                <a:satMod val="105000"/>
-                <a:tint val="67000"/>
+                <a:tint val="50000"/>
+                <a:satMod val="300000"/>
               </a:schemeClr>
             </a:gs>
-            <a:gs pos="50000">
+            <a:gs pos="35000">
               <a:schemeClr val="phClr">
-                <a:lumMod val="105000"/>
-                <a:satMod val="103000"/>
-                <a:tint val="73000"/>
+                <a:tint val="37000"/>
+                <a:satMod val="300000"/>
               </a:schemeClr>
             </a:gs>
             <a:gs pos="100000">
               <a:schemeClr val="phClr">
-                <a:lumMod val="105000"/>
-                <a:satMod val="109000"/>
-                <a:tint val="81000"/>
+                <a:tint val="15000"/>
+                <a:satMod val="350000"/>
               </a:schemeClr>
             </a:gs>
           </a:gsLst>
-          <a:lin ang="5400000" scaled="0"/>
+          <a:lin ang="16200000" scaled="1"/>
         </a:gradFill>
         <a:gradFill rotWithShape="1">
           <a:gsLst>
             <a:gs pos="0">
               <a:schemeClr val="phClr">
-                <a:satMod val="103000"/>
-                <a:lumMod val="102000"/>
-                <a:tint val="94000"/>
-              </a:schemeClr>
-            </a:gs>
-            <a:gs pos="50000">
-              <a:schemeClr val="phClr">
-                <a:satMod val="110000"/>
-                <a:lumMod val="100000"/>
+                <a:tint val="100000"/>
                 <a:shade val="100000"/>
+                <a:satMod val="130000"/>
               </a:schemeClr>
             </a:gs>
             <a:gs pos="100000">
               <a:schemeClr val="phClr">
-                <a:lumMod val="99000"/>
-                <a:satMod val="120000"/>
-                <a:shade val="78000"/>
+                <a:tint val="50000"/>
+                <a:shade val="100000"/>
+                <a:satMod val="350000"/>
               </a:schemeClr>
             </a:gs>
           </a:gsLst>
-          <a:lin ang="5400000" scaled="0"/>
+          <a:lin ang="16200000" scaled="0"/>
         </a:gradFill>
       </a:fillStyleLst>
       <a:lnStyleLst>
-        <a:ln w="12700" cap="flat" cmpd="sng" algn="ctr">
+        <a:ln w="9525" cap="flat" cmpd="sng" algn="ctr">
           <a:solidFill>
-            <a:schemeClr val="phClr"/>
+            <a:schemeClr val="phClr">
+              <a:shade val="95000"/>
+              <a:satMod val="105000"/>
+            </a:schemeClr>
           </a:solidFill>
           <a:prstDash val="solid"/>
-          <a:miter lim="800000"/>
-        </a:ln>
-        <a:ln w="19050" cap="flat" cmpd="sng" algn="ctr">
-          <a:solidFill>
-            <a:schemeClr val="phClr"/>
-          </a:solidFill>
-          <a:prstDash val="solid"/>
-          <a:miter lim="800000"/>
         </a:ln>
         <a:ln w="25400" cap="flat" cmpd="sng" algn="ctr">
           <a:solidFill>
             <a:schemeClr val="phClr"/>
           </a:solidFill>
           <a:prstDash val="solid"/>
-          <a:miter lim="800000"/>
+        </a:ln>
+        <a:ln w="38100" cap="flat" cmpd="sng" algn="ctr">
+          <a:solidFill>
+            <a:schemeClr val="phClr"/>
+          </a:solidFill>
+          <a:prstDash val="solid"/>
         </a:ln>
       </a:lnStyleLst>
       <a:effectStyleLst>
         <a:effectStyle>
-          <a:effectLst/>
-        </a:effectStyle>
-        <a:effectStyle>
-          <a:effectLst/>
+          <a:effectLst>
+            <a:outerShdw blurRad="40000" dist="20000" dir="5400000" rotWithShape="0">
+              <a:srgbClr val="000000">
+                <a:alpha val="38000"/>
+              </a:srgbClr>
+            </a:outerShdw>
+          </a:effectLst>
         </a:effectStyle>
         <a:effectStyle>
           <a:effectLst>
-            <a:outerShdw blurRad="57150" dist="19050" dir="5400000" algn="ctr" rotWithShape="0">
+            <a:outerShdw blurRad="40000" dist="23000" dir="5400000" rotWithShape="0">
               <a:srgbClr val="000000">
-                <a:alpha val="63000"/>
+                <a:alpha val="35000"/>
               </a:srgbClr>
             </a:outerShdw>
           </a:effectLst>
+        </a:effectStyle>
+        <a:effectStyle>
+          <a:effectLst>
+            <a:outerShdw blurRad="40000" dist="23000" dir="5400000" rotWithShape="0">
+              <a:srgbClr val="000000">
+                <a:alpha val="35000"/>
+              </a:srgbClr>
+            </a:outerShdw>
+          </a:effectLst>
+          <a:scene3d>
+            <a:camera prst="orthographicFront">
+              <a:rot lat="0" lon="0" rev="0"/>
+            </a:camera>
+            <a:lightRig rig="threePt" dir="t">
+              <a:rot lat="0" lon="0" rev="1200000"/>
+            </a:lightRig>
+          </a:scene3d>
+          <a:sp3d>
+            <a:bevelT w="63500" h="25400"/>
+          </a:sp3d>
         </a:effectStyle>
       </a:effectStyleLst>
       <a:bgFillStyleLst>
         <a:solidFill>
           <a:schemeClr val="phClr"/>
         </a:solidFill>
-        <a:solidFill>
-          <a:schemeClr val="phClr">
-            <a:tint val="95000"/>
-            <a:satMod val="170000"/>
-          </a:schemeClr>
-        </a:solidFill>
         <a:gradFill rotWithShape="1">
           <a:gsLst>
             <a:gs pos="0">
               <a:schemeClr val="phClr">
-                <a:tint val="93000"/>
-                <a:satMod val="150000"/>
-                <a:shade val="98000"/>
-                <a:lumMod val="102000"/>
+                <a:tint val="40000"/>
+                <a:satMod val="350000"/>
               </a:schemeClr>
             </a:gs>
-            <a:gs pos="50000">
+            <a:gs pos="40000">
               <a:schemeClr val="phClr">
-                <a:tint val="98000"/>
-                <a:satMod val="130000"/>
-                <a:shade val="90000"/>
-                <a:lumMod val="103000"/>
+                <a:tint val="45000"/>
+                <a:shade val="99000"/>
+                <a:satMod val="350000"/>
               </a:schemeClr>
             </a:gs>
             <a:gs pos="100000">
               <a:schemeClr val="phClr">
-                <a:shade val="63000"/>
-                <a:satMod val="120000"/>
+                <a:shade val="20000"/>
+                <a:satMod val="255000"/>
               </a:schemeClr>
             </a:gs>
           </a:gsLst>
-          <a:lin ang="5400000" scaled="0"/>
+          <a:path path="circle">
+            <a:fillToRect l="50000" t="-80000" r="50000" b="180000"/>
+          </a:path>
+        </a:gradFill>
+        <a:gradFill rotWithShape="1">
+          <a:gsLst>
+            <a:gs pos="0">
+              <a:schemeClr val="phClr">
+                <a:tint val="80000"/>
+                <a:satMod val="300000"/>
+              </a:schemeClr>
+            </a:gs>
+            <a:gs pos="100000">
+              <a:schemeClr val="phClr">
+                <a:shade val="30000"/>
+                <a:satMod val="200000"/>
+              </a:schemeClr>
+            </a:gs>
+          </a:gsLst>
+          <a:path path="circle">
+            <a:fillToRect l="50000" t="50000" r="50000" b="50000"/>
+          </a:path>
         </a:gradFill>
       </a:bgFillStyleLst>
     </a:fmtScheme>
   </a:themeElements>
   <a:objectDefaults>
+    <a:spDef>
+      <a:spPr/>
+      <a:bodyPr/>
+      <a:lstStyle/>
+      <a:style>
+        <a:lnRef idx="1">
+          <a:schemeClr val="accent1"/>
+        </a:lnRef>
+        <a:fillRef idx="3">
+          <a:schemeClr val="accent1"/>
+        </a:fillRef>
+        <a:effectRef idx="2">
+          <a:schemeClr val="accent1"/>
+        </a:effectRef>
+        <a:fontRef idx="minor">
+          <a:schemeClr val="lt1"/>
+        </a:fontRef>
+      </a:style>
+    </a:spDef>
     <a:lnDef>
       <a:spPr/>
       <a:bodyPr/>
@@ -40615,10 +40574,5 @@
     </a:lnDef>
   </a:objectDefaults>
   <a:extraClrSchemeLst/>
-  <a:extLst>
-    <a:ext uri="{05A4C25C-085E-4340-85A3-A5531E510DB2}">
-      <thm15:themeFamily xmlns:thm15="http://schemas.microsoft.com/office/thememl/2012/main" name="Office Theme" id="{2E142A2C-CD16-42D6-873A-C26D2A0506FA}" vid="{1BDDFF52-6CD6-40A5-AB3C-68EB2F1E4D0A}"/>
-    </a:ext>
-  </a:extLst>
 </a:theme>
 </file>
--- a/ground-vehicle/docs/courses/beginner-ps3/l2_motor_control.pptx
+++ b/ground-vehicle/docs/courses/beginner-ps3/l2_motor_control.pptx
@@ -3770,7 +3770,23 @@
               <a:rPr sz="1200">
                 <a:latin typeface="Calibri"/>
               </a:rPr>
-              <a:t>Four switches, and only the two diagonal pairs are useful. Trace each path with a finger on the projected slide.</a:t>
+              <a:t>Four boxes across the top: those are the four things the motor can be told to do. The picture underneath is ONE of them actually happening - the first one - drawn by Kevin.</a:t>
+            </a:r>
+          </a:p>
+          <a:p>
+            <a:r>
+              <a:rPr sz="1200">
+                <a:latin typeface="Calibri"/>
+              </a:rPr>
+              <a:t>Say that before anybody asks why they can only see two switches in the picture. The other two are the ones that are open.</a:t>
+            </a:r>
+          </a:p>
+          <a:p>
+            <a:r>
+              <a:rPr sz="1200">
+                <a:latin typeface="Calibri"/>
+              </a:rPr>
+              <a:t>Then trace the arrows with a finger on the projected slide, slowly, all the way round: in at + V, along the top, down the left, through the motor, back to GND. Have them do it too.</a:t>
             </a:r>
           </a:p>
           <a:p>
@@ -37204,593 +37220,40 @@
           </a:p>
         </p:txBody>
       </p:sp>
-      <p:cxnSp>
-        <p:nvCxnSpPr>
-          <p:cNvPr id="18" name="Connector 17"/>
-          <p:cNvCxnSpPr/>
-          <p:nvPr/>
-        </p:nvCxnSpPr>
-        <p:spPr>
-          <a:xfrm>
-            <a:off x="3611880" y="3657600"/>
-            <a:ext cx="5852160" cy="0"/>
-          </a:xfrm>
-          <a:prstGeom prst="line">
+      <p:pic>
+        <p:nvPicPr>
+          <p:cNvPr id="18" name="Picture 17" descr="h-bridge-forward-current.png"/>
+          <p:cNvPicPr>
+            <a:picLocks noChangeAspect="1"/>
+          </p:cNvPicPr>
+          <p:nvPr/>
+        </p:nvPicPr>
+        <p:blipFill>
+          <a:blip r:embed="rId3"/>
+          <a:stretch>
+            <a:fillRect/>
+          </a:stretch>
+        </p:blipFill>
+        <p:spPr>
+          <a:xfrm>
+            <a:off x="2944904" y="3474720"/>
+            <a:ext cx="6301886" cy="2148840"/>
+          </a:xfrm>
+          <a:prstGeom prst="rect">
             <a:avLst/>
           </a:prstGeom>
-          <a:ln w="25400">
-            <a:solidFill>
-              <a:srgbClr val="1F3A5F"/>
-            </a:solidFill>
-          </a:ln>
-        </p:spPr>
-        <p:style>
-          <a:lnRef idx="2">
-            <a:schemeClr val="accent1"/>
-          </a:lnRef>
-          <a:fillRef idx="0">
-            <a:schemeClr val="accent1"/>
-          </a:fillRef>
-          <a:effectRef idx="1">
-            <a:schemeClr val="accent1"/>
-          </a:effectRef>
-          <a:fontRef idx="minor">
-            <a:schemeClr val="tx1"/>
-          </a:fontRef>
-        </p:style>
-      </p:cxnSp>
-      <p:cxnSp>
-        <p:nvCxnSpPr>
-          <p:cNvPr id="19" name="Connector 18"/>
-          <p:cNvCxnSpPr/>
-          <p:nvPr/>
-        </p:nvCxnSpPr>
-        <p:spPr>
-          <a:xfrm>
-            <a:off x="3611880" y="5394960"/>
-            <a:ext cx="5852160" cy="0"/>
-          </a:xfrm>
-          <a:prstGeom prst="line">
-            <a:avLst/>
-          </a:prstGeom>
-          <a:ln w="25400">
-            <a:solidFill>
-              <a:srgbClr val="1F3A5F"/>
-            </a:solidFill>
-          </a:ln>
-        </p:spPr>
-        <p:style>
-          <a:lnRef idx="2">
-            <a:schemeClr val="accent1"/>
-          </a:lnRef>
-          <a:fillRef idx="0">
-            <a:schemeClr val="accent1"/>
-          </a:fillRef>
-          <a:effectRef idx="1">
-            <a:schemeClr val="accent1"/>
-          </a:effectRef>
-          <a:fontRef idx="minor">
-            <a:schemeClr val="tx1"/>
-          </a:fontRef>
-        </p:style>
-      </p:cxnSp>
-      <p:cxnSp>
-        <p:nvCxnSpPr>
-          <p:cNvPr id="20" name="Connector 19"/>
-          <p:cNvCxnSpPr/>
-          <p:nvPr/>
-        </p:nvCxnSpPr>
-        <p:spPr>
-          <a:xfrm>
-            <a:off x="3611880" y="3657600"/>
-            <a:ext cx="0" cy="1737360"/>
-          </a:xfrm>
-          <a:prstGeom prst="line">
-            <a:avLst/>
-          </a:prstGeom>
-          <a:ln w="25400">
-            <a:solidFill>
-              <a:srgbClr val="1F3A5F"/>
-            </a:solidFill>
-          </a:ln>
-        </p:spPr>
-        <p:style>
-          <a:lnRef idx="2">
-            <a:schemeClr val="accent1"/>
-          </a:lnRef>
-          <a:fillRef idx="0">
-            <a:schemeClr val="accent1"/>
-          </a:fillRef>
-          <a:effectRef idx="1">
-            <a:schemeClr val="accent1"/>
-          </a:effectRef>
-          <a:fontRef idx="minor">
-            <a:schemeClr val="tx1"/>
-          </a:fontRef>
-        </p:style>
-      </p:cxnSp>
-      <p:cxnSp>
-        <p:nvCxnSpPr>
-          <p:cNvPr id="21" name="Connector 20"/>
-          <p:cNvCxnSpPr/>
-          <p:nvPr/>
-        </p:nvCxnSpPr>
-        <p:spPr>
-          <a:xfrm>
-            <a:off x="9464040" y="3657600"/>
-            <a:ext cx="0" cy="1737360"/>
-          </a:xfrm>
-          <a:prstGeom prst="line">
-            <a:avLst/>
-          </a:prstGeom>
-          <a:ln w="25400">
-            <a:solidFill>
-              <a:srgbClr val="1F3A5F"/>
-            </a:solidFill>
-          </a:ln>
-        </p:spPr>
-        <p:style>
-          <a:lnRef idx="2">
-            <a:schemeClr val="accent1"/>
-          </a:lnRef>
-          <a:fillRef idx="0">
-            <a:schemeClr val="accent1"/>
-          </a:fillRef>
-          <a:effectRef idx="1">
-            <a:schemeClr val="accent1"/>
-          </a:effectRef>
-          <a:fontRef idx="minor">
-            <a:schemeClr val="tx1"/>
-          </a:fontRef>
-        </p:style>
-      </p:cxnSp>
-      <p:cxnSp>
-        <p:nvCxnSpPr>
-          <p:cNvPr id="22" name="Connector 21"/>
-          <p:cNvCxnSpPr/>
-          <p:nvPr/>
-        </p:nvCxnSpPr>
-        <p:spPr>
-          <a:xfrm>
-            <a:off x="4178808" y="4526280"/>
-            <a:ext cx="1627632" cy="0"/>
-          </a:xfrm>
-          <a:prstGeom prst="line">
-            <a:avLst/>
-          </a:prstGeom>
-          <a:ln w="25400">
-            <a:solidFill>
-              <a:srgbClr val="1F3A5F"/>
-            </a:solidFill>
-          </a:ln>
-        </p:spPr>
-        <p:style>
-          <a:lnRef idx="2">
-            <a:schemeClr val="accent1"/>
-          </a:lnRef>
-          <a:fillRef idx="0">
-            <a:schemeClr val="accent1"/>
-          </a:fillRef>
-          <a:effectRef idx="1">
-            <a:schemeClr val="accent1"/>
-          </a:effectRef>
-          <a:fontRef idx="minor">
-            <a:schemeClr val="tx1"/>
-          </a:fontRef>
-        </p:style>
-      </p:cxnSp>
-      <p:cxnSp>
-        <p:nvCxnSpPr>
-          <p:cNvPr id="23" name="Connector 22"/>
-          <p:cNvCxnSpPr/>
-          <p:nvPr/>
-        </p:nvCxnSpPr>
-        <p:spPr>
-          <a:xfrm>
-            <a:off x="7269480" y="4526280"/>
-            <a:ext cx="1627632" cy="0"/>
-          </a:xfrm>
-          <a:prstGeom prst="line">
-            <a:avLst/>
-          </a:prstGeom>
-          <a:ln w="25400">
-            <a:solidFill>
-              <a:srgbClr val="1F3A5F"/>
-            </a:solidFill>
-          </a:ln>
-        </p:spPr>
-        <p:style>
-          <a:lnRef idx="2">
-            <a:schemeClr val="accent1"/>
-          </a:lnRef>
-          <a:fillRef idx="0">
-            <a:schemeClr val="accent1"/>
-          </a:fillRef>
-          <a:effectRef idx="1">
-            <a:schemeClr val="accent1"/>
-          </a:effectRef>
-          <a:fontRef idx="minor">
-            <a:schemeClr val="tx1"/>
-          </a:fontRef>
-        </p:style>
-      </p:cxnSp>
-      <p:cxnSp>
-        <p:nvCxnSpPr>
-          <p:cNvPr id="24" name="Connector 23"/>
-          <p:cNvCxnSpPr/>
-          <p:nvPr/>
-        </p:nvCxnSpPr>
-        <p:spPr>
-          <a:xfrm flipV="1">
-            <a:off x="3611880" y="4251960"/>
-            <a:ext cx="566928" cy="274320"/>
-          </a:xfrm>
-          <a:prstGeom prst="line">
-            <a:avLst/>
-          </a:prstGeom>
-          <a:ln w="28575">
-            <a:solidFill>
-              <a:srgbClr val="0E7C86"/>
-            </a:solidFill>
-          </a:ln>
-        </p:spPr>
-        <p:style>
-          <a:lnRef idx="2">
-            <a:schemeClr val="accent1"/>
-          </a:lnRef>
-          <a:fillRef idx="0">
-            <a:schemeClr val="accent1"/>
-          </a:fillRef>
-          <a:effectRef idx="1">
-            <a:schemeClr val="accent1"/>
-          </a:effectRef>
-          <a:fontRef idx="minor">
-            <a:schemeClr val="tx1"/>
-          </a:fontRef>
-        </p:style>
-      </p:cxnSp>
-      <p:sp>
-        <p:nvSpPr>
-          <p:cNvPr id="25" name="Oval 24"/>
-          <p:cNvSpPr/>
-          <p:nvPr/>
-        </p:nvSpPr>
-        <p:spPr>
-          <a:xfrm>
-            <a:off x="3547872" y="4462272"/>
-            <a:ext cx="128016" cy="128016"/>
-          </a:xfrm>
-          <a:prstGeom prst="ellipse">
-            <a:avLst/>
-          </a:prstGeom>
-          <a:solidFill>
-            <a:srgbClr val="0E7C86"/>
-          </a:solidFill>
-          <a:ln w="9525">
-            <a:solidFill>
-              <a:srgbClr val="0E7C86"/>
-            </a:solidFill>
-          </a:ln>
-          <a:effectLst/>
-        </p:spPr>
-        <p:style>
-          <a:lnRef idx="1">
-            <a:schemeClr val="accent1"/>
-          </a:lnRef>
-          <a:fillRef idx="3">
-            <a:schemeClr val="accent1"/>
-          </a:fillRef>
-          <a:effectRef idx="2">
-            <a:schemeClr val="accent1"/>
-          </a:effectRef>
-          <a:fontRef idx="minor">
-            <a:schemeClr val="lt1"/>
-          </a:fontRef>
-        </p:style>
-        <p:txBody>
-          <a:bodyPr rtlCol="0" anchor="ctr" wrap="square" lIns="45720" rIns="45720" tIns="18288" bIns="18288"/>
-          <a:lstStyle/>
-          <a:p>
-            <a:pPr algn="ctr">
-              <a:lnSpc>
-                <a:spcPct val="100000"/>
-              </a:lnSpc>
-              <a:spcAft>
-                <a:spcPts val="0"/>
-              </a:spcAft>
-              <a:defRPr sz="900" b="0">
-                <a:solidFill>
-                  <a:srgbClr val="222222"/>
-                </a:solidFill>
-                <a:latin typeface="Calibri"/>
-              </a:defRPr>
-            </a:pPr>
-          </a:p>
-        </p:txBody>
-      </p:sp>
-      <p:cxnSp>
-        <p:nvCxnSpPr>
-          <p:cNvPr id="26" name="Connector 25"/>
-          <p:cNvCxnSpPr/>
-          <p:nvPr/>
-        </p:nvCxnSpPr>
-        <p:spPr>
-          <a:xfrm flipH="1" flipV="1">
-            <a:off x="8897112" y="4251960"/>
-            <a:ext cx="566928" cy="274320"/>
-          </a:xfrm>
-          <a:prstGeom prst="line">
-            <a:avLst/>
-          </a:prstGeom>
-          <a:ln w="28575">
-            <a:solidFill>
-              <a:srgbClr val="0E7C86"/>
-            </a:solidFill>
-          </a:ln>
-        </p:spPr>
-        <p:style>
-          <a:lnRef idx="2">
-            <a:schemeClr val="accent1"/>
-          </a:lnRef>
-          <a:fillRef idx="0">
-            <a:schemeClr val="accent1"/>
-          </a:fillRef>
-          <a:effectRef idx="1">
-            <a:schemeClr val="accent1"/>
-          </a:effectRef>
-          <a:fontRef idx="minor">
-            <a:schemeClr val="tx1"/>
-          </a:fontRef>
-        </p:style>
-      </p:cxnSp>
-      <p:sp>
-        <p:nvSpPr>
-          <p:cNvPr id="27" name="Oval 26"/>
-          <p:cNvSpPr/>
-          <p:nvPr/>
-        </p:nvSpPr>
-        <p:spPr>
-          <a:xfrm>
-            <a:off x="9400032" y="4462272"/>
-            <a:ext cx="128016" cy="128016"/>
-          </a:xfrm>
-          <a:prstGeom prst="ellipse">
-            <a:avLst/>
-          </a:prstGeom>
-          <a:solidFill>
-            <a:srgbClr val="0E7C86"/>
-          </a:solidFill>
-          <a:ln w="9525">
-            <a:solidFill>
-              <a:srgbClr val="0E7C86"/>
-            </a:solidFill>
-          </a:ln>
-          <a:effectLst/>
-        </p:spPr>
-        <p:style>
-          <a:lnRef idx="1">
-            <a:schemeClr val="accent1"/>
-          </a:lnRef>
-          <a:fillRef idx="3">
-            <a:schemeClr val="accent1"/>
-          </a:fillRef>
-          <a:effectRef idx="2">
-            <a:schemeClr val="accent1"/>
-          </a:effectRef>
-          <a:fontRef idx="minor">
-            <a:schemeClr val="lt1"/>
-          </a:fontRef>
-        </p:style>
-        <p:txBody>
-          <a:bodyPr rtlCol="0" anchor="ctr" wrap="square" lIns="45720" rIns="45720" tIns="18288" bIns="18288"/>
-          <a:lstStyle/>
-          <a:p>
-            <a:pPr algn="ctr">
-              <a:lnSpc>
-                <a:spcPct val="100000"/>
-              </a:lnSpc>
-              <a:spcAft>
-                <a:spcPts val="0"/>
-              </a:spcAft>
-              <a:defRPr sz="900" b="0">
-                <a:solidFill>
-                  <a:srgbClr val="222222"/>
-                </a:solidFill>
-                <a:latin typeface="Calibri"/>
-              </a:defRPr>
-            </a:pPr>
-          </a:p>
-        </p:txBody>
-      </p:sp>
-      <p:sp>
-        <p:nvSpPr>
-          <p:cNvPr id="28" name="Oval 27"/>
-          <p:cNvSpPr/>
-          <p:nvPr/>
-        </p:nvSpPr>
-        <p:spPr>
-          <a:xfrm>
-            <a:off x="5806440" y="4206240"/>
-            <a:ext cx="1463040" cy="640080"/>
-          </a:xfrm>
-          <a:prstGeom prst="ellipse">
-            <a:avLst/>
-          </a:prstGeom>
-          <a:solidFill>
-            <a:srgbClr val="FFFFFF"/>
-          </a:solidFill>
-          <a:ln w="15875">
-            <a:solidFill>
-              <a:srgbClr val="1F3A5F"/>
-            </a:solidFill>
-          </a:ln>
-          <a:effectLst/>
-        </p:spPr>
-        <p:style>
-          <a:lnRef idx="1">
-            <a:schemeClr val="accent1"/>
-          </a:lnRef>
-          <a:fillRef idx="3">
-            <a:schemeClr val="accent1"/>
-          </a:fillRef>
-          <a:effectRef idx="2">
-            <a:schemeClr val="accent1"/>
-          </a:effectRef>
-          <a:fontRef idx="minor">
-            <a:schemeClr val="lt1"/>
-          </a:fontRef>
-        </p:style>
-        <p:txBody>
-          <a:bodyPr rtlCol="0" anchor="ctr" wrap="square" lIns="45720" rIns="45720" tIns="18288" bIns="18288"/>
-          <a:lstStyle/>
-          <a:p>
-            <a:pPr algn="ctr">
-              <a:lnSpc>
-                <a:spcPct val="100000"/>
-              </a:lnSpc>
-              <a:spcAft>
-                <a:spcPts val="0"/>
-              </a:spcAft>
-              <a:defRPr sz="1800" b="1">
-                <a:solidFill>
-                  <a:srgbClr val="222222"/>
-                </a:solidFill>
-                <a:latin typeface="Calibri"/>
-              </a:defRPr>
-            </a:pPr>
-            <a:r>
-              <a:rPr sz="1800" b="1">
-                <a:solidFill>
-                  <a:srgbClr val="222222"/>
-                </a:solidFill>
-                <a:latin typeface="Calibri"/>
-              </a:rPr>
-              <a:t>MOTOR</a:t>
-            </a:r>
-          </a:p>
-        </p:txBody>
-      </p:sp>
-      <p:cxnSp>
-        <p:nvCxnSpPr>
-          <p:cNvPr id="29" name="Connector 28"/>
-          <p:cNvCxnSpPr/>
-          <p:nvPr/>
-        </p:nvCxnSpPr>
-        <p:spPr>
-          <a:xfrm flipH="1">
-            <a:off x="4800600" y="3657600"/>
-            <a:ext cx="1463040" cy="0"/>
-          </a:xfrm>
-          <a:prstGeom prst="line">
-            <a:avLst/>
-          </a:prstGeom>
-          <a:ln w="19050">
-            <a:solidFill>
-              <a:srgbClr val="0E7C86"/>
-            </a:solidFill>
-            <a:headEnd/>
-            <a:tailEnd type="triangle" w="med" len="med"/>
-          </a:ln>
-        </p:spPr>
-        <p:style>
-          <a:lnRef idx="2">
-            <a:schemeClr val="accent1"/>
-          </a:lnRef>
-          <a:fillRef idx="0">
-            <a:schemeClr val="accent1"/>
-          </a:fillRef>
-          <a:effectRef idx="1">
-            <a:schemeClr val="accent1"/>
-          </a:effectRef>
-          <a:fontRef idx="minor">
-            <a:schemeClr val="tx1"/>
-          </a:fontRef>
-        </p:style>
-      </p:cxnSp>
-      <p:cxnSp>
-        <p:nvCxnSpPr>
-          <p:cNvPr id="30" name="Connector 29"/>
-          <p:cNvCxnSpPr/>
-          <p:nvPr/>
-        </p:nvCxnSpPr>
-        <p:spPr>
-          <a:xfrm flipH="1">
-            <a:off x="6995160" y="5394960"/>
-            <a:ext cx="1280160" cy="0"/>
-          </a:xfrm>
-          <a:prstGeom prst="line">
-            <a:avLst/>
-          </a:prstGeom>
-          <a:ln w="19050">
-            <a:solidFill>
-              <a:srgbClr val="0E7C86"/>
-            </a:solidFill>
-            <a:headEnd/>
-            <a:tailEnd type="triangle" w="med" len="med"/>
-          </a:ln>
-        </p:spPr>
-        <p:style>
-          <a:lnRef idx="2">
-            <a:schemeClr val="accent1"/>
-          </a:lnRef>
-          <a:fillRef idx="0">
-            <a:schemeClr val="accent1"/>
-          </a:fillRef>
-          <a:effectRef idx="1">
-            <a:schemeClr val="accent1"/>
-          </a:effectRef>
-          <a:fontRef idx="minor">
-            <a:schemeClr val="tx1"/>
-          </a:fontRef>
-        </p:style>
-      </p:cxnSp>
-      <p:cxnSp>
-        <p:nvCxnSpPr>
-          <p:cNvPr id="31" name="Connector 30"/>
-          <p:cNvCxnSpPr/>
-          <p:nvPr/>
-        </p:nvCxnSpPr>
-        <p:spPr>
-          <a:xfrm>
-            <a:off x="4846320" y="4233672"/>
-            <a:ext cx="822960" cy="0"/>
-          </a:xfrm>
-          <a:prstGeom prst="line">
-            <a:avLst/>
-          </a:prstGeom>
-          <a:ln w="19050">
-            <a:solidFill>
-              <a:srgbClr val="0E7C86"/>
-            </a:solidFill>
-            <a:headEnd/>
-            <a:tailEnd type="triangle" w="med" len="med"/>
-          </a:ln>
-        </p:spPr>
-        <p:style>
-          <a:lnRef idx="2">
-            <a:schemeClr val="accent1"/>
-          </a:lnRef>
-          <a:fillRef idx="0">
-            <a:schemeClr val="accent1"/>
-          </a:fillRef>
-          <a:effectRef idx="1">
-            <a:schemeClr val="accent1"/>
-          </a:effectRef>
-          <a:fontRef idx="minor">
-            <a:schemeClr val="tx1"/>
-          </a:fontRef>
-        </p:style>
-      </p:cxnSp>
-      <p:sp>
-        <p:nvSpPr>
-          <p:cNvPr id="32" name="TextBox 31"/>
+        </p:spPr>
+      </p:pic>
+      <p:sp>
+        <p:nvSpPr>
+          <p:cNvPr id="19" name="TextBox 18"/>
           <p:cNvSpPr txBox="1"/>
           <p:nvPr/>
         </p:nvSpPr>
         <p:spPr>
           <a:xfrm>
-            <a:off x="4663440" y="3739896"/>
-            <a:ext cx="2194560" cy="367792"/>
+            <a:off x="502920" y="5687568"/>
+            <a:ext cx="11185855" cy="646684"/>
           </a:xfrm>
           <a:prstGeom prst="rect">
             <a:avLst/>
@@ -37810,171 +37273,7 @@
               <a:spcAft>
                 <a:spcPts val="0"/>
               </a:spcAft>
-              <a:defRPr sz="1800" b="1">
-                <a:solidFill>
-                  <a:srgbClr val="0E7C86"/>
-                </a:solidFill>
-                <a:latin typeface="Calibri"/>
-              </a:defRPr>
-            </a:pPr>
-            <a:r>
-              <a:rPr sz="1800" b="1">
-                <a:solidFill>
-                  <a:srgbClr val="0E7C86"/>
-                </a:solidFill>
-                <a:latin typeface="Calibri"/>
-              </a:rPr>
-              <a:t>Forward   CW</a:t>
-            </a:r>
-          </a:p>
-        </p:txBody>
-      </p:sp>
-      <p:sp>
-        <p:nvSpPr>
-          <p:cNvPr id="33" name="TextBox 32"/>
-          <p:cNvSpPr txBox="1"/>
-          <p:nvPr/>
-        </p:nvSpPr>
-        <p:spPr>
-          <a:xfrm>
-            <a:off x="2496312" y="4069080"/>
-            <a:ext cx="914400" cy="646684"/>
-          </a:xfrm>
-          <a:prstGeom prst="rect">
-            <a:avLst/>
-          </a:prstGeom>
-          <a:noFill/>
-        </p:spPr>
-        <p:txBody>
-          <a:bodyPr wrap="square" lIns="0" tIns="0" rIns="0" bIns="0">
-            <a:spAutoFit/>
-          </a:bodyPr>
-          <a:lstStyle/>
-          <a:p>
-            <a:pPr algn="r">
-              <a:lnSpc>
-                <a:spcPct val="100000"/>
-              </a:lnSpc>
-              <a:spcAft>
-                <a:spcPts val="0"/>
-              </a:spcAft>
-              <a:defRPr sz="1800" b="1">
-                <a:solidFill>
-                  <a:srgbClr val="0E7C86"/>
-                </a:solidFill>
-                <a:latin typeface="Calibri"/>
-              </a:defRPr>
-            </a:pPr>
-            <a:r>
-              <a:rPr sz="1800" b="1">
-                <a:solidFill>
-                  <a:srgbClr val="0E7C86"/>
-                </a:solidFill>
-                <a:latin typeface="Calibri"/>
-              </a:rPr>
-              <a:t>IN1</a:t>
-            </a:r>
-            <a:br/>
-            <a:r>
-              <a:rPr sz="1800" b="1">
-                <a:solidFill>
-                  <a:srgbClr val="0E7C86"/>
-                </a:solidFill>
-                <a:latin typeface="Calibri"/>
-              </a:rPr>
-              <a:t>(pin A)</a:t>
-            </a:r>
-          </a:p>
-        </p:txBody>
-      </p:sp>
-      <p:sp>
-        <p:nvSpPr>
-          <p:cNvPr id="34" name="TextBox 33"/>
-          <p:cNvSpPr txBox="1"/>
-          <p:nvPr/>
-        </p:nvSpPr>
-        <p:spPr>
-          <a:xfrm>
-            <a:off x="9665208" y="4069080"/>
-            <a:ext cx="1005840" cy="646684"/>
-          </a:xfrm>
-          <a:prstGeom prst="rect">
-            <a:avLst/>
-          </a:prstGeom>
-          <a:noFill/>
-        </p:spPr>
-        <p:txBody>
-          <a:bodyPr wrap="square" lIns="0" tIns="0" rIns="0" bIns="0">
-            <a:spAutoFit/>
-          </a:bodyPr>
-          <a:lstStyle/>
-          <a:p>
-            <a:pPr algn="l">
-              <a:lnSpc>
-                <a:spcPct val="100000"/>
-              </a:lnSpc>
-              <a:spcAft>
-                <a:spcPts val="0"/>
-              </a:spcAft>
-              <a:defRPr sz="1800" b="1">
-                <a:solidFill>
-                  <a:srgbClr val="0E7C86"/>
-                </a:solidFill>
-                <a:latin typeface="Calibri"/>
-              </a:defRPr>
-            </a:pPr>
-            <a:r>
-              <a:rPr sz="1800" b="1">
-                <a:solidFill>
-                  <a:srgbClr val="0E7C86"/>
-                </a:solidFill>
-                <a:latin typeface="Calibri"/>
-              </a:rPr>
-              <a:t>IN2</a:t>
-            </a:r>
-            <a:br/>
-            <a:r>
-              <a:rPr sz="1800" b="1">
-                <a:solidFill>
-                  <a:srgbClr val="0E7C86"/>
-                </a:solidFill>
-                <a:latin typeface="Calibri"/>
-              </a:rPr>
-              <a:t>(pin B)</a:t>
-            </a:r>
-          </a:p>
-        </p:txBody>
-      </p:sp>
-      <p:sp>
-        <p:nvSpPr>
-          <p:cNvPr id="35" name="TextBox 34"/>
-          <p:cNvSpPr txBox="1"/>
-          <p:nvPr/>
-        </p:nvSpPr>
-        <p:spPr>
-          <a:xfrm>
-            <a:off x="5989320" y="3328416"/>
-            <a:ext cx="1280160" cy="367792"/>
-          </a:xfrm>
-          <a:prstGeom prst="rect">
-            <a:avLst/>
-          </a:prstGeom>
-          <a:noFill/>
-        </p:spPr>
-        <p:txBody>
-          <a:bodyPr wrap="square" lIns="0" tIns="0" rIns="0" bIns="0">
-            <a:spAutoFit/>
-          </a:bodyPr>
-          <a:lstStyle/>
-          <a:p>
-            <a:pPr algn="ctr">
-              <a:lnSpc>
-                <a:spcPct val="100000"/>
-              </a:lnSpc>
-              <a:spcAft>
-                <a:spcPts val="0"/>
-              </a:spcAft>
-              <a:defRPr sz="1800" b="1">
+              <a:defRPr sz="1800" b="0">
                 <a:solidFill>
                   <a:srgbClr val="666666"/>
                 </a:solidFill>
@@ -37982,109 +37281,13 @@
               </a:defRPr>
             </a:pPr>
             <a:r>
-              <a:rPr sz="1800" b="1">
+              <a:rPr sz="1800" b="0">
                 <a:solidFill>
                   <a:srgbClr val="666666"/>
                 </a:solidFill>
                 <a:latin typeface="Calibri"/>
               </a:rPr>
-              <a:t>+ V</a:t>
-            </a:r>
-          </a:p>
-        </p:txBody>
-      </p:sp>
-      <p:sp>
-        <p:nvSpPr>
-          <p:cNvPr id="36" name="TextBox 35"/>
-          <p:cNvSpPr txBox="1"/>
-          <p:nvPr/>
-        </p:nvSpPr>
-        <p:spPr>
-          <a:xfrm>
-            <a:off x="5989320" y="5449824"/>
-            <a:ext cx="1280160" cy="367792"/>
-          </a:xfrm>
-          <a:prstGeom prst="rect">
-            <a:avLst/>
-          </a:prstGeom>
-          <a:noFill/>
-        </p:spPr>
-        <p:txBody>
-          <a:bodyPr wrap="square" lIns="0" tIns="0" rIns="0" bIns="0">
-            <a:spAutoFit/>
-          </a:bodyPr>
-          <a:lstStyle/>
-          <a:p>
-            <a:pPr algn="ctr">
-              <a:lnSpc>
-                <a:spcPct val="100000"/>
-              </a:lnSpc>
-              <a:spcAft>
-                <a:spcPts val="0"/>
-              </a:spcAft>
-              <a:defRPr sz="1800" b="1">
-                <a:solidFill>
-                  <a:srgbClr val="666666"/>
-                </a:solidFill>
-                <a:latin typeface="Calibri"/>
-              </a:defRPr>
-            </a:pPr>
-            <a:r>
-              <a:rPr sz="1800" b="1">
-                <a:solidFill>
-                  <a:srgbClr val="666666"/>
-                </a:solidFill>
-                <a:latin typeface="Calibri"/>
-              </a:rPr>
-              <a:t>GND</a:t>
-            </a:r>
-          </a:p>
-        </p:txBody>
-      </p:sp>
-      <p:sp>
-        <p:nvSpPr>
-          <p:cNvPr id="37" name="TextBox 36"/>
-          <p:cNvSpPr txBox="1"/>
-          <p:nvPr/>
-        </p:nvSpPr>
-        <p:spPr>
-          <a:xfrm>
-            <a:off x="502920" y="5815584"/>
-            <a:ext cx="11185855" cy="646684"/>
-          </a:xfrm>
-          <a:prstGeom prst="rect">
-            <a:avLst/>
-          </a:prstGeom>
-          <a:noFill/>
-        </p:spPr>
-        <p:txBody>
-          <a:bodyPr wrap="square" lIns="0" tIns="0" rIns="0" bIns="0">
-            <a:spAutoFit/>
-          </a:bodyPr>
-          <a:lstStyle/>
-          <a:p>
-            <a:pPr algn="ctr">
-              <a:lnSpc>
-                <a:spcPct val="100000"/>
-              </a:lnSpc>
-              <a:spcAft>
-                <a:spcPts val="0"/>
-              </a:spcAft>
-              <a:defRPr sz="1800" b="0">
-                <a:solidFill>
-                  <a:srgbClr val="666666"/>
-                </a:solidFill>
-                <a:latin typeface="Calibri"/>
-              </a:defRPr>
-            </a:pPr>
-            <a:r>
-              <a:rPr sz="1800" b="0">
-                <a:solidFill>
-                  <a:srgbClr val="666666"/>
-                </a:solidFill>
-                <a:latin typeface="Calibri"/>
-              </a:rPr>
-              <a:t>Drawn in the first state: IN1 closed to + V, IN2 closed to GND. Reverse is the same picture with both switches thrown and the arrows running the other way.</a:t>
+              <a:t>The arrows are the current: in at + V, along the top, down the left, through the motor, back to GND. That is the FORWARD box above. Turn pin B on instead of pin A and it all runs backwards.</a:t>
             </a:r>
           </a:p>
         </p:txBody>
